--- a/docs/hackathon_blueprint_filled.pptx
+++ b/docs/hackathon_blueprint_filled.pptx
@@ -5,15 +5,15 @@
     <p:sldMasterId id="2147483648" r:id="rId1"/>
   </p:sldMasterIdLst>
   <p:notesMasterIdLst>
-    <p:notesMasterId r:id="rId7"/>
+    <p:notesMasterId r:id="rId8"/>
   </p:notesMasterIdLst>
   <p:sldIdLst>
     <p:sldId id="296" r:id="rId2"/>
     <p:sldId id="297" r:id="rId3"/>
     <p:sldId id="301" r:id="rId4"/>
-    <p:sldId id="302" r:id="rId12"/>
-    <p:sldId id="280" r:id="rId5"/>
-    <p:sldId id="282" r:id="rId6"/>
+    <p:sldId id="302" r:id="rId5"/>
+    <p:sldId id="280" r:id="rId6"/>
+    <p:sldId id="282" r:id="rId7"/>
   </p:sldIdLst>
   <p:sldSz cx="9144000" cy="5143500" type="screen16x9"/>
   <p:notesSz cx="5143500" cy="9144000"/>
@@ -559,7 +559,7 @@
           <a:p>
             <a:fld id="{F7021451-1387-4CA6-816F-3879F97B5CBC}" type="slidenum">
               <a:rPr lang="en-US"/>
-              <a:t>4</a:t>
+              <a:t>5</a:t>
             </a:fld>
             <a:endParaRPr lang="en-US"/>
           </a:p>
@@ -643,7 +643,7 @@
           <a:p>
             <a:fld id="{F7021451-1387-4CA6-816F-3879F97B5CBC}" type="slidenum">
               <a:rPr lang="en-US"/>
-              <a:t>5</a:t>
+              <a:t>6</a:t>
             </a:fld>
             <a:endParaRPr lang="en-US"/>
           </a:p>
@@ -5053,6 +5053,3185 @@
 
 <file path=ppt/slides/slide4.xml><?xml version="1.0" encoding="utf-8"?>
 <p:sld xmlns:a="http://schemas.openxmlformats.org/drawingml/2006/main" xmlns:r="http://schemas.openxmlformats.org/officeDocument/2006/relationships" xmlns:p="http://schemas.openxmlformats.org/presentationml/2006/main">
+  <p:cSld>
+    <p:spTree>
+      <p:nvGrpSpPr>
+        <p:cNvPr id="1" name=""/>
+        <p:cNvGrpSpPr/>
+        <p:nvPr/>
+      </p:nvGrpSpPr>
+      <p:grpSpPr>
+        <a:xfrm>
+          <a:off x="0" y="0"/>
+          <a:ext cx="0" cy="0"/>
+          <a:chOff x="0" y="0"/>
+          <a:chExt cx="0" cy="0"/>
+        </a:xfrm>
+      </p:grpSpPr>
+      <p:sp>
+        <p:nvSpPr>
+          <p:cNvPr id="2" name="TextBox 1"/>
+          <p:cNvSpPr txBox="1"/>
+          <p:nvPr/>
+        </p:nvSpPr>
+        <p:spPr>
+          <a:xfrm>
+            <a:off x="182880" y="45720"/>
+            <a:ext cx="8778240" cy="320040"/>
+          </a:xfrm>
+          <a:prstGeom prst="rect">
+            <a:avLst/>
+          </a:prstGeom>
+          <a:noFill/>
+        </p:spPr>
+        <p:txBody>
+          <a:bodyPr wrap="square" lIns="0" tIns="0" rIns="0" bIns="0">
+            <a:spAutoFit/>
+          </a:bodyPr>
+          <a:lstStyle/>
+          <a:p>
+            <a:pPr algn="l"/>
+            <a:r>
+              <a:rPr sz="1600" b="1">
+                <a:solidFill>
+                  <a:srgbClr val="0A2540"/>
+                </a:solidFill>
+                <a:latin typeface="Segoe UI"/>
+              </a:rPr>
+              <a:t>Architecture Flow — top-to-bottom</a:t>
+            </a:r>
+          </a:p>
+        </p:txBody>
+      </p:sp>
+      <p:sp>
+        <p:nvSpPr>
+          <p:cNvPr id="3" name="TextBox 2"/>
+          <p:cNvSpPr txBox="1"/>
+          <p:nvPr/>
+        </p:nvSpPr>
+        <p:spPr>
+          <a:xfrm>
+            <a:off x="182880" y="292608"/>
+            <a:ext cx="8778240" cy="164592"/>
+          </a:xfrm>
+          <a:prstGeom prst="rect">
+            <a:avLst/>
+          </a:prstGeom>
+          <a:noFill/>
+        </p:spPr>
+        <p:txBody>
+          <a:bodyPr wrap="square" lIns="0" tIns="0" rIns="0" bIns="0">
+            <a:spAutoFit/>
+          </a:bodyPr>
+          <a:lstStyle/>
+          <a:p>
+            <a:pPr algn="l"/>
+            <a:r>
+              <a:rPr sz="800" b="0">
+                <a:solidFill>
+                  <a:srgbClr val="5A6680"/>
+                </a:solidFill>
+                <a:latin typeface="Segoe UI"/>
+              </a:rPr>
+              <a:t>Customer → 5 channels → Copilot Studio → Power Automate → 4 parallel agents → audit → tier routing → notify</a:t>
+            </a:r>
+          </a:p>
+        </p:txBody>
+      </p:sp>
+      <p:sp>
+        <p:nvSpPr>
+          <p:cNvPr id="4" name="Rounded Rectangle 3"/>
+          <p:cNvSpPr/>
+          <p:nvPr/>
+        </p:nvSpPr>
+        <p:spPr>
+          <a:xfrm>
+            <a:off x="3291840" y="502920"/>
+            <a:ext cx="1097280" cy="310896"/>
+          </a:xfrm>
+          <a:prstGeom prst="roundRect">
+            <a:avLst/>
+          </a:prstGeom>
+          <a:solidFill>
+            <a:srgbClr val="DBEAFE"/>
+          </a:solidFill>
+          <a:ln w="15875">
+            <a:solidFill>
+              <a:srgbClr val="0A2540"/>
+            </a:solidFill>
+          </a:ln>
+          <a:effectLst/>
+        </p:spPr>
+        <p:style>
+          <a:lnRef idx="1">
+            <a:schemeClr val="accent1"/>
+          </a:lnRef>
+          <a:fillRef idx="3">
+            <a:schemeClr val="accent1"/>
+          </a:fillRef>
+          <a:effectRef idx="2">
+            <a:schemeClr val="accent1"/>
+          </a:effectRef>
+          <a:fontRef idx="minor">
+            <a:schemeClr val="lt1"/>
+          </a:fontRef>
+        </p:style>
+        <p:txBody>
+          <a:bodyPr wrap="square" lIns="36000" tIns="18000" rIns="36000" bIns="18000" rtlCol="0" anchor="ctr"/>
+          <a:lstStyle/>
+          <a:p>
+            <a:pPr algn="ctr"/>
+            <a:r>
+              <a:rPr sz="900" b="1">
+                <a:solidFill>
+                  <a:srgbClr val="0A2540"/>
+                </a:solidFill>
+                <a:latin typeface="Segoe UI"/>
+              </a:rPr>
+              <a:t>Customer</a:t>
+            </a:r>
+          </a:p>
+        </p:txBody>
+      </p:sp>
+      <p:sp>
+        <p:nvSpPr>
+          <p:cNvPr id="5" name="Rounded Rectangle 4"/>
+          <p:cNvSpPr/>
+          <p:nvPr/>
+        </p:nvSpPr>
+        <p:spPr>
+          <a:xfrm>
+            <a:off x="420624" y="868680"/>
+            <a:ext cx="1280160" cy="310896"/>
+          </a:xfrm>
+          <a:prstGeom prst="roundRect">
+            <a:avLst/>
+          </a:prstGeom>
+          <a:solidFill>
+            <a:srgbClr val="DBEAFE"/>
+          </a:solidFill>
+          <a:ln w="15875">
+            <a:solidFill>
+              <a:srgbClr val="0078D4"/>
+            </a:solidFill>
+          </a:ln>
+          <a:effectLst/>
+        </p:spPr>
+        <p:style>
+          <a:lnRef idx="1">
+            <a:schemeClr val="accent1"/>
+          </a:lnRef>
+          <a:fillRef idx="3">
+            <a:schemeClr val="accent1"/>
+          </a:fillRef>
+          <a:effectRef idx="2">
+            <a:schemeClr val="accent1"/>
+          </a:effectRef>
+          <a:fontRef idx="minor">
+            <a:schemeClr val="lt1"/>
+          </a:fontRef>
+        </p:style>
+        <p:txBody>
+          <a:bodyPr wrap="square" lIns="36000" tIns="18000" rIns="36000" bIns="18000" rtlCol="0" anchor="ctr"/>
+          <a:lstStyle/>
+          <a:p>
+            <a:pPr algn="ctr"/>
+            <a:r>
+              <a:rPr sz="800" b="1">
+                <a:solidFill>
+                  <a:srgbClr val="0078D4"/>
+                </a:solidFill>
+                <a:latin typeface="Segoe UI"/>
+              </a:rPr>
+              <a:t>Mobile App</a:t>
+            </a:r>
+          </a:p>
+        </p:txBody>
+      </p:sp>
+      <p:sp>
+        <p:nvSpPr>
+          <p:cNvPr id="6" name="Rounded Rectangle 5"/>
+          <p:cNvSpPr/>
+          <p:nvPr/>
+        </p:nvSpPr>
+        <p:spPr>
+          <a:xfrm>
+            <a:off x="1810512" y="868680"/>
+            <a:ext cx="1280160" cy="310896"/>
+          </a:xfrm>
+          <a:prstGeom prst="roundRect">
+            <a:avLst/>
+          </a:prstGeom>
+          <a:solidFill>
+            <a:srgbClr val="DBEAFE"/>
+          </a:solidFill>
+          <a:ln w="15875">
+            <a:solidFill>
+              <a:srgbClr val="0078D4"/>
+            </a:solidFill>
+          </a:ln>
+          <a:effectLst/>
+        </p:spPr>
+        <p:style>
+          <a:lnRef idx="1">
+            <a:schemeClr val="accent1"/>
+          </a:lnRef>
+          <a:fillRef idx="3">
+            <a:schemeClr val="accent1"/>
+          </a:fillRef>
+          <a:effectRef idx="2">
+            <a:schemeClr val="accent1"/>
+          </a:effectRef>
+          <a:fontRef idx="minor">
+            <a:schemeClr val="lt1"/>
+          </a:fontRef>
+        </p:style>
+        <p:txBody>
+          <a:bodyPr wrap="square" lIns="36000" tIns="18000" rIns="36000" bIns="18000" rtlCol="0" anchor="ctr"/>
+          <a:lstStyle/>
+          <a:p>
+            <a:pPr algn="ctr"/>
+            <a:r>
+              <a:rPr sz="800" b="1">
+                <a:solidFill>
+                  <a:srgbClr val="0078D4"/>
+                </a:solidFill>
+                <a:latin typeface="Segoe UI"/>
+              </a:rPr>
+              <a:t>Web Chat</a:t>
+            </a:r>
+          </a:p>
+        </p:txBody>
+      </p:sp>
+      <p:sp>
+        <p:nvSpPr>
+          <p:cNvPr id="7" name="Rounded Rectangle 6"/>
+          <p:cNvSpPr/>
+          <p:nvPr/>
+        </p:nvSpPr>
+        <p:spPr>
+          <a:xfrm>
+            <a:off x="3200400" y="868680"/>
+            <a:ext cx="1280160" cy="310896"/>
+          </a:xfrm>
+          <a:prstGeom prst="roundRect">
+            <a:avLst/>
+          </a:prstGeom>
+          <a:solidFill>
+            <a:srgbClr val="EDE4F5"/>
+          </a:solidFill>
+          <a:ln w="15875">
+            <a:solidFill>
+              <a:srgbClr val="5B41A1"/>
+            </a:solidFill>
+          </a:ln>
+          <a:effectLst/>
+        </p:spPr>
+        <p:style>
+          <a:lnRef idx="1">
+            <a:schemeClr val="accent1"/>
+          </a:lnRef>
+          <a:fillRef idx="3">
+            <a:schemeClr val="accent1"/>
+          </a:fillRef>
+          <a:effectRef idx="2">
+            <a:schemeClr val="accent1"/>
+          </a:effectRef>
+          <a:fontRef idx="minor">
+            <a:schemeClr val="lt1"/>
+          </a:fontRef>
+        </p:style>
+        <p:txBody>
+          <a:bodyPr wrap="square" lIns="36000" tIns="18000" rIns="36000" bIns="18000" rtlCol="0" anchor="ctr"/>
+          <a:lstStyle/>
+          <a:p>
+            <a:pPr algn="ctr"/>
+            <a:r>
+              <a:rPr sz="800" b="1">
+                <a:solidFill>
+                  <a:srgbClr val="5B41A1"/>
+                </a:solidFill>
+                <a:latin typeface="Segoe UI"/>
+              </a:rPr>
+              <a:t>Microsoft Teams</a:t>
+            </a:r>
+          </a:p>
+        </p:txBody>
+      </p:sp>
+      <p:sp>
+        <p:nvSpPr>
+          <p:cNvPr id="8" name="Rounded Rectangle 7"/>
+          <p:cNvSpPr/>
+          <p:nvPr/>
+        </p:nvSpPr>
+        <p:spPr>
+          <a:xfrm>
+            <a:off x="4590288" y="868680"/>
+            <a:ext cx="1280160" cy="310896"/>
+          </a:xfrm>
+          <a:prstGeom prst="roundRect">
+            <a:avLst/>
+          </a:prstGeom>
+          <a:solidFill>
+            <a:srgbClr val="DBEAFE"/>
+          </a:solidFill>
+          <a:ln w="15875">
+            <a:solidFill>
+              <a:srgbClr val="0078D4"/>
+            </a:solidFill>
+          </a:ln>
+          <a:effectLst/>
+        </p:spPr>
+        <p:style>
+          <a:lnRef idx="1">
+            <a:schemeClr val="accent1"/>
+          </a:lnRef>
+          <a:fillRef idx="3">
+            <a:schemeClr val="accent1"/>
+          </a:fillRef>
+          <a:effectRef idx="2">
+            <a:schemeClr val="accent1"/>
+          </a:effectRef>
+          <a:fontRef idx="minor">
+            <a:schemeClr val="lt1"/>
+          </a:fontRef>
+        </p:style>
+        <p:txBody>
+          <a:bodyPr wrap="square" lIns="36000" tIns="18000" rIns="36000" bIns="18000" rtlCol="0" anchor="ctr"/>
+          <a:lstStyle/>
+          <a:p>
+            <a:pPr algn="ctr"/>
+            <a:r>
+              <a:rPr sz="800" b="1">
+                <a:solidFill>
+                  <a:srgbClr val="0078D4"/>
+                </a:solidFill>
+                <a:latin typeface="Segoe UI"/>
+              </a:rPr>
+              <a:t>SMS</a:t>
+            </a:r>
+          </a:p>
+        </p:txBody>
+      </p:sp>
+      <p:sp>
+        <p:nvSpPr>
+          <p:cNvPr id="9" name="Rounded Rectangle 8"/>
+          <p:cNvSpPr/>
+          <p:nvPr/>
+        </p:nvSpPr>
+        <p:spPr>
+          <a:xfrm>
+            <a:off x="5980176" y="868680"/>
+            <a:ext cx="1280160" cy="310896"/>
+          </a:xfrm>
+          <a:prstGeom prst="roundRect">
+            <a:avLst/>
+          </a:prstGeom>
+          <a:solidFill>
+            <a:srgbClr val="DCFCE7"/>
+          </a:solidFill>
+          <a:ln w="15875">
+            <a:solidFill>
+              <a:srgbClr val="107C10"/>
+            </a:solidFill>
+          </a:ln>
+          <a:effectLst/>
+        </p:spPr>
+        <p:style>
+          <a:lnRef idx="1">
+            <a:schemeClr val="accent1"/>
+          </a:lnRef>
+          <a:fillRef idx="3">
+            <a:schemeClr val="accent1"/>
+          </a:fillRef>
+          <a:effectRef idx="2">
+            <a:schemeClr val="accent1"/>
+          </a:effectRef>
+          <a:fontRef idx="minor">
+            <a:schemeClr val="lt1"/>
+          </a:fontRef>
+        </p:style>
+        <p:txBody>
+          <a:bodyPr wrap="square" lIns="36000" tIns="18000" rIns="36000" bIns="18000" rtlCol="0" anchor="ctr"/>
+          <a:lstStyle/>
+          <a:p>
+            <a:pPr algn="ctr"/>
+            <a:r>
+              <a:rPr sz="800" b="1">
+                <a:solidFill>
+                  <a:srgbClr val="107C10"/>
+                </a:solidFill>
+                <a:latin typeface="Segoe UI"/>
+              </a:rPr>
+              <a:t>Email</a:t>
+            </a:r>
+          </a:p>
+        </p:txBody>
+      </p:sp>
+      <p:sp>
+        <p:nvSpPr>
+          <p:cNvPr id="10" name="Rounded Rectangle 9"/>
+          <p:cNvSpPr/>
+          <p:nvPr/>
+        </p:nvSpPr>
+        <p:spPr>
+          <a:xfrm>
+            <a:off x="525780" y="1234440"/>
+            <a:ext cx="1554480" cy="310896"/>
+          </a:xfrm>
+          <a:prstGeom prst="roundRect">
+            <a:avLst/>
+          </a:prstGeom>
+          <a:solidFill>
+            <a:srgbClr val="DBEAFE"/>
+          </a:solidFill>
+          <a:ln w="15875">
+            <a:solidFill>
+              <a:srgbClr val="0078D4"/>
+            </a:solidFill>
+          </a:ln>
+          <a:effectLst/>
+        </p:spPr>
+        <p:style>
+          <a:lnRef idx="1">
+            <a:schemeClr val="accent1"/>
+          </a:lnRef>
+          <a:fillRef idx="3">
+            <a:schemeClr val="accent1"/>
+          </a:fillRef>
+          <a:effectRef idx="2">
+            <a:schemeClr val="accent1"/>
+          </a:effectRef>
+          <a:fontRef idx="minor">
+            <a:schemeClr val="lt1"/>
+          </a:fontRef>
+        </p:style>
+        <p:txBody>
+          <a:bodyPr wrap="square" lIns="36000" tIns="18000" rIns="36000" bIns="18000" rtlCol="0" anchor="ctr"/>
+          <a:lstStyle/>
+          <a:p>
+            <a:pPr algn="ctr"/>
+            <a:r>
+              <a:rPr sz="700" b="1">
+                <a:solidFill>
+                  <a:srgbClr val="0078D4"/>
+                </a:solidFill>
+                <a:latin typeface="Segoe UI"/>
+              </a:rPr>
+              <a:t>Azure Static Web Apps</a:t>
+            </a:r>
+          </a:p>
+        </p:txBody>
+      </p:sp>
+      <p:sp>
+        <p:nvSpPr>
+          <p:cNvPr id="11" name="Rounded Rectangle 10"/>
+          <p:cNvSpPr/>
+          <p:nvPr/>
+        </p:nvSpPr>
+        <p:spPr>
+          <a:xfrm>
+            <a:off x="2217420" y="1234440"/>
+            <a:ext cx="1554480" cy="310896"/>
+          </a:xfrm>
+          <a:prstGeom prst="roundRect">
+            <a:avLst/>
+          </a:prstGeom>
+          <a:solidFill>
+            <a:srgbClr val="DBEAFE"/>
+          </a:solidFill>
+          <a:ln w="15875">
+            <a:solidFill>
+              <a:srgbClr val="0078D4"/>
+            </a:solidFill>
+          </a:ln>
+          <a:effectLst/>
+        </p:spPr>
+        <p:style>
+          <a:lnRef idx="1">
+            <a:schemeClr val="accent1"/>
+          </a:lnRef>
+          <a:fillRef idx="3">
+            <a:schemeClr val="accent1"/>
+          </a:fillRef>
+          <a:effectRef idx="2">
+            <a:schemeClr val="accent1"/>
+          </a:effectRef>
+          <a:fontRef idx="minor">
+            <a:schemeClr val="lt1"/>
+          </a:fontRef>
+        </p:style>
+        <p:txBody>
+          <a:bodyPr wrap="square" lIns="36000" tIns="18000" rIns="36000" bIns="18000" rtlCol="0" anchor="ctr"/>
+          <a:lstStyle/>
+          <a:p>
+            <a:pPr algn="ctr"/>
+            <a:r>
+              <a:rPr sz="700" b="1">
+                <a:solidFill>
+                  <a:srgbClr val="0078D4"/>
+                </a:solidFill>
+                <a:latin typeface="Segoe UI"/>
+              </a:rPr>
+              <a:t>Azure Function · Token Broker</a:t>
+            </a:r>
+          </a:p>
+        </p:txBody>
+      </p:sp>
+      <p:sp>
+        <p:nvSpPr>
+          <p:cNvPr id="12" name="Rounded Rectangle 11"/>
+          <p:cNvSpPr/>
+          <p:nvPr/>
+        </p:nvSpPr>
+        <p:spPr>
+          <a:xfrm>
+            <a:off x="3909060" y="1234440"/>
+            <a:ext cx="1554480" cy="310896"/>
+          </a:xfrm>
+          <a:prstGeom prst="roundRect">
+            <a:avLst/>
+          </a:prstGeom>
+          <a:solidFill>
+            <a:srgbClr val="DBEAFE"/>
+          </a:solidFill>
+          <a:ln w="15875">
+            <a:solidFill>
+              <a:srgbClr val="0078D4"/>
+            </a:solidFill>
+          </a:ln>
+          <a:effectLst/>
+        </p:spPr>
+        <p:style>
+          <a:lnRef idx="1">
+            <a:schemeClr val="accent1"/>
+          </a:lnRef>
+          <a:fillRef idx="3">
+            <a:schemeClr val="accent1"/>
+          </a:fillRef>
+          <a:effectRef idx="2">
+            <a:schemeClr val="accent1"/>
+          </a:effectRef>
+          <a:fontRef idx="minor">
+            <a:schemeClr val="lt1"/>
+          </a:fontRef>
+        </p:style>
+        <p:txBody>
+          <a:bodyPr wrap="square" lIns="36000" tIns="18000" rIns="36000" bIns="18000" rtlCol="0" anchor="ctr"/>
+          <a:lstStyle/>
+          <a:p>
+            <a:pPr algn="ctr"/>
+            <a:r>
+              <a:rPr sz="700" b="1">
+                <a:solidFill>
+                  <a:srgbClr val="0078D4"/>
+                </a:solidFill>
+                <a:latin typeface="Segoe UI"/>
+              </a:rPr>
+              <a:t>Bot Service · Direct Line</a:t>
+            </a:r>
+          </a:p>
+        </p:txBody>
+      </p:sp>
+      <p:sp>
+        <p:nvSpPr>
+          <p:cNvPr id="13" name="Rounded Rectangle 12"/>
+          <p:cNvSpPr/>
+          <p:nvPr/>
+        </p:nvSpPr>
+        <p:spPr>
+          <a:xfrm>
+            <a:off x="5600700" y="1234440"/>
+            <a:ext cx="1554480" cy="310896"/>
+          </a:xfrm>
+          <a:prstGeom prst="roundRect">
+            <a:avLst/>
+          </a:prstGeom>
+          <a:solidFill>
+            <a:srgbClr val="DBEAFE"/>
+          </a:solidFill>
+          <a:ln w="15875">
+            <a:solidFill>
+              <a:srgbClr val="0078D4"/>
+            </a:solidFill>
+          </a:ln>
+          <a:effectLst/>
+        </p:spPr>
+        <p:style>
+          <a:lnRef idx="1">
+            <a:schemeClr val="accent1"/>
+          </a:lnRef>
+          <a:fillRef idx="3">
+            <a:schemeClr val="accent1"/>
+          </a:fillRef>
+          <a:effectRef idx="2">
+            <a:schemeClr val="accent1"/>
+          </a:effectRef>
+          <a:fontRef idx="minor">
+            <a:schemeClr val="lt1"/>
+          </a:fontRef>
+        </p:style>
+        <p:txBody>
+          <a:bodyPr wrap="square" lIns="36000" tIns="18000" rIns="36000" bIns="18000" rtlCol="0" anchor="ctr"/>
+          <a:lstStyle/>
+          <a:p>
+            <a:pPr algn="ctr"/>
+            <a:r>
+              <a:rPr sz="700" b="1">
+                <a:solidFill>
+                  <a:srgbClr val="0078D4"/>
+                </a:solidFill>
+                <a:latin typeface="Segoe UI"/>
+              </a:rPr>
+              <a:t>Azure Comm Services (SMS)</a:t>
+            </a:r>
+          </a:p>
+        </p:txBody>
+      </p:sp>
+      <p:sp>
+        <p:nvSpPr>
+          <p:cNvPr id="14" name="Rounded Rectangle 13"/>
+          <p:cNvSpPr/>
+          <p:nvPr/>
+        </p:nvSpPr>
+        <p:spPr>
+          <a:xfrm>
+            <a:off x="2468880" y="1600200"/>
+            <a:ext cx="2743200" cy="310896"/>
+          </a:xfrm>
+          <a:prstGeom prst="roundRect">
+            <a:avLst/>
+          </a:prstGeom>
+          <a:solidFill>
+            <a:srgbClr val="EDE4F5"/>
+          </a:solidFill>
+          <a:ln w="15875">
+            <a:solidFill>
+              <a:srgbClr val="742774"/>
+            </a:solidFill>
+          </a:ln>
+          <a:effectLst/>
+        </p:spPr>
+        <p:style>
+          <a:lnRef idx="1">
+            <a:schemeClr val="accent1"/>
+          </a:lnRef>
+          <a:fillRef idx="3">
+            <a:schemeClr val="accent1"/>
+          </a:fillRef>
+          <a:effectRef idx="2">
+            <a:schemeClr val="accent1"/>
+          </a:effectRef>
+          <a:fontRef idx="minor">
+            <a:schemeClr val="lt1"/>
+          </a:fontRef>
+        </p:style>
+        <p:txBody>
+          <a:bodyPr wrap="square" lIns="36000" tIns="18000" rIns="36000" bIns="18000" rtlCol="0" anchor="ctr"/>
+          <a:lstStyle/>
+          <a:p>
+            <a:pPr algn="ctr"/>
+            <a:r>
+              <a:rPr sz="800" b="1">
+                <a:solidFill>
+                  <a:srgbClr val="742774"/>
+                </a:solidFill>
+                <a:latin typeface="Segoe UI"/>
+              </a:rPr>
+              <a:t>Copilot Studio · Intake Agent (FNOL_Start + 11 child topics)</a:t>
+            </a:r>
+          </a:p>
+        </p:txBody>
+      </p:sp>
+      <p:sp>
+        <p:nvSpPr>
+          <p:cNvPr id="15" name="Rounded Rectangle 14"/>
+          <p:cNvSpPr/>
+          <p:nvPr/>
+        </p:nvSpPr>
+        <p:spPr>
+          <a:xfrm>
+            <a:off x="2468880" y="1965960"/>
+            <a:ext cx="2743200" cy="310896"/>
+          </a:xfrm>
+          <a:prstGeom prst="roundRect">
+            <a:avLst/>
+          </a:prstGeom>
+          <a:solidFill>
+            <a:srgbClr val="EDE4F5"/>
+          </a:solidFill>
+          <a:ln w="15875">
+            <a:solidFill>
+              <a:srgbClr val="742774"/>
+            </a:solidFill>
+          </a:ln>
+          <a:effectLst/>
+        </p:spPr>
+        <p:style>
+          <a:lnRef idx="1">
+            <a:schemeClr val="accent1"/>
+          </a:lnRef>
+          <a:fillRef idx="3">
+            <a:schemeClr val="accent1"/>
+          </a:fillRef>
+          <a:effectRef idx="2">
+            <a:schemeClr val="accent1"/>
+          </a:effectRef>
+          <a:fontRef idx="minor">
+            <a:schemeClr val="lt1"/>
+          </a:fontRef>
+        </p:style>
+        <p:txBody>
+          <a:bodyPr wrap="square" lIns="36000" tIns="18000" rIns="36000" bIns="18000" rtlCol="0" anchor="ctr"/>
+          <a:lstStyle/>
+          <a:p>
+            <a:pPr algn="ctr"/>
+            <a:r>
+              <a:rPr sz="800" b="1">
+                <a:solidFill>
+                  <a:srgbClr val="742774"/>
+                </a:solidFill>
+                <a:latin typeface="Segoe UI"/>
+              </a:rPr>
+              <a:t>Power Automate · Master Orchestration</a:t>
+            </a:r>
+          </a:p>
+        </p:txBody>
+      </p:sp>
+      <p:sp>
+        <p:nvSpPr>
+          <p:cNvPr id="16" name="Rounded Rectangle 15"/>
+          <p:cNvSpPr/>
+          <p:nvPr/>
+        </p:nvSpPr>
+        <p:spPr>
+          <a:xfrm>
+            <a:off x="502920" y="2331720"/>
+            <a:ext cx="1600200" cy="502920"/>
+          </a:xfrm>
+          <a:prstGeom prst="roundRect">
+            <a:avLst/>
+          </a:prstGeom>
+          <a:solidFill>
+            <a:srgbClr val="DBEAFE"/>
+          </a:solidFill>
+          <a:ln w="15875">
+            <a:solidFill>
+              <a:srgbClr val="0078D4"/>
+            </a:solidFill>
+          </a:ln>
+          <a:effectLst/>
+        </p:spPr>
+        <p:style>
+          <a:lnRef idx="1">
+            <a:schemeClr val="accent1"/>
+          </a:lnRef>
+          <a:fillRef idx="3">
+            <a:schemeClr val="accent1"/>
+          </a:fillRef>
+          <a:effectRef idx="2">
+            <a:schemeClr val="accent1"/>
+          </a:effectRef>
+          <a:fontRef idx="minor">
+            <a:schemeClr val="lt1"/>
+          </a:fontRef>
+        </p:style>
+        <p:txBody>
+          <a:bodyPr wrap="square" lIns="36000" tIns="18000" rIns="36000" bIns="18000" rtlCol="0" anchor="ctr"/>
+          <a:lstStyle/>
+          <a:p>
+            <a:pPr algn="ctr"/>
+            <a:r>
+              <a:rPr sz="700" b="1">
+                <a:solidFill>
+                  <a:srgbClr val="0078D4"/>
+                </a:solidFill>
+                <a:latin typeface="Segoe UI"/>
+              </a:rPr>
+              <a:t>Extraction Agent</a:t>
+            </a:r>
+          </a:p>
+          <a:p>
+            <a:pPr algn="ctr"/>
+            <a:r>
+              <a:rPr sz="700" b="1">
+                <a:solidFill>
+                  <a:srgbClr val="0078D4"/>
+                </a:solidFill>
+                <a:latin typeface="Segoe UI"/>
+              </a:rPr>
+              <a:t>Doc Intelligence + Vision</a:t>
+            </a:r>
+          </a:p>
+        </p:txBody>
+      </p:sp>
+      <p:sp>
+        <p:nvSpPr>
+          <p:cNvPr id="17" name="Rounded Rectangle 16"/>
+          <p:cNvSpPr/>
+          <p:nvPr/>
+        </p:nvSpPr>
+        <p:spPr>
+          <a:xfrm>
+            <a:off x="2194560" y="2331720"/>
+            <a:ext cx="1600200" cy="502920"/>
+          </a:xfrm>
+          <a:prstGeom prst="roundRect">
+            <a:avLst/>
+          </a:prstGeom>
+          <a:solidFill>
+            <a:srgbClr val="DBEAFE"/>
+          </a:solidFill>
+          <a:ln w="15875">
+            <a:solidFill>
+              <a:srgbClr val="0078D4"/>
+            </a:solidFill>
+          </a:ln>
+          <a:effectLst/>
+        </p:spPr>
+        <p:style>
+          <a:lnRef idx="1">
+            <a:schemeClr val="accent1"/>
+          </a:lnRef>
+          <a:fillRef idx="3">
+            <a:schemeClr val="accent1"/>
+          </a:fillRef>
+          <a:effectRef idx="2">
+            <a:schemeClr val="accent1"/>
+          </a:effectRef>
+          <a:fontRef idx="minor">
+            <a:schemeClr val="lt1"/>
+          </a:fontRef>
+        </p:style>
+        <p:txBody>
+          <a:bodyPr wrap="square" lIns="36000" tIns="18000" rIns="36000" bIns="18000" rtlCol="0" anchor="ctr"/>
+          <a:lstStyle/>
+          <a:p>
+            <a:pPr algn="ctr"/>
+            <a:r>
+              <a:rPr sz="700" b="1">
+                <a:solidFill>
+                  <a:srgbClr val="0078D4"/>
+                </a:solidFill>
+                <a:latin typeface="Segoe UI"/>
+              </a:rPr>
+              <a:t>Policy Agent</a:t>
+            </a:r>
+          </a:p>
+          <a:p>
+            <a:pPr algn="ctr"/>
+            <a:r>
+              <a:rPr sz="700" b="1">
+                <a:solidFill>
+                  <a:srgbClr val="0078D4"/>
+                </a:solidFill>
+                <a:latin typeface="Segoe UI"/>
+              </a:rPr>
+              <a:t>AI Search RAG + AOAI</a:t>
+            </a:r>
+          </a:p>
+        </p:txBody>
+      </p:sp>
+      <p:sp>
+        <p:nvSpPr>
+          <p:cNvPr id="18" name="Rounded Rectangle 17"/>
+          <p:cNvSpPr/>
+          <p:nvPr/>
+        </p:nvSpPr>
+        <p:spPr>
+          <a:xfrm>
+            <a:off x="3886200" y="2331720"/>
+            <a:ext cx="1600200" cy="502920"/>
+          </a:xfrm>
+          <a:prstGeom prst="roundRect">
+            <a:avLst/>
+          </a:prstGeom>
+          <a:solidFill>
+            <a:srgbClr val="FEF3C7"/>
+          </a:solidFill>
+          <a:ln w="15875">
+            <a:solidFill>
+              <a:srgbClr val="D99416"/>
+            </a:solidFill>
+          </a:ln>
+          <a:effectLst/>
+        </p:spPr>
+        <p:style>
+          <a:lnRef idx="1">
+            <a:schemeClr val="accent1"/>
+          </a:lnRef>
+          <a:fillRef idx="3">
+            <a:schemeClr val="accent1"/>
+          </a:fillRef>
+          <a:effectRef idx="2">
+            <a:schemeClr val="accent1"/>
+          </a:effectRef>
+          <a:fontRef idx="minor">
+            <a:schemeClr val="lt1"/>
+          </a:fontRef>
+        </p:style>
+        <p:txBody>
+          <a:bodyPr wrap="square" lIns="36000" tIns="18000" rIns="36000" bIns="18000" rtlCol="0" anchor="ctr"/>
+          <a:lstStyle/>
+          <a:p>
+            <a:pPr algn="ctr"/>
+            <a:r>
+              <a:rPr sz="700" b="1">
+                <a:solidFill>
+                  <a:srgbClr val="D99416"/>
+                </a:solidFill>
+                <a:latin typeface="Segoe UI"/>
+              </a:rPr>
+              <a:t>Validation Agent</a:t>
+            </a:r>
+          </a:p>
+          <a:p>
+            <a:pPr algn="ctr"/>
+            <a:r>
+              <a:rPr sz="700" b="1">
+                <a:solidFill>
+                  <a:srgbClr val="D99416"/>
+                </a:solidFill>
+                <a:latin typeface="Segoe UI"/>
+              </a:rPr>
+              <a:t>NOAA + NHTSA + 5 sandbox</a:t>
+            </a:r>
+          </a:p>
+        </p:txBody>
+      </p:sp>
+      <p:sp>
+        <p:nvSpPr>
+          <p:cNvPr id="19" name="Rounded Rectangle 18"/>
+          <p:cNvSpPr/>
+          <p:nvPr/>
+        </p:nvSpPr>
+        <p:spPr>
+          <a:xfrm>
+            <a:off x="5577840" y="2331720"/>
+            <a:ext cx="1600200" cy="502920"/>
+          </a:xfrm>
+          <a:prstGeom prst="roundRect">
+            <a:avLst/>
+          </a:prstGeom>
+          <a:solidFill>
+            <a:srgbClr val="DBEAFE"/>
+          </a:solidFill>
+          <a:ln w="15875">
+            <a:solidFill>
+              <a:srgbClr val="0078D4"/>
+            </a:solidFill>
+          </a:ln>
+          <a:effectLst/>
+        </p:spPr>
+        <p:style>
+          <a:lnRef idx="1">
+            <a:schemeClr val="accent1"/>
+          </a:lnRef>
+          <a:fillRef idx="3">
+            <a:schemeClr val="accent1"/>
+          </a:fillRef>
+          <a:effectRef idx="2">
+            <a:schemeClr val="accent1"/>
+          </a:effectRef>
+          <a:fontRef idx="minor">
+            <a:schemeClr val="lt1"/>
+          </a:fontRef>
+        </p:style>
+        <p:txBody>
+          <a:bodyPr wrap="square" lIns="36000" tIns="18000" rIns="36000" bIns="18000" rtlCol="0" anchor="ctr"/>
+          <a:lstStyle/>
+          <a:p>
+            <a:pPr algn="ctr"/>
+            <a:r>
+              <a:rPr sz="700" b="1">
+                <a:solidFill>
+                  <a:srgbClr val="0078D4"/>
+                </a:solidFill>
+                <a:latin typeface="Segoe UI"/>
+              </a:rPr>
+              <a:t>Adjudication Agent</a:t>
+            </a:r>
+          </a:p>
+          <a:p>
+            <a:pPr algn="ctr"/>
+            <a:r>
+              <a:rPr sz="700" b="1">
+                <a:solidFill>
+                  <a:srgbClr val="0078D4"/>
+                </a:solidFill>
+                <a:latin typeface="Segoe UI"/>
+              </a:rPr>
+              <a:t>Azure OpenAI GPT-4.1</a:t>
+            </a:r>
+          </a:p>
+        </p:txBody>
+      </p:sp>
+      <p:sp>
+        <p:nvSpPr>
+          <p:cNvPr id="20" name="Rounded Rectangle 19"/>
+          <p:cNvSpPr/>
+          <p:nvPr/>
+        </p:nvSpPr>
+        <p:spPr>
+          <a:xfrm>
+            <a:off x="868680" y="2889504"/>
+            <a:ext cx="5943600" cy="310896"/>
+          </a:xfrm>
+          <a:prstGeom prst="roundRect">
+            <a:avLst/>
+          </a:prstGeom>
+          <a:solidFill>
+            <a:srgbClr val="FEF3C7"/>
+          </a:solidFill>
+          <a:ln w="15875">
+            <a:solidFill>
+              <a:srgbClr val="D99416"/>
+            </a:solidFill>
+          </a:ln>
+          <a:effectLst/>
+        </p:spPr>
+        <p:style>
+          <a:lnRef idx="1">
+            <a:schemeClr val="accent1"/>
+          </a:lnRef>
+          <a:fillRef idx="3">
+            <a:schemeClr val="accent1"/>
+          </a:fillRef>
+          <a:effectRef idx="2">
+            <a:schemeClr val="accent1"/>
+          </a:effectRef>
+          <a:fontRef idx="minor">
+            <a:schemeClr val="lt1"/>
+          </a:fontRef>
+        </p:style>
+        <p:txBody>
+          <a:bodyPr wrap="square" lIns="36000" tIns="18000" rIns="36000" bIns="18000" rtlCol="0" anchor="ctr"/>
+          <a:lstStyle/>
+          <a:p>
+            <a:pPr algn="ctr"/>
+            <a:r>
+              <a:rPr sz="800" b="1">
+                <a:solidFill>
+                  <a:srgbClr val="D99416"/>
+                </a:solidFill>
+                <a:latin typeface="Segoe UI"/>
+              </a:rPr>
+              <a:t>★ Decision_Rationale audit log — every AI decision in plain English</a:t>
+            </a:r>
+          </a:p>
+        </p:txBody>
+      </p:sp>
+      <p:sp>
+        <p:nvSpPr>
+          <p:cNvPr id="21" name="Rounded Rectangle 20"/>
+          <p:cNvSpPr/>
+          <p:nvPr/>
+        </p:nvSpPr>
+        <p:spPr>
+          <a:xfrm>
+            <a:off x="2240280" y="3255264"/>
+            <a:ext cx="3200400" cy="310896"/>
+          </a:xfrm>
+          <a:prstGeom prst="roundRect">
+            <a:avLst/>
+          </a:prstGeom>
+          <a:solidFill>
+            <a:srgbClr val="EDE4F5"/>
+          </a:solidFill>
+          <a:ln w="15875">
+            <a:solidFill>
+              <a:srgbClr val="742774"/>
+            </a:solidFill>
+          </a:ln>
+          <a:effectLst/>
+        </p:spPr>
+        <p:style>
+          <a:lnRef idx="1">
+            <a:schemeClr val="accent1"/>
+          </a:lnRef>
+          <a:fillRef idx="3">
+            <a:schemeClr val="accent1"/>
+          </a:fillRef>
+          <a:effectRef idx="2">
+            <a:schemeClr val="accent1"/>
+          </a:effectRef>
+          <a:fontRef idx="minor">
+            <a:schemeClr val="lt1"/>
+          </a:fontRef>
+        </p:style>
+        <p:txBody>
+          <a:bodyPr wrap="square" lIns="36000" tIns="18000" rIns="36000" bIns="18000" rtlCol="0" anchor="ctr"/>
+          <a:lstStyle/>
+          <a:p>
+            <a:pPr algn="ctr"/>
+            <a:r>
+              <a:rPr sz="800" b="1">
+                <a:solidFill>
+                  <a:srgbClr val="742774"/>
+                </a:solidFill>
+                <a:latin typeface="Segoe UI"/>
+              </a:rPr>
+              <a:t>Microsoft Dataverse · 8 tables</a:t>
+            </a:r>
+          </a:p>
+        </p:txBody>
+      </p:sp>
+      <p:sp>
+        <p:nvSpPr>
+          <p:cNvPr id="22" name="Diamond 21"/>
+          <p:cNvSpPr/>
+          <p:nvPr/>
+        </p:nvSpPr>
+        <p:spPr>
+          <a:xfrm>
+            <a:off x="580644" y="3621024"/>
+            <a:ext cx="1280160" cy="365760"/>
+          </a:xfrm>
+          <a:prstGeom prst="diamond">
+            <a:avLst/>
+          </a:prstGeom>
+          <a:solidFill>
+            <a:srgbClr val="FEF3C7"/>
+          </a:solidFill>
+          <a:ln w="19050">
+            <a:solidFill>
+              <a:srgbClr val="D99416"/>
+            </a:solidFill>
+          </a:ln>
+          <a:effectLst/>
+        </p:spPr>
+        <p:style>
+          <a:lnRef idx="1">
+            <a:schemeClr val="accent1"/>
+          </a:lnRef>
+          <a:fillRef idx="3">
+            <a:schemeClr val="accent1"/>
+          </a:fillRef>
+          <a:effectRef idx="2">
+            <a:schemeClr val="accent1"/>
+          </a:effectRef>
+          <a:fontRef idx="minor">
+            <a:schemeClr val="lt1"/>
+          </a:fontRef>
+        </p:style>
+        <p:txBody>
+          <a:bodyPr wrap="square" rtlCol="0" anchor="ctr"/>
+          <a:lstStyle/>
+          <a:p>
+            <a:pPr algn="ctr"/>
+            <a:r>
+              <a:rPr sz="800" b="1">
+                <a:solidFill>
+                  <a:srgbClr val="D99416"/>
+                </a:solidFill>
+                <a:latin typeface="Segoe UI"/>
+              </a:rPr>
+              <a:t>Tier?</a:t>
+            </a:r>
+          </a:p>
+        </p:txBody>
+      </p:sp>
+      <p:sp>
+        <p:nvSpPr>
+          <p:cNvPr id="23" name="Rounded Rectangle 22"/>
+          <p:cNvSpPr/>
+          <p:nvPr/>
+        </p:nvSpPr>
+        <p:spPr>
+          <a:xfrm>
+            <a:off x="1915668" y="3621024"/>
+            <a:ext cx="1691640" cy="310896"/>
+          </a:xfrm>
+          <a:prstGeom prst="roundRect">
+            <a:avLst/>
+          </a:prstGeom>
+          <a:solidFill>
+            <a:srgbClr val="DCFCE7"/>
+          </a:solidFill>
+          <a:ln w="15875">
+            <a:solidFill>
+              <a:srgbClr val="16A34A"/>
+            </a:solidFill>
+          </a:ln>
+          <a:effectLst/>
+        </p:spPr>
+        <p:style>
+          <a:lnRef idx="1">
+            <a:schemeClr val="accent1"/>
+          </a:lnRef>
+          <a:fillRef idx="3">
+            <a:schemeClr val="accent1"/>
+          </a:fillRef>
+          <a:effectRef idx="2">
+            <a:schemeClr val="accent1"/>
+          </a:effectRef>
+          <a:fontRef idx="minor">
+            <a:schemeClr val="lt1"/>
+          </a:fontRef>
+        </p:style>
+        <p:txBody>
+          <a:bodyPr wrap="square" lIns="36000" tIns="18000" rIns="36000" bIns="18000" rtlCol="0" anchor="ctr"/>
+          <a:lstStyle/>
+          <a:p>
+            <a:pPr algn="ctr"/>
+            <a:r>
+              <a:rPr sz="700" b="1">
+                <a:solidFill>
+                  <a:srgbClr val="16A34A"/>
+                </a:solidFill>
+                <a:latin typeface="Segoe UI"/>
+              </a:rPr>
+              <a:t>Tier 1</a:t>
+            </a:r>
+          </a:p>
+          <a:p>
+            <a:pPr algn="ctr"/>
+            <a:r>
+              <a:rPr sz="700" b="1">
+                <a:solidFill>
+                  <a:srgbClr val="16A34A"/>
+                </a:solidFill>
+                <a:latin typeface="Segoe UI"/>
+              </a:rPr>
+              <a:t>Auto-approve</a:t>
+            </a:r>
+          </a:p>
+        </p:txBody>
+      </p:sp>
+      <p:sp>
+        <p:nvSpPr>
+          <p:cNvPr id="24" name="Rounded Rectangle 23"/>
+          <p:cNvSpPr/>
+          <p:nvPr/>
+        </p:nvSpPr>
+        <p:spPr>
+          <a:xfrm>
+            <a:off x="3662172" y="3621024"/>
+            <a:ext cx="1691640" cy="310896"/>
+          </a:xfrm>
+          <a:prstGeom prst="roundRect">
+            <a:avLst/>
+          </a:prstGeom>
+          <a:solidFill>
+            <a:srgbClr val="FEF3C7"/>
+          </a:solidFill>
+          <a:ln w="15875">
+            <a:solidFill>
+              <a:srgbClr val="D97706"/>
+            </a:solidFill>
+          </a:ln>
+          <a:effectLst/>
+        </p:spPr>
+        <p:style>
+          <a:lnRef idx="1">
+            <a:schemeClr val="accent1"/>
+          </a:lnRef>
+          <a:fillRef idx="3">
+            <a:schemeClr val="accent1"/>
+          </a:fillRef>
+          <a:effectRef idx="2">
+            <a:schemeClr val="accent1"/>
+          </a:effectRef>
+          <a:fontRef idx="minor">
+            <a:schemeClr val="lt1"/>
+          </a:fontRef>
+        </p:style>
+        <p:txBody>
+          <a:bodyPr wrap="square" lIns="36000" tIns="18000" rIns="36000" bIns="18000" rtlCol="0" anchor="ctr"/>
+          <a:lstStyle/>
+          <a:p>
+            <a:pPr algn="ctr"/>
+            <a:r>
+              <a:rPr sz="700" b="1">
+                <a:solidFill>
+                  <a:srgbClr val="D97706"/>
+                </a:solidFill>
+                <a:latin typeface="Segoe UI"/>
+              </a:rPr>
+              <a:t>Tier 2</a:t>
+            </a:r>
+          </a:p>
+          <a:p>
+            <a:pPr algn="ctr"/>
+            <a:r>
+              <a:rPr sz="700" b="1">
+                <a:solidFill>
+                  <a:srgbClr val="D97706"/>
+                </a:solidFill>
+                <a:latin typeface="Segoe UI"/>
+              </a:rPr>
+              <a:t>Teams Adaptive Card</a:t>
+            </a:r>
+          </a:p>
+        </p:txBody>
+      </p:sp>
+      <p:sp>
+        <p:nvSpPr>
+          <p:cNvPr id="25" name="Rounded Rectangle 24"/>
+          <p:cNvSpPr/>
+          <p:nvPr/>
+        </p:nvSpPr>
+        <p:spPr>
+          <a:xfrm>
+            <a:off x="5408676" y="3621024"/>
+            <a:ext cx="1691640" cy="310896"/>
+          </a:xfrm>
+          <a:prstGeom prst="roundRect">
+            <a:avLst/>
+          </a:prstGeom>
+          <a:solidFill>
+            <a:srgbClr val="FEE2E2"/>
+          </a:solidFill>
+          <a:ln w="15875">
+            <a:solidFill>
+              <a:srgbClr val="DC2626"/>
+            </a:solidFill>
+          </a:ln>
+          <a:effectLst/>
+        </p:spPr>
+        <p:style>
+          <a:lnRef idx="1">
+            <a:schemeClr val="accent1"/>
+          </a:lnRef>
+          <a:fillRef idx="3">
+            <a:schemeClr val="accent1"/>
+          </a:fillRef>
+          <a:effectRef idx="2">
+            <a:schemeClr val="accent1"/>
+          </a:effectRef>
+          <a:fontRef idx="minor">
+            <a:schemeClr val="lt1"/>
+          </a:fontRef>
+        </p:style>
+        <p:txBody>
+          <a:bodyPr wrap="square" lIns="36000" tIns="18000" rIns="36000" bIns="18000" rtlCol="0" anchor="ctr"/>
+          <a:lstStyle/>
+          <a:p>
+            <a:pPr algn="ctr"/>
+            <a:r>
+              <a:rPr sz="700" b="1">
+                <a:solidFill>
+                  <a:srgbClr val="DC2626"/>
+                </a:solidFill>
+                <a:latin typeface="Segoe UI"/>
+              </a:rPr>
+              <a:t>Tier 3</a:t>
+            </a:r>
+          </a:p>
+          <a:p>
+            <a:pPr algn="ctr"/>
+            <a:r>
+              <a:rPr sz="700" b="1">
+                <a:solidFill>
+                  <a:srgbClr val="DC2626"/>
+                </a:solidFill>
+                <a:latin typeface="Segoe UI"/>
+              </a:rPr>
+              <a:t>Live CSR escalation</a:t>
+            </a:r>
+          </a:p>
+        </p:txBody>
+      </p:sp>
+      <p:sp>
+        <p:nvSpPr>
+          <p:cNvPr id="26" name="Rounded Rectangle 25"/>
+          <p:cNvSpPr/>
+          <p:nvPr/>
+        </p:nvSpPr>
+        <p:spPr>
+          <a:xfrm>
+            <a:off x="1554480" y="3986784"/>
+            <a:ext cx="2194560" cy="310896"/>
+          </a:xfrm>
+          <a:prstGeom prst="roundRect">
+            <a:avLst/>
+          </a:prstGeom>
+          <a:solidFill>
+            <a:srgbClr val="EDE4F5"/>
+          </a:solidFill>
+          <a:ln w="15875">
+            <a:solidFill>
+              <a:srgbClr val="742774"/>
+            </a:solidFill>
+          </a:ln>
+          <a:effectLst/>
+        </p:spPr>
+        <p:style>
+          <a:lnRef idx="1">
+            <a:schemeClr val="accent1"/>
+          </a:lnRef>
+          <a:fillRef idx="3">
+            <a:schemeClr val="accent1"/>
+          </a:fillRef>
+          <a:effectRef idx="2">
+            <a:schemeClr val="accent1"/>
+          </a:effectRef>
+          <a:fontRef idx="minor">
+            <a:schemeClr val="lt1"/>
+          </a:fontRef>
+        </p:style>
+        <p:txBody>
+          <a:bodyPr wrap="square" lIns="36000" tIns="18000" rIns="36000" bIns="18000" rtlCol="0" anchor="ctr"/>
+          <a:lstStyle/>
+          <a:p>
+            <a:pPr algn="ctr"/>
+            <a:r>
+              <a:rPr sz="800" b="1">
+                <a:solidFill>
+                  <a:srgbClr val="742774"/>
+                </a:solidFill>
+                <a:latin typeface="Segoe UI"/>
+              </a:rPr>
+              <a:t>Copilot Studio · Explanation Agent</a:t>
+            </a:r>
+          </a:p>
+        </p:txBody>
+      </p:sp>
+      <p:sp>
+        <p:nvSpPr>
+          <p:cNvPr id="27" name="Rounded Rectangle 26"/>
+          <p:cNvSpPr/>
+          <p:nvPr/>
+        </p:nvSpPr>
+        <p:spPr>
+          <a:xfrm>
+            <a:off x="3931920" y="3986784"/>
+            <a:ext cx="2194560" cy="310896"/>
+          </a:xfrm>
+          <a:prstGeom prst="roundRect">
+            <a:avLst/>
+          </a:prstGeom>
+          <a:solidFill>
+            <a:srgbClr val="EDE4F5"/>
+          </a:solidFill>
+          <a:ln w="15875">
+            <a:solidFill>
+              <a:srgbClr val="742774"/>
+            </a:solidFill>
+          </a:ln>
+          <a:effectLst/>
+        </p:spPr>
+        <p:style>
+          <a:lnRef idx="1">
+            <a:schemeClr val="accent1"/>
+          </a:lnRef>
+          <a:fillRef idx="3">
+            <a:schemeClr val="accent1"/>
+          </a:fillRef>
+          <a:effectRef idx="2">
+            <a:schemeClr val="accent1"/>
+          </a:effectRef>
+          <a:fontRef idx="minor">
+            <a:schemeClr val="lt1"/>
+          </a:fontRef>
+        </p:style>
+        <p:txBody>
+          <a:bodyPr wrap="square" lIns="36000" tIns="18000" rIns="36000" bIns="18000" rtlCol="0" anchor="ctr"/>
+          <a:lstStyle/>
+          <a:p>
+            <a:pPr algn="ctr"/>
+            <a:r>
+              <a:rPr sz="800" b="1">
+                <a:solidFill>
+                  <a:srgbClr val="742774"/>
+                </a:solidFill>
+                <a:latin typeface="Segoe UI"/>
+              </a:rPr>
+              <a:t>Power Automate · Notify_Customer</a:t>
+            </a:r>
+          </a:p>
+        </p:txBody>
+      </p:sp>
+      <p:sp>
+        <p:nvSpPr>
+          <p:cNvPr id="28" name="Rounded Rectangle 27"/>
+          <p:cNvSpPr/>
+          <p:nvPr/>
+        </p:nvSpPr>
+        <p:spPr>
+          <a:xfrm>
+            <a:off x="2697480" y="4352544"/>
+            <a:ext cx="2286000" cy="310896"/>
+          </a:xfrm>
+          <a:prstGeom prst="roundRect">
+            <a:avLst/>
+          </a:prstGeom>
+          <a:solidFill>
+            <a:srgbClr val="EDE4F5"/>
+          </a:solidFill>
+          <a:ln w="15875">
+            <a:solidFill>
+              <a:srgbClr val="742774"/>
+            </a:solidFill>
+          </a:ln>
+          <a:effectLst/>
+        </p:spPr>
+        <p:style>
+          <a:lnRef idx="1">
+            <a:schemeClr val="accent1"/>
+          </a:lnRef>
+          <a:fillRef idx="3">
+            <a:schemeClr val="accent1"/>
+          </a:fillRef>
+          <a:effectRef idx="2">
+            <a:schemeClr val="accent1"/>
+          </a:effectRef>
+          <a:fontRef idx="minor">
+            <a:schemeClr val="lt1"/>
+          </a:fontRef>
+        </p:style>
+        <p:txBody>
+          <a:bodyPr wrap="square" lIns="36000" tIns="18000" rIns="36000" bIns="18000" rtlCol="0" anchor="ctr"/>
+          <a:lstStyle/>
+          <a:p>
+            <a:pPr algn="ctr"/>
+            <a:r>
+              <a:rPr sz="800" b="1">
+                <a:solidFill>
+                  <a:srgbClr val="742774"/>
+                </a:solidFill>
+                <a:latin typeface="Segoe UI"/>
+              </a:rPr>
+              <a:t>Power BI · Operations Dashboard</a:t>
+            </a:r>
+          </a:p>
+        </p:txBody>
+      </p:sp>
+      <p:sp>
+        <p:nvSpPr>
+          <p:cNvPr id="29" name="TextBox 28"/>
+          <p:cNvSpPr txBox="1"/>
+          <p:nvPr/>
+        </p:nvSpPr>
+        <p:spPr>
+          <a:xfrm>
+            <a:off x="7406640" y="502920"/>
+            <a:ext cx="1600200" cy="201168"/>
+          </a:xfrm>
+          <a:prstGeom prst="rect">
+            <a:avLst/>
+          </a:prstGeom>
+          <a:noFill/>
+        </p:spPr>
+        <p:txBody>
+          <a:bodyPr wrap="square" lIns="0" tIns="0" rIns="0" bIns="0">
+            <a:spAutoFit/>
+          </a:bodyPr>
+          <a:lstStyle/>
+          <a:p>
+            <a:pPr algn="ctr"/>
+            <a:r>
+              <a:rPr sz="1000" b="1">
+                <a:solidFill>
+                  <a:srgbClr val="0A2540"/>
+                </a:solidFill>
+                <a:latin typeface="Segoe UI"/>
+              </a:rPr>
+              <a:t>Security &amp; Compliance</a:t>
+            </a:r>
+          </a:p>
+        </p:txBody>
+      </p:sp>
+      <p:sp>
+        <p:nvSpPr>
+          <p:cNvPr id="30" name="Rounded Rectangle 29"/>
+          <p:cNvSpPr/>
+          <p:nvPr/>
+        </p:nvSpPr>
+        <p:spPr>
+          <a:xfrm>
+            <a:off x="7406640" y="758952"/>
+            <a:ext cx="1600200" cy="411480"/>
+          </a:xfrm>
+          <a:prstGeom prst="roundRect">
+            <a:avLst/>
+          </a:prstGeom>
+          <a:solidFill>
+            <a:srgbClr val="DBEAFE"/>
+          </a:solidFill>
+          <a:ln w="15875">
+            <a:solidFill>
+              <a:srgbClr val="0078D4"/>
+            </a:solidFill>
+          </a:ln>
+          <a:effectLst/>
+        </p:spPr>
+        <p:style>
+          <a:lnRef idx="1">
+            <a:schemeClr val="accent1"/>
+          </a:lnRef>
+          <a:fillRef idx="3">
+            <a:schemeClr val="accent1"/>
+          </a:fillRef>
+          <a:effectRef idx="2">
+            <a:schemeClr val="accent1"/>
+          </a:effectRef>
+          <a:fontRef idx="minor">
+            <a:schemeClr val="lt1"/>
+          </a:fontRef>
+        </p:style>
+        <p:txBody>
+          <a:bodyPr wrap="square" lIns="36000" tIns="18000" rIns="36000" bIns="18000" rtlCol="0" anchor="ctr"/>
+          <a:lstStyle/>
+          <a:p>
+            <a:pPr algn="ctr"/>
+            <a:r>
+              <a:rPr sz="700" b="1">
+                <a:solidFill>
+                  <a:srgbClr val="0078D4"/>
+                </a:solidFill>
+                <a:latin typeface="Segoe UI"/>
+              </a:rPr>
+              <a:t>Microsoft Entra ID</a:t>
+            </a:r>
+          </a:p>
+          <a:p>
+            <a:pPr algn="ctr"/>
+            <a:r>
+              <a:rPr sz="700" b="1">
+                <a:solidFill>
+                  <a:srgbClr val="0078D4"/>
+                </a:solidFill>
+                <a:latin typeface="Segoe UI"/>
+              </a:rPr>
+              <a:t>SSO + RBAC + roles</a:t>
+            </a:r>
+          </a:p>
+        </p:txBody>
+      </p:sp>
+      <p:sp>
+        <p:nvSpPr>
+          <p:cNvPr id="31" name="Rounded Rectangle 30"/>
+          <p:cNvSpPr/>
+          <p:nvPr/>
+        </p:nvSpPr>
+        <p:spPr>
+          <a:xfrm>
+            <a:off x="7406640" y="1216152"/>
+            <a:ext cx="1600200" cy="411480"/>
+          </a:xfrm>
+          <a:prstGeom prst="roundRect">
+            <a:avLst/>
+          </a:prstGeom>
+          <a:solidFill>
+            <a:srgbClr val="DBEAFE"/>
+          </a:solidFill>
+          <a:ln w="15875">
+            <a:solidFill>
+              <a:srgbClr val="0078D4"/>
+            </a:solidFill>
+          </a:ln>
+          <a:effectLst/>
+        </p:spPr>
+        <p:style>
+          <a:lnRef idx="1">
+            <a:schemeClr val="accent1"/>
+          </a:lnRef>
+          <a:fillRef idx="3">
+            <a:schemeClr val="accent1"/>
+          </a:fillRef>
+          <a:effectRef idx="2">
+            <a:schemeClr val="accent1"/>
+          </a:effectRef>
+          <a:fontRef idx="minor">
+            <a:schemeClr val="lt1"/>
+          </a:fontRef>
+        </p:style>
+        <p:txBody>
+          <a:bodyPr wrap="square" lIns="36000" tIns="18000" rIns="36000" bIns="18000" rtlCol="0" anchor="ctr"/>
+          <a:lstStyle/>
+          <a:p>
+            <a:pPr algn="ctr"/>
+            <a:r>
+              <a:rPr sz="700" b="1">
+                <a:solidFill>
+                  <a:srgbClr val="0078D4"/>
+                </a:solidFill>
+                <a:latin typeface="Segoe UI"/>
+              </a:rPr>
+              <a:t>Azure Key Vault</a:t>
+            </a:r>
+          </a:p>
+          <a:p>
+            <a:pPr algn="ctr"/>
+            <a:r>
+              <a:rPr sz="700" b="1">
+                <a:solidFill>
+                  <a:srgbClr val="0078D4"/>
+                </a:solidFill>
+                <a:latin typeface="Segoe UI"/>
+              </a:rPr>
+              <a:t>Secrets + keys</a:t>
+            </a:r>
+          </a:p>
+        </p:txBody>
+      </p:sp>
+      <p:sp>
+        <p:nvSpPr>
+          <p:cNvPr id="32" name="Rounded Rectangle 31"/>
+          <p:cNvSpPr/>
+          <p:nvPr/>
+        </p:nvSpPr>
+        <p:spPr>
+          <a:xfrm>
+            <a:off x="7406640" y="1673352"/>
+            <a:ext cx="1600200" cy="411480"/>
+          </a:xfrm>
+          <a:prstGeom prst="roundRect">
+            <a:avLst/>
+          </a:prstGeom>
+          <a:solidFill>
+            <a:srgbClr val="DBEAFE"/>
+          </a:solidFill>
+          <a:ln w="15875">
+            <a:solidFill>
+              <a:srgbClr val="0078D4"/>
+            </a:solidFill>
+          </a:ln>
+          <a:effectLst/>
+        </p:spPr>
+        <p:style>
+          <a:lnRef idx="1">
+            <a:schemeClr val="accent1"/>
+          </a:lnRef>
+          <a:fillRef idx="3">
+            <a:schemeClr val="accent1"/>
+          </a:fillRef>
+          <a:effectRef idx="2">
+            <a:schemeClr val="accent1"/>
+          </a:effectRef>
+          <a:fontRef idx="minor">
+            <a:schemeClr val="lt1"/>
+          </a:fontRef>
+        </p:style>
+        <p:txBody>
+          <a:bodyPr wrap="square" lIns="36000" tIns="18000" rIns="36000" bIns="18000" rtlCol="0" anchor="ctr"/>
+          <a:lstStyle/>
+          <a:p>
+            <a:pPr algn="ctr"/>
+            <a:r>
+              <a:rPr sz="700" b="1">
+                <a:solidFill>
+                  <a:srgbClr val="0078D4"/>
+                </a:solidFill>
+                <a:latin typeface="Segoe UI"/>
+              </a:rPr>
+              <a:t>Application Insights</a:t>
+            </a:r>
+          </a:p>
+          <a:p>
+            <a:pPr algn="ctr"/>
+            <a:r>
+              <a:rPr sz="700" b="1">
+                <a:solidFill>
+                  <a:srgbClr val="0078D4"/>
+                </a:solidFill>
+                <a:latin typeface="Segoe UI"/>
+              </a:rPr>
+              <a:t>Telemetry</a:t>
+            </a:r>
+          </a:p>
+        </p:txBody>
+      </p:sp>
+      <p:sp>
+        <p:nvSpPr>
+          <p:cNvPr id="33" name="Rounded Rectangle 32"/>
+          <p:cNvSpPr/>
+          <p:nvPr/>
+        </p:nvSpPr>
+        <p:spPr>
+          <a:xfrm>
+            <a:off x="7406640" y="2130552"/>
+            <a:ext cx="1600200" cy="411480"/>
+          </a:xfrm>
+          <a:prstGeom prst="roundRect">
+            <a:avLst/>
+          </a:prstGeom>
+          <a:solidFill>
+            <a:srgbClr val="EDE4F5"/>
+          </a:solidFill>
+          <a:ln w="15875">
+            <a:solidFill>
+              <a:srgbClr val="742774"/>
+            </a:solidFill>
+          </a:ln>
+          <a:effectLst/>
+        </p:spPr>
+        <p:style>
+          <a:lnRef idx="1">
+            <a:schemeClr val="accent1"/>
+          </a:lnRef>
+          <a:fillRef idx="3">
+            <a:schemeClr val="accent1"/>
+          </a:fillRef>
+          <a:effectRef idx="2">
+            <a:schemeClr val="accent1"/>
+          </a:effectRef>
+          <a:fontRef idx="minor">
+            <a:schemeClr val="lt1"/>
+          </a:fontRef>
+        </p:style>
+        <p:txBody>
+          <a:bodyPr wrap="square" lIns="36000" tIns="18000" rIns="36000" bIns="18000" rtlCol="0" anchor="ctr"/>
+          <a:lstStyle/>
+          <a:p>
+            <a:pPr algn="ctr"/>
+            <a:r>
+              <a:rPr sz="700" b="1">
+                <a:solidFill>
+                  <a:srgbClr val="742774"/>
+                </a:solidFill>
+                <a:latin typeface="Segoe UI"/>
+              </a:rPr>
+              <a:t>Power Platform DLP</a:t>
+            </a:r>
+          </a:p>
+          <a:p>
+            <a:pPr algn="ctr"/>
+            <a:r>
+              <a:rPr sz="700" b="1">
+                <a:solidFill>
+                  <a:srgbClr val="742774"/>
+                </a:solidFill>
+                <a:latin typeface="Segoe UI"/>
+              </a:rPr>
+              <a:t>Connector policies</a:t>
+            </a:r>
+          </a:p>
+        </p:txBody>
+      </p:sp>
+      <p:sp>
+        <p:nvSpPr>
+          <p:cNvPr id="34" name="Rounded Rectangle 33"/>
+          <p:cNvSpPr/>
+          <p:nvPr/>
+        </p:nvSpPr>
+        <p:spPr>
+          <a:xfrm>
+            <a:off x="7406640" y="2587752"/>
+            <a:ext cx="1600200" cy="411480"/>
+          </a:xfrm>
+          <a:prstGeom prst="roundRect">
+            <a:avLst/>
+          </a:prstGeom>
+          <a:solidFill>
+            <a:srgbClr val="DBEAFE"/>
+          </a:solidFill>
+          <a:ln w="15875">
+            <a:solidFill>
+              <a:srgbClr val="0078D4"/>
+            </a:solidFill>
+          </a:ln>
+          <a:effectLst/>
+        </p:spPr>
+        <p:style>
+          <a:lnRef idx="1">
+            <a:schemeClr val="accent1"/>
+          </a:lnRef>
+          <a:fillRef idx="3">
+            <a:schemeClr val="accent1"/>
+          </a:fillRef>
+          <a:effectRef idx="2">
+            <a:schemeClr val="accent1"/>
+          </a:effectRef>
+          <a:fontRef idx="minor">
+            <a:schemeClr val="lt1"/>
+          </a:fontRef>
+        </p:style>
+        <p:txBody>
+          <a:bodyPr wrap="square" lIns="36000" tIns="18000" rIns="36000" bIns="18000" rtlCol="0" anchor="ctr"/>
+          <a:lstStyle/>
+          <a:p>
+            <a:pPr algn="ctr"/>
+            <a:r>
+              <a:rPr sz="700" b="1">
+                <a:solidFill>
+                  <a:srgbClr val="0078D4"/>
+                </a:solidFill>
+                <a:latin typeface="Segoe UI"/>
+              </a:rPr>
+              <a:t>Encryption</a:t>
+            </a:r>
+          </a:p>
+          <a:p>
+            <a:pPr algn="ctr"/>
+            <a:r>
+              <a:rPr sz="700" b="1">
+                <a:solidFill>
+                  <a:srgbClr val="0078D4"/>
+                </a:solidFill>
+                <a:latin typeface="Segoe UI"/>
+              </a:rPr>
+              <a:t>At rest + in transit (TLS 1.2+)</a:t>
+            </a:r>
+          </a:p>
+        </p:txBody>
+      </p:sp>
+      <p:sp>
+        <p:nvSpPr>
+          <p:cNvPr id="35" name="Rounded Rectangle 34"/>
+          <p:cNvSpPr/>
+          <p:nvPr/>
+        </p:nvSpPr>
+        <p:spPr>
+          <a:xfrm>
+            <a:off x="7406640" y="3044952"/>
+            <a:ext cx="1600200" cy="777240"/>
+          </a:xfrm>
+          <a:prstGeom prst="roundRect">
+            <a:avLst/>
+          </a:prstGeom>
+          <a:solidFill>
+            <a:srgbClr val="EDE9FE"/>
+          </a:solidFill>
+          <a:ln w="15875">
+            <a:solidFill>
+              <a:srgbClr val="7C3AED"/>
+            </a:solidFill>
+          </a:ln>
+          <a:effectLst/>
+        </p:spPr>
+        <p:style>
+          <a:lnRef idx="1">
+            <a:schemeClr val="accent1"/>
+          </a:lnRef>
+          <a:fillRef idx="3">
+            <a:schemeClr val="accent1"/>
+          </a:fillRef>
+          <a:effectRef idx="2">
+            <a:schemeClr val="accent1"/>
+          </a:effectRef>
+          <a:fontRef idx="minor">
+            <a:schemeClr val="lt1"/>
+          </a:fontRef>
+        </p:style>
+        <p:txBody>
+          <a:bodyPr wrap="square" lIns="36000" tIns="18000" rIns="36000" bIns="18000" rtlCol="0" anchor="ctr"/>
+          <a:lstStyle/>
+          <a:p>
+            <a:pPr algn="ctr"/>
+            <a:r>
+              <a:rPr sz="700" b="1">
+                <a:solidFill>
+                  <a:srgbClr val="5B21B6"/>
+                </a:solidFill>
+                <a:latin typeface="Segoe UI"/>
+              </a:rPr>
+              <a:t>Compliance Mapping</a:t>
+            </a:r>
+          </a:p>
+          <a:p>
+            <a:pPr algn="ctr"/>
+            <a:r>
+              <a:rPr sz="700" b="1">
+                <a:solidFill>
+                  <a:srgbClr val="5B21B6"/>
+                </a:solidFill>
+                <a:latin typeface="Segoe UI"/>
+              </a:rPr>
+              <a:t>Colorado SB21-169</a:t>
+            </a:r>
+          </a:p>
+          <a:p>
+            <a:pPr algn="ctr"/>
+            <a:r>
+              <a:rPr sz="700" b="1">
+                <a:solidFill>
+                  <a:srgbClr val="5B21B6"/>
+                </a:solidFill>
+                <a:latin typeface="Segoe UI"/>
+              </a:rPr>
+              <a:t>NAIC AI Bulletin</a:t>
+            </a:r>
+          </a:p>
+          <a:p>
+            <a:pPr algn="ctr"/>
+            <a:r>
+              <a:rPr sz="700" b="1">
+                <a:solidFill>
+                  <a:srgbClr val="5B21B6"/>
+                </a:solidFill>
+                <a:latin typeface="Segoe UI"/>
+              </a:rPr>
+              <a:t>NY DFS Circular 7</a:t>
+            </a:r>
+          </a:p>
+          <a:p>
+            <a:pPr algn="ctr"/>
+            <a:r>
+              <a:rPr sz="700" b="1">
+                <a:solidFill>
+                  <a:srgbClr val="5B21B6"/>
+                </a:solidFill>
+                <a:latin typeface="Segoe UI"/>
+              </a:rPr>
+              <a:t>CA AB 2930 (pending)</a:t>
+            </a:r>
+          </a:p>
+        </p:txBody>
+      </p:sp>
+      <p:cxnSp>
+        <p:nvCxnSpPr>
+          <p:cNvPr id="36" name="Connector 35"/>
+          <p:cNvCxnSpPr/>
+          <p:nvPr/>
+        </p:nvCxnSpPr>
+        <p:spPr>
+          <a:xfrm flipH="1">
+            <a:off x="1060704" y="813816"/>
+            <a:ext cx="2779776" cy="54864"/>
+          </a:xfrm>
+          <a:prstGeom prst="line">
+            <a:avLst/>
+          </a:prstGeom>
+          <a:ln w="12700">
+            <a:solidFill>
+              <a:srgbClr val="5A6680"/>
+            </a:solidFill>
+            <a:tailEnd type="triangle" w="med"/>
+          </a:ln>
+        </p:spPr>
+        <p:style>
+          <a:lnRef idx="2">
+            <a:schemeClr val="accent1"/>
+          </a:lnRef>
+          <a:fillRef idx="0">
+            <a:schemeClr val="accent1"/>
+          </a:fillRef>
+          <a:effectRef idx="1">
+            <a:schemeClr val="accent1"/>
+          </a:effectRef>
+          <a:fontRef idx="minor">
+            <a:schemeClr val="tx1"/>
+          </a:fontRef>
+        </p:style>
+      </p:cxnSp>
+      <p:cxnSp>
+        <p:nvCxnSpPr>
+          <p:cNvPr id="37" name="Connector 36"/>
+          <p:cNvCxnSpPr/>
+          <p:nvPr/>
+        </p:nvCxnSpPr>
+        <p:spPr>
+          <a:xfrm flipH="1">
+            <a:off x="2450592" y="813816"/>
+            <a:ext cx="1389888" cy="54864"/>
+          </a:xfrm>
+          <a:prstGeom prst="line">
+            <a:avLst/>
+          </a:prstGeom>
+          <a:ln w="12700">
+            <a:solidFill>
+              <a:srgbClr val="5A6680"/>
+            </a:solidFill>
+            <a:tailEnd type="triangle" w="med"/>
+          </a:ln>
+        </p:spPr>
+        <p:style>
+          <a:lnRef idx="2">
+            <a:schemeClr val="accent1"/>
+          </a:lnRef>
+          <a:fillRef idx="0">
+            <a:schemeClr val="accent1"/>
+          </a:fillRef>
+          <a:effectRef idx="1">
+            <a:schemeClr val="accent1"/>
+          </a:effectRef>
+          <a:fontRef idx="minor">
+            <a:schemeClr val="tx1"/>
+          </a:fontRef>
+        </p:style>
+      </p:cxnSp>
+      <p:cxnSp>
+        <p:nvCxnSpPr>
+          <p:cNvPr id="38" name="Connector 37"/>
+          <p:cNvCxnSpPr/>
+          <p:nvPr/>
+        </p:nvCxnSpPr>
+        <p:spPr>
+          <a:xfrm>
+            <a:off x="3840480" y="813816"/>
+            <a:ext cx="0" cy="54864"/>
+          </a:xfrm>
+          <a:prstGeom prst="line">
+            <a:avLst/>
+          </a:prstGeom>
+          <a:ln w="12700">
+            <a:solidFill>
+              <a:srgbClr val="5A6680"/>
+            </a:solidFill>
+            <a:tailEnd type="triangle" w="med"/>
+          </a:ln>
+        </p:spPr>
+        <p:style>
+          <a:lnRef idx="2">
+            <a:schemeClr val="accent1"/>
+          </a:lnRef>
+          <a:fillRef idx="0">
+            <a:schemeClr val="accent1"/>
+          </a:fillRef>
+          <a:effectRef idx="1">
+            <a:schemeClr val="accent1"/>
+          </a:effectRef>
+          <a:fontRef idx="minor">
+            <a:schemeClr val="tx1"/>
+          </a:fontRef>
+        </p:style>
+      </p:cxnSp>
+      <p:cxnSp>
+        <p:nvCxnSpPr>
+          <p:cNvPr id="39" name="Connector 38"/>
+          <p:cNvCxnSpPr/>
+          <p:nvPr/>
+        </p:nvCxnSpPr>
+        <p:spPr>
+          <a:xfrm>
+            <a:off x="3840480" y="813816"/>
+            <a:ext cx="1389888" cy="54864"/>
+          </a:xfrm>
+          <a:prstGeom prst="line">
+            <a:avLst/>
+          </a:prstGeom>
+          <a:ln w="12700">
+            <a:solidFill>
+              <a:srgbClr val="5A6680"/>
+            </a:solidFill>
+            <a:tailEnd type="triangle" w="med"/>
+          </a:ln>
+        </p:spPr>
+        <p:style>
+          <a:lnRef idx="2">
+            <a:schemeClr val="accent1"/>
+          </a:lnRef>
+          <a:fillRef idx="0">
+            <a:schemeClr val="accent1"/>
+          </a:fillRef>
+          <a:effectRef idx="1">
+            <a:schemeClr val="accent1"/>
+          </a:effectRef>
+          <a:fontRef idx="minor">
+            <a:schemeClr val="tx1"/>
+          </a:fontRef>
+        </p:style>
+      </p:cxnSp>
+      <p:cxnSp>
+        <p:nvCxnSpPr>
+          <p:cNvPr id="40" name="Connector 39"/>
+          <p:cNvCxnSpPr/>
+          <p:nvPr/>
+        </p:nvCxnSpPr>
+        <p:spPr>
+          <a:xfrm>
+            <a:off x="3840480" y="813816"/>
+            <a:ext cx="2779776" cy="54864"/>
+          </a:xfrm>
+          <a:prstGeom prst="line">
+            <a:avLst/>
+          </a:prstGeom>
+          <a:ln w="12700">
+            <a:solidFill>
+              <a:srgbClr val="5A6680"/>
+            </a:solidFill>
+            <a:tailEnd type="triangle" w="med"/>
+          </a:ln>
+        </p:spPr>
+        <p:style>
+          <a:lnRef idx="2">
+            <a:schemeClr val="accent1"/>
+          </a:lnRef>
+          <a:fillRef idx="0">
+            <a:schemeClr val="accent1"/>
+          </a:fillRef>
+          <a:effectRef idx="1">
+            <a:schemeClr val="accent1"/>
+          </a:effectRef>
+          <a:fontRef idx="minor">
+            <a:schemeClr val="tx1"/>
+          </a:fontRef>
+        </p:style>
+      </p:cxnSp>
+      <p:cxnSp>
+        <p:nvCxnSpPr>
+          <p:cNvPr id="41" name="Connector 40"/>
+          <p:cNvCxnSpPr/>
+          <p:nvPr/>
+        </p:nvCxnSpPr>
+        <p:spPr>
+          <a:xfrm>
+            <a:off x="1060704" y="1179576"/>
+            <a:ext cx="242316" cy="54864"/>
+          </a:xfrm>
+          <a:prstGeom prst="line">
+            <a:avLst/>
+          </a:prstGeom>
+          <a:ln w="12700">
+            <a:solidFill>
+              <a:srgbClr val="5A6680"/>
+            </a:solidFill>
+            <a:tailEnd type="triangle" w="med"/>
+          </a:ln>
+        </p:spPr>
+        <p:style>
+          <a:lnRef idx="2">
+            <a:schemeClr val="accent1"/>
+          </a:lnRef>
+          <a:fillRef idx="0">
+            <a:schemeClr val="accent1"/>
+          </a:fillRef>
+          <a:effectRef idx="1">
+            <a:schemeClr val="accent1"/>
+          </a:effectRef>
+          <a:fontRef idx="minor">
+            <a:schemeClr val="tx1"/>
+          </a:fontRef>
+        </p:style>
+      </p:cxnSp>
+      <p:cxnSp>
+        <p:nvCxnSpPr>
+          <p:cNvPr id="42" name="Connector 41"/>
+          <p:cNvCxnSpPr/>
+          <p:nvPr/>
+        </p:nvCxnSpPr>
+        <p:spPr>
+          <a:xfrm flipH="1">
+            <a:off x="1303020" y="1179576"/>
+            <a:ext cx="1147572" cy="54864"/>
+          </a:xfrm>
+          <a:prstGeom prst="line">
+            <a:avLst/>
+          </a:prstGeom>
+          <a:ln w="12700">
+            <a:solidFill>
+              <a:srgbClr val="5A6680"/>
+            </a:solidFill>
+            <a:tailEnd type="triangle" w="med"/>
+          </a:ln>
+        </p:spPr>
+        <p:style>
+          <a:lnRef idx="2">
+            <a:schemeClr val="accent1"/>
+          </a:lnRef>
+          <a:fillRef idx="0">
+            <a:schemeClr val="accent1"/>
+          </a:fillRef>
+          <a:effectRef idx="1">
+            <a:schemeClr val="accent1"/>
+          </a:effectRef>
+          <a:fontRef idx="minor">
+            <a:schemeClr val="tx1"/>
+          </a:fontRef>
+        </p:style>
+      </p:cxnSp>
+      <p:cxnSp>
+        <p:nvCxnSpPr>
+          <p:cNvPr id="43" name="Connector 42"/>
+          <p:cNvCxnSpPr/>
+          <p:nvPr/>
+        </p:nvCxnSpPr>
+        <p:spPr>
+          <a:xfrm>
+            <a:off x="3840480" y="1179576"/>
+            <a:ext cx="845820" cy="54864"/>
+          </a:xfrm>
+          <a:prstGeom prst="line">
+            <a:avLst/>
+          </a:prstGeom>
+          <a:ln w="12700">
+            <a:solidFill>
+              <a:srgbClr val="5A6680"/>
+            </a:solidFill>
+            <a:tailEnd type="triangle" w="med"/>
+          </a:ln>
+        </p:spPr>
+        <p:style>
+          <a:lnRef idx="2">
+            <a:schemeClr val="accent1"/>
+          </a:lnRef>
+          <a:fillRef idx="0">
+            <a:schemeClr val="accent1"/>
+          </a:fillRef>
+          <a:effectRef idx="1">
+            <a:schemeClr val="accent1"/>
+          </a:effectRef>
+          <a:fontRef idx="minor">
+            <a:schemeClr val="tx1"/>
+          </a:fontRef>
+        </p:style>
+      </p:cxnSp>
+      <p:cxnSp>
+        <p:nvCxnSpPr>
+          <p:cNvPr id="44" name="Connector 43"/>
+          <p:cNvCxnSpPr/>
+          <p:nvPr/>
+        </p:nvCxnSpPr>
+        <p:spPr>
+          <a:xfrm>
+            <a:off x="5230368" y="1179576"/>
+            <a:ext cx="1147572" cy="54864"/>
+          </a:xfrm>
+          <a:prstGeom prst="line">
+            <a:avLst/>
+          </a:prstGeom>
+          <a:ln w="12700">
+            <a:solidFill>
+              <a:srgbClr val="5A6680"/>
+            </a:solidFill>
+            <a:tailEnd type="triangle" w="med"/>
+          </a:ln>
+        </p:spPr>
+        <p:style>
+          <a:lnRef idx="2">
+            <a:schemeClr val="accent1"/>
+          </a:lnRef>
+          <a:fillRef idx="0">
+            <a:schemeClr val="accent1"/>
+          </a:fillRef>
+          <a:effectRef idx="1">
+            <a:schemeClr val="accent1"/>
+          </a:effectRef>
+          <a:fontRef idx="minor">
+            <a:schemeClr val="tx1"/>
+          </a:fontRef>
+        </p:style>
+      </p:cxnSp>
+      <p:cxnSp>
+        <p:nvCxnSpPr>
+          <p:cNvPr id="45" name="Connector 44"/>
+          <p:cNvCxnSpPr/>
+          <p:nvPr/>
+        </p:nvCxnSpPr>
+        <p:spPr>
+          <a:xfrm flipH="1">
+            <a:off x="6377940" y="1179576"/>
+            <a:ext cx="242316" cy="54864"/>
+          </a:xfrm>
+          <a:prstGeom prst="line">
+            <a:avLst/>
+          </a:prstGeom>
+          <a:ln w="12700">
+            <a:solidFill>
+              <a:srgbClr val="5A6680"/>
+            </a:solidFill>
+            <a:tailEnd type="triangle" w="med"/>
+          </a:ln>
+        </p:spPr>
+        <p:style>
+          <a:lnRef idx="2">
+            <a:schemeClr val="accent1"/>
+          </a:lnRef>
+          <a:fillRef idx="0">
+            <a:schemeClr val="accent1"/>
+          </a:fillRef>
+          <a:effectRef idx="1">
+            <a:schemeClr val="accent1"/>
+          </a:effectRef>
+          <a:fontRef idx="minor">
+            <a:schemeClr val="tx1"/>
+          </a:fontRef>
+        </p:style>
+      </p:cxnSp>
+      <p:cxnSp>
+        <p:nvCxnSpPr>
+          <p:cNvPr id="46" name="Connector 45"/>
+          <p:cNvCxnSpPr/>
+          <p:nvPr/>
+        </p:nvCxnSpPr>
+        <p:spPr>
+          <a:xfrm>
+            <a:off x="1303020" y="1545336"/>
+            <a:ext cx="2537460" cy="54864"/>
+          </a:xfrm>
+          <a:prstGeom prst="line">
+            <a:avLst/>
+          </a:prstGeom>
+          <a:ln w="12700">
+            <a:solidFill>
+              <a:srgbClr val="5A6680"/>
+            </a:solidFill>
+            <a:tailEnd type="triangle" w="med"/>
+          </a:ln>
+        </p:spPr>
+        <p:style>
+          <a:lnRef idx="2">
+            <a:schemeClr val="accent1"/>
+          </a:lnRef>
+          <a:fillRef idx="0">
+            <a:schemeClr val="accent1"/>
+          </a:fillRef>
+          <a:effectRef idx="1">
+            <a:schemeClr val="accent1"/>
+          </a:effectRef>
+          <a:fontRef idx="minor">
+            <a:schemeClr val="tx1"/>
+          </a:fontRef>
+        </p:style>
+      </p:cxnSp>
+      <p:cxnSp>
+        <p:nvCxnSpPr>
+          <p:cNvPr id="47" name="Connector 46"/>
+          <p:cNvCxnSpPr/>
+          <p:nvPr/>
+        </p:nvCxnSpPr>
+        <p:spPr>
+          <a:xfrm>
+            <a:off x="2994660" y="1545336"/>
+            <a:ext cx="845820" cy="54864"/>
+          </a:xfrm>
+          <a:prstGeom prst="line">
+            <a:avLst/>
+          </a:prstGeom>
+          <a:ln w="12700">
+            <a:solidFill>
+              <a:srgbClr val="5A6680"/>
+            </a:solidFill>
+            <a:tailEnd type="triangle" w="med"/>
+          </a:ln>
+        </p:spPr>
+        <p:style>
+          <a:lnRef idx="2">
+            <a:schemeClr val="accent1"/>
+          </a:lnRef>
+          <a:fillRef idx="0">
+            <a:schemeClr val="accent1"/>
+          </a:fillRef>
+          <a:effectRef idx="1">
+            <a:schemeClr val="accent1"/>
+          </a:effectRef>
+          <a:fontRef idx="minor">
+            <a:schemeClr val="tx1"/>
+          </a:fontRef>
+        </p:style>
+      </p:cxnSp>
+      <p:cxnSp>
+        <p:nvCxnSpPr>
+          <p:cNvPr id="48" name="Connector 47"/>
+          <p:cNvCxnSpPr/>
+          <p:nvPr/>
+        </p:nvCxnSpPr>
+        <p:spPr>
+          <a:xfrm flipH="1">
+            <a:off x="3840480" y="1545336"/>
+            <a:ext cx="845820" cy="54864"/>
+          </a:xfrm>
+          <a:prstGeom prst="line">
+            <a:avLst/>
+          </a:prstGeom>
+          <a:ln w="12700">
+            <a:solidFill>
+              <a:srgbClr val="5A6680"/>
+            </a:solidFill>
+            <a:tailEnd type="triangle" w="med"/>
+          </a:ln>
+        </p:spPr>
+        <p:style>
+          <a:lnRef idx="2">
+            <a:schemeClr val="accent1"/>
+          </a:lnRef>
+          <a:fillRef idx="0">
+            <a:schemeClr val="accent1"/>
+          </a:fillRef>
+          <a:effectRef idx="1">
+            <a:schemeClr val="accent1"/>
+          </a:effectRef>
+          <a:fontRef idx="minor">
+            <a:schemeClr val="tx1"/>
+          </a:fontRef>
+        </p:style>
+      </p:cxnSp>
+      <p:cxnSp>
+        <p:nvCxnSpPr>
+          <p:cNvPr id="49" name="Connector 48"/>
+          <p:cNvCxnSpPr/>
+          <p:nvPr/>
+        </p:nvCxnSpPr>
+        <p:spPr>
+          <a:xfrm flipH="1">
+            <a:off x="3840480" y="1545336"/>
+            <a:ext cx="2537460" cy="54864"/>
+          </a:xfrm>
+          <a:prstGeom prst="line">
+            <a:avLst/>
+          </a:prstGeom>
+          <a:ln w="12700">
+            <a:solidFill>
+              <a:srgbClr val="5A6680"/>
+            </a:solidFill>
+            <a:tailEnd type="triangle" w="med"/>
+          </a:ln>
+        </p:spPr>
+        <p:style>
+          <a:lnRef idx="2">
+            <a:schemeClr val="accent1"/>
+          </a:lnRef>
+          <a:fillRef idx="0">
+            <a:schemeClr val="accent1"/>
+          </a:fillRef>
+          <a:effectRef idx="1">
+            <a:schemeClr val="accent1"/>
+          </a:effectRef>
+          <a:fontRef idx="minor">
+            <a:schemeClr val="tx1"/>
+          </a:fontRef>
+        </p:style>
+      </p:cxnSp>
+      <p:cxnSp>
+        <p:nvCxnSpPr>
+          <p:cNvPr id="50" name="Connector 49"/>
+          <p:cNvCxnSpPr/>
+          <p:nvPr/>
+        </p:nvCxnSpPr>
+        <p:spPr>
+          <a:xfrm>
+            <a:off x="3840480" y="1911096"/>
+            <a:ext cx="0" cy="54864"/>
+          </a:xfrm>
+          <a:prstGeom prst="line">
+            <a:avLst/>
+          </a:prstGeom>
+          <a:ln w="19050">
+            <a:solidFill>
+              <a:srgbClr val="5A6680"/>
+            </a:solidFill>
+            <a:tailEnd type="triangle" w="med"/>
+          </a:ln>
+        </p:spPr>
+        <p:style>
+          <a:lnRef idx="2">
+            <a:schemeClr val="accent1"/>
+          </a:lnRef>
+          <a:fillRef idx="0">
+            <a:schemeClr val="accent1"/>
+          </a:fillRef>
+          <a:effectRef idx="1">
+            <a:schemeClr val="accent1"/>
+          </a:effectRef>
+          <a:fontRef idx="minor">
+            <a:schemeClr val="tx1"/>
+          </a:fontRef>
+        </p:style>
+      </p:cxnSp>
+      <p:cxnSp>
+        <p:nvCxnSpPr>
+          <p:cNvPr id="51" name="Connector 50"/>
+          <p:cNvCxnSpPr/>
+          <p:nvPr/>
+        </p:nvCxnSpPr>
+        <p:spPr>
+          <a:xfrm flipH="1">
+            <a:off x="1303020" y="2276856"/>
+            <a:ext cx="2537460" cy="54864"/>
+          </a:xfrm>
+          <a:prstGeom prst="line">
+            <a:avLst/>
+          </a:prstGeom>
+          <a:ln w="12700">
+            <a:solidFill>
+              <a:srgbClr val="5A6680"/>
+            </a:solidFill>
+            <a:tailEnd type="triangle" w="med"/>
+          </a:ln>
+        </p:spPr>
+        <p:style>
+          <a:lnRef idx="2">
+            <a:schemeClr val="accent1"/>
+          </a:lnRef>
+          <a:fillRef idx="0">
+            <a:schemeClr val="accent1"/>
+          </a:fillRef>
+          <a:effectRef idx="1">
+            <a:schemeClr val="accent1"/>
+          </a:effectRef>
+          <a:fontRef idx="minor">
+            <a:schemeClr val="tx1"/>
+          </a:fontRef>
+        </p:style>
+      </p:cxnSp>
+      <p:cxnSp>
+        <p:nvCxnSpPr>
+          <p:cNvPr id="52" name="Connector 51"/>
+          <p:cNvCxnSpPr/>
+          <p:nvPr/>
+        </p:nvCxnSpPr>
+        <p:spPr>
+          <a:xfrm flipH="1">
+            <a:off x="2994660" y="2276856"/>
+            <a:ext cx="845820" cy="54864"/>
+          </a:xfrm>
+          <a:prstGeom prst="line">
+            <a:avLst/>
+          </a:prstGeom>
+          <a:ln w="12700">
+            <a:solidFill>
+              <a:srgbClr val="5A6680"/>
+            </a:solidFill>
+            <a:tailEnd type="triangle" w="med"/>
+          </a:ln>
+        </p:spPr>
+        <p:style>
+          <a:lnRef idx="2">
+            <a:schemeClr val="accent1"/>
+          </a:lnRef>
+          <a:fillRef idx="0">
+            <a:schemeClr val="accent1"/>
+          </a:fillRef>
+          <a:effectRef idx="1">
+            <a:schemeClr val="accent1"/>
+          </a:effectRef>
+          <a:fontRef idx="minor">
+            <a:schemeClr val="tx1"/>
+          </a:fontRef>
+        </p:style>
+      </p:cxnSp>
+      <p:cxnSp>
+        <p:nvCxnSpPr>
+          <p:cNvPr id="53" name="Connector 52"/>
+          <p:cNvCxnSpPr/>
+          <p:nvPr/>
+        </p:nvCxnSpPr>
+        <p:spPr>
+          <a:xfrm>
+            <a:off x="3840480" y="2276856"/>
+            <a:ext cx="845820" cy="54864"/>
+          </a:xfrm>
+          <a:prstGeom prst="line">
+            <a:avLst/>
+          </a:prstGeom>
+          <a:ln w="12700">
+            <a:solidFill>
+              <a:srgbClr val="5A6680"/>
+            </a:solidFill>
+            <a:tailEnd type="triangle" w="med"/>
+          </a:ln>
+        </p:spPr>
+        <p:style>
+          <a:lnRef idx="2">
+            <a:schemeClr val="accent1"/>
+          </a:lnRef>
+          <a:fillRef idx="0">
+            <a:schemeClr val="accent1"/>
+          </a:fillRef>
+          <a:effectRef idx="1">
+            <a:schemeClr val="accent1"/>
+          </a:effectRef>
+          <a:fontRef idx="minor">
+            <a:schemeClr val="tx1"/>
+          </a:fontRef>
+        </p:style>
+      </p:cxnSp>
+      <p:cxnSp>
+        <p:nvCxnSpPr>
+          <p:cNvPr id="54" name="Connector 53"/>
+          <p:cNvCxnSpPr/>
+          <p:nvPr/>
+        </p:nvCxnSpPr>
+        <p:spPr>
+          <a:xfrm>
+            <a:off x="3840480" y="2276856"/>
+            <a:ext cx="2537460" cy="54864"/>
+          </a:xfrm>
+          <a:prstGeom prst="line">
+            <a:avLst/>
+          </a:prstGeom>
+          <a:ln w="12700">
+            <a:solidFill>
+              <a:srgbClr val="5A6680"/>
+            </a:solidFill>
+            <a:tailEnd type="triangle" w="med"/>
+          </a:ln>
+        </p:spPr>
+        <p:style>
+          <a:lnRef idx="2">
+            <a:schemeClr val="accent1"/>
+          </a:lnRef>
+          <a:fillRef idx="0">
+            <a:schemeClr val="accent1"/>
+          </a:fillRef>
+          <a:effectRef idx="1">
+            <a:schemeClr val="accent1"/>
+          </a:effectRef>
+          <a:fontRef idx="minor">
+            <a:schemeClr val="tx1"/>
+          </a:fontRef>
+        </p:style>
+      </p:cxnSp>
+      <p:cxnSp>
+        <p:nvCxnSpPr>
+          <p:cNvPr id="55" name="Connector 54"/>
+          <p:cNvCxnSpPr/>
+          <p:nvPr/>
+        </p:nvCxnSpPr>
+        <p:spPr>
+          <a:xfrm>
+            <a:off x="1303020" y="2834640"/>
+            <a:ext cx="0" cy="54864"/>
+          </a:xfrm>
+          <a:prstGeom prst="line">
+            <a:avLst/>
+          </a:prstGeom>
+          <a:ln w="19050">
+            <a:solidFill>
+              <a:srgbClr val="D99416"/>
+            </a:solidFill>
+            <a:tailEnd type="triangle" w="med"/>
+          </a:ln>
+        </p:spPr>
+        <p:style>
+          <a:lnRef idx="2">
+            <a:schemeClr val="accent1"/>
+          </a:lnRef>
+          <a:fillRef idx="0">
+            <a:schemeClr val="accent1"/>
+          </a:fillRef>
+          <a:effectRef idx="1">
+            <a:schemeClr val="accent1"/>
+          </a:effectRef>
+          <a:fontRef idx="minor">
+            <a:schemeClr val="tx1"/>
+          </a:fontRef>
+        </p:style>
+      </p:cxnSp>
+      <p:cxnSp>
+        <p:nvCxnSpPr>
+          <p:cNvPr id="56" name="Connector 55"/>
+          <p:cNvCxnSpPr/>
+          <p:nvPr/>
+        </p:nvCxnSpPr>
+        <p:spPr>
+          <a:xfrm>
+            <a:off x="2994660" y="2834640"/>
+            <a:ext cx="0" cy="54864"/>
+          </a:xfrm>
+          <a:prstGeom prst="line">
+            <a:avLst/>
+          </a:prstGeom>
+          <a:ln w="19050">
+            <a:solidFill>
+              <a:srgbClr val="D99416"/>
+            </a:solidFill>
+            <a:tailEnd type="triangle" w="med"/>
+          </a:ln>
+        </p:spPr>
+        <p:style>
+          <a:lnRef idx="2">
+            <a:schemeClr val="accent1"/>
+          </a:lnRef>
+          <a:fillRef idx="0">
+            <a:schemeClr val="accent1"/>
+          </a:fillRef>
+          <a:effectRef idx="1">
+            <a:schemeClr val="accent1"/>
+          </a:effectRef>
+          <a:fontRef idx="minor">
+            <a:schemeClr val="tx1"/>
+          </a:fontRef>
+        </p:style>
+      </p:cxnSp>
+      <p:cxnSp>
+        <p:nvCxnSpPr>
+          <p:cNvPr id="57" name="Connector 56"/>
+          <p:cNvCxnSpPr/>
+          <p:nvPr/>
+        </p:nvCxnSpPr>
+        <p:spPr>
+          <a:xfrm>
+            <a:off x="4686300" y="2834640"/>
+            <a:ext cx="0" cy="54864"/>
+          </a:xfrm>
+          <a:prstGeom prst="line">
+            <a:avLst/>
+          </a:prstGeom>
+          <a:ln w="19050">
+            <a:solidFill>
+              <a:srgbClr val="D99416"/>
+            </a:solidFill>
+            <a:tailEnd type="triangle" w="med"/>
+          </a:ln>
+        </p:spPr>
+        <p:style>
+          <a:lnRef idx="2">
+            <a:schemeClr val="accent1"/>
+          </a:lnRef>
+          <a:fillRef idx="0">
+            <a:schemeClr val="accent1"/>
+          </a:fillRef>
+          <a:effectRef idx="1">
+            <a:schemeClr val="accent1"/>
+          </a:effectRef>
+          <a:fontRef idx="minor">
+            <a:schemeClr val="tx1"/>
+          </a:fontRef>
+        </p:style>
+      </p:cxnSp>
+      <p:cxnSp>
+        <p:nvCxnSpPr>
+          <p:cNvPr id="58" name="Connector 57"/>
+          <p:cNvCxnSpPr/>
+          <p:nvPr/>
+        </p:nvCxnSpPr>
+        <p:spPr>
+          <a:xfrm>
+            <a:off x="6377940" y="2834640"/>
+            <a:ext cx="0" cy="54864"/>
+          </a:xfrm>
+          <a:prstGeom prst="line">
+            <a:avLst/>
+          </a:prstGeom>
+          <a:ln w="19050">
+            <a:solidFill>
+              <a:srgbClr val="D99416"/>
+            </a:solidFill>
+            <a:tailEnd type="triangle" w="med"/>
+          </a:ln>
+        </p:spPr>
+        <p:style>
+          <a:lnRef idx="2">
+            <a:schemeClr val="accent1"/>
+          </a:lnRef>
+          <a:fillRef idx="0">
+            <a:schemeClr val="accent1"/>
+          </a:fillRef>
+          <a:effectRef idx="1">
+            <a:schemeClr val="accent1"/>
+          </a:effectRef>
+          <a:fontRef idx="minor">
+            <a:schemeClr val="tx1"/>
+          </a:fontRef>
+        </p:style>
+      </p:cxnSp>
+      <p:cxnSp>
+        <p:nvCxnSpPr>
+          <p:cNvPr id="59" name="Connector 58"/>
+          <p:cNvCxnSpPr/>
+          <p:nvPr/>
+        </p:nvCxnSpPr>
+        <p:spPr>
+          <a:xfrm>
+            <a:off x="3840480" y="3200400"/>
+            <a:ext cx="0" cy="54864"/>
+          </a:xfrm>
+          <a:prstGeom prst="line">
+            <a:avLst/>
+          </a:prstGeom>
+          <a:ln w="19050">
+            <a:solidFill>
+              <a:srgbClr val="5A6680"/>
+            </a:solidFill>
+            <a:tailEnd type="triangle" w="med"/>
+          </a:ln>
+        </p:spPr>
+        <p:style>
+          <a:lnRef idx="2">
+            <a:schemeClr val="accent1"/>
+          </a:lnRef>
+          <a:fillRef idx="0">
+            <a:schemeClr val="accent1"/>
+          </a:fillRef>
+          <a:effectRef idx="1">
+            <a:schemeClr val="accent1"/>
+          </a:effectRef>
+          <a:fontRef idx="minor">
+            <a:schemeClr val="tx1"/>
+          </a:fontRef>
+        </p:style>
+      </p:cxnSp>
+      <p:cxnSp>
+        <p:nvCxnSpPr>
+          <p:cNvPr id="60" name="Connector 59"/>
+          <p:cNvCxnSpPr/>
+          <p:nvPr/>
+        </p:nvCxnSpPr>
+        <p:spPr>
+          <a:xfrm flipH="1">
+            <a:off x="1220724" y="3566160"/>
+            <a:ext cx="2619756" cy="54864"/>
+          </a:xfrm>
+          <a:prstGeom prst="line">
+            <a:avLst/>
+          </a:prstGeom>
+          <a:ln w="19050">
+            <a:solidFill>
+              <a:srgbClr val="5A6680"/>
+            </a:solidFill>
+            <a:tailEnd type="triangle" w="med"/>
+          </a:ln>
+        </p:spPr>
+        <p:style>
+          <a:lnRef idx="2">
+            <a:schemeClr val="accent1"/>
+          </a:lnRef>
+          <a:fillRef idx="0">
+            <a:schemeClr val="accent1"/>
+          </a:fillRef>
+          <a:effectRef idx="1">
+            <a:schemeClr val="accent1"/>
+          </a:effectRef>
+          <a:fontRef idx="minor">
+            <a:schemeClr val="tx1"/>
+          </a:fontRef>
+        </p:style>
+      </p:cxnSp>
+      <p:cxnSp>
+        <p:nvCxnSpPr>
+          <p:cNvPr id="61" name="Connector 60"/>
+          <p:cNvCxnSpPr/>
+          <p:nvPr/>
+        </p:nvCxnSpPr>
+        <p:spPr>
+          <a:xfrm flipV="1">
+            <a:off x="1860804" y="3776472"/>
+            <a:ext cx="54864" cy="27432"/>
+          </a:xfrm>
+          <a:prstGeom prst="line">
+            <a:avLst/>
+          </a:prstGeom>
+          <a:ln w="19050">
+            <a:solidFill>
+              <a:srgbClr val="16A34A"/>
+            </a:solidFill>
+            <a:tailEnd type="triangle" w="med"/>
+          </a:ln>
+        </p:spPr>
+        <p:style>
+          <a:lnRef idx="2">
+            <a:schemeClr val="accent1"/>
+          </a:lnRef>
+          <a:fillRef idx="0">
+            <a:schemeClr val="accent1"/>
+          </a:fillRef>
+          <a:effectRef idx="1">
+            <a:schemeClr val="accent1"/>
+          </a:effectRef>
+          <a:fontRef idx="minor">
+            <a:schemeClr val="tx1"/>
+          </a:fontRef>
+        </p:style>
+      </p:cxnSp>
+      <p:cxnSp>
+        <p:nvCxnSpPr>
+          <p:cNvPr id="62" name="Connector 61"/>
+          <p:cNvCxnSpPr/>
+          <p:nvPr/>
+        </p:nvCxnSpPr>
+        <p:spPr>
+          <a:xfrm flipV="1">
+            <a:off x="1860804" y="3776472"/>
+            <a:ext cx="1801368" cy="27432"/>
+          </a:xfrm>
+          <a:prstGeom prst="line">
+            <a:avLst/>
+          </a:prstGeom>
+          <a:ln w="19050">
+            <a:solidFill>
+              <a:srgbClr val="D97706"/>
+            </a:solidFill>
+            <a:tailEnd type="triangle" w="med"/>
+          </a:ln>
+        </p:spPr>
+        <p:style>
+          <a:lnRef idx="2">
+            <a:schemeClr val="accent1"/>
+          </a:lnRef>
+          <a:fillRef idx="0">
+            <a:schemeClr val="accent1"/>
+          </a:fillRef>
+          <a:effectRef idx="1">
+            <a:schemeClr val="accent1"/>
+          </a:effectRef>
+          <a:fontRef idx="minor">
+            <a:schemeClr val="tx1"/>
+          </a:fontRef>
+        </p:style>
+      </p:cxnSp>
+      <p:cxnSp>
+        <p:nvCxnSpPr>
+          <p:cNvPr id="63" name="Connector 62"/>
+          <p:cNvCxnSpPr/>
+          <p:nvPr/>
+        </p:nvCxnSpPr>
+        <p:spPr>
+          <a:xfrm flipV="1">
+            <a:off x="1860804" y="3776472"/>
+            <a:ext cx="3547872" cy="27432"/>
+          </a:xfrm>
+          <a:prstGeom prst="line">
+            <a:avLst/>
+          </a:prstGeom>
+          <a:ln w="19050">
+            <a:solidFill>
+              <a:srgbClr val="DC2626"/>
+            </a:solidFill>
+            <a:tailEnd type="triangle" w="med"/>
+          </a:ln>
+        </p:spPr>
+        <p:style>
+          <a:lnRef idx="2">
+            <a:schemeClr val="accent1"/>
+          </a:lnRef>
+          <a:fillRef idx="0">
+            <a:schemeClr val="accent1"/>
+          </a:fillRef>
+          <a:effectRef idx="1">
+            <a:schemeClr val="accent1"/>
+          </a:effectRef>
+          <a:fontRef idx="minor">
+            <a:schemeClr val="tx1"/>
+          </a:fontRef>
+        </p:style>
+      </p:cxnSp>
+      <p:cxnSp>
+        <p:nvCxnSpPr>
+          <p:cNvPr id="64" name="Connector 63"/>
+          <p:cNvCxnSpPr/>
+          <p:nvPr/>
+        </p:nvCxnSpPr>
+        <p:spPr>
+          <a:xfrm flipH="1">
+            <a:off x="2651760" y="3931920"/>
+            <a:ext cx="109728" cy="54864"/>
+          </a:xfrm>
+          <a:prstGeom prst="line">
+            <a:avLst/>
+          </a:prstGeom>
+          <a:ln w="12700">
+            <a:solidFill>
+              <a:srgbClr val="5A6680"/>
+            </a:solidFill>
+            <a:tailEnd type="triangle" w="med"/>
+          </a:ln>
+        </p:spPr>
+        <p:style>
+          <a:lnRef idx="2">
+            <a:schemeClr val="accent1"/>
+          </a:lnRef>
+          <a:fillRef idx="0">
+            <a:schemeClr val="accent1"/>
+          </a:fillRef>
+          <a:effectRef idx="1">
+            <a:schemeClr val="accent1"/>
+          </a:effectRef>
+          <a:fontRef idx="minor">
+            <a:schemeClr val="tx1"/>
+          </a:fontRef>
+        </p:style>
+      </p:cxnSp>
+      <p:cxnSp>
+        <p:nvCxnSpPr>
+          <p:cNvPr id="65" name="Connector 64"/>
+          <p:cNvCxnSpPr/>
+          <p:nvPr/>
+        </p:nvCxnSpPr>
+        <p:spPr>
+          <a:xfrm flipH="1">
+            <a:off x="2651760" y="3931920"/>
+            <a:ext cx="1856232" cy="54864"/>
+          </a:xfrm>
+          <a:prstGeom prst="line">
+            <a:avLst/>
+          </a:prstGeom>
+          <a:ln w="12700">
+            <a:solidFill>
+              <a:srgbClr val="5A6680"/>
+            </a:solidFill>
+            <a:tailEnd type="triangle" w="med"/>
+          </a:ln>
+        </p:spPr>
+        <p:style>
+          <a:lnRef idx="2">
+            <a:schemeClr val="accent1"/>
+          </a:lnRef>
+          <a:fillRef idx="0">
+            <a:schemeClr val="accent1"/>
+          </a:fillRef>
+          <a:effectRef idx="1">
+            <a:schemeClr val="accent1"/>
+          </a:effectRef>
+          <a:fontRef idx="minor">
+            <a:schemeClr val="tx1"/>
+          </a:fontRef>
+        </p:style>
+      </p:cxnSp>
+      <p:cxnSp>
+        <p:nvCxnSpPr>
+          <p:cNvPr id="66" name="Connector 65"/>
+          <p:cNvCxnSpPr/>
+          <p:nvPr/>
+        </p:nvCxnSpPr>
+        <p:spPr>
+          <a:xfrm>
+            <a:off x="3749040" y="4142232"/>
+            <a:ext cx="182880" cy="0"/>
+          </a:xfrm>
+          <a:prstGeom prst="line">
+            <a:avLst/>
+          </a:prstGeom>
+          <a:ln w="12700">
+            <a:solidFill>
+              <a:srgbClr val="5A6680"/>
+            </a:solidFill>
+            <a:tailEnd type="triangle" w="med"/>
+          </a:ln>
+        </p:spPr>
+        <p:style>
+          <a:lnRef idx="2">
+            <a:schemeClr val="accent1"/>
+          </a:lnRef>
+          <a:fillRef idx="0">
+            <a:schemeClr val="accent1"/>
+          </a:fillRef>
+          <a:effectRef idx="1">
+            <a:schemeClr val="accent1"/>
+          </a:effectRef>
+          <a:fontRef idx="minor">
+            <a:schemeClr val="tx1"/>
+          </a:fontRef>
+        </p:style>
+      </p:cxnSp>
+      <p:cxnSp>
+        <p:nvCxnSpPr>
+          <p:cNvPr id="67" name="Connector 66"/>
+          <p:cNvCxnSpPr/>
+          <p:nvPr/>
+        </p:nvCxnSpPr>
+        <p:spPr>
+          <a:xfrm flipH="1">
+            <a:off x="3840480" y="4297680"/>
+            <a:ext cx="1188720" cy="54864"/>
+          </a:xfrm>
+          <a:prstGeom prst="line">
+            <a:avLst/>
+          </a:prstGeom>
+          <a:ln w="12700">
+            <a:solidFill>
+              <a:srgbClr val="5A6680"/>
+            </a:solidFill>
+            <a:tailEnd type="triangle" w="med"/>
+          </a:ln>
+        </p:spPr>
+        <p:style>
+          <a:lnRef idx="2">
+            <a:schemeClr val="accent1"/>
+          </a:lnRef>
+          <a:fillRef idx="0">
+            <a:schemeClr val="accent1"/>
+          </a:fillRef>
+          <a:effectRef idx="1">
+            <a:schemeClr val="accent1"/>
+          </a:effectRef>
+          <a:fontRef idx="minor">
+            <a:schemeClr val="tx1"/>
+          </a:fontRef>
+        </p:style>
+      </p:cxnSp>
+    </p:spTree>
+  </p:cSld>
+  <p:clrMapOvr>
+    <a:masterClrMapping/>
+  </p:clrMapOvr>
+</p:sld>
+</file>
+
+<file path=ppt/slides/slide5.xml><?xml version="1.0" encoding="utf-8"?>
+<p:sld xmlns:a="http://schemas.openxmlformats.org/drawingml/2006/main" xmlns:r="http://schemas.openxmlformats.org/officeDocument/2006/relationships" xmlns:p="http://schemas.openxmlformats.org/presentationml/2006/main">
   <p:cSld name="Slide 4">
     <p:bg>
       <p:bgPr>
@@ -5957,7 +9136,7 @@
                 </a:solidFill>
                 <a:latin typeface="Calibri"/>
               </a:rPr>
-              <a:t>Team SPOC · Architecture &amp; Data . Dataverse</a:t>
+              <a:t>Team SPOC · End to end Architecture Lead &amp; Data . Dataverse</a:t>
             </a:r>
           </a:p>
         </p:txBody>
@@ -5994,7 +9173,7 @@
                 </a:solidFill>
                 <a:latin typeface="Calibri"/>
               </a:rPr>
-              <a:t>Domain · workflow &amp; expert</a:t>
+              <a:t>Domain Product Manager· workflow &amp; expert</a:t>
             </a:r>
             <a:br>
               <a:rPr lang="en-US" sz="900" dirty="0">
@@ -6048,7 +9227,25 @@
                 </a:solidFill>
                 <a:latin typeface="Calibri"/>
               </a:rPr>
-              <a:t>Frontend · React on Static Web Apps</a:t>
+              <a:t>Tech </a:t>
+            </a:r>
+            <a:r>
+              <a:rPr lang="en-US" sz="900" dirty="0" err="1">
+                <a:solidFill>
+                  <a:srgbClr val="555555"/>
+                </a:solidFill>
+                <a:latin typeface="Calibri"/>
+              </a:rPr>
+              <a:t>LeadFrontend</a:t>
+            </a:r>
+            <a:r>
+              <a:rPr lang="en-US" sz="900" dirty="0">
+                <a:solidFill>
+                  <a:srgbClr val="555555"/>
+                </a:solidFill>
+                <a:latin typeface="Calibri"/>
+              </a:rPr>
+              <a:t> · React on Static Web Apps</a:t>
             </a:r>
           </a:p>
         </p:txBody>
@@ -6122,7 +9319,7 @@
                 </a:solidFill>
                 <a:latin typeface="Calibri"/>
               </a:rPr>
-              <a:t>Azure OpenAI · Document Intelligence</a:t>
+              <a:t>Senior Architecture Lead</a:t>
             </a:r>
           </a:p>
         </p:txBody>
@@ -6583,7 +9780,7 @@
 </p:sld>
 </file>
 
-<file path=ppt/slides/slide5.xml><?xml version="1.0" encoding="utf-8"?>
+<file path=ppt/slides/slide6.xml><?xml version="1.0" encoding="utf-8"?>
 <p:sld xmlns:a="http://schemas.openxmlformats.org/drawingml/2006/main" xmlns:r="http://schemas.openxmlformats.org/officeDocument/2006/relationships" xmlns:p="http://schemas.openxmlformats.org/presentationml/2006/main">
   <p:cSld name="Slide 5">
     <p:bg>
@@ -7257,3178 +10454,6 @@
         <p14:creationId xmlns:p14="http://schemas.microsoft.com/office/powerpoint/2010/main" val="1287356172"/>
       </p:ext>
     </p:extLst>
-  </p:cSld>
-  <p:clrMapOvr>
-    <a:masterClrMapping/>
-  </p:clrMapOvr>
-</p:sld>
-</file>
-
-<file path=ppt/slides/slide6.xml><?xml version="1.0" encoding="utf-8"?>
-<p:sld xmlns:a="http://schemas.openxmlformats.org/drawingml/2006/main" xmlns:p="http://schemas.openxmlformats.org/presentationml/2006/main" xmlns:r="http://schemas.openxmlformats.org/officeDocument/2006/relationships">
-  <p:cSld>
-    <p:spTree>
-      <p:nvGrpSpPr>
-        <p:cNvPr id="1" name=""/>
-        <p:cNvGrpSpPr/>
-        <p:nvPr/>
-      </p:nvGrpSpPr>
-      <p:grpSpPr/>
-      <p:sp>
-        <p:nvSpPr>
-          <p:cNvPr id="2" name="TextBox 1"/>
-          <p:cNvSpPr txBox="1"/>
-          <p:nvPr/>
-        </p:nvSpPr>
-        <p:spPr>
-          <a:xfrm>
-            <a:off x="182880" y="45720"/>
-            <a:ext cx="8778240" cy="320040"/>
-          </a:xfrm>
-          <a:prstGeom prst="rect">
-            <a:avLst/>
-          </a:prstGeom>
-          <a:noFill/>
-        </p:spPr>
-        <p:txBody>
-          <a:bodyPr wrap="square" lIns="0" rIns="0" tIns="0" bIns="0">
-            <a:spAutoFit/>
-          </a:bodyPr>
-          <a:lstStyle/>
-          <a:p>
-            <a:pPr algn="l"/>
-            <a:r>
-              <a:rPr sz="1600" b="1">
-                <a:solidFill>
-                  <a:srgbClr val="0A2540"/>
-                </a:solidFill>
-                <a:latin typeface="Segoe UI"/>
-              </a:rPr>
-              <a:t>Architecture Flow — top-to-bottom</a:t>
-            </a:r>
-          </a:p>
-        </p:txBody>
-      </p:sp>
-      <p:sp>
-        <p:nvSpPr>
-          <p:cNvPr id="3" name="TextBox 2"/>
-          <p:cNvSpPr txBox="1"/>
-          <p:nvPr/>
-        </p:nvSpPr>
-        <p:spPr>
-          <a:xfrm>
-            <a:off x="182880" y="292608"/>
-            <a:ext cx="8778240" cy="164592"/>
-          </a:xfrm>
-          <a:prstGeom prst="rect">
-            <a:avLst/>
-          </a:prstGeom>
-          <a:noFill/>
-        </p:spPr>
-        <p:txBody>
-          <a:bodyPr wrap="square" lIns="0" rIns="0" tIns="0" bIns="0">
-            <a:spAutoFit/>
-          </a:bodyPr>
-          <a:lstStyle/>
-          <a:p>
-            <a:pPr algn="l"/>
-            <a:r>
-              <a:rPr sz="800" b="0">
-                <a:solidFill>
-                  <a:srgbClr val="5A6680"/>
-                </a:solidFill>
-                <a:latin typeface="Segoe UI"/>
-              </a:rPr>
-              <a:t>Customer → 5 channels → Copilot Studio → Power Automate → 4 parallel agents → audit → tier routing → notify</a:t>
-            </a:r>
-          </a:p>
-        </p:txBody>
-      </p:sp>
-      <p:sp>
-        <p:nvSpPr>
-          <p:cNvPr id="4" name="Rounded Rectangle 3"/>
-          <p:cNvSpPr/>
-          <p:nvPr/>
-        </p:nvSpPr>
-        <p:spPr>
-          <a:xfrm>
-            <a:off x="3291840" y="502920"/>
-            <a:ext cx="1097280" cy="310896"/>
-          </a:xfrm>
-          <a:prstGeom prst="roundRect">
-            <a:avLst/>
-          </a:prstGeom>
-          <a:solidFill>
-            <a:srgbClr val="DBEAFE"/>
-          </a:solidFill>
-          <a:ln w="15875">
-            <a:solidFill>
-              <a:srgbClr val="0A2540"/>
-            </a:solidFill>
-          </a:ln>
-          <a:effectLst/>
-        </p:spPr>
-        <p:style>
-          <a:lnRef idx="1">
-            <a:schemeClr val="accent1"/>
-          </a:lnRef>
-          <a:fillRef idx="3">
-            <a:schemeClr val="accent1"/>
-          </a:fillRef>
-          <a:effectRef idx="2">
-            <a:schemeClr val="accent1"/>
-          </a:effectRef>
-          <a:fontRef idx="minor">
-            <a:schemeClr val="lt1"/>
-          </a:fontRef>
-        </p:style>
-        <p:txBody>
-          <a:bodyPr rtlCol="0" anchor="ctr" lIns="36000" rIns="36000" tIns="18000" bIns="18000" wrap="square"/>
-          <a:lstStyle/>
-          <a:p>
-            <a:pPr algn="ctr"/>
-            <a:r>
-              <a:rPr sz="900" b="1">
-                <a:solidFill>
-                  <a:srgbClr val="0A2540"/>
-                </a:solidFill>
-                <a:latin typeface="Segoe UI"/>
-              </a:rPr>
-              <a:t>Customer</a:t>
-            </a:r>
-          </a:p>
-        </p:txBody>
-      </p:sp>
-      <p:sp>
-        <p:nvSpPr>
-          <p:cNvPr id="5" name="Rounded Rectangle 4"/>
-          <p:cNvSpPr/>
-          <p:nvPr/>
-        </p:nvSpPr>
-        <p:spPr>
-          <a:xfrm>
-            <a:off x="420624" y="868680"/>
-            <a:ext cx="1280160" cy="310896"/>
-          </a:xfrm>
-          <a:prstGeom prst="roundRect">
-            <a:avLst/>
-          </a:prstGeom>
-          <a:solidFill>
-            <a:srgbClr val="DBEAFE"/>
-          </a:solidFill>
-          <a:ln w="15875">
-            <a:solidFill>
-              <a:srgbClr val="0078D4"/>
-            </a:solidFill>
-          </a:ln>
-          <a:effectLst/>
-        </p:spPr>
-        <p:style>
-          <a:lnRef idx="1">
-            <a:schemeClr val="accent1"/>
-          </a:lnRef>
-          <a:fillRef idx="3">
-            <a:schemeClr val="accent1"/>
-          </a:fillRef>
-          <a:effectRef idx="2">
-            <a:schemeClr val="accent1"/>
-          </a:effectRef>
-          <a:fontRef idx="minor">
-            <a:schemeClr val="lt1"/>
-          </a:fontRef>
-        </p:style>
-        <p:txBody>
-          <a:bodyPr rtlCol="0" anchor="ctr" lIns="36000" rIns="36000" tIns="18000" bIns="18000" wrap="square"/>
-          <a:lstStyle/>
-          <a:p>
-            <a:pPr algn="ctr"/>
-            <a:r>
-              <a:rPr sz="800" b="1">
-                <a:solidFill>
-                  <a:srgbClr val="0078D4"/>
-                </a:solidFill>
-                <a:latin typeface="Segoe UI"/>
-              </a:rPr>
-              <a:t>Mobile App</a:t>
-            </a:r>
-          </a:p>
-        </p:txBody>
-      </p:sp>
-      <p:sp>
-        <p:nvSpPr>
-          <p:cNvPr id="6" name="Rounded Rectangle 5"/>
-          <p:cNvSpPr/>
-          <p:nvPr/>
-        </p:nvSpPr>
-        <p:spPr>
-          <a:xfrm>
-            <a:off x="1810512" y="868680"/>
-            <a:ext cx="1280160" cy="310896"/>
-          </a:xfrm>
-          <a:prstGeom prst="roundRect">
-            <a:avLst/>
-          </a:prstGeom>
-          <a:solidFill>
-            <a:srgbClr val="DBEAFE"/>
-          </a:solidFill>
-          <a:ln w="15875">
-            <a:solidFill>
-              <a:srgbClr val="0078D4"/>
-            </a:solidFill>
-          </a:ln>
-          <a:effectLst/>
-        </p:spPr>
-        <p:style>
-          <a:lnRef idx="1">
-            <a:schemeClr val="accent1"/>
-          </a:lnRef>
-          <a:fillRef idx="3">
-            <a:schemeClr val="accent1"/>
-          </a:fillRef>
-          <a:effectRef idx="2">
-            <a:schemeClr val="accent1"/>
-          </a:effectRef>
-          <a:fontRef idx="minor">
-            <a:schemeClr val="lt1"/>
-          </a:fontRef>
-        </p:style>
-        <p:txBody>
-          <a:bodyPr rtlCol="0" anchor="ctr" lIns="36000" rIns="36000" tIns="18000" bIns="18000" wrap="square"/>
-          <a:lstStyle/>
-          <a:p>
-            <a:pPr algn="ctr"/>
-            <a:r>
-              <a:rPr sz="800" b="1">
-                <a:solidFill>
-                  <a:srgbClr val="0078D4"/>
-                </a:solidFill>
-                <a:latin typeface="Segoe UI"/>
-              </a:rPr>
-              <a:t>Web Chat</a:t>
-            </a:r>
-          </a:p>
-        </p:txBody>
-      </p:sp>
-      <p:sp>
-        <p:nvSpPr>
-          <p:cNvPr id="7" name="Rounded Rectangle 6"/>
-          <p:cNvSpPr/>
-          <p:nvPr/>
-        </p:nvSpPr>
-        <p:spPr>
-          <a:xfrm>
-            <a:off x="3200400" y="868680"/>
-            <a:ext cx="1280160" cy="310896"/>
-          </a:xfrm>
-          <a:prstGeom prst="roundRect">
-            <a:avLst/>
-          </a:prstGeom>
-          <a:solidFill>
-            <a:srgbClr val="EDE4F5"/>
-          </a:solidFill>
-          <a:ln w="15875">
-            <a:solidFill>
-              <a:srgbClr val="5B41A1"/>
-            </a:solidFill>
-          </a:ln>
-          <a:effectLst/>
-        </p:spPr>
-        <p:style>
-          <a:lnRef idx="1">
-            <a:schemeClr val="accent1"/>
-          </a:lnRef>
-          <a:fillRef idx="3">
-            <a:schemeClr val="accent1"/>
-          </a:fillRef>
-          <a:effectRef idx="2">
-            <a:schemeClr val="accent1"/>
-          </a:effectRef>
-          <a:fontRef idx="minor">
-            <a:schemeClr val="lt1"/>
-          </a:fontRef>
-        </p:style>
-        <p:txBody>
-          <a:bodyPr rtlCol="0" anchor="ctr" lIns="36000" rIns="36000" tIns="18000" bIns="18000" wrap="square"/>
-          <a:lstStyle/>
-          <a:p>
-            <a:pPr algn="ctr"/>
-            <a:r>
-              <a:rPr sz="800" b="1">
-                <a:solidFill>
-                  <a:srgbClr val="5B41A1"/>
-                </a:solidFill>
-                <a:latin typeface="Segoe UI"/>
-              </a:rPr>
-              <a:t>Microsoft Teams</a:t>
-            </a:r>
-          </a:p>
-        </p:txBody>
-      </p:sp>
-      <p:sp>
-        <p:nvSpPr>
-          <p:cNvPr id="8" name="Rounded Rectangle 7"/>
-          <p:cNvSpPr/>
-          <p:nvPr/>
-        </p:nvSpPr>
-        <p:spPr>
-          <a:xfrm>
-            <a:off x="4590288" y="868680"/>
-            <a:ext cx="1280160" cy="310896"/>
-          </a:xfrm>
-          <a:prstGeom prst="roundRect">
-            <a:avLst/>
-          </a:prstGeom>
-          <a:solidFill>
-            <a:srgbClr val="DBEAFE"/>
-          </a:solidFill>
-          <a:ln w="15875">
-            <a:solidFill>
-              <a:srgbClr val="0078D4"/>
-            </a:solidFill>
-          </a:ln>
-          <a:effectLst/>
-        </p:spPr>
-        <p:style>
-          <a:lnRef idx="1">
-            <a:schemeClr val="accent1"/>
-          </a:lnRef>
-          <a:fillRef idx="3">
-            <a:schemeClr val="accent1"/>
-          </a:fillRef>
-          <a:effectRef idx="2">
-            <a:schemeClr val="accent1"/>
-          </a:effectRef>
-          <a:fontRef idx="minor">
-            <a:schemeClr val="lt1"/>
-          </a:fontRef>
-        </p:style>
-        <p:txBody>
-          <a:bodyPr rtlCol="0" anchor="ctr" lIns="36000" rIns="36000" tIns="18000" bIns="18000" wrap="square"/>
-          <a:lstStyle/>
-          <a:p>
-            <a:pPr algn="ctr"/>
-            <a:r>
-              <a:rPr sz="800" b="1">
-                <a:solidFill>
-                  <a:srgbClr val="0078D4"/>
-                </a:solidFill>
-                <a:latin typeface="Segoe UI"/>
-              </a:rPr>
-              <a:t>SMS</a:t>
-            </a:r>
-          </a:p>
-        </p:txBody>
-      </p:sp>
-      <p:sp>
-        <p:nvSpPr>
-          <p:cNvPr id="9" name="Rounded Rectangle 8"/>
-          <p:cNvSpPr/>
-          <p:nvPr/>
-        </p:nvSpPr>
-        <p:spPr>
-          <a:xfrm>
-            <a:off x="5980176" y="868680"/>
-            <a:ext cx="1280160" cy="310896"/>
-          </a:xfrm>
-          <a:prstGeom prst="roundRect">
-            <a:avLst/>
-          </a:prstGeom>
-          <a:solidFill>
-            <a:srgbClr val="DCFCE7"/>
-          </a:solidFill>
-          <a:ln w="15875">
-            <a:solidFill>
-              <a:srgbClr val="107C10"/>
-            </a:solidFill>
-          </a:ln>
-          <a:effectLst/>
-        </p:spPr>
-        <p:style>
-          <a:lnRef idx="1">
-            <a:schemeClr val="accent1"/>
-          </a:lnRef>
-          <a:fillRef idx="3">
-            <a:schemeClr val="accent1"/>
-          </a:fillRef>
-          <a:effectRef idx="2">
-            <a:schemeClr val="accent1"/>
-          </a:effectRef>
-          <a:fontRef idx="minor">
-            <a:schemeClr val="lt1"/>
-          </a:fontRef>
-        </p:style>
-        <p:txBody>
-          <a:bodyPr rtlCol="0" anchor="ctr" lIns="36000" rIns="36000" tIns="18000" bIns="18000" wrap="square"/>
-          <a:lstStyle/>
-          <a:p>
-            <a:pPr algn="ctr"/>
-            <a:r>
-              <a:rPr sz="800" b="1">
-                <a:solidFill>
-                  <a:srgbClr val="107C10"/>
-                </a:solidFill>
-                <a:latin typeface="Segoe UI"/>
-              </a:rPr>
-              <a:t>Email</a:t>
-            </a:r>
-          </a:p>
-        </p:txBody>
-      </p:sp>
-      <p:sp>
-        <p:nvSpPr>
-          <p:cNvPr id="10" name="Rounded Rectangle 9"/>
-          <p:cNvSpPr/>
-          <p:nvPr/>
-        </p:nvSpPr>
-        <p:spPr>
-          <a:xfrm>
-            <a:off x="525780" y="1234440"/>
-            <a:ext cx="1554480" cy="310896"/>
-          </a:xfrm>
-          <a:prstGeom prst="roundRect">
-            <a:avLst/>
-          </a:prstGeom>
-          <a:solidFill>
-            <a:srgbClr val="DBEAFE"/>
-          </a:solidFill>
-          <a:ln w="15875">
-            <a:solidFill>
-              <a:srgbClr val="0078D4"/>
-            </a:solidFill>
-          </a:ln>
-          <a:effectLst/>
-        </p:spPr>
-        <p:style>
-          <a:lnRef idx="1">
-            <a:schemeClr val="accent1"/>
-          </a:lnRef>
-          <a:fillRef idx="3">
-            <a:schemeClr val="accent1"/>
-          </a:fillRef>
-          <a:effectRef idx="2">
-            <a:schemeClr val="accent1"/>
-          </a:effectRef>
-          <a:fontRef idx="minor">
-            <a:schemeClr val="lt1"/>
-          </a:fontRef>
-        </p:style>
-        <p:txBody>
-          <a:bodyPr rtlCol="0" anchor="ctr" lIns="36000" rIns="36000" tIns="18000" bIns="18000" wrap="square"/>
-          <a:lstStyle/>
-          <a:p>
-            <a:pPr algn="ctr"/>
-            <a:r>
-              <a:rPr sz="700" b="1">
-                <a:solidFill>
-                  <a:srgbClr val="0078D4"/>
-                </a:solidFill>
-                <a:latin typeface="Segoe UI"/>
-              </a:rPr>
-              <a:t>Azure Static Web Apps</a:t>
-            </a:r>
-          </a:p>
-        </p:txBody>
-      </p:sp>
-      <p:sp>
-        <p:nvSpPr>
-          <p:cNvPr id="11" name="Rounded Rectangle 10"/>
-          <p:cNvSpPr/>
-          <p:nvPr/>
-        </p:nvSpPr>
-        <p:spPr>
-          <a:xfrm>
-            <a:off x="2217420" y="1234440"/>
-            <a:ext cx="1554480" cy="310896"/>
-          </a:xfrm>
-          <a:prstGeom prst="roundRect">
-            <a:avLst/>
-          </a:prstGeom>
-          <a:solidFill>
-            <a:srgbClr val="DBEAFE"/>
-          </a:solidFill>
-          <a:ln w="15875">
-            <a:solidFill>
-              <a:srgbClr val="0078D4"/>
-            </a:solidFill>
-          </a:ln>
-          <a:effectLst/>
-        </p:spPr>
-        <p:style>
-          <a:lnRef idx="1">
-            <a:schemeClr val="accent1"/>
-          </a:lnRef>
-          <a:fillRef idx="3">
-            <a:schemeClr val="accent1"/>
-          </a:fillRef>
-          <a:effectRef idx="2">
-            <a:schemeClr val="accent1"/>
-          </a:effectRef>
-          <a:fontRef idx="minor">
-            <a:schemeClr val="lt1"/>
-          </a:fontRef>
-        </p:style>
-        <p:txBody>
-          <a:bodyPr rtlCol="0" anchor="ctr" lIns="36000" rIns="36000" tIns="18000" bIns="18000" wrap="square"/>
-          <a:lstStyle/>
-          <a:p>
-            <a:pPr algn="ctr"/>
-            <a:r>
-              <a:rPr sz="700" b="1">
-                <a:solidFill>
-                  <a:srgbClr val="0078D4"/>
-                </a:solidFill>
-                <a:latin typeface="Segoe UI"/>
-              </a:rPr>
-              <a:t>Azure Function · Token Broker</a:t>
-            </a:r>
-          </a:p>
-        </p:txBody>
-      </p:sp>
-      <p:sp>
-        <p:nvSpPr>
-          <p:cNvPr id="12" name="Rounded Rectangle 11"/>
-          <p:cNvSpPr/>
-          <p:nvPr/>
-        </p:nvSpPr>
-        <p:spPr>
-          <a:xfrm>
-            <a:off x="3909060" y="1234440"/>
-            <a:ext cx="1554480" cy="310896"/>
-          </a:xfrm>
-          <a:prstGeom prst="roundRect">
-            <a:avLst/>
-          </a:prstGeom>
-          <a:solidFill>
-            <a:srgbClr val="DBEAFE"/>
-          </a:solidFill>
-          <a:ln w="15875">
-            <a:solidFill>
-              <a:srgbClr val="0078D4"/>
-            </a:solidFill>
-          </a:ln>
-          <a:effectLst/>
-        </p:spPr>
-        <p:style>
-          <a:lnRef idx="1">
-            <a:schemeClr val="accent1"/>
-          </a:lnRef>
-          <a:fillRef idx="3">
-            <a:schemeClr val="accent1"/>
-          </a:fillRef>
-          <a:effectRef idx="2">
-            <a:schemeClr val="accent1"/>
-          </a:effectRef>
-          <a:fontRef idx="minor">
-            <a:schemeClr val="lt1"/>
-          </a:fontRef>
-        </p:style>
-        <p:txBody>
-          <a:bodyPr rtlCol="0" anchor="ctr" lIns="36000" rIns="36000" tIns="18000" bIns="18000" wrap="square"/>
-          <a:lstStyle/>
-          <a:p>
-            <a:pPr algn="ctr"/>
-            <a:r>
-              <a:rPr sz="700" b="1">
-                <a:solidFill>
-                  <a:srgbClr val="0078D4"/>
-                </a:solidFill>
-                <a:latin typeface="Segoe UI"/>
-              </a:rPr>
-              <a:t>Bot Service · Direct Line</a:t>
-            </a:r>
-          </a:p>
-        </p:txBody>
-      </p:sp>
-      <p:sp>
-        <p:nvSpPr>
-          <p:cNvPr id="13" name="Rounded Rectangle 12"/>
-          <p:cNvSpPr/>
-          <p:nvPr/>
-        </p:nvSpPr>
-        <p:spPr>
-          <a:xfrm>
-            <a:off x="5600700" y="1234440"/>
-            <a:ext cx="1554480" cy="310896"/>
-          </a:xfrm>
-          <a:prstGeom prst="roundRect">
-            <a:avLst/>
-          </a:prstGeom>
-          <a:solidFill>
-            <a:srgbClr val="DBEAFE"/>
-          </a:solidFill>
-          <a:ln w="15875">
-            <a:solidFill>
-              <a:srgbClr val="0078D4"/>
-            </a:solidFill>
-          </a:ln>
-          <a:effectLst/>
-        </p:spPr>
-        <p:style>
-          <a:lnRef idx="1">
-            <a:schemeClr val="accent1"/>
-          </a:lnRef>
-          <a:fillRef idx="3">
-            <a:schemeClr val="accent1"/>
-          </a:fillRef>
-          <a:effectRef idx="2">
-            <a:schemeClr val="accent1"/>
-          </a:effectRef>
-          <a:fontRef idx="minor">
-            <a:schemeClr val="lt1"/>
-          </a:fontRef>
-        </p:style>
-        <p:txBody>
-          <a:bodyPr rtlCol="0" anchor="ctr" lIns="36000" rIns="36000" tIns="18000" bIns="18000" wrap="square"/>
-          <a:lstStyle/>
-          <a:p>
-            <a:pPr algn="ctr"/>
-            <a:r>
-              <a:rPr sz="700" b="1">
-                <a:solidFill>
-                  <a:srgbClr val="0078D4"/>
-                </a:solidFill>
-                <a:latin typeface="Segoe UI"/>
-              </a:rPr>
-              <a:t>Azure Comm Services (SMS)</a:t>
-            </a:r>
-          </a:p>
-        </p:txBody>
-      </p:sp>
-      <p:sp>
-        <p:nvSpPr>
-          <p:cNvPr id="14" name="Rounded Rectangle 13"/>
-          <p:cNvSpPr/>
-          <p:nvPr/>
-        </p:nvSpPr>
-        <p:spPr>
-          <a:xfrm>
-            <a:off x="2468880" y="1600200"/>
-            <a:ext cx="2743200" cy="310896"/>
-          </a:xfrm>
-          <a:prstGeom prst="roundRect">
-            <a:avLst/>
-          </a:prstGeom>
-          <a:solidFill>
-            <a:srgbClr val="EDE4F5"/>
-          </a:solidFill>
-          <a:ln w="15875">
-            <a:solidFill>
-              <a:srgbClr val="742774"/>
-            </a:solidFill>
-          </a:ln>
-          <a:effectLst/>
-        </p:spPr>
-        <p:style>
-          <a:lnRef idx="1">
-            <a:schemeClr val="accent1"/>
-          </a:lnRef>
-          <a:fillRef idx="3">
-            <a:schemeClr val="accent1"/>
-          </a:fillRef>
-          <a:effectRef idx="2">
-            <a:schemeClr val="accent1"/>
-          </a:effectRef>
-          <a:fontRef idx="minor">
-            <a:schemeClr val="lt1"/>
-          </a:fontRef>
-        </p:style>
-        <p:txBody>
-          <a:bodyPr rtlCol="0" anchor="ctr" lIns="36000" rIns="36000" tIns="18000" bIns="18000" wrap="square"/>
-          <a:lstStyle/>
-          <a:p>
-            <a:pPr algn="ctr"/>
-            <a:r>
-              <a:rPr sz="800" b="1">
-                <a:solidFill>
-                  <a:srgbClr val="742774"/>
-                </a:solidFill>
-                <a:latin typeface="Segoe UI"/>
-              </a:rPr>
-              <a:t>Copilot Studio · Intake Agent (FNOL_Start + 11 child topics)</a:t>
-            </a:r>
-          </a:p>
-        </p:txBody>
-      </p:sp>
-      <p:sp>
-        <p:nvSpPr>
-          <p:cNvPr id="15" name="Rounded Rectangle 14"/>
-          <p:cNvSpPr/>
-          <p:nvPr/>
-        </p:nvSpPr>
-        <p:spPr>
-          <a:xfrm>
-            <a:off x="2468880" y="1965960"/>
-            <a:ext cx="2743200" cy="310896"/>
-          </a:xfrm>
-          <a:prstGeom prst="roundRect">
-            <a:avLst/>
-          </a:prstGeom>
-          <a:solidFill>
-            <a:srgbClr val="EDE4F5"/>
-          </a:solidFill>
-          <a:ln w="15875">
-            <a:solidFill>
-              <a:srgbClr val="742774"/>
-            </a:solidFill>
-          </a:ln>
-          <a:effectLst/>
-        </p:spPr>
-        <p:style>
-          <a:lnRef idx="1">
-            <a:schemeClr val="accent1"/>
-          </a:lnRef>
-          <a:fillRef idx="3">
-            <a:schemeClr val="accent1"/>
-          </a:fillRef>
-          <a:effectRef idx="2">
-            <a:schemeClr val="accent1"/>
-          </a:effectRef>
-          <a:fontRef idx="minor">
-            <a:schemeClr val="lt1"/>
-          </a:fontRef>
-        </p:style>
-        <p:txBody>
-          <a:bodyPr rtlCol="0" anchor="ctr" lIns="36000" rIns="36000" tIns="18000" bIns="18000" wrap="square"/>
-          <a:lstStyle/>
-          <a:p>
-            <a:pPr algn="ctr"/>
-            <a:r>
-              <a:rPr sz="800" b="1">
-                <a:solidFill>
-                  <a:srgbClr val="742774"/>
-                </a:solidFill>
-                <a:latin typeface="Segoe UI"/>
-              </a:rPr>
-              <a:t>Power Automate · Master Orchestration</a:t>
-            </a:r>
-          </a:p>
-        </p:txBody>
-      </p:sp>
-      <p:sp>
-        <p:nvSpPr>
-          <p:cNvPr id="16" name="Rounded Rectangle 15"/>
-          <p:cNvSpPr/>
-          <p:nvPr/>
-        </p:nvSpPr>
-        <p:spPr>
-          <a:xfrm>
-            <a:off x="502920" y="2331720"/>
-            <a:ext cx="1600200" cy="502920"/>
-          </a:xfrm>
-          <a:prstGeom prst="roundRect">
-            <a:avLst/>
-          </a:prstGeom>
-          <a:solidFill>
-            <a:srgbClr val="DBEAFE"/>
-          </a:solidFill>
-          <a:ln w="15875">
-            <a:solidFill>
-              <a:srgbClr val="0078D4"/>
-            </a:solidFill>
-          </a:ln>
-          <a:effectLst/>
-        </p:spPr>
-        <p:style>
-          <a:lnRef idx="1">
-            <a:schemeClr val="accent1"/>
-          </a:lnRef>
-          <a:fillRef idx="3">
-            <a:schemeClr val="accent1"/>
-          </a:fillRef>
-          <a:effectRef idx="2">
-            <a:schemeClr val="accent1"/>
-          </a:effectRef>
-          <a:fontRef idx="minor">
-            <a:schemeClr val="lt1"/>
-          </a:fontRef>
-        </p:style>
-        <p:txBody>
-          <a:bodyPr rtlCol="0" anchor="ctr" lIns="36000" rIns="36000" tIns="18000" bIns="18000" wrap="square"/>
-          <a:lstStyle/>
-          <a:p>
-            <a:pPr algn="ctr"/>
-            <a:r>
-              <a:rPr sz="700" b="1">
-                <a:solidFill>
-                  <a:srgbClr val="0078D4"/>
-                </a:solidFill>
-                <a:latin typeface="Segoe UI"/>
-              </a:rPr>
-              <a:t>Extraction Agent</a:t>
-            </a:r>
-          </a:p>
-          <a:p>
-            <a:pPr algn="ctr"/>
-            <a:r>
-              <a:rPr sz="700" b="1">
-                <a:solidFill>
-                  <a:srgbClr val="0078D4"/>
-                </a:solidFill>
-                <a:latin typeface="Segoe UI"/>
-              </a:rPr>
-              <a:t>Doc Intelligence + Vision</a:t>
-            </a:r>
-          </a:p>
-        </p:txBody>
-      </p:sp>
-      <p:sp>
-        <p:nvSpPr>
-          <p:cNvPr id="17" name="Rounded Rectangle 16"/>
-          <p:cNvSpPr/>
-          <p:nvPr/>
-        </p:nvSpPr>
-        <p:spPr>
-          <a:xfrm>
-            <a:off x="2194560" y="2331720"/>
-            <a:ext cx="1600200" cy="502920"/>
-          </a:xfrm>
-          <a:prstGeom prst="roundRect">
-            <a:avLst/>
-          </a:prstGeom>
-          <a:solidFill>
-            <a:srgbClr val="DBEAFE"/>
-          </a:solidFill>
-          <a:ln w="15875">
-            <a:solidFill>
-              <a:srgbClr val="0078D4"/>
-            </a:solidFill>
-          </a:ln>
-          <a:effectLst/>
-        </p:spPr>
-        <p:style>
-          <a:lnRef idx="1">
-            <a:schemeClr val="accent1"/>
-          </a:lnRef>
-          <a:fillRef idx="3">
-            <a:schemeClr val="accent1"/>
-          </a:fillRef>
-          <a:effectRef idx="2">
-            <a:schemeClr val="accent1"/>
-          </a:effectRef>
-          <a:fontRef idx="minor">
-            <a:schemeClr val="lt1"/>
-          </a:fontRef>
-        </p:style>
-        <p:txBody>
-          <a:bodyPr rtlCol="0" anchor="ctr" lIns="36000" rIns="36000" tIns="18000" bIns="18000" wrap="square"/>
-          <a:lstStyle/>
-          <a:p>
-            <a:pPr algn="ctr"/>
-            <a:r>
-              <a:rPr sz="700" b="1">
-                <a:solidFill>
-                  <a:srgbClr val="0078D4"/>
-                </a:solidFill>
-                <a:latin typeface="Segoe UI"/>
-              </a:rPr>
-              <a:t>Policy Agent</a:t>
-            </a:r>
-          </a:p>
-          <a:p>
-            <a:pPr algn="ctr"/>
-            <a:r>
-              <a:rPr sz="700" b="1">
-                <a:solidFill>
-                  <a:srgbClr val="0078D4"/>
-                </a:solidFill>
-                <a:latin typeface="Segoe UI"/>
-              </a:rPr>
-              <a:t>AI Search RAG + AOAI</a:t>
-            </a:r>
-          </a:p>
-        </p:txBody>
-      </p:sp>
-      <p:sp>
-        <p:nvSpPr>
-          <p:cNvPr id="18" name="Rounded Rectangle 17"/>
-          <p:cNvSpPr/>
-          <p:nvPr/>
-        </p:nvSpPr>
-        <p:spPr>
-          <a:xfrm>
-            <a:off x="3886200" y="2331720"/>
-            <a:ext cx="1600200" cy="502920"/>
-          </a:xfrm>
-          <a:prstGeom prst="roundRect">
-            <a:avLst/>
-          </a:prstGeom>
-          <a:solidFill>
-            <a:srgbClr val="FEF3C7"/>
-          </a:solidFill>
-          <a:ln w="15875">
-            <a:solidFill>
-              <a:srgbClr val="D99416"/>
-            </a:solidFill>
-          </a:ln>
-          <a:effectLst/>
-        </p:spPr>
-        <p:style>
-          <a:lnRef idx="1">
-            <a:schemeClr val="accent1"/>
-          </a:lnRef>
-          <a:fillRef idx="3">
-            <a:schemeClr val="accent1"/>
-          </a:fillRef>
-          <a:effectRef idx="2">
-            <a:schemeClr val="accent1"/>
-          </a:effectRef>
-          <a:fontRef idx="minor">
-            <a:schemeClr val="lt1"/>
-          </a:fontRef>
-        </p:style>
-        <p:txBody>
-          <a:bodyPr rtlCol="0" anchor="ctr" lIns="36000" rIns="36000" tIns="18000" bIns="18000" wrap="square"/>
-          <a:lstStyle/>
-          <a:p>
-            <a:pPr algn="ctr"/>
-            <a:r>
-              <a:rPr sz="700" b="1">
-                <a:solidFill>
-                  <a:srgbClr val="D99416"/>
-                </a:solidFill>
-                <a:latin typeface="Segoe UI"/>
-              </a:rPr>
-              <a:t>Validation Agent</a:t>
-            </a:r>
-          </a:p>
-          <a:p>
-            <a:pPr algn="ctr"/>
-            <a:r>
-              <a:rPr sz="700" b="1">
-                <a:solidFill>
-                  <a:srgbClr val="D99416"/>
-                </a:solidFill>
-                <a:latin typeface="Segoe UI"/>
-              </a:rPr>
-              <a:t>NOAA + NHTSA + 5 sandbox</a:t>
-            </a:r>
-          </a:p>
-        </p:txBody>
-      </p:sp>
-      <p:sp>
-        <p:nvSpPr>
-          <p:cNvPr id="19" name="Rounded Rectangle 18"/>
-          <p:cNvSpPr/>
-          <p:nvPr/>
-        </p:nvSpPr>
-        <p:spPr>
-          <a:xfrm>
-            <a:off x="5577840" y="2331720"/>
-            <a:ext cx="1600200" cy="502920"/>
-          </a:xfrm>
-          <a:prstGeom prst="roundRect">
-            <a:avLst/>
-          </a:prstGeom>
-          <a:solidFill>
-            <a:srgbClr val="DBEAFE"/>
-          </a:solidFill>
-          <a:ln w="15875">
-            <a:solidFill>
-              <a:srgbClr val="0078D4"/>
-            </a:solidFill>
-          </a:ln>
-          <a:effectLst/>
-        </p:spPr>
-        <p:style>
-          <a:lnRef idx="1">
-            <a:schemeClr val="accent1"/>
-          </a:lnRef>
-          <a:fillRef idx="3">
-            <a:schemeClr val="accent1"/>
-          </a:fillRef>
-          <a:effectRef idx="2">
-            <a:schemeClr val="accent1"/>
-          </a:effectRef>
-          <a:fontRef idx="minor">
-            <a:schemeClr val="lt1"/>
-          </a:fontRef>
-        </p:style>
-        <p:txBody>
-          <a:bodyPr rtlCol="0" anchor="ctr" lIns="36000" rIns="36000" tIns="18000" bIns="18000" wrap="square"/>
-          <a:lstStyle/>
-          <a:p>
-            <a:pPr algn="ctr"/>
-            <a:r>
-              <a:rPr sz="700" b="1">
-                <a:solidFill>
-                  <a:srgbClr val="0078D4"/>
-                </a:solidFill>
-                <a:latin typeface="Segoe UI"/>
-              </a:rPr>
-              <a:t>Adjudication Agent</a:t>
-            </a:r>
-          </a:p>
-          <a:p>
-            <a:pPr algn="ctr"/>
-            <a:r>
-              <a:rPr sz="700" b="1">
-                <a:solidFill>
-                  <a:srgbClr val="0078D4"/>
-                </a:solidFill>
-                <a:latin typeface="Segoe UI"/>
-              </a:rPr>
-              <a:t>Azure OpenAI GPT-4.1</a:t>
-            </a:r>
-          </a:p>
-        </p:txBody>
-      </p:sp>
-      <p:sp>
-        <p:nvSpPr>
-          <p:cNvPr id="20" name="Rounded Rectangle 19"/>
-          <p:cNvSpPr/>
-          <p:nvPr/>
-        </p:nvSpPr>
-        <p:spPr>
-          <a:xfrm>
-            <a:off x="868680" y="2889504"/>
-            <a:ext cx="5943600" cy="310896"/>
-          </a:xfrm>
-          <a:prstGeom prst="roundRect">
-            <a:avLst/>
-          </a:prstGeom>
-          <a:solidFill>
-            <a:srgbClr val="FEF3C7"/>
-          </a:solidFill>
-          <a:ln w="15875">
-            <a:solidFill>
-              <a:srgbClr val="D99416"/>
-            </a:solidFill>
-          </a:ln>
-          <a:effectLst/>
-        </p:spPr>
-        <p:style>
-          <a:lnRef idx="1">
-            <a:schemeClr val="accent1"/>
-          </a:lnRef>
-          <a:fillRef idx="3">
-            <a:schemeClr val="accent1"/>
-          </a:fillRef>
-          <a:effectRef idx="2">
-            <a:schemeClr val="accent1"/>
-          </a:effectRef>
-          <a:fontRef idx="minor">
-            <a:schemeClr val="lt1"/>
-          </a:fontRef>
-        </p:style>
-        <p:txBody>
-          <a:bodyPr rtlCol="0" anchor="ctr" lIns="36000" rIns="36000" tIns="18000" bIns="18000" wrap="square"/>
-          <a:lstStyle/>
-          <a:p>
-            <a:pPr algn="ctr"/>
-            <a:r>
-              <a:rPr sz="800" b="1">
-                <a:solidFill>
-                  <a:srgbClr val="D99416"/>
-                </a:solidFill>
-                <a:latin typeface="Segoe UI"/>
-              </a:rPr>
-              <a:t>★ Decision_Rationale audit log — every AI decision in plain English</a:t>
-            </a:r>
-          </a:p>
-        </p:txBody>
-      </p:sp>
-      <p:sp>
-        <p:nvSpPr>
-          <p:cNvPr id="21" name="Rounded Rectangle 20"/>
-          <p:cNvSpPr/>
-          <p:nvPr/>
-        </p:nvSpPr>
-        <p:spPr>
-          <a:xfrm>
-            <a:off x="2240280" y="3255264"/>
-            <a:ext cx="3200400" cy="310896"/>
-          </a:xfrm>
-          <a:prstGeom prst="roundRect">
-            <a:avLst/>
-          </a:prstGeom>
-          <a:solidFill>
-            <a:srgbClr val="EDE4F5"/>
-          </a:solidFill>
-          <a:ln w="15875">
-            <a:solidFill>
-              <a:srgbClr val="742774"/>
-            </a:solidFill>
-          </a:ln>
-          <a:effectLst/>
-        </p:spPr>
-        <p:style>
-          <a:lnRef idx="1">
-            <a:schemeClr val="accent1"/>
-          </a:lnRef>
-          <a:fillRef idx="3">
-            <a:schemeClr val="accent1"/>
-          </a:fillRef>
-          <a:effectRef idx="2">
-            <a:schemeClr val="accent1"/>
-          </a:effectRef>
-          <a:fontRef idx="minor">
-            <a:schemeClr val="lt1"/>
-          </a:fontRef>
-        </p:style>
-        <p:txBody>
-          <a:bodyPr rtlCol="0" anchor="ctr" lIns="36000" rIns="36000" tIns="18000" bIns="18000" wrap="square"/>
-          <a:lstStyle/>
-          <a:p>
-            <a:pPr algn="ctr"/>
-            <a:r>
-              <a:rPr sz="800" b="1">
-                <a:solidFill>
-                  <a:srgbClr val="742774"/>
-                </a:solidFill>
-                <a:latin typeface="Segoe UI"/>
-              </a:rPr>
-              <a:t>Microsoft Dataverse · 8 tables</a:t>
-            </a:r>
-          </a:p>
-        </p:txBody>
-      </p:sp>
-      <p:sp>
-        <p:nvSpPr>
-          <p:cNvPr id="22" name="Diamond 21"/>
-          <p:cNvSpPr/>
-          <p:nvPr/>
-        </p:nvSpPr>
-        <p:spPr>
-          <a:xfrm>
-            <a:off x="580644" y="3621024"/>
-            <a:ext cx="1280160" cy="365760"/>
-          </a:xfrm>
-          <a:prstGeom prst="diamond">
-            <a:avLst/>
-          </a:prstGeom>
-          <a:solidFill>
-            <a:srgbClr val="FEF3C7"/>
-          </a:solidFill>
-          <a:ln w="19050">
-            <a:solidFill>
-              <a:srgbClr val="D99416"/>
-            </a:solidFill>
-          </a:ln>
-          <a:effectLst/>
-        </p:spPr>
-        <p:style>
-          <a:lnRef idx="1">
-            <a:schemeClr val="accent1"/>
-          </a:lnRef>
-          <a:fillRef idx="3">
-            <a:schemeClr val="accent1"/>
-          </a:fillRef>
-          <a:effectRef idx="2">
-            <a:schemeClr val="accent1"/>
-          </a:effectRef>
-          <a:fontRef idx="minor">
-            <a:schemeClr val="lt1"/>
-          </a:fontRef>
-        </p:style>
-        <p:txBody>
-          <a:bodyPr rtlCol="0" anchor="ctr" wrap="square"/>
-          <a:lstStyle/>
-          <a:p>
-            <a:pPr algn="ctr"/>
-            <a:r>
-              <a:rPr sz="800" b="1">
-                <a:solidFill>
-                  <a:srgbClr val="D99416"/>
-                </a:solidFill>
-                <a:latin typeface="Segoe UI"/>
-              </a:rPr>
-              <a:t>Tier?</a:t>
-            </a:r>
-          </a:p>
-        </p:txBody>
-      </p:sp>
-      <p:sp>
-        <p:nvSpPr>
-          <p:cNvPr id="23" name="Rounded Rectangle 22"/>
-          <p:cNvSpPr/>
-          <p:nvPr/>
-        </p:nvSpPr>
-        <p:spPr>
-          <a:xfrm>
-            <a:off x="1915668" y="3621024"/>
-            <a:ext cx="1691640" cy="310896"/>
-          </a:xfrm>
-          <a:prstGeom prst="roundRect">
-            <a:avLst/>
-          </a:prstGeom>
-          <a:solidFill>
-            <a:srgbClr val="DCFCE7"/>
-          </a:solidFill>
-          <a:ln w="15875">
-            <a:solidFill>
-              <a:srgbClr val="16A34A"/>
-            </a:solidFill>
-          </a:ln>
-          <a:effectLst/>
-        </p:spPr>
-        <p:style>
-          <a:lnRef idx="1">
-            <a:schemeClr val="accent1"/>
-          </a:lnRef>
-          <a:fillRef idx="3">
-            <a:schemeClr val="accent1"/>
-          </a:fillRef>
-          <a:effectRef idx="2">
-            <a:schemeClr val="accent1"/>
-          </a:effectRef>
-          <a:fontRef idx="minor">
-            <a:schemeClr val="lt1"/>
-          </a:fontRef>
-        </p:style>
-        <p:txBody>
-          <a:bodyPr rtlCol="0" anchor="ctr" lIns="36000" rIns="36000" tIns="18000" bIns="18000" wrap="square"/>
-          <a:lstStyle/>
-          <a:p>
-            <a:pPr algn="ctr"/>
-            <a:r>
-              <a:rPr sz="700" b="1">
-                <a:solidFill>
-                  <a:srgbClr val="16A34A"/>
-                </a:solidFill>
-                <a:latin typeface="Segoe UI"/>
-              </a:rPr>
-              <a:t>Tier 1</a:t>
-            </a:r>
-          </a:p>
-          <a:p>
-            <a:pPr algn="ctr"/>
-            <a:r>
-              <a:rPr sz="700" b="1">
-                <a:solidFill>
-                  <a:srgbClr val="16A34A"/>
-                </a:solidFill>
-                <a:latin typeface="Segoe UI"/>
-              </a:rPr>
-              <a:t>Auto-approve</a:t>
-            </a:r>
-          </a:p>
-        </p:txBody>
-      </p:sp>
-      <p:sp>
-        <p:nvSpPr>
-          <p:cNvPr id="24" name="Rounded Rectangle 23"/>
-          <p:cNvSpPr/>
-          <p:nvPr/>
-        </p:nvSpPr>
-        <p:spPr>
-          <a:xfrm>
-            <a:off x="3662172" y="3621024"/>
-            <a:ext cx="1691640" cy="310896"/>
-          </a:xfrm>
-          <a:prstGeom prst="roundRect">
-            <a:avLst/>
-          </a:prstGeom>
-          <a:solidFill>
-            <a:srgbClr val="FEF3C7"/>
-          </a:solidFill>
-          <a:ln w="15875">
-            <a:solidFill>
-              <a:srgbClr val="D97706"/>
-            </a:solidFill>
-          </a:ln>
-          <a:effectLst/>
-        </p:spPr>
-        <p:style>
-          <a:lnRef idx="1">
-            <a:schemeClr val="accent1"/>
-          </a:lnRef>
-          <a:fillRef idx="3">
-            <a:schemeClr val="accent1"/>
-          </a:fillRef>
-          <a:effectRef idx="2">
-            <a:schemeClr val="accent1"/>
-          </a:effectRef>
-          <a:fontRef idx="minor">
-            <a:schemeClr val="lt1"/>
-          </a:fontRef>
-        </p:style>
-        <p:txBody>
-          <a:bodyPr rtlCol="0" anchor="ctr" lIns="36000" rIns="36000" tIns="18000" bIns="18000" wrap="square"/>
-          <a:lstStyle/>
-          <a:p>
-            <a:pPr algn="ctr"/>
-            <a:r>
-              <a:rPr sz="700" b="1">
-                <a:solidFill>
-                  <a:srgbClr val="D97706"/>
-                </a:solidFill>
-                <a:latin typeface="Segoe UI"/>
-              </a:rPr>
-              <a:t>Tier 2</a:t>
-            </a:r>
-          </a:p>
-          <a:p>
-            <a:pPr algn="ctr"/>
-            <a:r>
-              <a:rPr sz="700" b="1">
-                <a:solidFill>
-                  <a:srgbClr val="D97706"/>
-                </a:solidFill>
-                <a:latin typeface="Segoe UI"/>
-              </a:rPr>
-              <a:t>Teams Adaptive Card</a:t>
-            </a:r>
-          </a:p>
-        </p:txBody>
-      </p:sp>
-      <p:sp>
-        <p:nvSpPr>
-          <p:cNvPr id="25" name="Rounded Rectangle 24"/>
-          <p:cNvSpPr/>
-          <p:nvPr/>
-        </p:nvSpPr>
-        <p:spPr>
-          <a:xfrm>
-            <a:off x="5408676" y="3621024"/>
-            <a:ext cx="1691640" cy="310896"/>
-          </a:xfrm>
-          <a:prstGeom prst="roundRect">
-            <a:avLst/>
-          </a:prstGeom>
-          <a:solidFill>
-            <a:srgbClr val="FEE2E2"/>
-          </a:solidFill>
-          <a:ln w="15875">
-            <a:solidFill>
-              <a:srgbClr val="DC2626"/>
-            </a:solidFill>
-          </a:ln>
-          <a:effectLst/>
-        </p:spPr>
-        <p:style>
-          <a:lnRef idx="1">
-            <a:schemeClr val="accent1"/>
-          </a:lnRef>
-          <a:fillRef idx="3">
-            <a:schemeClr val="accent1"/>
-          </a:fillRef>
-          <a:effectRef idx="2">
-            <a:schemeClr val="accent1"/>
-          </a:effectRef>
-          <a:fontRef idx="minor">
-            <a:schemeClr val="lt1"/>
-          </a:fontRef>
-        </p:style>
-        <p:txBody>
-          <a:bodyPr rtlCol="0" anchor="ctr" lIns="36000" rIns="36000" tIns="18000" bIns="18000" wrap="square"/>
-          <a:lstStyle/>
-          <a:p>
-            <a:pPr algn="ctr"/>
-            <a:r>
-              <a:rPr sz="700" b="1">
-                <a:solidFill>
-                  <a:srgbClr val="DC2626"/>
-                </a:solidFill>
-                <a:latin typeface="Segoe UI"/>
-              </a:rPr>
-              <a:t>Tier 3</a:t>
-            </a:r>
-          </a:p>
-          <a:p>
-            <a:pPr algn="ctr"/>
-            <a:r>
-              <a:rPr sz="700" b="1">
-                <a:solidFill>
-                  <a:srgbClr val="DC2626"/>
-                </a:solidFill>
-                <a:latin typeface="Segoe UI"/>
-              </a:rPr>
-              <a:t>Live CSR escalation</a:t>
-            </a:r>
-          </a:p>
-        </p:txBody>
-      </p:sp>
-      <p:sp>
-        <p:nvSpPr>
-          <p:cNvPr id="26" name="Rounded Rectangle 25"/>
-          <p:cNvSpPr/>
-          <p:nvPr/>
-        </p:nvSpPr>
-        <p:spPr>
-          <a:xfrm>
-            <a:off x="1554480" y="3986784"/>
-            <a:ext cx="2194560" cy="310896"/>
-          </a:xfrm>
-          <a:prstGeom prst="roundRect">
-            <a:avLst/>
-          </a:prstGeom>
-          <a:solidFill>
-            <a:srgbClr val="EDE4F5"/>
-          </a:solidFill>
-          <a:ln w="15875">
-            <a:solidFill>
-              <a:srgbClr val="742774"/>
-            </a:solidFill>
-          </a:ln>
-          <a:effectLst/>
-        </p:spPr>
-        <p:style>
-          <a:lnRef idx="1">
-            <a:schemeClr val="accent1"/>
-          </a:lnRef>
-          <a:fillRef idx="3">
-            <a:schemeClr val="accent1"/>
-          </a:fillRef>
-          <a:effectRef idx="2">
-            <a:schemeClr val="accent1"/>
-          </a:effectRef>
-          <a:fontRef idx="minor">
-            <a:schemeClr val="lt1"/>
-          </a:fontRef>
-        </p:style>
-        <p:txBody>
-          <a:bodyPr rtlCol="0" anchor="ctr" lIns="36000" rIns="36000" tIns="18000" bIns="18000" wrap="square"/>
-          <a:lstStyle/>
-          <a:p>
-            <a:pPr algn="ctr"/>
-            <a:r>
-              <a:rPr sz="800" b="1">
-                <a:solidFill>
-                  <a:srgbClr val="742774"/>
-                </a:solidFill>
-                <a:latin typeface="Segoe UI"/>
-              </a:rPr>
-              <a:t>Copilot Studio · Explanation Agent</a:t>
-            </a:r>
-          </a:p>
-        </p:txBody>
-      </p:sp>
-      <p:sp>
-        <p:nvSpPr>
-          <p:cNvPr id="27" name="Rounded Rectangle 26"/>
-          <p:cNvSpPr/>
-          <p:nvPr/>
-        </p:nvSpPr>
-        <p:spPr>
-          <a:xfrm>
-            <a:off x="3931920" y="3986784"/>
-            <a:ext cx="2194560" cy="310896"/>
-          </a:xfrm>
-          <a:prstGeom prst="roundRect">
-            <a:avLst/>
-          </a:prstGeom>
-          <a:solidFill>
-            <a:srgbClr val="EDE4F5"/>
-          </a:solidFill>
-          <a:ln w="15875">
-            <a:solidFill>
-              <a:srgbClr val="742774"/>
-            </a:solidFill>
-          </a:ln>
-          <a:effectLst/>
-        </p:spPr>
-        <p:style>
-          <a:lnRef idx="1">
-            <a:schemeClr val="accent1"/>
-          </a:lnRef>
-          <a:fillRef idx="3">
-            <a:schemeClr val="accent1"/>
-          </a:fillRef>
-          <a:effectRef idx="2">
-            <a:schemeClr val="accent1"/>
-          </a:effectRef>
-          <a:fontRef idx="minor">
-            <a:schemeClr val="lt1"/>
-          </a:fontRef>
-        </p:style>
-        <p:txBody>
-          <a:bodyPr rtlCol="0" anchor="ctr" lIns="36000" rIns="36000" tIns="18000" bIns="18000" wrap="square"/>
-          <a:lstStyle/>
-          <a:p>
-            <a:pPr algn="ctr"/>
-            <a:r>
-              <a:rPr sz="800" b="1">
-                <a:solidFill>
-                  <a:srgbClr val="742774"/>
-                </a:solidFill>
-                <a:latin typeface="Segoe UI"/>
-              </a:rPr>
-              <a:t>Power Automate · Notify_Customer</a:t>
-            </a:r>
-          </a:p>
-        </p:txBody>
-      </p:sp>
-      <p:sp>
-        <p:nvSpPr>
-          <p:cNvPr id="28" name="Rounded Rectangle 27"/>
-          <p:cNvSpPr/>
-          <p:nvPr/>
-        </p:nvSpPr>
-        <p:spPr>
-          <a:xfrm>
-            <a:off x="2697480" y="4352544"/>
-            <a:ext cx="2286000" cy="310896"/>
-          </a:xfrm>
-          <a:prstGeom prst="roundRect">
-            <a:avLst/>
-          </a:prstGeom>
-          <a:solidFill>
-            <a:srgbClr val="EDE4F5"/>
-          </a:solidFill>
-          <a:ln w="15875">
-            <a:solidFill>
-              <a:srgbClr val="742774"/>
-            </a:solidFill>
-          </a:ln>
-          <a:effectLst/>
-        </p:spPr>
-        <p:style>
-          <a:lnRef idx="1">
-            <a:schemeClr val="accent1"/>
-          </a:lnRef>
-          <a:fillRef idx="3">
-            <a:schemeClr val="accent1"/>
-          </a:fillRef>
-          <a:effectRef idx="2">
-            <a:schemeClr val="accent1"/>
-          </a:effectRef>
-          <a:fontRef idx="minor">
-            <a:schemeClr val="lt1"/>
-          </a:fontRef>
-        </p:style>
-        <p:txBody>
-          <a:bodyPr rtlCol="0" anchor="ctr" lIns="36000" rIns="36000" tIns="18000" bIns="18000" wrap="square"/>
-          <a:lstStyle/>
-          <a:p>
-            <a:pPr algn="ctr"/>
-            <a:r>
-              <a:rPr sz="800" b="1">
-                <a:solidFill>
-                  <a:srgbClr val="742774"/>
-                </a:solidFill>
-                <a:latin typeface="Segoe UI"/>
-              </a:rPr>
-              <a:t>Power BI · Operations Dashboard</a:t>
-            </a:r>
-          </a:p>
-        </p:txBody>
-      </p:sp>
-      <p:sp>
-        <p:nvSpPr>
-          <p:cNvPr id="29" name="TextBox 28"/>
-          <p:cNvSpPr txBox="1"/>
-          <p:nvPr/>
-        </p:nvSpPr>
-        <p:spPr>
-          <a:xfrm>
-            <a:off x="7406640" y="502920"/>
-            <a:ext cx="1600200" cy="201168"/>
-          </a:xfrm>
-          <a:prstGeom prst="rect">
-            <a:avLst/>
-          </a:prstGeom>
-          <a:noFill/>
-        </p:spPr>
-        <p:txBody>
-          <a:bodyPr wrap="square" lIns="0" rIns="0" tIns="0" bIns="0">
-            <a:spAutoFit/>
-          </a:bodyPr>
-          <a:lstStyle/>
-          <a:p>
-            <a:pPr algn="ctr"/>
-            <a:r>
-              <a:rPr sz="1000" b="1">
-                <a:solidFill>
-                  <a:srgbClr val="0A2540"/>
-                </a:solidFill>
-                <a:latin typeface="Segoe UI"/>
-              </a:rPr>
-              <a:t>Security &amp; Compliance</a:t>
-            </a:r>
-          </a:p>
-        </p:txBody>
-      </p:sp>
-      <p:sp>
-        <p:nvSpPr>
-          <p:cNvPr id="30" name="Rounded Rectangle 29"/>
-          <p:cNvSpPr/>
-          <p:nvPr/>
-        </p:nvSpPr>
-        <p:spPr>
-          <a:xfrm>
-            <a:off x="7406640" y="758952"/>
-            <a:ext cx="1600200" cy="411480"/>
-          </a:xfrm>
-          <a:prstGeom prst="roundRect">
-            <a:avLst/>
-          </a:prstGeom>
-          <a:solidFill>
-            <a:srgbClr val="DBEAFE"/>
-          </a:solidFill>
-          <a:ln w="15875">
-            <a:solidFill>
-              <a:srgbClr val="0078D4"/>
-            </a:solidFill>
-          </a:ln>
-          <a:effectLst/>
-        </p:spPr>
-        <p:style>
-          <a:lnRef idx="1">
-            <a:schemeClr val="accent1"/>
-          </a:lnRef>
-          <a:fillRef idx="3">
-            <a:schemeClr val="accent1"/>
-          </a:fillRef>
-          <a:effectRef idx="2">
-            <a:schemeClr val="accent1"/>
-          </a:effectRef>
-          <a:fontRef idx="minor">
-            <a:schemeClr val="lt1"/>
-          </a:fontRef>
-        </p:style>
-        <p:txBody>
-          <a:bodyPr rtlCol="0" anchor="ctr" lIns="36000" rIns="36000" tIns="18000" bIns="18000" wrap="square"/>
-          <a:lstStyle/>
-          <a:p>
-            <a:pPr algn="ctr"/>
-            <a:r>
-              <a:rPr sz="700" b="1">
-                <a:solidFill>
-                  <a:srgbClr val="0078D4"/>
-                </a:solidFill>
-                <a:latin typeface="Segoe UI"/>
-              </a:rPr>
-              <a:t>Microsoft Entra ID</a:t>
-            </a:r>
-          </a:p>
-          <a:p>
-            <a:pPr algn="ctr"/>
-            <a:r>
-              <a:rPr sz="700" b="1">
-                <a:solidFill>
-                  <a:srgbClr val="0078D4"/>
-                </a:solidFill>
-                <a:latin typeface="Segoe UI"/>
-              </a:rPr>
-              <a:t>SSO + RBAC + roles</a:t>
-            </a:r>
-          </a:p>
-        </p:txBody>
-      </p:sp>
-      <p:sp>
-        <p:nvSpPr>
-          <p:cNvPr id="31" name="Rounded Rectangle 30"/>
-          <p:cNvSpPr/>
-          <p:nvPr/>
-        </p:nvSpPr>
-        <p:spPr>
-          <a:xfrm>
-            <a:off x="7406640" y="1216152"/>
-            <a:ext cx="1600200" cy="411480"/>
-          </a:xfrm>
-          <a:prstGeom prst="roundRect">
-            <a:avLst/>
-          </a:prstGeom>
-          <a:solidFill>
-            <a:srgbClr val="DBEAFE"/>
-          </a:solidFill>
-          <a:ln w="15875">
-            <a:solidFill>
-              <a:srgbClr val="0078D4"/>
-            </a:solidFill>
-          </a:ln>
-          <a:effectLst/>
-        </p:spPr>
-        <p:style>
-          <a:lnRef idx="1">
-            <a:schemeClr val="accent1"/>
-          </a:lnRef>
-          <a:fillRef idx="3">
-            <a:schemeClr val="accent1"/>
-          </a:fillRef>
-          <a:effectRef idx="2">
-            <a:schemeClr val="accent1"/>
-          </a:effectRef>
-          <a:fontRef idx="minor">
-            <a:schemeClr val="lt1"/>
-          </a:fontRef>
-        </p:style>
-        <p:txBody>
-          <a:bodyPr rtlCol="0" anchor="ctr" lIns="36000" rIns="36000" tIns="18000" bIns="18000" wrap="square"/>
-          <a:lstStyle/>
-          <a:p>
-            <a:pPr algn="ctr"/>
-            <a:r>
-              <a:rPr sz="700" b="1">
-                <a:solidFill>
-                  <a:srgbClr val="0078D4"/>
-                </a:solidFill>
-                <a:latin typeface="Segoe UI"/>
-              </a:rPr>
-              <a:t>Azure Key Vault</a:t>
-            </a:r>
-          </a:p>
-          <a:p>
-            <a:pPr algn="ctr"/>
-            <a:r>
-              <a:rPr sz="700" b="1">
-                <a:solidFill>
-                  <a:srgbClr val="0078D4"/>
-                </a:solidFill>
-                <a:latin typeface="Segoe UI"/>
-              </a:rPr>
-              <a:t>Secrets + keys</a:t>
-            </a:r>
-          </a:p>
-        </p:txBody>
-      </p:sp>
-      <p:sp>
-        <p:nvSpPr>
-          <p:cNvPr id="32" name="Rounded Rectangle 31"/>
-          <p:cNvSpPr/>
-          <p:nvPr/>
-        </p:nvSpPr>
-        <p:spPr>
-          <a:xfrm>
-            <a:off x="7406640" y="1673352"/>
-            <a:ext cx="1600200" cy="411480"/>
-          </a:xfrm>
-          <a:prstGeom prst="roundRect">
-            <a:avLst/>
-          </a:prstGeom>
-          <a:solidFill>
-            <a:srgbClr val="DBEAFE"/>
-          </a:solidFill>
-          <a:ln w="15875">
-            <a:solidFill>
-              <a:srgbClr val="0078D4"/>
-            </a:solidFill>
-          </a:ln>
-          <a:effectLst/>
-        </p:spPr>
-        <p:style>
-          <a:lnRef idx="1">
-            <a:schemeClr val="accent1"/>
-          </a:lnRef>
-          <a:fillRef idx="3">
-            <a:schemeClr val="accent1"/>
-          </a:fillRef>
-          <a:effectRef idx="2">
-            <a:schemeClr val="accent1"/>
-          </a:effectRef>
-          <a:fontRef idx="minor">
-            <a:schemeClr val="lt1"/>
-          </a:fontRef>
-        </p:style>
-        <p:txBody>
-          <a:bodyPr rtlCol="0" anchor="ctr" lIns="36000" rIns="36000" tIns="18000" bIns="18000" wrap="square"/>
-          <a:lstStyle/>
-          <a:p>
-            <a:pPr algn="ctr"/>
-            <a:r>
-              <a:rPr sz="700" b="1">
-                <a:solidFill>
-                  <a:srgbClr val="0078D4"/>
-                </a:solidFill>
-                <a:latin typeface="Segoe UI"/>
-              </a:rPr>
-              <a:t>Application Insights</a:t>
-            </a:r>
-          </a:p>
-          <a:p>
-            <a:pPr algn="ctr"/>
-            <a:r>
-              <a:rPr sz="700" b="1">
-                <a:solidFill>
-                  <a:srgbClr val="0078D4"/>
-                </a:solidFill>
-                <a:latin typeface="Segoe UI"/>
-              </a:rPr>
-              <a:t>Telemetry</a:t>
-            </a:r>
-          </a:p>
-        </p:txBody>
-      </p:sp>
-      <p:sp>
-        <p:nvSpPr>
-          <p:cNvPr id="33" name="Rounded Rectangle 32"/>
-          <p:cNvSpPr/>
-          <p:nvPr/>
-        </p:nvSpPr>
-        <p:spPr>
-          <a:xfrm>
-            <a:off x="7406640" y="2130552"/>
-            <a:ext cx="1600200" cy="411480"/>
-          </a:xfrm>
-          <a:prstGeom prst="roundRect">
-            <a:avLst/>
-          </a:prstGeom>
-          <a:solidFill>
-            <a:srgbClr val="EDE4F5"/>
-          </a:solidFill>
-          <a:ln w="15875">
-            <a:solidFill>
-              <a:srgbClr val="742774"/>
-            </a:solidFill>
-          </a:ln>
-          <a:effectLst/>
-        </p:spPr>
-        <p:style>
-          <a:lnRef idx="1">
-            <a:schemeClr val="accent1"/>
-          </a:lnRef>
-          <a:fillRef idx="3">
-            <a:schemeClr val="accent1"/>
-          </a:fillRef>
-          <a:effectRef idx="2">
-            <a:schemeClr val="accent1"/>
-          </a:effectRef>
-          <a:fontRef idx="minor">
-            <a:schemeClr val="lt1"/>
-          </a:fontRef>
-        </p:style>
-        <p:txBody>
-          <a:bodyPr rtlCol="0" anchor="ctr" lIns="36000" rIns="36000" tIns="18000" bIns="18000" wrap="square"/>
-          <a:lstStyle/>
-          <a:p>
-            <a:pPr algn="ctr"/>
-            <a:r>
-              <a:rPr sz="700" b="1">
-                <a:solidFill>
-                  <a:srgbClr val="742774"/>
-                </a:solidFill>
-                <a:latin typeface="Segoe UI"/>
-              </a:rPr>
-              <a:t>Power Platform DLP</a:t>
-            </a:r>
-          </a:p>
-          <a:p>
-            <a:pPr algn="ctr"/>
-            <a:r>
-              <a:rPr sz="700" b="1">
-                <a:solidFill>
-                  <a:srgbClr val="742774"/>
-                </a:solidFill>
-                <a:latin typeface="Segoe UI"/>
-              </a:rPr>
-              <a:t>Connector policies</a:t>
-            </a:r>
-          </a:p>
-        </p:txBody>
-      </p:sp>
-      <p:sp>
-        <p:nvSpPr>
-          <p:cNvPr id="34" name="Rounded Rectangle 33"/>
-          <p:cNvSpPr/>
-          <p:nvPr/>
-        </p:nvSpPr>
-        <p:spPr>
-          <a:xfrm>
-            <a:off x="7406640" y="2587752"/>
-            <a:ext cx="1600200" cy="411480"/>
-          </a:xfrm>
-          <a:prstGeom prst="roundRect">
-            <a:avLst/>
-          </a:prstGeom>
-          <a:solidFill>
-            <a:srgbClr val="DBEAFE"/>
-          </a:solidFill>
-          <a:ln w="15875">
-            <a:solidFill>
-              <a:srgbClr val="0078D4"/>
-            </a:solidFill>
-          </a:ln>
-          <a:effectLst/>
-        </p:spPr>
-        <p:style>
-          <a:lnRef idx="1">
-            <a:schemeClr val="accent1"/>
-          </a:lnRef>
-          <a:fillRef idx="3">
-            <a:schemeClr val="accent1"/>
-          </a:fillRef>
-          <a:effectRef idx="2">
-            <a:schemeClr val="accent1"/>
-          </a:effectRef>
-          <a:fontRef idx="minor">
-            <a:schemeClr val="lt1"/>
-          </a:fontRef>
-        </p:style>
-        <p:txBody>
-          <a:bodyPr rtlCol="0" anchor="ctr" lIns="36000" rIns="36000" tIns="18000" bIns="18000" wrap="square"/>
-          <a:lstStyle/>
-          <a:p>
-            <a:pPr algn="ctr"/>
-            <a:r>
-              <a:rPr sz="700" b="1">
-                <a:solidFill>
-                  <a:srgbClr val="0078D4"/>
-                </a:solidFill>
-                <a:latin typeface="Segoe UI"/>
-              </a:rPr>
-              <a:t>Encryption</a:t>
-            </a:r>
-          </a:p>
-          <a:p>
-            <a:pPr algn="ctr"/>
-            <a:r>
-              <a:rPr sz="700" b="1">
-                <a:solidFill>
-                  <a:srgbClr val="0078D4"/>
-                </a:solidFill>
-                <a:latin typeface="Segoe UI"/>
-              </a:rPr>
-              <a:t>At rest + in transit (TLS 1.2+)</a:t>
-            </a:r>
-          </a:p>
-        </p:txBody>
-      </p:sp>
-      <p:sp>
-        <p:nvSpPr>
-          <p:cNvPr id="35" name="Rounded Rectangle 34"/>
-          <p:cNvSpPr/>
-          <p:nvPr/>
-        </p:nvSpPr>
-        <p:spPr>
-          <a:xfrm>
-            <a:off x="7406640" y="3044952"/>
-            <a:ext cx="1600200" cy="777240"/>
-          </a:xfrm>
-          <a:prstGeom prst="roundRect">
-            <a:avLst/>
-          </a:prstGeom>
-          <a:solidFill>
-            <a:srgbClr val="EDE9FE"/>
-          </a:solidFill>
-          <a:ln w="15875">
-            <a:solidFill>
-              <a:srgbClr val="7C3AED"/>
-            </a:solidFill>
-          </a:ln>
-          <a:effectLst/>
-        </p:spPr>
-        <p:style>
-          <a:lnRef idx="1">
-            <a:schemeClr val="accent1"/>
-          </a:lnRef>
-          <a:fillRef idx="3">
-            <a:schemeClr val="accent1"/>
-          </a:fillRef>
-          <a:effectRef idx="2">
-            <a:schemeClr val="accent1"/>
-          </a:effectRef>
-          <a:fontRef idx="minor">
-            <a:schemeClr val="lt1"/>
-          </a:fontRef>
-        </p:style>
-        <p:txBody>
-          <a:bodyPr rtlCol="0" anchor="ctr" lIns="36000" rIns="36000" tIns="18000" bIns="18000" wrap="square"/>
-          <a:lstStyle/>
-          <a:p>
-            <a:pPr algn="ctr"/>
-            <a:r>
-              <a:rPr sz="700" b="1">
-                <a:solidFill>
-                  <a:srgbClr val="5B21B6"/>
-                </a:solidFill>
-                <a:latin typeface="Segoe UI"/>
-              </a:rPr>
-              <a:t>Compliance Mapping</a:t>
-            </a:r>
-          </a:p>
-          <a:p>
-            <a:pPr algn="ctr"/>
-            <a:r>
-              <a:rPr sz="700" b="1">
-                <a:solidFill>
-                  <a:srgbClr val="5B21B6"/>
-                </a:solidFill>
-                <a:latin typeface="Segoe UI"/>
-              </a:rPr>
-              <a:t>Colorado SB21-169</a:t>
-            </a:r>
-          </a:p>
-          <a:p>
-            <a:pPr algn="ctr"/>
-            <a:r>
-              <a:rPr sz="700" b="1">
-                <a:solidFill>
-                  <a:srgbClr val="5B21B6"/>
-                </a:solidFill>
-                <a:latin typeface="Segoe UI"/>
-              </a:rPr>
-              <a:t>NAIC AI Bulletin</a:t>
-            </a:r>
-          </a:p>
-          <a:p>
-            <a:pPr algn="ctr"/>
-            <a:r>
-              <a:rPr sz="700" b="1">
-                <a:solidFill>
-                  <a:srgbClr val="5B21B6"/>
-                </a:solidFill>
-                <a:latin typeface="Segoe UI"/>
-              </a:rPr>
-              <a:t>NY DFS Circular 7</a:t>
-            </a:r>
-          </a:p>
-          <a:p>
-            <a:pPr algn="ctr"/>
-            <a:r>
-              <a:rPr sz="700" b="1">
-                <a:solidFill>
-                  <a:srgbClr val="5B21B6"/>
-                </a:solidFill>
-                <a:latin typeface="Segoe UI"/>
-              </a:rPr>
-              <a:t>CA AB 2930 (pending)</a:t>
-            </a:r>
-          </a:p>
-        </p:txBody>
-      </p:sp>
-      <p:cxnSp>
-        <p:nvCxnSpPr>
-          <p:cNvPr id="36" name="Connector 35"/>
-          <p:cNvCxnSpPr/>
-          <p:nvPr/>
-        </p:nvCxnSpPr>
-        <p:spPr>
-          <a:xfrm flipH="1">
-            <a:off x="1060704" y="813816"/>
-            <a:ext cx="2779776" cy="54864"/>
-          </a:xfrm>
-          <a:prstGeom prst="line">
-            <a:avLst/>
-          </a:prstGeom>
-          <a:ln w="12700">
-            <a:solidFill>
-              <a:srgbClr val="5A6680"/>
-            </a:solidFill>
-            <a:tailEnd type="triangle" w="med" h="med"/>
-          </a:ln>
-        </p:spPr>
-        <p:style>
-          <a:lnRef idx="2">
-            <a:schemeClr val="accent1"/>
-          </a:lnRef>
-          <a:fillRef idx="0">
-            <a:schemeClr val="accent1"/>
-          </a:fillRef>
-          <a:effectRef idx="1">
-            <a:schemeClr val="accent1"/>
-          </a:effectRef>
-          <a:fontRef idx="minor">
-            <a:schemeClr val="tx1"/>
-          </a:fontRef>
-        </p:style>
-      </p:cxnSp>
-      <p:cxnSp>
-        <p:nvCxnSpPr>
-          <p:cNvPr id="37" name="Connector 36"/>
-          <p:cNvCxnSpPr/>
-          <p:nvPr/>
-        </p:nvCxnSpPr>
-        <p:spPr>
-          <a:xfrm flipH="1">
-            <a:off x="2450592" y="813816"/>
-            <a:ext cx="1389888" cy="54864"/>
-          </a:xfrm>
-          <a:prstGeom prst="line">
-            <a:avLst/>
-          </a:prstGeom>
-          <a:ln w="12700">
-            <a:solidFill>
-              <a:srgbClr val="5A6680"/>
-            </a:solidFill>
-            <a:tailEnd type="triangle" w="med" h="med"/>
-          </a:ln>
-        </p:spPr>
-        <p:style>
-          <a:lnRef idx="2">
-            <a:schemeClr val="accent1"/>
-          </a:lnRef>
-          <a:fillRef idx="0">
-            <a:schemeClr val="accent1"/>
-          </a:fillRef>
-          <a:effectRef idx="1">
-            <a:schemeClr val="accent1"/>
-          </a:effectRef>
-          <a:fontRef idx="minor">
-            <a:schemeClr val="tx1"/>
-          </a:fontRef>
-        </p:style>
-      </p:cxnSp>
-      <p:cxnSp>
-        <p:nvCxnSpPr>
-          <p:cNvPr id="38" name="Connector 37"/>
-          <p:cNvCxnSpPr/>
-          <p:nvPr/>
-        </p:nvCxnSpPr>
-        <p:spPr>
-          <a:xfrm>
-            <a:off x="3840480" y="813816"/>
-            <a:ext cx="0" cy="54864"/>
-          </a:xfrm>
-          <a:prstGeom prst="line">
-            <a:avLst/>
-          </a:prstGeom>
-          <a:ln w="12700">
-            <a:solidFill>
-              <a:srgbClr val="5A6680"/>
-            </a:solidFill>
-            <a:tailEnd type="triangle" w="med" h="med"/>
-          </a:ln>
-        </p:spPr>
-        <p:style>
-          <a:lnRef idx="2">
-            <a:schemeClr val="accent1"/>
-          </a:lnRef>
-          <a:fillRef idx="0">
-            <a:schemeClr val="accent1"/>
-          </a:fillRef>
-          <a:effectRef idx="1">
-            <a:schemeClr val="accent1"/>
-          </a:effectRef>
-          <a:fontRef idx="minor">
-            <a:schemeClr val="tx1"/>
-          </a:fontRef>
-        </p:style>
-      </p:cxnSp>
-      <p:cxnSp>
-        <p:nvCxnSpPr>
-          <p:cNvPr id="39" name="Connector 38"/>
-          <p:cNvCxnSpPr/>
-          <p:nvPr/>
-        </p:nvCxnSpPr>
-        <p:spPr>
-          <a:xfrm>
-            <a:off x="3840480" y="813816"/>
-            <a:ext cx="1389888" cy="54864"/>
-          </a:xfrm>
-          <a:prstGeom prst="line">
-            <a:avLst/>
-          </a:prstGeom>
-          <a:ln w="12700">
-            <a:solidFill>
-              <a:srgbClr val="5A6680"/>
-            </a:solidFill>
-            <a:tailEnd type="triangle" w="med" h="med"/>
-          </a:ln>
-        </p:spPr>
-        <p:style>
-          <a:lnRef idx="2">
-            <a:schemeClr val="accent1"/>
-          </a:lnRef>
-          <a:fillRef idx="0">
-            <a:schemeClr val="accent1"/>
-          </a:fillRef>
-          <a:effectRef idx="1">
-            <a:schemeClr val="accent1"/>
-          </a:effectRef>
-          <a:fontRef idx="minor">
-            <a:schemeClr val="tx1"/>
-          </a:fontRef>
-        </p:style>
-      </p:cxnSp>
-      <p:cxnSp>
-        <p:nvCxnSpPr>
-          <p:cNvPr id="40" name="Connector 39"/>
-          <p:cNvCxnSpPr/>
-          <p:nvPr/>
-        </p:nvCxnSpPr>
-        <p:spPr>
-          <a:xfrm>
-            <a:off x="3840480" y="813816"/>
-            <a:ext cx="2779776" cy="54864"/>
-          </a:xfrm>
-          <a:prstGeom prst="line">
-            <a:avLst/>
-          </a:prstGeom>
-          <a:ln w="12700">
-            <a:solidFill>
-              <a:srgbClr val="5A6680"/>
-            </a:solidFill>
-            <a:tailEnd type="triangle" w="med" h="med"/>
-          </a:ln>
-        </p:spPr>
-        <p:style>
-          <a:lnRef idx="2">
-            <a:schemeClr val="accent1"/>
-          </a:lnRef>
-          <a:fillRef idx="0">
-            <a:schemeClr val="accent1"/>
-          </a:fillRef>
-          <a:effectRef idx="1">
-            <a:schemeClr val="accent1"/>
-          </a:effectRef>
-          <a:fontRef idx="minor">
-            <a:schemeClr val="tx1"/>
-          </a:fontRef>
-        </p:style>
-      </p:cxnSp>
-      <p:cxnSp>
-        <p:nvCxnSpPr>
-          <p:cNvPr id="41" name="Connector 40"/>
-          <p:cNvCxnSpPr/>
-          <p:nvPr/>
-        </p:nvCxnSpPr>
-        <p:spPr>
-          <a:xfrm>
-            <a:off x="1060704" y="1179576"/>
-            <a:ext cx="242316" cy="54864"/>
-          </a:xfrm>
-          <a:prstGeom prst="line">
-            <a:avLst/>
-          </a:prstGeom>
-          <a:ln w="12700">
-            <a:solidFill>
-              <a:srgbClr val="5A6680"/>
-            </a:solidFill>
-            <a:tailEnd type="triangle" w="med" h="med"/>
-          </a:ln>
-        </p:spPr>
-        <p:style>
-          <a:lnRef idx="2">
-            <a:schemeClr val="accent1"/>
-          </a:lnRef>
-          <a:fillRef idx="0">
-            <a:schemeClr val="accent1"/>
-          </a:fillRef>
-          <a:effectRef idx="1">
-            <a:schemeClr val="accent1"/>
-          </a:effectRef>
-          <a:fontRef idx="minor">
-            <a:schemeClr val="tx1"/>
-          </a:fontRef>
-        </p:style>
-      </p:cxnSp>
-      <p:cxnSp>
-        <p:nvCxnSpPr>
-          <p:cNvPr id="42" name="Connector 41"/>
-          <p:cNvCxnSpPr/>
-          <p:nvPr/>
-        </p:nvCxnSpPr>
-        <p:spPr>
-          <a:xfrm flipH="1">
-            <a:off x="1303020" y="1179576"/>
-            <a:ext cx="1147572" cy="54864"/>
-          </a:xfrm>
-          <a:prstGeom prst="line">
-            <a:avLst/>
-          </a:prstGeom>
-          <a:ln w="12700">
-            <a:solidFill>
-              <a:srgbClr val="5A6680"/>
-            </a:solidFill>
-            <a:tailEnd type="triangle" w="med" h="med"/>
-          </a:ln>
-        </p:spPr>
-        <p:style>
-          <a:lnRef idx="2">
-            <a:schemeClr val="accent1"/>
-          </a:lnRef>
-          <a:fillRef idx="0">
-            <a:schemeClr val="accent1"/>
-          </a:fillRef>
-          <a:effectRef idx="1">
-            <a:schemeClr val="accent1"/>
-          </a:effectRef>
-          <a:fontRef idx="minor">
-            <a:schemeClr val="tx1"/>
-          </a:fontRef>
-        </p:style>
-      </p:cxnSp>
-      <p:cxnSp>
-        <p:nvCxnSpPr>
-          <p:cNvPr id="43" name="Connector 42"/>
-          <p:cNvCxnSpPr/>
-          <p:nvPr/>
-        </p:nvCxnSpPr>
-        <p:spPr>
-          <a:xfrm>
-            <a:off x="3840480" y="1179576"/>
-            <a:ext cx="845820" cy="54864"/>
-          </a:xfrm>
-          <a:prstGeom prst="line">
-            <a:avLst/>
-          </a:prstGeom>
-          <a:ln w="12700">
-            <a:solidFill>
-              <a:srgbClr val="5A6680"/>
-            </a:solidFill>
-            <a:tailEnd type="triangle" w="med" h="med"/>
-          </a:ln>
-        </p:spPr>
-        <p:style>
-          <a:lnRef idx="2">
-            <a:schemeClr val="accent1"/>
-          </a:lnRef>
-          <a:fillRef idx="0">
-            <a:schemeClr val="accent1"/>
-          </a:fillRef>
-          <a:effectRef idx="1">
-            <a:schemeClr val="accent1"/>
-          </a:effectRef>
-          <a:fontRef idx="minor">
-            <a:schemeClr val="tx1"/>
-          </a:fontRef>
-        </p:style>
-      </p:cxnSp>
-      <p:cxnSp>
-        <p:nvCxnSpPr>
-          <p:cNvPr id="44" name="Connector 43"/>
-          <p:cNvCxnSpPr/>
-          <p:nvPr/>
-        </p:nvCxnSpPr>
-        <p:spPr>
-          <a:xfrm>
-            <a:off x="5230368" y="1179576"/>
-            <a:ext cx="1147572" cy="54864"/>
-          </a:xfrm>
-          <a:prstGeom prst="line">
-            <a:avLst/>
-          </a:prstGeom>
-          <a:ln w="12700">
-            <a:solidFill>
-              <a:srgbClr val="5A6680"/>
-            </a:solidFill>
-            <a:tailEnd type="triangle" w="med" h="med"/>
-          </a:ln>
-        </p:spPr>
-        <p:style>
-          <a:lnRef idx="2">
-            <a:schemeClr val="accent1"/>
-          </a:lnRef>
-          <a:fillRef idx="0">
-            <a:schemeClr val="accent1"/>
-          </a:fillRef>
-          <a:effectRef idx="1">
-            <a:schemeClr val="accent1"/>
-          </a:effectRef>
-          <a:fontRef idx="minor">
-            <a:schemeClr val="tx1"/>
-          </a:fontRef>
-        </p:style>
-      </p:cxnSp>
-      <p:cxnSp>
-        <p:nvCxnSpPr>
-          <p:cNvPr id="45" name="Connector 44"/>
-          <p:cNvCxnSpPr/>
-          <p:nvPr/>
-        </p:nvCxnSpPr>
-        <p:spPr>
-          <a:xfrm flipH="1">
-            <a:off x="6377940" y="1179576"/>
-            <a:ext cx="242316" cy="54864"/>
-          </a:xfrm>
-          <a:prstGeom prst="line">
-            <a:avLst/>
-          </a:prstGeom>
-          <a:ln w="12700">
-            <a:solidFill>
-              <a:srgbClr val="5A6680"/>
-            </a:solidFill>
-            <a:tailEnd type="triangle" w="med" h="med"/>
-          </a:ln>
-        </p:spPr>
-        <p:style>
-          <a:lnRef idx="2">
-            <a:schemeClr val="accent1"/>
-          </a:lnRef>
-          <a:fillRef idx="0">
-            <a:schemeClr val="accent1"/>
-          </a:fillRef>
-          <a:effectRef idx="1">
-            <a:schemeClr val="accent1"/>
-          </a:effectRef>
-          <a:fontRef idx="minor">
-            <a:schemeClr val="tx1"/>
-          </a:fontRef>
-        </p:style>
-      </p:cxnSp>
-      <p:cxnSp>
-        <p:nvCxnSpPr>
-          <p:cNvPr id="46" name="Connector 45"/>
-          <p:cNvCxnSpPr/>
-          <p:nvPr/>
-        </p:nvCxnSpPr>
-        <p:spPr>
-          <a:xfrm>
-            <a:off x="1303020" y="1545336"/>
-            <a:ext cx="2537460" cy="54864"/>
-          </a:xfrm>
-          <a:prstGeom prst="line">
-            <a:avLst/>
-          </a:prstGeom>
-          <a:ln w="12700">
-            <a:solidFill>
-              <a:srgbClr val="5A6680"/>
-            </a:solidFill>
-            <a:tailEnd type="triangle" w="med" h="med"/>
-          </a:ln>
-        </p:spPr>
-        <p:style>
-          <a:lnRef idx="2">
-            <a:schemeClr val="accent1"/>
-          </a:lnRef>
-          <a:fillRef idx="0">
-            <a:schemeClr val="accent1"/>
-          </a:fillRef>
-          <a:effectRef idx="1">
-            <a:schemeClr val="accent1"/>
-          </a:effectRef>
-          <a:fontRef idx="minor">
-            <a:schemeClr val="tx1"/>
-          </a:fontRef>
-        </p:style>
-      </p:cxnSp>
-      <p:cxnSp>
-        <p:nvCxnSpPr>
-          <p:cNvPr id="47" name="Connector 46"/>
-          <p:cNvCxnSpPr/>
-          <p:nvPr/>
-        </p:nvCxnSpPr>
-        <p:spPr>
-          <a:xfrm>
-            <a:off x="2994660" y="1545336"/>
-            <a:ext cx="845820" cy="54864"/>
-          </a:xfrm>
-          <a:prstGeom prst="line">
-            <a:avLst/>
-          </a:prstGeom>
-          <a:ln w="12700">
-            <a:solidFill>
-              <a:srgbClr val="5A6680"/>
-            </a:solidFill>
-            <a:tailEnd type="triangle" w="med" h="med"/>
-          </a:ln>
-        </p:spPr>
-        <p:style>
-          <a:lnRef idx="2">
-            <a:schemeClr val="accent1"/>
-          </a:lnRef>
-          <a:fillRef idx="0">
-            <a:schemeClr val="accent1"/>
-          </a:fillRef>
-          <a:effectRef idx="1">
-            <a:schemeClr val="accent1"/>
-          </a:effectRef>
-          <a:fontRef idx="minor">
-            <a:schemeClr val="tx1"/>
-          </a:fontRef>
-        </p:style>
-      </p:cxnSp>
-      <p:cxnSp>
-        <p:nvCxnSpPr>
-          <p:cNvPr id="48" name="Connector 47"/>
-          <p:cNvCxnSpPr/>
-          <p:nvPr/>
-        </p:nvCxnSpPr>
-        <p:spPr>
-          <a:xfrm flipH="1">
-            <a:off x="3840480" y="1545336"/>
-            <a:ext cx="845820" cy="54864"/>
-          </a:xfrm>
-          <a:prstGeom prst="line">
-            <a:avLst/>
-          </a:prstGeom>
-          <a:ln w="12700">
-            <a:solidFill>
-              <a:srgbClr val="5A6680"/>
-            </a:solidFill>
-            <a:tailEnd type="triangle" w="med" h="med"/>
-          </a:ln>
-        </p:spPr>
-        <p:style>
-          <a:lnRef idx="2">
-            <a:schemeClr val="accent1"/>
-          </a:lnRef>
-          <a:fillRef idx="0">
-            <a:schemeClr val="accent1"/>
-          </a:fillRef>
-          <a:effectRef idx="1">
-            <a:schemeClr val="accent1"/>
-          </a:effectRef>
-          <a:fontRef idx="minor">
-            <a:schemeClr val="tx1"/>
-          </a:fontRef>
-        </p:style>
-      </p:cxnSp>
-      <p:cxnSp>
-        <p:nvCxnSpPr>
-          <p:cNvPr id="49" name="Connector 48"/>
-          <p:cNvCxnSpPr/>
-          <p:nvPr/>
-        </p:nvCxnSpPr>
-        <p:spPr>
-          <a:xfrm flipH="1">
-            <a:off x="3840480" y="1545336"/>
-            <a:ext cx="2537460" cy="54864"/>
-          </a:xfrm>
-          <a:prstGeom prst="line">
-            <a:avLst/>
-          </a:prstGeom>
-          <a:ln w="12700">
-            <a:solidFill>
-              <a:srgbClr val="5A6680"/>
-            </a:solidFill>
-            <a:tailEnd type="triangle" w="med" h="med"/>
-          </a:ln>
-        </p:spPr>
-        <p:style>
-          <a:lnRef idx="2">
-            <a:schemeClr val="accent1"/>
-          </a:lnRef>
-          <a:fillRef idx="0">
-            <a:schemeClr val="accent1"/>
-          </a:fillRef>
-          <a:effectRef idx="1">
-            <a:schemeClr val="accent1"/>
-          </a:effectRef>
-          <a:fontRef idx="minor">
-            <a:schemeClr val="tx1"/>
-          </a:fontRef>
-        </p:style>
-      </p:cxnSp>
-      <p:cxnSp>
-        <p:nvCxnSpPr>
-          <p:cNvPr id="50" name="Connector 49"/>
-          <p:cNvCxnSpPr/>
-          <p:nvPr/>
-        </p:nvCxnSpPr>
-        <p:spPr>
-          <a:xfrm>
-            <a:off x="3840480" y="1911096"/>
-            <a:ext cx="0" cy="54864"/>
-          </a:xfrm>
-          <a:prstGeom prst="line">
-            <a:avLst/>
-          </a:prstGeom>
-          <a:ln w="19050">
-            <a:solidFill>
-              <a:srgbClr val="5A6680"/>
-            </a:solidFill>
-            <a:tailEnd type="triangle" w="med" h="med"/>
-          </a:ln>
-        </p:spPr>
-        <p:style>
-          <a:lnRef idx="2">
-            <a:schemeClr val="accent1"/>
-          </a:lnRef>
-          <a:fillRef idx="0">
-            <a:schemeClr val="accent1"/>
-          </a:fillRef>
-          <a:effectRef idx="1">
-            <a:schemeClr val="accent1"/>
-          </a:effectRef>
-          <a:fontRef idx="minor">
-            <a:schemeClr val="tx1"/>
-          </a:fontRef>
-        </p:style>
-      </p:cxnSp>
-      <p:cxnSp>
-        <p:nvCxnSpPr>
-          <p:cNvPr id="51" name="Connector 50"/>
-          <p:cNvCxnSpPr/>
-          <p:nvPr/>
-        </p:nvCxnSpPr>
-        <p:spPr>
-          <a:xfrm flipH="1">
-            <a:off x="1303020" y="2276856"/>
-            <a:ext cx="2537460" cy="54864"/>
-          </a:xfrm>
-          <a:prstGeom prst="line">
-            <a:avLst/>
-          </a:prstGeom>
-          <a:ln w="12700">
-            <a:solidFill>
-              <a:srgbClr val="5A6680"/>
-            </a:solidFill>
-            <a:tailEnd type="triangle" w="med" h="med"/>
-          </a:ln>
-        </p:spPr>
-        <p:style>
-          <a:lnRef idx="2">
-            <a:schemeClr val="accent1"/>
-          </a:lnRef>
-          <a:fillRef idx="0">
-            <a:schemeClr val="accent1"/>
-          </a:fillRef>
-          <a:effectRef idx="1">
-            <a:schemeClr val="accent1"/>
-          </a:effectRef>
-          <a:fontRef idx="minor">
-            <a:schemeClr val="tx1"/>
-          </a:fontRef>
-        </p:style>
-      </p:cxnSp>
-      <p:cxnSp>
-        <p:nvCxnSpPr>
-          <p:cNvPr id="52" name="Connector 51"/>
-          <p:cNvCxnSpPr/>
-          <p:nvPr/>
-        </p:nvCxnSpPr>
-        <p:spPr>
-          <a:xfrm flipH="1">
-            <a:off x="2994660" y="2276856"/>
-            <a:ext cx="845820" cy="54864"/>
-          </a:xfrm>
-          <a:prstGeom prst="line">
-            <a:avLst/>
-          </a:prstGeom>
-          <a:ln w="12700">
-            <a:solidFill>
-              <a:srgbClr val="5A6680"/>
-            </a:solidFill>
-            <a:tailEnd type="triangle" w="med" h="med"/>
-          </a:ln>
-        </p:spPr>
-        <p:style>
-          <a:lnRef idx="2">
-            <a:schemeClr val="accent1"/>
-          </a:lnRef>
-          <a:fillRef idx="0">
-            <a:schemeClr val="accent1"/>
-          </a:fillRef>
-          <a:effectRef idx="1">
-            <a:schemeClr val="accent1"/>
-          </a:effectRef>
-          <a:fontRef idx="minor">
-            <a:schemeClr val="tx1"/>
-          </a:fontRef>
-        </p:style>
-      </p:cxnSp>
-      <p:cxnSp>
-        <p:nvCxnSpPr>
-          <p:cNvPr id="53" name="Connector 52"/>
-          <p:cNvCxnSpPr/>
-          <p:nvPr/>
-        </p:nvCxnSpPr>
-        <p:spPr>
-          <a:xfrm>
-            <a:off x="3840480" y="2276856"/>
-            <a:ext cx="845820" cy="54864"/>
-          </a:xfrm>
-          <a:prstGeom prst="line">
-            <a:avLst/>
-          </a:prstGeom>
-          <a:ln w="12700">
-            <a:solidFill>
-              <a:srgbClr val="5A6680"/>
-            </a:solidFill>
-            <a:tailEnd type="triangle" w="med" h="med"/>
-          </a:ln>
-        </p:spPr>
-        <p:style>
-          <a:lnRef idx="2">
-            <a:schemeClr val="accent1"/>
-          </a:lnRef>
-          <a:fillRef idx="0">
-            <a:schemeClr val="accent1"/>
-          </a:fillRef>
-          <a:effectRef idx="1">
-            <a:schemeClr val="accent1"/>
-          </a:effectRef>
-          <a:fontRef idx="minor">
-            <a:schemeClr val="tx1"/>
-          </a:fontRef>
-        </p:style>
-      </p:cxnSp>
-      <p:cxnSp>
-        <p:nvCxnSpPr>
-          <p:cNvPr id="54" name="Connector 53"/>
-          <p:cNvCxnSpPr/>
-          <p:nvPr/>
-        </p:nvCxnSpPr>
-        <p:spPr>
-          <a:xfrm>
-            <a:off x="3840480" y="2276856"/>
-            <a:ext cx="2537460" cy="54864"/>
-          </a:xfrm>
-          <a:prstGeom prst="line">
-            <a:avLst/>
-          </a:prstGeom>
-          <a:ln w="12700">
-            <a:solidFill>
-              <a:srgbClr val="5A6680"/>
-            </a:solidFill>
-            <a:tailEnd type="triangle" w="med" h="med"/>
-          </a:ln>
-        </p:spPr>
-        <p:style>
-          <a:lnRef idx="2">
-            <a:schemeClr val="accent1"/>
-          </a:lnRef>
-          <a:fillRef idx="0">
-            <a:schemeClr val="accent1"/>
-          </a:fillRef>
-          <a:effectRef idx="1">
-            <a:schemeClr val="accent1"/>
-          </a:effectRef>
-          <a:fontRef idx="minor">
-            <a:schemeClr val="tx1"/>
-          </a:fontRef>
-        </p:style>
-      </p:cxnSp>
-      <p:cxnSp>
-        <p:nvCxnSpPr>
-          <p:cNvPr id="55" name="Connector 54"/>
-          <p:cNvCxnSpPr/>
-          <p:nvPr/>
-        </p:nvCxnSpPr>
-        <p:spPr>
-          <a:xfrm>
-            <a:off x="1303020" y="2834640"/>
-            <a:ext cx="0" cy="54864"/>
-          </a:xfrm>
-          <a:prstGeom prst="line">
-            <a:avLst/>
-          </a:prstGeom>
-          <a:ln w="19050">
-            <a:solidFill>
-              <a:srgbClr val="D99416"/>
-            </a:solidFill>
-            <a:tailEnd type="triangle" w="med" h="med"/>
-          </a:ln>
-        </p:spPr>
-        <p:style>
-          <a:lnRef idx="2">
-            <a:schemeClr val="accent1"/>
-          </a:lnRef>
-          <a:fillRef idx="0">
-            <a:schemeClr val="accent1"/>
-          </a:fillRef>
-          <a:effectRef idx="1">
-            <a:schemeClr val="accent1"/>
-          </a:effectRef>
-          <a:fontRef idx="minor">
-            <a:schemeClr val="tx1"/>
-          </a:fontRef>
-        </p:style>
-      </p:cxnSp>
-      <p:cxnSp>
-        <p:nvCxnSpPr>
-          <p:cNvPr id="56" name="Connector 55"/>
-          <p:cNvCxnSpPr/>
-          <p:nvPr/>
-        </p:nvCxnSpPr>
-        <p:spPr>
-          <a:xfrm>
-            <a:off x="2994660" y="2834640"/>
-            <a:ext cx="0" cy="54864"/>
-          </a:xfrm>
-          <a:prstGeom prst="line">
-            <a:avLst/>
-          </a:prstGeom>
-          <a:ln w="19050">
-            <a:solidFill>
-              <a:srgbClr val="D99416"/>
-            </a:solidFill>
-            <a:tailEnd type="triangle" w="med" h="med"/>
-          </a:ln>
-        </p:spPr>
-        <p:style>
-          <a:lnRef idx="2">
-            <a:schemeClr val="accent1"/>
-          </a:lnRef>
-          <a:fillRef idx="0">
-            <a:schemeClr val="accent1"/>
-          </a:fillRef>
-          <a:effectRef idx="1">
-            <a:schemeClr val="accent1"/>
-          </a:effectRef>
-          <a:fontRef idx="minor">
-            <a:schemeClr val="tx1"/>
-          </a:fontRef>
-        </p:style>
-      </p:cxnSp>
-      <p:cxnSp>
-        <p:nvCxnSpPr>
-          <p:cNvPr id="57" name="Connector 56"/>
-          <p:cNvCxnSpPr/>
-          <p:nvPr/>
-        </p:nvCxnSpPr>
-        <p:spPr>
-          <a:xfrm>
-            <a:off x="4686300" y="2834640"/>
-            <a:ext cx="0" cy="54864"/>
-          </a:xfrm>
-          <a:prstGeom prst="line">
-            <a:avLst/>
-          </a:prstGeom>
-          <a:ln w="19050">
-            <a:solidFill>
-              <a:srgbClr val="D99416"/>
-            </a:solidFill>
-            <a:tailEnd type="triangle" w="med" h="med"/>
-          </a:ln>
-        </p:spPr>
-        <p:style>
-          <a:lnRef idx="2">
-            <a:schemeClr val="accent1"/>
-          </a:lnRef>
-          <a:fillRef idx="0">
-            <a:schemeClr val="accent1"/>
-          </a:fillRef>
-          <a:effectRef idx="1">
-            <a:schemeClr val="accent1"/>
-          </a:effectRef>
-          <a:fontRef idx="minor">
-            <a:schemeClr val="tx1"/>
-          </a:fontRef>
-        </p:style>
-      </p:cxnSp>
-      <p:cxnSp>
-        <p:nvCxnSpPr>
-          <p:cNvPr id="58" name="Connector 57"/>
-          <p:cNvCxnSpPr/>
-          <p:nvPr/>
-        </p:nvCxnSpPr>
-        <p:spPr>
-          <a:xfrm>
-            <a:off x="6377940" y="2834640"/>
-            <a:ext cx="0" cy="54864"/>
-          </a:xfrm>
-          <a:prstGeom prst="line">
-            <a:avLst/>
-          </a:prstGeom>
-          <a:ln w="19050">
-            <a:solidFill>
-              <a:srgbClr val="D99416"/>
-            </a:solidFill>
-            <a:tailEnd type="triangle" w="med" h="med"/>
-          </a:ln>
-        </p:spPr>
-        <p:style>
-          <a:lnRef idx="2">
-            <a:schemeClr val="accent1"/>
-          </a:lnRef>
-          <a:fillRef idx="0">
-            <a:schemeClr val="accent1"/>
-          </a:fillRef>
-          <a:effectRef idx="1">
-            <a:schemeClr val="accent1"/>
-          </a:effectRef>
-          <a:fontRef idx="minor">
-            <a:schemeClr val="tx1"/>
-          </a:fontRef>
-        </p:style>
-      </p:cxnSp>
-      <p:cxnSp>
-        <p:nvCxnSpPr>
-          <p:cNvPr id="59" name="Connector 58"/>
-          <p:cNvCxnSpPr/>
-          <p:nvPr/>
-        </p:nvCxnSpPr>
-        <p:spPr>
-          <a:xfrm>
-            <a:off x="3840480" y="3200400"/>
-            <a:ext cx="0" cy="54864"/>
-          </a:xfrm>
-          <a:prstGeom prst="line">
-            <a:avLst/>
-          </a:prstGeom>
-          <a:ln w="19050">
-            <a:solidFill>
-              <a:srgbClr val="5A6680"/>
-            </a:solidFill>
-            <a:tailEnd type="triangle" w="med" h="med"/>
-          </a:ln>
-        </p:spPr>
-        <p:style>
-          <a:lnRef idx="2">
-            <a:schemeClr val="accent1"/>
-          </a:lnRef>
-          <a:fillRef idx="0">
-            <a:schemeClr val="accent1"/>
-          </a:fillRef>
-          <a:effectRef idx="1">
-            <a:schemeClr val="accent1"/>
-          </a:effectRef>
-          <a:fontRef idx="minor">
-            <a:schemeClr val="tx1"/>
-          </a:fontRef>
-        </p:style>
-      </p:cxnSp>
-      <p:cxnSp>
-        <p:nvCxnSpPr>
-          <p:cNvPr id="60" name="Connector 59"/>
-          <p:cNvCxnSpPr/>
-          <p:nvPr/>
-        </p:nvCxnSpPr>
-        <p:spPr>
-          <a:xfrm flipH="1">
-            <a:off x="1220724" y="3566160"/>
-            <a:ext cx="2619756" cy="54864"/>
-          </a:xfrm>
-          <a:prstGeom prst="line">
-            <a:avLst/>
-          </a:prstGeom>
-          <a:ln w="19050">
-            <a:solidFill>
-              <a:srgbClr val="5A6680"/>
-            </a:solidFill>
-            <a:tailEnd type="triangle" w="med" h="med"/>
-          </a:ln>
-        </p:spPr>
-        <p:style>
-          <a:lnRef idx="2">
-            <a:schemeClr val="accent1"/>
-          </a:lnRef>
-          <a:fillRef idx="0">
-            <a:schemeClr val="accent1"/>
-          </a:fillRef>
-          <a:effectRef idx="1">
-            <a:schemeClr val="accent1"/>
-          </a:effectRef>
-          <a:fontRef idx="minor">
-            <a:schemeClr val="tx1"/>
-          </a:fontRef>
-        </p:style>
-      </p:cxnSp>
-      <p:cxnSp>
-        <p:nvCxnSpPr>
-          <p:cNvPr id="61" name="Connector 60"/>
-          <p:cNvCxnSpPr/>
-          <p:nvPr/>
-        </p:nvCxnSpPr>
-        <p:spPr>
-          <a:xfrm flipV="1">
-            <a:off x="1860804" y="3776472"/>
-            <a:ext cx="54864" cy="27432"/>
-          </a:xfrm>
-          <a:prstGeom prst="line">
-            <a:avLst/>
-          </a:prstGeom>
-          <a:ln w="19050">
-            <a:solidFill>
-              <a:srgbClr val="16A34A"/>
-            </a:solidFill>
-            <a:tailEnd type="triangle" w="med" h="med"/>
-          </a:ln>
-        </p:spPr>
-        <p:style>
-          <a:lnRef idx="2">
-            <a:schemeClr val="accent1"/>
-          </a:lnRef>
-          <a:fillRef idx="0">
-            <a:schemeClr val="accent1"/>
-          </a:fillRef>
-          <a:effectRef idx="1">
-            <a:schemeClr val="accent1"/>
-          </a:effectRef>
-          <a:fontRef idx="minor">
-            <a:schemeClr val="tx1"/>
-          </a:fontRef>
-        </p:style>
-      </p:cxnSp>
-      <p:cxnSp>
-        <p:nvCxnSpPr>
-          <p:cNvPr id="62" name="Connector 61"/>
-          <p:cNvCxnSpPr/>
-          <p:nvPr/>
-        </p:nvCxnSpPr>
-        <p:spPr>
-          <a:xfrm flipV="1">
-            <a:off x="1860804" y="3776472"/>
-            <a:ext cx="1801368" cy="27432"/>
-          </a:xfrm>
-          <a:prstGeom prst="line">
-            <a:avLst/>
-          </a:prstGeom>
-          <a:ln w="19050">
-            <a:solidFill>
-              <a:srgbClr val="D97706"/>
-            </a:solidFill>
-            <a:tailEnd type="triangle" w="med" h="med"/>
-          </a:ln>
-        </p:spPr>
-        <p:style>
-          <a:lnRef idx="2">
-            <a:schemeClr val="accent1"/>
-          </a:lnRef>
-          <a:fillRef idx="0">
-            <a:schemeClr val="accent1"/>
-          </a:fillRef>
-          <a:effectRef idx="1">
-            <a:schemeClr val="accent1"/>
-          </a:effectRef>
-          <a:fontRef idx="minor">
-            <a:schemeClr val="tx1"/>
-          </a:fontRef>
-        </p:style>
-      </p:cxnSp>
-      <p:cxnSp>
-        <p:nvCxnSpPr>
-          <p:cNvPr id="63" name="Connector 62"/>
-          <p:cNvCxnSpPr/>
-          <p:nvPr/>
-        </p:nvCxnSpPr>
-        <p:spPr>
-          <a:xfrm flipV="1">
-            <a:off x="1860804" y="3776472"/>
-            <a:ext cx="3547872" cy="27432"/>
-          </a:xfrm>
-          <a:prstGeom prst="line">
-            <a:avLst/>
-          </a:prstGeom>
-          <a:ln w="19050">
-            <a:solidFill>
-              <a:srgbClr val="DC2626"/>
-            </a:solidFill>
-            <a:tailEnd type="triangle" w="med" h="med"/>
-          </a:ln>
-        </p:spPr>
-        <p:style>
-          <a:lnRef idx="2">
-            <a:schemeClr val="accent1"/>
-          </a:lnRef>
-          <a:fillRef idx="0">
-            <a:schemeClr val="accent1"/>
-          </a:fillRef>
-          <a:effectRef idx="1">
-            <a:schemeClr val="accent1"/>
-          </a:effectRef>
-          <a:fontRef idx="minor">
-            <a:schemeClr val="tx1"/>
-          </a:fontRef>
-        </p:style>
-      </p:cxnSp>
-      <p:cxnSp>
-        <p:nvCxnSpPr>
-          <p:cNvPr id="64" name="Connector 63"/>
-          <p:cNvCxnSpPr/>
-          <p:nvPr/>
-        </p:nvCxnSpPr>
-        <p:spPr>
-          <a:xfrm flipH="1">
-            <a:off x="2651760" y="3931920"/>
-            <a:ext cx="109728" cy="54864"/>
-          </a:xfrm>
-          <a:prstGeom prst="line">
-            <a:avLst/>
-          </a:prstGeom>
-          <a:ln w="12700">
-            <a:solidFill>
-              <a:srgbClr val="5A6680"/>
-            </a:solidFill>
-            <a:tailEnd type="triangle" w="med" h="med"/>
-          </a:ln>
-        </p:spPr>
-        <p:style>
-          <a:lnRef idx="2">
-            <a:schemeClr val="accent1"/>
-          </a:lnRef>
-          <a:fillRef idx="0">
-            <a:schemeClr val="accent1"/>
-          </a:fillRef>
-          <a:effectRef idx="1">
-            <a:schemeClr val="accent1"/>
-          </a:effectRef>
-          <a:fontRef idx="minor">
-            <a:schemeClr val="tx1"/>
-          </a:fontRef>
-        </p:style>
-      </p:cxnSp>
-      <p:cxnSp>
-        <p:nvCxnSpPr>
-          <p:cNvPr id="65" name="Connector 64"/>
-          <p:cNvCxnSpPr/>
-          <p:nvPr/>
-        </p:nvCxnSpPr>
-        <p:spPr>
-          <a:xfrm flipH="1">
-            <a:off x="2651760" y="3931920"/>
-            <a:ext cx="1856232" cy="54864"/>
-          </a:xfrm>
-          <a:prstGeom prst="line">
-            <a:avLst/>
-          </a:prstGeom>
-          <a:ln w="12700">
-            <a:solidFill>
-              <a:srgbClr val="5A6680"/>
-            </a:solidFill>
-            <a:tailEnd type="triangle" w="med" h="med"/>
-          </a:ln>
-        </p:spPr>
-        <p:style>
-          <a:lnRef idx="2">
-            <a:schemeClr val="accent1"/>
-          </a:lnRef>
-          <a:fillRef idx="0">
-            <a:schemeClr val="accent1"/>
-          </a:fillRef>
-          <a:effectRef idx="1">
-            <a:schemeClr val="accent1"/>
-          </a:effectRef>
-          <a:fontRef idx="minor">
-            <a:schemeClr val="tx1"/>
-          </a:fontRef>
-        </p:style>
-      </p:cxnSp>
-      <p:cxnSp>
-        <p:nvCxnSpPr>
-          <p:cNvPr id="66" name="Connector 65"/>
-          <p:cNvCxnSpPr/>
-          <p:nvPr/>
-        </p:nvCxnSpPr>
-        <p:spPr>
-          <a:xfrm>
-            <a:off x="3749040" y="4142232"/>
-            <a:ext cx="182880" cy="0"/>
-          </a:xfrm>
-          <a:prstGeom prst="line">
-            <a:avLst/>
-          </a:prstGeom>
-          <a:ln w="12700">
-            <a:solidFill>
-              <a:srgbClr val="5A6680"/>
-            </a:solidFill>
-            <a:tailEnd type="triangle" w="med" h="med"/>
-          </a:ln>
-        </p:spPr>
-        <p:style>
-          <a:lnRef idx="2">
-            <a:schemeClr val="accent1"/>
-          </a:lnRef>
-          <a:fillRef idx="0">
-            <a:schemeClr val="accent1"/>
-          </a:fillRef>
-          <a:effectRef idx="1">
-            <a:schemeClr val="accent1"/>
-          </a:effectRef>
-          <a:fontRef idx="minor">
-            <a:schemeClr val="tx1"/>
-          </a:fontRef>
-        </p:style>
-      </p:cxnSp>
-      <p:cxnSp>
-        <p:nvCxnSpPr>
-          <p:cNvPr id="67" name="Connector 66"/>
-          <p:cNvCxnSpPr/>
-          <p:nvPr/>
-        </p:nvCxnSpPr>
-        <p:spPr>
-          <a:xfrm flipH="1">
-            <a:off x="3840480" y="4297680"/>
-            <a:ext cx="1188720" cy="54864"/>
-          </a:xfrm>
-          <a:prstGeom prst="line">
-            <a:avLst/>
-          </a:prstGeom>
-          <a:ln w="12700">
-            <a:solidFill>
-              <a:srgbClr val="5A6680"/>
-            </a:solidFill>
-            <a:tailEnd type="triangle" w="med" h="med"/>
-          </a:ln>
-        </p:spPr>
-        <p:style>
-          <a:lnRef idx="2">
-            <a:schemeClr val="accent1"/>
-          </a:lnRef>
-          <a:fillRef idx="0">
-            <a:schemeClr val="accent1"/>
-          </a:fillRef>
-          <a:effectRef idx="1">
-            <a:schemeClr val="accent1"/>
-          </a:effectRef>
-          <a:fontRef idx="minor">
-            <a:schemeClr val="tx1"/>
-          </a:fontRef>
-        </p:style>
-      </p:cxnSp>
-    </p:spTree>
   </p:cSld>
   <p:clrMapOvr>
     <a:masterClrMapping/>

--- a/docs/hackathon_blueprint_filled.pptx
+++ b/docs/hackathon_blueprint_filled.pptx
@@ -5,15 +5,17 @@
     <p:sldMasterId id="2147483648" r:id="rId1"/>
   </p:sldMasterIdLst>
   <p:notesMasterIdLst>
-    <p:notesMasterId r:id="rId8"/>
+    <p:notesMasterId r:id="rId9"/>
   </p:notesMasterIdLst>
   <p:sldIdLst>
     <p:sldId id="296" r:id="rId2"/>
     <p:sldId id="297" r:id="rId3"/>
     <p:sldId id="301" r:id="rId4"/>
-    <p:sldId id="302" r:id="rId5"/>
-    <p:sldId id="280" r:id="rId6"/>
-    <p:sldId id="282" r:id="rId7"/>
+    <p:sldId id="303" r:id="rId5"/>
+    <p:sldId id="304" r:id="rId14"/>
+    <p:sldId id="302" r:id="rId6"/>
+    <p:sldId id="280" r:id="rId7"/>
+    <p:sldId id="282" r:id="rId8"/>
   </p:sldIdLst>
   <p:sldSz cx="9144000" cy="5143500" type="screen16x9"/>
   <p:notesSz cx="5143500" cy="9144000"/>
@@ -559,7 +561,7 @@
           <a:p>
             <a:fld id="{F7021451-1387-4CA6-816F-3879F97B5CBC}" type="slidenum">
               <a:rPr lang="en-US"/>
-              <a:t>5</a:t>
+              <a:t>6</a:t>
             </a:fld>
             <a:endParaRPr lang="en-US"/>
           </a:p>
@@ -643,7 +645,7 @@
           <a:p>
             <a:fld id="{F7021451-1387-4CA6-816F-3879F97B5CBC}" type="slidenum">
               <a:rPr lang="en-US"/>
-              <a:t>6</a:t>
+              <a:t>7</a:t>
             </a:fld>
             <a:endParaRPr lang="en-US"/>
           </a:p>
@@ -5068,6 +5070,66 @@
           <a:chExt cx="0" cy="0"/>
         </a:xfrm>
       </p:grpSpPr>
+      <p:pic>
+        <p:nvPicPr>
+          <p:cNvPr id="2" name="Picture 1">
+            <a:extLst>
+              <a:ext uri="{FF2B5EF4-FFF2-40B4-BE49-F238E27FC236}">
+                <a16:creationId xmlns:a16="http://schemas.microsoft.com/office/drawing/2014/main" id="{57BA9B84-F734-96CC-4B90-4D7A566A31D6}"/>
+              </a:ext>
+            </a:extLst>
+          </p:cNvPr>
+          <p:cNvPicPr>
+            <a:picLocks noChangeAspect="1"/>
+          </p:cNvPicPr>
+          <p:nvPr/>
+        </p:nvPicPr>
+        <p:blipFill>
+          <a:blip r:embed="rId2"/>
+          <a:stretch>
+            <a:fillRect/>
+          </a:stretch>
+        </p:blipFill>
+        <p:spPr>
+          <a:xfrm>
+            <a:off x="3098800" y="63500"/>
+            <a:ext cx="2873774" cy="5016500"/>
+          </a:xfrm>
+          <a:prstGeom prst="rect">
+            <a:avLst/>
+          </a:prstGeom>
+        </p:spPr>
+      </p:pic>
+    </p:spTree>
+    <p:extLst>
+      <p:ext uri="{BB962C8B-B14F-4D97-AF65-F5344CB8AC3E}">
+        <p14:creationId xmlns:p14="http://schemas.microsoft.com/office/powerpoint/2010/main" val="2118100062"/>
+      </p:ext>
+    </p:extLst>
+  </p:cSld>
+  <p:clrMapOvr>
+    <a:masterClrMapping/>
+  </p:clrMapOvr>
+</p:sld>
+</file>
+
+<file path=ppt/slides/slide5.xml><?xml version="1.0" encoding="utf-8"?>
+<p:sld xmlns:a="http://schemas.openxmlformats.org/drawingml/2006/main" xmlns:r="http://schemas.openxmlformats.org/officeDocument/2006/relationships" xmlns:p="http://schemas.openxmlformats.org/presentationml/2006/main">
+  <p:cSld>
+    <p:spTree>
+      <p:nvGrpSpPr>
+        <p:cNvPr id="1" name=""/>
+        <p:cNvGrpSpPr/>
+        <p:nvPr/>
+      </p:nvGrpSpPr>
+      <p:grpSpPr>
+        <a:xfrm>
+          <a:off x="0" y="0"/>
+          <a:ext cx="0" cy="0"/>
+          <a:chOff x="0" y="0"/>
+          <a:chExt cx="0" cy="0"/>
+        </a:xfrm>
+      </p:grpSpPr>
       <p:sp>
         <p:nvSpPr>
           <p:cNvPr id="2" name="TextBox 1"/>
@@ -8230,7 +8292,7 @@
 </p:sld>
 </file>
 
-<file path=ppt/slides/slide5.xml><?xml version="1.0" encoding="utf-8"?>
+<file path=ppt/slides/slide6.xml><?xml version="1.0" encoding="utf-8"?>
 <p:sld xmlns:a="http://schemas.openxmlformats.org/drawingml/2006/main" xmlns:r="http://schemas.openxmlformats.org/officeDocument/2006/relationships" xmlns:p="http://schemas.openxmlformats.org/presentationml/2006/main">
   <p:cSld name="Slide 4">
     <p:bg>
@@ -9780,7 +9842,7 @@
 </p:sld>
 </file>
 
-<file path=ppt/slides/slide6.xml><?xml version="1.0" encoding="utf-8"?>
+<file path=ppt/slides/slide7.xml><?xml version="1.0" encoding="utf-8"?>
 <p:sld xmlns:a="http://schemas.openxmlformats.org/drawingml/2006/main" xmlns:r="http://schemas.openxmlformats.org/officeDocument/2006/relationships" xmlns:p="http://schemas.openxmlformats.org/presentationml/2006/main">
   <p:cSld name="Slide 5">
     <p:bg>
@@ -10454,6 +10516,77 @@
         <p14:creationId xmlns:p14="http://schemas.microsoft.com/office/powerpoint/2010/main" val="1287356172"/>
       </p:ext>
     </p:extLst>
+  </p:cSld>
+  <p:clrMapOvr>
+    <a:masterClrMapping/>
+  </p:clrMapOvr>
+</p:sld>
+</file>
+
+<file path=ppt/slides/slide8.xml><?xml version="1.0" encoding="utf-8"?>
+<p:sld xmlns:a="http://schemas.openxmlformats.org/drawingml/2006/main" xmlns:p="http://schemas.openxmlformats.org/presentationml/2006/main" xmlns:r="http://schemas.openxmlformats.org/officeDocument/2006/relationships">
+  <p:cSld>
+    <p:spTree>
+      <p:nvGrpSpPr>
+        <p:cNvPr id="1" name=""/>
+        <p:cNvGrpSpPr/>
+        <p:nvPr/>
+      </p:nvGrpSpPr>
+      <p:grpSpPr/>
+      <p:pic>
+        <p:nvPicPr>
+          <p:cNvPr id="2" name="Picture 1" descr="02_logical_architecture.drawio.png"/>
+          <p:cNvPicPr>
+            <a:picLocks noChangeAspect="1"/>
+          </p:cNvPicPr>
+          <p:nvPr/>
+        </p:nvPicPr>
+        <p:blipFill>
+          <a:blip r:embed="rId2"/>
+          <a:stretch>
+            <a:fillRect/>
+          </a:stretch>
+        </p:blipFill>
+        <p:spPr>
+          <a:xfrm>
+            <a:off x="0" y="63415"/>
+            <a:ext cx="9144000" cy="5016670"/>
+          </a:xfrm>
+          <a:prstGeom prst="rect">
+            <a:avLst/>
+          </a:prstGeom>
+        </p:spPr>
+      </p:pic>
+      <p:sp>
+        <p:nvSpPr>
+          <p:cNvPr id="3" name="TextBox 2"/>
+          <p:cNvSpPr txBox="1"/>
+          <p:nvPr/>
+        </p:nvSpPr>
+        <p:spPr>
+          <a:xfrm>
+            <a:off x="137160" y="45720"/>
+            <a:ext cx="5486400" cy="320040"/>
+          </a:xfrm>
+          <a:prstGeom prst="rect">
+            <a:avLst/>
+          </a:prstGeom>
+          <a:noFill/>
+        </p:spPr>
+        <p:txBody>
+          <a:bodyPr wrap="none">
+            <a:spAutoFit/>
+          </a:bodyPr>
+          <a:lstStyle/>
+          <a:p>
+            <a:r>
+              <a:rPr sz="1296" b="1"/>
+              <a:t>Logical Architecture (C4 L2)</a:t>
+            </a:r>
+          </a:p>
+        </p:txBody>
+      </p:sp>
+    </p:spTree>
   </p:cSld>
   <p:clrMapOvr>
     <a:masterClrMapping/>
@@ -11053,7 +11186,7 @@
 
 <file path=ppt/webextensions/taskpanes.xml><?xml version="1.0" encoding="utf-8"?>
 <wetp:taskpanes xmlns:wetp="http://schemas.microsoft.com/office/webextensions/taskpanes/2010/11">
-  <wetp:taskpane dockstate="right" visibility="0" width="433" row="0">
+  <wetp:taskpane dockstate="right" visibility="0" width="438" row="0">
     <wetp:webextensionref xmlns:r="http://schemas.openxmlformats.org/officeDocument/2006/relationships" r:id="rId1"/>
   </wetp:taskpane>
 </wetp:taskpanes>

--- a/docs/hackathon_blueprint_filled.pptx
+++ b/docs/hackathon_blueprint_filled.pptx
@@ -5114,6 +5114,77 @@
 </file>
 
 <file path=ppt/slides/slide5.xml><?xml version="1.0" encoding="utf-8"?>
+<p:sld xmlns:a="http://schemas.openxmlformats.org/drawingml/2006/main" xmlns:p="http://schemas.openxmlformats.org/presentationml/2006/main" xmlns:r="http://schemas.openxmlformats.org/officeDocument/2006/relationships">
+  <p:cSld>
+    <p:spTree>
+      <p:nvGrpSpPr>
+        <p:cNvPr id="1" name=""/>
+        <p:cNvGrpSpPr/>
+        <p:nvPr/>
+      </p:nvGrpSpPr>
+      <p:grpSpPr/>
+      <p:sp>
+        <p:nvSpPr>
+          <p:cNvPr id="3" name="TextBox 2"/>
+          <p:cNvSpPr txBox="1"/>
+          <p:nvPr/>
+        </p:nvSpPr>
+        <p:spPr>
+          <a:xfrm>
+            <a:off x="137160" y="45720"/>
+            <a:ext cx="5486400" cy="320040"/>
+          </a:xfrm>
+          <a:prstGeom prst="rect">
+            <a:avLst/>
+          </a:prstGeom>
+          <a:noFill/>
+        </p:spPr>
+        <p:txBody>
+          <a:bodyPr wrap="none">
+            <a:spAutoFit/>
+          </a:bodyPr>
+          <a:lstStyle/>
+          <a:p>
+            <a:r>
+              <a:rPr sz="1296" b="1"/>
+              <a:t>Logical Architecture (C4 L2)</a:t>
+            </a:r>
+          </a:p>
+        </p:txBody>
+      </p:sp>
+      <p:pic>
+        <p:nvPicPr>
+          <p:cNvPr id="4" name="Picture 3" descr="image.png"/>
+          <p:cNvPicPr>
+            <a:picLocks noChangeAspect="1"/>
+          </p:cNvPicPr>
+          <p:nvPr/>
+        </p:nvPicPr>
+        <p:blipFill>
+          <a:blip r:embed="rId2"/>
+          <a:stretch>
+            <a:fillRect/>
+          </a:stretch>
+        </p:blipFill>
+        <p:spPr>
+          <a:xfrm>
+            <a:off x="0" y="63415"/>
+            <a:ext cx="9144000" cy="5016670"/>
+          </a:xfrm>
+          <a:prstGeom prst="rect">
+            <a:avLst/>
+          </a:prstGeom>
+        </p:spPr>
+      </p:pic>
+    </p:spTree>
+  </p:cSld>
+  <p:clrMapOvr>
+    <a:masterClrMapping/>
+  </p:clrMapOvr>
+</p:sld>
+</file>
+
+<file path=ppt/slides/slide6.xml><?xml version="1.0" encoding="utf-8"?>
 <p:sld xmlns:a="http://schemas.openxmlformats.org/drawingml/2006/main" xmlns:r="http://schemas.openxmlformats.org/officeDocument/2006/relationships" xmlns:p="http://schemas.openxmlformats.org/presentationml/2006/main">
   <p:cSld>
     <p:spTree>
@@ -8292,7 +8363,7 @@
 </p:sld>
 </file>
 
-<file path=ppt/slides/slide6.xml><?xml version="1.0" encoding="utf-8"?>
+<file path=ppt/slides/slide7.xml><?xml version="1.0" encoding="utf-8"?>
 <p:sld xmlns:a="http://schemas.openxmlformats.org/drawingml/2006/main" xmlns:r="http://schemas.openxmlformats.org/officeDocument/2006/relationships" xmlns:p="http://schemas.openxmlformats.org/presentationml/2006/main">
   <p:cSld name="Slide 4">
     <p:bg>
@@ -9842,7 +9913,7 @@
 </p:sld>
 </file>
 
-<file path=ppt/slides/slide7.xml><?xml version="1.0" encoding="utf-8"?>
+<file path=ppt/slides/slide8.xml><?xml version="1.0" encoding="utf-8"?>
 <p:sld xmlns:a="http://schemas.openxmlformats.org/drawingml/2006/main" xmlns:r="http://schemas.openxmlformats.org/officeDocument/2006/relationships" xmlns:p="http://schemas.openxmlformats.org/presentationml/2006/main">
   <p:cSld name="Slide 5">
     <p:bg>
@@ -10516,77 +10587,6 @@
         <p14:creationId xmlns:p14="http://schemas.microsoft.com/office/powerpoint/2010/main" val="1287356172"/>
       </p:ext>
     </p:extLst>
-  </p:cSld>
-  <p:clrMapOvr>
-    <a:masterClrMapping/>
-  </p:clrMapOvr>
-</p:sld>
-</file>
-
-<file path=ppt/slides/slide8.xml><?xml version="1.0" encoding="utf-8"?>
-<p:sld xmlns:a="http://schemas.openxmlformats.org/drawingml/2006/main" xmlns:p="http://schemas.openxmlformats.org/presentationml/2006/main" xmlns:r="http://schemas.openxmlformats.org/officeDocument/2006/relationships">
-  <p:cSld>
-    <p:spTree>
-      <p:nvGrpSpPr>
-        <p:cNvPr id="1" name=""/>
-        <p:cNvGrpSpPr/>
-        <p:nvPr/>
-      </p:nvGrpSpPr>
-      <p:grpSpPr/>
-      <p:pic>
-        <p:nvPicPr>
-          <p:cNvPr id="2" name="Picture 1" descr="02_logical_architecture.drawio.png"/>
-          <p:cNvPicPr>
-            <a:picLocks noChangeAspect="1"/>
-          </p:cNvPicPr>
-          <p:nvPr/>
-        </p:nvPicPr>
-        <p:blipFill>
-          <a:blip r:embed="rId2"/>
-          <a:stretch>
-            <a:fillRect/>
-          </a:stretch>
-        </p:blipFill>
-        <p:spPr>
-          <a:xfrm>
-            <a:off x="0" y="63415"/>
-            <a:ext cx="9144000" cy="5016670"/>
-          </a:xfrm>
-          <a:prstGeom prst="rect">
-            <a:avLst/>
-          </a:prstGeom>
-        </p:spPr>
-      </p:pic>
-      <p:sp>
-        <p:nvSpPr>
-          <p:cNvPr id="3" name="TextBox 2"/>
-          <p:cNvSpPr txBox="1"/>
-          <p:nvPr/>
-        </p:nvSpPr>
-        <p:spPr>
-          <a:xfrm>
-            <a:off x="137160" y="45720"/>
-            <a:ext cx="5486400" cy="320040"/>
-          </a:xfrm>
-          <a:prstGeom prst="rect">
-            <a:avLst/>
-          </a:prstGeom>
-          <a:noFill/>
-        </p:spPr>
-        <p:txBody>
-          <a:bodyPr wrap="none">
-            <a:spAutoFit/>
-          </a:bodyPr>
-          <a:lstStyle/>
-          <a:p>
-            <a:r>
-              <a:rPr sz="1296" b="1"/>
-              <a:t>Logical Architecture (C4 L2)</a:t>
-            </a:r>
-          </a:p>
-        </p:txBody>
-      </p:sp>
-    </p:spTree>
   </p:cSld>
   <p:clrMapOvr>
     <a:masterClrMapping/>

--- a/docs/hackathon_blueprint_filled.pptx
+++ b/docs/hackathon_blueprint_filled.pptx
@@ -5125,14 +5125,48 @@
       <p:grpSpPr/>
       <p:sp>
         <p:nvSpPr>
+          <p:cNvPr id="2" name="TextBox 1"/>
+          <p:cNvSpPr txBox="1"/>
+          <p:nvPr/>
+        </p:nvSpPr>
+        <p:spPr>
+          <a:xfrm>
+            <a:off x="91440" y="45720"/>
+            <a:ext cx="8961120" cy="201168"/>
+          </a:xfrm>
+          <a:prstGeom prst="rect">
+            <a:avLst/>
+          </a:prstGeom>
+          <a:noFill/>
+        </p:spPr>
+        <p:txBody>
+          <a:bodyPr wrap="square" lIns="20000" rIns="20000" tIns="10000" bIns="10000" anchor="ctr">
+            <a:spAutoFit/>
+          </a:bodyPr>
+          <a:lstStyle/>
+          <a:p>
+            <a:pPr algn="l"/>
+            <a:r>
+              <a:rPr sz="1200" b="1" i="0">
+                <a:solidFill>
+                  <a:srgbClr val="0A2540"/>
+                </a:solidFill>
+              </a:rPr>
+              <a:t>Logical Architecture (C4 L2)  —  left-to-right swimlanes</a:t>
+            </a:r>
+          </a:p>
+        </p:txBody>
+      </p:sp>
+      <p:sp>
+        <p:nvSpPr>
           <p:cNvPr id="3" name="TextBox 2"/>
           <p:cNvSpPr txBox="1"/>
           <p:nvPr/>
         </p:nvSpPr>
         <p:spPr>
           <a:xfrm>
-            <a:off x="137160" y="45720"/>
-            <a:ext cx="5486400" cy="320040"/>
+            <a:off x="91440" y="228600"/>
+            <a:ext cx="8961120" cy="137160"/>
           </a:xfrm>
           <a:prstGeom prst="rect">
             <a:avLst/>
@@ -5140,42 +5174,3000 @@
           <a:noFill/>
         </p:spPr>
         <p:txBody>
-          <a:bodyPr wrap="none">
+          <a:bodyPr wrap="square" lIns="20000" rIns="20000" tIns="10000" bIns="10000" anchor="ctr">
             <a:spAutoFit/>
           </a:bodyPr>
           <a:lstStyle/>
           <a:p>
-            <a:r>
-              <a:rPr sz="1296" b="1"/>
-              <a:t>Logical Architecture (C4 L2)</a:t>
-            </a:r>
-          </a:p>
-        </p:txBody>
-      </p:sp>
-      <p:pic>
-        <p:nvPicPr>
-          <p:cNvPr id="4" name="Picture 3" descr="image.png"/>
-          <p:cNvPicPr>
-            <a:picLocks noChangeAspect="1"/>
-          </p:cNvPicPr>
-          <p:nvPr/>
-        </p:nvPicPr>
-        <p:blipFill>
-          <a:blip r:embed="rId2"/>
-          <a:stretch>
-            <a:fillRect/>
-          </a:stretch>
-        </p:blipFill>
-        <p:spPr>
-          <a:xfrm>
-            <a:off x="0" y="63415"/>
-            <a:ext cx="9144000" cy="5016670"/>
+            <a:pPr algn="l"/>
+            <a:r>
+              <a:rPr sz="600" b="0" i="1">
+                <a:solidFill>
+                  <a:srgbClr val="5A6680"/>
+                </a:solidFill>
+              </a:rPr>
+              <a:t>Numbers 1–13 trace runtime flow  ·  red = flow  ·  black = human review  ·  gold = audit write</a:t>
+            </a:r>
+          </a:p>
+        </p:txBody>
+      </p:sp>
+      <p:sp>
+        <p:nvSpPr>
+          <p:cNvPr id="4" name="Rectangle 3"/>
+          <p:cNvSpPr/>
+          <p:nvPr/>
+        </p:nvSpPr>
+        <p:spPr>
+          <a:xfrm>
+            <a:off x="749808" y="384048"/>
+            <a:ext cx="8321040" cy="502920"/>
           </a:xfrm>
           <a:prstGeom prst="rect">
             <a:avLst/>
           </a:prstGeom>
-        </p:spPr>
-      </p:pic>
+          <a:solidFill>
+            <a:srgbClr val="FFF7ED"/>
+          </a:solidFill>
+          <a:ln w="6350">
+            <a:solidFill>
+              <a:srgbClr val="FED7AA"/>
+            </a:solidFill>
+          </a:ln>
+          <a:effectLst/>
+        </p:spPr>
+        <p:style>
+          <a:lnRef idx="1">
+            <a:schemeClr val="accent1"/>
+          </a:lnRef>
+          <a:fillRef idx="3">
+            <a:schemeClr val="accent1"/>
+          </a:fillRef>
+          <a:effectRef idx="2">
+            <a:schemeClr val="accent1"/>
+          </a:effectRef>
+          <a:fontRef idx="minor">
+            <a:schemeClr val="lt1"/>
+          </a:fontRef>
+        </p:style>
+        <p:txBody>
+          <a:bodyPr rtlCol="0" anchor="ctr"/>
+          <a:lstStyle/>
+          <a:p>
+            <a:pPr algn="ctr"/>
+          </a:p>
+        </p:txBody>
+      </p:sp>
+      <p:sp>
+        <p:nvSpPr>
+          <p:cNvPr id="5" name="Rounded Rectangle 4"/>
+          <p:cNvSpPr/>
+          <p:nvPr/>
+        </p:nvSpPr>
+        <p:spPr>
+          <a:xfrm>
+            <a:off x="45720" y="384048"/>
+            <a:ext cx="685800" cy="502920"/>
+          </a:xfrm>
+          <a:prstGeom prst="roundRect">
+            <a:avLst/>
+          </a:prstGeom>
+          <a:solidFill>
+            <a:srgbClr val="EA580C"/>
+          </a:solidFill>
+          <a:ln w="6350">
+            <a:solidFill>
+              <a:srgbClr val="EA580C"/>
+            </a:solidFill>
+          </a:ln>
+          <a:effectLst/>
+        </p:spPr>
+        <p:style>
+          <a:lnRef idx="1">
+            <a:schemeClr val="accent1"/>
+          </a:lnRef>
+          <a:fillRef idx="3">
+            <a:schemeClr val="accent1"/>
+          </a:fillRef>
+          <a:effectRef idx="2">
+            <a:schemeClr val="accent1"/>
+          </a:effectRef>
+          <a:fontRef idx="minor">
+            <a:schemeClr val="lt1"/>
+          </a:fontRef>
+        </p:style>
+        <p:txBody>
+          <a:bodyPr rtlCol="0" anchor="ctr"/>
+          <a:lstStyle/>
+          <a:p>
+            <a:pPr algn="ctr"/>
+          </a:p>
+        </p:txBody>
+      </p:sp>
+      <p:sp>
+        <p:nvSpPr>
+          <p:cNvPr id="6" name="TextBox 5"/>
+          <p:cNvSpPr txBox="1"/>
+          <p:nvPr/>
+        </p:nvSpPr>
+        <p:spPr>
+          <a:xfrm>
+            <a:off x="45720" y="384048"/>
+            <a:ext cx="685800" cy="502920"/>
+          </a:xfrm>
+          <a:prstGeom prst="rect">
+            <a:avLst/>
+          </a:prstGeom>
+          <a:noFill/>
+        </p:spPr>
+        <p:txBody>
+          <a:bodyPr wrap="square" lIns="20000" rIns="20000" tIns="10000" bIns="10000" anchor="ctr">
+            <a:spAutoFit/>
+          </a:bodyPr>
+          <a:lstStyle/>
+          <a:p>
+            <a:pPr algn="ctr"/>
+            <a:r>
+              <a:rPr sz="700" b="1" i="0">
+                <a:solidFill>
+                  <a:srgbClr val="FFFFFF"/>
+                </a:solidFill>
+              </a:rPr>
+              <a:t>CUSTOMER</a:t>
+            </a:r>
+          </a:p>
+          <a:p>
+            <a:pPr algn="ctr"/>
+            <a:r>
+              <a:rPr sz="700" b="1" i="0">
+                <a:solidFill>
+                  <a:srgbClr val="FFFFFF"/>
+                </a:solidFill>
+              </a:rPr>
+              <a:t>&amp; CHANNELS</a:t>
+            </a:r>
+          </a:p>
+        </p:txBody>
+      </p:sp>
+      <p:sp>
+        <p:nvSpPr>
+          <p:cNvPr id="7" name="Rectangle 6"/>
+          <p:cNvSpPr/>
+          <p:nvPr/>
+        </p:nvSpPr>
+        <p:spPr>
+          <a:xfrm>
+            <a:off x="749808" y="905256"/>
+            <a:ext cx="8321040" cy="502920"/>
+          </a:xfrm>
+          <a:prstGeom prst="rect">
+            <a:avLst/>
+          </a:prstGeom>
+          <a:solidFill>
+            <a:srgbClr val="EFF6FF"/>
+          </a:solidFill>
+          <a:ln w="6350">
+            <a:solidFill>
+              <a:srgbClr val="BFDBFE"/>
+            </a:solidFill>
+          </a:ln>
+          <a:effectLst/>
+        </p:spPr>
+        <p:style>
+          <a:lnRef idx="1">
+            <a:schemeClr val="accent1"/>
+          </a:lnRef>
+          <a:fillRef idx="3">
+            <a:schemeClr val="accent1"/>
+          </a:fillRef>
+          <a:effectRef idx="2">
+            <a:schemeClr val="accent1"/>
+          </a:effectRef>
+          <a:fontRef idx="minor">
+            <a:schemeClr val="lt1"/>
+          </a:fontRef>
+        </p:style>
+        <p:txBody>
+          <a:bodyPr rtlCol="0" anchor="ctr"/>
+          <a:lstStyle/>
+          <a:p>
+            <a:pPr algn="ctr"/>
+          </a:p>
+        </p:txBody>
+      </p:sp>
+      <p:sp>
+        <p:nvSpPr>
+          <p:cNvPr id="8" name="Rounded Rectangle 7"/>
+          <p:cNvSpPr/>
+          <p:nvPr/>
+        </p:nvSpPr>
+        <p:spPr>
+          <a:xfrm>
+            <a:off x="45720" y="905256"/>
+            <a:ext cx="685800" cy="502920"/>
+          </a:xfrm>
+          <a:prstGeom prst="roundRect">
+            <a:avLst/>
+          </a:prstGeom>
+          <a:solidFill>
+            <a:srgbClr val="0078D4"/>
+          </a:solidFill>
+          <a:ln w="6350">
+            <a:solidFill>
+              <a:srgbClr val="0078D4"/>
+            </a:solidFill>
+          </a:ln>
+          <a:effectLst/>
+        </p:spPr>
+        <p:style>
+          <a:lnRef idx="1">
+            <a:schemeClr val="accent1"/>
+          </a:lnRef>
+          <a:fillRef idx="3">
+            <a:schemeClr val="accent1"/>
+          </a:fillRef>
+          <a:effectRef idx="2">
+            <a:schemeClr val="accent1"/>
+          </a:effectRef>
+          <a:fontRef idx="minor">
+            <a:schemeClr val="lt1"/>
+          </a:fontRef>
+        </p:style>
+        <p:txBody>
+          <a:bodyPr rtlCol="0" anchor="ctr"/>
+          <a:lstStyle/>
+          <a:p>
+            <a:pPr algn="ctr"/>
+          </a:p>
+        </p:txBody>
+      </p:sp>
+      <p:sp>
+        <p:nvSpPr>
+          <p:cNvPr id="9" name="TextBox 8"/>
+          <p:cNvSpPr txBox="1"/>
+          <p:nvPr/>
+        </p:nvSpPr>
+        <p:spPr>
+          <a:xfrm>
+            <a:off x="45720" y="905256"/>
+            <a:ext cx="685800" cy="502920"/>
+          </a:xfrm>
+          <a:prstGeom prst="rect">
+            <a:avLst/>
+          </a:prstGeom>
+          <a:noFill/>
+        </p:spPr>
+        <p:txBody>
+          <a:bodyPr wrap="square" lIns="20000" rIns="20000" tIns="10000" bIns="10000" anchor="ctr">
+            <a:spAutoFit/>
+          </a:bodyPr>
+          <a:lstStyle/>
+          <a:p>
+            <a:pPr algn="ctr"/>
+            <a:r>
+              <a:rPr sz="700" b="1" i="0">
+                <a:solidFill>
+                  <a:srgbClr val="FFFFFF"/>
+                </a:solidFill>
+              </a:rPr>
+              <a:t>FRONTEND</a:t>
+            </a:r>
+          </a:p>
+          <a:p>
+            <a:pPr algn="ctr"/>
+            <a:r>
+              <a:rPr sz="700" b="1" i="0">
+                <a:solidFill>
+                  <a:srgbClr val="FFFFFF"/>
+                </a:solidFill>
+              </a:rPr>
+              <a:t>(SWA)</a:t>
+            </a:r>
+          </a:p>
+        </p:txBody>
+      </p:sp>
+      <p:sp>
+        <p:nvSpPr>
+          <p:cNvPr id="10" name="Rectangle 9"/>
+          <p:cNvSpPr/>
+          <p:nvPr/>
+        </p:nvSpPr>
+        <p:spPr>
+          <a:xfrm>
+            <a:off x="749808" y="1426464"/>
+            <a:ext cx="8321040" cy="594360"/>
+          </a:xfrm>
+          <a:prstGeom prst="rect">
+            <a:avLst/>
+          </a:prstGeom>
+          <a:solidFill>
+            <a:srgbClr val="FAF5FF"/>
+          </a:solidFill>
+          <a:ln w="6350">
+            <a:solidFill>
+              <a:srgbClr val="E9D5FF"/>
+            </a:solidFill>
+          </a:ln>
+          <a:effectLst/>
+        </p:spPr>
+        <p:style>
+          <a:lnRef idx="1">
+            <a:schemeClr val="accent1"/>
+          </a:lnRef>
+          <a:fillRef idx="3">
+            <a:schemeClr val="accent1"/>
+          </a:fillRef>
+          <a:effectRef idx="2">
+            <a:schemeClr val="accent1"/>
+          </a:effectRef>
+          <a:fontRef idx="minor">
+            <a:schemeClr val="lt1"/>
+          </a:fontRef>
+        </p:style>
+        <p:txBody>
+          <a:bodyPr rtlCol="0" anchor="ctr"/>
+          <a:lstStyle/>
+          <a:p>
+            <a:pPr algn="ctr"/>
+          </a:p>
+        </p:txBody>
+      </p:sp>
+      <p:sp>
+        <p:nvSpPr>
+          <p:cNvPr id="11" name="Rounded Rectangle 10"/>
+          <p:cNvSpPr/>
+          <p:nvPr/>
+        </p:nvSpPr>
+        <p:spPr>
+          <a:xfrm>
+            <a:off x="45720" y="1426464"/>
+            <a:ext cx="685800" cy="594360"/>
+          </a:xfrm>
+          <a:prstGeom prst="roundRect">
+            <a:avLst/>
+          </a:prstGeom>
+          <a:solidFill>
+            <a:srgbClr val="742774"/>
+          </a:solidFill>
+          <a:ln w="6350">
+            <a:solidFill>
+              <a:srgbClr val="742774"/>
+            </a:solidFill>
+          </a:ln>
+          <a:effectLst/>
+        </p:spPr>
+        <p:style>
+          <a:lnRef idx="1">
+            <a:schemeClr val="accent1"/>
+          </a:lnRef>
+          <a:fillRef idx="3">
+            <a:schemeClr val="accent1"/>
+          </a:fillRef>
+          <a:effectRef idx="2">
+            <a:schemeClr val="accent1"/>
+          </a:effectRef>
+          <a:fontRef idx="minor">
+            <a:schemeClr val="lt1"/>
+          </a:fontRef>
+        </p:style>
+        <p:txBody>
+          <a:bodyPr rtlCol="0" anchor="ctr"/>
+          <a:lstStyle/>
+          <a:p>
+            <a:pPr algn="ctr"/>
+          </a:p>
+        </p:txBody>
+      </p:sp>
+      <p:sp>
+        <p:nvSpPr>
+          <p:cNvPr id="12" name="TextBox 11"/>
+          <p:cNvSpPr txBox="1"/>
+          <p:nvPr/>
+        </p:nvSpPr>
+        <p:spPr>
+          <a:xfrm>
+            <a:off x="45720" y="1426464"/>
+            <a:ext cx="685800" cy="594360"/>
+          </a:xfrm>
+          <a:prstGeom prst="rect">
+            <a:avLst/>
+          </a:prstGeom>
+          <a:noFill/>
+        </p:spPr>
+        <p:txBody>
+          <a:bodyPr wrap="square" lIns="20000" rIns="20000" tIns="10000" bIns="10000" anchor="ctr">
+            <a:spAutoFit/>
+          </a:bodyPr>
+          <a:lstStyle/>
+          <a:p>
+            <a:pPr algn="ctr"/>
+            <a:r>
+              <a:rPr sz="700" b="1" i="0">
+                <a:solidFill>
+                  <a:srgbClr val="FFFFFF"/>
+                </a:solidFill>
+              </a:rPr>
+              <a:t>COPILOT</a:t>
+            </a:r>
+          </a:p>
+          <a:p>
+            <a:pPr algn="ctr"/>
+            <a:r>
+              <a:rPr sz="700" b="1" i="0">
+                <a:solidFill>
+                  <a:srgbClr val="FFFFFF"/>
+                </a:solidFill>
+              </a:rPr>
+              <a:t>STUDIO</a:t>
+            </a:r>
+          </a:p>
+        </p:txBody>
+      </p:sp>
+      <p:sp>
+        <p:nvSpPr>
+          <p:cNvPr id="13" name="Rectangle 12"/>
+          <p:cNvSpPr/>
+          <p:nvPr/>
+        </p:nvSpPr>
+        <p:spPr>
+          <a:xfrm>
+            <a:off x="749808" y="2039112"/>
+            <a:ext cx="8321040" cy="594360"/>
+          </a:xfrm>
+          <a:prstGeom prst="rect">
+            <a:avLst/>
+          </a:prstGeom>
+          <a:solidFill>
+            <a:srgbClr val="FAF5FF"/>
+          </a:solidFill>
+          <a:ln w="6350">
+            <a:solidFill>
+              <a:srgbClr val="E9D5FF"/>
+            </a:solidFill>
+          </a:ln>
+          <a:effectLst/>
+        </p:spPr>
+        <p:style>
+          <a:lnRef idx="1">
+            <a:schemeClr val="accent1"/>
+          </a:lnRef>
+          <a:fillRef idx="3">
+            <a:schemeClr val="accent1"/>
+          </a:fillRef>
+          <a:effectRef idx="2">
+            <a:schemeClr val="accent1"/>
+          </a:effectRef>
+          <a:fontRef idx="minor">
+            <a:schemeClr val="lt1"/>
+          </a:fontRef>
+        </p:style>
+        <p:txBody>
+          <a:bodyPr rtlCol="0" anchor="ctr"/>
+          <a:lstStyle/>
+          <a:p>
+            <a:pPr algn="ctr"/>
+          </a:p>
+        </p:txBody>
+      </p:sp>
+      <p:sp>
+        <p:nvSpPr>
+          <p:cNvPr id="14" name="Rounded Rectangle 13"/>
+          <p:cNvSpPr/>
+          <p:nvPr/>
+        </p:nvSpPr>
+        <p:spPr>
+          <a:xfrm>
+            <a:off x="45720" y="2039112"/>
+            <a:ext cx="685800" cy="594360"/>
+          </a:xfrm>
+          <a:prstGeom prst="roundRect">
+            <a:avLst/>
+          </a:prstGeom>
+          <a:solidFill>
+            <a:srgbClr val="742774"/>
+          </a:solidFill>
+          <a:ln w="6350">
+            <a:solidFill>
+              <a:srgbClr val="742774"/>
+            </a:solidFill>
+          </a:ln>
+          <a:effectLst/>
+        </p:spPr>
+        <p:style>
+          <a:lnRef idx="1">
+            <a:schemeClr val="accent1"/>
+          </a:lnRef>
+          <a:fillRef idx="3">
+            <a:schemeClr val="accent1"/>
+          </a:fillRef>
+          <a:effectRef idx="2">
+            <a:schemeClr val="accent1"/>
+          </a:effectRef>
+          <a:fontRef idx="minor">
+            <a:schemeClr val="lt1"/>
+          </a:fontRef>
+        </p:style>
+        <p:txBody>
+          <a:bodyPr rtlCol="0" anchor="ctr"/>
+          <a:lstStyle/>
+          <a:p>
+            <a:pPr algn="ctr"/>
+          </a:p>
+        </p:txBody>
+      </p:sp>
+      <p:sp>
+        <p:nvSpPr>
+          <p:cNvPr id="15" name="TextBox 14"/>
+          <p:cNvSpPr txBox="1"/>
+          <p:nvPr/>
+        </p:nvSpPr>
+        <p:spPr>
+          <a:xfrm>
+            <a:off x="45720" y="2039112"/>
+            <a:ext cx="685800" cy="594360"/>
+          </a:xfrm>
+          <a:prstGeom prst="rect">
+            <a:avLst/>
+          </a:prstGeom>
+          <a:noFill/>
+        </p:spPr>
+        <p:txBody>
+          <a:bodyPr wrap="square" lIns="20000" rIns="20000" tIns="10000" bIns="10000" anchor="ctr">
+            <a:spAutoFit/>
+          </a:bodyPr>
+          <a:lstStyle/>
+          <a:p>
+            <a:pPr algn="ctr"/>
+            <a:r>
+              <a:rPr sz="700" b="1" i="0">
+                <a:solidFill>
+                  <a:srgbClr val="FFFFFF"/>
+                </a:solidFill>
+              </a:rPr>
+              <a:t>POWER</a:t>
+            </a:r>
+          </a:p>
+          <a:p>
+            <a:pPr algn="ctr"/>
+            <a:r>
+              <a:rPr sz="700" b="1" i="0">
+                <a:solidFill>
+                  <a:srgbClr val="FFFFFF"/>
+                </a:solidFill>
+              </a:rPr>
+              <a:t>AUTOMATE</a:t>
+            </a:r>
+          </a:p>
+        </p:txBody>
+      </p:sp>
+      <p:sp>
+        <p:nvSpPr>
+          <p:cNvPr id="16" name="Rectangle 15"/>
+          <p:cNvSpPr/>
+          <p:nvPr/>
+        </p:nvSpPr>
+        <p:spPr>
+          <a:xfrm>
+            <a:off x="749808" y="2651760"/>
+            <a:ext cx="8321040" cy="914400"/>
+          </a:xfrm>
+          <a:prstGeom prst="rect">
+            <a:avLst/>
+          </a:prstGeom>
+          <a:solidFill>
+            <a:srgbClr val="EFF6FF"/>
+          </a:solidFill>
+          <a:ln w="6350">
+            <a:solidFill>
+              <a:srgbClr val="BFDBFE"/>
+            </a:solidFill>
+          </a:ln>
+          <a:effectLst/>
+        </p:spPr>
+        <p:style>
+          <a:lnRef idx="1">
+            <a:schemeClr val="accent1"/>
+          </a:lnRef>
+          <a:fillRef idx="3">
+            <a:schemeClr val="accent1"/>
+          </a:fillRef>
+          <a:effectRef idx="2">
+            <a:schemeClr val="accent1"/>
+          </a:effectRef>
+          <a:fontRef idx="minor">
+            <a:schemeClr val="lt1"/>
+          </a:fontRef>
+        </p:style>
+        <p:txBody>
+          <a:bodyPr rtlCol="0" anchor="ctr"/>
+          <a:lstStyle/>
+          <a:p>
+            <a:pPr algn="ctr"/>
+          </a:p>
+        </p:txBody>
+      </p:sp>
+      <p:sp>
+        <p:nvSpPr>
+          <p:cNvPr id="17" name="Rounded Rectangle 16"/>
+          <p:cNvSpPr/>
+          <p:nvPr/>
+        </p:nvSpPr>
+        <p:spPr>
+          <a:xfrm>
+            <a:off x="45720" y="2651760"/>
+            <a:ext cx="685800" cy="914400"/>
+          </a:xfrm>
+          <a:prstGeom prst="roundRect">
+            <a:avLst/>
+          </a:prstGeom>
+          <a:solidFill>
+            <a:srgbClr val="0078D4"/>
+          </a:solidFill>
+          <a:ln w="6350">
+            <a:solidFill>
+              <a:srgbClr val="0078D4"/>
+            </a:solidFill>
+          </a:ln>
+          <a:effectLst/>
+        </p:spPr>
+        <p:style>
+          <a:lnRef idx="1">
+            <a:schemeClr val="accent1"/>
+          </a:lnRef>
+          <a:fillRef idx="3">
+            <a:schemeClr val="accent1"/>
+          </a:fillRef>
+          <a:effectRef idx="2">
+            <a:schemeClr val="accent1"/>
+          </a:effectRef>
+          <a:fontRef idx="minor">
+            <a:schemeClr val="lt1"/>
+          </a:fontRef>
+        </p:style>
+        <p:txBody>
+          <a:bodyPr rtlCol="0" anchor="ctr"/>
+          <a:lstStyle/>
+          <a:p>
+            <a:pPr algn="ctr"/>
+          </a:p>
+        </p:txBody>
+      </p:sp>
+      <p:sp>
+        <p:nvSpPr>
+          <p:cNvPr id="18" name="TextBox 17"/>
+          <p:cNvSpPr txBox="1"/>
+          <p:nvPr/>
+        </p:nvSpPr>
+        <p:spPr>
+          <a:xfrm>
+            <a:off x="45720" y="2651760"/>
+            <a:ext cx="685800" cy="914400"/>
+          </a:xfrm>
+          <a:prstGeom prst="rect">
+            <a:avLst/>
+          </a:prstGeom>
+          <a:noFill/>
+        </p:spPr>
+        <p:txBody>
+          <a:bodyPr wrap="square" lIns="20000" rIns="20000" tIns="10000" bIns="10000" anchor="ctr">
+            <a:spAutoFit/>
+          </a:bodyPr>
+          <a:lstStyle/>
+          <a:p>
+            <a:pPr algn="ctr"/>
+            <a:r>
+              <a:rPr sz="700" b="1" i="0">
+                <a:solidFill>
+                  <a:srgbClr val="FFFFFF"/>
+                </a:solidFill>
+              </a:rPr>
+              <a:t>AZURE AI</a:t>
+            </a:r>
+          </a:p>
+          <a:p>
+            <a:pPr algn="ctr"/>
+            <a:r>
+              <a:rPr sz="700" b="1" i="0">
+                <a:solidFill>
+                  <a:srgbClr val="FFFFFF"/>
+                </a:solidFill>
+              </a:rPr>
+              <a:t>SERVICES</a:t>
+            </a:r>
+          </a:p>
+        </p:txBody>
+      </p:sp>
+      <p:sp>
+        <p:nvSpPr>
+          <p:cNvPr id="19" name="Rectangle 18"/>
+          <p:cNvSpPr/>
+          <p:nvPr/>
+        </p:nvSpPr>
+        <p:spPr>
+          <a:xfrm>
+            <a:off x="749808" y="3584448"/>
+            <a:ext cx="8321040" cy="502920"/>
+          </a:xfrm>
+          <a:prstGeom prst="rect">
+            <a:avLst/>
+          </a:prstGeom>
+          <a:solidFill>
+            <a:srgbClr val="F0FDF4"/>
+          </a:solidFill>
+          <a:ln w="6350">
+            <a:solidFill>
+              <a:srgbClr val="BBF7D0"/>
+            </a:solidFill>
+          </a:ln>
+          <a:effectLst/>
+        </p:spPr>
+        <p:style>
+          <a:lnRef idx="1">
+            <a:schemeClr val="accent1"/>
+          </a:lnRef>
+          <a:fillRef idx="3">
+            <a:schemeClr val="accent1"/>
+          </a:fillRef>
+          <a:effectRef idx="2">
+            <a:schemeClr val="accent1"/>
+          </a:effectRef>
+          <a:fontRef idx="minor">
+            <a:schemeClr val="lt1"/>
+          </a:fontRef>
+        </p:style>
+        <p:txBody>
+          <a:bodyPr rtlCol="0" anchor="ctr"/>
+          <a:lstStyle/>
+          <a:p>
+            <a:pPr algn="ctr"/>
+          </a:p>
+        </p:txBody>
+      </p:sp>
+      <p:sp>
+        <p:nvSpPr>
+          <p:cNvPr id="20" name="Rounded Rectangle 19"/>
+          <p:cNvSpPr/>
+          <p:nvPr/>
+        </p:nvSpPr>
+        <p:spPr>
+          <a:xfrm>
+            <a:off x="45720" y="3584448"/>
+            <a:ext cx="685800" cy="502920"/>
+          </a:xfrm>
+          <a:prstGeom prst="roundRect">
+            <a:avLst/>
+          </a:prstGeom>
+          <a:solidFill>
+            <a:srgbClr val="107C10"/>
+          </a:solidFill>
+          <a:ln w="6350">
+            <a:solidFill>
+              <a:srgbClr val="107C10"/>
+            </a:solidFill>
+          </a:ln>
+          <a:effectLst/>
+        </p:spPr>
+        <p:style>
+          <a:lnRef idx="1">
+            <a:schemeClr val="accent1"/>
+          </a:lnRef>
+          <a:fillRef idx="3">
+            <a:schemeClr val="accent1"/>
+          </a:fillRef>
+          <a:effectRef idx="2">
+            <a:schemeClr val="accent1"/>
+          </a:effectRef>
+          <a:fontRef idx="minor">
+            <a:schemeClr val="lt1"/>
+          </a:fontRef>
+        </p:style>
+        <p:txBody>
+          <a:bodyPr rtlCol="0" anchor="ctr"/>
+          <a:lstStyle/>
+          <a:p>
+            <a:pPr algn="ctr"/>
+          </a:p>
+        </p:txBody>
+      </p:sp>
+      <p:sp>
+        <p:nvSpPr>
+          <p:cNvPr id="21" name="TextBox 20"/>
+          <p:cNvSpPr txBox="1"/>
+          <p:nvPr/>
+        </p:nvSpPr>
+        <p:spPr>
+          <a:xfrm>
+            <a:off x="45720" y="3584448"/>
+            <a:ext cx="685800" cy="502920"/>
+          </a:xfrm>
+          <a:prstGeom prst="rect">
+            <a:avLst/>
+          </a:prstGeom>
+          <a:noFill/>
+        </p:spPr>
+        <p:txBody>
+          <a:bodyPr wrap="square" lIns="20000" rIns="20000" tIns="10000" bIns="10000" anchor="ctr">
+            <a:spAutoFit/>
+          </a:bodyPr>
+          <a:lstStyle/>
+          <a:p>
+            <a:pPr algn="ctr"/>
+            <a:r>
+              <a:rPr sz="700" b="1" i="0">
+                <a:solidFill>
+                  <a:srgbClr val="FFFFFF"/>
+                </a:solidFill>
+              </a:rPr>
+              <a:t>M365 TEAMS</a:t>
+            </a:r>
+          </a:p>
+          <a:p>
+            <a:pPr algn="ctr"/>
+            <a:r>
+              <a:rPr sz="700" b="1" i="0">
+                <a:solidFill>
+                  <a:srgbClr val="FFFFFF"/>
+                </a:solidFill>
+              </a:rPr>
+              <a:t>(Human)</a:t>
+            </a:r>
+          </a:p>
+        </p:txBody>
+      </p:sp>
+      <p:sp>
+        <p:nvSpPr>
+          <p:cNvPr id="22" name="Rectangle 21"/>
+          <p:cNvSpPr/>
+          <p:nvPr/>
+        </p:nvSpPr>
+        <p:spPr>
+          <a:xfrm>
+            <a:off x="749808" y="4105656"/>
+            <a:ext cx="8321040" cy="960120"/>
+          </a:xfrm>
+          <a:prstGeom prst="rect">
+            <a:avLst/>
+          </a:prstGeom>
+          <a:solidFill>
+            <a:srgbClr val="FEF3C7"/>
+          </a:solidFill>
+          <a:ln w="6350">
+            <a:solidFill>
+              <a:srgbClr val="FDE68A"/>
+            </a:solidFill>
+          </a:ln>
+          <a:effectLst/>
+        </p:spPr>
+        <p:style>
+          <a:lnRef idx="1">
+            <a:schemeClr val="accent1"/>
+          </a:lnRef>
+          <a:fillRef idx="3">
+            <a:schemeClr val="accent1"/>
+          </a:fillRef>
+          <a:effectRef idx="2">
+            <a:schemeClr val="accent1"/>
+          </a:effectRef>
+          <a:fontRef idx="minor">
+            <a:schemeClr val="lt1"/>
+          </a:fontRef>
+        </p:style>
+        <p:txBody>
+          <a:bodyPr rtlCol="0" anchor="ctr"/>
+          <a:lstStyle/>
+          <a:p>
+            <a:pPr algn="ctr"/>
+          </a:p>
+        </p:txBody>
+      </p:sp>
+      <p:sp>
+        <p:nvSpPr>
+          <p:cNvPr id="23" name="Rounded Rectangle 22"/>
+          <p:cNvSpPr/>
+          <p:nvPr/>
+        </p:nvSpPr>
+        <p:spPr>
+          <a:xfrm>
+            <a:off x="45720" y="4105656"/>
+            <a:ext cx="685800" cy="960120"/>
+          </a:xfrm>
+          <a:prstGeom prst="roundRect">
+            <a:avLst/>
+          </a:prstGeom>
+          <a:solidFill>
+            <a:srgbClr val="D99416"/>
+          </a:solidFill>
+          <a:ln w="6350">
+            <a:solidFill>
+              <a:srgbClr val="D99416"/>
+            </a:solidFill>
+          </a:ln>
+          <a:effectLst/>
+        </p:spPr>
+        <p:style>
+          <a:lnRef idx="1">
+            <a:schemeClr val="accent1"/>
+          </a:lnRef>
+          <a:fillRef idx="3">
+            <a:schemeClr val="accent1"/>
+          </a:fillRef>
+          <a:effectRef idx="2">
+            <a:schemeClr val="accent1"/>
+          </a:effectRef>
+          <a:fontRef idx="minor">
+            <a:schemeClr val="lt1"/>
+          </a:fontRef>
+        </p:style>
+        <p:txBody>
+          <a:bodyPr rtlCol="0" anchor="ctr"/>
+          <a:lstStyle/>
+          <a:p>
+            <a:pPr algn="ctr"/>
+          </a:p>
+        </p:txBody>
+      </p:sp>
+      <p:sp>
+        <p:nvSpPr>
+          <p:cNvPr id="24" name="TextBox 23"/>
+          <p:cNvSpPr txBox="1"/>
+          <p:nvPr/>
+        </p:nvSpPr>
+        <p:spPr>
+          <a:xfrm>
+            <a:off x="45720" y="4105656"/>
+            <a:ext cx="685800" cy="960120"/>
+          </a:xfrm>
+          <a:prstGeom prst="rect">
+            <a:avLst/>
+          </a:prstGeom>
+          <a:noFill/>
+        </p:spPr>
+        <p:txBody>
+          <a:bodyPr wrap="square" lIns="20000" rIns="20000" tIns="10000" bIns="10000" anchor="ctr">
+            <a:spAutoFit/>
+          </a:bodyPr>
+          <a:lstStyle/>
+          <a:p>
+            <a:pPr algn="ctr"/>
+            <a:r>
+              <a:rPr sz="700" b="1" i="0">
+                <a:solidFill>
+                  <a:srgbClr val="FFFFFF"/>
+                </a:solidFill>
+              </a:rPr>
+              <a:t>DATAVERSE</a:t>
+            </a:r>
+          </a:p>
+          <a:p>
+            <a:pPr algn="ctr"/>
+            <a:r>
+              <a:rPr sz="700" b="1" i="0">
+                <a:solidFill>
+                  <a:srgbClr val="FFFFFF"/>
+                </a:solidFill>
+              </a:rPr>
+              <a:t>Glass Box</a:t>
+            </a:r>
+          </a:p>
+        </p:txBody>
+      </p:sp>
+      <p:sp>
+        <p:nvSpPr>
+          <p:cNvPr id="25" name="Rounded Rectangle 24"/>
+          <p:cNvSpPr/>
+          <p:nvPr/>
+        </p:nvSpPr>
+        <p:spPr>
+          <a:xfrm>
+            <a:off x="822960" y="448056"/>
+            <a:ext cx="1188720" cy="384048"/>
+          </a:xfrm>
+          <a:prstGeom prst="roundRect">
+            <a:avLst/>
+          </a:prstGeom>
+          <a:solidFill>
+            <a:srgbClr val="EA580C"/>
+          </a:solidFill>
+          <a:ln w="6350">
+            <a:solidFill>
+              <a:srgbClr val="9A3412"/>
+            </a:solidFill>
+          </a:ln>
+          <a:effectLst/>
+        </p:spPr>
+        <p:style>
+          <a:lnRef idx="1">
+            <a:schemeClr val="accent1"/>
+          </a:lnRef>
+          <a:fillRef idx="3">
+            <a:schemeClr val="accent1"/>
+          </a:fillRef>
+          <a:effectRef idx="2">
+            <a:schemeClr val="accent1"/>
+          </a:effectRef>
+          <a:fontRef idx="minor">
+            <a:schemeClr val="lt1"/>
+          </a:fontRef>
+        </p:style>
+        <p:txBody>
+          <a:bodyPr rtlCol="0" anchor="ctr"/>
+          <a:lstStyle/>
+          <a:p>
+            <a:pPr algn="ctr"/>
+          </a:p>
+        </p:txBody>
+      </p:sp>
+      <p:sp>
+        <p:nvSpPr>
+          <p:cNvPr id="26" name="TextBox 25"/>
+          <p:cNvSpPr txBox="1"/>
+          <p:nvPr/>
+        </p:nvSpPr>
+        <p:spPr>
+          <a:xfrm>
+            <a:off x="822960" y="448056"/>
+            <a:ext cx="1188720" cy="384048"/>
+          </a:xfrm>
+          <a:prstGeom prst="rect">
+            <a:avLst/>
+          </a:prstGeom>
+          <a:noFill/>
+        </p:spPr>
+        <p:txBody>
+          <a:bodyPr wrap="square" lIns="20000" rIns="20000" tIns="15000" bIns="15000" anchor="ctr">
+            <a:spAutoFit/>
+          </a:bodyPr>
+          <a:lstStyle/>
+          <a:p>
+            <a:pPr algn="ctr"/>
+            <a:r>
+              <a:rPr sz="1400" b="1">
+                <a:solidFill>
+                  <a:srgbClr val="FFFFFF"/>
+                </a:solidFill>
+              </a:rPr>
+              <a:t>1</a:t>
+            </a:r>
+          </a:p>
+          <a:p>
+            <a:pPr algn="ctr"/>
+            <a:r>
+              <a:rPr sz="700" b="1">
+                <a:solidFill>
+                  <a:srgbClr val="FFFFFF"/>
+                </a:solidFill>
+              </a:rPr>
+              <a:t>Customer + 5 channels</a:t>
+            </a:r>
+          </a:p>
+        </p:txBody>
+      </p:sp>
+      <p:sp>
+        <p:nvSpPr>
+          <p:cNvPr id="27" name="Rounded Rectangle 26"/>
+          <p:cNvSpPr/>
+          <p:nvPr/>
+        </p:nvSpPr>
+        <p:spPr>
+          <a:xfrm>
+            <a:off x="1280160" y="969264"/>
+            <a:ext cx="1188720" cy="384048"/>
+          </a:xfrm>
+          <a:prstGeom prst="roundRect">
+            <a:avLst/>
+          </a:prstGeom>
+          <a:solidFill>
+            <a:srgbClr val="DBEAFE"/>
+          </a:solidFill>
+          <a:ln w="9525">
+            <a:solidFill>
+              <a:srgbClr val="0078D4"/>
+            </a:solidFill>
+          </a:ln>
+          <a:effectLst/>
+        </p:spPr>
+        <p:style>
+          <a:lnRef idx="1">
+            <a:schemeClr val="accent1"/>
+          </a:lnRef>
+          <a:fillRef idx="3">
+            <a:schemeClr val="accent1"/>
+          </a:fillRef>
+          <a:effectRef idx="2">
+            <a:schemeClr val="accent1"/>
+          </a:effectRef>
+          <a:fontRef idx="minor">
+            <a:schemeClr val="lt1"/>
+          </a:fontRef>
+        </p:style>
+        <p:txBody>
+          <a:bodyPr rtlCol="0" anchor="ctr"/>
+          <a:lstStyle/>
+          <a:p>
+            <a:pPr algn="ctr"/>
+          </a:p>
+        </p:txBody>
+      </p:sp>
+      <p:sp>
+        <p:nvSpPr>
+          <p:cNvPr id="28" name="TextBox 27"/>
+          <p:cNvSpPr txBox="1"/>
+          <p:nvPr/>
+        </p:nvSpPr>
+        <p:spPr>
+          <a:xfrm>
+            <a:off x="1280160" y="969264"/>
+            <a:ext cx="1188720" cy="384048"/>
+          </a:xfrm>
+          <a:prstGeom prst="rect">
+            <a:avLst/>
+          </a:prstGeom>
+          <a:noFill/>
+        </p:spPr>
+        <p:txBody>
+          <a:bodyPr wrap="square" lIns="20000" rIns="20000" tIns="15000" bIns="15000" anchor="ctr">
+            <a:spAutoFit/>
+          </a:bodyPr>
+          <a:lstStyle/>
+          <a:p>
+            <a:pPr algn="ctr"/>
+            <a:r>
+              <a:rPr sz="1400" b="1">
+                <a:solidFill>
+                  <a:srgbClr val="0A2540"/>
+                </a:solidFill>
+              </a:rPr>
+              <a:t>2</a:t>
+            </a:r>
+          </a:p>
+          <a:p>
+            <a:pPr algn="ctr"/>
+            <a:r>
+              <a:rPr sz="700" b="1">
+                <a:solidFill>
+                  <a:srgbClr val="0A2540"/>
+                </a:solidFill>
+              </a:rPr>
+              <a:t>React SPA + Token Broker</a:t>
+            </a:r>
+          </a:p>
+        </p:txBody>
+      </p:sp>
+      <p:sp>
+        <p:nvSpPr>
+          <p:cNvPr id="29" name="Rounded Rectangle 28"/>
+          <p:cNvSpPr/>
+          <p:nvPr/>
+        </p:nvSpPr>
+        <p:spPr>
+          <a:xfrm>
+            <a:off x="2560320" y="969264"/>
+            <a:ext cx="1188720" cy="384048"/>
+          </a:xfrm>
+          <a:prstGeom prst="roundRect">
+            <a:avLst/>
+          </a:prstGeom>
+          <a:solidFill>
+            <a:srgbClr val="DBEAFE"/>
+          </a:solidFill>
+          <a:ln w="9525">
+            <a:solidFill>
+              <a:srgbClr val="0078D4"/>
+            </a:solidFill>
+          </a:ln>
+          <a:effectLst/>
+        </p:spPr>
+        <p:style>
+          <a:lnRef idx="1">
+            <a:schemeClr val="accent1"/>
+          </a:lnRef>
+          <a:fillRef idx="3">
+            <a:schemeClr val="accent1"/>
+          </a:fillRef>
+          <a:effectRef idx="2">
+            <a:schemeClr val="accent1"/>
+          </a:effectRef>
+          <a:fontRef idx="minor">
+            <a:schemeClr val="lt1"/>
+          </a:fontRef>
+        </p:style>
+        <p:txBody>
+          <a:bodyPr rtlCol="0" anchor="ctr"/>
+          <a:lstStyle/>
+          <a:p>
+            <a:pPr algn="ctr"/>
+          </a:p>
+        </p:txBody>
+      </p:sp>
+      <p:sp>
+        <p:nvSpPr>
+          <p:cNvPr id="30" name="TextBox 29"/>
+          <p:cNvSpPr txBox="1"/>
+          <p:nvPr/>
+        </p:nvSpPr>
+        <p:spPr>
+          <a:xfrm>
+            <a:off x="2560320" y="969264"/>
+            <a:ext cx="1188720" cy="384048"/>
+          </a:xfrm>
+          <a:prstGeom prst="rect">
+            <a:avLst/>
+          </a:prstGeom>
+          <a:noFill/>
+        </p:spPr>
+        <p:txBody>
+          <a:bodyPr wrap="square" lIns="20000" rIns="20000" tIns="15000" bIns="15000" anchor="ctr">
+            <a:spAutoFit/>
+          </a:bodyPr>
+          <a:lstStyle/>
+          <a:p>
+            <a:pPr algn="ctr"/>
+            <a:r>
+              <a:rPr sz="1400" b="1">
+                <a:solidFill>
+                  <a:srgbClr val="0A2540"/>
+                </a:solidFill>
+              </a:rPr>
+              <a:t>3</a:t>
+            </a:r>
+          </a:p>
+          <a:p>
+            <a:pPr algn="ctr"/>
+            <a:r>
+              <a:rPr sz="700" b="1">
+                <a:solidFill>
+                  <a:srgbClr val="0A2540"/>
+                </a:solidFill>
+              </a:rPr>
+              <a:t>Direct Line / Bot</a:t>
+            </a:r>
+          </a:p>
+        </p:txBody>
+      </p:sp>
+      <p:sp>
+        <p:nvSpPr>
+          <p:cNvPr id="31" name="Rounded Rectangle 30"/>
+          <p:cNvSpPr/>
+          <p:nvPr/>
+        </p:nvSpPr>
+        <p:spPr>
+          <a:xfrm>
+            <a:off x="2560320" y="1508760"/>
+            <a:ext cx="1188720" cy="457200"/>
+          </a:xfrm>
+          <a:prstGeom prst="roundRect">
+            <a:avLst/>
+          </a:prstGeom>
+          <a:solidFill>
+            <a:srgbClr val="EDE4F5"/>
+          </a:solidFill>
+          <a:ln w="12700">
+            <a:solidFill>
+              <a:srgbClr val="742774"/>
+            </a:solidFill>
+          </a:ln>
+          <a:effectLst/>
+        </p:spPr>
+        <p:style>
+          <a:lnRef idx="1">
+            <a:schemeClr val="accent1"/>
+          </a:lnRef>
+          <a:fillRef idx="3">
+            <a:schemeClr val="accent1"/>
+          </a:fillRef>
+          <a:effectRef idx="2">
+            <a:schemeClr val="accent1"/>
+          </a:effectRef>
+          <a:fontRef idx="minor">
+            <a:schemeClr val="lt1"/>
+          </a:fontRef>
+        </p:style>
+        <p:txBody>
+          <a:bodyPr rtlCol="0" anchor="ctr"/>
+          <a:lstStyle/>
+          <a:p>
+            <a:pPr algn="ctr"/>
+          </a:p>
+        </p:txBody>
+      </p:sp>
+      <p:sp>
+        <p:nvSpPr>
+          <p:cNvPr id="32" name="TextBox 31"/>
+          <p:cNvSpPr txBox="1"/>
+          <p:nvPr/>
+        </p:nvSpPr>
+        <p:spPr>
+          <a:xfrm>
+            <a:off x="2560320" y="1508760"/>
+            <a:ext cx="1188720" cy="457200"/>
+          </a:xfrm>
+          <a:prstGeom prst="rect">
+            <a:avLst/>
+          </a:prstGeom>
+          <a:noFill/>
+        </p:spPr>
+        <p:txBody>
+          <a:bodyPr wrap="square" lIns="20000" rIns="20000" tIns="15000" bIns="15000" anchor="ctr">
+            <a:spAutoFit/>
+          </a:bodyPr>
+          <a:lstStyle/>
+          <a:p>
+            <a:pPr algn="ctr"/>
+            <a:r>
+              <a:rPr sz="1400" b="1">
+                <a:solidFill>
+                  <a:srgbClr val="3D2C70"/>
+                </a:solidFill>
+              </a:rPr>
+              <a:t>4</a:t>
+            </a:r>
+          </a:p>
+          <a:p>
+            <a:pPr algn="ctr"/>
+            <a:r>
+              <a:rPr sz="700" b="1">
+                <a:solidFill>
+                  <a:srgbClr val="3D2C70"/>
+                </a:solidFill>
+              </a:rPr>
+              <a:t>Intake Agent (AI)</a:t>
+            </a:r>
+          </a:p>
+        </p:txBody>
+      </p:sp>
+      <p:sp>
+        <p:nvSpPr>
+          <p:cNvPr id="33" name="Rounded Rectangle 32"/>
+          <p:cNvSpPr/>
+          <p:nvPr/>
+        </p:nvSpPr>
+        <p:spPr>
+          <a:xfrm>
+            <a:off x="6766560" y="1508760"/>
+            <a:ext cx="1645920" cy="457200"/>
+          </a:xfrm>
+          <a:prstGeom prst="roundRect">
+            <a:avLst/>
+          </a:prstGeom>
+          <a:solidFill>
+            <a:srgbClr val="EDE4F5"/>
+          </a:solidFill>
+          <a:ln w="12700">
+            <a:solidFill>
+              <a:srgbClr val="742774"/>
+            </a:solidFill>
+          </a:ln>
+          <a:effectLst/>
+        </p:spPr>
+        <p:style>
+          <a:lnRef idx="1">
+            <a:schemeClr val="accent1"/>
+          </a:lnRef>
+          <a:fillRef idx="3">
+            <a:schemeClr val="accent1"/>
+          </a:fillRef>
+          <a:effectRef idx="2">
+            <a:schemeClr val="accent1"/>
+          </a:effectRef>
+          <a:fontRef idx="minor">
+            <a:schemeClr val="lt1"/>
+          </a:fontRef>
+        </p:style>
+        <p:txBody>
+          <a:bodyPr rtlCol="0" anchor="ctr"/>
+          <a:lstStyle/>
+          <a:p>
+            <a:pPr algn="ctr"/>
+          </a:p>
+        </p:txBody>
+      </p:sp>
+      <p:sp>
+        <p:nvSpPr>
+          <p:cNvPr id="34" name="TextBox 33"/>
+          <p:cNvSpPr txBox="1"/>
+          <p:nvPr/>
+        </p:nvSpPr>
+        <p:spPr>
+          <a:xfrm>
+            <a:off x="6766560" y="1508760"/>
+            <a:ext cx="1645920" cy="457200"/>
+          </a:xfrm>
+          <a:prstGeom prst="rect">
+            <a:avLst/>
+          </a:prstGeom>
+          <a:noFill/>
+        </p:spPr>
+        <p:txBody>
+          <a:bodyPr wrap="square" lIns="20000" rIns="20000" tIns="15000" bIns="15000" anchor="ctr">
+            <a:spAutoFit/>
+          </a:bodyPr>
+          <a:lstStyle/>
+          <a:p>
+            <a:pPr algn="ctr"/>
+            <a:r>
+              <a:rPr sz="1400" b="1">
+                <a:solidFill>
+                  <a:srgbClr val="3D2C70"/>
+                </a:solidFill>
+              </a:rPr>
+              <a:t>12</a:t>
+            </a:r>
+          </a:p>
+          <a:p>
+            <a:pPr algn="ctr"/>
+            <a:r>
+              <a:rPr sz="700" b="1">
+                <a:solidFill>
+                  <a:srgbClr val="3D2C70"/>
+                </a:solidFill>
+              </a:rPr>
+              <a:t>Explanation Agent (AI — NOT CSR)</a:t>
+            </a:r>
+          </a:p>
+        </p:txBody>
+      </p:sp>
+      <p:sp>
+        <p:nvSpPr>
+          <p:cNvPr id="35" name="Rounded Rectangle 34"/>
+          <p:cNvSpPr/>
+          <p:nvPr/>
+        </p:nvSpPr>
+        <p:spPr>
+          <a:xfrm>
+            <a:off x="3017520" y="2103120"/>
+            <a:ext cx="1051560" cy="457200"/>
+          </a:xfrm>
+          <a:prstGeom prst="roundRect">
+            <a:avLst/>
+          </a:prstGeom>
+          <a:solidFill>
+            <a:srgbClr val="EDE4F5"/>
+          </a:solidFill>
+          <a:ln w="9525">
+            <a:solidFill>
+              <a:srgbClr val="742774"/>
+            </a:solidFill>
+          </a:ln>
+          <a:effectLst/>
+        </p:spPr>
+        <p:style>
+          <a:lnRef idx="1">
+            <a:schemeClr val="accent1"/>
+          </a:lnRef>
+          <a:fillRef idx="3">
+            <a:schemeClr val="accent1"/>
+          </a:fillRef>
+          <a:effectRef idx="2">
+            <a:schemeClr val="accent1"/>
+          </a:effectRef>
+          <a:fontRef idx="minor">
+            <a:schemeClr val="lt1"/>
+          </a:fontRef>
+        </p:style>
+        <p:txBody>
+          <a:bodyPr rtlCol="0" anchor="ctr"/>
+          <a:lstStyle/>
+          <a:p>
+            <a:pPr algn="ctr"/>
+          </a:p>
+        </p:txBody>
+      </p:sp>
+      <p:sp>
+        <p:nvSpPr>
+          <p:cNvPr id="36" name="TextBox 35"/>
+          <p:cNvSpPr txBox="1"/>
+          <p:nvPr/>
+        </p:nvSpPr>
+        <p:spPr>
+          <a:xfrm>
+            <a:off x="3017520" y="2103120"/>
+            <a:ext cx="1051560" cy="457200"/>
+          </a:xfrm>
+          <a:prstGeom prst="rect">
+            <a:avLst/>
+          </a:prstGeom>
+          <a:noFill/>
+        </p:spPr>
+        <p:txBody>
+          <a:bodyPr wrap="square" lIns="20000" rIns="20000" tIns="15000" bIns="15000" anchor="ctr">
+            <a:spAutoFit/>
+          </a:bodyPr>
+          <a:lstStyle/>
+          <a:p>
+            <a:pPr algn="ctr"/>
+            <a:r>
+              <a:rPr sz="1400" b="1">
+                <a:solidFill>
+                  <a:srgbClr val="3D2C70"/>
+                </a:solidFill>
+              </a:rPr>
+              <a:t>5</a:t>
+            </a:r>
+          </a:p>
+          <a:p>
+            <a:pPr algn="ctr"/>
+            <a:r>
+              <a:rPr sz="700" b="1">
+                <a:solidFill>
+                  <a:srgbClr val="3D2C70"/>
+                </a:solidFill>
+              </a:rPr>
+              <a:t>Create_Claim</a:t>
+            </a:r>
+          </a:p>
+        </p:txBody>
+      </p:sp>
+      <p:sp>
+        <p:nvSpPr>
+          <p:cNvPr id="37" name="Rounded Rectangle 36"/>
+          <p:cNvSpPr/>
+          <p:nvPr/>
+        </p:nvSpPr>
+        <p:spPr>
+          <a:xfrm>
+            <a:off x="4160520" y="2103120"/>
+            <a:ext cx="1280160" cy="457200"/>
+          </a:xfrm>
+          <a:prstGeom prst="roundRect">
+            <a:avLst/>
+          </a:prstGeom>
+          <a:solidFill>
+            <a:srgbClr val="EDE4F5"/>
+          </a:solidFill>
+          <a:ln w="12700">
+            <a:solidFill>
+              <a:srgbClr val="742774"/>
+            </a:solidFill>
+          </a:ln>
+          <a:effectLst/>
+        </p:spPr>
+        <p:style>
+          <a:lnRef idx="1">
+            <a:schemeClr val="accent1"/>
+          </a:lnRef>
+          <a:fillRef idx="3">
+            <a:schemeClr val="accent1"/>
+          </a:fillRef>
+          <a:effectRef idx="2">
+            <a:schemeClr val="accent1"/>
+          </a:effectRef>
+          <a:fontRef idx="minor">
+            <a:schemeClr val="lt1"/>
+          </a:fontRef>
+        </p:style>
+        <p:txBody>
+          <a:bodyPr rtlCol="0" anchor="ctr"/>
+          <a:lstStyle/>
+          <a:p>
+            <a:pPr algn="ctr"/>
+          </a:p>
+        </p:txBody>
+      </p:sp>
+      <p:sp>
+        <p:nvSpPr>
+          <p:cNvPr id="38" name="TextBox 37"/>
+          <p:cNvSpPr txBox="1"/>
+          <p:nvPr/>
+        </p:nvSpPr>
+        <p:spPr>
+          <a:xfrm>
+            <a:off x="4160520" y="2103120"/>
+            <a:ext cx="1280160" cy="457200"/>
+          </a:xfrm>
+          <a:prstGeom prst="rect">
+            <a:avLst/>
+          </a:prstGeom>
+          <a:noFill/>
+        </p:spPr>
+        <p:txBody>
+          <a:bodyPr wrap="square" lIns="20000" rIns="20000" tIns="15000" bIns="15000" anchor="ctr">
+            <a:spAutoFit/>
+          </a:bodyPr>
+          <a:lstStyle/>
+          <a:p>
+            <a:pPr algn="ctr"/>
+            <a:r>
+              <a:rPr sz="1400" b="1">
+                <a:solidFill>
+                  <a:srgbClr val="3D2C70"/>
+                </a:solidFill>
+              </a:rPr>
+              <a:t>6</a:t>
+            </a:r>
+          </a:p>
+          <a:p>
+            <a:pPr algn="ctr"/>
+            <a:r>
+              <a:rPr sz="700" b="1">
+                <a:solidFill>
+                  <a:srgbClr val="3D2C70"/>
+                </a:solidFill>
+              </a:rPr>
+              <a:t>Master Orchestration</a:t>
+            </a:r>
+          </a:p>
+        </p:txBody>
+      </p:sp>
+      <p:sp>
+        <p:nvSpPr>
+          <p:cNvPr id="39" name="Diamond 38"/>
+          <p:cNvSpPr/>
+          <p:nvPr/>
+        </p:nvSpPr>
+        <p:spPr>
+          <a:xfrm>
+            <a:off x="5760720" y="2103120"/>
+            <a:ext cx="822960" cy="502920"/>
+          </a:xfrm>
+          <a:prstGeom prst="diamond">
+            <a:avLst/>
+          </a:prstGeom>
+          <a:solidFill>
+            <a:srgbClr val="FFFFFF"/>
+          </a:solidFill>
+          <a:ln w="19050">
+            <a:solidFill>
+              <a:srgbClr val="107C10"/>
+            </a:solidFill>
+          </a:ln>
+          <a:effectLst/>
+        </p:spPr>
+        <p:style>
+          <a:lnRef idx="1">
+            <a:schemeClr val="accent1"/>
+          </a:lnRef>
+          <a:fillRef idx="3">
+            <a:schemeClr val="accent1"/>
+          </a:fillRef>
+          <a:effectRef idx="2">
+            <a:schemeClr val="accent1"/>
+          </a:effectRef>
+          <a:fontRef idx="minor">
+            <a:schemeClr val="lt1"/>
+          </a:fontRef>
+        </p:style>
+        <p:txBody>
+          <a:bodyPr rtlCol="0" anchor="ctr"/>
+          <a:lstStyle/>
+          <a:p>
+            <a:pPr algn="ctr"/>
+          </a:p>
+        </p:txBody>
+      </p:sp>
+      <p:sp>
+        <p:nvSpPr>
+          <p:cNvPr id="40" name="TextBox 39"/>
+          <p:cNvSpPr txBox="1"/>
+          <p:nvPr/>
+        </p:nvSpPr>
+        <p:spPr>
+          <a:xfrm>
+            <a:off x="5760720" y="2121408"/>
+            <a:ext cx="822960" cy="457200"/>
+          </a:xfrm>
+          <a:prstGeom prst="rect">
+            <a:avLst/>
+          </a:prstGeom>
+          <a:noFill/>
+        </p:spPr>
+        <p:txBody>
+          <a:bodyPr wrap="square" lIns="20000" rIns="20000" tIns="10000" bIns="10000" anchor="ctr">
+            <a:spAutoFit/>
+          </a:bodyPr>
+          <a:lstStyle/>
+          <a:p>
+            <a:pPr algn="ctr"/>
+            <a:r>
+              <a:rPr sz="800" b="1" i="0">
+                <a:solidFill>
+                  <a:srgbClr val="0E3A0E"/>
+                </a:solidFill>
+              </a:rPr>
+              <a:t>11</a:t>
+            </a:r>
+          </a:p>
+          <a:p>
+            <a:pPr algn="ctr"/>
+            <a:r>
+              <a:rPr sz="800" b="1" i="0">
+                <a:solidFill>
+                  <a:srgbClr val="0E3A0E"/>
+                </a:solidFill>
+              </a:rPr>
+              <a:t>Tier Router</a:t>
+            </a:r>
+          </a:p>
+        </p:txBody>
+      </p:sp>
+      <p:sp>
+        <p:nvSpPr>
+          <p:cNvPr id="41" name="Rounded Rectangle 40"/>
+          <p:cNvSpPr/>
+          <p:nvPr/>
+        </p:nvSpPr>
+        <p:spPr>
+          <a:xfrm>
+            <a:off x="6766560" y="2103120"/>
+            <a:ext cx="1280160" cy="457200"/>
+          </a:xfrm>
+          <a:prstGeom prst="roundRect">
+            <a:avLst/>
+          </a:prstGeom>
+          <a:solidFill>
+            <a:srgbClr val="DCFCE7"/>
+          </a:solidFill>
+          <a:ln w="12700">
+            <a:solidFill>
+              <a:srgbClr val="107C10"/>
+            </a:solidFill>
+          </a:ln>
+          <a:effectLst/>
+        </p:spPr>
+        <p:style>
+          <a:lnRef idx="1">
+            <a:schemeClr val="accent1"/>
+          </a:lnRef>
+          <a:fillRef idx="3">
+            <a:schemeClr val="accent1"/>
+          </a:fillRef>
+          <a:effectRef idx="2">
+            <a:schemeClr val="accent1"/>
+          </a:effectRef>
+          <a:fontRef idx="minor">
+            <a:schemeClr val="lt1"/>
+          </a:fontRef>
+        </p:style>
+        <p:txBody>
+          <a:bodyPr rtlCol="0" anchor="ctr"/>
+          <a:lstStyle/>
+          <a:p>
+            <a:pPr algn="ctr"/>
+          </a:p>
+        </p:txBody>
+      </p:sp>
+      <p:sp>
+        <p:nvSpPr>
+          <p:cNvPr id="42" name="TextBox 41"/>
+          <p:cNvSpPr txBox="1"/>
+          <p:nvPr/>
+        </p:nvSpPr>
+        <p:spPr>
+          <a:xfrm>
+            <a:off x="6766560" y="2103120"/>
+            <a:ext cx="1280160" cy="457200"/>
+          </a:xfrm>
+          <a:prstGeom prst="rect">
+            <a:avLst/>
+          </a:prstGeom>
+          <a:noFill/>
+        </p:spPr>
+        <p:txBody>
+          <a:bodyPr wrap="square" lIns="20000" rIns="20000" tIns="15000" bIns="15000" anchor="ctr">
+            <a:spAutoFit/>
+          </a:bodyPr>
+          <a:lstStyle/>
+          <a:p>
+            <a:pPr algn="ctr"/>
+            <a:r>
+              <a:rPr sz="1400" b="1">
+                <a:solidFill>
+                  <a:srgbClr val="0E3A0E"/>
+                </a:solidFill>
+              </a:rPr>
+              <a:t>13</a:t>
+            </a:r>
+          </a:p>
+          <a:p>
+            <a:pPr algn="ctr"/>
+            <a:r>
+              <a:rPr sz="700" b="1">
+                <a:solidFill>
+                  <a:srgbClr val="0E3A0E"/>
+                </a:solidFill>
+              </a:rPr>
+              <a:t>Notify_Customer</a:t>
+            </a:r>
+          </a:p>
+        </p:txBody>
+      </p:sp>
+      <p:sp>
+        <p:nvSpPr>
+          <p:cNvPr id="43" name="Rounded Rectangle 42"/>
+          <p:cNvSpPr/>
+          <p:nvPr/>
+        </p:nvSpPr>
+        <p:spPr>
+          <a:xfrm>
+            <a:off x="3017520" y="2715768"/>
+            <a:ext cx="1645920" cy="246888"/>
+          </a:xfrm>
+          <a:prstGeom prst="roundRect">
+            <a:avLst/>
+          </a:prstGeom>
+          <a:solidFill>
+            <a:srgbClr val="DBEAFE"/>
+          </a:solidFill>
+          <a:ln w="6350">
+            <a:solidFill>
+              <a:srgbClr val="0078D4"/>
+            </a:solidFill>
+          </a:ln>
+          <a:effectLst/>
+        </p:spPr>
+        <p:style>
+          <a:lnRef idx="1">
+            <a:schemeClr val="accent1"/>
+          </a:lnRef>
+          <a:fillRef idx="3">
+            <a:schemeClr val="accent1"/>
+          </a:fillRef>
+          <a:effectRef idx="2">
+            <a:schemeClr val="accent1"/>
+          </a:effectRef>
+          <a:fontRef idx="minor">
+            <a:schemeClr val="lt1"/>
+          </a:fontRef>
+        </p:style>
+        <p:txBody>
+          <a:bodyPr rtlCol="0" anchor="ctr"/>
+          <a:lstStyle/>
+          <a:p>
+            <a:pPr algn="ctr"/>
+          </a:p>
+        </p:txBody>
+      </p:sp>
+      <p:sp>
+        <p:nvSpPr>
+          <p:cNvPr id="44" name="TextBox 43"/>
+          <p:cNvSpPr txBox="1"/>
+          <p:nvPr/>
+        </p:nvSpPr>
+        <p:spPr>
+          <a:xfrm>
+            <a:off x="3017520" y="2715768"/>
+            <a:ext cx="1645920" cy="246888"/>
+          </a:xfrm>
+          <a:prstGeom prst="rect">
+            <a:avLst/>
+          </a:prstGeom>
+          <a:noFill/>
+        </p:spPr>
+        <p:txBody>
+          <a:bodyPr wrap="square" lIns="20000" rIns="20000" tIns="10000" bIns="10000" anchor="ctr">
+            <a:spAutoFit/>
+          </a:bodyPr>
+          <a:lstStyle/>
+          <a:p>
+            <a:pPr algn="ctr"/>
+            <a:r>
+              <a:rPr sz="800" b="1" i="0">
+                <a:solidFill>
+                  <a:srgbClr val="0A2540"/>
+                </a:solidFill>
+              </a:rPr>
+              <a:t>7  Extraction</a:t>
+            </a:r>
+          </a:p>
+        </p:txBody>
+      </p:sp>
+      <p:sp>
+        <p:nvSpPr>
+          <p:cNvPr id="45" name="Rounded Rectangle 44"/>
+          <p:cNvSpPr/>
+          <p:nvPr/>
+        </p:nvSpPr>
+        <p:spPr>
+          <a:xfrm>
+            <a:off x="3017520" y="2990088"/>
+            <a:ext cx="1645920" cy="246888"/>
+          </a:xfrm>
+          <a:prstGeom prst="roundRect">
+            <a:avLst/>
+          </a:prstGeom>
+          <a:solidFill>
+            <a:srgbClr val="DBEAFE"/>
+          </a:solidFill>
+          <a:ln w="6350">
+            <a:solidFill>
+              <a:srgbClr val="0078D4"/>
+            </a:solidFill>
+          </a:ln>
+          <a:effectLst/>
+        </p:spPr>
+        <p:style>
+          <a:lnRef idx="1">
+            <a:schemeClr val="accent1"/>
+          </a:lnRef>
+          <a:fillRef idx="3">
+            <a:schemeClr val="accent1"/>
+          </a:fillRef>
+          <a:effectRef idx="2">
+            <a:schemeClr val="accent1"/>
+          </a:effectRef>
+          <a:fontRef idx="minor">
+            <a:schemeClr val="lt1"/>
+          </a:fontRef>
+        </p:style>
+        <p:txBody>
+          <a:bodyPr rtlCol="0" anchor="ctr"/>
+          <a:lstStyle/>
+          <a:p>
+            <a:pPr algn="ctr"/>
+          </a:p>
+        </p:txBody>
+      </p:sp>
+      <p:sp>
+        <p:nvSpPr>
+          <p:cNvPr id="46" name="TextBox 45"/>
+          <p:cNvSpPr txBox="1"/>
+          <p:nvPr/>
+        </p:nvSpPr>
+        <p:spPr>
+          <a:xfrm>
+            <a:off x="3017520" y="2990088"/>
+            <a:ext cx="1645920" cy="246888"/>
+          </a:xfrm>
+          <a:prstGeom prst="rect">
+            <a:avLst/>
+          </a:prstGeom>
+          <a:noFill/>
+        </p:spPr>
+        <p:txBody>
+          <a:bodyPr wrap="square" lIns="20000" rIns="20000" tIns="10000" bIns="10000" anchor="ctr">
+            <a:spAutoFit/>
+          </a:bodyPr>
+          <a:lstStyle/>
+          <a:p>
+            <a:pPr algn="ctr"/>
+            <a:r>
+              <a:rPr sz="800" b="1" i="0">
+                <a:solidFill>
+                  <a:srgbClr val="0A2540"/>
+                </a:solidFill>
+              </a:rPr>
+              <a:t>8  Policy</a:t>
+            </a:r>
+          </a:p>
+        </p:txBody>
+      </p:sp>
+      <p:sp>
+        <p:nvSpPr>
+          <p:cNvPr id="47" name="Rounded Rectangle 46"/>
+          <p:cNvSpPr/>
+          <p:nvPr/>
+        </p:nvSpPr>
+        <p:spPr>
+          <a:xfrm>
+            <a:off x="3017520" y="3264408"/>
+            <a:ext cx="1645920" cy="246888"/>
+          </a:xfrm>
+          <a:prstGeom prst="roundRect">
+            <a:avLst/>
+          </a:prstGeom>
+          <a:solidFill>
+            <a:srgbClr val="DBEAFE"/>
+          </a:solidFill>
+          <a:ln w="6350">
+            <a:solidFill>
+              <a:srgbClr val="0078D4"/>
+            </a:solidFill>
+          </a:ln>
+          <a:effectLst/>
+        </p:spPr>
+        <p:style>
+          <a:lnRef idx="1">
+            <a:schemeClr val="accent1"/>
+          </a:lnRef>
+          <a:fillRef idx="3">
+            <a:schemeClr val="accent1"/>
+          </a:fillRef>
+          <a:effectRef idx="2">
+            <a:schemeClr val="accent1"/>
+          </a:effectRef>
+          <a:fontRef idx="minor">
+            <a:schemeClr val="lt1"/>
+          </a:fontRef>
+        </p:style>
+        <p:txBody>
+          <a:bodyPr rtlCol="0" anchor="ctr"/>
+          <a:lstStyle/>
+          <a:p>
+            <a:pPr algn="ctr"/>
+          </a:p>
+        </p:txBody>
+      </p:sp>
+      <p:sp>
+        <p:nvSpPr>
+          <p:cNvPr id="48" name="TextBox 47"/>
+          <p:cNvSpPr txBox="1"/>
+          <p:nvPr/>
+        </p:nvSpPr>
+        <p:spPr>
+          <a:xfrm>
+            <a:off x="3017520" y="3264408"/>
+            <a:ext cx="1645920" cy="246888"/>
+          </a:xfrm>
+          <a:prstGeom prst="rect">
+            <a:avLst/>
+          </a:prstGeom>
+          <a:noFill/>
+        </p:spPr>
+        <p:txBody>
+          <a:bodyPr wrap="square" lIns="20000" rIns="20000" tIns="10000" bIns="10000" anchor="ctr">
+            <a:spAutoFit/>
+          </a:bodyPr>
+          <a:lstStyle/>
+          <a:p>
+            <a:pPr algn="ctr"/>
+            <a:r>
+              <a:rPr sz="700" b="1" i="0">
+                <a:solidFill>
+                  <a:srgbClr val="0A2540"/>
+                </a:solidFill>
+              </a:rPr>
+              <a:t>9  Validation · 7 ext checks</a:t>
+            </a:r>
+          </a:p>
+        </p:txBody>
+      </p:sp>
+      <p:sp>
+        <p:nvSpPr>
+          <p:cNvPr id="49" name="Rounded Rectangle 48"/>
+          <p:cNvSpPr/>
+          <p:nvPr/>
+        </p:nvSpPr>
+        <p:spPr>
+          <a:xfrm>
+            <a:off x="4846320" y="2834640"/>
+            <a:ext cx="1737360" cy="594360"/>
+          </a:xfrm>
+          <a:prstGeom prst="roundRect">
+            <a:avLst/>
+          </a:prstGeom>
+          <a:solidFill>
+            <a:srgbClr val="0A2540"/>
+          </a:solidFill>
+          <a:ln w="19050">
+            <a:solidFill>
+              <a:srgbClr val="0A2540"/>
+            </a:solidFill>
+          </a:ln>
+          <a:effectLst/>
+        </p:spPr>
+        <p:style>
+          <a:lnRef idx="1">
+            <a:schemeClr val="accent1"/>
+          </a:lnRef>
+          <a:fillRef idx="3">
+            <a:schemeClr val="accent1"/>
+          </a:fillRef>
+          <a:effectRef idx="2">
+            <a:schemeClr val="accent1"/>
+          </a:effectRef>
+          <a:fontRef idx="minor">
+            <a:schemeClr val="lt1"/>
+          </a:fontRef>
+        </p:style>
+        <p:txBody>
+          <a:bodyPr rtlCol="0" anchor="ctr"/>
+          <a:lstStyle/>
+          <a:p>
+            <a:pPr algn="ctr"/>
+          </a:p>
+        </p:txBody>
+      </p:sp>
+      <p:sp>
+        <p:nvSpPr>
+          <p:cNvPr id="50" name="TextBox 49"/>
+          <p:cNvSpPr txBox="1"/>
+          <p:nvPr/>
+        </p:nvSpPr>
+        <p:spPr>
+          <a:xfrm>
+            <a:off x="4846320" y="2834640"/>
+            <a:ext cx="1737360" cy="594360"/>
+          </a:xfrm>
+          <a:prstGeom prst="rect">
+            <a:avLst/>
+          </a:prstGeom>
+          <a:noFill/>
+        </p:spPr>
+        <p:txBody>
+          <a:bodyPr wrap="square" lIns="20000" rIns="20000" tIns="15000" bIns="15000" anchor="ctr">
+            <a:spAutoFit/>
+          </a:bodyPr>
+          <a:lstStyle/>
+          <a:p>
+            <a:pPr algn="ctr"/>
+            <a:r>
+              <a:rPr sz="1400" b="1">
+                <a:solidFill>
+                  <a:srgbClr val="FFFFFF"/>
+                </a:solidFill>
+              </a:rPr>
+              <a:t>10</a:t>
+            </a:r>
+          </a:p>
+          <a:p>
+            <a:pPr algn="ctr"/>
+            <a:r>
+              <a:rPr sz="700" b="1">
+                <a:solidFill>
+                  <a:srgbClr val="FFFFFF"/>
+                </a:solidFill>
+              </a:rPr>
+              <a:t>Adjudication  ·  GPT-4.1</a:t>
+            </a:r>
+          </a:p>
+        </p:txBody>
+      </p:sp>
+      <p:sp>
+        <p:nvSpPr>
+          <p:cNvPr id="51" name="Rounded Rectangle 50"/>
+          <p:cNvSpPr/>
+          <p:nvPr/>
+        </p:nvSpPr>
+        <p:spPr>
+          <a:xfrm>
+            <a:off x="5943600" y="3630168"/>
+            <a:ext cx="1188720" cy="182880"/>
+          </a:xfrm>
+          <a:prstGeom prst="roundRect">
+            <a:avLst/>
+          </a:prstGeom>
+          <a:solidFill>
+            <a:srgbClr val="FEF3C7"/>
+          </a:solidFill>
+          <a:ln w="6350">
+            <a:solidFill>
+              <a:srgbClr val="D97706"/>
+            </a:solidFill>
+          </a:ln>
+          <a:effectLst/>
+        </p:spPr>
+        <p:style>
+          <a:lnRef idx="1">
+            <a:schemeClr val="accent1"/>
+          </a:lnRef>
+          <a:fillRef idx="3">
+            <a:schemeClr val="accent1"/>
+          </a:fillRef>
+          <a:effectRef idx="2">
+            <a:schemeClr val="accent1"/>
+          </a:effectRef>
+          <a:fontRef idx="minor">
+            <a:schemeClr val="lt1"/>
+          </a:fontRef>
+        </p:style>
+        <p:txBody>
+          <a:bodyPr rtlCol="0" anchor="ctr"/>
+          <a:lstStyle/>
+          <a:p>
+            <a:pPr algn="ctr"/>
+          </a:p>
+        </p:txBody>
+      </p:sp>
+      <p:sp>
+        <p:nvSpPr>
+          <p:cNvPr id="52" name="TextBox 51"/>
+          <p:cNvSpPr txBox="1"/>
+          <p:nvPr/>
+        </p:nvSpPr>
+        <p:spPr>
+          <a:xfrm>
+            <a:off x="5943600" y="3630168"/>
+            <a:ext cx="1188720" cy="182880"/>
+          </a:xfrm>
+          <a:prstGeom prst="rect">
+            <a:avLst/>
+          </a:prstGeom>
+          <a:noFill/>
+        </p:spPr>
+        <p:txBody>
+          <a:bodyPr wrap="square" lIns="20000" rIns="20000" tIns="10000" bIns="10000" anchor="ctr">
+            <a:spAutoFit/>
+          </a:bodyPr>
+          <a:lstStyle/>
+          <a:p>
+            <a:pPr algn="ctr"/>
+            <a:r>
+              <a:rPr sz="600" b="1" i="0">
+                <a:solidFill>
+                  <a:srgbClr val="92400E"/>
+                </a:solidFill>
+              </a:rPr>
+              <a:t>T2 · Adjuster Teams Card (back-office human)</a:t>
+            </a:r>
+          </a:p>
+        </p:txBody>
+      </p:sp>
+      <p:sp>
+        <p:nvSpPr>
+          <p:cNvPr id="53" name="Rounded Rectangle 52"/>
+          <p:cNvSpPr/>
+          <p:nvPr/>
+        </p:nvSpPr>
+        <p:spPr>
+          <a:xfrm>
+            <a:off x="7223760" y="3630168"/>
+            <a:ext cx="1188720" cy="182880"/>
+          </a:xfrm>
+          <a:prstGeom prst="roundRect">
+            <a:avLst/>
+          </a:prstGeom>
+          <a:solidFill>
+            <a:srgbClr val="FEE2E2"/>
+          </a:solidFill>
+          <a:ln w="6350">
+            <a:solidFill>
+              <a:srgbClr val="DC2626"/>
+            </a:solidFill>
+          </a:ln>
+          <a:effectLst/>
+        </p:spPr>
+        <p:style>
+          <a:lnRef idx="1">
+            <a:schemeClr val="accent1"/>
+          </a:lnRef>
+          <a:fillRef idx="3">
+            <a:schemeClr val="accent1"/>
+          </a:fillRef>
+          <a:effectRef idx="2">
+            <a:schemeClr val="accent1"/>
+          </a:effectRef>
+          <a:fontRef idx="minor">
+            <a:schemeClr val="lt1"/>
+          </a:fontRef>
+        </p:style>
+        <p:txBody>
+          <a:bodyPr rtlCol="0" anchor="ctr"/>
+          <a:lstStyle/>
+          <a:p>
+            <a:pPr algn="ctr"/>
+          </a:p>
+        </p:txBody>
+      </p:sp>
+      <p:sp>
+        <p:nvSpPr>
+          <p:cNvPr id="54" name="TextBox 53"/>
+          <p:cNvSpPr txBox="1"/>
+          <p:nvPr/>
+        </p:nvSpPr>
+        <p:spPr>
+          <a:xfrm>
+            <a:off x="7223760" y="3630168"/>
+            <a:ext cx="1188720" cy="182880"/>
+          </a:xfrm>
+          <a:prstGeom prst="rect">
+            <a:avLst/>
+          </a:prstGeom>
+          <a:noFill/>
+        </p:spPr>
+        <p:txBody>
+          <a:bodyPr wrap="square" lIns="20000" rIns="20000" tIns="10000" bIns="10000" anchor="ctr">
+            <a:spAutoFit/>
+          </a:bodyPr>
+          <a:lstStyle/>
+          <a:p>
+            <a:pPr algn="ctr"/>
+            <a:r>
+              <a:rPr sz="600" b="1" i="0">
+                <a:solidFill>
+                  <a:srgbClr val="7F1D1D"/>
+                </a:solidFill>
+              </a:rPr>
+              <a:t>T3 · Live CSR Teams Chat (front-line human)</a:t>
+            </a:r>
+          </a:p>
+        </p:txBody>
+      </p:sp>
+      <p:sp>
+        <p:nvSpPr>
+          <p:cNvPr id="55" name="TextBox 54"/>
+          <p:cNvSpPr txBox="1"/>
+          <p:nvPr/>
+        </p:nvSpPr>
+        <p:spPr>
+          <a:xfrm>
+            <a:off x="5943600" y="3840480"/>
+            <a:ext cx="2468880" cy="164592"/>
+          </a:xfrm>
+          <a:prstGeom prst="rect">
+            <a:avLst/>
+          </a:prstGeom>
+          <a:noFill/>
+        </p:spPr>
+        <p:txBody>
+          <a:bodyPr wrap="square" lIns="20000" rIns="20000" tIns="10000" bIns="10000" anchor="ctr">
+            <a:spAutoFit/>
+          </a:bodyPr>
+          <a:lstStyle/>
+          <a:p>
+            <a:pPr algn="ctr"/>
+            <a:r>
+              <a:rPr sz="600" b="0" i="1">
+                <a:solidFill>
+                  <a:srgbClr val="5A6680"/>
+                </a:solidFill>
+              </a:rPr>
+              <a:t>Tier 1 = auto-approve, no human</a:t>
+            </a:r>
+          </a:p>
+        </p:txBody>
+      </p:sp>
+      <p:sp>
+        <p:nvSpPr>
+          <p:cNvPr id="56" name="Rounded Rectangle 55"/>
+          <p:cNvSpPr/>
+          <p:nvPr/>
+        </p:nvSpPr>
+        <p:spPr>
+          <a:xfrm>
+            <a:off x="822960" y="4169663"/>
+            <a:ext cx="640080" cy="256032"/>
+          </a:xfrm>
+          <a:prstGeom prst="roundRect">
+            <a:avLst/>
+          </a:prstGeom>
+          <a:solidFill>
+            <a:srgbClr val="742774"/>
+          </a:solidFill>
+          <a:ln w="6350">
+            <a:solidFill>
+              <a:srgbClr val="3D2C70"/>
+            </a:solidFill>
+          </a:ln>
+          <a:effectLst/>
+        </p:spPr>
+        <p:style>
+          <a:lnRef idx="1">
+            <a:schemeClr val="accent1"/>
+          </a:lnRef>
+          <a:fillRef idx="3">
+            <a:schemeClr val="accent1"/>
+          </a:fillRef>
+          <a:effectRef idx="2">
+            <a:schemeClr val="accent1"/>
+          </a:effectRef>
+          <a:fontRef idx="minor">
+            <a:schemeClr val="lt1"/>
+          </a:fontRef>
+        </p:style>
+        <p:txBody>
+          <a:bodyPr rtlCol="0" anchor="ctr"/>
+          <a:lstStyle/>
+          <a:p>
+            <a:pPr algn="ctr"/>
+          </a:p>
+        </p:txBody>
+      </p:sp>
+      <p:sp>
+        <p:nvSpPr>
+          <p:cNvPr id="57" name="TextBox 56"/>
+          <p:cNvSpPr txBox="1"/>
+          <p:nvPr/>
+        </p:nvSpPr>
+        <p:spPr>
+          <a:xfrm>
+            <a:off x="822960" y="4169663"/>
+            <a:ext cx="640080" cy="256032"/>
+          </a:xfrm>
+          <a:prstGeom prst="rect">
+            <a:avLst/>
+          </a:prstGeom>
+          <a:noFill/>
+        </p:spPr>
+        <p:txBody>
+          <a:bodyPr wrap="square" lIns="20000" rIns="20000" tIns="10000" bIns="10000" anchor="ctr">
+            <a:spAutoFit/>
+          </a:bodyPr>
+          <a:lstStyle/>
+          <a:p>
+            <a:pPr algn="ctr"/>
+            <a:r>
+              <a:rPr sz="600" b="1" i="0">
+                <a:solidFill>
+                  <a:srgbClr val="FFFFFF"/>
+                </a:solidFill>
+              </a:rPr>
+              <a:t>Policy</a:t>
+            </a:r>
+          </a:p>
+        </p:txBody>
+      </p:sp>
+      <p:sp>
+        <p:nvSpPr>
+          <p:cNvPr id="58" name="Rounded Rectangle 57"/>
+          <p:cNvSpPr/>
+          <p:nvPr/>
+        </p:nvSpPr>
+        <p:spPr>
+          <a:xfrm>
+            <a:off x="1508760" y="4169663"/>
+            <a:ext cx="640080" cy="256032"/>
+          </a:xfrm>
+          <a:prstGeom prst="roundRect">
+            <a:avLst/>
+          </a:prstGeom>
+          <a:solidFill>
+            <a:srgbClr val="742774"/>
+          </a:solidFill>
+          <a:ln w="6350">
+            <a:solidFill>
+              <a:srgbClr val="3D2C70"/>
+            </a:solidFill>
+          </a:ln>
+          <a:effectLst/>
+        </p:spPr>
+        <p:style>
+          <a:lnRef idx="1">
+            <a:schemeClr val="accent1"/>
+          </a:lnRef>
+          <a:fillRef idx="3">
+            <a:schemeClr val="accent1"/>
+          </a:fillRef>
+          <a:effectRef idx="2">
+            <a:schemeClr val="accent1"/>
+          </a:effectRef>
+          <a:fontRef idx="minor">
+            <a:schemeClr val="lt1"/>
+          </a:fontRef>
+        </p:style>
+        <p:txBody>
+          <a:bodyPr rtlCol="0" anchor="ctr"/>
+          <a:lstStyle/>
+          <a:p>
+            <a:pPr algn="ctr"/>
+          </a:p>
+        </p:txBody>
+      </p:sp>
+      <p:sp>
+        <p:nvSpPr>
+          <p:cNvPr id="59" name="TextBox 58"/>
+          <p:cNvSpPr txBox="1"/>
+          <p:nvPr/>
+        </p:nvSpPr>
+        <p:spPr>
+          <a:xfrm>
+            <a:off x="1508760" y="4169663"/>
+            <a:ext cx="640080" cy="256032"/>
+          </a:xfrm>
+          <a:prstGeom prst="rect">
+            <a:avLst/>
+          </a:prstGeom>
+          <a:noFill/>
+        </p:spPr>
+        <p:txBody>
+          <a:bodyPr wrap="square" lIns="20000" rIns="20000" tIns="10000" bIns="10000" anchor="ctr">
+            <a:spAutoFit/>
+          </a:bodyPr>
+          <a:lstStyle/>
+          <a:p>
+            <a:pPr algn="ctr"/>
+            <a:r>
+              <a:rPr sz="600" b="1" i="0">
+                <a:solidFill>
+                  <a:srgbClr val="FFFFFF"/>
+                </a:solidFill>
+              </a:rPr>
+              <a:t>Claim</a:t>
+            </a:r>
+          </a:p>
+        </p:txBody>
+      </p:sp>
+      <p:sp>
+        <p:nvSpPr>
+          <p:cNvPr id="60" name="Rounded Rectangle 59"/>
+          <p:cNvSpPr/>
+          <p:nvPr/>
+        </p:nvSpPr>
+        <p:spPr>
+          <a:xfrm>
+            <a:off x="2194560" y="4169663"/>
+            <a:ext cx="731520" cy="256032"/>
+          </a:xfrm>
+          <a:prstGeom prst="roundRect">
+            <a:avLst/>
+          </a:prstGeom>
+          <a:solidFill>
+            <a:srgbClr val="742774"/>
+          </a:solidFill>
+          <a:ln w="6350">
+            <a:solidFill>
+              <a:srgbClr val="3D2C70"/>
+            </a:solidFill>
+          </a:ln>
+          <a:effectLst/>
+        </p:spPr>
+        <p:style>
+          <a:lnRef idx="1">
+            <a:schemeClr val="accent1"/>
+          </a:lnRef>
+          <a:fillRef idx="3">
+            <a:schemeClr val="accent1"/>
+          </a:fillRef>
+          <a:effectRef idx="2">
+            <a:schemeClr val="accent1"/>
+          </a:effectRef>
+          <a:fontRef idx="minor">
+            <a:schemeClr val="lt1"/>
+          </a:fontRef>
+        </p:style>
+        <p:txBody>
+          <a:bodyPr rtlCol="0" anchor="ctr"/>
+          <a:lstStyle/>
+          <a:p>
+            <a:pPr algn="ctr"/>
+          </a:p>
+        </p:txBody>
+      </p:sp>
+      <p:sp>
+        <p:nvSpPr>
+          <p:cNvPr id="61" name="TextBox 60"/>
+          <p:cNvSpPr txBox="1"/>
+          <p:nvPr/>
+        </p:nvSpPr>
+        <p:spPr>
+          <a:xfrm>
+            <a:off x="2194560" y="4169663"/>
+            <a:ext cx="731520" cy="256032"/>
+          </a:xfrm>
+          <a:prstGeom prst="rect">
+            <a:avLst/>
+          </a:prstGeom>
+          <a:noFill/>
+        </p:spPr>
+        <p:txBody>
+          <a:bodyPr wrap="square" lIns="20000" rIns="20000" tIns="10000" bIns="10000" anchor="ctr">
+            <a:spAutoFit/>
+          </a:bodyPr>
+          <a:lstStyle/>
+          <a:p>
+            <a:pPr algn="ctr"/>
+            <a:r>
+              <a:rPr sz="600" b="1" i="0">
+                <a:solidFill>
+                  <a:srgbClr val="FFFFFF"/>
+                </a:solidFill>
+              </a:rPr>
+              <a:t>Document</a:t>
+            </a:r>
+          </a:p>
+        </p:txBody>
+      </p:sp>
+      <p:sp>
+        <p:nvSpPr>
+          <p:cNvPr id="62" name="Rounded Rectangle 61"/>
+          <p:cNvSpPr/>
+          <p:nvPr/>
+        </p:nvSpPr>
+        <p:spPr>
+          <a:xfrm>
+            <a:off x="2971800" y="4169663"/>
+            <a:ext cx="914400" cy="256032"/>
+          </a:xfrm>
+          <a:prstGeom prst="roundRect">
+            <a:avLst/>
+          </a:prstGeom>
+          <a:solidFill>
+            <a:srgbClr val="742774"/>
+          </a:solidFill>
+          <a:ln w="6350">
+            <a:solidFill>
+              <a:srgbClr val="3D2C70"/>
+            </a:solidFill>
+          </a:ln>
+          <a:effectLst/>
+        </p:spPr>
+        <p:style>
+          <a:lnRef idx="1">
+            <a:schemeClr val="accent1"/>
+          </a:lnRef>
+          <a:fillRef idx="3">
+            <a:schemeClr val="accent1"/>
+          </a:fillRef>
+          <a:effectRef idx="2">
+            <a:schemeClr val="accent1"/>
+          </a:effectRef>
+          <a:fontRef idx="minor">
+            <a:schemeClr val="lt1"/>
+          </a:fontRef>
+        </p:style>
+        <p:txBody>
+          <a:bodyPr rtlCol="0" anchor="ctr"/>
+          <a:lstStyle/>
+          <a:p>
+            <a:pPr algn="ctr"/>
+          </a:p>
+        </p:txBody>
+      </p:sp>
+      <p:sp>
+        <p:nvSpPr>
+          <p:cNvPr id="63" name="TextBox 62"/>
+          <p:cNvSpPr txBox="1"/>
+          <p:nvPr/>
+        </p:nvSpPr>
+        <p:spPr>
+          <a:xfrm>
+            <a:off x="2971800" y="4169663"/>
+            <a:ext cx="914400" cy="256032"/>
+          </a:xfrm>
+          <a:prstGeom prst="rect">
+            <a:avLst/>
+          </a:prstGeom>
+          <a:noFill/>
+        </p:spPr>
+        <p:txBody>
+          <a:bodyPr wrap="square" lIns="20000" rIns="20000" tIns="10000" bIns="10000" anchor="ctr">
+            <a:spAutoFit/>
+          </a:bodyPr>
+          <a:lstStyle/>
+          <a:p>
+            <a:pPr algn="ctr"/>
+            <a:r>
+              <a:rPr sz="600" b="1" i="0">
+                <a:solidFill>
+                  <a:srgbClr val="FFFFFF"/>
+                </a:solidFill>
+              </a:rPr>
+              <a:t>Communication</a:t>
+            </a:r>
+          </a:p>
+        </p:txBody>
+      </p:sp>
+      <p:sp>
+        <p:nvSpPr>
+          <p:cNvPr id="64" name="Rounded Rectangle 63"/>
+          <p:cNvSpPr/>
+          <p:nvPr/>
+        </p:nvSpPr>
+        <p:spPr>
+          <a:xfrm>
+            <a:off x="3931920" y="4169663"/>
+            <a:ext cx="640080" cy="256032"/>
+          </a:xfrm>
+          <a:prstGeom prst="roundRect">
+            <a:avLst/>
+          </a:prstGeom>
+          <a:solidFill>
+            <a:srgbClr val="742774"/>
+          </a:solidFill>
+          <a:ln w="6350">
+            <a:solidFill>
+              <a:srgbClr val="3D2C70"/>
+            </a:solidFill>
+          </a:ln>
+          <a:effectLst/>
+        </p:spPr>
+        <p:style>
+          <a:lnRef idx="1">
+            <a:schemeClr val="accent1"/>
+          </a:lnRef>
+          <a:fillRef idx="3">
+            <a:schemeClr val="accent1"/>
+          </a:fillRef>
+          <a:effectRef idx="2">
+            <a:schemeClr val="accent1"/>
+          </a:effectRef>
+          <a:fontRef idx="minor">
+            <a:schemeClr val="lt1"/>
+          </a:fontRef>
+        </p:style>
+        <p:txBody>
+          <a:bodyPr rtlCol="0" anchor="ctr"/>
+          <a:lstStyle/>
+          <a:p>
+            <a:pPr algn="ctr"/>
+          </a:p>
+        </p:txBody>
+      </p:sp>
+      <p:sp>
+        <p:nvSpPr>
+          <p:cNvPr id="65" name="TextBox 64"/>
+          <p:cNvSpPr txBox="1"/>
+          <p:nvPr/>
+        </p:nvSpPr>
+        <p:spPr>
+          <a:xfrm>
+            <a:off x="3931920" y="4169663"/>
+            <a:ext cx="640080" cy="256032"/>
+          </a:xfrm>
+          <a:prstGeom prst="rect">
+            <a:avLst/>
+          </a:prstGeom>
+          <a:noFill/>
+        </p:spPr>
+        <p:txBody>
+          <a:bodyPr wrap="square" lIns="20000" rIns="20000" tIns="10000" bIns="10000" anchor="ctr">
+            <a:spAutoFit/>
+          </a:bodyPr>
+          <a:lstStyle/>
+          <a:p>
+            <a:pPr algn="ctr"/>
+            <a:r>
+              <a:rPr sz="600" b="1" i="0">
+                <a:solidFill>
+                  <a:srgbClr val="FFFFFF"/>
+                </a:solidFill>
+              </a:rPr>
+              <a:t>Adjuster</a:t>
+            </a:r>
+          </a:p>
+        </p:txBody>
+      </p:sp>
+      <p:sp>
+        <p:nvSpPr>
+          <p:cNvPr id="66" name="Rounded Rectangle 65"/>
+          <p:cNvSpPr/>
+          <p:nvPr/>
+        </p:nvSpPr>
+        <p:spPr>
+          <a:xfrm>
+            <a:off x="4617720" y="4169663"/>
+            <a:ext cx="640080" cy="256032"/>
+          </a:xfrm>
+          <a:prstGeom prst="roundRect">
+            <a:avLst/>
+          </a:prstGeom>
+          <a:solidFill>
+            <a:srgbClr val="742774"/>
+          </a:solidFill>
+          <a:ln w="6350">
+            <a:solidFill>
+              <a:srgbClr val="3D2C70"/>
+            </a:solidFill>
+          </a:ln>
+          <a:effectLst/>
+        </p:spPr>
+        <p:style>
+          <a:lnRef idx="1">
+            <a:schemeClr val="accent1"/>
+          </a:lnRef>
+          <a:fillRef idx="3">
+            <a:schemeClr val="accent1"/>
+          </a:fillRef>
+          <a:effectRef idx="2">
+            <a:schemeClr val="accent1"/>
+          </a:effectRef>
+          <a:fontRef idx="minor">
+            <a:schemeClr val="lt1"/>
+          </a:fontRef>
+        </p:style>
+        <p:txBody>
+          <a:bodyPr rtlCol="0" anchor="ctr"/>
+          <a:lstStyle/>
+          <a:p>
+            <a:pPr algn="ctr"/>
+          </a:p>
+        </p:txBody>
+      </p:sp>
+      <p:sp>
+        <p:nvSpPr>
+          <p:cNvPr id="67" name="TextBox 66"/>
+          <p:cNvSpPr txBox="1"/>
+          <p:nvPr/>
+        </p:nvSpPr>
+        <p:spPr>
+          <a:xfrm>
+            <a:off x="4617720" y="4169663"/>
+            <a:ext cx="640080" cy="256032"/>
+          </a:xfrm>
+          <a:prstGeom prst="rect">
+            <a:avLst/>
+          </a:prstGeom>
+          <a:noFill/>
+        </p:spPr>
+        <p:txBody>
+          <a:bodyPr wrap="square" lIns="20000" rIns="20000" tIns="10000" bIns="10000" anchor="ctr">
+            <a:spAutoFit/>
+          </a:bodyPr>
+          <a:lstStyle/>
+          <a:p>
+            <a:pPr algn="ctr"/>
+            <a:r>
+              <a:rPr sz="600" b="1" i="0">
+                <a:solidFill>
+                  <a:srgbClr val="FFFFFF"/>
+                </a:solidFill>
+              </a:rPr>
+              <a:t>Vendor</a:t>
+            </a:r>
+          </a:p>
+        </p:txBody>
+      </p:sp>
+      <p:sp>
+        <p:nvSpPr>
+          <p:cNvPr id="68" name="Rounded Rectangle 67"/>
+          <p:cNvSpPr/>
+          <p:nvPr/>
+        </p:nvSpPr>
+        <p:spPr>
+          <a:xfrm>
+            <a:off x="5303520" y="4169663"/>
+            <a:ext cx="1280160" cy="256032"/>
+          </a:xfrm>
+          <a:prstGeom prst="roundRect">
+            <a:avLst/>
+          </a:prstGeom>
+          <a:solidFill>
+            <a:srgbClr val="742774"/>
+          </a:solidFill>
+          <a:ln w="6350">
+            <a:solidFill>
+              <a:srgbClr val="3D2C70"/>
+            </a:solidFill>
+          </a:ln>
+          <a:effectLst/>
+        </p:spPr>
+        <p:style>
+          <a:lnRef idx="1">
+            <a:schemeClr val="accent1"/>
+          </a:lnRef>
+          <a:fillRef idx="3">
+            <a:schemeClr val="accent1"/>
+          </a:fillRef>
+          <a:effectRef idx="2">
+            <a:schemeClr val="accent1"/>
+          </a:effectRef>
+          <a:fontRef idx="minor">
+            <a:schemeClr val="lt1"/>
+          </a:fontRef>
+        </p:style>
+        <p:txBody>
+          <a:bodyPr rtlCol="0" anchor="ctr"/>
+          <a:lstStyle/>
+          <a:p>
+            <a:pPr algn="ctr"/>
+          </a:p>
+        </p:txBody>
+      </p:sp>
+      <p:sp>
+        <p:nvSpPr>
+          <p:cNvPr id="69" name="TextBox 68"/>
+          <p:cNvSpPr txBox="1"/>
+          <p:nvPr/>
+        </p:nvSpPr>
+        <p:spPr>
+          <a:xfrm>
+            <a:off x="5303520" y="4169663"/>
+            <a:ext cx="1280160" cy="256032"/>
+          </a:xfrm>
+          <a:prstGeom prst="rect">
+            <a:avLst/>
+          </a:prstGeom>
+          <a:noFill/>
+        </p:spPr>
+        <p:txBody>
+          <a:bodyPr wrap="square" lIns="20000" rIns="20000" tIns="10000" bIns="10000" anchor="ctr">
+            <a:spAutoFit/>
+          </a:bodyPr>
+          <a:lstStyle/>
+          <a:p>
+            <a:pPr algn="ctr"/>
+            <a:r>
+              <a:rPr sz="600" b="1" i="0">
+                <a:solidFill>
+                  <a:srgbClr val="FFFFFF"/>
+                </a:solidFill>
+              </a:rPr>
+              <a:t>ClaimVendorAssignment</a:t>
+            </a:r>
+          </a:p>
+        </p:txBody>
+      </p:sp>
+      <p:sp>
+        <p:nvSpPr>
+          <p:cNvPr id="70" name="Rounded Rectangle 69"/>
+          <p:cNvSpPr/>
+          <p:nvPr/>
+        </p:nvSpPr>
+        <p:spPr>
+          <a:xfrm>
+            <a:off x="822960" y="4498848"/>
+            <a:ext cx="7818120" cy="411480"/>
+          </a:xfrm>
+          <a:prstGeom prst="roundRect">
+            <a:avLst/>
+          </a:prstGeom>
+          <a:solidFill>
+            <a:srgbClr val="F5B73A"/>
+          </a:solidFill>
+          <a:ln w="25400">
+            <a:solidFill>
+              <a:srgbClr val="D99416"/>
+            </a:solidFill>
+          </a:ln>
+          <a:effectLst/>
+        </p:spPr>
+        <p:style>
+          <a:lnRef idx="1">
+            <a:schemeClr val="accent1"/>
+          </a:lnRef>
+          <a:fillRef idx="3">
+            <a:schemeClr val="accent1"/>
+          </a:fillRef>
+          <a:effectRef idx="2">
+            <a:schemeClr val="accent1"/>
+          </a:effectRef>
+          <a:fontRef idx="minor">
+            <a:schemeClr val="lt1"/>
+          </a:fontRef>
+        </p:style>
+        <p:txBody>
+          <a:bodyPr rtlCol="0" anchor="ctr"/>
+          <a:lstStyle/>
+          <a:p>
+            <a:pPr algn="ctr"/>
+          </a:p>
+        </p:txBody>
+      </p:sp>
+      <p:sp>
+        <p:nvSpPr>
+          <p:cNvPr id="71" name="TextBox 70"/>
+          <p:cNvSpPr txBox="1"/>
+          <p:nvPr/>
+        </p:nvSpPr>
+        <p:spPr>
+          <a:xfrm>
+            <a:off x="822960" y="4498848"/>
+            <a:ext cx="7818120" cy="411480"/>
+          </a:xfrm>
+          <a:prstGeom prst="rect">
+            <a:avLst/>
+          </a:prstGeom>
+          <a:noFill/>
+        </p:spPr>
+        <p:txBody>
+          <a:bodyPr wrap="square" lIns="20000" rIns="20000" tIns="10000" bIns="10000" anchor="ctr">
+            <a:spAutoFit/>
+          </a:bodyPr>
+          <a:lstStyle/>
+          <a:p>
+            <a:pPr algn="ctr"/>
+            <a:r>
+              <a:rPr sz="800" b="1" i="0">
+                <a:solidFill>
+                  <a:srgbClr val="0A2540"/>
+                </a:solidFill>
+              </a:rPr>
+              <a:t>🛡  Decision_Rationale  ·  THE GLASS BOX  ·  every AI step writes 1 row  ·  source: 4 · 7 · 8 · 9 · 10 · 12</a:t>
+            </a:r>
+          </a:p>
+        </p:txBody>
+      </p:sp>
+      <p:sp>
+        <p:nvSpPr>
+          <p:cNvPr id="72" name="TextBox 71"/>
+          <p:cNvSpPr txBox="1"/>
+          <p:nvPr/>
+        </p:nvSpPr>
+        <p:spPr>
+          <a:xfrm>
+            <a:off x="91440" y="4983480"/>
+            <a:ext cx="8961120" cy="137160"/>
+          </a:xfrm>
+          <a:prstGeom prst="rect">
+            <a:avLst/>
+          </a:prstGeom>
+          <a:noFill/>
+        </p:spPr>
+        <p:txBody>
+          <a:bodyPr wrap="square" lIns="20000" rIns="20000" tIns="10000" bIns="10000" anchor="ctr">
+            <a:spAutoFit/>
+          </a:bodyPr>
+          <a:lstStyle/>
+          <a:p>
+            <a:pPr algn="l"/>
+            <a:r>
+              <a:rPr sz="600" b="0" i="1">
+                <a:solidFill>
+                  <a:srgbClr val="5A6680"/>
+                </a:solidFill>
+              </a:rPr>
+              <a:t>AI Elites carrier  ·  Glass Box AI  ·  Compliance: CO SB21-169 · NAIC AI Bulletin · NY DFS Circular 7 · CA AB 2930</a:t>
+            </a:r>
+          </a:p>
+        </p:txBody>
+      </p:sp>
     </p:spTree>
   </p:cSld>
   <p:clrMapOvr>

--- a/docs/hackathon_blueprint_filled.pptx
+++ b/docs/hackathon_blueprint_filled.pptx
@@ -5131,8 +5131,8 @@
         </p:nvSpPr>
         <p:spPr>
           <a:xfrm>
-            <a:off x="91440" y="45720"/>
-            <a:ext cx="8961120" cy="201168"/>
+            <a:off x="73152" y="36576"/>
+            <a:ext cx="9006840" cy="182880"/>
           </a:xfrm>
           <a:prstGeom prst="rect">
             <a:avLst/>
@@ -5140,7 +5140,7 @@
           <a:noFill/>
         </p:spPr>
         <p:txBody>
-          <a:bodyPr wrap="square" lIns="20000" rIns="20000" tIns="10000" bIns="10000" anchor="ctr">
+          <a:bodyPr wrap="square" lIns="15000" rIns="15000" tIns="5000" bIns="5000" anchor="ctr">
             <a:spAutoFit/>
           </a:bodyPr>
           <a:lstStyle/>
@@ -5152,7 +5152,7 @@
                   <a:srgbClr val="0A2540"/>
                 </a:solidFill>
               </a:rPr>
-              <a:t>Logical Architecture (C4 L2)  —  left-to-right swimlanes</a:t>
+              <a:t>Logical Architecture (C4 L2)  —  swimlanes + numbered flow</a:t>
             </a:r>
           </a:p>
         </p:txBody>
@@ -5165,8 +5165,8 @@
         </p:nvSpPr>
         <p:spPr>
           <a:xfrm>
-            <a:off x="91440" y="228600"/>
-            <a:ext cx="8961120" cy="137160"/>
+            <a:off x="73152" y="201168"/>
+            <a:ext cx="9006840" cy="128016"/>
           </a:xfrm>
           <a:prstGeom prst="rect">
             <a:avLst/>
@@ -5174,7 +5174,7 @@
           <a:noFill/>
         </p:spPr>
         <p:txBody>
-          <a:bodyPr wrap="square" lIns="20000" rIns="20000" tIns="10000" bIns="10000" anchor="ctr">
+          <a:bodyPr wrap="square" lIns="15000" rIns="15000" tIns="5000" bIns="5000" anchor="ctr">
             <a:spAutoFit/>
           </a:bodyPr>
           <a:lstStyle/>
@@ -5186,7 +5186,7 @@
                   <a:srgbClr val="5A6680"/>
                 </a:solidFill>
               </a:rPr>
-              <a:t>Numbers 1–13 trace runtime flow  ·  red = flow  ·  black = human review  ·  gold = audit write</a:t>
+              <a:t>Numbers 1-13 trace runtime flow  ·  read with the commentary panel on the right</a:t>
             </a:r>
           </a:p>
         </p:txBody>
@@ -5199,8 +5199,8 @@
         </p:nvSpPr>
         <p:spPr>
           <a:xfrm>
-            <a:off x="749808" y="384048"/>
-            <a:ext cx="8321040" cy="502920"/>
+            <a:off x="557784" y="365760"/>
+            <a:ext cx="5641848" cy="475488"/>
           </a:xfrm>
           <a:prstGeom prst="rect">
             <a:avLst/>
@@ -5208,7 +5208,7 @@
           <a:solidFill>
             <a:srgbClr val="FFF7ED"/>
           </a:solidFill>
-          <a:ln w="6350">
+          <a:ln w="5080">
             <a:solidFill>
               <a:srgbClr val="FED7AA"/>
             </a:solidFill>
@@ -5245,8 +5245,8 @@
         </p:nvSpPr>
         <p:spPr>
           <a:xfrm>
-            <a:off x="45720" y="384048"/>
-            <a:ext cx="685800" cy="502920"/>
+            <a:off x="36576" y="365760"/>
+            <a:ext cx="502920" cy="475488"/>
           </a:xfrm>
           <a:prstGeom prst="roundRect">
             <a:avLst/>
@@ -5254,7 +5254,7 @@
           <a:solidFill>
             <a:srgbClr val="EA580C"/>
           </a:solidFill>
-          <a:ln w="6350">
+          <a:ln w="5080">
             <a:solidFill>
               <a:srgbClr val="EA580C"/>
             </a:solidFill>
@@ -5291,8 +5291,8 @@
         </p:nvSpPr>
         <p:spPr>
           <a:xfrm>
-            <a:off x="45720" y="384048"/>
-            <a:ext cx="685800" cy="502920"/>
+            <a:off x="36576" y="365760"/>
+            <a:ext cx="502920" cy="475488"/>
           </a:xfrm>
           <a:prstGeom prst="rect">
             <a:avLst/>
@@ -5300,14 +5300,14 @@
           <a:noFill/>
         </p:spPr>
         <p:txBody>
-          <a:bodyPr wrap="square" lIns="20000" rIns="20000" tIns="10000" bIns="10000" anchor="ctr">
+          <a:bodyPr wrap="square" lIns="15000" rIns="15000" tIns="5000" bIns="5000" anchor="ctr">
             <a:spAutoFit/>
           </a:bodyPr>
           <a:lstStyle/>
           <a:p>
             <a:pPr algn="ctr"/>
             <a:r>
-              <a:rPr sz="700" b="1" i="0">
+              <a:rPr sz="600" b="1" i="0">
                 <a:solidFill>
                   <a:srgbClr val="FFFFFF"/>
                 </a:solidFill>
@@ -5318,7 +5318,7 @@
           <a:p>
             <a:pPr algn="ctr"/>
             <a:r>
-              <a:rPr sz="700" b="1" i="0">
+              <a:rPr sz="600" b="1" i="0">
                 <a:solidFill>
                   <a:srgbClr val="FFFFFF"/>
                 </a:solidFill>
@@ -5336,8 +5336,8 @@
         </p:nvSpPr>
         <p:spPr>
           <a:xfrm>
-            <a:off x="749808" y="905256"/>
-            <a:ext cx="8321040" cy="502920"/>
+            <a:off x="557784" y="859536"/>
+            <a:ext cx="5641848" cy="475488"/>
           </a:xfrm>
           <a:prstGeom prst="rect">
             <a:avLst/>
@@ -5345,7 +5345,7 @@
           <a:solidFill>
             <a:srgbClr val="EFF6FF"/>
           </a:solidFill>
-          <a:ln w="6350">
+          <a:ln w="5080">
             <a:solidFill>
               <a:srgbClr val="BFDBFE"/>
             </a:solidFill>
@@ -5382,8 +5382,8 @@
         </p:nvSpPr>
         <p:spPr>
           <a:xfrm>
-            <a:off x="45720" y="905256"/>
-            <a:ext cx="685800" cy="502920"/>
+            <a:off x="36576" y="859536"/>
+            <a:ext cx="502920" cy="475488"/>
           </a:xfrm>
           <a:prstGeom prst="roundRect">
             <a:avLst/>
@@ -5391,7 +5391,7 @@
           <a:solidFill>
             <a:srgbClr val="0078D4"/>
           </a:solidFill>
-          <a:ln w="6350">
+          <a:ln w="5080">
             <a:solidFill>
               <a:srgbClr val="0078D4"/>
             </a:solidFill>
@@ -5428,8 +5428,8 @@
         </p:nvSpPr>
         <p:spPr>
           <a:xfrm>
-            <a:off x="45720" y="905256"/>
-            <a:ext cx="685800" cy="502920"/>
+            <a:off x="36576" y="859536"/>
+            <a:ext cx="502920" cy="475488"/>
           </a:xfrm>
           <a:prstGeom prst="rect">
             <a:avLst/>
@@ -5437,14 +5437,14 @@
           <a:noFill/>
         </p:spPr>
         <p:txBody>
-          <a:bodyPr wrap="square" lIns="20000" rIns="20000" tIns="10000" bIns="10000" anchor="ctr">
+          <a:bodyPr wrap="square" lIns="15000" rIns="15000" tIns="5000" bIns="5000" anchor="ctr">
             <a:spAutoFit/>
           </a:bodyPr>
           <a:lstStyle/>
           <a:p>
             <a:pPr algn="ctr"/>
             <a:r>
-              <a:rPr sz="700" b="1" i="0">
+              <a:rPr sz="600" b="1" i="0">
                 <a:solidFill>
                   <a:srgbClr val="FFFFFF"/>
                 </a:solidFill>
@@ -5455,7 +5455,7 @@
           <a:p>
             <a:pPr algn="ctr"/>
             <a:r>
-              <a:rPr sz="700" b="1" i="0">
+              <a:rPr sz="600" b="1" i="0">
                 <a:solidFill>
                   <a:srgbClr val="FFFFFF"/>
                 </a:solidFill>
@@ -5473,8 +5473,8 @@
         </p:nvSpPr>
         <p:spPr>
           <a:xfrm>
-            <a:off x="749808" y="1426464"/>
-            <a:ext cx="8321040" cy="594360"/>
+            <a:off x="557784" y="1353312"/>
+            <a:ext cx="5641848" cy="566928"/>
           </a:xfrm>
           <a:prstGeom prst="rect">
             <a:avLst/>
@@ -5482,7 +5482,7 @@
           <a:solidFill>
             <a:srgbClr val="FAF5FF"/>
           </a:solidFill>
-          <a:ln w="6350">
+          <a:ln w="5080">
             <a:solidFill>
               <a:srgbClr val="E9D5FF"/>
             </a:solidFill>
@@ -5519,8 +5519,8 @@
         </p:nvSpPr>
         <p:spPr>
           <a:xfrm>
-            <a:off x="45720" y="1426464"/>
-            <a:ext cx="685800" cy="594360"/>
+            <a:off x="36576" y="1353312"/>
+            <a:ext cx="502920" cy="566928"/>
           </a:xfrm>
           <a:prstGeom prst="roundRect">
             <a:avLst/>
@@ -5528,7 +5528,7 @@
           <a:solidFill>
             <a:srgbClr val="742774"/>
           </a:solidFill>
-          <a:ln w="6350">
+          <a:ln w="5080">
             <a:solidFill>
               <a:srgbClr val="742774"/>
             </a:solidFill>
@@ -5565,8 +5565,8 @@
         </p:nvSpPr>
         <p:spPr>
           <a:xfrm>
-            <a:off x="45720" y="1426464"/>
-            <a:ext cx="685800" cy="594360"/>
+            <a:off x="36576" y="1353312"/>
+            <a:ext cx="502920" cy="566928"/>
           </a:xfrm>
           <a:prstGeom prst="rect">
             <a:avLst/>
@@ -5574,14 +5574,14 @@
           <a:noFill/>
         </p:spPr>
         <p:txBody>
-          <a:bodyPr wrap="square" lIns="20000" rIns="20000" tIns="10000" bIns="10000" anchor="ctr">
+          <a:bodyPr wrap="square" lIns="15000" rIns="15000" tIns="5000" bIns="5000" anchor="ctr">
             <a:spAutoFit/>
           </a:bodyPr>
           <a:lstStyle/>
           <a:p>
             <a:pPr algn="ctr"/>
             <a:r>
-              <a:rPr sz="700" b="1" i="0">
+              <a:rPr sz="600" b="1" i="0">
                 <a:solidFill>
                   <a:srgbClr val="FFFFFF"/>
                 </a:solidFill>
@@ -5592,7 +5592,7 @@
           <a:p>
             <a:pPr algn="ctr"/>
             <a:r>
-              <a:rPr sz="700" b="1" i="0">
+              <a:rPr sz="600" b="1" i="0">
                 <a:solidFill>
                   <a:srgbClr val="FFFFFF"/>
                 </a:solidFill>
@@ -5610,8 +5610,8 @@
         </p:nvSpPr>
         <p:spPr>
           <a:xfrm>
-            <a:off x="749808" y="2039112"/>
-            <a:ext cx="8321040" cy="594360"/>
+            <a:off x="557784" y="1938528"/>
+            <a:ext cx="5641848" cy="566928"/>
           </a:xfrm>
           <a:prstGeom prst="rect">
             <a:avLst/>
@@ -5619,7 +5619,7 @@
           <a:solidFill>
             <a:srgbClr val="FAF5FF"/>
           </a:solidFill>
-          <a:ln w="6350">
+          <a:ln w="5080">
             <a:solidFill>
               <a:srgbClr val="E9D5FF"/>
             </a:solidFill>
@@ -5656,8 +5656,8 @@
         </p:nvSpPr>
         <p:spPr>
           <a:xfrm>
-            <a:off x="45720" y="2039112"/>
-            <a:ext cx="685800" cy="594360"/>
+            <a:off x="36576" y="1938528"/>
+            <a:ext cx="502920" cy="566928"/>
           </a:xfrm>
           <a:prstGeom prst="roundRect">
             <a:avLst/>
@@ -5665,7 +5665,7 @@
           <a:solidFill>
             <a:srgbClr val="742774"/>
           </a:solidFill>
-          <a:ln w="6350">
+          <a:ln w="5080">
             <a:solidFill>
               <a:srgbClr val="742774"/>
             </a:solidFill>
@@ -5702,8 +5702,8 @@
         </p:nvSpPr>
         <p:spPr>
           <a:xfrm>
-            <a:off x="45720" y="2039112"/>
-            <a:ext cx="685800" cy="594360"/>
+            <a:off x="36576" y="1938528"/>
+            <a:ext cx="502920" cy="566928"/>
           </a:xfrm>
           <a:prstGeom prst="rect">
             <a:avLst/>
@@ -5711,14 +5711,14 @@
           <a:noFill/>
         </p:spPr>
         <p:txBody>
-          <a:bodyPr wrap="square" lIns="20000" rIns="20000" tIns="10000" bIns="10000" anchor="ctr">
+          <a:bodyPr wrap="square" lIns="15000" rIns="15000" tIns="5000" bIns="5000" anchor="ctr">
             <a:spAutoFit/>
           </a:bodyPr>
           <a:lstStyle/>
           <a:p>
             <a:pPr algn="ctr"/>
             <a:r>
-              <a:rPr sz="700" b="1" i="0">
+              <a:rPr sz="600" b="1" i="0">
                 <a:solidFill>
                   <a:srgbClr val="FFFFFF"/>
                 </a:solidFill>
@@ -5729,7 +5729,7 @@
           <a:p>
             <a:pPr algn="ctr"/>
             <a:r>
-              <a:rPr sz="700" b="1" i="0">
+              <a:rPr sz="600" b="1" i="0">
                 <a:solidFill>
                   <a:srgbClr val="FFFFFF"/>
                 </a:solidFill>
@@ -5747,8 +5747,8 @@
         </p:nvSpPr>
         <p:spPr>
           <a:xfrm>
-            <a:off x="749808" y="2651760"/>
-            <a:ext cx="8321040" cy="914400"/>
+            <a:off x="557784" y="2523744"/>
+            <a:ext cx="5641848" cy="841248"/>
           </a:xfrm>
           <a:prstGeom prst="rect">
             <a:avLst/>
@@ -5756,7 +5756,7 @@
           <a:solidFill>
             <a:srgbClr val="EFF6FF"/>
           </a:solidFill>
-          <a:ln w="6350">
+          <a:ln w="5080">
             <a:solidFill>
               <a:srgbClr val="BFDBFE"/>
             </a:solidFill>
@@ -5793,8 +5793,8 @@
         </p:nvSpPr>
         <p:spPr>
           <a:xfrm>
-            <a:off x="45720" y="2651760"/>
-            <a:ext cx="685800" cy="914400"/>
+            <a:off x="36576" y="2523744"/>
+            <a:ext cx="502920" cy="841248"/>
           </a:xfrm>
           <a:prstGeom prst="roundRect">
             <a:avLst/>
@@ -5802,7 +5802,7 @@
           <a:solidFill>
             <a:srgbClr val="0078D4"/>
           </a:solidFill>
-          <a:ln w="6350">
+          <a:ln w="5080">
             <a:solidFill>
               <a:srgbClr val="0078D4"/>
             </a:solidFill>
@@ -5839,8 +5839,8 @@
         </p:nvSpPr>
         <p:spPr>
           <a:xfrm>
-            <a:off x="45720" y="2651760"/>
-            <a:ext cx="685800" cy="914400"/>
+            <a:off x="36576" y="2523744"/>
+            <a:ext cx="502920" cy="841248"/>
           </a:xfrm>
           <a:prstGeom prst="rect">
             <a:avLst/>
@@ -5848,14 +5848,14 @@
           <a:noFill/>
         </p:spPr>
         <p:txBody>
-          <a:bodyPr wrap="square" lIns="20000" rIns="20000" tIns="10000" bIns="10000" anchor="ctr">
+          <a:bodyPr wrap="square" lIns="15000" rIns="15000" tIns="5000" bIns="5000" anchor="ctr">
             <a:spAutoFit/>
           </a:bodyPr>
           <a:lstStyle/>
           <a:p>
             <a:pPr algn="ctr"/>
             <a:r>
-              <a:rPr sz="700" b="1" i="0">
+              <a:rPr sz="600" b="1" i="0">
                 <a:solidFill>
                   <a:srgbClr val="FFFFFF"/>
                 </a:solidFill>
@@ -5866,7 +5866,7 @@
           <a:p>
             <a:pPr algn="ctr"/>
             <a:r>
-              <a:rPr sz="700" b="1" i="0">
+              <a:rPr sz="600" b="1" i="0">
                 <a:solidFill>
                   <a:srgbClr val="FFFFFF"/>
                 </a:solidFill>
@@ -5884,8 +5884,8 @@
         </p:nvSpPr>
         <p:spPr>
           <a:xfrm>
-            <a:off x="749808" y="3584448"/>
-            <a:ext cx="8321040" cy="502920"/>
+            <a:off x="557784" y="3383280"/>
+            <a:ext cx="5641848" cy="475488"/>
           </a:xfrm>
           <a:prstGeom prst="rect">
             <a:avLst/>
@@ -5893,7 +5893,7 @@
           <a:solidFill>
             <a:srgbClr val="F0FDF4"/>
           </a:solidFill>
-          <a:ln w="6350">
+          <a:ln w="5080">
             <a:solidFill>
               <a:srgbClr val="BBF7D0"/>
             </a:solidFill>
@@ -5930,8 +5930,8 @@
         </p:nvSpPr>
         <p:spPr>
           <a:xfrm>
-            <a:off x="45720" y="3584448"/>
-            <a:ext cx="685800" cy="502920"/>
+            <a:off x="36576" y="3383280"/>
+            <a:ext cx="502920" cy="475488"/>
           </a:xfrm>
           <a:prstGeom prst="roundRect">
             <a:avLst/>
@@ -5939,7 +5939,7 @@
           <a:solidFill>
             <a:srgbClr val="107C10"/>
           </a:solidFill>
-          <a:ln w="6350">
+          <a:ln w="5080">
             <a:solidFill>
               <a:srgbClr val="107C10"/>
             </a:solidFill>
@@ -5976,8 +5976,8 @@
         </p:nvSpPr>
         <p:spPr>
           <a:xfrm>
-            <a:off x="45720" y="3584448"/>
-            <a:ext cx="685800" cy="502920"/>
+            <a:off x="36576" y="3383280"/>
+            <a:ext cx="502920" cy="475488"/>
           </a:xfrm>
           <a:prstGeom prst="rect">
             <a:avLst/>
@@ -5985,14 +5985,14 @@
           <a:noFill/>
         </p:spPr>
         <p:txBody>
-          <a:bodyPr wrap="square" lIns="20000" rIns="20000" tIns="10000" bIns="10000" anchor="ctr">
+          <a:bodyPr wrap="square" lIns="15000" rIns="15000" tIns="5000" bIns="5000" anchor="ctr">
             <a:spAutoFit/>
           </a:bodyPr>
           <a:lstStyle/>
           <a:p>
             <a:pPr algn="ctr"/>
             <a:r>
-              <a:rPr sz="700" b="1" i="0">
+              <a:rPr sz="600" b="1" i="0">
                 <a:solidFill>
                   <a:srgbClr val="FFFFFF"/>
                 </a:solidFill>
@@ -6003,7 +6003,7 @@
           <a:p>
             <a:pPr algn="ctr"/>
             <a:r>
-              <a:rPr sz="700" b="1" i="0">
+              <a:rPr sz="600" b="1" i="0">
                 <a:solidFill>
                   <a:srgbClr val="FFFFFF"/>
                 </a:solidFill>
@@ -6021,8 +6021,8 @@
         </p:nvSpPr>
         <p:spPr>
           <a:xfrm>
-            <a:off x="749808" y="4105656"/>
-            <a:ext cx="8321040" cy="960120"/>
+            <a:off x="557784" y="3877056"/>
+            <a:ext cx="5641848" cy="1097280"/>
           </a:xfrm>
           <a:prstGeom prst="rect">
             <a:avLst/>
@@ -6030,7 +6030,7 @@
           <a:solidFill>
             <a:srgbClr val="FEF3C7"/>
           </a:solidFill>
-          <a:ln w="6350">
+          <a:ln w="5080">
             <a:solidFill>
               <a:srgbClr val="FDE68A"/>
             </a:solidFill>
@@ -6067,8 +6067,8 @@
         </p:nvSpPr>
         <p:spPr>
           <a:xfrm>
-            <a:off x="45720" y="4105656"/>
-            <a:ext cx="685800" cy="960120"/>
+            <a:off x="36576" y="3877056"/>
+            <a:ext cx="502920" cy="1097280"/>
           </a:xfrm>
           <a:prstGeom prst="roundRect">
             <a:avLst/>
@@ -6076,7 +6076,7 @@
           <a:solidFill>
             <a:srgbClr val="D99416"/>
           </a:solidFill>
-          <a:ln w="6350">
+          <a:ln w="5080">
             <a:solidFill>
               <a:srgbClr val="D99416"/>
             </a:solidFill>
@@ -6113,8 +6113,8 @@
         </p:nvSpPr>
         <p:spPr>
           <a:xfrm>
-            <a:off x="45720" y="4105656"/>
-            <a:ext cx="685800" cy="960120"/>
+            <a:off x="36576" y="3877056"/>
+            <a:ext cx="502920" cy="1097280"/>
           </a:xfrm>
           <a:prstGeom prst="rect">
             <a:avLst/>
@@ -6122,14 +6122,14 @@
           <a:noFill/>
         </p:spPr>
         <p:txBody>
-          <a:bodyPr wrap="square" lIns="20000" rIns="20000" tIns="10000" bIns="10000" anchor="ctr">
+          <a:bodyPr wrap="square" lIns="15000" rIns="15000" tIns="5000" bIns="5000" anchor="ctr">
             <a:spAutoFit/>
           </a:bodyPr>
           <a:lstStyle/>
           <a:p>
             <a:pPr algn="ctr"/>
             <a:r>
-              <a:rPr sz="700" b="1" i="0">
+              <a:rPr sz="600" b="1" i="0">
                 <a:solidFill>
                   <a:srgbClr val="FFFFFF"/>
                 </a:solidFill>
@@ -6140,7 +6140,7 @@
           <a:p>
             <a:pPr algn="ctr"/>
             <a:r>
-              <a:rPr sz="700" b="1" i="0">
+              <a:rPr sz="600" b="1" i="0">
                 <a:solidFill>
                   <a:srgbClr val="FFFFFF"/>
                 </a:solidFill>
@@ -6158,8 +6158,8 @@
         </p:nvSpPr>
         <p:spPr>
           <a:xfrm>
-            <a:off x="822960" y="448056"/>
-            <a:ext cx="1188720" cy="384048"/>
+            <a:off x="685800" y="402336"/>
+            <a:ext cx="914400" cy="384048"/>
           </a:xfrm>
           <a:prstGeom prst="roundRect">
             <a:avLst/>
@@ -6204,8 +6204,8 @@
         </p:nvSpPr>
         <p:spPr>
           <a:xfrm>
-            <a:off x="822960" y="448056"/>
-            <a:ext cx="1188720" cy="384048"/>
+            <a:off x="685800" y="402336"/>
+            <a:ext cx="914400" cy="384048"/>
           </a:xfrm>
           <a:prstGeom prst="rect">
             <a:avLst/>
@@ -6213,14 +6213,14 @@
           <a:noFill/>
         </p:spPr>
         <p:txBody>
-          <a:bodyPr wrap="square" lIns="20000" rIns="20000" tIns="15000" bIns="15000" anchor="ctr">
+          <a:bodyPr wrap="square" lIns="10000" rIns="10000" tIns="8000" bIns="8000" anchor="ctr">
             <a:spAutoFit/>
           </a:bodyPr>
           <a:lstStyle/>
           <a:p>
             <a:pPr algn="ctr"/>
             <a:r>
-              <a:rPr sz="1400" b="1">
+              <a:rPr sz="1200" b="1">
                 <a:solidFill>
                   <a:srgbClr val="FFFFFF"/>
                 </a:solidFill>
@@ -6231,7 +6231,7 @@
           <a:p>
             <a:pPr algn="ctr"/>
             <a:r>
-              <a:rPr sz="700" b="1">
+              <a:rPr sz="600" b="1">
                 <a:solidFill>
                   <a:srgbClr val="FFFFFF"/>
                 </a:solidFill>
@@ -6249,8 +6249,8 @@
         </p:nvSpPr>
         <p:spPr>
           <a:xfrm>
-            <a:off x="1280160" y="969264"/>
-            <a:ext cx="1188720" cy="384048"/>
+            <a:off x="960120" y="896112"/>
+            <a:ext cx="1005840" cy="384048"/>
           </a:xfrm>
           <a:prstGeom prst="roundRect">
             <a:avLst/>
@@ -6258,7 +6258,7 @@
           <a:solidFill>
             <a:srgbClr val="DBEAFE"/>
           </a:solidFill>
-          <a:ln w="9525">
+          <a:ln w="6350">
             <a:solidFill>
               <a:srgbClr val="0078D4"/>
             </a:solidFill>
@@ -6295,8 +6295,8 @@
         </p:nvSpPr>
         <p:spPr>
           <a:xfrm>
-            <a:off x="1280160" y="969264"/>
-            <a:ext cx="1188720" cy="384048"/>
+            <a:off x="960120" y="896112"/>
+            <a:ext cx="1005840" cy="384048"/>
           </a:xfrm>
           <a:prstGeom prst="rect">
             <a:avLst/>
@@ -6304,14 +6304,14 @@
           <a:noFill/>
         </p:spPr>
         <p:txBody>
-          <a:bodyPr wrap="square" lIns="20000" rIns="20000" tIns="15000" bIns="15000" anchor="ctr">
+          <a:bodyPr wrap="square" lIns="10000" rIns="10000" tIns="8000" bIns="8000" anchor="ctr">
             <a:spAutoFit/>
           </a:bodyPr>
           <a:lstStyle/>
           <a:p>
             <a:pPr algn="ctr"/>
             <a:r>
-              <a:rPr sz="1400" b="1">
+              <a:rPr sz="1200" b="1">
                 <a:solidFill>
                   <a:srgbClr val="0A2540"/>
                 </a:solidFill>
@@ -6322,7 +6322,7 @@
           <a:p>
             <a:pPr algn="ctr"/>
             <a:r>
-              <a:rPr sz="700" b="1">
+              <a:rPr sz="600" b="1">
                 <a:solidFill>
                   <a:srgbClr val="0A2540"/>
                 </a:solidFill>
@@ -6340,8 +6340,8 @@
         </p:nvSpPr>
         <p:spPr>
           <a:xfrm>
-            <a:off x="2560320" y="969264"/>
-            <a:ext cx="1188720" cy="384048"/>
+            <a:off x="2148840" y="896112"/>
+            <a:ext cx="960120" cy="384048"/>
           </a:xfrm>
           <a:prstGeom prst="roundRect">
             <a:avLst/>
@@ -6349,7 +6349,7 @@
           <a:solidFill>
             <a:srgbClr val="DBEAFE"/>
           </a:solidFill>
-          <a:ln w="9525">
+          <a:ln w="6350">
             <a:solidFill>
               <a:srgbClr val="0078D4"/>
             </a:solidFill>
@@ -6386,8 +6386,8 @@
         </p:nvSpPr>
         <p:spPr>
           <a:xfrm>
-            <a:off x="2560320" y="969264"/>
-            <a:ext cx="1188720" cy="384048"/>
+            <a:off x="2148840" y="896112"/>
+            <a:ext cx="960120" cy="384048"/>
           </a:xfrm>
           <a:prstGeom prst="rect">
             <a:avLst/>
@@ -6395,14 +6395,14 @@
           <a:noFill/>
         </p:spPr>
         <p:txBody>
-          <a:bodyPr wrap="square" lIns="20000" rIns="20000" tIns="15000" bIns="15000" anchor="ctr">
+          <a:bodyPr wrap="square" lIns="10000" rIns="10000" tIns="8000" bIns="8000" anchor="ctr">
             <a:spAutoFit/>
           </a:bodyPr>
           <a:lstStyle/>
           <a:p>
             <a:pPr algn="ctr"/>
             <a:r>
-              <a:rPr sz="1400" b="1">
+              <a:rPr sz="1200" b="1">
                 <a:solidFill>
                   <a:srgbClr val="0A2540"/>
                 </a:solidFill>
@@ -6413,7 +6413,7 @@
           <a:p>
             <a:pPr algn="ctr"/>
             <a:r>
-              <a:rPr sz="700" b="1">
+              <a:rPr sz="600" b="1">
                 <a:solidFill>
                   <a:srgbClr val="0A2540"/>
                 </a:solidFill>
@@ -6431,190 +6431,8 @@
         </p:nvSpPr>
         <p:spPr>
           <a:xfrm>
-            <a:off x="2560320" y="1508760"/>
-            <a:ext cx="1188720" cy="457200"/>
-          </a:xfrm>
-          <a:prstGeom prst="roundRect">
-            <a:avLst/>
-          </a:prstGeom>
-          <a:solidFill>
-            <a:srgbClr val="EDE4F5"/>
-          </a:solidFill>
-          <a:ln w="12700">
-            <a:solidFill>
-              <a:srgbClr val="742774"/>
-            </a:solidFill>
-          </a:ln>
-          <a:effectLst/>
-        </p:spPr>
-        <p:style>
-          <a:lnRef idx="1">
-            <a:schemeClr val="accent1"/>
-          </a:lnRef>
-          <a:fillRef idx="3">
-            <a:schemeClr val="accent1"/>
-          </a:fillRef>
-          <a:effectRef idx="2">
-            <a:schemeClr val="accent1"/>
-          </a:effectRef>
-          <a:fontRef idx="minor">
-            <a:schemeClr val="lt1"/>
-          </a:fontRef>
-        </p:style>
-        <p:txBody>
-          <a:bodyPr rtlCol="0" anchor="ctr"/>
-          <a:lstStyle/>
-          <a:p>
-            <a:pPr algn="ctr"/>
-          </a:p>
-        </p:txBody>
-      </p:sp>
-      <p:sp>
-        <p:nvSpPr>
-          <p:cNvPr id="32" name="TextBox 31"/>
-          <p:cNvSpPr txBox="1"/>
-          <p:nvPr/>
-        </p:nvSpPr>
-        <p:spPr>
-          <a:xfrm>
-            <a:off x="2560320" y="1508760"/>
-            <a:ext cx="1188720" cy="457200"/>
-          </a:xfrm>
-          <a:prstGeom prst="rect">
-            <a:avLst/>
-          </a:prstGeom>
-          <a:noFill/>
-        </p:spPr>
-        <p:txBody>
-          <a:bodyPr wrap="square" lIns="20000" rIns="20000" tIns="15000" bIns="15000" anchor="ctr">
-            <a:spAutoFit/>
-          </a:bodyPr>
-          <a:lstStyle/>
-          <a:p>
-            <a:pPr algn="ctr"/>
-            <a:r>
-              <a:rPr sz="1400" b="1">
-                <a:solidFill>
-                  <a:srgbClr val="3D2C70"/>
-                </a:solidFill>
-              </a:rPr>
-              <a:t>4</a:t>
-            </a:r>
-          </a:p>
-          <a:p>
-            <a:pPr algn="ctr"/>
-            <a:r>
-              <a:rPr sz="700" b="1">
-                <a:solidFill>
-                  <a:srgbClr val="3D2C70"/>
-                </a:solidFill>
-              </a:rPr>
-              <a:t>Intake Agent (AI)</a:t>
-            </a:r>
-          </a:p>
-        </p:txBody>
-      </p:sp>
-      <p:sp>
-        <p:nvSpPr>
-          <p:cNvPr id="33" name="Rounded Rectangle 32"/>
-          <p:cNvSpPr/>
-          <p:nvPr/>
-        </p:nvSpPr>
-        <p:spPr>
-          <a:xfrm>
-            <a:off x="6766560" y="1508760"/>
-            <a:ext cx="1645920" cy="457200"/>
-          </a:xfrm>
-          <a:prstGeom prst="roundRect">
-            <a:avLst/>
-          </a:prstGeom>
-          <a:solidFill>
-            <a:srgbClr val="EDE4F5"/>
-          </a:solidFill>
-          <a:ln w="12700">
-            <a:solidFill>
-              <a:srgbClr val="742774"/>
-            </a:solidFill>
-          </a:ln>
-          <a:effectLst/>
-        </p:spPr>
-        <p:style>
-          <a:lnRef idx="1">
-            <a:schemeClr val="accent1"/>
-          </a:lnRef>
-          <a:fillRef idx="3">
-            <a:schemeClr val="accent1"/>
-          </a:fillRef>
-          <a:effectRef idx="2">
-            <a:schemeClr val="accent1"/>
-          </a:effectRef>
-          <a:fontRef idx="minor">
-            <a:schemeClr val="lt1"/>
-          </a:fontRef>
-        </p:style>
-        <p:txBody>
-          <a:bodyPr rtlCol="0" anchor="ctr"/>
-          <a:lstStyle/>
-          <a:p>
-            <a:pPr algn="ctr"/>
-          </a:p>
-        </p:txBody>
-      </p:sp>
-      <p:sp>
-        <p:nvSpPr>
-          <p:cNvPr id="34" name="TextBox 33"/>
-          <p:cNvSpPr txBox="1"/>
-          <p:nvPr/>
-        </p:nvSpPr>
-        <p:spPr>
-          <a:xfrm>
-            <a:off x="6766560" y="1508760"/>
-            <a:ext cx="1645920" cy="457200"/>
-          </a:xfrm>
-          <a:prstGeom prst="rect">
-            <a:avLst/>
-          </a:prstGeom>
-          <a:noFill/>
-        </p:spPr>
-        <p:txBody>
-          <a:bodyPr wrap="square" lIns="20000" rIns="20000" tIns="15000" bIns="15000" anchor="ctr">
-            <a:spAutoFit/>
-          </a:bodyPr>
-          <a:lstStyle/>
-          <a:p>
-            <a:pPr algn="ctr"/>
-            <a:r>
-              <a:rPr sz="1400" b="1">
-                <a:solidFill>
-                  <a:srgbClr val="3D2C70"/>
-                </a:solidFill>
-              </a:rPr>
-              <a:t>12</a:t>
-            </a:r>
-          </a:p>
-          <a:p>
-            <a:pPr algn="ctr"/>
-            <a:r>
-              <a:rPr sz="700" b="1">
-                <a:solidFill>
-                  <a:srgbClr val="3D2C70"/>
-                </a:solidFill>
-              </a:rPr>
-              <a:t>Explanation Agent (AI — NOT CSR)</a:t>
-            </a:r>
-          </a:p>
-        </p:txBody>
-      </p:sp>
-      <p:sp>
-        <p:nvSpPr>
-          <p:cNvPr id="35" name="Rounded Rectangle 34"/>
-          <p:cNvSpPr/>
-          <p:nvPr/>
-        </p:nvSpPr>
-        <p:spPr>
-          <a:xfrm>
-            <a:off x="3017520" y="2103120"/>
-            <a:ext cx="1051560" cy="457200"/>
+            <a:off x="2148840" y="1417320"/>
+            <a:ext cx="1051560" cy="438912"/>
           </a:xfrm>
           <a:prstGeom prst="roundRect">
             <a:avLst/>
@@ -6653,14 +6471,14 @@
       </p:sp>
       <p:sp>
         <p:nvSpPr>
-          <p:cNvPr id="36" name="TextBox 35"/>
+          <p:cNvPr id="32" name="TextBox 31"/>
           <p:cNvSpPr txBox="1"/>
           <p:nvPr/>
         </p:nvSpPr>
         <p:spPr>
           <a:xfrm>
-            <a:off x="3017520" y="2103120"/>
-            <a:ext cx="1051560" cy="457200"/>
+            <a:off x="2148840" y="1417320"/>
+            <a:ext cx="1051560" cy="438912"/>
           </a:xfrm>
           <a:prstGeom prst="rect">
             <a:avLst/>
@@ -6668,44 +6486,44 @@
           <a:noFill/>
         </p:spPr>
         <p:txBody>
-          <a:bodyPr wrap="square" lIns="20000" rIns="20000" tIns="15000" bIns="15000" anchor="ctr">
+          <a:bodyPr wrap="square" lIns="10000" rIns="10000" tIns="8000" bIns="8000" anchor="ctr">
             <a:spAutoFit/>
           </a:bodyPr>
           <a:lstStyle/>
           <a:p>
             <a:pPr algn="ctr"/>
             <a:r>
-              <a:rPr sz="1400" b="1">
+              <a:rPr sz="1200" b="1">
                 <a:solidFill>
                   <a:srgbClr val="3D2C70"/>
                 </a:solidFill>
               </a:rPr>
-              <a:t>5</a:t>
+              <a:t>4</a:t>
             </a:r>
           </a:p>
           <a:p>
             <a:pPr algn="ctr"/>
             <a:r>
-              <a:rPr sz="700" b="1">
+              <a:rPr sz="600" b="1">
                 <a:solidFill>
                   <a:srgbClr val="3D2C70"/>
                 </a:solidFill>
               </a:rPr>
-              <a:t>Create_Claim</a:t>
-            </a:r>
-          </a:p>
-        </p:txBody>
-      </p:sp>
-      <p:sp>
-        <p:nvSpPr>
-          <p:cNvPr id="37" name="Rounded Rectangle 36"/>
+              <a:t>Intake Agent (AI)</a:t>
+            </a:r>
+          </a:p>
+        </p:txBody>
+      </p:sp>
+      <p:sp>
+        <p:nvSpPr>
+          <p:cNvPr id="33" name="Rounded Rectangle 32"/>
           <p:cNvSpPr/>
           <p:nvPr/>
         </p:nvSpPr>
         <p:spPr>
           <a:xfrm>
-            <a:off x="4160520" y="2103120"/>
-            <a:ext cx="1280160" cy="457200"/>
+            <a:off x="5029200" y="1417320"/>
+            <a:ext cx="1143000" cy="438912"/>
           </a:xfrm>
           <a:prstGeom prst="roundRect">
             <a:avLst/>
@@ -6713,7 +6531,7 @@
           <a:solidFill>
             <a:srgbClr val="EDE4F5"/>
           </a:solidFill>
-          <a:ln w="12700">
+          <a:ln w="9525">
             <a:solidFill>
               <a:srgbClr val="742774"/>
             </a:solidFill>
@@ -6744,14 +6562,14 @@
       </p:sp>
       <p:sp>
         <p:nvSpPr>
-          <p:cNvPr id="38" name="TextBox 37"/>
+          <p:cNvPr id="34" name="TextBox 33"/>
           <p:cNvSpPr txBox="1"/>
           <p:nvPr/>
         </p:nvSpPr>
         <p:spPr>
           <a:xfrm>
-            <a:off x="4160520" y="2103120"/>
-            <a:ext cx="1280160" cy="457200"/>
+            <a:off x="5029200" y="1417320"/>
+            <a:ext cx="1143000" cy="438912"/>
           </a:xfrm>
           <a:prstGeom prst="rect">
             <a:avLst/>
@@ -6759,54 +6577,54 @@
           <a:noFill/>
         </p:spPr>
         <p:txBody>
-          <a:bodyPr wrap="square" lIns="20000" rIns="20000" tIns="15000" bIns="15000" anchor="ctr">
+          <a:bodyPr wrap="square" lIns="10000" rIns="10000" tIns="8000" bIns="8000" anchor="ctr">
             <a:spAutoFit/>
           </a:bodyPr>
           <a:lstStyle/>
           <a:p>
             <a:pPr algn="ctr"/>
             <a:r>
-              <a:rPr sz="1400" b="1">
+              <a:rPr sz="1200" b="1">
                 <a:solidFill>
                   <a:srgbClr val="3D2C70"/>
                 </a:solidFill>
               </a:rPr>
-              <a:t>6</a:t>
+              <a:t>12</a:t>
             </a:r>
           </a:p>
           <a:p>
             <a:pPr algn="ctr"/>
             <a:r>
-              <a:rPr sz="700" b="1">
+              <a:rPr sz="600" b="1">
                 <a:solidFill>
                   <a:srgbClr val="3D2C70"/>
                 </a:solidFill>
               </a:rPr>
-              <a:t>Master Orchestration</a:t>
-            </a:r>
-          </a:p>
-        </p:txBody>
-      </p:sp>
-      <p:sp>
-        <p:nvSpPr>
-          <p:cNvPr id="39" name="Diamond 38"/>
+              <a:t>Explanation Agent (AI — NOT CSR)</a:t>
+            </a:r>
+          </a:p>
+        </p:txBody>
+      </p:sp>
+      <p:sp>
+        <p:nvSpPr>
+          <p:cNvPr id="35" name="Rounded Rectangle 34"/>
           <p:cNvSpPr/>
           <p:nvPr/>
         </p:nvSpPr>
         <p:spPr>
           <a:xfrm>
-            <a:off x="5760720" y="2103120"/>
-            <a:ext cx="822960" cy="502920"/>
-          </a:xfrm>
-          <a:prstGeom prst="diamond">
+            <a:off x="2377440" y="2011680"/>
+            <a:ext cx="777240" cy="438912"/>
+          </a:xfrm>
+          <a:prstGeom prst="roundRect">
             <a:avLst/>
           </a:prstGeom>
           <a:solidFill>
-            <a:srgbClr val="FFFFFF"/>
+            <a:srgbClr val="EDE4F5"/>
           </a:solidFill>
-          <a:ln w="19050">
+          <a:ln w="6350">
             <a:solidFill>
-              <a:srgbClr val="107C10"/>
+              <a:srgbClr val="742774"/>
             </a:solidFill>
           </a:ln>
           <a:effectLst/>
@@ -6835,14 +6653,14 @@
       </p:sp>
       <p:sp>
         <p:nvSpPr>
-          <p:cNvPr id="40" name="TextBox 39"/>
+          <p:cNvPr id="36" name="TextBox 35"/>
           <p:cNvSpPr txBox="1"/>
           <p:nvPr/>
         </p:nvSpPr>
         <p:spPr>
           <a:xfrm>
-            <a:off x="5760720" y="2121408"/>
-            <a:ext cx="822960" cy="457200"/>
+            <a:off x="2377440" y="2011680"/>
+            <a:ext cx="777240" cy="438912"/>
           </a:xfrm>
           <a:prstGeom prst="rect">
             <a:avLst/>
@@ -6850,50 +6668,141 @@
           <a:noFill/>
         </p:spPr>
         <p:txBody>
-          <a:bodyPr wrap="square" lIns="20000" rIns="20000" tIns="10000" bIns="10000" anchor="ctr">
+          <a:bodyPr wrap="square" lIns="10000" rIns="10000" tIns="8000" bIns="8000" anchor="ctr">
             <a:spAutoFit/>
           </a:bodyPr>
           <a:lstStyle/>
           <a:p>
             <a:pPr algn="ctr"/>
             <a:r>
-              <a:rPr sz="800" b="1" i="0">
-                <a:solidFill>
-                  <a:srgbClr val="0E3A0E"/>
-                </a:solidFill>
-              </a:rPr>
-              <a:t>11</a:t>
+              <a:rPr sz="1200" b="1">
+                <a:solidFill>
+                  <a:srgbClr val="3D2C70"/>
+                </a:solidFill>
+              </a:rPr>
+              <a:t>5</a:t>
             </a:r>
           </a:p>
           <a:p>
             <a:pPr algn="ctr"/>
             <a:r>
-              <a:rPr sz="800" b="1" i="0">
-                <a:solidFill>
-                  <a:srgbClr val="0E3A0E"/>
-                </a:solidFill>
-              </a:rPr>
-              <a:t>Tier Router</a:t>
-            </a:r>
-          </a:p>
-        </p:txBody>
-      </p:sp>
-      <p:sp>
-        <p:nvSpPr>
-          <p:cNvPr id="41" name="Rounded Rectangle 40"/>
+              <a:rPr sz="600" b="1">
+                <a:solidFill>
+                  <a:srgbClr val="3D2C70"/>
+                </a:solidFill>
+              </a:rPr>
+              <a:t>Create_Claim</a:t>
+            </a:r>
+          </a:p>
+        </p:txBody>
+      </p:sp>
+      <p:sp>
+        <p:nvSpPr>
+          <p:cNvPr id="37" name="Rounded Rectangle 36"/>
           <p:cNvSpPr/>
           <p:nvPr/>
         </p:nvSpPr>
         <p:spPr>
           <a:xfrm>
-            <a:off x="6766560" y="2103120"/>
-            <a:ext cx="1280160" cy="457200"/>
+            <a:off x="3246120" y="2011680"/>
+            <a:ext cx="960120" cy="438912"/>
           </a:xfrm>
           <a:prstGeom prst="roundRect">
             <a:avLst/>
           </a:prstGeom>
           <a:solidFill>
-            <a:srgbClr val="DCFCE7"/>
+            <a:srgbClr val="EDE4F5"/>
+          </a:solidFill>
+          <a:ln w="9525">
+            <a:solidFill>
+              <a:srgbClr val="742774"/>
+            </a:solidFill>
+          </a:ln>
+          <a:effectLst/>
+        </p:spPr>
+        <p:style>
+          <a:lnRef idx="1">
+            <a:schemeClr val="accent1"/>
+          </a:lnRef>
+          <a:fillRef idx="3">
+            <a:schemeClr val="accent1"/>
+          </a:fillRef>
+          <a:effectRef idx="2">
+            <a:schemeClr val="accent1"/>
+          </a:effectRef>
+          <a:fontRef idx="minor">
+            <a:schemeClr val="lt1"/>
+          </a:fontRef>
+        </p:style>
+        <p:txBody>
+          <a:bodyPr rtlCol="0" anchor="ctr"/>
+          <a:lstStyle/>
+          <a:p>
+            <a:pPr algn="ctr"/>
+          </a:p>
+        </p:txBody>
+      </p:sp>
+      <p:sp>
+        <p:nvSpPr>
+          <p:cNvPr id="38" name="TextBox 37"/>
+          <p:cNvSpPr txBox="1"/>
+          <p:nvPr/>
+        </p:nvSpPr>
+        <p:spPr>
+          <a:xfrm>
+            <a:off x="3246120" y="2011680"/>
+            <a:ext cx="960120" cy="438912"/>
+          </a:xfrm>
+          <a:prstGeom prst="rect">
+            <a:avLst/>
+          </a:prstGeom>
+          <a:noFill/>
+        </p:spPr>
+        <p:txBody>
+          <a:bodyPr wrap="square" lIns="10000" rIns="10000" tIns="8000" bIns="8000" anchor="ctr">
+            <a:spAutoFit/>
+          </a:bodyPr>
+          <a:lstStyle/>
+          <a:p>
+            <a:pPr algn="ctr"/>
+            <a:r>
+              <a:rPr sz="1200" b="1">
+                <a:solidFill>
+                  <a:srgbClr val="3D2C70"/>
+                </a:solidFill>
+              </a:rPr>
+              <a:t>6</a:t>
+            </a:r>
+          </a:p>
+          <a:p>
+            <a:pPr algn="ctr"/>
+            <a:r>
+              <a:rPr sz="600" b="1">
+                <a:solidFill>
+                  <a:srgbClr val="3D2C70"/>
+                </a:solidFill>
+              </a:rPr>
+              <a:t>Master Orchestration</a:t>
+            </a:r>
+          </a:p>
+        </p:txBody>
+      </p:sp>
+      <p:sp>
+        <p:nvSpPr>
+          <p:cNvPr id="39" name="Diamond 38"/>
+          <p:cNvSpPr/>
+          <p:nvPr/>
+        </p:nvSpPr>
+        <p:spPr>
+          <a:xfrm>
+            <a:off x="4297680" y="2011680"/>
+            <a:ext cx="685800" cy="438912"/>
+          </a:xfrm>
+          <a:prstGeom prst="diamond">
+            <a:avLst/>
+          </a:prstGeom>
+          <a:solidFill>
+            <a:srgbClr val="FFFFFF"/>
           </a:solidFill>
           <a:ln w="12700">
             <a:solidFill>
@@ -6926,14 +6835,105 @@
       </p:sp>
       <p:sp>
         <p:nvSpPr>
+          <p:cNvPr id="40" name="TextBox 39"/>
+          <p:cNvSpPr txBox="1"/>
+          <p:nvPr/>
+        </p:nvSpPr>
+        <p:spPr>
+          <a:xfrm>
+            <a:off x="4297680" y="2029968"/>
+            <a:ext cx="685800" cy="402336"/>
+          </a:xfrm>
+          <a:prstGeom prst="rect">
+            <a:avLst/>
+          </a:prstGeom>
+          <a:noFill/>
+        </p:spPr>
+        <p:txBody>
+          <a:bodyPr wrap="square" lIns="15000" rIns="15000" tIns="5000" bIns="5000" anchor="ctr">
+            <a:spAutoFit/>
+          </a:bodyPr>
+          <a:lstStyle/>
+          <a:p>
+            <a:pPr algn="ctr"/>
+            <a:r>
+              <a:rPr sz="700" b="1" i="0">
+                <a:solidFill>
+                  <a:srgbClr val="0E3A0E"/>
+                </a:solidFill>
+              </a:rPr>
+              <a:t>11</a:t>
+            </a:r>
+          </a:p>
+          <a:p>
+            <a:pPr algn="ctr"/>
+            <a:r>
+              <a:rPr sz="700" b="1" i="0">
+                <a:solidFill>
+                  <a:srgbClr val="0E3A0E"/>
+                </a:solidFill>
+              </a:rPr>
+              <a:t>Router</a:t>
+            </a:r>
+          </a:p>
+        </p:txBody>
+      </p:sp>
+      <p:sp>
+        <p:nvSpPr>
+          <p:cNvPr id="41" name="Rounded Rectangle 40"/>
+          <p:cNvSpPr/>
+          <p:nvPr/>
+        </p:nvSpPr>
+        <p:spPr>
+          <a:xfrm>
+            <a:off x="5074920" y="2011680"/>
+            <a:ext cx="1005840" cy="438912"/>
+          </a:xfrm>
+          <a:prstGeom prst="roundRect">
+            <a:avLst/>
+          </a:prstGeom>
+          <a:solidFill>
+            <a:srgbClr val="DCFCE7"/>
+          </a:solidFill>
+          <a:ln w="9525">
+            <a:solidFill>
+              <a:srgbClr val="107C10"/>
+            </a:solidFill>
+          </a:ln>
+          <a:effectLst/>
+        </p:spPr>
+        <p:style>
+          <a:lnRef idx="1">
+            <a:schemeClr val="accent1"/>
+          </a:lnRef>
+          <a:fillRef idx="3">
+            <a:schemeClr val="accent1"/>
+          </a:fillRef>
+          <a:effectRef idx="2">
+            <a:schemeClr val="accent1"/>
+          </a:effectRef>
+          <a:fontRef idx="minor">
+            <a:schemeClr val="lt1"/>
+          </a:fontRef>
+        </p:style>
+        <p:txBody>
+          <a:bodyPr rtlCol="0" anchor="ctr"/>
+          <a:lstStyle/>
+          <a:p>
+            <a:pPr algn="ctr"/>
+          </a:p>
+        </p:txBody>
+      </p:sp>
+      <p:sp>
+        <p:nvSpPr>
           <p:cNvPr id="42" name="TextBox 41"/>
           <p:cNvSpPr txBox="1"/>
           <p:nvPr/>
         </p:nvSpPr>
         <p:spPr>
           <a:xfrm>
-            <a:off x="6766560" y="2103120"/>
-            <a:ext cx="1280160" cy="457200"/>
+            <a:off x="5074920" y="2011680"/>
+            <a:ext cx="1005840" cy="438912"/>
           </a:xfrm>
           <a:prstGeom prst="rect">
             <a:avLst/>
@@ -6941,14 +6941,14 @@
           <a:noFill/>
         </p:spPr>
         <p:txBody>
-          <a:bodyPr wrap="square" lIns="20000" rIns="20000" tIns="15000" bIns="15000" anchor="ctr">
+          <a:bodyPr wrap="square" lIns="10000" rIns="10000" tIns="8000" bIns="8000" anchor="ctr">
             <a:spAutoFit/>
           </a:bodyPr>
           <a:lstStyle/>
           <a:p>
             <a:pPr algn="ctr"/>
             <a:r>
-              <a:rPr sz="1400" b="1">
+              <a:rPr sz="1200" b="1">
                 <a:solidFill>
                   <a:srgbClr val="0E3A0E"/>
                 </a:solidFill>
@@ -6959,7 +6959,7 @@
           <a:p>
             <a:pPr algn="ctr"/>
             <a:r>
-              <a:rPr sz="700" b="1">
+              <a:rPr sz="600" b="1">
                 <a:solidFill>
                   <a:srgbClr val="0E3A0E"/>
                 </a:solidFill>
@@ -6977,8 +6977,8 @@
         </p:nvSpPr>
         <p:spPr>
           <a:xfrm>
-            <a:off x="3017520" y="2715768"/>
-            <a:ext cx="1645920" cy="246888"/>
+            <a:off x="2377440" y="2578608"/>
+            <a:ext cx="1371600" cy="219456"/>
           </a:xfrm>
           <a:prstGeom prst="roundRect">
             <a:avLst/>
@@ -7023,8 +7023,8 @@
         </p:nvSpPr>
         <p:spPr>
           <a:xfrm>
-            <a:off x="3017520" y="2715768"/>
-            <a:ext cx="1645920" cy="246888"/>
+            <a:off x="2377440" y="2578608"/>
+            <a:ext cx="1371600" cy="219456"/>
           </a:xfrm>
           <a:prstGeom prst="rect">
             <a:avLst/>
@@ -7032,14 +7032,14 @@
           <a:noFill/>
         </p:spPr>
         <p:txBody>
-          <a:bodyPr wrap="square" lIns="20000" rIns="20000" tIns="10000" bIns="10000" anchor="ctr">
+          <a:bodyPr wrap="square" lIns="15000" rIns="15000" tIns="5000" bIns="5000" anchor="ctr">
             <a:spAutoFit/>
           </a:bodyPr>
           <a:lstStyle/>
           <a:p>
             <a:pPr algn="ctr"/>
             <a:r>
-              <a:rPr sz="800" b="1" i="0">
+              <a:rPr sz="700" b="1" i="0">
                 <a:solidFill>
                   <a:srgbClr val="0A2540"/>
                 </a:solidFill>
@@ -7057,8 +7057,8 @@
         </p:nvSpPr>
         <p:spPr>
           <a:xfrm>
-            <a:off x="3017520" y="2990088"/>
-            <a:ext cx="1645920" cy="246888"/>
+            <a:off x="2377440" y="2816352"/>
+            <a:ext cx="1371600" cy="219456"/>
           </a:xfrm>
           <a:prstGeom prst="roundRect">
             <a:avLst/>
@@ -7103,8 +7103,8 @@
         </p:nvSpPr>
         <p:spPr>
           <a:xfrm>
-            <a:off x="3017520" y="2990088"/>
-            <a:ext cx="1645920" cy="246888"/>
+            <a:off x="2377440" y="2816352"/>
+            <a:ext cx="1371600" cy="219456"/>
           </a:xfrm>
           <a:prstGeom prst="rect">
             <a:avLst/>
@@ -7112,14 +7112,14 @@
           <a:noFill/>
         </p:spPr>
         <p:txBody>
-          <a:bodyPr wrap="square" lIns="20000" rIns="20000" tIns="10000" bIns="10000" anchor="ctr">
+          <a:bodyPr wrap="square" lIns="15000" rIns="15000" tIns="5000" bIns="5000" anchor="ctr">
             <a:spAutoFit/>
           </a:bodyPr>
           <a:lstStyle/>
           <a:p>
             <a:pPr algn="ctr"/>
             <a:r>
-              <a:rPr sz="800" b="1" i="0">
+              <a:rPr sz="700" b="1" i="0">
                 <a:solidFill>
                   <a:srgbClr val="0A2540"/>
                 </a:solidFill>
@@ -7137,8 +7137,8 @@
         </p:nvSpPr>
         <p:spPr>
           <a:xfrm>
-            <a:off x="3017520" y="3264408"/>
-            <a:ext cx="1645920" cy="246888"/>
+            <a:off x="2377440" y="3054096"/>
+            <a:ext cx="1371600" cy="219456"/>
           </a:xfrm>
           <a:prstGeom prst="roundRect">
             <a:avLst/>
@@ -7183,8 +7183,8 @@
         </p:nvSpPr>
         <p:spPr>
           <a:xfrm>
-            <a:off x="3017520" y="3264408"/>
-            <a:ext cx="1645920" cy="246888"/>
+            <a:off x="2377440" y="3054096"/>
+            <a:ext cx="1371600" cy="219456"/>
           </a:xfrm>
           <a:prstGeom prst="rect">
             <a:avLst/>
@@ -7192,14 +7192,14 @@
           <a:noFill/>
         </p:spPr>
         <p:txBody>
-          <a:bodyPr wrap="square" lIns="20000" rIns="20000" tIns="10000" bIns="10000" anchor="ctr">
+          <a:bodyPr wrap="square" lIns="15000" rIns="15000" tIns="5000" bIns="5000" anchor="ctr">
             <a:spAutoFit/>
           </a:bodyPr>
           <a:lstStyle/>
           <a:p>
             <a:pPr algn="ctr"/>
             <a:r>
-              <a:rPr sz="700" b="1" i="0">
+              <a:rPr sz="600" b="1" i="0">
                 <a:solidFill>
                   <a:srgbClr val="0A2540"/>
                 </a:solidFill>
@@ -7217,8 +7217,8 @@
         </p:nvSpPr>
         <p:spPr>
           <a:xfrm>
-            <a:off x="4846320" y="2834640"/>
-            <a:ext cx="1737360" cy="594360"/>
+            <a:off x="3931920" y="2743200"/>
+            <a:ext cx="1371600" cy="502920"/>
           </a:xfrm>
           <a:prstGeom prst="roundRect">
             <a:avLst/>
@@ -7226,7 +7226,7 @@
           <a:solidFill>
             <a:srgbClr val="0A2540"/>
           </a:solidFill>
-          <a:ln w="19050">
+          <a:ln w="12700">
             <a:solidFill>
               <a:srgbClr val="0A2540"/>
             </a:solidFill>
@@ -7263,8 +7263,8 @@
         </p:nvSpPr>
         <p:spPr>
           <a:xfrm>
-            <a:off x="4846320" y="2834640"/>
-            <a:ext cx="1737360" cy="594360"/>
+            <a:off x="3931920" y="2743200"/>
+            <a:ext cx="1371600" cy="502920"/>
           </a:xfrm>
           <a:prstGeom prst="rect">
             <a:avLst/>
@@ -7272,14 +7272,14 @@
           <a:noFill/>
         </p:spPr>
         <p:txBody>
-          <a:bodyPr wrap="square" lIns="20000" rIns="20000" tIns="15000" bIns="15000" anchor="ctr">
+          <a:bodyPr wrap="square" lIns="10000" rIns="10000" tIns="8000" bIns="8000" anchor="ctr">
             <a:spAutoFit/>
           </a:bodyPr>
           <a:lstStyle/>
           <a:p>
             <a:pPr algn="ctr"/>
             <a:r>
-              <a:rPr sz="1400" b="1">
+              <a:rPr sz="1200" b="1">
                 <a:solidFill>
                   <a:srgbClr val="FFFFFF"/>
                 </a:solidFill>
@@ -7290,12 +7290,12 @@
           <a:p>
             <a:pPr algn="ctr"/>
             <a:r>
-              <a:rPr sz="700" b="1">
+              <a:rPr sz="600" b="1">
                 <a:solidFill>
                   <a:srgbClr val="FFFFFF"/>
                 </a:solidFill>
               </a:rPr>
-              <a:t>Adjudication  ·  GPT-4.1</a:t>
+              <a:t>Adjudication · GPT-4.1</a:t>
             </a:r>
           </a:p>
         </p:txBody>
@@ -7308,8 +7308,8 @@
         </p:nvSpPr>
         <p:spPr>
           <a:xfrm>
-            <a:off x="5943600" y="3630168"/>
-            <a:ext cx="1188720" cy="182880"/>
+            <a:off x="3931920" y="3438144"/>
+            <a:ext cx="1097280" cy="182880"/>
           </a:xfrm>
           <a:prstGeom prst="roundRect">
             <a:avLst/>
@@ -7354,8 +7354,8 @@
         </p:nvSpPr>
         <p:spPr>
           <a:xfrm>
-            <a:off x="5943600" y="3630168"/>
-            <a:ext cx="1188720" cy="182880"/>
+            <a:off x="3931920" y="3438144"/>
+            <a:ext cx="1097280" cy="182880"/>
           </a:xfrm>
           <a:prstGeom prst="rect">
             <a:avLst/>
@@ -7363,7 +7363,7 @@
           <a:noFill/>
         </p:spPr>
         <p:txBody>
-          <a:bodyPr wrap="square" lIns="20000" rIns="20000" tIns="10000" bIns="10000" anchor="ctr">
+          <a:bodyPr wrap="square" lIns="15000" rIns="15000" tIns="5000" bIns="5000" anchor="ctr">
             <a:spAutoFit/>
           </a:bodyPr>
           <a:lstStyle/>
@@ -7375,7 +7375,7 @@
                   <a:srgbClr val="92400E"/>
                 </a:solidFill>
               </a:rPr>
-              <a:t>T2 · Adjuster Teams Card (back-office human)</a:t>
+              <a:t>T2 · Adjuster Teams Card</a:t>
             </a:r>
           </a:p>
         </p:txBody>
@@ -7388,8 +7388,8 @@
         </p:nvSpPr>
         <p:spPr>
           <a:xfrm>
-            <a:off x="7223760" y="3630168"/>
-            <a:ext cx="1188720" cy="182880"/>
+            <a:off x="5074920" y="3438144"/>
+            <a:ext cx="1097280" cy="182880"/>
           </a:xfrm>
           <a:prstGeom prst="roundRect">
             <a:avLst/>
@@ -7434,8 +7434,8 @@
         </p:nvSpPr>
         <p:spPr>
           <a:xfrm>
-            <a:off x="7223760" y="3630168"/>
-            <a:ext cx="1188720" cy="182880"/>
+            <a:off x="5074920" y="3438144"/>
+            <a:ext cx="1097280" cy="182880"/>
           </a:xfrm>
           <a:prstGeom prst="rect">
             <a:avLst/>
@@ -7443,7 +7443,7 @@
           <a:noFill/>
         </p:spPr>
         <p:txBody>
-          <a:bodyPr wrap="square" lIns="20000" rIns="20000" tIns="10000" bIns="10000" anchor="ctr">
+          <a:bodyPr wrap="square" lIns="15000" rIns="15000" tIns="5000" bIns="5000" anchor="ctr">
             <a:spAutoFit/>
           </a:bodyPr>
           <a:lstStyle/>
@@ -7455,7 +7455,7 @@
                   <a:srgbClr val="7F1D1D"/>
                 </a:solidFill>
               </a:rPr>
-              <a:t>T3 · Live CSR Teams Chat (front-line human)</a:t>
+              <a:t>T3 · Live CSR Teams Chat</a:t>
             </a:r>
           </a:p>
         </p:txBody>
@@ -7468,8 +7468,8 @@
         </p:nvSpPr>
         <p:spPr>
           <a:xfrm>
-            <a:off x="5943600" y="3840480"/>
-            <a:ext cx="2468880" cy="164592"/>
+            <a:off x="685800" y="3456432"/>
+            <a:ext cx="3154680" cy="146304"/>
           </a:xfrm>
           <a:prstGeom prst="rect">
             <a:avLst/>
@@ -7477,19 +7477,19 @@
           <a:noFill/>
         </p:spPr>
         <p:txBody>
-          <a:bodyPr wrap="square" lIns="20000" rIns="20000" tIns="10000" bIns="10000" anchor="ctr">
+          <a:bodyPr wrap="square" lIns="15000" rIns="15000" tIns="5000" bIns="5000" anchor="ctr">
             <a:spAutoFit/>
           </a:bodyPr>
           <a:lstStyle/>
           <a:p>
-            <a:pPr algn="ctr"/>
+            <a:pPr algn="l"/>
             <a:r>
               <a:rPr sz="600" b="0" i="1">
                 <a:solidFill>
                   <a:srgbClr val="5A6680"/>
                 </a:solidFill>
               </a:rPr>
-              <a:t>Tier 1 = auto-approve, no human</a:t>
+              <a:t>Tier 1 = AI auto-approve, no human</a:t>
             </a:r>
           </a:p>
         </p:txBody>
@@ -7502,8 +7502,8 @@
         </p:nvSpPr>
         <p:spPr>
           <a:xfrm>
-            <a:off x="822960" y="4169663"/>
-            <a:ext cx="640080" cy="256032"/>
+            <a:off x="640080" y="3950208"/>
+            <a:ext cx="548640" cy="219456"/>
           </a:xfrm>
           <a:prstGeom prst="roundRect">
             <a:avLst/>
@@ -7511,7 +7511,7 @@
           <a:solidFill>
             <a:srgbClr val="742774"/>
           </a:solidFill>
-          <a:ln w="6350">
+          <a:ln w="3810">
             <a:solidFill>
               <a:srgbClr val="3D2C70"/>
             </a:solidFill>
@@ -7548,8 +7548,8 @@
         </p:nvSpPr>
         <p:spPr>
           <a:xfrm>
-            <a:off x="822960" y="4169663"/>
-            <a:ext cx="640080" cy="256032"/>
+            <a:off x="640080" y="3950208"/>
+            <a:ext cx="548640" cy="219456"/>
           </a:xfrm>
           <a:prstGeom prst="rect">
             <a:avLst/>
@@ -7557,14 +7557,14 @@
           <a:noFill/>
         </p:spPr>
         <p:txBody>
-          <a:bodyPr wrap="square" lIns="20000" rIns="20000" tIns="10000" bIns="10000" anchor="ctr">
+          <a:bodyPr wrap="square" lIns="15000" rIns="15000" tIns="5000" bIns="5000" anchor="ctr">
             <a:spAutoFit/>
           </a:bodyPr>
           <a:lstStyle/>
           <a:p>
             <a:pPr algn="ctr"/>
             <a:r>
-              <a:rPr sz="600" b="1" i="0">
+              <a:rPr sz="500" b="1" i="0">
                 <a:solidFill>
                   <a:srgbClr val="FFFFFF"/>
                 </a:solidFill>
@@ -7582,8 +7582,8 @@
         </p:nvSpPr>
         <p:spPr>
           <a:xfrm>
-            <a:off x="1508760" y="4169663"/>
-            <a:ext cx="640080" cy="256032"/>
+            <a:off x="1207008" y="3950208"/>
+            <a:ext cx="548640" cy="219456"/>
           </a:xfrm>
           <a:prstGeom prst="roundRect">
             <a:avLst/>
@@ -7591,7 +7591,7 @@
           <a:solidFill>
             <a:srgbClr val="742774"/>
           </a:solidFill>
-          <a:ln w="6350">
+          <a:ln w="3810">
             <a:solidFill>
               <a:srgbClr val="3D2C70"/>
             </a:solidFill>
@@ -7628,8 +7628,8 @@
         </p:nvSpPr>
         <p:spPr>
           <a:xfrm>
-            <a:off x="1508760" y="4169663"/>
-            <a:ext cx="640080" cy="256032"/>
+            <a:off x="1207008" y="3950208"/>
+            <a:ext cx="548640" cy="219456"/>
           </a:xfrm>
           <a:prstGeom prst="rect">
             <a:avLst/>
@@ -7637,14 +7637,14 @@
           <a:noFill/>
         </p:spPr>
         <p:txBody>
-          <a:bodyPr wrap="square" lIns="20000" rIns="20000" tIns="10000" bIns="10000" anchor="ctr">
+          <a:bodyPr wrap="square" lIns="15000" rIns="15000" tIns="5000" bIns="5000" anchor="ctr">
             <a:spAutoFit/>
           </a:bodyPr>
           <a:lstStyle/>
           <a:p>
             <a:pPr algn="ctr"/>
             <a:r>
-              <a:rPr sz="600" b="1" i="0">
+              <a:rPr sz="500" b="1" i="0">
                 <a:solidFill>
                   <a:srgbClr val="FFFFFF"/>
                 </a:solidFill>
@@ -7662,8 +7662,8 @@
         </p:nvSpPr>
         <p:spPr>
           <a:xfrm>
-            <a:off x="2194560" y="4169663"/>
-            <a:ext cx="731520" cy="256032"/>
+            <a:off x="1773936" y="3950208"/>
+            <a:ext cx="640080" cy="219456"/>
           </a:xfrm>
           <a:prstGeom prst="roundRect">
             <a:avLst/>
@@ -7671,7 +7671,7 @@
           <a:solidFill>
             <a:srgbClr val="742774"/>
           </a:solidFill>
-          <a:ln w="6350">
+          <a:ln w="3810">
             <a:solidFill>
               <a:srgbClr val="3D2C70"/>
             </a:solidFill>
@@ -7708,8 +7708,8 @@
         </p:nvSpPr>
         <p:spPr>
           <a:xfrm>
-            <a:off x="2194560" y="4169663"/>
-            <a:ext cx="731520" cy="256032"/>
+            <a:off x="1773936" y="3950208"/>
+            <a:ext cx="640080" cy="219456"/>
           </a:xfrm>
           <a:prstGeom prst="rect">
             <a:avLst/>
@@ -7717,14 +7717,14 @@
           <a:noFill/>
         </p:spPr>
         <p:txBody>
-          <a:bodyPr wrap="square" lIns="20000" rIns="20000" tIns="10000" bIns="10000" anchor="ctr">
+          <a:bodyPr wrap="square" lIns="15000" rIns="15000" tIns="5000" bIns="5000" anchor="ctr">
             <a:spAutoFit/>
           </a:bodyPr>
           <a:lstStyle/>
           <a:p>
             <a:pPr algn="ctr"/>
             <a:r>
-              <a:rPr sz="600" b="1" i="0">
+              <a:rPr sz="500" b="1" i="0">
                 <a:solidFill>
                   <a:srgbClr val="FFFFFF"/>
                 </a:solidFill>
@@ -7742,8 +7742,8 @@
         </p:nvSpPr>
         <p:spPr>
           <a:xfrm>
-            <a:off x="2971800" y="4169663"/>
-            <a:ext cx="914400" cy="256032"/>
+            <a:off x="2432304" y="3950208"/>
+            <a:ext cx="822960" cy="219456"/>
           </a:xfrm>
           <a:prstGeom prst="roundRect">
             <a:avLst/>
@@ -7751,7 +7751,7 @@
           <a:solidFill>
             <a:srgbClr val="742774"/>
           </a:solidFill>
-          <a:ln w="6350">
+          <a:ln w="3810">
             <a:solidFill>
               <a:srgbClr val="3D2C70"/>
             </a:solidFill>
@@ -7788,8 +7788,8 @@
         </p:nvSpPr>
         <p:spPr>
           <a:xfrm>
-            <a:off x="2971800" y="4169663"/>
-            <a:ext cx="914400" cy="256032"/>
+            <a:off x="2432304" y="3950208"/>
+            <a:ext cx="822960" cy="219456"/>
           </a:xfrm>
           <a:prstGeom prst="rect">
             <a:avLst/>
@@ -7797,14 +7797,14 @@
           <a:noFill/>
         </p:spPr>
         <p:txBody>
-          <a:bodyPr wrap="square" lIns="20000" rIns="20000" tIns="10000" bIns="10000" anchor="ctr">
+          <a:bodyPr wrap="square" lIns="15000" rIns="15000" tIns="5000" bIns="5000" anchor="ctr">
             <a:spAutoFit/>
           </a:bodyPr>
           <a:lstStyle/>
           <a:p>
             <a:pPr algn="ctr"/>
             <a:r>
-              <a:rPr sz="600" b="1" i="0">
+              <a:rPr sz="500" b="1" i="0">
                 <a:solidFill>
                   <a:srgbClr val="FFFFFF"/>
                 </a:solidFill>
@@ -7822,8 +7822,8 @@
         </p:nvSpPr>
         <p:spPr>
           <a:xfrm>
-            <a:off x="3931920" y="4169663"/>
-            <a:ext cx="640080" cy="256032"/>
+            <a:off x="3273552" y="3950208"/>
+            <a:ext cx="548640" cy="219456"/>
           </a:xfrm>
           <a:prstGeom prst="roundRect">
             <a:avLst/>
@@ -7831,7 +7831,7 @@
           <a:solidFill>
             <a:srgbClr val="742774"/>
           </a:solidFill>
-          <a:ln w="6350">
+          <a:ln w="3810">
             <a:solidFill>
               <a:srgbClr val="3D2C70"/>
             </a:solidFill>
@@ -7868,8 +7868,8 @@
         </p:nvSpPr>
         <p:spPr>
           <a:xfrm>
-            <a:off x="3931920" y="4169663"/>
-            <a:ext cx="640080" cy="256032"/>
+            <a:off x="3273552" y="3950208"/>
+            <a:ext cx="548640" cy="219456"/>
           </a:xfrm>
           <a:prstGeom prst="rect">
             <a:avLst/>
@@ -7877,14 +7877,14 @@
           <a:noFill/>
         </p:spPr>
         <p:txBody>
-          <a:bodyPr wrap="square" lIns="20000" rIns="20000" tIns="10000" bIns="10000" anchor="ctr">
+          <a:bodyPr wrap="square" lIns="15000" rIns="15000" tIns="5000" bIns="5000" anchor="ctr">
             <a:spAutoFit/>
           </a:bodyPr>
           <a:lstStyle/>
           <a:p>
             <a:pPr algn="ctr"/>
             <a:r>
-              <a:rPr sz="600" b="1" i="0">
+              <a:rPr sz="500" b="1" i="0">
                 <a:solidFill>
                   <a:srgbClr val="FFFFFF"/>
                 </a:solidFill>
@@ -7902,8 +7902,8 @@
         </p:nvSpPr>
         <p:spPr>
           <a:xfrm>
-            <a:off x="4617720" y="4169663"/>
-            <a:ext cx="640080" cy="256032"/>
+            <a:off x="3840480" y="3950208"/>
+            <a:ext cx="548640" cy="219456"/>
           </a:xfrm>
           <a:prstGeom prst="roundRect">
             <a:avLst/>
@@ -7911,7 +7911,7 @@
           <a:solidFill>
             <a:srgbClr val="742774"/>
           </a:solidFill>
-          <a:ln w="6350">
+          <a:ln w="3810">
             <a:solidFill>
               <a:srgbClr val="3D2C70"/>
             </a:solidFill>
@@ -7948,8 +7948,8 @@
         </p:nvSpPr>
         <p:spPr>
           <a:xfrm>
-            <a:off x="4617720" y="4169663"/>
-            <a:ext cx="640080" cy="256032"/>
+            <a:off x="3840480" y="3950208"/>
+            <a:ext cx="548640" cy="219456"/>
           </a:xfrm>
           <a:prstGeom prst="rect">
             <a:avLst/>
@@ -7957,14 +7957,14 @@
           <a:noFill/>
         </p:spPr>
         <p:txBody>
-          <a:bodyPr wrap="square" lIns="20000" rIns="20000" tIns="10000" bIns="10000" anchor="ctr">
+          <a:bodyPr wrap="square" lIns="15000" rIns="15000" tIns="5000" bIns="5000" anchor="ctr">
             <a:spAutoFit/>
           </a:bodyPr>
           <a:lstStyle/>
           <a:p>
             <a:pPr algn="ctr"/>
             <a:r>
-              <a:rPr sz="600" b="1" i="0">
+              <a:rPr sz="500" b="1" i="0">
                 <a:solidFill>
                   <a:srgbClr val="FFFFFF"/>
                 </a:solidFill>
@@ -7982,8 +7982,8 @@
         </p:nvSpPr>
         <p:spPr>
           <a:xfrm>
-            <a:off x="5303520" y="4169663"/>
-            <a:ext cx="1280160" cy="256032"/>
+            <a:off x="4407408" y="3950208"/>
+            <a:ext cx="1097280" cy="219456"/>
           </a:xfrm>
           <a:prstGeom prst="roundRect">
             <a:avLst/>
@@ -7991,7 +7991,7 @@
           <a:solidFill>
             <a:srgbClr val="742774"/>
           </a:solidFill>
-          <a:ln w="6350">
+          <a:ln w="3810">
             <a:solidFill>
               <a:srgbClr val="3D2C70"/>
             </a:solidFill>
@@ -8028,8 +8028,8 @@
         </p:nvSpPr>
         <p:spPr>
           <a:xfrm>
-            <a:off x="5303520" y="4169663"/>
-            <a:ext cx="1280160" cy="256032"/>
+            <a:off x="4407408" y="3950208"/>
+            <a:ext cx="1097280" cy="219456"/>
           </a:xfrm>
           <a:prstGeom prst="rect">
             <a:avLst/>
@@ -8037,19 +8037,19 @@
           <a:noFill/>
         </p:spPr>
         <p:txBody>
-          <a:bodyPr wrap="square" lIns="20000" rIns="20000" tIns="10000" bIns="10000" anchor="ctr">
+          <a:bodyPr wrap="square" lIns="15000" rIns="15000" tIns="5000" bIns="5000" anchor="ctr">
             <a:spAutoFit/>
           </a:bodyPr>
           <a:lstStyle/>
           <a:p>
             <a:pPr algn="ctr"/>
             <a:r>
-              <a:rPr sz="600" b="1" i="0">
+              <a:rPr sz="500" b="1" i="0">
                 <a:solidFill>
                   <a:srgbClr val="FFFFFF"/>
                 </a:solidFill>
               </a:rPr>
-              <a:t>ClaimVendorAssignment</a:t>
+              <a:t>ClaimVendorAssgmt</a:t>
             </a:r>
           </a:p>
         </p:txBody>
@@ -8062,8 +8062,8 @@
         </p:nvSpPr>
         <p:spPr>
           <a:xfrm>
-            <a:off x="822960" y="4498848"/>
-            <a:ext cx="7818120" cy="411480"/>
+            <a:off x="640080" y="4224528"/>
+            <a:ext cx="5532120" cy="365760"/>
           </a:xfrm>
           <a:prstGeom prst="roundRect">
             <a:avLst/>
@@ -8071,7 +8071,7 @@
           <a:solidFill>
             <a:srgbClr val="F5B73A"/>
           </a:solidFill>
-          <a:ln w="25400">
+          <a:ln w="19050">
             <a:solidFill>
               <a:srgbClr val="D99416"/>
             </a:solidFill>
@@ -8108,8 +8108,8 @@
         </p:nvSpPr>
         <p:spPr>
           <a:xfrm>
-            <a:off x="822960" y="4498848"/>
-            <a:ext cx="7818120" cy="411480"/>
+            <a:off x="640080" y="4224528"/>
+            <a:ext cx="5532120" cy="365760"/>
           </a:xfrm>
           <a:prstGeom prst="rect">
             <a:avLst/>
@@ -8117,33 +8117,959 @@
           <a:noFill/>
         </p:spPr>
         <p:txBody>
-          <a:bodyPr wrap="square" lIns="20000" rIns="20000" tIns="10000" bIns="10000" anchor="ctr">
+          <a:bodyPr wrap="square" lIns="15000" rIns="15000" tIns="5000" bIns="5000" anchor="ctr">
             <a:spAutoFit/>
           </a:bodyPr>
           <a:lstStyle/>
           <a:p>
             <a:pPr algn="ctr"/>
             <a:r>
-              <a:rPr sz="800" b="1" i="0">
+              <a:rPr sz="700" b="1" i="0">
                 <a:solidFill>
                   <a:srgbClr val="0A2540"/>
                 </a:solidFill>
               </a:rPr>
-              <a:t>🛡  Decision_Rationale  ·  THE GLASS BOX  ·  every AI step writes 1 row  ·  source: 4 · 7 · 8 · 9 · 10 · 12</a:t>
-            </a:r>
-          </a:p>
-        </p:txBody>
-      </p:sp>
-      <p:sp>
-        <p:nvSpPr>
-          <p:cNvPr id="72" name="TextBox 71"/>
+              <a:t>🛡  Decision_Rationale  ·  THE GLASS BOX  ·  every AI step writes 1 row  ·  4 · 7 · 8 · 9 · 10 · 12</a:t>
+            </a:r>
+          </a:p>
+        </p:txBody>
+      </p:sp>
+      <p:cxnSp>
+        <p:nvCxnSpPr>
+          <p:cNvPr id="72" name="Connector 71"/>
+          <p:cNvCxnSpPr/>
+          <p:nvPr/>
+        </p:nvCxnSpPr>
+        <p:spPr>
+          <a:xfrm>
+            <a:off x="1143000" y="786384"/>
+            <a:ext cx="320040" cy="109728"/>
+          </a:xfrm>
+          <a:prstGeom prst="line">
+            <a:avLst/>
+          </a:prstGeom>
+          <a:ln w="17780">
+            <a:solidFill>
+              <a:srgbClr val="DC2626"/>
+            </a:solidFill>
+            <a:tailEnd type="triangle" w="sm" len="sm"/>
+          </a:ln>
+        </p:spPr>
+        <p:style>
+          <a:lnRef idx="2">
+            <a:schemeClr val="accent1"/>
+          </a:lnRef>
+          <a:fillRef idx="0">
+            <a:schemeClr val="accent1"/>
+          </a:fillRef>
+          <a:effectRef idx="1">
+            <a:schemeClr val="accent1"/>
+          </a:effectRef>
+          <a:fontRef idx="minor">
+            <a:schemeClr val="tx1"/>
+          </a:fontRef>
+        </p:style>
+      </p:cxnSp>
+      <p:cxnSp>
+        <p:nvCxnSpPr>
+          <p:cNvPr id="73" name="Connector 72"/>
+          <p:cNvCxnSpPr/>
+          <p:nvPr/>
+        </p:nvCxnSpPr>
+        <p:spPr>
+          <a:xfrm>
+            <a:off x="1965960" y="1088136"/>
+            <a:ext cx="182880" cy="0"/>
+          </a:xfrm>
+          <a:prstGeom prst="line">
+            <a:avLst/>
+          </a:prstGeom>
+          <a:ln w="17780">
+            <a:solidFill>
+              <a:srgbClr val="DC2626"/>
+            </a:solidFill>
+            <a:tailEnd type="triangle" w="sm" len="sm"/>
+          </a:ln>
+        </p:spPr>
+        <p:style>
+          <a:lnRef idx="2">
+            <a:schemeClr val="accent1"/>
+          </a:lnRef>
+          <a:fillRef idx="0">
+            <a:schemeClr val="accent1"/>
+          </a:fillRef>
+          <a:effectRef idx="1">
+            <a:schemeClr val="accent1"/>
+          </a:effectRef>
+          <a:fontRef idx="minor">
+            <a:schemeClr val="tx1"/>
+          </a:fontRef>
+        </p:style>
+      </p:cxnSp>
+      <p:cxnSp>
+        <p:nvCxnSpPr>
+          <p:cNvPr id="74" name="Connector 73"/>
+          <p:cNvCxnSpPr/>
+          <p:nvPr/>
+        </p:nvCxnSpPr>
+        <p:spPr>
+          <a:xfrm>
+            <a:off x="2628900" y="1280160"/>
+            <a:ext cx="45720" cy="137160"/>
+          </a:xfrm>
+          <a:prstGeom prst="line">
+            <a:avLst/>
+          </a:prstGeom>
+          <a:ln w="17780">
+            <a:solidFill>
+              <a:srgbClr val="DC2626"/>
+            </a:solidFill>
+            <a:tailEnd type="triangle" w="sm" len="sm"/>
+          </a:ln>
+        </p:spPr>
+        <p:style>
+          <a:lnRef idx="2">
+            <a:schemeClr val="accent1"/>
+          </a:lnRef>
+          <a:fillRef idx="0">
+            <a:schemeClr val="accent1"/>
+          </a:fillRef>
+          <a:effectRef idx="1">
+            <a:schemeClr val="accent1"/>
+          </a:effectRef>
+          <a:fontRef idx="minor">
+            <a:schemeClr val="tx1"/>
+          </a:fontRef>
+        </p:style>
+      </p:cxnSp>
+      <p:cxnSp>
+        <p:nvCxnSpPr>
+          <p:cNvPr id="75" name="Connector 74"/>
+          <p:cNvCxnSpPr/>
+          <p:nvPr/>
+        </p:nvCxnSpPr>
+        <p:spPr>
+          <a:xfrm>
+            <a:off x="2674620" y="1856232"/>
+            <a:ext cx="91440" cy="155448"/>
+          </a:xfrm>
+          <a:prstGeom prst="line">
+            <a:avLst/>
+          </a:prstGeom>
+          <a:ln w="17780">
+            <a:solidFill>
+              <a:srgbClr val="DC2626"/>
+            </a:solidFill>
+            <a:tailEnd type="triangle" w="sm" len="sm"/>
+          </a:ln>
+        </p:spPr>
+        <p:style>
+          <a:lnRef idx="2">
+            <a:schemeClr val="accent1"/>
+          </a:lnRef>
+          <a:fillRef idx="0">
+            <a:schemeClr val="accent1"/>
+          </a:fillRef>
+          <a:effectRef idx="1">
+            <a:schemeClr val="accent1"/>
+          </a:effectRef>
+          <a:fontRef idx="minor">
+            <a:schemeClr val="tx1"/>
+          </a:fontRef>
+        </p:style>
+      </p:cxnSp>
+      <p:cxnSp>
+        <p:nvCxnSpPr>
+          <p:cNvPr id="76" name="Connector 75"/>
+          <p:cNvCxnSpPr/>
+          <p:nvPr/>
+        </p:nvCxnSpPr>
+        <p:spPr>
+          <a:xfrm>
+            <a:off x="3154680" y="2231136"/>
+            <a:ext cx="91440" cy="0"/>
+          </a:xfrm>
+          <a:prstGeom prst="line">
+            <a:avLst/>
+          </a:prstGeom>
+          <a:ln w="17780">
+            <a:solidFill>
+              <a:srgbClr val="DC2626"/>
+            </a:solidFill>
+            <a:tailEnd type="triangle" w="sm" len="sm"/>
+          </a:ln>
+        </p:spPr>
+        <p:style>
+          <a:lnRef idx="2">
+            <a:schemeClr val="accent1"/>
+          </a:lnRef>
+          <a:fillRef idx="0">
+            <a:schemeClr val="accent1"/>
+          </a:fillRef>
+          <a:effectRef idx="1">
+            <a:schemeClr val="accent1"/>
+          </a:effectRef>
+          <a:fontRef idx="minor">
+            <a:schemeClr val="tx1"/>
+          </a:fontRef>
+        </p:style>
+      </p:cxnSp>
+      <p:cxnSp>
+        <p:nvCxnSpPr>
+          <p:cNvPr id="77" name="Connector 76"/>
+          <p:cNvCxnSpPr/>
+          <p:nvPr/>
+        </p:nvCxnSpPr>
+        <p:spPr>
+          <a:xfrm flipH="1">
+            <a:off x="2377440" y="2450592"/>
+            <a:ext cx="1348740" cy="237744"/>
+          </a:xfrm>
+          <a:prstGeom prst="line">
+            <a:avLst/>
+          </a:prstGeom>
+          <a:ln w="12700">
+            <a:solidFill>
+              <a:srgbClr val="DC2626"/>
+            </a:solidFill>
+            <a:tailEnd type="triangle" w="sm" len="sm"/>
+          </a:ln>
+        </p:spPr>
+        <p:style>
+          <a:lnRef idx="2">
+            <a:schemeClr val="accent1"/>
+          </a:lnRef>
+          <a:fillRef idx="0">
+            <a:schemeClr val="accent1"/>
+          </a:fillRef>
+          <a:effectRef idx="1">
+            <a:schemeClr val="accent1"/>
+          </a:effectRef>
+          <a:fontRef idx="minor">
+            <a:schemeClr val="tx1"/>
+          </a:fontRef>
+        </p:style>
+      </p:cxnSp>
+      <p:cxnSp>
+        <p:nvCxnSpPr>
+          <p:cNvPr id="78" name="Connector 77"/>
+          <p:cNvCxnSpPr/>
+          <p:nvPr/>
+        </p:nvCxnSpPr>
+        <p:spPr>
+          <a:xfrm flipH="1">
+            <a:off x="2377440" y="2450592"/>
+            <a:ext cx="1165860" cy="475488"/>
+          </a:xfrm>
+          <a:prstGeom prst="line">
+            <a:avLst/>
+          </a:prstGeom>
+          <a:ln w="12700">
+            <a:solidFill>
+              <a:srgbClr val="DC2626"/>
+            </a:solidFill>
+            <a:tailEnd type="triangle" w="sm" len="sm"/>
+          </a:ln>
+        </p:spPr>
+        <p:style>
+          <a:lnRef idx="2">
+            <a:schemeClr val="accent1"/>
+          </a:lnRef>
+          <a:fillRef idx="0">
+            <a:schemeClr val="accent1"/>
+          </a:fillRef>
+          <a:effectRef idx="1">
+            <a:schemeClr val="accent1"/>
+          </a:effectRef>
+          <a:fontRef idx="minor">
+            <a:schemeClr val="tx1"/>
+          </a:fontRef>
+        </p:style>
+      </p:cxnSp>
+      <p:cxnSp>
+        <p:nvCxnSpPr>
+          <p:cNvPr id="79" name="Connector 78"/>
+          <p:cNvCxnSpPr/>
+          <p:nvPr/>
+        </p:nvCxnSpPr>
+        <p:spPr>
+          <a:xfrm flipH="1">
+            <a:off x="2377440" y="2450592"/>
+            <a:ext cx="982980" cy="713232"/>
+          </a:xfrm>
+          <a:prstGeom prst="line">
+            <a:avLst/>
+          </a:prstGeom>
+          <a:ln w="12700">
+            <a:solidFill>
+              <a:srgbClr val="DC2626"/>
+            </a:solidFill>
+            <a:tailEnd type="triangle" w="sm" len="sm"/>
+          </a:ln>
+        </p:spPr>
+        <p:style>
+          <a:lnRef idx="2">
+            <a:schemeClr val="accent1"/>
+          </a:lnRef>
+          <a:fillRef idx="0">
+            <a:schemeClr val="accent1"/>
+          </a:fillRef>
+          <a:effectRef idx="1">
+            <a:schemeClr val="accent1"/>
+          </a:effectRef>
+          <a:fontRef idx="minor">
+            <a:schemeClr val="tx1"/>
+          </a:fontRef>
+        </p:style>
+      </p:cxnSp>
+      <p:cxnSp>
+        <p:nvCxnSpPr>
+          <p:cNvPr id="80" name="Connector 79"/>
+          <p:cNvCxnSpPr/>
+          <p:nvPr/>
+        </p:nvCxnSpPr>
+        <p:spPr>
+          <a:xfrm>
+            <a:off x="3749039" y="2688336"/>
+            <a:ext cx="182881" cy="169164"/>
+          </a:xfrm>
+          <a:prstGeom prst="line">
+            <a:avLst/>
+          </a:prstGeom>
+          <a:ln w="12700">
+            <a:solidFill>
+              <a:srgbClr val="DC2626"/>
+            </a:solidFill>
+            <a:tailEnd type="triangle" w="sm" len="sm"/>
+          </a:ln>
+        </p:spPr>
+        <p:style>
+          <a:lnRef idx="2">
+            <a:schemeClr val="accent1"/>
+          </a:lnRef>
+          <a:fillRef idx="0">
+            <a:schemeClr val="accent1"/>
+          </a:fillRef>
+          <a:effectRef idx="1">
+            <a:schemeClr val="accent1"/>
+          </a:effectRef>
+          <a:fontRef idx="minor">
+            <a:schemeClr val="tx1"/>
+          </a:fontRef>
+        </p:style>
+      </p:cxnSp>
+      <p:cxnSp>
+        <p:nvCxnSpPr>
+          <p:cNvPr id="81" name="Connector 80"/>
+          <p:cNvCxnSpPr/>
+          <p:nvPr/>
+        </p:nvCxnSpPr>
+        <p:spPr>
+          <a:xfrm>
+            <a:off x="3749039" y="2926080"/>
+            <a:ext cx="182881" cy="68580"/>
+          </a:xfrm>
+          <a:prstGeom prst="line">
+            <a:avLst/>
+          </a:prstGeom>
+          <a:ln w="12700">
+            <a:solidFill>
+              <a:srgbClr val="DC2626"/>
+            </a:solidFill>
+            <a:tailEnd type="triangle" w="sm" len="sm"/>
+          </a:ln>
+        </p:spPr>
+        <p:style>
+          <a:lnRef idx="2">
+            <a:schemeClr val="accent1"/>
+          </a:lnRef>
+          <a:fillRef idx="0">
+            <a:schemeClr val="accent1"/>
+          </a:fillRef>
+          <a:effectRef idx="1">
+            <a:schemeClr val="accent1"/>
+          </a:effectRef>
+          <a:fontRef idx="minor">
+            <a:schemeClr val="tx1"/>
+          </a:fontRef>
+        </p:style>
+      </p:cxnSp>
+      <p:cxnSp>
+        <p:nvCxnSpPr>
+          <p:cNvPr id="82" name="Connector 81"/>
+          <p:cNvCxnSpPr/>
+          <p:nvPr/>
+        </p:nvCxnSpPr>
+        <p:spPr>
+          <a:xfrm flipV="1">
+            <a:off x="3749039" y="3131820"/>
+            <a:ext cx="182881" cy="32004"/>
+          </a:xfrm>
+          <a:prstGeom prst="line">
+            <a:avLst/>
+          </a:prstGeom>
+          <a:ln w="12700">
+            <a:solidFill>
+              <a:srgbClr val="DC2626"/>
+            </a:solidFill>
+            <a:tailEnd type="triangle" w="sm" len="sm"/>
+          </a:ln>
+        </p:spPr>
+        <p:style>
+          <a:lnRef idx="2">
+            <a:schemeClr val="accent1"/>
+          </a:lnRef>
+          <a:fillRef idx="0">
+            <a:schemeClr val="accent1"/>
+          </a:fillRef>
+          <a:effectRef idx="1">
+            <a:schemeClr val="accent1"/>
+          </a:effectRef>
+          <a:fontRef idx="minor">
+            <a:schemeClr val="tx1"/>
+          </a:fontRef>
+        </p:style>
+      </p:cxnSp>
+      <p:cxnSp>
+        <p:nvCxnSpPr>
+          <p:cNvPr id="83" name="Connector 82"/>
+          <p:cNvCxnSpPr/>
+          <p:nvPr/>
+        </p:nvCxnSpPr>
+        <p:spPr>
+          <a:xfrm flipV="1">
+            <a:off x="4617720" y="2450592"/>
+            <a:ext cx="22860" cy="292608"/>
+          </a:xfrm>
+          <a:prstGeom prst="line">
+            <a:avLst/>
+          </a:prstGeom>
+          <a:ln w="17780">
+            <a:solidFill>
+              <a:srgbClr val="DC2626"/>
+            </a:solidFill>
+            <a:tailEnd type="triangle" w="sm" len="sm"/>
+          </a:ln>
+        </p:spPr>
+        <p:style>
+          <a:lnRef idx="2">
+            <a:schemeClr val="accent1"/>
+          </a:lnRef>
+          <a:fillRef idx="0">
+            <a:schemeClr val="accent1"/>
+          </a:fillRef>
+          <a:effectRef idx="1">
+            <a:schemeClr val="accent1"/>
+          </a:effectRef>
+          <a:fontRef idx="minor">
+            <a:schemeClr val="tx1"/>
+          </a:fontRef>
+        </p:style>
+      </p:cxnSp>
+      <p:cxnSp>
+        <p:nvCxnSpPr>
+          <p:cNvPr id="84" name="Connector 83"/>
+          <p:cNvCxnSpPr/>
+          <p:nvPr/>
+        </p:nvCxnSpPr>
+        <p:spPr>
+          <a:xfrm flipH="1">
+            <a:off x="4480559" y="2450592"/>
+            <a:ext cx="160021" cy="987552"/>
+          </a:xfrm>
+          <a:prstGeom prst="line">
+            <a:avLst/>
+          </a:prstGeom>
+          <a:ln w="12700">
+            <a:solidFill>
+              <a:srgbClr val="0F172A"/>
+            </a:solidFill>
+            <a:tailEnd type="triangle" w="sm" len="sm"/>
+          </a:ln>
+        </p:spPr>
+        <p:style>
+          <a:lnRef idx="2">
+            <a:schemeClr val="accent1"/>
+          </a:lnRef>
+          <a:fillRef idx="0">
+            <a:schemeClr val="accent1"/>
+          </a:fillRef>
+          <a:effectRef idx="1">
+            <a:schemeClr val="accent1"/>
+          </a:effectRef>
+          <a:fontRef idx="minor">
+            <a:schemeClr val="tx1"/>
+          </a:fontRef>
+        </p:style>
+      </p:cxnSp>
+      <p:cxnSp>
+        <p:nvCxnSpPr>
+          <p:cNvPr id="85" name="Connector 84"/>
+          <p:cNvCxnSpPr/>
+          <p:nvPr/>
+        </p:nvCxnSpPr>
+        <p:spPr>
+          <a:xfrm>
+            <a:off x="4983480" y="2231136"/>
+            <a:ext cx="640079" cy="1207008"/>
+          </a:xfrm>
+          <a:prstGeom prst="line">
+            <a:avLst/>
+          </a:prstGeom>
+          <a:ln w="12700">
+            <a:solidFill>
+              <a:srgbClr val="0F172A"/>
+            </a:solidFill>
+            <a:tailEnd type="triangle" w="sm" len="sm"/>
+          </a:ln>
+        </p:spPr>
+        <p:style>
+          <a:lnRef idx="2">
+            <a:schemeClr val="accent1"/>
+          </a:lnRef>
+          <a:fillRef idx="0">
+            <a:schemeClr val="accent1"/>
+          </a:fillRef>
+          <a:effectRef idx="1">
+            <a:schemeClr val="accent1"/>
+          </a:effectRef>
+          <a:fontRef idx="minor">
+            <a:schemeClr val="tx1"/>
+          </a:fontRef>
+        </p:style>
+      </p:cxnSp>
+      <p:cxnSp>
+        <p:nvCxnSpPr>
+          <p:cNvPr id="86" name="Connector 85"/>
+          <p:cNvCxnSpPr/>
+          <p:nvPr/>
+        </p:nvCxnSpPr>
+        <p:spPr>
+          <a:xfrm flipV="1">
+            <a:off x="4640580" y="1856232"/>
+            <a:ext cx="960120" cy="155448"/>
+          </a:xfrm>
+          <a:prstGeom prst="line">
+            <a:avLst/>
+          </a:prstGeom>
+          <a:ln w="17780">
+            <a:solidFill>
+              <a:srgbClr val="DC2626"/>
+            </a:solidFill>
+            <a:tailEnd type="triangle" w="sm" len="sm"/>
+          </a:ln>
+        </p:spPr>
+        <p:style>
+          <a:lnRef idx="2">
+            <a:schemeClr val="accent1"/>
+          </a:lnRef>
+          <a:fillRef idx="0">
+            <a:schemeClr val="accent1"/>
+          </a:fillRef>
+          <a:effectRef idx="1">
+            <a:schemeClr val="accent1"/>
+          </a:effectRef>
+          <a:fontRef idx="minor">
+            <a:schemeClr val="tx1"/>
+          </a:fontRef>
+        </p:style>
+      </p:cxnSp>
+      <p:cxnSp>
+        <p:nvCxnSpPr>
+          <p:cNvPr id="87" name="Connector 86"/>
+          <p:cNvCxnSpPr/>
+          <p:nvPr/>
+        </p:nvCxnSpPr>
+        <p:spPr>
+          <a:xfrm flipH="1">
+            <a:off x="5577840" y="1636776"/>
+            <a:ext cx="594360" cy="0"/>
+          </a:xfrm>
+          <a:prstGeom prst="line">
+            <a:avLst/>
+          </a:prstGeom>
+          <a:ln w="17780">
+            <a:solidFill>
+              <a:srgbClr val="DC2626"/>
+            </a:solidFill>
+            <a:tailEnd type="triangle" w="sm" len="sm"/>
+          </a:ln>
+        </p:spPr>
+        <p:style>
+          <a:lnRef idx="2">
+            <a:schemeClr val="accent1"/>
+          </a:lnRef>
+          <a:fillRef idx="0">
+            <a:schemeClr val="accent1"/>
+          </a:fillRef>
+          <a:effectRef idx="1">
+            <a:schemeClr val="accent1"/>
+          </a:effectRef>
+          <a:fontRef idx="minor">
+            <a:schemeClr val="tx1"/>
+          </a:fontRef>
+        </p:style>
+      </p:cxnSp>
+      <p:cxnSp>
+        <p:nvCxnSpPr>
+          <p:cNvPr id="88" name="Connector 87"/>
+          <p:cNvCxnSpPr/>
+          <p:nvPr/>
+        </p:nvCxnSpPr>
+        <p:spPr>
+          <a:xfrm>
+            <a:off x="5577840" y="1636776"/>
+            <a:ext cx="0" cy="374904"/>
+          </a:xfrm>
+          <a:prstGeom prst="line">
+            <a:avLst/>
+          </a:prstGeom>
+          <a:ln w="17780">
+            <a:solidFill>
+              <a:srgbClr val="DC2626"/>
+            </a:solidFill>
+            <a:tailEnd type="triangle" w="sm" len="sm"/>
+          </a:ln>
+        </p:spPr>
+        <p:style>
+          <a:lnRef idx="2">
+            <a:schemeClr val="accent1"/>
+          </a:lnRef>
+          <a:fillRef idx="0">
+            <a:schemeClr val="accent1"/>
+          </a:fillRef>
+          <a:effectRef idx="1">
+            <a:schemeClr val="accent1"/>
+          </a:effectRef>
+          <a:fontRef idx="minor">
+            <a:schemeClr val="tx1"/>
+          </a:fontRef>
+        </p:style>
+      </p:cxnSp>
+      <p:cxnSp>
+        <p:nvCxnSpPr>
+          <p:cNvPr id="89" name="Connector 88"/>
+          <p:cNvCxnSpPr/>
+          <p:nvPr/>
+        </p:nvCxnSpPr>
+        <p:spPr>
+          <a:xfrm flipV="1">
+            <a:off x="6080760" y="182880"/>
+            <a:ext cx="45720" cy="2048256"/>
+          </a:xfrm>
+          <a:prstGeom prst="line">
+            <a:avLst/>
+          </a:prstGeom>
+          <a:ln w="12700">
+            <a:solidFill>
+              <a:srgbClr val="DC2626"/>
+            </a:solidFill>
+            <a:tailEnd type="triangle" w="sm" len="sm"/>
+            <a:prstDash val="dash"/>
+          </a:ln>
+        </p:spPr>
+        <p:style>
+          <a:lnRef idx="2">
+            <a:schemeClr val="accent1"/>
+          </a:lnRef>
+          <a:fillRef idx="0">
+            <a:schemeClr val="accent1"/>
+          </a:fillRef>
+          <a:effectRef idx="1">
+            <a:schemeClr val="accent1"/>
+          </a:effectRef>
+          <a:fontRef idx="minor">
+            <a:schemeClr val="tx1"/>
+          </a:fontRef>
+        </p:style>
+      </p:cxnSp>
+      <p:cxnSp>
+        <p:nvCxnSpPr>
+          <p:cNvPr id="90" name="Connector 89"/>
+          <p:cNvCxnSpPr/>
+          <p:nvPr/>
+        </p:nvCxnSpPr>
+        <p:spPr>
+          <a:xfrm flipH="1">
+            <a:off x="1143000" y="182880"/>
+            <a:ext cx="4983480" cy="0"/>
+          </a:xfrm>
+          <a:prstGeom prst="line">
+            <a:avLst/>
+          </a:prstGeom>
+          <a:ln w="12700">
+            <a:solidFill>
+              <a:srgbClr val="DC2626"/>
+            </a:solidFill>
+            <a:tailEnd type="triangle" w="sm" len="sm"/>
+            <a:prstDash val="dash"/>
+          </a:ln>
+        </p:spPr>
+        <p:style>
+          <a:lnRef idx="2">
+            <a:schemeClr val="accent1"/>
+          </a:lnRef>
+          <a:fillRef idx="0">
+            <a:schemeClr val="accent1"/>
+          </a:fillRef>
+          <a:effectRef idx="1">
+            <a:schemeClr val="accent1"/>
+          </a:effectRef>
+          <a:fontRef idx="minor">
+            <a:schemeClr val="tx1"/>
+          </a:fontRef>
+        </p:style>
+      </p:cxnSp>
+      <p:cxnSp>
+        <p:nvCxnSpPr>
+          <p:cNvPr id="91" name="Connector 90"/>
+          <p:cNvCxnSpPr/>
+          <p:nvPr/>
+        </p:nvCxnSpPr>
+        <p:spPr>
+          <a:xfrm>
+            <a:off x="1143000" y="182880"/>
+            <a:ext cx="0" cy="219456"/>
+          </a:xfrm>
+          <a:prstGeom prst="line">
+            <a:avLst/>
+          </a:prstGeom>
+          <a:ln w="12700">
+            <a:solidFill>
+              <a:srgbClr val="DC2626"/>
+            </a:solidFill>
+            <a:tailEnd type="triangle" w="sm" len="sm"/>
+            <a:prstDash val="dash"/>
+          </a:ln>
+        </p:spPr>
+        <p:style>
+          <a:lnRef idx="2">
+            <a:schemeClr val="accent1"/>
+          </a:lnRef>
+          <a:fillRef idx="0">
+            <a:schemeClr val="accent1"/>
+          </a:fillRef>
+          <a:effectRef idx="1">
+            <a:schemeClr val="accent1"/>
+          </a:effectRef>
+          <a:fontRef idx="minor">
+            <a:schemeClr val="tx1"/>
+          </a:fontRef>
+        </p:style>
+      </p:cxnSp>
+      <p:cxnSp>
+        <p:nvCxnSpPr>
+          <p:cNvPr id="92" name="Connector 91"/>
+          <p:cNvCxnSpPr/>
+          <p:nvPr/>
+        </p:nvCxnSpPr>
+        <p:spPr>
+          <a:xfrm flipH="1">
+            <a:off x="2103120" y="1636776"/>
+            <a:ext cx="45720" cy="2542032"/>
+          </a:xfrm>
+          <a:prstGeom prst="line">
+            <a:avLst/>
+          </a:prstGeom>
+          <a:ln w="9525">
+            <a:solidFill>
+              <a:srgbClr val="D99416"/>
+            </a:solidFill>
+            <a:tailEnd type="triangle" w="sm" len="sm"/>
+            <a:prstDash val="dash"/>
+          </a:ln>
+        </p:spPr>
+        <p:style>
+          <a:lnRef idx="2">
+            <a:schemeClr val="accent1"/>
+          </a:lnRef>
+          <a:fillRef idx="0">
+            <a:schemeClr val="accent1"/>
+          </a:fillRef>
+          <a:effectRef idx="1">
+            <a:schemeClr val="accent1"/>
+          </a:effectRef>
+          <a:fontRef idx="minor">
+            <a:schemeClr val="tx1"/>
+          </a:fontRef>
+        </p:style>
+      </p:cxnSp>
+      <p:cxnSp>
+        <p:nvCxnSpPr>
+          <p:cNvPr id="93" name="Connector 92"/>
+          <p:cNvCxnSpPr/>
+          <p:nvPr/>
+        </p:nvCxnSpPr>
+        <p:spPr>
+          <a:xfrm>
+            <a:off x="2103120" y="4178808"/>
+            <a:ext cx="0" cy="45720"/>
+          </a:xfrm>
+          <a:prstGeom prst="line">
+            <a:avLst/>
+          </a:prstGeom>
+          <a:ln w="9525">
+            <a:solidFill>
+              <a:srgbClr val="D99416"/>
+            </a:solidFill>
+            <a:tailEnd type="triangle" w="sm" len="sm"/>
+            <a:prstDash val="dash"/>
+          </a:ln>
+        </p:spPr>
+        <p:style>
+          <a:lnRef idx="2">
+            <a:schemeClr val="accent1"/>
+          </a:lnRef>
+          <a:fillRef idx="0">
+            <a:schemeClr val="accent1"/>
+          </a:fillRef>
+          <a:effectRef idx="1">
+            <a:schemeClr val="accent1"/>
+          </a:effectRef>
+          <a:fontRef idx="minor">
+            <a:schemeClr val="tx1"/>
+          </a:fontRef>
+        </p:style>
+      </p:cxnSp>
+      <p:cxnSp>
+        <p:nvCxnSpPr>
+          <p:cNvPr id="94" name="Connector 93"/>
+          <p:cNvCxnSpPr/>
+          <p:nvPr/>
+        </p:nvCxnSpPr>
+        <p:spPr>
+          <a:xfrm>
+            <a:off x="4617720" y="3246120"/>
+            <a:ext cx="0" cy="978408"/>
+          </a:xfrm>
+          <a:prstGeom prst="line">
+            <a:avLst/>
+          </a:prstGeom>
+          <a:ln w="9525">
+            <a:solidFill>
+              <a:srgbClr val="D99416"/>
+            </a:solidFill>
+            <a:tailEnd type="triangle" w="sm" len="sm"/>
+            <a:prstDash val="dash"/>
+          </a:ln>
+        </p:spPr>
+        <p:style>
+          <a:lnRef idx="2">
+            <a:schemeClr val="accent1"/>
+          </a:lnRef>
+          <a:fillRef idx="0">
+            <a:schemeClr val="accent1"/>
+          </a:fillRef>
+          <a:effectRef idx="1">
+            <a:schemeClr val="accent1"/>
+          </a:effectRef>
+          <a:fontRef idx="minor">
+            <a:schemeClr val="tx1"/>
+          </a:fontRef>
+        </p:style>
+      </p:cxnSp>
+      <p:sp>
+        <p:nvSpPr>
+          <p:cNvPr id="95" name="Rounded Rectangle 94"/>
+          <p:cNvSpPr/>
+          <p:nvPr/>
+        </p:nvSpPr>
+        <p:spPr>
+          <a:xfrm>
+            <a:off x="6309360" y="365760"/>
+            <a:ext cx="2761488" cy="4572000"/>
+          </a:xfrm>
+          <a:prstGeom prst="roundRect">
+            <a:avLst/>
+          </a:prstGeom>
+          <a:solidFill>
+            <a:srgbClr val="FFFFFF"/>
+          </a:solidFill>
+          <a:ln w="12700">
+            <a:solidFill>
+              <a:srgbClr val="0A2540"/>
+            </a:solidFill>
+          </a:ln>
+          <a:effectLst/>
+        </p:spPr>
+        <p:style>
+          <a:lnRef idx="1">
+            <a:schemeClr val="accent1"/>
+          </a:lnRef>
+          <a:fillRef idx="3">
+            <a:schemeClr val="accent1"/>
+          </a:fillRef>
+          <a:effectRef idx="2">
+            <a:schemeClr val="accent1"/>
+          </a:effectRef>
+          <a:fontRef idx="minor">
+            <a:schemeClr val="lt1"/>
+          </a:fontRef>
+        </p:style>
+        <p:txBody>
+          <a:bodyPr rtlCol="0" anchor="ctr"/>
+          <a:lstStyle/>
+          <a:p>
+            <a:pPr algn="ctr"/>
+          </a:p>
+        </p:txBody>
+      </p:sp>
+      <p:sp>
+        <p:nvSpPr>
+          <p:cNvPr id="96" name="Rounded Rectangle 95"/>
+          <p:cNvSpPr/>
+          <p:nvPr/>
+        </p:nvSpPr>
+        <p:spPr>
+          <a:xfrm>
+            <a:off x="6309360" y="365760"/>
+            <a:ext cx="2761488" cy="237744"/>
+          </a:xfrm>
+          <a:prstGeom prst="roundRect">
+            <a:avLst/>
+          </a:prstGeom>
+          <a:solidFill>
+            <a:srgbClr val="0A2540"/>
+          </a:solidFill>
+          <a:ln w="6350">
+            <a:solidFill>
+              <a:srgbClr val="0A2540"/>
+            </a:solidFill>
+          </a:ln>
+          <a:effectLst/>
+        </p:spPr>
+        <p:style>
+          <a:lnRef idx="1">
+            <a:schemeClr val="accent1"/>
+          </a:lnRef>
+          <a:fillRef idx="3">
+            <a:schemeClr val="accent1"/>
+          </a:fillRef>
+          <a:effectRef idx="2">
+            <a:schemeClr val="accent1"/>
+          </a:effectRef>
+          <a:fontRef idx="minor">
+            <a:schemeClr val="lt1"/>
+          </a:fontRef>
+        </p:style>
+        <p:txBody>
+          <a:bodyPr rtlCol="0" anchor="ctr"/>
+          <a:lstStyle/>
+          <a:p>
+            <a:pPr algn="ctr"/>
+          </a:p>
+        </p:txBody>
+      </p:sp>
+      <p:sp>
+        <p:nvSpPr>
+          <p:cNvPr id="97" name="TextBox 96"/>
           <p:cNvSpPr txBox="1"/>
           <p:nvPr/>
         </p:nvSpPr>
         <p:spPr>
           <a:xfrm>
-            <a:off x="91440" y="4983480"/>
-            <a:ext cx="8961120" cy="137160"/>
+            <a:off x="6309360" y="365760"/>
+            <a:ext cx="2761488" cy="237744"/>
           </a:xfrm>
           <a:prstGeom prst="rect">
             <a:avLst/>
@@ -8151,19 +9077,1439 @@
           <a:noFill/>
         </p:spPr>
         <p:txBody>
-          <a:bodyPr wrap="square" lIns="20000" rIns="20000" tIns="10000" bIns="10000" anchor="ctr">
+          <a:bodyPr wrap="square" lIns="15000" rIns="15000" tIns="5000" bIns="5000" anchor="ctr">
             <a:spAutoFit/>
           </a:bodyPr>
           <a:lstStyle/>
           <a:p>
+            <a:pPr algn="ctr"/>
+            <a:r>
+              <a:rPr sz="900" b="1" i="0">
+                <a:solidFill>
+                  <a:srgbClr val="FFFFFF"/>
+                </a:solidFill>
+              </a:rPr>
+              <a:t>FLOW LEGEND</a:t>
+            </a:r>
+          </a:p>
+        </p:txBody>
+      </p:sp>
+      <p:sp>
+        <p:nvSpPr>
+          <p:cNvPr id="98" name="Rounded Rectangle 97"/>
+          <p:cNvSpPr/>
+          <p:nvPr/>
+        </p:nvSpPr>
+        <p:spPr>
+          <a:xfrm>
+            <a:off x="6355080" y="640080"/>
+            <a:ext cx="2670048" cy="283464"/>
+          </a:xfrm>
+          <a:prstGeom prst="roundRect">
+            <a:avLst/>
+          </a:prstGeom>
+          <a:solidFill>
+            <a:srgbClr val="FFF7ED"/>
+          </a:solidFill>
+          <a:ln w="5080">
+            <a:solidFill>
+              <a:srgbClr val="9A3412"/>
+            </a:solidFill>
+          </a:ln>
+          <a:effectLst/>
+        </p:spPr>
+        <p:style>
+          <a:lnRef idx="1">
+            <a:schemeClr val="accent1"/>
+          </a:lnRef>
+          <a:fillRef idx="3">
+            <a:schemeClr val="accent1"/>
+          </a:fillRef>
+          <a:effectRef idx="2">
+            <a:schemeClr val="accent1"/>
+          </a:effectRef>
+          <a:fontRef idx="minor">
+            <a:schemeClr val="lt1"/>
+          </a:fontRef>
+        </p:style>
+        <p:txBody>
+          <a:bodyPr rtlCol="0" anchor="ctr"/>
+          <a:lstStyle/>
+          <a:p>
+            <a:pPr algn="ctr"/>
+          </a:p>
+        </p:txBody>
+      </p:sp>
+      <p:sp>
+        <p:nvSpPr>
+          <p:cNvPr id="99" name="TextBox 98"/>
+          <p:cNvSpPr txBox="1"/>
+          <p:nvPr/>
+        </p:nvSpPr>
+        <p:spPr>
+          <a:xfrm>
+            <a:off x="6382512" y="640080"/>
+            <a:ext cx="2615184" cy="283464"/>
+          </a:xfrm>
+          <a:prstGeom prst="rect">
+            <a:avLst/>
+          </a:prstGeom>
+          <a:noFill/>
+        </p:spPr>
+        <p:txBody>
+          <a:bodyPr wrap="square" lIns="15000" rIns="15000" tIns="10000" bIns="10000" anchor="ctr">
+            <a:spAutoFit/>
+          </a:bodyPr>
+          <a:lstStyle/>
+          <a:p>
             <a:pPr algn="l"/>
             <a:r>
+              <a:rPr sz="900" b="1">
+                <a:solidFill>
+                  <a:srgbClr val="9A3412"/>
+                </a:solidFill>
+              </a:rPr>
+              <a:t>1  </a:t>
+            </a:r>
+            <a:r>
+              <a:rPr sz="600" b="1">
+                <a:solidFill>
+                  <a:srgbClr val="0F172A"/>
+                </a:solidFill>
+              </a:rPr>
+              <a:t>CUSTOMER FILES FNOL</a:t>
+            </a:r>
+          </a:p>
+          <a:p>
+            <a:pPr algn="l"/>
+            <a:r>
+              <a:rPr sz="600">
+                <a:solidFill>
+                  <a:srgbClr val="0F172A"/>
+                </a:solidFill>
+              </a:rPr>
+              <a:t>Mobile · Web · Teams · SMS · Email</a:t>
+            </a:r>
+          </a:p>
+        </p:txBody>
+      </p:sp>
+      <p:sp>
+        <p:nvSpPr>
+          <p:cNvPr id="100" name="Rounded Rectangle 99"/>
+          <p:cNvSpPr/>
+          <p:nvPr/>
+        </p:nvSpPr>
+        <p:spPr>
+          <a:xfrm>
+            <a:off x="6355080" y="941832"/>
+            <a:ext cx="2670048" cy="283464"/>
+          </a:xfrm>
+          <a:prstGeom prst="roundRect">
+            <a:avLst/>
+          </a:prstGeom>
+          <a:solidFill>
+            <a:srgbClr val="EFF6FF"/>
+          </a:solidFill>
+          <a:ln w="5080">
+            <a:solidFill>
+              <a:srgbClr val="0078D4"/>
+            </a:solidFill>
+          </a:ln>
+          <a:effectLst/>
+        </p:spPr>
+        <p:style>
+          <a:lnRef idx="1">
+            <a:schemeClr val="accent1"/>
+          </a:lnRef>
+          <a:fillRef idx="3">
+            <a:schemeClr val="accent1"/>
+          </a:fillRef>
+          <a:effectRef idx="2">
+            <a:schemeClr val="accent1"/>
+          </a:effectRef>
+          <a:fontRef idx="minor">
+            <a:schemeClr val="lt1"/>
+          </a:fontRef>
+        </p:style>
+        <p:txBody>
+          <a:bodyPr rtlCol="0" anchor="ctr"/>
+          <a:lstStyle/>
+          <a:p>
+            <a:pPr algn="ctr"/>
+          </a:p>
+        </p:txBody>
+      </p:sp>
+      <p:sp>
+        <p:nvSpPr>
+          <p:cNvPr id="101" name="TextBox 100"/>
+          <p:cNvSpPr txBox="1"/>
+          <p:nvPr/>
+        </p:nvSpPr>
+        <p:spPr>
+          <a:xfrm>
+            <a:off x="6382512" y="941832"/>
+            <a:ext cx="2615184" cy="283464"/>
+          </a:xfrm>
+          <a:prstGeom prst="rect">
+            <a:avLst/>
+          </a:prstGeom>
+          <a:noFill/>
+        </p:spPr>
+        <p:txBody>
+          <a:bodyPr wrap="square" lIns="15000" rIns="15000" tIns="10000" bIns="10000" anchor="ctr">
+            <a:spAutoFit/>
+          </a:bodyPr>
+          <a:lstStyle/>
+          <a:p>
+            <a:pPr algn="l"/>
+            <a:r>
+              <a:rPr sz="900" b="1">
+                <a:solidFill>
+                  <a:srgbClr val="0078D4"/>
+                </a:solidFill>
+              </a:rPr>
+              <a:t>2  </a:t>
+            </a:r>
+            <a:r>
+              <a:rPr sz="600" b="1">
+                <a:solidFill>
+                  <a:srgbClr val="0F172A"/>
+                </a:solidFill>
+              </a:rPr>
+              <a:t>REACT SPA + TOKEN BROKER</a:t>
+            </a:r>
+          </a:p>
+          <a:p>
+            <a:pPr algn="l"/>
+            <a:r>
+              <a:rPr sz="600">
+                <a:solidFill>
+                  <a:srgbClr val="0F172A"/>
+                </a:solidFill>
+              </a:rPr>
+              <a:t>Azure Static Web Apps · token mint</a:t>
+            </a:r>
+          </a:p>
+        </p:txBody>
+      </p:sp>
+      <p:sp>
+        <p:nvSpPr>
+          <p:cNvPr id="102" name="Rounded Rectangle 101"/>
+          <p:cNvSpPr/>
+          <p:nvPr/>
+        </p:nvSpPr>
+        <p:spPr>
+          <a:xfrm>
+            <a:off x="6355080" y="1243584"/>
+            <a:ext cx="2670048" cy="283464"/>
+          </a:xfrm>
+          <a:prstGeom prst="roundRect">
+            <a:avLst/>
+          </a:prstGeom>
+          <a:solidFill>
+            <a:srgbClr val="EFF6FF"/>
+          </a:solidFill>
+          <a:ln w="5080">
+            <a:solidFill>
+              <a:srgbClr val="0078D4"/>
+            </a:solidFill>
+          </a:ln>
+          <a:effectLst/>
+        </p:spPr>
+        <p:style>
+          <a:lnRef idx="1">
+            <a:schemeClr val="accent1"/>
+          </a:lnRef>
+          <a:fillRef idx="3">
+            <a:schemeClr val="accent1"/>
+          </a:fillRef>
+          <a:effectRef idx="2">
+            <a:schemeClr val="accent1"/>
+          </a:effectRef>
+          <a:fontRef idx="minor">
+            <a:schemeClr val="lt1"/>
+          </a:fontRef>
+        </p:style>
+        <p:txBody>
+          <a:bodyPr rtlCol="0" anchor="ctr"/>
+          <a:lstStyle/>
+          <a:p>
+            <a:pPr algn="ctr"/>
+          </a:p>
+        </p:txBody>
+      </p:sp>
+      <p:sp>
+        <p:nvSpPr>
+          <p:cNvPr id="103" name="TextBox 102"/>
+          <p:cNvSpPr txBox="1"/>
+          <p:nvPr/>
+        </p:nvSpPr>
+        <p:spPr>
+          <a:xfrm>
+            <a:off x="6382512" y="1243584"/>
+            <a:ext cx="2615184" cy="283464"/>
+          </a:xfrm>
+          <a:prstGeom prst="rect">
+            <a:avLst/>
+          </a:prstGeom>
+          <a:noFill/>
+        </p:spPr>
+        <p:txBody>
+          <a:bodyPr wrap="square" lIns="15000" rIns="15000" tIns="10000" bIns="10000" anchor="ctr">
+            <a:spAutoFit/>
+          </a:bodyPr>
+          <a:lstStyle/>
+          <a:p>
+            <a:pPr algn="l"/>
+            <a:r>
+              <a:rPr sz="900" b="1">
+                <a:solidFill>
+                  <a:srgbClr val="0078D4"/>
+                </a:solidFill>
+              </a:rPr>
+              <a:t>3  </a:t>
+            </a:r>
+            <a:r>
+              <a:rPr sz="600" b="1">
+                <a:solidFill>
+                  <a:srgbClr val="0F172A"/>
+                </a:solidFill>
+              </a:rPr>
+              <a:t>DIRECT LINE BRIDGE</a:t>
+            </a:r>
+          </a:p>
+          <a:p>
+            <a:pPr algn="l"/>
+            <a:r>
+              <a:rPr sz="600">
+                <a:solidFill>
+                  <a:srgbClr val="0F172A"/>
+                </a:solidFill>
+              </a:rPr>
+              <a:t>Bot Service ↔ Copilot Studio</a:t>
+            </a:r>
+          </a:p>
+        </p:txBody>
+      </p:sp>
+      <p:sp>
+        <p:nvSpPr>
+          <p:cNvPr id="104" name="Rounded Rectangle 103"/>
+          <p:cNvSpPr/>
+          <p:nvPr/>
+        </p:nvSpPr>
+        <p:spPr>
+          <a:xfrm>
+            <a:off x="6355080" y="1545336"/>
+            <a:ext cx="2670048" cy="283464"/>
+          </a:xfrm>
+          <a:prstGeom prst="roundRect">
+            <a:avLst/>
+          </a:prstGeom>
+          <a:solidFill>
+            <a:srgbClr val="FAF5FF"/>
+          </a:solidFill>
+          <a:ln w="5080">
+            <a:solidFill>
+              <a:srgbClr val="742774"/>
+            </a:solidFill>
+          </a:ln>
+          <a:effectLst/>
+        </p:spPr>
+        <p:style>
+          <a:lnRef idx="1">
+            <a:schemeClr val="accent1"/>
+          </a:lnRef>
+          <a:fillRef idx="3">
+            <a:schemeClr val="accent1"/>
+          </a:fillRef>
+          <a:effectRef idx="2">
+            <a:schemeClr val="accent1"/>
+          </a:effectRef>
+          <a:fontRef idx="minor">
+            <a:schemeClr val="lt1"/>
+          </a:fontRef>
+        </p:style>
+        <p:txBody>
+          <a:bodyPr rtlCol="0" anchor="ctr"/>
+          <a:lstStyle/>
+          <a:p>
+            <a:pPr algn="ctr"/>
+          </a:p>
+        </p:txBody>
+      </p:sp>
+      <p:sp>
+        <p:nvSpPr>
+          <p:cNvPr id="105" name="TextBox 104"/>
+          <p:cNvSpPr txBox="1"/>
+          <p:nvPr/>
+        </p:nvSpPr>
+        <p:spPr>
+          <a:xfrm>
+            <a:off x="6382512" y="1545336"/>
+            <a:ext cx="2615184" cy="283464"/>
+          </a:xfrm>
+          <a:prstGeom prst="rect">
+            <a:avLst/>
+          </a:prstGeom>
+          <a:noFill/>
+        </p:spPr>
+        <p:txBody>
+          <a:bodyPr wrap="square" lIns="15000" rIns="15000" tIns="10000" bIns="10000" anchor="ctr">
+            <a:spAutoFit/>
+          </a:bodyPr>
+          <a:lstStyle/>
+          <a:p>
+            <a:pPr algn="l"/>
+            <a:r>
+              <a:rPr sz="900" b="1">
+                <a:solidFill>
+                  <a:srgbClr val="742774"/>
+                </a:solidFill>
+              </a:rPr>
+              <a:t>4  </a:t>
+            </a:r>
+            <a:r>
+              <a:rPr sz="600" b="1">
+                <a:solidFill>
+                  <a:srgbClr val="0F172A"/>
+                </a:solidFill>
+              </a:rPr>
+              <a:t>INTAKE AGENT (AI)</a:t>
+            </a:r>
+          </a:p>
+          <a:p>
+            <a:pPr algn="l"/>
+            <a:r>
+              <a:rPr sz="600">
+                <a:solidFill>
+                  <a:srgbClr val="0F172A"/>
+                </a:solidFill>
+              </a:rPr>
+              <a:t>11 loss-type topics · sub-flows · sentiment</a:t>
+            </a:r>
+          </a:p>
+        </p:txBody>
+      </p:sp>
+      <p:sp>
+        <p:nvSpPr>
+          <p:cNvPr id="106" name="Rounded Rectangle 105"/>
+          <p:cNvSpPr/>
+          <p:nvPr/>
+        </p:nvSpPr>
+        <p:spPr>
+          <a:xfrm>
+            <a:off x="6355080" y="1847088"/>
+            <a:ext cx="2670048" cy="283464"/>
+          </a:xfrm>
+          <a:prstGeom prst="roundRect">
+            <a:avLst/>
+          </a:prstGeom>
+          <a:solidFill>
+            <a:srgbClr val="FAF5FF"/>
+          </a:solidFill>
+          <a:ln w="5080">
+            <a:solidFill>
+              <a:srgbClr val="742774"/>
+            </a:solidFill>
+          </a:ln>
+          <a:effectLst/>
+        </p:spPr>
+        <p:style>
+          <a:lnRef idx="1">
+            <a:schemeClr val="accent1"/>
+          </a:lnRef>
+          <a:fillRef idx="3">
+            <a:schemeClr val="accent1"/>
+          </a:fillRef>
+          <a:effectRef idx="2">
+            <a:schemeClr val="accent1"/>
+          </a:effectRef>
+          <a:fontRef idx="minor">
+            <a:schemeClr val="lt1"/>
+          </a:fontRef>
+        </p:style>
+        <p:txBody>
+          <a:bodyPr rtlCol="0" anchor="ctr"/>
+          <a:lstStyle/>
+          <a:p>
+            <a:pPr algn="ctr"/>
+          </a:p>
+        </p:txBody>
+      </p:sp>
+      <p:sp>
+        <p:nvSpPr>
+          <p:cNvPr id="107" name="TextBox 106"/>
+          <p:cNvSpPr txBox="1"/>
+          <p:nvPr/>
+        </p:nvSpPr>
+        <p:spPr>
+          <a:xfrm>
+            <a:off x="6382512" y="1847088"/>
+            <a:ext cx="2615184" cy="283464"/>
+          </a:xfrm>
+          <a:prstGeom prst="rect">
+            <a:avLst/>
+          </a:prstGeom>
+          <a:noFill/>
+        </p:spPr>
+        <p:txBody>
+          <a:bodyPr wrap="square" lIns="15000" rIns="15000" tIns="10000" bIns="10000" anchor="ctr">
+            <a:spAutoFit/>
+          </a:bodyPr>
+          <a:lstStyle/>
+          <a:p>
+            <a:pPr algn="l"/>
+            <a:r>
+              <a:rPr sz="900" b="1">
+                <a:solidFill>
+                  <a:srgbClr val="742774"/>
+                </a:solidFill>
+              </a:rPr>
+              <a:t>5  </a:t>
+            </a:r>
+            <a:r>
+              <a:rPr sz="600" b="1">
+                <a:solidFill>
+                  <a:srgbClr val="0F172A"/>
+                </a:solidFill>
+              </a:rPr>
+              <a:t>CREATE_CLAIM FLOW</a:t>
+            </a:r>
+          </a:p>
+          <a:p>
+            <a:pPr algn="l"/>
+            <a:r>
+              <a:rPr sz="600">
+                <a:solidFill>
+                  <a:srgbClr val="0F172A"/>
+                </a:solidFill>
+              </a:rPr>
+              <a:t>Inserts Claim + Document rows</a:t>
+            </a:r>
+          </a:p>
+        </p:txBody>
+      </p:sp>
+      <p:sp>
+        <p:nvSpPr>
+          <p:cNvPr id="108" name="Rounded Rectangle 107"/>
+          <p:cNvSpPr/>
+          <p:nvPr/>
+        </p:nvSpPr>
+        <p:spPr>
+          <a:xfrm>
+            <a:off x="6355080" y="2148840"/>
+            <a:ext cx="2670048" cy="283464"/>
+          </a:xfrm>
+          <a:prstGeom prst="roundRect">
+            <a:avLst/>
+          </a:prstGeom>
+          <a:solidFill>
+            <a:srgbClr val="FAF5FF"/>
+          </a:solidFill>
+          <a:ln w="5080">
+            <a:solidFill>
+              <a:srgbClr val="742774"/>
+            </a:solidFill>
+          </a:ln>
+          <a:effectLst/>
+        </p:spPr>
+        <p:style>
+          <a:lnRef idx="1">
+            <a:schemeClr val="accent1"/>
+          </a:lnRef>
+          <a:fillRef idx="3">
+            <a:schemeClr val="accent1"/>
+          </a:fillRef>
+          <a:effectRef idx="2">
+            <a:schemeClr val="accent1"/>
+          </a:effectRef>
+          <a:fontRef idx="minor">
+            <a:schemeClr val="lt1"/>
+          </a:fontRef>
+        </p:style>
+        <p:txBody>
+          <a:bodyPr rtlCol="0" anchor="ctr"/>
+          <a:lstStyle/>
+          <a:p>
+            <a:pPr algn="ctr"/>
+          </a:p>
+        </p:txBody>
+      </p:sp>
+      <p:sp>
+        <p:nvSpPr>
+          <p:cNvPr id="109" name="TextBox 108"/>
+          <p:cNvSpPr txBox="1"/>
+          <p:nvPr/>
+        </p:nvSpPr>
+        <p:spPr>
+          <a:xfrm>
+            <a:off x="6382512" y="2148840"/>
+            <a:ext cx="2615184" cy="283464"/>
+          </a:xfrm>
+          <a:prstGeom prst="rect">
+            <a:avLst/>
+          </a:prstGeom>
+          <a:noFill/>
+        </p:spPr>
+        <p:txBody>
+          <a:bodyPr wrap="square" lIns="15000" rIns="15000" tIns="10000" bIns="10000" anchor="ctr">
+            <a:spAutoFit/>
+          </a:bodyPr>
+          <a:lstStyle/>
+          <a:p>
+            <a:pPr algn="l"/>
+            <a:r>
+              <a:rPr sz="900" b="1">
+                <a:solidFill>
+                  <a:srgbClr val="742774"/>
+                </a:solidFill>
+              </a:rPr>
+              <a:t>6  </a:t>
+            </a:r>
+            <a:r>
+              <a:rPr sz="600" b="1">
+                <a:solidFill>
+                  <a:srgbClr val="0F172A"/>
+                </a:solidFill>
+              </a:rPr>
+              <a:t>MASTER ORCHESTRATION</a:t>
+            </a:r>
+          </a:p>
+          <a:p>
+            <a:pPr algn="l"/>
+            <a:r>
+              <a:rPr sz="600">
+                <a:solidFill>
+                  <a:srgbClr val="0F172A"/>
+                </a:solidFill>
+              </a:rPr>
+              <a:t>Trigger on Claim insert · fan-out</a:t>
+            </a:r>
+          </a:p>
+        </p:txBody>
+      </p:sp>
+      <p:sp>
+        <p:nvSpPr>
+          <p:cNvPr id="110" name="Rounded Rectangle 109"/>
+          <p:cNvSpPr/>
+          <p:nvPr/>
+        </p:nvSpPr>
+        <p:spPr>
+          <a:xfrm>
+            <a:off x="6355080" y="2450592"/>
+            <a:ext cx="2670048" cy="283464"/>
+          </a:xfrm>
+          <a:prstGeom prst="roundRect">
+            <a:avLst/>
+          </a:prstGeom>
+          <a:solidFill>
+            <a:srgbClr val="EFF6FF"/>
+          </a:solidFill>
+          <a:ln w="5080">
+            <a:solidFill>
+              <a:srgbClr val="0078D4"/>
+            </a:solidFill>
+          </a:ln>
+          <a:effectLst/>
+        </p:spPr>
+        <p:style>
+          <a:lnRef idx="1">
+            <a:schemeClr val="accent1"/>
+          </a:lnRef>
+          <a:fillRef idx="3">
+            <a:schemeClr val="accent1"/>
+          </a:fillRef>
+          <a:effectRef idx="2">
+            <a:schemeClr val="accent1"/>
+          </a:effectRef>
+          <a:fontRef idx="minor">
+            <a:schemeClr val="lt1"/>
+          </a:fontRef>
+        </p:style>
+        <p:txBody>
+          <a:bodyPr rtlCol="0" anchor="ctr"/>
+          <a:lstStyle/>
+          <a:p>
+            <a:pPr algn="ctr"/>
+          </a:p>
+        </p:txBody>
+      </p:sp>
+      <p:sp>
+        <p:nvSpPr>
+          <p:cNvPr id="111" name="TextBox 110"/>
+          <p:cNvSpPr txBox="1"/>
+          <p:nvPr/>
+        </p:nvSpPr>
+        <p:spPr>
+          <a:xfrm>
+            <a:off x="6382512" y="2450592"/>
+            <a:ext cx="2615184" cy="283464"/>
+          </a:xfrm>
+          <a:prstGeom prst="rect">
+            <a:avLst/>
+          </a:prstGeom>
+          <a:noFill/>
+        </p:spPr>
+        <p:txBody>
+          <a:bodyPr wrap="square" lIns="15000" rIns="15000" tIns="10000" bIns="10000" anchor="ctr">
+            <a:spAutoFit/>
+          </a:bodyPr>
+          <a:lstStyle/>
+          <a:p>
+            <a:pPr algn="l"/>
+            <a:r>
+              <a:rPr sz="900" b="1">
+                <a:solidFill>
+                  <a:srgbClr val="0078D4"/>
+                </a:solidFill>
+              </a:rPr>
+              <a:t>7  </a:t>
+            </a:r>
+            <a:r>
+              <a:rPr sz="600" b="1">
+                <a:solidFill>
+                  <a:srgbClr val="0F172A"/>
+                </a:solidFill>
+              </a:rPr>
+              <a:t>EXTRACTION AGENT (AI)</a:t>
+            </a:r>
+          </a:p>
+          <a:p>
+            <a:pPr algn="l"/>
+            <a:r>
+              <a:rPr sz="600">
+                <a:solidFill>
+                  <a:srgbClr val="0F172A"/>
+                </a:solidFill>
+              </a:rPr>
+              <a:t>Doc Intel + GPT-4o Vision</a:t>
+            </a:r>
+          </a:p>
+        </p:txBody>
+      </p:sp>
+      <p:sp>
+        <p:nvSpPr>
+          <p:cNvPr id="112" name="Rounded Rectangle 111"/>
+          <p:cNvSpPr/>
+          <p:nvPr/>
+        </p:nvSpPr>
+        <p:spPr>
+          <a:xfrm>
+            <a:off x="6355080" y="2752344"/>
+            <a:ext cx="2670048" cy="283464"/>
+          </a:xfrm>
+          <a:prstGeom prst="roundRect">
+            <a:avLst/>
+          </a:prstGeom>
+          <a:solidFill>
+            <a:srgbClr val="EFF6FF"/>
+          </a:solidFill>
+          <a:ln w="5080">
+            <a:solidFill>
+              <a:srgbClr val="0078D4"/>
+            </a:solidFill>
+          </a:ln>
+          <a:effectLst/>
+        </p:spPr>
+        <p:style>
+          <a:lnRef idx="1">
+            <a:schemeClr val="accent1"/>
+          </a:lnRef>
+          <a:fillRef idx="3">
+            <a:schemeClr val="accent1"/>
+          </a:fillRef>
+          <a:effectRef idx="2">
+            <a:schemeClr val="accent1"/>
+          </a:effectRef>
+          <a:fontRef idx="minor">
+            <a:schemeClr val="lt1"/>
+          </a:fontRef>
+        </p:style>
+        <p:txBody>
+          <a:bodyPr rtlCol="0" anchor="ctr"/>
+          <a:lstStyle/>
+          <a:p>
+            <a:pPr algn="ctr"/>
+          </a:p>
+        </p:txBody>
+      </p:sp>
+      <p:sp>
+        <p:nvSpPr>
+          <p:cNvPr id="113" name="TextBox 112"/>
+          <p:cNvSpPr txBox="1"/>
+          <p:nvPr/>
+        </p:nvSpPr>
+        <p:spPr>
+          <a:xfrm>
+            <a:off x="6382512" y="2752344"/>
+            <a:ext cx="2615184" cy="283464"/>
+          </a:xfrm>
+          <a:prstGeom prst="rect">
+            <a:avLst/>
+          </a:prstGeom>
+          <a:noFill/>
+        </p:spPr>
+        <p:txBody>
+          <a:bodyPr wrap="square" lIns="15000" rIns="15000" tIns="10000" bIns="10000" anchor="ctr">
+            <a:spAutoFit/>
+          </a:bodyPr>
+          <a:lstStyle/>
+          <a:p>
+            <a:pPr algn="l"/>
+            <a:r>
+              <a:rPr sz="900" b="1">
+                <a:solidFill>
+                  <a:srgbClr val="0078D4"/>
+                </a:solidFill>
+              </a:rPr>
+              <a:t>8  </a:t>
+            </a:r>
+            <a:r>
+              <a:rPr sz="600" b="1">
+                <a:solidFill>
+                  <a:srgbClr val="0F172A"/>
+                </a:solidFill>
+              </a:rPr>
+              <a:t>POLICY AGENT (AI)</a:t>
+            </a:r>
+          </a:p>
+          <a:p>
+            <a:pPr algn="l"/>
+            <a:r>
+              <a:rPr sz="600">
+                <a:solidFill>
+                  <a:srgbClr val="0F172A"/>
+                </a:solidFill>
+              </a:rPr>
+              <a:t>AI Search vector RAG + citations</a:t>
+            </a:r>
+          </a:p>
+        </p:txBody>
+      </p:sp>
+      <p:sp>
+        <p:nvSpPr>
+          <p:cNvPr id="114" name="Rounded Rectangle 113"/>
+          <p:cNvSpPr/>
+          <p:nvPr/>
+        </p:nvSpPr>
+        <p:spPr>
+          <a:xfrm>
+            <a:off x="6355080" y="3054096"/>
+            <a:ext cx="2670048" cy="283464"/>
+          </a:xfrm>
+          <a:prstGeom prst="roundRect">
+            <a:avLst/>
+          </a:prstGeom>
+          <a:solidFill>
+            <a:srgbClr val="EFF6FF"/>
+          </a:solidFill>
+          <a:ln w="5080">
+            <a:solidFill>
+              <a:srgbClr val="0078D4"/>
+            </a:solidFill>
+          </a:ln>
+          <a:effectLst/>
+        </p:spPr>
+        <p:style>
+          <a:lnRef idx="1">
+            <a:schemeClr val="accent1"/>
+          </a:lnRef>
+          <a:fillRef idx="3">
+            <a:schemeClr val="accent1"/>
+          </a:fillRef>
+          <a:effectRef idx="2">
+            <a:schemeClr val="accent1"/>
+          </a:effectRef>
+          <a:fontRef idx="minor">
+            <a:schemeClr val="lt1"/>
+          </a:fontRef>
+        </p:style>
+        <p:txBody>
+          <a:bodyPr rtlCol="0" anchor="ctr"/>
+          <a:lstStyle/>
+          <a:p>
+            <a:pPr algn="ctr"/>
+          </a:p>
+        </p:txBody>
+      </p:sp>
+      <p:sp>
+        <p:nvSpPr>
+          <p:cNvPr id="115" name="TextBox 114"/>
+          <p:cNvSpPr txBox="1"/>
+          <p:nvPr/>
+        </p:nvSpPr>
+        <p:spPr>
+          <a:xfrm>
+            <a:off x="6382512" y="3054096"/>
+            <a:ext cx="2615184" cy="283464"/>
+          </a:xfrm>
+          <a:prstGeom prst="rect">
+            <a:avLst/>
+          </a:prstGeom>
+          <a:noFill/>
+        </p:spPr>
+        <p:txBody>
+          <a:bodyPr wrap="square" lIns="15000" rIns="15000" tIns="10000" bIns="10000" anchor="ctr">
+            <a:spAutoFit/>
+          </a:bodyPr>
+          <a:lstStyle/>
+          <a:p>
+            <a:pPr algn="l"/>
+            <a:r>
+              <a:rPr sz="900" b="1">
+                <a:solidFill>
+                  <a:srgbClr val="0078D4"/>
+                </a:solidFill>
+              </a:rPr>
+              <a:t>9  </a:t>
+            </a:r>
+            <a:r>
+              <a:rPr sz="600" b="1">
+                <a:solidFill>
+                  <a:srgbClr val="0F172A"/>
+                </a:solidFill>
+              </a:rPr>
+              <a:t>VALIDATION AGENT</a:t>
+            </a:r>
+          </a:p>
+          <a:p>
+            <a:pPr algn="l"/>
+            <a:r>
+              <a:rPr sz="600">
+                <a:solidFill>
+                  <a:srgbClr val="0F172A"/>
+                </a:solidFill>
+              </a:rPr>
+              <a:t>7 ext checks (NOAA, NHTSA live + 5 sb)</a:t>
+            </a:r>
+          </a:p>
+        </p:txBody>
+      </p:sp>
+      <p:sp>
+        <p:nvSpPr>
+          <p:cNvPr id="116" name="Rounded Rectangle 115"/>
+          <p:cNvSpPr/>
+          <p:nvPr/>
+        </p:nvSpPr>
+        <p:spPr>
+          <a:xfrm>
+            <a:off x="6355080" y="3355848"/>
+            <a:ext cx="2670048" cy="283464"/>
+          </a:xfrm>
+          <a:prstGeom prst="roundRect">
+            <a:avLst/>
+          </a:prstGeom>
+          <a:solidFill>
+            <a:srgbClr val="EFF6FF"/>
+          </a:solidFill>
+          <a:ln w="5080">
+            <a:solidFill>
+              <a:srgbClr val="0078D4"/>
+            </a:solidFill>
+          </a:ln>
+          <a:effectLst/>
+        </p:spPr>
+        <p:style>
+          <a:lnRef idx="1">
+            <a:schemeClr val="accent1"/>
+          </a:lnRef>
+          <a:fillRef idx="3">
+            <a:schemeClr val="accent1"/>
+          </a:fillRef>
+          <a:effectRef idx="2">
+            <a:schemeClr val="accent1"/>
+          </a:effectRef>
+          <a:fontRef idx="minor">
+            <a:schemeClr val="lt1"/>
+          </a:fontRef>
+        </p:style>
+        <p:txBody>
+          <a:bodyPr rtlCol="0" anchor="ctr"/>
+          <a:lstStyle/>
+          <a:p>
+            <a:pPr algn="ctr"/>
+          </a:p>
+        </p:txBody>
+      </p:sp>
+      <p:sp>
+        <p:nvSpPr>
+          <p:cNvPr id="117" name="TextBox 116"/>
+          <p:cNvSpPr txBox="1"/>
+          <p:nvPr/>
+        </p:nvSpPr>
+        <p:spPr>
+          <a:xfrm>
+            <a:off x="6382512" y="3355848"/>
+            <a:ext cx="2615184" cy="283464"/>
+          </a:xfrm>
+          <a:prstGeom prst="rect">
+            <a:avLst/>
+          </a:prstGeom>
+          <a:noFill/>
+        </p:spPr>
+        <p:txBody>
+          <a:bodyPr wrap="square" lIns="15000" rIns="15000" tIns="10000" bIns="10000" anchor="ctr">
+            <a:spAutoFit/>
+          </a:bodyPr>
+          <a:lstStyle/>
+          <a:p>
+            <a:pPr algn="l"/>
+            <a:r>
+              <a:rPr sz="900" b="1">
+                <a:solidFill>
+                  <a:srgbClr val="0078D4"/>
+                </a:solidFill>
+              </a:rPr>
+              <a:t>10  </a:t>
+            </a:r>
+            <a:r>
+              <a:rPr sz="600" b="1">
+                <a:solidFill>
+                  <a:srgbClr val="0F172A"/>
+                </a:solidFill>
+              </a:rPr>
+              <a:t>ADJUDICATION (AI · GPT-4.1)</a:t>
+            </a:r>
+          </a:p>
+          <a:p>
+            <a:pPr algn="l"/>
+            <a:r>
+              <a:rPr sz="600">
+                <a:solidFill>
+                  <a:srgbClr val="0F172A"/>
+                </a:solidFill>
+              </a:rPr>
+              <a:t>Decides + assigns tier</a:t>
+            </a:r>
+          </a:p>
+        </p:txBody>
+      </p:sp>
+      <p:sp>
+        <p:nvSpPr>
+          <p:cNvPr id="118" name="Rounded Rectangle 117"/>
+          <p:cNvSpPr/>
+          <p:nvPr/>
+        </p:nvSpPr>
+        <p:spPr>
+          <a:xfrm>
+            <a:off x="6355080" y="3657600"/>
+            <a:ext cx="2670048" cy="283464"/>
+          </a:xfrm>
+          <a:prstGeom prst="roundRect">
+            <a:avLst/>
+          </a:prstGeom>
+          <a:solidFill>
+            <a:srgbClr val="F0FDF4"/>
+          </a:solidFill>
+          <a:ln w="5080">
+            <a:solidFill>
+              <a:srgbClr val="107C10"/>
+            </a:solidFill>
+          </a:ln>
+          <a:effectLst/>
+        </p:spPr>
+        <p:style>
+          <a:lnRef idx="1">
+            <a:schemeClr val="accent1"/>
+          </a:lnRef>
+          <a:fillRef idx="3">
+            <a:schemeClr val="accent1"/>
+          </a:fillRef>
+          <a:effectRef idx="2">
+            <a:schemeClr val="accent1"/>
+          </a:effectRef>
+          <a:fontRef idx="minor">
+            <a:schemeClr val="lt1"/>
+          </a:fontRef>
+        </p:style>
+        <p:txBody>
+          <a:bodyPr rtlCol="0" anchor="ctr"/>
+          <a:lstStyle/>
+          <a:p>
+            <a:pPr algn="ctr"/>
+          </a:p>
+        </p:txBody>
+      </p:sp>
+      <p:sp>
+        <p:nvSpPr>
+          <p:cNvPr id="119" name="TextBox 118"/>
+          <p:cNvSpPr txBox="1"/>
+          <p:nvPr/>
+        </p:nvSpPr>
+        <p:spPr>
+          <a:xfrm>
+            <a:off x="6382512" y="3657600"/>
+            <a:ext cx="2615184" cy="283464"/>
+          </a:xfrm>
+          <a:prstGeom prst="rect">
+            <a:avLst/>
+          </a:prstGeom>
+          <a:noFill/>
+        </p:spPr>
+        <p:txBody>
+          <a:bodyPr wrap="square" lIns="15000" rIns="15000" tIns="10000" bIns="10000" anchor="ctr">
+            <a:spAutoFit/>
+          </a:bodyPr>
+          <a:lstStyle/>
+          <a:p>
+            <a:pPr algn="l"/>
+            <a:r>
+              <a:rPr sz="900" b="1">
+                <a:solidFill>
+                  <a:srgbClr val="107C10"/>
+                </a:solidFill>
+              </a:rPr>
+              <a:t>11  </a:t>
+            </a:r>
+            <a:r>
+              <a:rPr sz="600" b="1">
+                <a:solidFill>
+                  <a:srgbClr val="0F172A"/>
+                </a:solidFill>
+              </a:rPr>
+              <a:t>TIER ROUTER</a:t>
+            </a:r>
+          </a:p>
+          <a:p>
+            <a:pPr algn="l"/>
+            <a:r>
+              <a:rPr sz="600">
+                <a:solidFill>
+                  <a:srgbClr val="0F172A"/>
+                </a:solidFill>
+              </a:rPr>
+              <a:t>T1 auto · T2 adjuster · T3 CSR</a:t>
+            </a:r>
+          </a:p>
+        </p:txBody>
+      </p:sp>
+      <p:sp>
+        <p:nvSpPr>
+          <p:cNvPr id="120" name="Rounded Rectangle 119"/>
+          <p:cNvSpPr/>
+          <p:nvPr/>
+        </p:nvSpPr>
+        <p:spPr>
+          <a:xfrm>
+            <a:off x="6355080" y="3959352"/>
+            <a:ext cx="2670048" cy="283464"/>
+          </a:xfrm>
+          <a:prstGeom prst="roundRect">
+            <a:avLst/>
+          </a:prstGeom>
+          <a:solidFill>
+            <a:srgbClr val="FAF5FF"/>
+          </a:solidFill>
+          <a:ln w="5080">
+            <a:solidFill>
+              <a:srgbClr val="742774"/>
+            </a:solidFill>
+          </a:ln>
+          <a:effectLst/>
+        </p:spPr>
+        <p:style>
+          <a:lnRef idx="1">
+            <a:schemeClr val="accent1"/>
+          </a:lnRef>
+          <a:fillRef idx="3">
+            <a:schemeClr val="accent1"/>
+          </a:fillRef>
+          <a:effectRef idx="2">
+            <a:schemeClr val="accent1"/>
+          </a:effectRef>
+          <a:fontRef idx="minor">
+            <a:schemeClr val="lt1"/>
+          </a:fontRef>
+        </p:style>
+        <p:txBody>
+          <a:bodyPr rtlCol="0" anchor="ctr"/>
+          <a:lstStyle/>
+          <a:p>
+            <a:pPr algn="ctr"/>
+          </a:p>
+        </p:txBody>
+      </p:sp>
+      <p:sp>
+        <p:nvSpPr>
+          <p:cNvPr id="121" name="TextBox 120"/>
+          <p:cNvSpPr txBox="1"/>
+          <p:nvPr/>
+        </p:nvSpPr>
+        <p:spPr>
+          <a:xfrm>
+            <a:off x="6382512" y="3959352"/>
+            <a:ext cx="2615184" cy="283464"/>
+          </a:xfrm>
+          <a:prstGeom prst="rect">
+            <a:avLst/>
+          </a:prstGeom>
+          <a:noFill/>
+        </p:spPr>
+        <p:txBody>
+          <a:bodyPr wrap="square" lIns="15000" rIns="15000" tIns="10000" bIns="10000" anchor="ctr">
+            <a:spAutoFit/>
+          </a:bodyPr>
+          <a:lstStyle/>
+          <a:p>
+            <a:pPr algn="l"/>
+            <a:r>
+              <a:rPr sz="900" b="1">
+                <a:solidFill>
+                  <a:srgbClr val="742774"/>
+                </a:solidFill>
+              </a:rPr>
+              <a:t>12  </a:t>
+            </a:r>
+            <a:r>
+              <a:rPr sz="600" b="1">
+                <a:solidFill>
+                  <a:srgbClr val="0F172A"/>
+                </a:solidFill>
+              </a:rPr>
+              <a:t>EXPLANATION AGENT (AI)</a:t>
+            </a:r>
+          </a:p>
+          <a:p>
+            <a:pPr algn="l"/>
+            <a:r>
+              <a:rPr sz="600">
+                <a:solidFill>
+                  <a:srgbClr val="0F172A"/>
+                </a:solidFill>
+              </a:rPr>
+              <a:t>Runs every claim · plain English</a:t>
+            </a:r>
+          </a:p>
+        </p:txBody>
+      </p:sp>
+      <p:sp>
+        <p:nvSpPr>
+          <p:cNvPr id="122" name="Rounded Rectangle 121"/>
+          <p:cNvSpPr/>
+          <p:nvPr/>
+        </p:nvSpPr>
+        <p:spPr>
+          <a:xfrm>
+            <a:off x="6355080" y="4261104"/>
+            <a:ext cx="2670048" cy="283464"/>
+          </a:xfrm>
+          <a:prstGeom prst="roundRect">
+            <a:avLst/>
+          </a:prstGeom>
+          <a:solidFill>
+            <a:srgbClr val="F0FDF4"/>
+          </a:solidFill>
+          <a:ln w="5080">
+            <a:solidFill>
+              <a:srgbClr val="107C10"/>
+            </a:solidFill>
+          </a:ln>
+          <a:effectLst/>
+        </p:spPr>
+        <p:style>
+          <a:lnRef idx="1">
+            <a:schemeClr val="accent1"/>
+          </a:lnRef>
+          <a:fillRef idx="3">
+            <a:schemeClr val="accent1"/>
+          </a:fillRef>
+          <a:effectRef idx="2">
+            <a:schemeClr val="accent1"/>
+          </a:effectRef>
+          <a:fontRef idx="minor">
+            <a:schemeClr val="lt1"/>
+          </a:fontRef>
+        </p:style>
+        <p:txBody>
+          <a:bodyPr rtlCol="0" anchor="ctr"/>
+          <a:lstStyle/>
+          <a:p>
+            <a:pPr algn="ctr"/>
+          </a:p>
+        </p:txBody>
+      </p:sp>
+      <p:sp>
+        <p:nvSpPr>
+          <p:cNvPr id="123" name="TextBox 122"/>
+          <p:cNvSpPr txBox="1"/>
+          <p:nvPr/>
+        </p:nvSpPr>
+        <p:spPr>
+          <a:xfrm>
+            <a:off x="6382512" y="4261104"/>
+            <a:ext cx="2615184" cy="283464"/>
+          </a:xfrm>
+          <a:prstGeom prst="rect">
+            <a:avLst/>
+          </a:prstGeom>
+          <a:noFill/>
+        </p:spPr>
+        <p:txBody>
+          <a:bodyPr wrap="square" lIns="15000" rIns="15000" tIns="10000" bIns="10000" anchor="ctr">
+            <a:spAutoFit/>
+          </a:bodyPr>
+          <a:lstStyle/>
+          <a:p>
+            <a:pPr algn="l"/>
+            <a:r>
+              <a:rPr sz="900" b="1">
+                <a:solidFill>
+                  <a:srgbClr val="107C10"/>
+                </a:solidFill>
+              </a:rPr>
+              <a:t>13  </a:t>
+            </a:r>
+            <a:r>
+              <a:rPr sz="600" b="1">
+                <a:solidFill>
+                  <a:srgbClr val="0F172A"/>
+                </a:solidFill>
+              </a:rPr>
+              <a:t>NOTIFY_CUSTOMER</a:t>
+            </a:r>
+          </a:p>
+          <a:p>
+            <a:pPr algn="l"/>
+            <a:r>
+              <a:rPr sz="600">
+                <a:solidFill>
+                  <a:srgbClr val="0F172A"/>
+                </a:solidFill>
+              </a:rPr>
+              <a:t>Reply on original channel · loop close</a:t>
+            </a:r>
+          </a:p>
+        </p:txBody>
+      </p:sp>
+      <p:sp>
+        <p:nvSpPr>
+          <p:cNvPr id="124" name="Rounded Rectangle 123"/>
+          <p:cNvSpPr/>
+          <p:nvPr/>
+        </p:nvSpPr>
+        <p:spPr>
+          <a:xfrm>
+            <a:off x="6355080" y="4608576"/>
+            <a:ext cx="2670048" cy="384048"/>
+          </a:xfrm>
+          <a:prstGeom prst="roundRect">
+            <a:avLst/>
+          </a:prstGeom>
+          <a:solidFill>
+            <a:srgbClr val="FEF3C7"/>
+          </a:solidFill>
+          <a:ln w="12700">
+            <a:solidFill>
+              <a:srgbClr val="D99416"/>
+            </a:solidFill>
+          </a:ln>
+          <a:effectLst/>
+        </p:spPr>
+        <p:style>
+          <a:lnRef idx="1">
+            <a:schemeClr val="accent1"/>
+          </a:lnRef>
+          <a:fillRef idx="3">
+            <a:schemeClr val="accent1"/>
+          </a:fillRef>
+          <a:effectRef idx="2">
+            <a:schemeClr val="accent1"/>
+          </a:effectRef>
+          <a:fontRef idx="minor">
+            <a:schemeClr val="lt1"/>
+          </a:fontRef>
+        </p:style>
+        <p:txBody>
+          <a:bodyPr rtlCol="0" anchor="ctr"/>
+          <a:lstStyle/>
+          <a:p>
+            <a:pPr algn="ctr"/>
+          </a:p>
+        </p:txBody>
+      </p:sp>
+      <p:sp>
+        <p:nvSpPr>
+          <p:cNvPr id="125" name="TextBox 124"/>
+          <p:cNvSpPr txBox="1"/>
+          <p:nvPr/>
+        </p:nvSpPr>
+        <p:spPr>
+          <a:xfrm>
+            <a:off x="6382512" y="4608576"/>
+            <a:ext cx="2615184" cy="384048"/>
+          </a:xfrm>
+          <a:prstGeom prst="rect">
+            <a:avLst/>
+          </a:prstGeom>
+          <a:noFill/>
+        </p:spPr>
+        <p:txBody>
+          <a:bodyPr wrap="square" lIns="15000" rIns="15000" tIns="10000" bIns="10000">
+            <a:spAutoFit/>
+          </a:bodyPr>
+          <a:lstStyle/>
+          <a:p>
+            <a:pPr algn="l"/>
+            <a:r>
+              <a:rPr sz="700" b="1">
+                <a:solidFill>
+                  <a:srgbClr val="92400E"/>
+                </a:solidFill>
+              </a:rPr>
+              <a:t>🛡 GLASS BOX  </a:t>
+            </a:r>
+            <a:r>
+              <a:rPr sz="600">
+                <a:solidFill>
+                  <a:srgbClr val="92400E"/>
+                </a:solidFill>
+              </a:rPr>
+              <a:t>(cross-cutting)</a:t>
+            </a:r>
+          </a:p>
+          <a:p>
+            <a:pPr algn="l"/>
+            <a:r>
+              <a:rPr sz="600">
+                <a:solidFill>
+                  <a:srgbClr val="92400E"/>
+                </a:solidFill>
+              </a:rPr>
+              <a:t>1 row per AI step → CO SB21-169 · NAIC · NY DFS · CA AB 2930</a:t>
+            </a:r>
+          </a:p>
+        </p:txBody>
+      </p:sp>
+      <p:sp>
+        <p:nvSpPr>
+          <p:cNvPr id="126" name="TextBox 125"/>
+          <p:cNvSpPr txBox="1"/>
+          <p:nvPr/>
+        </p:nvSpPr>
+        <p:spPr>
+          <a:xfrm>
+            <a:off x="73152" y="4983480"/>
+            <a:ext cx="9006840" cy="137160"/>
+          </a:xfrm>
+          <a:prstGeom prst="rect">
+            <a:avLst/>
+          </a:prstGeom>
+          <a:noFill/>
+        </p:spPr>
+        <p:txBody>
+          <a:bodyPr wrap="square" lIns="15000" rIns="15000" tIns="5000" bIns="5000" anchor="ctr">
+            <a:spAutoFit/>
+          </a:bodyPr>
+          <a:lstStyle/>
+          <a:p>
+            <a:pPr algn="l"/>
+            <a:r>
               <a:rPr sz="600" b="0" i="1">
                 <a:solidFill>
                   <a:srgbClr val="5A6680"/>
                 </a:solidFill>
               </a:rPr>
-              <a:t>AI Elites carrier  ·  Glass Box AI  ·  Compliance: CO SB21-169 · NAIC AI Bulletin · NY DFS Circular 7 · CA AB 2930</a:t>
+              <a:t>ARROWS:  red = runtime flow  ·  red dashed = loop back to customer  ·  black = Tier-2 / Tier-3 human branches  ·  gold dashed = audit write</a:t>
             </a:r>
           </a:p>
         </p:txBody>

--- a/docs/hackathon_blueprint_filled.pptx
+++ b/docs/hackathon_blueprint_filled.pptx
@@ -5200,7 +5200,7 @@
         <p:spPr>
           <a:xfrm>
             <a:off x="557784" y="365760"/>
-            <a:ext cx="5641848" cy="475488"/>
+            <a:ext cx="6601968" cy="475488"/>
           </a:xfrm>
           <a:prstGeom prst="rect">
             <a:avLst/>
@@ -5337,7 +5337,7 @@
         <p:spPr>
           <a:xfrm>
             <a:off x="557784" y="859536"/>
-            <a:ext cx="5641848" cy="475488"/>
+            <a:ext cx="6601968" cy="475488"/>
           </a:xfrm>
           <a:prstGeom prst="rect">
             <a:avLst/>
@@ -5474,7 +5474,7 @@
         <p:spPr>
           <a:xfrm>
             <a:off x="557784" y="1353312"/>
-            <a:ext cx="5641848" cy="566928"/>
+            <a:ext cx="6601968" cy="566928"/>
           </a:xfrm>
           <a:prstGeom prst="rect">
             <a:avLst/>
@@ -5611,7 +5611,7 @@
         <p:spPr>
           <a:xfrm>
             <a:off x="557784" y="1938528"/>
-            <a:ext cx="5641848" cy="566928"/>
+            <a:ext cx="6601968" cy="566928"/>
           </a:xfrm>
           <a:prstGeom prst="rect">
             <a:avLst/>
@@ -5748,7 +5748,7 @@
         <p:spPr>
           <a:xfrm>
             <a:off x="557784" y="2523744"/>
-            <a:ext cx="5641848" cy="841248"/>
+            <a:ext cx="6601968" cy="841248"/>
           </a:xfrm>
           <a:prstGeom prst="rect">
             <a:avLst/>
@@ -5885,7 +5885,7 @@
         <p:spPr>
           <a:xfrm>
             <a:off x="557784" y="3383280"/>
-            <a:ext cx="5641848" cy="475488"/>
+            <a:ext cx="6601968" cy="475488"/>
           </a:xfrm>
           <a:prstGeom prst="rect">
             <a:avLst/>
@@ -6022,7 +6022,7 @@
         <p:spPr>
           <a:xfrm>
             <a:off x="557784" y="3877056"/>
-            <a:ext cx="5641848" cy="1097280"/>
+            <a:ext cx="6601968" cy="1097280"/>
           </a:xfrm>
           <a:prstGeom prst="rect">
             <a:avLst/>
@@ -6158,8 +6158,8 @@
         </p:nvSpPr>
         <p:spPr>
           <a:xfrm>
-            <a:off x="685800" y="402336"/>
-            <a:ext cx="914400" cy="384048"/>
+            <a:off x="777240" y="402336"/>
+            <a:ext cx="1280160" cy="384048"/>
           </a:xfrm>
           <a:prstGeom prst="roundRect">
             <a:avLst/>
@@ -6204,8 +6204,8 @@
         </p:nvSpPr>
         <p:spPr>
           <a:xfrm>
-            <a:off x="685800" y="402336"/>
-            <a:ext cx="914400" cy="384048"/>
+            <a:off x="777240" y="402336"/>
+            <a:ext cx="1280160" cy="384048"/>
           </a:xfrm>
           <a:prstGeom prst="rect">
             <a:avLst/>
@@ -6249,8 +6249,8 @@
         </p:nvSpPr>
         <p:spPr>
           <a:xfrm>
-            <a:off x="960120" y="896112"/>
-            <a:ext cx="1005840" cy="384048"/>
+            <a:off x="777240" y="896112"/>
+            <a:ext cx="1280160" cy="384048"/>
           </a:xfrm>
           <a:prstGeom prst="roundRect">
             <a:avLst/>
@@ -6295,8 +6295,8 @@
         </p:nvSpPr>
         <p:spPr>
           <a:xfrm>
-            <a:off x="960120" y="896112"/>
-            <a:ext cx="1005840" cy="384048"/>
+            <a:off x="777240" y="896112"/>
+            <a:ext cx="1280160" cy="384048"/>
           </a:xfrm>
           <a:prstGeom prst="rect">
             <a:avLst/>
@@ -6340,8 +6340,8 @@
         </p:nvSpPr>
         <p:spPr>
           <a:xfrm>
-            <a:off x="2148840" y="896112"/>
-            <a:ext cx="960120" cy="384048"/>
+            <a:off x="2331720" y="896112"/>
+            <a:ext cx="1188720" cy="384048"/>
           </a:xfrm>
           <a:prstGeom prst="roundRect">
             <a:avLst/>
@@ -6386,8 +6386,8 @@
         </p:nvSpPr>
         <p:spPr>
           <a:xfrm>
-            <a:off x="2148840" y="896112"/>
-            <a:ext cx="960120" cy="384048"/>
+            <a:off x="2331720" y="896112"/>
+            <a:ext cx="1188720" cy="384048"/>
           </a:xfrm>
           <a:prstGeom prst="rect">
             <a:avLst/>
@@ -6431,8 +6431,8 @@
         </p:nvSpPr>
         <p:spPr>
           <a:xfrm>
-            <a:off x="2148840" y="1417320"/>
-            <a:ext cx="1051560" cy="438912"/>
+            <a:off x="2331720" y="1417320"/>
+            <a:ext cx="1188720" cy="438912"/>
           </a:xfrm>
           <a:prstGeom prst="roundRect">
             <a:avLst/>
@@ -6477,8 +6477,8 @@
         </p:nvSpPr>
         <p:spPr>
           <a:xfrm>
-            <a:off x="2148840" y="1417320"/>
-            <a:ext cx="1051560" cy="438912"/>
+            <a:off x="2331720" y="1417320"/>
+            <a:ext cx="1188720" cy="438912"/>
           </a:xfrm>
           <a:prstGeom prst="rect">
             <a:avLst/>
@@ -6522,8 +6522,8 @@
         </p:nvSpPr>
         <p:spPr>
           <a:xfrm>
-            <a:off x="5029200" y="1417320"/>
-            <a:ext cx="1143000" cy="438912"/>
+            <a:off x="5669280" y="1417320"/>
+            <a:ext cx="1417320" cy="438912"/>
           </a:xfrm>
           <a:prstGeom prst="roundRect">
             <a:avLst/>
@@ -6568,8 +6568,8 @@
         </p:nvSpPr>
         <p:spPr>
           <a:xfrm>
-            <a:off x="5029200" y="1417320"/>
-            <a:ext cx="1143000" cy="438912"/>
+            <a:off x="5669280" y="1417320"/>
+            <a:ext cx="1417320" cy="438912"/>
           </a:xfrm>
           <a:prstGeom prst="rect">
             <a:avLst/>
@@ -6613,8 +6613,8 @@
         </p:nvSpPr>
         <p:spPr>
           <a:xfrm>
-            <a:off x="2377440" y="2011680"/>
-            <a:ext cx="777240" cy="438912"/>
+            <a:off x="2331720" y="2011680"/>
+            <a:ext cx="960120" cy="438912"/>
           </a:xfrm>
           <a:prstGeom prst="roundRect">
             <a:avLst/>
@@ -6659,8 +6659,8 @@
         </p:nvSpPr>
         <p:spPr>
           <a:xfrm>
-            <a:off x="2377440" y="2011680"/>
-            <a:ext cx="777240" cy="438912"/>
+            <a:off x="2331720" y="2011680"/>
+            <a:ext cx="960120" cy="438912"/>
           </a:xfrm>
           <a:prstGeom prst="rect">
             <a:avLst/>
@@ -6704,8 +6704,8 @@
         </p:nvSpPr>
         <p:spPr>
           <a:xfrm>
-            <a:off x="3246120" y="2011680"/>
-            <a:ext cx="960120" cy="438912"/>
+            <a:off x="3429000" y="2011680"/>
+            <a:ext cx="1143000" cy="438912"/>
           </a:xfrm>
           <a:prstGeom prst="roundRect">
             <a:avLst/>
@@ -6750,8 +6750,8 @@
         </p:nvSpPr>
         <p:spPr>
           <a:xfrm>
-            <a:off x="3246120" y="2011680"/>
-            <a:ext cx="960120" cy="438912"/>
+            <a:off x="3429000" y="2011680"/>
+            <a:ext cx="1143000" cy="438912"/>
           </a:xfrm>
           <a:prstGeom prst="rect">
             <a:avLst/>
@@ -6795,8 +6795,8 @@
         </p:nvSpPr>
         <p:spPr>
           <a:xfrm>
-            <a:off x="4297680" y="2011680"/>
-            <a:ext cx="685800" cy="438912"/>
+            <a:off x="4709160" y="2011680"/>
+            <a:ext cx="777240" cy="438912"/>
           </a:xfrm>
           <a:prstGeom prst="diamond">
             <a:avLst/>
@@ -6841,8 +6841,8 @@
         </p:nvSpPr>
         <p:spPr>
           <a:xfrm>
-            <a:off x="4297680" y="2029968"/>
-            <a:ext cx="685800" cy="402336"/>
+            <a:off x="4709160" y="2029968"/>
+            <a:ext cx="777240" cy="402336"/>
           </a:xfrm>
           <a:prstGeom prst="rect">
             <a:avLst/>
@@ -6886,8 +6886,8 @@
         </p:nvSpPr>
         <p:spPr>
           <a:xfrm>
-            <a:off x="5074920" y="2011680"/>
-            <a:ext cx="1005840" cy="438912"/>
+            <a:off x="5669280" y="2011680"/>
+            <a:ext cx="1417320" cy="438912"/>
           </a:xfrm>
           <a:prstGeom prst="roundRect">
             <a:avLst/>
@@ -6932,8 +6932,8 @@
         </p:nvSpPr>
         <p:spPr>
           <a:xfrm>
-            <a:off x="5074920" y="2011680"/>
-            <a:ext cx="1005840" cy="438912"/>
+            <a:off x="5669280" y="2011680"/>
+            <a:ext cx="1417320" cy="438912"/>
           </a:xfrm>
           <a:prstGeom prst="rect">
             <a:avLst/>
@@ -6977,8 +6977,8 @@
         </p:nvSpPr>
         <p:spPr>
           <a:xfrm>
-            <a:off x="2377440" y="2578608"/>
-            <a:ext cx="1371600" cy="219456"/>
+            <a:off x="2331720" y="2578608"/>
+            <a:ext cx="1600200" cy="219456"/>
           </a:xfrm>
           <a:prstGeom prst="roundRect">
             <a:avLst/>
@@ -7023,8 +7023,8 @@
         </p:nvSpPr>
         <p:spPr>
           <a:xfrm>
-            <a:off x="2377440" y="2578608"/>
-            <a:ext cx="1371600" cy="219456"/>
+            <a:off x="2331720" y="2578608"/>
+            <a:ext cx="1600200" cy="219456"/>
           </a:xfrm>
           <a:prstGeom prst="rect">
             <a:avLst/>
@@ -7057,8 +7057,8 @@
         </p:nvSpPr>
         <p:spPr>
           <a:xfrm>
-            <a:off x="2377440" y="2816352"/>
-            <a:ext cx="1371600" cy="219456"/>
+            <a:off x="2331720" y="2816352"/>
+            <a:ext cx="1600200" cy="219456"/>
           </a:xfrm>
           <a:prstGeom prst="roundRect">
             <a:avLst/>
@@ -7103,8 +7103,8 @@
         </p:nvSpPr>
         <p:spPr>
           <a:xfrm>
-            <a:off x="2377440" y="2816352"/>
-            <a:ext cx="1371600" cy="219456"/>
+            <a:off x="2331720" y="2816352"/>
+            <a:ext cx="1600200" cy="219456"/>
           </a:xfrm>
           <a:prstGeom prst="rect">
             <a:avLst/>
@@ -7137,8 +7137,8 @@
         </p:nvSpPr>
         <p:spPr>
           <a:xfrm>
-            <a:off x="2377440" y="3054096"/>
-            <a:ext cx="1371600" cy="219456"/>
+            <a:off x="2331720" y="3054096"/>
+            <a:ext cx="1600200" cy="219456"/>
           </a:xfrm>
           <a:prstGeom prst="roundRect">
             <a:avLst/>
@@ -7183,8 +7183,8 @@
         </p:nvSpPr>
         <p:spPr>
           <a:xfrm>
-            <a:off x="2377440" y="3054096"/>
-            <a:ext cx="1371600" cy="219456"/>
+            <a:off x="2331720" y="3054096"/>
+            <a:ext cx="1600200" cy="219456"/>
           </a:xfrm>
           <a:prstGeom prst="rect">
             <a:avLst/>
@@ -7217,7 +7217,7 @@
         </p:nvSpPr>
         <p:spPr>
           <a:xfrm>
-            <a:off x="3931920" y="2743200"/>
+            <a:off x="4114800" y="2743200"/>
             <a:ext cx="1371600" cy="502920"/>
           </a:xfrm>
           <a:prstGeom prst="roundRect">
@@ -7263,7 +7263,7 @@
         </p:nvSpPr>
         <p:spPr>
           <a:xfrm>
-            <a:off x="3931920" y="2743200"/>
+            <a:off x="4114800" y="2743200"/>
             <a:ext cx="1371600" cy="502920"/>
           </a:xfrm>
           <a:prstGeom prst="rect">
@@ -7308,8 +7308,8 @@
         </p:nvSpPr>
         <p:spPr>
           <a:xfrm>
-            <a:off x="3931920" y="3438144"/>
-            <a:ext cx="1097280" cy="182880"/>
+            <a:off x="4114800" y="3438144"/>
+            <a:ext cx="1371600" cy="182880"/>
           </a:xfrm>
           <a:prstGeom prst="roundRect">
             <a:avLst/>
@@ -7354,8 +7354,8 @@
         </p:nvSpPr>
         <p:spPr>
           <a:xfrm>
-            <a:off x="3931920" y="3438144"/>
-            <a:ext cx="1097280" cy="182880"/>
+            <a:off x="4114800" y="3438144"/>
+            <a:ext cx="1371600" cy="182880"/>
           </a:xfrm>
           <a:prstGeom prst="rect">
             <a:avLst/>
@@ -7388,8 +7388,8 @@
         </p:nvSpPr>
         <p:spPr>
           <a:xfrm>
-            <a:off x="5074920" y="3438144"/>
-            <a:ext cx="1097280" cy="182880"/>
+            <a:off x="5669280" y="3438144"/>
+            <a:ext cx="1417320" cy="182880"/>
           </a:xfrm>
           <a:prstGeom prst="roundRect">
             <a:avLst/>
@@ -7434,8 +7434,8 @@
         </p:nvSpPr>
         <p:spPr>
           <a:xfrm>
-            <a:off x="5074920" y="3438144"/>
-            <a:ext cx="1097280" cy="182880"/>
+            <a:off x="5669280" y="3438144"/>
+            <a:ext cx="1417320" cy="182880"/>
           </a:xfrm>
           <a:prstGeom prst="rect">
             <a:avLst/>
@@ -7468,8 +7468,8 @@
         </p:nvSpPr>
         <p:spPr>
           <a:xfrm>
-            <a:off x="685800" y="3456432"/>
-            <a:ext cx="3154680" cy="146304"/>
+            <a:off x="594360" y="3456432"/>
+            <a:ext cx="3474720" cy="146304"/>
           </a:xfrm>
           <a:prstGeom prst="rect">
             <a:avLst/>
@@ -7503,7 +7503,7 @@
         <p:spPr>
           <a:xfrm>
             <a:off x="640080" y="3950208"/>
-            <a:ext cx="548640" cy="219456"/>
+            <a:ext cx="594360" cy="219456"/>
           </a:xfrm>
           <a:prstGeom prst="roundRect">
             <a:avLst/>
@@ -7549,7 +7549,7 @@
         <p:spPr>
           <a:xfrm>
             <a:off x="640080" y="3950208"/>
-            <a:ext cx="548640" cy="219456"/>
+            <a:ext cx="594360" cy="219456"/>
           </a:xfrm>
           <a:prstGeom prst="rect">
             <a:avLst/>
@@ -7582,8 +7582,8 @@
         </p:nvSpPr>
         <p:spPr>
           <a:xfrm>
-            <a:off x="1207008" y="3950208"/>
-            <a:ext cx="548640" cy="219456"/>
+            <a:off x="1280160" y="3950208"/>
+            <a:ext cx="594360" cy="219456"/>
           </a:xfrm>
           <a:prstGeom prst="roundRect">
             <a:avLst/>
@@ -7628,8 +7628,8 @@
         </p:nvSpPr>
         <p:spPr>
           <a:xfrm>
-            <a:off x="1207008" y="3950208"/>
-            <a:ext cx="548640" cy="219456"/>
+            <a:off x="1280160" y="3950208"/>
+            <a:ext cx="594360" cy="219456"/>
           </a:xfrm>
           <a:prstGeom prst="rect">
             <a:avLst/>
@@ -7662,8 +7662,8 @@
         </p:nvSpPr>
         <p:spPr>
           <a:xfrm>
-            <a:off x="1773936" y="3950208"/>
-            <a:ext cx="640080" cy="219456"/>
+            <a:off x="1920240" y="3950208"/>
+            <a:ext cx="731520" cy="219456"/>
           </a:xfrm>
           <a:prstGeom prst="roundRect">
             <a:avLst/>
@@ -7708,8 +7708,8 @@
         </p:nvSpPr>
         <p:spPr>
           <a:xfrm>
-            <a:off x="1773936" y="3950208"/>
-            <a:ext cx="640080" cy="219456"/>
+            <a:off x="1920240" y="3950208"/>
+            <a:ext cx="731520" cy="219456"/>
           </a:xfrm>
           <a:prstGeom prst="rect">
             <a:avLst/>
@@ -7742,8 +7742,8 @@
         </p:nvSpPr>
         <p:spPr>
           <a:xfrm>
-            <a:off x="2432304" y="3950208"/>
-            <a:ext cx="822960" cy="219456"/>
+            <a:off x="2697480" y="3950208"/>
+            <a:ext cx="960120" cy="219456"/>
           </a:xfrm>
           <a:prstGeom prst="roundRect">
             <a:avLst/>
@@ -7788,8 +7788,8 @@
         </p:nvSpPr>
         <p:spPr>
           <a:xfrm>
-            <a:off x="2432304" y="3950208"/>
-            <a:ext cx="822960" cy="219456"/>
+            <a:off x="2697480" y="3950208"/>
+            <a:ext cx="960120" cy="219456"/>
           </a:xfrm>
           <a:prstGeom prst="rect">
             <a:avLst/>
@@ -7822,8 +7822,8 @@
         </p:nvSpPr>
         <p:spPr>
           <a:xfrm>
-            <a:off x="3273552" y="3950208"/>
-            <a:ext cx="548640" cy="219456"/>
+            <a:off x="3703320" y="3950208"/>
+            <a:ext cx="594360" cy="219456"/>
           </a:xfrm>
           <a:prstGeom prst="roundRect">
             <a:avLst/>
@@ -7868,8 +7868,8 @@
         </p:nvSpPr>
         <p:spPr>
           <a:xfrm>
-            <a:off x="3273552" y="3950208"/>
-            <a:ext cx="548640" cy="219456"/>
+            <a:off x="3703320" y="3950208"/>
+            <a:ext cx="594360" cy="219456"/>
           </a:xfrm>
           <a:prstGeom prst="rect">
             <a:avLst/>
@@ -7902,8 +7902,8 @@
         </p:nvSpPr>
         <p:spPr>
           <a:xfrm>
-            <a:off x="3840480" y="3950208"/>
-            <a:ext cx="548640" cy="219456"/>
+            <a:off x="4343400" y="3950208"/>
+            <a:ext cx="594360" cy="219456"/>
           </a:xfrm>
           <a:prstGeom prst="roundRect">
             <a:avLst/>
@@ -7948,8 +7948,8 @@
         </p:nvSpPr>
         <p:spPr>
           <a:xfrm>
-            <a:off x="3840480" y="3950208"/>
-            <a:ext cx="548640" cy="219456"/>
+            <a:off x="4343400" y="3950208"/>
+            <a:ext cx="594360" cy="219456"/>
           </a:xfrm>
           <a:prstGeom prst="rect">
             <a:avLst/>
@@ -7982,8 +7982,8 @@
         </p:nvSpPr>
         <p:spPr>
           <a:xfrm>
-            <a:off x="4407408" y="3950208"/>
-            <a:ext cx="1097280" cy="219456"/>
+            <a:off x="4983480" y="3950208"/>
+            <a:ext cx="1280160" cy="219456"/>
           </a:xfrm>
           <a:prstGeom prst="roundRect">
             <a:avLst/>
@@ -8028,8 +8028,8 @@
         </p:nvSpPr>
         <p:spPr>
           <a:xfrm>
-            <a:off x="4407408" y="3950208"/>
-            <a:ext cx="1097280" cy="219456"/>
+            <a:off x="4983480" y="3950208"/>
+            <a:ext cx="1280160" cy="219456"/>
           </a:xfrm>
           <a:prstGeom prst="rect">
             <a:avLst/>
@@ -8062,8 +8062,8 @@
         </p:nvSpPr>
         <p:spPr>
           <a:xfrm>
-            <a:off x="640080" y="4224528"/>
-            <a:ext cx="5532120" cy="365760"/>
+            <a:off x="594360" y="4224528"/>
+            <a:ext cx="6537960" cy="365760"/>
           </a:xfrm>
           <a:prstGeom prst="roundRect">
             <a:avLst/>
@@ -8108,8 +8108,8 @@
         </p:nvSpPr>
         <p:spPr>
           <a:xfrm>
-            <a:off x="640080" y="4224528"/>
-            <a:ext cx="5532120" cy="365760"/>
+            <a:off x="594360" y="4224528"/>
+            <a:ext cx="6537960" cy="365760"/>
           </a:xfrm>
           <a:prstGeom prst="rect">
             <a:avLst/>
@@ -8142,8 +8142,8 @@
         </p:nvCxnSpPr>
         <p:spPr>
           <a:xfrm>
-            <a:off x="1143000" y="786384"/>
-            <a:ext cx="320040" cy="109728"/>
+            <a:off x="1417319" y="786384"/>
+            <a:ext cx="0" cy="109728"/>
           </a:xfrm>
           <a:prstGeom prst="line">
             <a:avLst/>
@@ -8178,8 +8178,8 @@
         </p:nvCxnSpPr>
         <p:spPr>
           <a:xfrm>
-            <a:off x="1965960" y="1088136"/>
-            <a:ext cx="182880" cy="0"/>
+            <a:off x="2057400" y="1088136"/>
+            <a:ext cx="274320" cy="0"/>
           </a:xfrm>
           <a:prstGeom prst="line">
             <a:avLst/>
@@ -8214,8 +8214,8 @@
         </p:nvCxnSpPr>
         <p:spPr>
           <a:xfrm>
-            <a:off x="2628900" y="1280160"/>
-            <a:ext cx="45720" cy="137160"/>
+            <a:off x="2926079" y="1280160"/>
+            <a:ext cx="0" cy="137160"/>
           </a:xfrm>
           <a:prstGeom prst="line">
             <a:avLst/>
@@ -8250,8 +8250,8 @@
         </p:nvCxnSpPr>
         <p:spPr>
           <a:xfrm>
-            <a:off x="2674620" y="1856232"/>
-            <a:ext cx="91440" cy="155448"/>
+            <a:off x="2926079" y="1856232"/>
+            <a:ext cx="0" cy="155448"/>
           </a:xfrm>
           <a:prstGeom prst="line">
             <a:avLst/>
@@ -8260,7 +8260,6 @@
             <a:solidFill>
               <a:srgbClr val="DC2626"/>
             </a:solidFill>
-            <a:tailEnd type="triangle" w="sm" len="sm"/>
           </a:ln>
         </p:spPr>
         <p:style>
@@ -8285,9 +8284,9 @@
           <p:nvPr/>
         </p:nvCxnSpPr>
         <p:spPr>
-          <a:xfrm>
-            <a:off x="3154680" y="2231136"/>
-            <a:ext cx="91440" cy="0"/>
+          <a:xfrm flipH="1">
+            <a:off x="2811779" y="2011680"/>
+            <a:ext cx="114300" cy="0"/>
           </a:xfrm>
           <a:prstGeom prst="line">
             <a:avLst/>
@@ -8321,14 +8320,14 @@
           <p:nvPr/>
         </p:nvCxnSpPr>
         <p:spPr>
-          <a:xfrm flipH="1">
-            <a:off x="2377440" y="2450592"/>
-            <a:ext cx="1348740" cy="237744"/>
+          <a:xfrm>
+            <a:off x="3291839" y="2231136"/>
+            <a:ext cx="137161" cy="0"/>
           </a:xfrm>
           <a:prstGeom prst="line">
             <a:avLst/>
           </a:prstGeom>
-          <a:ln w="12700">
+          <a:ln w="17780">
             <a:solidFill>
               <a:srgbClr val="DC2626"/>
             </a:solidFill>
@@ -8357,9 +8356,9 @@
           <p:nvPr/>
         </p:nvCxnSpPr>
         <p:spPr>
-          <a:xfrm flipH="1">
-            <a:off x="2377440" y="2450592"/>
-            <a:ext cx="1165860" cy="475488"/>
+          <a:xfrm>
+            <a:off x="4000500" y="2450592"/>
+            <a:ext cx="0" cy="237744"/>
           </a:xfrm>
           <a:prstGeom prst="line">
             <a:avLst/>
@@ -8368,7 +8367,6 @@
             <a:solidFill>
               <a:srgbClr val="DC2626"/>
             </a:solidFill>
-            <a:tailEnd type="triangle" w="sm" len="sm"/>
           </a:ln>
         </p:spPr>
         <p:style>
@@ -8394,8 +8392,8 @@
         </p:nvCxnSpPr>
         <p:spPr>
           <a:xfrm flipH="1">
-            <a:off x="2377440" y="2450592"/>
-            <a:ext cx="982980" cy="713232"/>
+            <a:off x="2331720" y="2688336"/>
+            <a:ext cx="1668780" cy="0"/>
           </a:xfrm>
           <a:prstGeom prst="line">
             <a:avLst/>
@@ -8430,8 +8428,8 @@
         </p:nvCxnSpPr>
         <p:spPr>
           <a:xfrm>
-            <a:off x="3749039" y="2688336"/>
-            <a:ext cx="182881" cy="169164"/>
+            <a:off x="3817620" y="2450592"/>
+            <a:ext cx="0" cy="475488"/>
           </a:xfrm>
           <a:prstGeom prst="line">
             <a:avLst/>
@@ -8440,7 +8438,6 @@
             <a:solidFill>
               <a:srgbClr val="DC2626"/>
             </a:solidFill>
-            <a:tailEnd type="triangle" w="sm" len="sm"/>
           </a:ln>
         </p:spPr>
         <p:style>
@@ -8465,9 +8462,9 @@
           <p:nvPr/>
         </p:nvCxnSpPr>
         <p:spPr>
-          <a:xfrm>
-            <a:off x="3749039" y="2926080"/>
-            <a:ext cx="182881" cy="68580"/>
+          <a:xfrm flipH="1">
+            <a:off x="2331720" y="2926080"/>
+            <a:ext cx="1485900" cy="0"/>
           </a:xfrm>
           <a:prstGeom prst="line">
             <a:avLst/>
@@ -8501,9 +8498,9 @@
           <p:nvPr/>
         </p:nvCxnSpPr>
         <p:spPr>
-          <a:xfrm flipV="1">
-            <a:off x="3749039" y="3131820"/>
-            <a:ext cx="182881" cy="32004"/>
+          <a:xfrm>
+            <a:off x="3634740" y="2450592"/>
+            <a:ext cx="0" cy="713232"/>
           </a:xfrm>
           <a:prstGeom prst="line">
             <a:avLst/>
@@ -8512,7 +8509,6 @@
             <a:solidFill>
               <a:srgbClr val="DC2626"/>
             </a:solidFill>
-            <a:tailEnd type="triangle" w="sm" len="sm"/>
           </a:ln>
         </p:spPr>
         <p:style>
@@ -8537,14 +8533,14 @@
           <p:nvPr/>
         </p:nvCxnSpPr>
         <p:spPr>
-          <a:xfrm flipV="1">
-            <a:off x="4617720" y="2450592"/>
-            <a:ext cx="22860" cy="292608"/>
+          <a:xfrm flipH="1">
+            <a:off x="2331720" y="3163824"/>
+            <a:ext cx="1303020" cy="0"/>
           </a:xfrm>
           <a:prstGeom prst="line">
             <a:avLst/>
           </a:prstGeom>
-          <a:ln w="17780">
+          <a:ln w="12700">
             <a:solidFill>
               <a:srgbClr val="DC2626"/>
             </a:solidFill>
@@ -8573,18 +8569,17 @@
           <p:nvPr/>
         </p:nvCxnSpPr>
         <p:spPr>
-          <a:xfrm flipH="1">
-            <a:off x="4480559" y="2450592"/>
-            <a:ext cx="160021" cy="987552"/>
+          <a:xfrm>
+            <a:off x="3931920" y="2688336"/>
+            <a:ext cx="182880" cy="0"/>
           </a:xfrm>
           <a:prstGeom prst="line">
             <a:avLst/>
           </a:prstGeom>
           <a:ln w="12700">
             <a:solidFill>
-              <a:srgbClr val="0F172A"/>
-            </a:solidFill>
-            <a:tailEnd type="triangle" w="sm" len="sm"/>
+              <a:srgbClr val="DC2626"/>
+            </a:solidFill>
           </a:ln>
         </p:spPr>
         <p:style>
@@ -8610,15 +8605,15 @@
         </p:nvCxnSpPr>
         <p:spPr>
           <a:xfrm>
-            <a:off x="4983480" y="2231136"/>
-            <a:ext cx="640079" cy="1207008"/>
+            <a:off x="4114800" y="2688336"/>
+            <a:ext cx="0" cy="169164"/>
           </a:xfrm>
           <a:prstGeom prst="line">
             <a:avLst/>
           </a:prstGeom>
           <a:ln w="12700">
             <a:solidFill>
-              <a:srgbClr val="0F172A"/>
+              <a:srgbClr val="DC2626"/>
             </a:solidFill>
             <a:tailEnd type="triangle" w="sm" len="sm"/>
           </a:ln>
@@ -8645,18 +8640,17 @@
           <p:nvPr/>
         </p:nvCxnSpPr>
         <p:spPr>
-          <a:xfrm flipV="1">
-            <a:off x="4640580" y="1856232"/>
-            <a:ext cx="960120" cy="155448"/>
+          <a:xfrm>
+            <a:off x="3931920" y="2926080"/>
+            <a:ext cx="182880" cy="0"/>
           </a:xfrm>
           <a:prstGeom prst="line">
             <a:avLst/>
           </a:prstGeom>
-          <a:ln w="17780">
+          <a:ln w="12700">
             <a:solidFill>
               <a:srgbClr val="DC2626"/>
             </a:solidFill>
-            <a:tailEnd type="triangle" w="sm" len="sm"/>
           </a:ln>
         </p:spPr>
         <p:style>
@@ -8681,14 +8675,14 @@
           <p:nvPr/>
         </p:nvCxnSpPr>
         <p:spPr>
-          <a:xfrm flipH="1">
-            <a:off x="5577840" y="1636776"/>
-            <a:ext cx="594360" cy="0"/>
+          <a:xfrm>
+            <a:off x="4114800" y="2926080"/>
+            <a:ext cx="0" cy="68580"/>
           </a:xfrm>
           <a:prstGeom prst="line">
             <a:avLst/>
           </a:prstGeom>
-          <a:ln w="17780">
+          <a:ln w="12700">
             <a:solidFill>
               <a:srgbClr val="DC2626"/>
             </a:solidFill>
@@ -8718,17 +8712,16 @@
         </p:nvCxnSpPr>
         <p:spPr>
           <a:xfrm>
-            <a:off x="5577840" y="1636776"/>
-            <a:ext cx="0" cy="374904"/>
+            <a:off x="3931920" y="3163824"/>
+            <a:ext cx="182880" cy="0"/>
           </a:xfrm>
           <a:prstGeom prst="line">
             <a:avLst/>
           </a:prstGeom>
-          <a:ln w="17780">
+          <a:ln w="12700">
             <a:solidFill>
               <a:srgbClr val="DC2626"/>
             </a:solidFill>
-            <a:tailEnd type="triangle" w="sm" len="sm"/>
           </a:ln>
         </p:spPr>
         <p:style>
@@ -8754,8 +8747,8 @@
         </p:nvCxnSpPr>
         <p:spPr>
           <a:xfrm flipV="1">
-            <a:off x="6080760" y="182880"/>
-            <a:ext cx="45720" cy="2048256"/>
+            <a:off x="4114800" y="3131820"/>
+            <a:ext cx="0" cy="32004"/>
           </a:xfrm>
           <a:prstGeom prst="line">
             <a:avLst/>
@@ -8765,7 +8758,6 @@
               <a:srgbClr val="DC2626"/>
             </a:solidFill>
             <a:tailEnd type="triangle" w="sm" len="sm"/>
-            <a:prstDash val="dash"/>
           </a:ln>
         </p:spPr>
         <p:style>
@@ -8790,19 +8782,17 @@
           <p:nvPr/>
         </p:nvCxnSpPr>
         <p:spPr>
-          <a:xfrm flipH="1">
-            <a:off x="1143000" y="182880"/>
-            <a:ext cx="4983480" cy="0"/>
+          <a:xfrm flipV="1">
+            <a:off x="4800600" y="2450592"/>
+            <a:ext cx="0" cy="292608"/>
           </a:xfrm>
           <a:prstGeom prst="line">
             <a:avLst/>
           </a:prstGeom>
-          <a:ln w="12700">
+          <a:ln w="17780">
             <a:solidFill>
               <a:srgbClr val="DC2626"/>
             </a:solidFill>
-            <a:tailEnd type="triangle" w="sm" len="sm"/>
-            <a:prstDash val="dash"/>
           </a:ln>
         </p:spPr>
         <p:style>
@@ -8828,18 +8818,17 @@
         </p:nvCxnSpPr>
         <p:spPr>
           <a:xfrm>
-            <a:off x="1143000" y="182880"/>
-            <a:ext cx="0" cy="219456"/>
+            <a:off x="4800600" y="2450592"/>
+            <a:ext cx="297180" cy="0"/>
           </a:xfrm>
           <a:prstGeom prst="line">
             <a:avLst/>
           </a:prstGeom>
-          <a:ln w="12700">
+          <a:ln w="17780">
             <a:solidFill>
               <a:srgbClr val="DC2626"/>
             </a:solidFill>
             <a:tailEnd type="triangle" w="sm" len="sm"/>
-            <a:prstDash val="dash"/>
           </a:ln>
         </p:spPr>
         <p:style>
@@ -8864,19 +8853,17 @@
           <p:nvPr/>
         </p:nvCxnSpPr>
         <p:spPr>
-          <a:xfrm flipH="1">
-            <a:off x="2103120" y="1636776"/>
-            <a:ext cx="45720" cy="2542032"/>
+          <a:xfrm>
+            <a:off x="5097780" y="2450592"/>
+            <a:ext cx="0" cy="987552"/>
           </a:xfrm>
           <a:prstGeom prst="line">
             <a:avLst/>
           </a:prstGeom>
-          <a:ln w="9525">
-            <a:solidFill>
-              <a:srgbClr val="D99416"/>
-            </a:solidFill>
-            <a:tailEnd type="triangle" w="sm" len="sm"/>
-            <a:prstDash val="dash"/>
+          <a:ln w="12700">
+            <a:solidFill>
+              <a:srgbClr val="0F172A"/>
+            </a:solidFill>
           </a:ln>
         </p:spPr>
         <p:style>
@@ -8901,19 +8888,18 @@
           <p:nvPr/>
         </p:nvCxnSpPr>
         <p:spPr>
-          <a:xfrm>
-            <a:off x="2103120" y="4178808"/>
-            <a:ext cx="0" cy="45720"/>
+          <a:xfrm flipH="1">
+            <a:off x="4800600" y="3438144"/>
+            <a:ext cx="297180" cy="0"/>
           </a:xfrm>
           <a:prstGeom prst="line">
             <a:avLst/>
           </a:prstGeom>
-          <a:ln w="9525">
-            <a:solidFill>
-              <a:srgbClr val="D99416"/>
+          <a:ln w="12700">
+            <a:solidFill>
+              <a:srgbClr val="0F172A"/>
             </a:solidFill>
             <a:tailEnd type="triangle" w="sm" len="sm"/>
-            <a:prstDash val="dash"/>
           </a:ln>
         </p:spPr>
         <p:style>
@@ -8939,18 +8925,16 @@
         </p:nvCxnSpPr>
         <p:spPr>
           <a:xfrm>
-            <a:off x="4617720" y="3246120"/>
-            <a:ext cx="0" cy="978408"/>
+            <a:off x="5486400" y="2231136"/>
+            <a:ext cx="0" cy="1207008"/>
           </a:xfrm>
           <a:prstGeom prst="line">
             <a:avLst/>
           </a:prstGeom>
-          <a:ln w="9525">
-            <a:solidFill>
-              <a:srgbClr val="D99416"/>
-            </a:solidFill>
-            <a:tailEnd type="triangle" w="sm" len="sm"/>
-            <a:prstDash val="dash"/>
+          <a:ln w="12700">
+            <a:solidFill>
+              <a:srgbClr val="0F172A"/>
+            </a:solidFill>
           </a:ln>
         </p:spPr>
         <p:style>
@@ -8968,16 +8952,529 @@
           </a:fontRef>
         </p:style>
       </p:cxnSp>
-      <p:sp>
-        <p:nvSpPr>
-          <p:cNvPr id="95" name="Rounded Rectangle 94"/>
+      <p:cxnSp>
+        <p:nvCxnSpPr>
+          <p:cNvPr id="95" name="Connector 94"/>
+          <p:cNvCxnSpPr/>
+          <p:nvPr/>
+        </p:nvCxnSpPr>
+        <p:spPr>
+          <a:xfrm>
+            <a:off x="5486400" y="3438144"/>
+            <a:ext cx="891540" cy="0"/>
+          </a:xfrm>
+          <a:prstGeom prst="line">
+            <a:avLst/>
+          </a:prstGeom>
+          <a:ln w="12700">
+            <a:solidFill>
+              <a:srgbClr val="0F172A"/>
+            </a:solidFill>
+            <a:tailEnd type="triangle" w="sm" len="sm"/>
+          </a:ln>
+        </p:spPr>
+        <p:style>
+          <a:lnRef idx="2">
+            <a:schemeClr val="accent1"/>
+          </a:lnRef>
+          <a:fillRef idx="0">
+            <a:schemeClr val="accent1"/>
+          </a:fillRef>
+          <a:effectRef idx="1">
+            <a:schemeClr val="accent1"/>
+          </a:effectRef>
+          <a:fontRef idx="minor">
+            <a:schemeClr val="tx1"/>
+          </a:fontRef>
+        </p:style>
+      </p:cxnSp>
+      <p:cxnSp>
+        <p:nvCxnSpPr>
+          <p:cNvPr id="96" name="Connector 95"/>
+          <p:cNvCxnSpPr/>
+          <p:nvPr/>
+        </p:nvCxnSpPr>
+        <p:spPr>
+          <a:xfrm flipV="1">
+            <a:off x="5097780" y="1856232"/>
+            <a:ext cx="0" cy="155448"/>
+          </a:xfrm>
+          <a:prstGeom prst="line">
+            <a:avLst/>
+          </a:prstGeom>
+          <a:ln w="17780">
+            <a:solidFill>
+              <a:srgbClr val="DC2626"/>
+            </a:solidFill>
+          </a:ln>
+        </p:spPr>
+        <p:style>
+          <a:lnRef idx="2">
+            <a:schemeClr val="accent1"/>
+          </a:lnRef>
+          <a:fillRef idx="0">
+            <a:schemeClr val="accent1"/>
+          </a:fillRef>
+          <a:effectRef idx="1">
+            <a:schemeClr val="accent1"/>
+          </a:effectRef>
+          <a:fontRef idx="minor">
+            <a:schemeClr val="tx1"/>
+          </a:fontRef>
+        </p:style>
+      </p:cxnSp>
+      <p:cxnSp>
+        <p:nvCxnSpPr>
+          <p:cNvPr id="97" name="Connector 96"/>
+          <p:cNvCxnSpPr/>
+          <p:nvPr/>
+        </p:nvCxnSpPr>
+        <p:spPr>
+          <a:xfrm>
+            <a:off x="5097780" y="1856232"/>
+            <a:ext cx="1280160" cy="0"/>
+          </a:xfrm>
+          <a:prstGeom prst="line">
+            <a:avLst/>
+          </a:prstGeom>
+          <a:ln w="17780">
+            <a:solidFill>
+              <a:srgbClr val="DC2626"/>
+            </a:solidFill>
+            <a:tailEnd type="triangle" w="sm" len="sm"/>
+          </a:ln>
+        </p:spPr>
+        <p:style>
+          <a:lnRef idx="2">
+            <a:schemeClr val="accent1"/>
+          </a:lnRef>
+          <a:fillRef idx="0">
+            <a:schemeClr val="accent1"/>
+          </a:fillRef>
+          <a:effectRef idx="1">
+            <a:schemeClr val="accent1"/>
+          </a:effectRef>
+          <a:fontRef idx="minor">
+            <a:schemeClr val="tx1"/>
+          </a:fontRef>
+        </p:style>
+      </p:cxnSp>
+      <p:cxnSp>
+        <p:nvCxnSpPr>
+          <p:cNvPr id="98" name="Connector 97"/>
+          <p:cNvCxnSpPr/>
+          <p:nvPr/>
+        </p:nvCxnSpPr>
+        <p:spPr>
+          <a:xfrm>
+            <a:off x="6377940" y="1856232"/>
+            <a:ext cx="0" cy="155448"/>
+          </a:xfrm>
+          <a:prstGeom prst="line">
+            <a:avLst/>
+          </a:prstGeom>
+          <a:ln w="17780">
+            <a:solidFill>
+              <a:srgbClr val="DC2626"/>
+            </a:solidFill>
+            <a:tailEnd type="triangle" w="sm" len="sm"/>
+          </a:ln>
+        </p:spPr>
+        <p:style>
+          <a:lnRef idx="2">
+            <a:schemeClr val="accent1"/>
+          </a:lnRef>
+          <a:fillRef idx="0">
+            <a:schemeClr val="accent1"/>
+          </a:fillRef>
+          <a:effectRef idx="1">
+            <a:schemeClr val="accent1"/>
+          </a:effectRef>
+          <a:fontRef idx="minor">
+            <a:schemeClr val="tx1"/>
+          </a:fontRef>
+        </p:style>
+      </p:cxnSp>
+      <p:cxnSp>
+        <p:nvCxnSpPr>
+          <p:cNvPr id="99" name="Connector 98"/>
+          <p:cNvCxnSpPr/>
+          <p:nvPr/>
+        </p:nvCxnSpPr>
+        <p:spPr>
+          <a:xfrm>
+            <a:off x="7086600" y="2231136"/>
+            <a:ext cx="182880" cy="0"/>
+          </a:xfrm>
+          <a:prstGeom prst="line">
+            <a:avLst/>
+          </a:prstGeom>
+          <a:ln w="12700">
+            <a:solidFill>
+              <a:srgbClr val="DC2626"/>
+            </a:solidFill>
+            <a:prstDash val="dash"/>
+            <a:tailEnd type="triangle" w="sm" len="sm"/>
+          </a:ln>
+        </p:spPr>
+        <p:style>
+          <a:lnRef idx="2">
+            <a:schemeClr val="accent1"/>
+          </a:lnRef>
+          <a:fillRef idx="0">
+            <a:schemeClr val="accent1"/>
+          </a:fillRef>
+          <a:effectRef idx="1">
+            <a:schemeClr val="accent1"/>
+          </a:effectRef>
+          <a:fontRef idx="minor">
+            <a:schemeClr val="tx1"/>
+          </a:fontRef>
+        </p:style>
+      </p:cxnSp>
+      <p:cxnSp>
+        <p:nvCxnSpPr>
+          <p:cNvPr id="100" name="Connector 99"/>
+          <p:cNvCxnSpPr/>
+          <p:nvPr/>
+        </p:nvCxnSpPr>
+        <p:spPr>
+          <a:xfrm flipV="1">
+            <a:off x="7269480" y="182880"/>
+            <a:ext cx="0" cy="2048256"/>
+          </a:xfrm>
+          <a:prstGeom prst="line">
+            <a:avLst/>
+          </a:prstGeom>
+          <a:ln w="12700">
+            <a:solidFill>
+              <a:srgbClr val="DC2626"/>
+            </a:solidFill>
+            <a:prstDash val="dash"/>
+            <a:tailEnd type="triangle" w="sm" len="sm"/>
+          </a:ln>
+        </p:spPr>
+        <p:style>
+          <a:lnRef idx="2">
+            <a:schemeClr val="accent1"/>
+          </a:lnRef>
+          <a:fillRef idx="0">
+            <a:schemeClr val="accent1"/>
+          </a:fillRef>
+          <a:effectRef idx="1">
+            <a:schemeClr val="accent1"/>
+          </a:effectRef>
+          <a:fontRef idx="minor">
+            <a:schemeClr val="tx1"/>
+          </a:fontRef>
+        </p:style>
+      </p:cxnSp>
+      <p:cxnSp>
+        <p:nvCxnSpPr>
+          <p:cNvPr id="101" name="Connector 100"/>
+          <p:cNvCxnSpPr/>
+          <p:nvPr/>
+        </p:nvCxnSpPr>
+        <p:spPr>
+          <a:xfrm flipH="1">
+            <a:off x="1417319" y="182880"/>
+            <a:ext cx="5852161" cy="0"/>
+          </a:xfrm>
+          <a:prstGeom prst="line">
+            <a:avLst/>
+          </a:prstGeom>
+          <a:ln w="12700">
+            <a:solidFill>
+              <a:srgbClr val="DC2626"/>
+            </a:solidFill>
+            <a:prstDash val="dash"/>
+            <a:tailEnd type="triangle" w="sm" len="sm"/>
+          </a:ln>
+        </p:spPr>
+        <p:style>
+          <a:lnRef idx="2">
+            <a:schemeClr val="accent1"/>
+          </a:lnRef>
+          <a:fillRef idx="0">
+            <a:schemeClr val="accent1"/>
+          </a:fillRef>
+          <a:effectRef idx="1">
+            <a:schemeClr val="accent1"/>
+          </a:effectRef>
+          <a:fontRef idx="minor">
+            <a:schemeClr val="tx1"/>
+          </a:fontRef>
+        </p:style>
+      </p:cxnSp>
+      <p:cxnSp>
+        <p:nvCxnSpPr>
+          <p:cNvPr id="102" name="Connector 101"/>
+          <p:cNvCxnSpPr/>
+          <p:nvPr/>
+        </p:nvCxnSpPr>
+        <p:spPr>
+          <a:xfrm>
+            <a:off x="1417319" y="182880"/>
+            <a:ext cx="0" cy="219456"/>
+          </a:xfrm>
+          <a:prstGeom prst="line">
+            <a:avLst/>
+          </a:prstGeom>
+          <a:ln w="12700">
+            <a:solidFill>
+              <a:srgbClr val="DC2626"/>
+            </a:solidFill>
+            <a:prstDash val="dash"/>
+            <a:tailEnd type="triangle" w="sm" len="sm"/>
+          </a:ln>
+        </p:spPr>
+        <p:style>
+          <a:lnRef idx="2">
+            <a:schemeClr val="accent1"/>
+          </a:lnRef>
+          <a:fillRef idx="0">
+            <a:schemeClr val="accent1"/>
+          </a:fillRef>
+          <a:effectRef idx="1">
+            <a:schemeClr val="accent1"/>
+          </a:effectRef>
+          <a:fontRef idx="minor">
+            <a:schemeClr val="tx1"/>
+          </a:fontRef>
+        </p:style>
+      </p:cxnSp>
+      <p:cxnSp>
+        <p:nvCxnSpPr>
+          <p:cNvPr id="103" name="Connector 102"/>
+          <p:cNvCxnSpPr/>
+          <p:nvPr/>
+        </p:nvCxnSpPr>
+        <p:spPr>
+          <a:xfrm flipH="1">
+            <a:off x="2148839" y="1636776"/>
+            <a:ext cx="182881" cy="0"/>
+          </a:xfrm>
+          <a:prstGeom prst="line">
+            <a:avLst/>
+          </a:prstGeom>
+          <a:ln w="9525">
+            <a:solidFill>
+              <a:srgbClr val="D99416"/>
+            </a:solidFill>
+            <a:prstDash val="dash"/>
+            <a:tailEnd type="triangle" w="sm" len="sm"/>
+          </a:ln>
+        </p:spPr>
+        <p:style>
+          <a:lnRef idx="2">
+            <a:schemeClr val="accent1"/>
+          </a:lnRef>
+          <a:fillRef idx="0">
+            <a:schemeClr val="accent1"/>
+          </a:fillRef>
+          <a:effectRef idx="1">
+            <a:schemeClr val="accent1"/>
+          </a:effectRef>
+          <a:fontRef idx="minor">
+            <a:schemeClr val="tx1"/>
+          </a:fontRef>
+        </p:style>
+      </p:cxnSp>
+      <p:cxnSp>
+        <p:nvCxnSpPr>
+          <p:cNvPr id="104" name="Connector 103"/>
+          <p:cNvCxnSpPr/>
+          <p:nvPr/>
+        </p:nvCxnSpPr>
+        <p:spPr>
+          <a:xfrm>
+            <a:off x="2148839" y="1636776"/>
+            <a:ext cx="0" cy="2587752"/>
+          </a:xfrm>
+          <a:prstGeom prst="line">
+            <a:avLst/>
+          </a:prstGeom>
+          <a:ln w="9525">
+            <a:solidFill>
+              <a:srgbClr val="D99416"/>
+            </a:solidFill>
+            <a:prstDash val="dash"/>
+            <a:tailEnd type="triangle" w="sm" len="sm"/>
+          </a:ln>
+        </p:spPr>
+        <p:style>
+          <a:lnRef idx="2">
+            <a:schemeClr val="accent1"/>
+          </a:lnRef>
+          <a:fillRef idx="0">
+            <a:schemeClr val="accent1"/>
+          </a:fillRef>
+          <a:effectRef idx="1">
+            <a:schemeClr val="accent1"/>
+          </a:effectRef>
+          <a:fontRef idx="minor">
+            <a:schemeClr val="tx1"/>
+          </a:fontRef>
+        </p:style>
+      </p:cxnSp>
+      <p:cxnSp>
+        <p:nvCxnSpPr>
+          <p:cNvPr id="105" name="Connector 104"/>
+          <p:cNvCxnSpPr/>
+          <p:nvPr/>
+        </p:nvCxnSpPr>
+        <p:spPr>
+          <a:xfrm>
+            <a:off x="4800600" y="3246120"/>
+            <a:ext cx="0" cy="978408"/>
+          </a:xfrm>
+          <a:prstGeom prst="line">
+            <a:avLst/>
+          </a:prstGeom>
+          <a:ln w="9525">
+            <a:solidFill>
+              <a:srgbClr val="D99416"/>
+            </a:solidFill>
+            <a:prstDash val="dash"/>
+            <a:tailEnd type="triangle" w="sm" len="sm"/>
+          </a:ln>
+        </p:spPr>
+        <p:style>
+          <a:lnRef idx="2">
+            <a:schemeClr val="accent1"/>
+          </a:lnRef>
+          <a:fillRef idx="0">
+            <a:schemeClr val="accent1"/>
+          </a:fillRef>
+          <a:effectRef idx="1">
+            <a:schemeClr val="accent1"/>
+          </a:effectRef>
+          <a:fontRef idx="minor">
+            <a:schemeClr val="tx1"/>
+          </a:fontRef>
+        </p:style>
+      </p:cxnSp>
+      <p:cxnSp>
+        <p:nvCxnSpPr>
+          <p:cNvPr id="106" name="Connector 105"/>
+          <p:cNvCxnSpPr/>
+          <p:nvPr/>
+        </p:nvCxnSpPr>
+        <p:spPr>
+          <a:xfrm>
+            <a:off x="6377940" y="1856232"/>
+            <a:ext cx="0" cy="1892807"/>
+          </a:xfrm>
+          <a:prstGeom prst="line">
+            <a:avLst/>
+          </a:prstGeom>
+          <a:ln w="9525">
+            <a:solidFill>
+              <a:srgbClr val="D99416"/>
+            </a:solidFill>
+            <a:prstDash val="dash"/>
+            <a:tailEnd type="triangle" w="sm" len="sm"/>
+          </a:ln>
+        </p:spPr>
+        <p:style>
+          <a:lnRef idx="2">
+            <a:schemeClr val="accent1"/>
+          </a:lnRef>
+          <a:fillRef idx="0">
+            <a:schemeClr val="accent1"/>
+          </a:fillRef>
+          <a:effectRef idx="1">
+            <a:schemeClr val="accent1"/>
+          </a:effectRef>
+          <a:fontRef idx="minor">
+            <a:schemeClr val="tx1"/>
+          </a:fontRef>
+        </p:style>
+      </p:cxnSp>
+      <p:cxnSp>
+        <p:nvCxnSpPr>
+          <p:cNvPr id="107" name="Connector 106"/>
+          <p:cNvCxnSpPr/>
+          <p:nvPr/>
+        </p:nvCxnSpPr>
+        <p:spPr>
+          <a:xfrm>
+            <a:off x="6377940" y="3749039"/>
+            <a:ext cx="388620" cy="0"/>
+          </a:xfrm>
+          <a:prstGeom prst="line">
+            <a:avLst/>
+          </a:prstGeom>
+          <a:ln w="9525">
+            <a:solidFill>
+              <a:srgbClr val="D99416"/>
+            </a:solidFill>
+            <a:prstDash val="dash"/>
+            <a:tailEnd type="triangle" w="sm" len="sm"/>
+          </a:ln>
+        </p:spPr>
+        <p:style>
+          <a:lnRef idx="2">
+            <a:schemeClr val="accent1"/>
+          </a:lnRef>
+          <a:fillRef idx="0">
+            <a:schemeClr val="accent1"/>
+          </a:fillRef>
+          <a:effectRef idx="1">
+            <a:schemeClr val="accent1"/>
+          </a:effectRef>
+          <a:fontRef idx="minor">
+            <a:schemeClr val="tx1"/>
+          </a:fontRef>
+        </p:style>
+      </p:cxnSp>
+      <p:cxnSp>
+        <p:nvCxnSpPr>
+          <p:cNvPr id="108" name="Connector 107"/>
+          <p:cNvCxnSpPr/>
+          <p:nvPr/>
+        </p:nvCxnSpPr>
+        <p:spPr>
+          <a:xfrm>
+            <a:off x="6766560" y="3749039"/>
+            <a:ext cx="0" cy="475489"/>
+          </a:xfrm>
+          <a:prstGeom prst="line">
+            <a:avLst/>
+          </a:prstGeom>
+          <a:ln w="9525">
+            <a:solidFill>
+              <a:srgbClr val="D99416"/>
+            </a:solidFill>
+            <a:prstDash val="dash"/>
+            <a:tailEnd type="triangle" w="sm" len="sm"/>
+          </a:ln>
+        </p:spPr>
+        <p:style>
+          <a:lnRef idx="2">
+            <a:schemeClr val="accent1"/>
+          </a:lnRef>
+          <a:fillRef idx="0">
+            <a:schemeClr val="accent1"/>
+          </a:fillRef>
+          <a:effectRef idx="1">
+            <a:schemeClr val="accent1"/>
+          </a:effectRef>
+          <a:fontRef idx="minor">
+            <a:schemeClr val="tx1"/>
+          </a:fontRef>
+        </p:style>
+      </p:cxnSp>
+      <p:sp>
+        <p:nvSpPr>
+          <p:cNvPr id="109" name="Rounded Rectangle 108"/>
           <p:cNvSpPr/>
           <p:nvPr/>
         </p:nvSpPr>
         <p:spPr>
           <a:xfrm>
-            <a:off x="6309360" y="365760"/>
-            <a:ext cx="2761488" cy="4572000"/>
+            <a:off x="7315200" y="365760"/>
+            <a:ext cx="1783080" cy="4572000"/>
           </a:xfrm>
           <a:prstGeom prst="roundRect">
             <a:avLst/>
@@ -9016,14 +9513,14 @@
       </p:sp>
       <p:sp>
         <p:nvSpPr>
-          <p:cNvPr id="96" name="Rounded Rectangle 95"/>
+          <p:cNvPr id="110" name="Rounded Rectangle 109"/>
           <p:cNvSpPr/>
           <p:nvPr/>
         </p:nvSpPr>
         <p:spPr>
           <a:xfrm>
-            <a:off x="6309360" y="365760"/>
-            <a:ext cx="2761488" cy="237744"/>
+            <a:off x="7315200" y="365760"/>
+            <a:ext cx="1783080" cy="219456"/>
           </a:xfrm>
           <a:prstGeom prst="roundRect">
             <a:avLst/>
@@ -9062,14 +9559,14 @@
       </p:sp>
       <p:sp>
         <p:nvSpPr>
-          <p:cNvPr id="97" name="TextBox 96"/>
+          <p:cNvPr id="111" name="TextBox 110"/>
           <p:cNvSpPr txBox="1"/>
           <p:nvPr/>
         </p:nvSpPr>
         <p:spPr>
           <a:xfrm>
-            <a:off x="6309360" y="365760"/>
-            <a:ext cx="2761488" cy="237744"/>
+            <a:off x="7315200" y="365760"/>
+            <a:ext cx="1783080" cy="219456"/>
           </a:xfrm>
           <a:prstGeom prst="rect">
             <a:avLst/>
@@ -9084,7 +9581,7 @@
           <a:p>
             <a:pPr algn="ctr"/>
             <a:r>
-              <a:rPr sz="900" b="1" i="0">
+              <a:rPr sz="800" b="1" i="0">
                 <a:solidFill>
                   <a:srgbClr val="FFFFFF"/>
                 </a:solidFill>
@@ -9096,14 +9593,14 @@
       </p:sp>
       <p:sp>
         <p:nvSpPr>
-          <p:cNvPr id="98" name="Rounded Rectangle 97"/>
+          <p:cNvPr id="112" name="Rounded Rectangle 111"/>
           <p:cNvSpPr/>
           <p:nvPr/>
         </p:nvSpPr>
         <p:spPr>
           <a:xfrm>
-            <a:off x="6355080" y="640080"/>
-            <a:ext cx="2670048" cy="283464"/>
+            <a:off x="7360920" y="612648"/>
+            <a:ext cx="1691639" cy="274320"/>
           </a:xfrm>
           <a:prstGeom prst="roundRect">
             <a:avLst/>
@@ -9111,7 +9608,7 @@
           <a:solidFill>
             <a:srgbClr val="FFF7ED"/>
           </a:solidFill>
-          <a:ln w="5080">
+          <a:ln w="3810">
             <a:solidFill>
               <a:srgbClr val="9A3412"/>
             </a:solidFill>
@@ -9142,14 +9639,14 @@
       </p:sp>
       <p:sp>
         <p:nvSpPr>
-          <p:cNvPr id="99" name="TextBox 98"/>
+          <p:cNvPr id="113" name="TextBox 112"/>
           <p:cNvSpPr txBox="1"/>
           <p:nvPr/>
         </p:nvSpPr>
         <p:spPr>
           <a:xfrm>
-            <a:off x="6382512" y="640080"/>
-            <a:ext cx="2615184" cy="283464"/>
+            <a:off x="7379208" y="612648"/>
+            <a:ext cx="1655064" cy="274320"/>
           </a:xfrm>
           <a:prstGeom prst="rect">
             <a:avLst/>
@@ -9157,14 +9654,14 @@
           <a:noFill/>
         </p:spPr>
         <p:txBody>
-          <a:bodyPr wrap="square" lIns="15000" rIns="15000" tIns="10000" bIns="10000" anchor="ctr">
+          <a:bodyPr wrap="square" lIns="10000" rIns="10000" tIns="8000" bIns="8000" anchor="ctr">
             <a:spAutoFit/>
           </a:bodyPr>
           <a:lstStyle/>
           <a:p>
             <a:pPr algn="l"/>
             <a:r>
-              <a:rPr sz="900" b="1">
+              <a:rPr sz="800" b="1">
                 <a:solidFill>
                   <a:srgbClr val="9A3412"/>
                 </a:solidFill>
@@ -9172,18 +9669,18 @@
               <a:t>1  </a:t>
             </a:r>
             <a:r>
-              <a:rPr sz="600" b="1">
+              <a:rPr sz="500" b="1">
                 <a:solidFill>
                   <a:srgbClr val="0F172A"/>
                 </a:solidFill>
               </a:rPr>
-              <a:t>CUSTOMER FILES FNOL</a:t>
+              <a:t>CUSTOMER FNOL</a:t>
             </a:r>
           </a:p>
           <a:p>
             <a:pPr algn="l"/>
             <a:r>
-              <a:rPr sz="600">
+              <a:rPr sz="500">
                 <a:solidFill>
                   <a:srgbClr val="0F172A"/>
                 </a:solidFill>
@@ -9195,14 +9692,14 @@
       </p:sp>
       <p:sp>
         <p:nvSpPr>
-          <p:cNvPr id="100" name="Rounded Rectangle 99"/>
+          <p:cNvPr id="114" name="Rounded Rectangle 113"/>
           <p:cNvSpPr/>
           <p:nvPr/>
         </p:nvSpPr>
         <p:spPr>
           <a:xfrm>
-            <a:off x="6355080" y="941832"/>
-            <a:ext cx="2670048" cy="283464"/>
+            <a:off x="7360920" y="905256"/>
+            <a:ext cx="1691639" cy="274320"/>
           </a:xfrm>
           <a:prstGeom prst="roundRect">
             <a:avLst/>
@@ -9210,7 +9707,7 @@
           <a:solidFill>
             <a:srgbClr val="EFF6FF"/>
           </a:solidFill>
-          <a:ln w="5080">
+          <a:ln w="3810">
             <a:solidFill>
               <a:srgbClr val="0078D4"/>
             </a:solidFill>
@@ -9241,14 +9738,14 @@
       </p:sp>
       <p:sp>
         <p:nvSpPr>
-          <p:cNvPr id="101" name="TextBox 100"/>
+          <p:cNvPr id="115" name="TextBox 114"/>
           <p:cNvSpPr txBox="1"/>
           <p:nvPr/>
         </p:nvSpPr>
         <p:spPr>
           <a:xfrm>
-            <a:off x="6382512" y="941832"/>
-            <a:ext cx="2615184" cy="283464"/>
+            <a:off x="7379208" y="905256"/>
+            <a:ext cx="1655064" cy="274320"/>
           </a:xfrm>
           <a:prstGeom prst="rect">
             <a:avLst/>
@@ -9256,14 +9753,14 @@
           <a:noFill/>
         </p:spPr>
         <p:txBody>
-          <a:bodyPr wrap="square" lIns="15000" rIns="15000" tIns="10000" bIns="10000" anchor="ctr">
+          <a:bodyPr wrap="square" lIns="10000" rIns="10000" tIns="8000" bIns="8000" anchor="ctr">
             <a:spAutoFit/>
           </a:bodyPr>
           <a:lstStyle/>
           <a:p>
             <a:pPr algn="l"/>
             <a:r>
-              <a:rPr sz="900" b="1">
+              <a:rPr sz="800" b="1">
                 <a:solidFill>
                   <a:srgbClr val="0078D4"/>
                 </a:solidFill>
@@ -9271,7 +9768,7 @@
               <a:t>2  </a:t>
             </a:r>
             <a:r>
-              <a:rPr sz="600" b="1">
+              <a:rPr sz="500" b="1">
                 <a:solidFill>
                   <a:srgbClr val="0F172A"/>
                 </a:solidFill>
@@ -9282,26 +9779,26 @@
           <a:p>
             <a:pPr algn="l"/>
             <a:r>
-              <a:rPr sz="600">
+              <a:rPr sz="500">
                 <a:solidFill>
                   <a:srgbClr val="0F172A"/>
                 </a:solidFill>
               </a:rPr>
-              <a:t>Azure Static Web Apps · token mint</a:t>
-            </a:r>
-          </a:p>
-        </p:txBody>
-      </p:sp>
-      <p:sp>
-        <p:nvSpPr>
-          <p:cNvPr id="102" name="Rounded Rectangle 101"/>
+              <a:t>Static Web Apps · token mint</a:t>
+            </a:r>
+          </a:p>
+        </p:txBody>
+      </p:sp>
+      <p:sp>
+        <p:nvSpPr>
+          <p:cNvPr id="116" name="Rounded Rectangle 115"/>
           <p:cNvSpPr/>
           <p:nvPr/>
         </p:nvSpPr>
         <p:spPr>
           <a:xfrm>
-            <a:off x="6355080" y="1243584"/>
-            <a:ext cx="2670048" cy="283464"/>
+            <a:off x="7360920" y="1197864"/>
+            <a:ext cx="1691639" cy="274320"/>
           </a:xfrm>
           <a:prstGeom prst="roundRect">
             <a:avLst/>
@@ -9309,7 +9806,7 @@
           <a:solidFill>
             <a:srgbClr val="EFF6FF"/>
           </a:solidFill>
-          <a:ln w="5080">
+          <a:ln w="3810">
             <a:solidFill>
               <a:srgbClr val="0078D4"/>
             </a:solidFill>
@@ -9340,14 +9837,14 @@
       </p:sp>
       <p:sp>
         <p:nvSpPr>
-          <p:cNvPr id="103" name="TextBox 102"/>
+          <p:cNvPr id="117" name="TextBox 116"/>
           <p:cNvSpPr txBox="1"/>
           <p:nvPr/>
         </p:nvSpPr>
         <p:spPr>
           <a:xfrm>
-            <a:off x="6382512" y="1243584"/>
-            <a:ext cx="2615184" cy="283464"/>
+            <a:off x="7379208" y="1197864"/>
+            <a:ext cx="1655064" cy="274320"/>
           </a:xfrm>
           <a:prstGeom prst="rect">
             <a:avLst/>
@@ -9355,14 +9852,14 @@
           <a:noFill/>
         </p:spPr>
         <p:txBody>
-          <a:bodyPr wrap="square" lIns="15000" rIns="15000" tIns="10000" bIns="10000" anchor="ctr">
+          <a:bodyPr wrap="square" lIns="10000" rIns="10000" tIns="8000" bIns="8000" anchor="ctr">
             <a:spAutoFit/>
           </a:bodyPr>
           <a:lstStyle/>
           <a:p>
             <a:pPr algn="l"/>
             <a:r>
-              <a:rPr sz="900" b="1">
+              <a:rPr sz="800" b="1">
                 <a:solidFill>
                   <a:srgbClr val="0078D4"/>
                 </a:solidFill>
@@ -9370,7 +9867,7 @@
               <a:t>3  </a:t>
             </a:r>
             <a:r>
-              <a:rPr sz="600" b="1">
+              <a:rPr sz="500" b="1">
                 <a:solidFill>
                   <a:srgbClr val="0F172A"/>
                 </a:solidFill>
@@ -9381,7 +9878,7 @@
           <a:p>
             <a:pPr algn="l"/>
             <a:r>
-              <a:rPr sz="600">
+              <a:rPr sz="500">
                 <a:solidFill>
                   <a:srgbClr val="0F172A"/>
                 </a:solidFill>
@@ -9393,14 +9890,14 @@
       </p:sp>
       <p:sp>
         <p:nvSpPr>
-          <p:cNvPr id="104" name="Rounded Rectangle 103"/>
+          <p:cNvPr id="118" name="Rounded Rectangle 117"/>
           <p:cNvSpPr/>
           <p:nvPr/>
         </p:nvSpPr>
         <p:spPr>
           <a:xfrm>
-            <a:off x="6355080" y="1545336"/>
-            <a:ext cx="2670048" cy="283464"/>
+            <a:off x="7360920" y="1490472"/>
+            <a:ext cx="1691639" cy="274320"/>
           </a:xfrm>
           <a:prstGeom prst="roundRect">
             <a:avLst/>
@@ -9408,7 +9905,7 @@
           <a:solidFill>
             <a:srgbClr val="FAF5FF"/>
           </a:solidFill>
-          <a:ln w="5080">
+          <a:ln w="3810">
             <a:solidFill>
               <a:srgbClr val="742774"/>
             </a:solidFill>
@@ -9439,14 +9936,14 @@
       </p:sp>
       <p:sp>
         <p:nvSpPr>
-          <p:cNvPr id="105" name="TextBox 104"/>
+          <p:cNvPr id="119" name="TextBox 118"/>
           <p:cNvSpPr txBox="1"/>
           <p:nvPr/>
         </p:nvSpPr>
         <p:spPr>
           <a:xfrm>
-            <a:off x="6382512" y="1545336"/>
-            <a:ext cx="2615184" cy="283464"/>
+            <a:off x="7379208" y="1490472"/>
+            <a:ext cx="1655064" cy="274320"/>
           </a:xfrm>
           <a:prstGeom prst="rect">
             <a:avLst/>
@@ -9454,14 +9951,14 @@
           <a:noFill/>
         </p:spPr>
         <p:txBody>
-          <a:bodyPr wrap="square" lIns="15000" rIns="15000" tIns="10000" bIns="10000" anchor="ctr">
+          <a:bodyPr wrap="square" lIns="10000" rIns="10000" tIns="8000" bIns="8000" anchor="ctr">
             <a:spAutoFit/>
           </a:bodyPr>
           <a:lstStyle/>
           <a:p>
             <a:pPr algn="l"/>
             <a:r>
-              <a:rPr sz="900" b="1">
+              <a:rPr sz="800" b="1">
                 <a:solidFill>
                   <a:srgbClr val="742774"/>
                 </a:solidFill>
@@ -9469,7 +9966,7 @@
               <a:t>4  </a:t>
             </a:r>
             <a:r>
-              <a:rPr sz="600" b="1">
+              <a:rPr sz="500" b="1">
                 <a:solidFill>
                   <a:srgbClr val="0F172A"/>
                 </a:solidFill>
@@ -9480,26 +9977,26 @@
           <a:p>
             <a:pPr algn="l"/>
             <a:r>
-              <a:rPr sz="600">
+              <a:rPr sz="500">
                 <a:solidFill>
                   <a:srgbClr val="0F172A"/>
                 </a:solidFill>
               </a:rPr>
-              <a:t>11 loss-type topics · sub-flows · sentiment</a:t>
-            </a:r>
-          </a:p>
-        </p:txBody>
-      </p:sp>
-      <p:sp>
-        <p:nvSpPr>
-          <p:cNvPr id="106" name="Rounded Rectangle 105"/>
+              <a:t>11 loss topics · sub-flows</a:t>
+            </a:r>
+          </a:p>
+        </p:txBody>
+      </p:sp>
+      <p:sp>
+        <p:nvSpPr>
+          <p:cNvPr id="120" name="Rounded Rectangle 119"/>
           <p:cNvSpPr/>
           <p:nvPr/>
         </p:nvSpPr>
         <p:spPr>
           <a:xfrm>
-            <a:off x="6355080" y="1847088"/>
-            <a:ext cx="2670048" cy="283464"/>
+            <a:off x="7360920" y="1783080"/>
+            <a:ext cx="1691639" cy="274320"/>
           </a:xfrm>
           <a:prstGeom prst="roundRect">
             <a:avLst/>
@@ -9507,7 +10004,7 @@
           <a:solidFill>
             <a:srgbClr val="FAF5FF"/>
           </a:solidFill>
-          <a:ln w="5080">
+          <a:ln w="3810">
             <a:solidFill>
               <a:srgbClr val="742774"/>
             </a:solidFill>
@@ -9538,14 +10035,14 @@
       </p:sp>
       <p:sp>
         <p:nvSpPr>
-          <p:cNvPr id="107" name="TextBox 106"/>
+          <p:cNvPr id="121" name="TextBox 120"/>
           <p:cNvSpPr txBox="1"/>
           <p:nvPr/>
         </p:nvSpPr>
         <p:spPr>
           <a:xfrm>
-            <a:off x="6382512" y="1847088"/>
-            <a:ext cx="2615184" cy="283464"/>
+            <a:off x="7379208" y="1783080"/>
+            <a:ext cx="1655064" cy="274320"/>
           </a:xfrm>
           <a:prstGeom prst="rect">
             <a:avLst/>
@@ -9553,14 +10050,14 @@
           <a:noFill/>
         </p:spPr>
         <p:txBody>
-          <a:bodyPr wrap="square" lIns="15000" rIns="15000" tIns="10000" bIns="10000" anchor="ctr">
+          <a:bodyPr wrap="square" lIns="10000" rIns="10000" tIns="8000" bIns="8000" anchor="ctr">
             <a:spAutoFit/>
           </a:bodyPr>
           <a:lstStyle/>
           <a:p>
             <a:pPr algn="l"/>
             <a:r>
-              <a:rPr sz="900" b="1">
+              <a:rPr sz="800" b="1">
                 <a:solidFill>
                   <a:srgbClr val="742774"/>
                 </a:solidFill>
@@ -9568,37 +10065,37 @@
               <a:t>5  </a:t>
             </a:r>
             <a:r>
-              <a:rPr sz="600" b="1">
+              <a:rPr sz="500" b="1">
                 <a:solidFill>
                   <a:srgbClr val="0F172A"/>
                 </a:solidFill>
               </a:rPr>
-              <a:t>CREATE_CLAIM FLOW</a:t>
+              <a:t>CREATE_CLAIM</a:t>
             </a:r>
           </a:p>
           <a:p>
             <a:pPr algn="l"/>
             <a:r>
-              <a:rPr sz="600">
+              <a:rPr sz="500">
                 <a:solidFill>
                   <a:srgbClr val="0F172A"/>
                 </a:solidFill>
               </a:rPr>
-              <a:t>Inserts Claim + Document rows</a:t>
-            </a:r>
-          </a:p>
-        </p:txBody>
-      </p:sp>
-      <p:sp>
-        <p:nvSpPr>
-          <p:cNvPr id="108" name="Rounded Rectangle 107"/>
+              <a:t>Inserts Claim + Document</a:t>
+            </a:r>
+          </a:p>
+        </p:txBody>
+      </p:sp>
+      <p:sp>
+        <p:nvSpPr>
+          <p:cNvPr id="122" name="Rounded Rectangle 121"/>
           <p:cNvSpPr/>
           <p:nvPr/>
         </p:nvSpPr>
         <p:spPr>
           <a:xfrm>
-            <a:off x="6355080" y="2148840"/>
-            <a:ext cx="2670048" cy="283464"/>
+            <a:off x="7360920" y="2075688"/>
+            <a:ext cx="1691639" cy="274320"/>
           </a:xfrm>
           <a:prstGeom prst="roundRect">
             <a:avLst/>
@@ -9606,7 +10103,7 @@
           <a:solidFill>
             <a:srgbClr val="FAF5FF"/>
           </a:solidFill>
-          <a:ln w="5080">
+          <a:ln w="3810">
             <a:solidFill>
               <a:srgbClr val="742774"/>
             </a:solidFill>
@@ -9637,14 +10134,14 @@
       </p:sp>
       <p:sp>
         <p:nvSpPr>
-          <p:cNvPr id="109" name="TextBox 108"/>
+          <p:cNvPr id="123" name="TextBox 122"/>
           <p:cNvSpPr txBox="1"/>
           <p:nvPr/>
         </p:nvSpPr>
         <p:spPr>
           <a:xfrm>
-            <a:off x="6382512" y="2148840"/>
-            <a:ext cx="2615184" cy="283464"/>
+            <a:off x="7379208" y="2075688"/>
+            <a:ext cx="1655064" cy="274320"/>
           </a:xfrm>
           <a:prstGeom prst="rect">
             <a:avLst/>
@@ -9652,14 +10149,14 @@
           <a:noFill/>
         </p:spPr>
         <p:txBody>
-          <a:bodyPr wrap="square" lIns="15000" rIns="15000" tIns="10000" bIns="10000" anchor="ctr">
+          <a:bodyPr wrap="square" lIns="10000" rIns="10000" tIns="8000" bIns="8000" anchor="ctr">
             <a:spAutoFit/>
           </a:bodyPr>
           <a:lstStyle/>
           <a:p>
             <a:pPr algn="l"/>
             <a:r>
-              <a:rPr sz="900" b="1">
+              <a:rPr sz="800" b="1">
                 <a:solidFill>
                   <a:srgbClr val="742774"/>
                 </a:solidFill>
@@ -9667,7 +10164,7 @@
               <a:t>6  </a:t>
             </a:r>
             <a:r>
-              <a:rPr sz="600" b="1">
+              <a:rPr sz="500" b="1">
                 <a:solidFill>
                   <a:srgbClr val="0F172A"/>
                 </a:solidFill>
@@ -9678,26 +10175,26 @@
           <a:p>
             <a:pPr algn="l"/>
             <a:r>
-              <a:rPr sz="600">
+              <a:rPr sz="500">
                 <a:solidFill>
                   <a:srgbClr val="0F172A"/>
                 </a:solidFill>
               </a:rPr>
-              <a:t>Trigger on Claim insert · fan-out</a:t>
-            </a:r>
-          </a:p>
-        </p:txBody>
-      </p:sp>
-      <p:sp>
-        <p:nvSpPr>
-          <p:cNvPr id="110" name="Rounded Rectangle 109"/>
+              <a:t>Trigger on Claim · fan-out</a:t>
+            </a:r>
+          </a:p>
+        </p:txBody>
+      </p:sp>
+      <p:sp>
+        <p:nvSpPr>
+          <p:cNvPr id="124" name="Rounded Rectangle 123"/>
           <p:cNvSpPr/>
           <p:nvPr/>
         </p:nvSpPr>
         <p:spPr>
           <a:xfrm>
-            <a:off x="6355080" y="2450592"/>
-            <a:ext cx="2670048" cy="283464"/>
+            <a:off x="7360920" y="2368296"/>
+            <a:ext cx="1691639" cy="274320"/>
           </a:xfrm>
           <a:prstGeom prst="roundRect">
             <a:avLst/>
@@ -9705,7 +10202,7 @@
           <a:solidFill>
             <a:srgbClr val="EFF6FF"/>
           </a:solidFill>
-          <a:ln w="5080">
+          <a:ln w="3810">
             <a:solidFill>
               <a:srgbClr val="0078D4"/>
             </a:solidFill>
@@ -9736,14 +10233,14 @@
       </p:sp>
       <p:sp>
         <p:nvSpPr>
-          <p:cNvPr id="111" name="TextBox 110"/>
+          <p:cNvPr id="125" name="TextBox 124"/>
           <p:cNvSpPr txBox="1"/>
           <p:nvPr/>
         </p:nvSpPr>
         <p:spPr>
           <a:xfrm>
-            <a:off x="6382512" y="2450592"/>
-            <a:ext cx="2615184" cy="283464"/>
+            <a:off x="7379208" y="2368296"/>
+            <a:ext cx="1655064" cy="274320"/>
           </a:xfrm>
           <a:prstGeom prst="rect">
             <a:avLst/>
@@ -9751,14 +10248,14 @@
           <a:noFill/>
         </p:spPr>
         <p:txBody>
-          <a:bodyPr wrap="square" lIns="15000" rIns="15000" tIns="10000" bIns="10000" anchor="ctr">
+          <a:bodyPr wrap="square" lIns="10000" rIns="10000" tIns="8000" bIns="8000" anchor="ctr">
             <a:spAutoFit/>
           </a:bodyPr>
           <a:lstStyle/>
           <a:p>
             <a:pPr algn="l"/>
             <a:r>
-              <a:rPr sz="900" b="1">
+              <a:rPr sz="800" b="1">
                 <a:solidFill>
                   <a:srgbClr val="0078D4"/>
                 </a:solidFill>
@@ -9766,18 +10263,18 @@
               <a:t>7  </a:t>
             </a:r>
             <a:r>
-              <a:rPr sz="600" b="1">
+              <a:rPr sz="500" b="1">
                 <a:solidFill>
                   <a:srgbClr val="0F172A"/>
                 </a:solidFill>
               </a:rPr>
-              <a:t>EXTRACTION AGENT (AI)</a:t>
+              <a:t>EXTRACTION AGENT</a:t>
             </a:r>
           </a:p>
           <a:p>
             <a:pPr algn="l"/>
             <a:r>
-              <a:rPr sz="600">
+              <a:rPr sz="500">
                 <a:solidFill>
                   <a:srgbClr val="0F172A"/>
                 </a:solidFill>
@@ -9789,14 +10286,14 @@
       </p:sp>
       <p:sp>
         <p:nvSpPr>
-          <p:cNvPr id="112" name="Rounded Rectangle 111"/>
+          <p:cNvPr id="126" name="Rounded Rectangle 125"/>
           <p:cNvSpPr/>
           <p:nvPr/>
         </p:nvSpPr>
         <p:spPr>
           <a:xfrm>
-            <a:off x="6355080" y="2752344"/>
-            <a:ext cx="2670048" cy="283464"/>
+            <a:off x="7360920" y="2660903"/>
+            <a:ext cx="1691639" cy="274320"/>
           </a:xfrm>
           <a:prstGeom prst="roundRect">
             <a:avLst/>
@@ -9804,7 +10301,7 @@
           <a:solidFill>
             <a:srgbClr val="EFF6FF"/>
           </a:solidFill>
-          <a:ln w="5080">
+          <a:ln w="3810">
             <a:solidFill>
               <a:srgbClr val="0078D4"/>
             </a:solidFill>
@@ -9835,14 +10332,14 @@
       </p:sp>
       <p:sp>
         <p:nvSpPr>
-          <p:cNvPr id="113" name="TextBox 112"/>
+          <p:cNvPr id="127" name="TextBox 126"/>
           <p:cNvSpPr txBox="1"/>
           <p:nvPr/>
         </p:nvSpPr>
         <p:spPr>
           <a:xfrm>
-            <a:off x="6382512" y="2752344"/>
-            <a:ext cx="2615184" cy="283464"/>
+            <a:off x="7379208" y="2660903"/>
+            <a:ext cx="1655064" cy="274320"/>
           </a:xfrm>
           <a:prstGeom prst="rect">
             <a:avLst/>
@@ -9850,14 +10347,14 @@
           <a:noFill/>
         </p:spPr>
         <p:txBody>
-          <a:bodyPr wrap="square" lIns="15000" rIns="15000" tIns="10000" bIns="10000" anchor="ctr">
+          <a:bodyPr wrap="square" lIns="10000" rIns="10000" tIns="8000" bIns="8000" anchor="ctr">
             <a:spAutoFit/>
           </a:bodyPr>
           <a:lstStyle/>
           <a:p>
             <a:pPr algn="l"/>
             <a:r>
-              <a:rPr sz="900" b="1">
+              <a:rPr sz="800" b="1">
                 <a:solidFill>
                   <a:srgbClr val="0078D4"/>
                 </a:solidFill>
@@ -9865,37 +10362,37 @@
               <a:t>8  </a:t>
             </a:r>
             <a:r>
-              <a:rPr sz="600" b="1">
+              <a:rPr sz="500" b="1">
                 <a:solidFill>
                   <a:srgbClr val="0F172A"/>
                 </a:solidFill>
               </a:rPr>
-              <a:t>POLICY AGENT (AI)</a:t>
+              <a:t>POLICY AGENT</a:t>
             </a:r>
           </a:p>
           <a:p>
             <a:pPr algn="l"/>
             <a:r>
-              <a:rPr sz="600">
+              <a:rPr sz="500">
                 <a:solidFill>
                   <a:srgbClr val="0F172A"/>
                 </a:solidFill>
               </a:rPr>
-              <a:t>AI Search vector RAG + citations</a:t>
-            </a:r>
-          </a:p>
-        </p:txBody>
-      </p:sp>
-      <p:sp>
-        <p:nvSpPr>
-          <p:cNvPr id="114" name="Rounded Rectangle 113"/>
+              <a:t>AI Search vector RAG</a:t>
+            </a:r>
+          </a:p>
+        </p:txBody>
+      </p:sp>
+      <p:sp>
+        <p:nvSpPr>
+          <p:cNvPr id="128" name="Rounded Rectangle 127"/>
           <p:cNvSpPr/>
           <p:nvPr/>
         </p:nvSpPr>
         <p:spPr>
           <a:xfrm>
-            <a:off x="6355080" y="3054096"/>
-            <a:ext cx="2670048" cy="283464"/>
+            <a:off x="7360920" y="2953511"/>
+            <a:ext cx="1691639" cy="274320"/>
           </a:xfrm>
           <a:prstGeom prst="roundRect">
             <a:avLst/>
@@ -9903,7 +10400,7 @@
           <a:solidFill>
             <a:srgbClr val="EFF6FF"/>
           </a:solidFill>
-          <a:ln w="5080">
+          <a:ln w="3810">
             <a:solidFill>
               <a:srgbClr val="0078D4"/>
             </a:solidFill>
@@ -9934,14 +10431,14 @@
       </p:sp>
       <p:sp>
         <p:nvSpPr>
-          <p:cNvPr id="115" name="TextBox 114"/>
+          <p:cNvPr id="129" name="TextBox 128"/>
           <p:cNvSpPr txBox="1"/>
           <p:nvPr/>
         </p:nvSpPr>
         <p:spPr>
           <a:xfrm>
-            <a:off x="6382512" y="3054096"/>
-            <a:ext cx="2615184" cy="283464"/>
+            <a:off x="7379208" y="2953511"/>
+            <a:ext cx="1655064" cy="274320"/>
           </a:xfrm>
           <a:prstGeom prst="rect">
             <a:avLst/>
@@ -9949,14 +10446,14 @@
           <a:noFill/>
         </p:spPr>
         <p:txBody>
-          <a:bodyPr wrap="square" lIns="15000" rIns="15000" tIns="10000" bIns="10000" anchor="ctr">
+          <a:bodyPr wrap="square" lIns="10000" rIns="10000" tIns="8000" bIns="8000" anchor="ctr">
             <a:spAutoFit/>
           </a:bodyPr>
           <a:lstStyle/>
           <a:p>
             <a:pPr algn="l"/>
             <a:r>
-              <a:rPr sz="900" b="1">
+              <a:rPr sz="800" b="1">
                 <a:solidFill>
                   <a:srgbClr val="0078D4"/>
                 </a:solidFill>
@@ -9964,7 +10461,7 @@
               <a:t>9  </a:t>
             </a:r>
             <a:r>
-              <a:rPr sz="600" b="1">
+              <a:rPr sz="500" b="1">
                 <a:solidFill>
                   <a:srgbClr val="0F172A"/>
                 </a:solidFill>
@@ -9975,26 +10472,26 @@
           <a:p>
             <a:pPr algn="l"/>
             <a:r>
-              <a:rPr sz="600">
+              <a:rPr sz="500">
                 <a:solidFill>
                   <a:srgbClr val="0F172A"/>
                 </a:solidFill>
               </a:rPr>
-              <a:t>7 ext checks (NOAA, NHTSA live + 5 sb)</a:t>
-            </a:r>
-          </a:p>
-        </p:txBody>
-      </p:sp>
-      <p:sp>
-        <p:nvSpPr>
-          <p:cNvPr id="116" name="Rounded Rectangle 115"/>
+              <a:t>7 ext checks parallel</a:t>
+            </a:r>
+          </a:p>
+        </p:txBody>
+      </p:sp>
+      <p:sp>
+        <p:nvSpPr>
+          <p:cNvPr id="130" name="Rounded Rectangle 129"/>
           <p:cNvSpPr/>
           <p:nvPr/>
         </p:nvSpPr>
         <p:spPr>
           <a:xfrm>
-            <a:off x="6355080" y="3355848"/>
-            <a:ext cx="2670048" cy="283464"/>
+            <a:off x="7360920" y="3246119"/>
+            <a:ext cx="1691639" cy="274320"/>
           </a:xfrm>
           <a:prstGeom prst="roundRect">
             <a:avLst/>
@@ -10002,7 +10499,7 @@
           <a:solidFill>
             <a:srgbClr val="EFF6FF"/>
           </a:solidFill>
-          <a:ln w="5080">
+          <a:ln w="3810">
             <a:solidFill>
               <a:srgbClr val="0078D4"/>
             </a:solidFill>
@@ -10033,14 +10530,14 @@
       </p:sp>
       <p:sp>
         <p:nvSpPr>
-          <p:cNvPr id="117" name="TextBox 116"/>
+          <p:cNvPr id="131" name="TextBox 130"/>
           <p:cNvSpPr txBox="1"/>
           <p:nvPr/>
         </p:nvSpPr>
         <p:spPr>
           <a:xfrm>
-            <a:off x="6382512" y="3355848"/>
-            <a:ext cx="2615184" cy="283464"/>
+            <a:off x="7379208" y="3246119"/>
+            <a:ext cx="1655064" cy="274320"/>
           </a:xfrm>
           <a:prstGeom prst="rect">
             <a:avLst/>
@@ -10048,14 +10545,14 @@
           <a:noFill/>
         </p:spPr>
         <p:txBody>
-          <a:bodyPr wrap="square" lIns="15000" rIns="15000" tIns="10000" bIns="10000" anchor="ctr">
+          <a:bodyPr wrap="square" lIns="10000" rIns="10000" tIns="8000" bIns="8000" anchor="ctr">
             <a:spAutoFit/>
           </a:bodyPr>
           <a:lstStyle/>
           <a:p>
             <a:pPr algn="l"/>
             <a:r>
-              <a:rPr sz="900" b="1">
+              <a:rPr sz="800" b="1">
                 <a:solidFill>
                   <a:srgbClr val="0078D4"/>
                 </a:solidFill>
@@ -10063,18 +10560,18 @@
               <a:t>10  </a:t>
             </a:r>
             <a:r>
-              <a:rPr sz="600" b="1">
+              <a:rPr sz="500" b="1">
                 <a:solidFill>
                   <a:srgbClr val="0F172A"/>
                 </a:solidFill>
               </a:rPr>
-              <a:t>ADJUDICATION (AI · GPT-4.1)</a:t>
+              <a:t>ADJUDICATION (GPT-4.1)</a:t>
             </a:r>
           </a:p>
           <a:p>
             <a:pPr algn="l"/>
             <a:r>
-              <a:rPr sz="600">
+              <a:rPr sz="500">
                 <a:solidFill>
                   <a:srgbClr val="0F172A"/>
                 </a:solidFill>
@@ -10086,14 +10583,14 @@
       </p:sp>
       <p:sp>
         <p:nvSpPr>
-          <p:cNvPr id="118" name="Rounded Rectangle 117"/>
+          <p:cNvPr id="132" name="Rounded Rectangle 131"/>
           <p:cNvSpPr/>
           <p:nvPr/>
         </p:nvSpPr>
         <p:spPr>
           <a:xfrm>
-            <a:off x="6355080" y="3657600"/>
-            <a:ext cx="2670048" cy="283464"/>
+            <a:off x="7360920" y="3538727"/>
+            <a:ext cx="1691639" cy="274320"/>
           </a:xfrm>
           <a:prstGeom prst="roundRect">
             <a:avLst/>
@@ -10101,7 +10598,7 @@
           <a:solidFill>
             <a:srgbClr val="F0FDF4"/>
           </a:solidFill>
-          <a:ln w="5080">
+          <a:ln w="3810">
             <a:solidFill>
               <a:srgbClr val="107C10"/>
             </a:solidFill>
@@ -10132,14 +10629,14 @@
       </p:sp>
       <p:sp>
         <p:nvSpPr>
-          <p:cNvPr id="119" name="TextBox 118"/>
+          <p:cNvPr id="133" name="TextBox 132"/>
           <p:cNvSpPr txBox="1"/>
           <p:nvPr/>
         </p:nvSpPr>
         <p:spPr>
           <a:xfrm>
-            <a:off x="6382512" y="3657600"/>
-            <a:ext cx="2615184" cy="283464"/>
+            <a:off x="7379208" y="3538727"/>
+            <a:ext cx="1655064" cy="274320"/>
           </a:xfrm>
           <a:prstGeom prst="rect">
             <a:avLst/>
@@ -10147,14 +10644,14 @@
           <a:noFill/>
         </p:spPr>
         <p:txBody>
-          <a:bodyPr wrap="square" lIns="15000" rIns="15000" tIns="10000" bIns="10000" anchor="ctr">
+          <a:bodyPr wrap="square" lIns="10000" rIns="10000" tIns="8000" bIns="8000" anchor="ctr">
             <a:spAutoFit/>
           </a:bodyPr>
           <a:lstStyle/>
           <a:p>
             <a:pPr algn="l"/>
             <a:r>
-              <a:rPr sz="900" b="1">
+              <a:rPr sz="800" b="1">
                 <a:solidFill>
                   <a:srgbClr val="107C10"/>
                 </a:solidFill>
@@ -10162,7 +10659,7 @@
               <a:t>11  </a:t>
             </a:r>
             <a:r>
-              <a:rPr sz="600" b="1">
+              <a:rPr sz="500" b="1">
                 <a:solidFill>
                   <a:srgbClr val="0F172A"/>
                 </a:solidFill>
@@ -10173,26 +10670,26 @@
           <a:p>
             <a:pPr algn="l"/>
             <a:r>
-              <a:rPr sz="600">
+              <a:rPr sz="500">
                 <a:solidFill>
                   <a:srgbClr val="0F172A"/>
                 </a:solidFill>
               </a:rPr>
-              <a:t>T1 auto · T2 adjuster · T3 CSR</a:t>
-            </a:r>
-          </a:p>
-        </p:txBody>
-      </p:sp>
-      <p:sp>
-        <p:nvSpPr>
-          <p:cNvPr id="120" name="Rounded Rectangle 119"/>
+              <a:t>T1 auto · T2 adj · T3 CSR</a:t>
+            </a:r>
+          </a:p>
+        </p:txBody>
+      </p:sp>
+      <p:sp>
+        <p:nvSpPr>
+          <p:cNvPr id="134" name="Rounded Rectangle 133"/>
           <p:cNvSpPr/>
           <p:nvPr/>
         </p:nvSpPr>
         <p:spPr>
           <a:xfrm>
-            <a:off x="6355080" y="3959352"/>
-            <a:ext cx="2670048" cy="283464"/>
+            <a:off x="7360920" y="3831335"/>
+            <a:ext cx="1691639" cy="274320"/>
           </a:xfrm>
           <a:prstGeom prst="roundRect">
             <a:avLst/>
@@ -10200,7 +10697,7 @@
           <a:solidFill>
             <a:srgbClr val="FAF5FF"/>
           </a:solidFill>
-          <a:ln w="5080">
+          <a:ln w="3810">
             <a:solidFill>
               <a:srgbClr val="742774"/>
             </a:solidFill>
@@ -10231,14 +10728,14 @@
       </p:sp>
       <p:sp>
         <p:nvSpPr>
-          <p:cNvPr id="121" name="TextBox 120"/>
+          <p:cNvPr id="135" name="TextBox 134"/>
           <p:cNvSpPr txBox="1"/>
           <p:nvPr/>
         </p:nvSpPr>
         <p:spPr>
           <a:xfrm>
-            <a:off x="6382512" y="3959352"/>
-            <a:ext cx="2615184" cy="283464"/>
+            <a:off x="7379208" y="3831335"/>
+            <a:ext cx="1655064" cy="274320"/>
           </a:xfrm>
           <a:prstGeom prst="rect">
             <a:avLst/>
@@ -10246,14 +10743,14 @@
           <a:noFill/>
         </p:spPr>
         <p:txBody>
-          <a:bodyPr wrap="square" lIns="15000" rIns="15000" tIns="10000" bIns="10000" anchor="ctr">
+          <a:bodyPr wrap="square" lIns="10000" rIns="10000" tIns="8000" bIns="8000" anchor="ctr">
             <a:spAutoFit/>
           </a:bodyPr>
           <a:lstStyle/>
           <a:p>
             <a:pPr algn="l"/>
             <a:r>
-              <a:rPr sz="900" b="1">
+              <a:rPr sz="800" b="1">
                 <a:solidFill>
                   <a:srgbClr val="742774"/>
                 </a:solidFill>
@@ -10261,37 +10758,37 @@
               <a:t>12  </a:t>
             </a:r>
             <a:r>
-              <a:rPr sz="600" b="1">
+              <a:rPr sz="500" b="1">
                 <a:solidFill>
                   <a:srgbClr val="0F172A"/>
                 </a:solidFill>
               </a:rPr>
-              <a:t>EXPLANATION AGENT (AI)</a:t>
+              <a:t>EXPLANATION (AI)</a:t>
             </a:r>
           </a:p>
           <a:p>
             <a:pPr algn="l"/>
             <a:r>
-              <a:rPr sz="600">
+              <a:rPr sz="500">
                 <a:solidFill>
                   <a:srgbClr val="0F172A"/>
                 </a:solidFill>
               </a:rPr>
-              <a:t>Runs every claim · plain English</a:t>
-            </a:r>
-          </a:p>
-        </p:txBody>
-      </p:sp>
-      <p:sp>
-        <p:nvSpPr>
-          <p:cNvPr id="122" name="Rounded Rectangle 121"/>
+              <a:t>Plain-English rationale</a:t>
+            </a:r>
+          </a:p>
+        </p:txBody>
+      </p:sp>
+      <p:sp>
+        <p:nvSpPr>
+          <p:cNvPr id="136" name="Rounded Rectangle 135"/>
           <p:cNvSpPr/>
           <p:nvPr/>
         </p:nvSpPr>
         <p:spPr>
           <a:xfrm>
-            <a:off x="6355080" y="4261104"/>
-            <a:ext cx="2670048" cy="283464"/>
+            <a:off x="7360920" y="4123944"/>
+            <a:ext cx="1691639" cy="274320"/>
           </a:xfrm>
           <a:prstGeom prst="roundRect">
             <a:avLst/>
@@ -10299,7 +10796,7 @@
           <a:solidFill>
             <a:srgbClr val="F0FDF4"/>
           </a:solidFill>
-          <a:ln w="5080">
+          <a:ln w="3810">
             <a:solidFill>
               <a:srgbClr val="107C10"/>
             </a:solidFill>
@@ -10330,14 +10827,14 @@
       </p:sp>
       <p:sp>
         <p:nvSpPr>
-          <p:cNvPr id="123" name="TextBox 122"/>
+          <p:cNvPr id="137" name="TextBox 136"/>
           <p:cNvSpPr txBox="1"/>
           <p:nvPr/>
         </p:nvSpPr>
         <p:spPr>
           <a:xfrm>
-            <a:off x="6382512" y="4261104"/>
-            <a:ext cx="2615184" cy="283464"/>
+            <a:off x="7379208" y="4123944"/>
+            <a:ext cx="1655064" cy="274320"/>
           </a:xfrm>
           <a:prstGeom prst="rect">
             <a:avLst/>
@@ -10345,14 +10842,14 @@
           <a:noFill/>
         </p:spPr>
         <p:txBody>
-          <a:bodyPr wrap="square" lIns="15000" rIns="15000" tIns="10000" bIns="10000" anchor="ctr">
+          <a:bodyPr wrap="square" lIns="10000" rIns="10000" tIns="8000" bIns="8000" anchor="ctr">
             <a:spAutoFit/>
           </a:bodyPr>
           <a:lstStyle/>
           <a:p>
             <a:pPr algn="l"/>
             <a:r>
-              <a:rPr sz="900" b="1">
+              <a:rPr sz="800" b="1">
                 <a:solidFill>
                   <a:srgbClr val="107C10"/>
                 </a:solidFill>
@@ -10360,7 +10857,7 @@
               <a:t>13  </a:t>
             </a:r>
             <a:r>
-              <a:rPr sz="600" b="1">
+              <a:rPr sz="500" b="1">
                 <a:solidFill>
                   <a:srgbClr val="0F172A"/>
                 </a:solidFill>
@@ -10371,26 +10868,26 @@
           <a:p>
             <a:pPr algn="l"/>
             <a:r>
-              <a:rPr sz="600">
+              <a:rPr sz="500">
                 <a:solidFill>
                   <a:srgbClr val="0F172A"/>
                 </a:solidFill>
               </a:rPr>
-              <a:t>Reply on original channel · loop close</a:t>
-            </a:r>
-          </a:p>
-        </p:txBody>
-      </p:sp>
-      <p:sp>
-        <p:nvSpPr>
-          <p:cNvPr id="124" name="Rounded Rectangle 123"/>
+              <a:t>Reply on original channel</a:t>
+            </a:r>
+          </a:p>
+        </p:txBody>
+      </p:sp>
+      <p:sp>
+        <p:nvSpPr>
+          <p:cNvPr id="138" name="Rounded Rectangle 137"/>
           <p:cNvSpPr/>
           <p:nvPr/>
         </p:nvSpPr>
         <p:spPr>
           <a:xfrm>
-            <a:off x="6355080" y="4608576"/>
-            <a:ext cx="2670048" cy="384048"/>
+            <a:off x="7360920" y="4453128"/>
+            <a:ext cx="1691639" cy="365760"/>
           </a:xfrm>
           <a:prstGeom prst="roundRect">
             <a:avLst/>
@@ -10429,14 +10926,14 @@
       </p:sp>
       <p:sp>
         <p:nvSpPr>
-          <p:cNvPr id="125" name="TextBox 124"/>
+          <p:cNvPr id="139" name="TextBox 138"/>
           <p:cNvSpPr txBox="1"/>
           <p:nvPr/>
         </p:nvSpPr>
         <p:spPr>
           <a:xfrm>
-            <a:off x="6382512" y="4608576"/>
-            <a:ext cx="2615184" cy="384048"/>
+            <a:off x="7379208" y="4453128"/>
+            <a:ext cx="1655064" cy="365760"/>
           </a:xfrm>
           <a:prstGeom prst="rect">
             <a:avLst/>
@@ -10444,7 +10941,7 @@
           <a:noFill/>
         </p:spPr>
         <p:txBody>
-          <a:bodyPr wrap="square" lIns="15000" rIns="15000" tIns="10000" bIns="10000">
+          <a:bodyPr wrap="square" lIns="10000" rIns="10000" tIns="8000" bIns="8000">
             <a:spAutoFit/>
           </a:bodyPr>
           <a:lstStyle/>
@@ -10456,33 +10953,25 @@
                   <a:srgbClr val="92400E"/>
                 </a:solidFill>
               </a:rPr>
-              <a:t>🛡 GLASS BOX  </a:t>
-            </a:r>
-            <a:r>
-              <a:rPr sz="600">
+              <a:t>🛡 GLASS BOX</a:t>
+            </a:r>
+          </a:p>
+          <a:p>
+            <a:pPr algn="l"/>
+            <a:r>
+              <a:rPr sz="500">
                 <a:solidFill>
                   <a:srgbClr val="92400E"/>
                 </a:solidFill>
               </a:rPr>
-              <a:t>(cross-cutting)</a:t>
-            </a:r>
-          </a:p>
-          <a:p>
-            <a:pPr algn="l"/>
-            <a:r>
-              <a:rPr sz="600">
-                <a:solidFill>
-                  <a:srgbClr val="92400E"/>
-                </a:solidFill>
-              </a:rPr>
-              <a:t>1 row per AI step → CO SB21-169 · NAIC · NY DFS · CA AB 2930</a:t>
-            </a:r>
-          </a:p>
-        </p:txBody>
-      </p:sp>
-      <p:sp>
-        <p:nvSpPr>
-          <p:cNvPr id="126" name="TextBox 125"/>
+              <a:t>Every AI step → 1 row in Decision_Rationale</a:t>
+            </a:r>
+          </a:p>
+        </p:txBody>
+      </p:sp>
+      <p:sp>
+        <p:nvSpPr>
+          <p:cNvPr id="140" name="TextBox 139"/>
           <p:cNvSpPr txBox="1"/>
           <p:nvPr/>
         </p:nvSpPr>
@@ -10509,7 +10998,7 @@
                   <a:srgbClr val="5A6680"/>
                 </a:solidFill>
               </a:rPr>
-              <a:t>ARROWS:  red = runtime flow  ·  red dashed = loop back to customer  ·  black = Tier-2 / Tier-3 human branches  ·  gold dashed = audit write</a:t>
+              <a:t>ARROWS:  red = runtime flow  ·  red dashed = loop back  ·  black = Tier-2/3 human branches  ·  gold dashed = audit write</a:t>
             </a:r>
           </a:p>
         </p:txBody>

--- a/docs/hackathon_blueprint_filled.pptx
+++ b/docs/hackathon_blueprint_filled.pptx
@@ -5131,8 +5131,8 @@
         </p:nvSpPr>
         <p:spPr>
           <a:xfrm>
-            <a:off x="73152" y="36576"/>
-            <a:ext cx="9006840" cy="182880"/>
+            <a:off x="109728" y="45720"/>
+            <a:ext cx="6400800" cy="292608"/>
           </a:xfrm>
           <a:prstGeom prst="rect">
             <a:avLst/>
@@ -5140,5869 +5140,46 @@
           <a:noFill/>
         </p:spPr>
         <p:txBody>
-          <a:bodyPr wrap="square" lIns="15000" rIns="15000" tIns="5000" bIns="5000" anchor="ctr">
+          <a:bodyPr wrap="none" tIns="0" bIns="0">
             <a:spAutoFit/>
           </a:bodyPr>
           <a:lstStyle/>
           <a:p>
-            <a:pPr algn="l"/>
-            <a:r>
-              <a:rPr sz="1200" b="1" i="0">
+            <a:r>
+              <a:rPr sz="1100" b="1">
                 <a:solidFill>
                   <a:srgbClr val="0A2540"/>
                 </a:solidFill>
               </a:rPr>
-              <a:t>Logical Architecture (C4 L2)  —  swimlanes + numbered flow</a:t>
+              <a:t>Logical Architecture (C4 L2)</a:t>
             </a:r>
           </a:p>
         </p:txBody>
       </p:sp>
-      <p:sp>
-        <p:nvSpPr>
-          <p:cNvPr id="3" name="TextBox 2"/>
-          <p:cNvSpPr txBox="1"/>
-          <p:nvPr/>
-        </p:nvSpPr>
-        <p:spPr>
-          <a:xfrm>
-            <a:off x="73152" y="201168"/>
-            <a:ext cx="9006840" cy="128016"/>
+      <p:pic>
+        <p:nvPicPr>
+          <p:cNvPr id="3" name="Picture 2" descr="image.png"/>
+          <p:cNvPicPr>
+            <a:picLocks noChangeAspect="1"/>
+          </p:cNvPicPr>
+          <p:nvPr/>
+        </p:nvPicPr>
+        <p:blipFill>
+          <a:blip r:embed="rId2"/>
+          <a:stretch>
+            <a:fillRect/>
+          </a:stretch>
+        </p:blipFill>
+        <p:spPr>
+          <a:xfrm>
+            <a:off x="0" y="63415"/>
+            <a:ext cx="9144000" cy="5016670"/>
           </a:xfrm>
           <a:prstGeom prst="rect">
             <a:avLst/>
           </a:prstGeom>
-          <a:noFill/>
-        </p:spPr>
-        <p:txBody>
-          <a:bodyPr wrap="square" lIns="15000" rIns="15000" tIns="5000" bIns="5000" anchor="ctr">
-            <a:spAutoFit/>
-          </a:bodyPr>
-          <a:lstStyle/>
-          <a:p>
-            <a:pPr algn="l"/>
-            <a:r>
-              <a:rPr sz="600" b="0" i="1">
-                <a:solidFill>
-                  <a:srgbClr val="5A6680"/>
-                </a:solidFill>
-              </a:rPr>
-              <a:t>Numbers 1-13 trace runtime flow  ·  read with the commentary panel on the right</a:t>
-            </a:r>
-          </a:p>
-        </p:txBody>
-      </p:sp>
-      <p:sp>
-        <p:nvSpPr>
-          <p:cNvPr id="4" name="Rectangle 3"/>
-          <p:cNvSpPr/>
-          <p:nvPr/>
-        </p:nvSpPr>
-        <p:spPr>
-          <a:xfrm>
-            <a:off x="557784" y="365760"/>
-            <a:ext cx="6601968" cy="475488"/>
-          </a:xfrm>
-          <a:prstGeom prst="rect">
-            <a:avLst/>
-          </a:prstGeom>
-          <a:solidFill>
-            <a:srgbClr val="FFF7ED"/>
-          </a:solidFill>
-          <a:ln w="5080">
-            <a:solidFill>
-              <a:srgbClr val="FED7AA"/>
-            </a:solidFill>
-          </a:ln>
-          <a:effectLst/>
-        </p:spPr>
-        <p:style>
-          <a:lnRef idx="1">
-            <a:schemeClr val="accent1"/>
-          </a:lnRef>
-          <a:fillRef idx="3">
-            <a:schemeClr val="accent1"/>
-          </a:fillRef>
-          <a:effectRef idx="2">
-            <a:schemeClr val="accent1"/>
-          </a:effectRef>
-          <a:fontRef idx="minor">
-            <a:schemeClr val="lt1"/>
-          </a:fontRef>
-        </p:style>
-        <p:txBody>
-          <a:bodyPr rtlCol="0" anchor="ctr"/>
-          <a:lstStyle/>
-          <a:p>
-            <a:pPr algn="ctr"/>
-          </a:p>
-        </p:txBody>
-      </p:sp>
-      <p:sp>
-        <p:nvSpPr>
-          <p:cNvPr id="5" name="Rounded Rectangle 4"/>
-          <p:cNvSpPr/>
-          <p:nvPr/>
-        </p:nvSpPr>
-        <p:spPr>
-          <a:xfrm>
-            <a:off x="36576" y="365760"/>
-            <a:ext cx="502920" cy="475488"/>
-          </a:xfrm>
-          <a:prstGeom prst="roundRect">
-            <a:avLst/>
-          </a:prstGeom>
-          <a:solidFill>
-            <a:srgbClr val="EA580C"/>
-          </a:solidFill>
-          <a:ln w="5080">
-            <a:solidFill>
-              <a:srgbClr val="EA580C"/>
-            </a:solidFill>
-          </a:ln>
-          <a:effectLst/>
-        </p:spPr>
-        <p:style>
-          <a:lnRef idx="1">
-            <a:schemeClr val="accent1"/>
-          </a:lnRef>
-          <a:fillRef idx="3">
-            <a:schemeClr val="accent1"/>
-          </a:fillRef>
-          <a:effectRef idx="2">
-            <a:schemeClr val="accent1"/>
-          </a:effectRef>
-          <a:fontRef idx="minor">
-            <a:schemeClr val="lt1"/>
-          </a:fontRef>
-        </p:style>
-        <p:txBody>
-          <a:bodyPr rtlCol="0" anchor="ctr"/>
-          <a:lstStyle/>
-          <a:p>
-            <a:pPr algn="ctr"/>
-          </a:p>
-        </p:txBody>
-      </p:sp>
-      <p:sp>
-        <p:nvSpPr>
-          <p:cNvPr id="6" name="TextBox 5"/>
-          <p:cNvSpPr txBox="1"/>
-          <p:nvPr/>
-        </p:nvSpPr>
-        <p:spPr>
-          <a:xfrm>
-            <a:off x="36576" y="365760"/>
-            <a:ext cx="502920" cy="475488"/>
-          </a:xfrm>
-          <a:prstGeom prst="rect">
-            <a:avLst/>
-          </a:prstGeom>
-          <a:noFill/>
-        </p:spPr>
-        <p:txBody>
-          <a:bodyPr wrap="square" lIns="15000" rIns="15000" tIns="5000" bIns="5000" anchor="ctr">
-            <a:spAutoFit/>
-          </a:bodyPr>
-          <a:lstStyle/>
-          <a:p>
-            <a:pPr algn="ctr"/>
-            <a:r>
-              <a:rPr sz="600" b="1" i="0">
-                <a:solidFill>
-                  <a:srgbClr val="FFFFFF"/>
-                </a:solidFill>
-              </a:rPr>
-              <a:t>CUSTOMER</a:t>
-            </a:r>
-          </a:p>
-          <a:p>
-            <a:pPr algn="ctr"/>
-            <a:r>
-              <a:rPr sz="600" b="1" i="0">
-                <a:solidFill>
-                  <a:srgbClr val="FFFFFF"/>
-                </a:solidFill>
-              </a:rPr>
-              <a:t>&amp; CHANNELS</a:t>
-            </a:r>
-          </a:p>
-        </p:txBody>
-      </p:sp>
-      <p:sp>
-        <p:nvSpPr>
-          <p:cNvPr id="7" name="Rectangle 6"/>
-          <p:cNvSpPr/>
-          <p:nvPr/>
-        </p:nvSpPr>
-        <p:spPr>
-          <a:xfrm>
-            <a:off x="557784" y="859536"/>
-            <a:ext cx="6601968" cy="475488"/>
-          </a:xfrm>
-          <a:prstGeom prst="rect">
-            <a:avLst/>
-          </a:prstGeom>
-          <a:solidFill>
-            <a:srgbClr val="EFF6FF"/>
-          </a:solidFill>
-          <a:ln w="5080">
-            <a:solidFill>
-              <a:srgbClr val="BFDBFE"/>
-            </a:solidFill>
-          </a:ln>
-          <a:effectLst/>
-        </p:spPr>
-        <p:style>
-          <a:lnRef idx="1">
-            <a:schemeClr val="accent1"/>
-          </a:lnRef>
-          <a:fillRef idx="3">
-            <a:schemeClr val="accent1"/>
-          </a:fillRef>
-          <a:effectRef idx="2">
-            <a:schemeClr val="accent1"/>
-          </a:effectRef>
-          <a:fontRef idx="minor">
-            <a:schemeClr val="lt1"/>
-          </a:fontRef>
-        </p:style>
-        <p:txBody>
-          <a:bodyPr rtlCol="0" anchor="ctr"/>
-          <a:lstStyle/>
-          <a:p>
-            <a:pPr algn="ctr"/>
-          </a:p>
-        </p:txBody>
-      </p:sp>
-      <p:sp>
-        <p:nvSpPr>
-          <p:cNvPr id="8" name="Rounded Rectangle 7"/>
-          <p:cNvSpPr/>
-          <p:nvPr/>
-        </p:nvSpPr>
-        <p:spPr>
-          <a:xfrm>
-            <a:off x="36576" y="859536"/>
-            <a:ext cx="502920" cy="475488"/>
-          </a:xfrm>
-          <a:prstGeom prst="roundRect">
-            <a:avLst/>
-          </a:prstGeom>
-          <a:solidFill>
-            <a:srgbClr val="0078D4"/>
-          </a:solidFill>
-          <a:ln w="5080">
-            <a:solidFill>
-              <a:srgbClr val="0078D4"/>
-            </a:solidFill>
-          </a:ln>
-          <a:effectLst/>
-        </p:spPr>
-        <p:style>
-          <a:lnRef idx="1">
-            <a:schemeClr val="accent1"/>
-          </a:lnRef>
-          <a:fillRef idx="3">
-            <a:schemeClr val="accent1"/>
-          </a:fillRef>
-          <a:effectRef idx="2">
-            <a:schemeClr val="accent1"/>
-          </a:effectRef>
-          <a:fontRef idx="minor">
-            <a:schemeClr val="lt1"/>
-          </a:fontRef>
-        </p:style>
-        <p:txBody>
-          <a:bodyPr rtlCol="0" anchor="ctr"/>
-          <a:lstStyle/>
-          <a:p>
-            <a:pPr algn="ctr"/>
-          </a:p>
-        </p:txBody>
-      </p:sp>
-      <p:sp>
-        <p:nvSpPr>
-          <p:cNvPr id="9" name="TextBox 8"/>
-          <p:cNvSpPr txBox="1"/>
-          <p:nvPr/>
-        </p:nvSpPr>
-        <p:spPr>
-          <a:xfrm>
-            <a:off x="36576" y="859536"/>
-            <a:ext cx="502920" cy="475488"/>
-          </a:xfrm>
-          <a:prstGeom prst="rect">
-            <a:avLst/>
-          </a:prstGeom>
-          <a:noFill/>
-        </p:spPr>
-        <p:txBody>
-          <a:bodyPr wrap="square" lIns="15000" rIns="15000" tIns="5000" bIns="5000" anchor="ctr">
-            <a:spAutoFit/>
-          </a:bodyPr>
-          <a:lstStyle/>
-          <a:p>
-            <a:pPr algn="ctr"/>
-            <a:r>
-              <a:rPr sz="600" b="1" i="0">
-                <a:solidFill>
-                  <a:srgbClr val="FFFFFF"/>
-                </a:solidFill>
-              </a:rPr>
-              <a:t>FRONTEND</a:t>
-            </a:r>
-          </a:p>
-          <a:p>
-            <a:pPr algn="ctr"/>
-            <a:r>
-              <a:rPr sz="600" b="1" i="0">
-                <a:solidFill>
-                  <a:srgbClr val="FFFFFF"/>
-                </a:solidFill>
-              </a:rPr>
-              <a:t>(SWA)</a:t>
-            </a:r>
-          </a:p>
-        </p:txBody>
-      </p:sp>
-      <p:sp>
-        <p:nvSpPr>
-          <p:cNvPr id="10" name="Rectangle 9"/>
-          <p:cNvSpPr/>
-          <p:nvPr/>
-        </p:nvSpPr>
-        <p:spPr>
-          <a:xfrm>
-            <a:off x="557784" y="1353312"/>
-            <a:ext cx="6601968" cy="566928"/>
-          </a:xfrm>
-          <a:prstGeom prst="rect">
-            <a:avLst/>
-          </a:prstGeom>
-          <a:solidFill>
-            <a:srgbClr val="FAF5FF"/>
-          </a:solidFill>
-          <a:ln w="5080">
-            <a:solidFill>
-              <a:srgbClr val="E9D5FF"/>
-            </a:solidFill>
-          </a:ln>
-          <a:effectLst/>
-        </p:spPr>
-        <p:style>
-          <a:lnRef idx="1">
-            <a:schemeClr val="accent1"/>
-          </a:lnRef>
-          <a:fillRef idx="3">
-            <a:schemeClr val="accent1"/>
-          </a:fillRef>
-          <a:effectRef idx="2">
-            <a:schemeClr val="accent1"/>
-          </a:effectRef>
-          <a:fontRef idx="minor">
-            <a:schemeClr val="lt1"/>
-          </a:fontRef>
-        </p:style>
-        <p:txBody>
-          <a:bodyPr rtlCol="0" anchor="ctr"/>
-          <a:lstStyle/>
-          <a:p>
-            <a:pPr algn="ctr"/>
-          </a:p>
-        </p:txBody>
-      </p:sp>
-      <p:sp>
-        <p:nvSpPr>
-          <p:cNvPr id="11" name="Rounded Rectangle 10"/>
-          <p:cNvSpPr/>
-          <p:nvPr/>
-        </p:nvSpPr>
-        <p:spPr>
-          <a:xfrm>
-            <a:off x="36576" y="1353312"/>
-            <a:ext cx="502920" cy="566928"/>
-          </a:xfrm>
-          <a:prstGeom prst="roundRect">
-            <a:avLst/>
-          </a:prstGeom>
-          <a:solidFill>
-            <a:srgbClr val="742774"/>
-          </a:solidFill>
-          <a:ln w="5080">
-            <a:solidFill>
-              <a:srgbClr val="742774"/>
-            </a:solidFill>
-          </a:ln>
-          <a:effectLst/>
-        </p:spPr>
-        <p:style>
-          <a:lnRef idx="1">
-            <a:schemeClr val="accent1"/>
-          </a:lnRef>
-          <a:fillRef idx="3">
-            <a:schemeClr val="accent1"/>
-          </a:fillRef>
-          <a:effectRef idx="2">
-            <a:schemeClr val="accent1"/>
-          </a:effectRef>
-          <a:fontRef idx="minor">
-            <a:schemeClr val="lt1"/>
-          </a:fontRef>
-        </p:style>
-        <p:txBody>
-          <a:bodyPr rtlCol="0" anchor="ctr"/>
-          <a:lstStyle/>
-          <a:p>
-            <a:pPr algn="ctr"/>
-          </a:p>
-        </p:txBody>
-      </p:sp>
-      <p:sp>
-        <p:nvSpPr>
-          <p:cNvPr id="12" name="TextBox 11"/>
-          <p:cNvSpPr txBox="1"/>
-          <p:nvPr/>
-        </p:nvSpPr>
-        <p:spPr>
-          <a:xfrm>
-            <a:off x="36576" y="1353312"/>
-            <a:ext cx="502920" cy="566928"/>
-          </a:xfrm>
-          <a:prstGeom prst="rect">
-            <a:avLst/>
-          </a:prstGeom>
-          <a:noFill/>
-        </p:spPr>
-        <p:txBody>
-          <a:bodyPr wrap="square" lIns="15000" rIns="15000" tIns="5000" bIns="5000" anchor="ctr">
-            <a:spAutoFit/>
-          </a:bodyPr>
-          <a:lstStyle/>
-          <a:p>
-            <a:pPr algn="ctr"/>
-            <a:r>
-              <a:rPr sz="600" b="1" i="0">
-                <a:solidFill>
-                  <a:srgbClr val="FFFFFF"/>
-                </a:solidFill>
-              </a:rPr>
-              <a:t>COPILOT</a:t>
-            </a:r>
-          </a:p>
-          <a:p>
-            <a:pPr algn="ctr"/>
-            <a:r>
-              <a:rPr sz="600" b="1" i="0">
-                <a:solidFill>
-                  <a:srgbClr val="FFFFFF"/>
-                </a:solidFill>
-              </a:rPr>
-              <a:t>STUDIO</a:t>
-            </a:r>
-          </a:p>
-        </p:txBody>
-      </p:sp>
-      <p:sp>
-        <p:nvSpPr>
-          <p:cNvPr id="13" name="Rectangle 12"/>
-          <p:cNvSpPr/>
-          <p:nvPr/>
-        </p:nvSpPr>
-        <p:spPr>
-          <a:xfrm>
-            <a:off x="557784" y="1938528"/>
-            <a:ext cx="6601968" cy="566928"/>
-          </a:xfrm>
-          <a:prstGeom prst="rect">
-            <a:avLst/>
-          </a:prstGeom>
-          <a:solidFill>
-            <a:srgbClr val="FAF5FF"/>
-          </a:solidFill>
-          <a:ln w="5080">
-            <a:solidFill>
-              <a:srgbClr val="E9D5FF"/>
-            </a:solidFill>
-          </a:ln>
-          <a:effectLst/>
-        </p:spPr>
-        <p:style>
-          <a:lnRef idx="1">
-            <a:schemeClr val="accent1"/>
-          </a:lnRef>
-          <a:fillRef idx="3">
-            <a:schemeClr val="accent1"/>
-          </a:fillRef>
-          <a:effectRef idx="2">
-            <a:schemeClr val="accent1"/>
-          </a:effectRef>
-          <a:fontRef idx="minor">
-            <a:schemeClr val="lt1"/>
-          </a:fontRef>
-        </p:style>
-        <p:txBody>
-          <a:bodyPr rtlCol="0" anchor="ctr"/>
-          <a:lstStyle/>
-          <a:p>
-            <a:pPr algn="ctr"/>
-          </a:p>
-        </p:txBody>
-      </p:sp>
-      <p:sp>
-        <p:nvSpPr>
-          <p:cNvPr id="14" name="Rounded Rectangle 13"/>
-          <p:cNvSpPr/>
-          <p:nvPr/>
-        </p:nvSpPr>
-        <p:spPr>
-          <a:xfrm>
-            <a:off x="36576" y="1938528"/>
-            <a:ext cx="502920" cy="566928"/>
-          </a:xfrm>
-          <a:prstGeom prst="roundRect">
-            <a:avLst/>
-          </a:prstGeom>
-          <a:solidFill>
-            <a:srgbClr val="742774"/>
-          </a:solidFill>
-          <a:ln w="5080">
-            <a:solidFill>
-              <a:srgbClr val="742774"/>
-            </a:solidFill>
-          </a:ln>
-          <a:effectLst/>
-        </p:spPr>
-        <p:style>
-          <a:lnRef idx="1">
-            <a:schemeClr val="accent1"/>
-          </a:lnRef>
-          <a:fillRef idx="3">
-            <a:schemeClr val="accent1"/>
-          </a:fillRef>
-          <a:effectRef idx="2">
-            <a:schemeClr val="accent1"/>
-          </a:effectRef>
-          <a:fontRef idx="minor">
-            <a:schemeClr val="lt1"/>
-          </a:fontRef>
-        </p:style>
-        <p:txBody>
-          <a:bodyPr rtlCol="0" anchor="ctr"/>
-          <a:lstStyle/>
-          <a:p>
-            <a:pPr algn="ctr"/>
-          </a:p>
-        </p:txBody>
-      </p:sp>
-      <p:sp>
-        <p:nvSpPr>
-          <p:cNvPr id="15" name="TextBox 14"/>
-          <p:cNvSpPr txBox="1"/>
-          <p:nvPr/>
-        </p:nvSpPr>
-        <p:spPr>
-          <a:xfrm>
-            <a:off x="36576" y="1938528"/>
-            <a:ext cx="502920" cy="566928"/>
-          </a:xfrm>
-          <a:prstGeom prst="rect">
-            <a:avLst/>
-          </a:prstGeom>
-          <a:noFill/>
-        </p:spPr>
-        <p:txBody>
-          <a:bodyPr wrap="square" lIns="15000" rIns="15000" tIns="5000" bIns="5000" anchor="ctr">
-            <a:spAutoFit/>
-          </a:bodyPr>
-          <a:lstStyle/>
-          <a:p>
-            <a:pPr algn="ctr"/>
-            <a:r>
-              <a:rPr sz="600" b="1" i="0">
-                <a:solidFill>
-                  <a:srgbClr val="FFFFFF"/>
-                </a:solidFill>
-              </a:rPr>
-              <a:t>POWER</a:t>
-            </a:r>
-          </a:p>
-          <a:p>
-            <a:pPr algn="ctr"/>
-            <a:r>
-              <a:rPr sz="600" b="1" i="0">
-                <a:solidFill>
-                  <a:srgbClr val="FFFFFF"/>
-                </a:solidFill>
-              </a:rPr>
-              <a:t>AUTOMATE</a:t>
-            </a:r>
-          </a:p>
-        </p:txBody>
-      </p:sp>
-      <p:sp>
-        <p:nvSpPr>
-          <p:cNvPr id="16" name="Rectangle 15"/>
-          <p:cNvSpPr/>
-          <p:nvPr/>
-        </p:nvSpPr>
-        <p:spPr>
-          <a:xfrm>
-            <a:off x="557784" y="2523744"/>
-            <a:ext cx="6601968" cy="841248"/>
-          </a:xfrm>
-          <a:prstGeom prst="rect">
-            <a:avLst/>
-          </a:prstGeom>
-          <a:solidFill>
-            <a:srgbClr val="EFF6FF"/>
-          </a:solidFill>
-          <a:ln w="5080">
-            <a:solidFill>
-              <a:srgbClr val="BFDBFE"/>
-            </a:solidFill>
-          </a:ln>
-          <a:effectLst/>
-        </p:spPr>
-        <p:style>
-          <a:lnRef idx="1">
-            <a:schemeClr val="accent1"/>
-          </a:lnRef>
-          <a:fillRef idx="3">
-            <a:schemeClr val="accent1"/>
-          </a:fillRef>
-          <a:effectRef idx="2">
-            <a:schemeClr val="accent1"/>
-          </a:effectRef>
-          <a:fontRef idx="minor">
-            <a:schemeClr val="lt1"/>
-          </a:fontRef>
-        </p:style>
-        <p:txBody>
-          <a:bodyPr rtlCol="0" anchor="ctr"/>
-          <a:lstStyle/>
-          <a:p>
-            <a:pPr algn="ctr"/>
-          </a:p>
-        </p:txBody>
-      </p:sp>
-      <p:sp>
-        <p:nvSpPr>
-          <p:cNvPr id="17" name="Rounded Rectangle 16"/>
-          <p:cNvSpPr/>
-          <p:nvPr/>
-        </p:nvSpPr>
-        <p:spPr>
-          <a:xfrm>
-            <a:off x="36576" y="2523744"/>
-            <a:ext cx="502920" cy="841248"/>
-          </a:xfrm>
-          <a:prstGeom prst="roundRect">
-            <a:avLst/>
-          </a:prstGeom>
-          <a:solidFill>
-            <a:srgbClr val="0078D4"/>
-          </a:solidFill>
-          <a:ln w="5080">
-            <a:solidFill>
-              <a:srgbClr val="0078D4"/>
-            </a:solidFill>
-          </a:ln>
-          <a:effectLst/>
-        </p:spPr>
-        <p:style>
-          <a:lnRef idx="1">
-            <a:schemeClr val="accent1"/>
-          </a:lnRef>
-          <a:fillRef idx="3">
-            <a:schemeClr val="accent1"/>
-          </a:fillRef>
-          <a:effectRef idx="2">
-            <a:schemeClr val="accent1"/>
-          </a:effectRef>
-          <a:fontRef idx="minor">
-            <a:schemeClr val="lt1"/>
-          </a:fontRef>
-        </p:style>
-        <p:txBody>
-          <a:bodyPr rtlCol="0" anchor="ctr"/>
-          <a:lstStyle/>
-          <a:p>
-            <a:pPr algn="ctr"/>
-          </a:p>
-        </p:txBody>
-      </p:sp>
-      <p:sp>
-        <p:nvSpPr>
-          <p:cNvPr id="18" name="TextBox 17"/>
-          <p:cNvSpPr txBox="1"/>
-          <p:nvPr/>
-        </p:nvSpPr>
-        <p:spPr>
-          <a:xfrm>
-            <a:off x="36576" y="2523744"/>
-            <a:ext cx="502920" cy="841248"/>
-          </a:xfrm>
-          <a:prstGeom prst="rect">
-            <a:avLst/>
-          </a:prstGeom>
-          <a:noFill/>
-        </p:spPr>
-        <p:txBody>
-          <a:bodyPr wrap="square" lIns="15000" rIns="15000" tIns="5000" bIns="5000" anchor="ctr">
-            <a:spAutoFit/>
-          </a:bodyPr>
-          <a:lstStyle/>
-          <a:p>
-            <a:pPr algn="ctr"/>
-            <a:r>
-              <a:rPr sz="600" b="1" i="0">
-                <a:solidFill>
-                  <a:srgbClr val="FFFFFF"/>
-                </a:solidFill>
-              </a:rPr>
-              <a:t>AZURE AI</a:t>
-            </a:r>
-          </a:p>
-          <a:p>
-            <a:pPr algn="ctr"/>
-            <a:r>
-              <a:rPr sz="600" b="1" i="0">
-                <a:solidFill>
-                  <a:srgbClr val="FFFFFF"/>
-                </a:solidFill>
-              </a:rPr>
-              <a:t>SERVICES</a:t>
-            </a:r>
-          </a:p>
-        </p:txBody>
-      </p:sp>
-      <p:sp>
-        <p:nvSpPr>
-          <p:cNvPr id="19" name="Rectangle 18"/>
-          <p:cNvSpPr/>
-          <p:nvPr/>
-        </p:nvSpPr>
-        <p:spPr>
-          <a:xfrm>
-            <a:off x="557784" y="3383280"/>
-            <a:ext cx="6601968" cy="475488"/>
-          </a:xfrm>
-          <a:prstGeom prst="rect">
-            <a:avLst/>
-          </a:prstGeom>
-          <a:solidFill>
-            <a:srgbClr val="F0FDF4"/>
-          </a:solidFill>
-          <a:ln w="5080">
-            <a:solidFill>
-              <a:srgbClr val="BBF7D0"/>
-            </a:solidFill>
-          </a:ln>
-          <a:effectLst/>
-        </p:spPr>
-        <p:style>
-          <a:lnRef idx="1">
-            <a:schemeClr val="accent1"/>
-          </a:lnRef>
-          <a:fillRef idx="3">
-            <a:schemeClr val="accent1"/>
-          </a:fillRef>
-          <a:effectRef idx="2">
-            <a:schemeClr val="accent1"/>
-          </a:effectRef>
-          <a:fontRef idx="minor">
-            <a:schemeClr val="lt1"/>
-          </a:fontRef>
-        </p:style>
-        <p:txBody>
-          <a:bodyPr rtlCol="0" anchor="ctr"/>
-          <a:lstStyle/>
-          <a:p>
-            <a:pPr algn="ctr"/>
-          </a:p>
-        </p:txBody>
-      </p:sp>
-      <p:sp>
-        <p:nvSpPr>
-          <p:cNvPr id="20" name="Rounded Rectangle 19"/>
-          <p:cNvSpPr/>
-          <p:nvPr/>
-        </p:nvSpPr>
-        <p:spPr>
-          <a:xfrm>
-            <a:off x="36576" y="3383280"/>
-            <a:ext cx="502920" cy="475488"/>
-          </a:xfrm>
-          <a:prstGeom prst="roundRect">
-            <a:avLst/>
-          </a:prstGeom>
-          <a:solidFill>
-            <a:srgbClr val="107C10"/>
-          </a:solidFill>
-          <a:ln w="5080">
-            <a:solidFill>
-              <a:srgbClr val="107C10"/>
-            </a:solidFill>
-          </a:ln>
-          <a:effectLst/>
-        </p:spPr>
-        <p:style>
-          <a:lnRef idx="1">
-            <a:schemeClr val="accent1"/>
-          </a:lnRef>
-          <a:fillRef idx="3">
-            <a:schemeClr val="accent1"/>
-          </a:fillRef>
-          <a:effectRef idx="2">
-            <a:schemeClr val="accent1"/>
-          </a:effectRef>
-          <a:fontRef idx="minor">
-            <a:schemeClr val="lt1"/>
-          </a:fontRef>
-        </p:style>
-        <p:txBody>
-          <a:bodyPr rtlCol="0" anchor="ctr"/>
-          <a:lstStyle/>
-          <a:p>
-            <a:pPr algn="ctr"/>
-          </a:p>
-        </p:txBody>
-      </p:sp>
-      <p:sp>
-        <p:nvSpPr>
-          <p:cNvPr id="21" name="TextBox 20"/>
-          <p:cNvSpPr txBox="1"/>
-          <p:nvPr/>
-        </p:nvSpPr>
-        <p:spPr>
-          <a:xfrm>
-            <a:off x="36576" y="3383280"/>
-            <a:ext cx="502920" cy="475488"/>
-          </a:xfrm>
-          <a:prstGeom prst="rect">
-            <a:avLst/>
-          </a:prstGeom>
-          <a:noFill/>
-        </p:spPr>
-        <p:txBody>
-          <a:bodyPr wrap="square" lIns="15000" rIns="15000" tIns="5000" bIns="5000" anchor="ctr">
-            <a:spAutoFit/>
-          </a:bodyPr>
-          <a:lstStyle/>
-          <a:p>
-            <a:pPr algn="ctr"/>
-            <a:r>
-              <a:rPr sz="600" b="1" i="0">
-                <a:solidFill>
-                  <a:srgbClr val="FFFFFF"/>
-                </a:solidFill>
-              </a:rPr>
-              <a:t>M365 TEAMS</a:t>
-            </a:r>
-          </a:p>
-          <a:p>
-            <a:pPr algn="ctr"/>
-            <a:r>
-              <a:rPr sz="600" b="1" i="0">
-                <a:solidFill>
-                  <a:srgbClr val="FFFFFF"/>
-                </a:solidFill>
-              </a:rPr>
-              <a:t>(Human)</a:t>
-            </a:r>
-          </a:p>
-        </p:txBody>
-      </p:sp>
-      <p:sp>
-        <p:nvSpPr>
-          <p:cNvPr id="22" name="Rectangle 21"/>
-          <p:cNvSpPr/>
-          <p:nvPr/>
-        </p:nvSpPr>
-        <p:spPr>
-          <a:xfrm>
-            <a:off x="557784" y="3877056"/>
-            <a:ext cx="6601968" cy="1097280"/>
-          </a:xfrm>
-          <a:prstGeom prst="rect">
-            <a:avLst/>
-          </a:prstGeom>
-          <a:solidFill>
-            <a:srgbClr val="FEF3C7"/>
-          </a:solidFill>
-          <a:ln w="5080">
-            <a:solidFill>
-              <a:srgbClr val="FDE68A"/>
-            </a:solidFill>
-          </a:ln>
-          <a:effectLst/>
-        </p:spPr>
-        <p:style>
-          <a:lnRef idx="1">
-            <a:schemeClr val="accent1"/>
-          </a:lnRef>
-          <a:fillRef idx="3">
-            <a:schemeClr val="accent1"/>
-          </a:fillRef>
-          <a:effectRef idx="2">
-            <a:schemeClr val="accent1"/>
-          </a:effectRef>
-          <a:fontRef idx="minor">
-            <a:schemeClr val="lt1"/>
-          </a:fontRef>
-        </p:style>
-        <p:txBody>
-          <a:bodyPr rtlCol="0" anchor="ctr"/>
-          <a:lstStyle/>
-          <a:p>
-            <a:pPr algn="ctr"/>
-          </a:p>
-        </p:txBody>
-      </p:sp>
-      <p:sp>
-        <p:nvSpPr>
-          <p:cNvPr id="23" name="Rounded Rectangle 22"/>
-          <p:cNvSpPr/>
-          <p:nvPr/>
-        </p:nvSpPr>
-        <p:spPr>
-          <a:xfrm>
-            <a:off x="36576" y="3877056"/>
-            <a:ext cx="502920" cy="1097280"/>
-          </a:xfrm>
-          <a:prstGeom prst="roundRect">
-            <a:avLst/>
-          </a:prstGeom>
-          <a:solidFill>
-            <a:srgbClr val="D99416"/>
-          </a:solidFill>
-          <a:ln w="5080">
-            <a:solidFill>
-              <a:srgbClr val="D99416"/>
-            </a:solidFill>
-          </a:ln>
-          <a:effectLst/>
-        </p:spPr>
-        <p:style>
-          <a:lnRef idx="1">
-            <a:schemeClr val="accent1"/>
-          </a:lnRef>
-          <a:fillRef idx="3">
-            <a:schemeClr val="accent1"/>
-          </a:fillRef>
-          <a:effectRef idx="2">
-            <a:schemeClr val="accent1"/>
-          </a:effectRef>
-          <a:fontRef idx="minor">
-            <a:schemeClr val="lt1"/>
-          </a:fontRef>
-        </p:style>
-        <p:txBody>
-          <a:bodyPr rtlCol="0" anchor="ctr"/>
-          <a:lstStyle/>
-          <a:p>
-            <a:pPr algn="ctr"/>
-          </a:p>
-        </p:txBody>
-      </p:sp>
-      <p:sp>
-        <p:nvSpPr>
-          <p:cNvPr id="24" name="TextBox 23"/>
-          <p:cNvSpPr txBox="1"/>
-          <p:nvPr/>
-        </p:nvSpPr>
-        <p:spPr>
-          <a:xfrm>
-            <a:off x="36576" y="3877056"/>
-            <a:ext cx="502920" cy="1097280"/>
-          </a:xfrm>
-          <a:prstGeom prst="rect">
-            <a:avLst/>
-          </a:prstGeom>
-          <a:noFill/>
-        </p:spPr>
-        <p:txBody>
-          <a:bodyPr wrap="square" lIns="15000" rIns="15000" tIns="5000" bIns="5000" anchor="ctr">
-            <a:spAutoFit/>
-          </a:bodyPr>
-          <a:lstStyle/>
-          <a:p>
-            <a:pPr algn="ctr"/>
-            <a:r>
-              <a:rPr sz="600" b="1" i="0">
-                <a:solidFill>
-                  <a:srgbClr val="FFFFFF"/>
-                </a:solidFill>
-              </a:rPr>
-              <a:t>DATAVERSE</a:t>
-            </a:r>
-          </a:p>
-          <a:p>
-            <a:pPr algn="ctr"/>
-            <a:r>
-              <a:rPr sz="600" b="1" i="0">
-                <a:solidFill>
-                  <a:srgbClr val="FFFFFF"/>
-                </a:solidFill>
-              </a:rPr>
-              <a:t>Glass Box</a:t>
-            </a:r>
-          </a:p>
-        </p:txBody>
-      </p:sp>
-      <p:sp>
-        <p:nvSpPr>
-          <p:cNvPr id="25" name="Rounded Rectangle 24"/>
-          <p:cNvSpPr/>
-          <p:nvPr/>
-        </p:nvSpPr>
-        <p:spPr>
-          <a:xfrm>
-            <a:off x="777240" y="402336"/>
-            <a:ext cx="1280160" cy="384048"/>
-          </a:xfrm>
-          <a:prstGeom prst="roundRect">
-            <a:avLst/>
-          </a:prstGeom>
-          <a:solidFill>
-            <a:srgbClr val="EA580C"/>
-          </a:solidFill>
-          <a:ln w="6350">
-            <a:solidFill>
-              <a:srgbClr val="9A3412"/>
-            </a:solidFill>
-          </a:ln>
-          <a:effectLst/>
-        </p:spPr>
-        <p:style>
-          <a:lnRef idx="1">
-            <a:schemeClr val="accent1"/>
-          </a:lnRef>
-          <a:fillRef idx="3">
-            <a:schemeClr val="accent1"/>
-          </a:fillRef>
-          <a:effectRef idx="2">
-            <a:schemeClr val="accent1"/>
-          </a:effectRef>
-          <a:fontRef idx="minor">
-            <a:schemeClr val="lt1"/>
-          </a:fontRef>
-        </p:style>
-        <p:txBody>
-          <a:bodyPr rtlCol="0" anchor="ctr"/>
-          <a:lstStyle/>
-          <a:p>
-            <a:pPr algn="ctr"/>
-          </a:p>
-        </p:txBody>
-      </p:sp>
-      <p:sp>
-        <p:nvSpPr>
-          <p:cNvPr id="26" name="TextBox 25"/>
-          <p:cNvSpPr txBox="1"/>
-          <p:nvPr/>
-        </p:nvSpPr>
-        <p:spPr>
-          <a:xfrm>
-            <a:off x="777240" y="402336"/>
-            <a:ext cx="1280160" cy="384048"/>
-          </a:xfrm>
-          <a:prstGeom prst="rect">
-            <a:avLst/>
-          </a:prstGeom>
-          <a:noFill/>
-        </p:spPr>
-        <p:txBody>
-          <a:bodyPr wrap="square" lIns="10000" rIns="10000" tIns="8000" bIns="8000" anchor="ctr">
-            <a:spAutoFit/>
-          </a:bodyPr>
-          <a:lstStyle/>
-          <a:p>
-            <a:pPr algn="ctr"/>
-            <a:r>
-              <a:rPr sz="1200" b="1">
-                <a:solidFill>
-                  <a:srgbClr val="FFFFFF"/>
-                </a:solidFill>
-              </a:rPr>
-              <a:t>1</a:t>
-            </a:r>
-          </a:p>
-          <a:p>
-            <a:pPr algn="ctr"/>
-            <a:r>
-              <a:rPr sz="600" b="1">
-                <a:solidFill>
-                  <a:srgbClr val="FFFFFF"/>
-                </a:solidFill>
-              </a:rPr>
-              <a:t>Customer + 5 channels</a:t>
-            </a:r>
-          </a:p>
-        </p:txBody>
-      </p:sp>
-      <p:sp>
-        <p:nvSpPr>
-          <p:cNvPr id="27" name="Rounded Rectangle 26"/>
-          <p:cNvSpPr/>
-          <p:nvPr/>
-        </p:nvSpPr>
-        <p:spPr>
-          <a:xfrm>
-            <a:off x="777240" y="896112"/>
-            <a:ext cx="1280160" cy="384048"/>
-          </a:xfrm>
-          <a:prstGeom prst="roundRect">
-            <a:avLst/>
-          </a:prstGeom>
-          <a:solidFill>
-            <a:srgbClr val="DBEAFE"/>
-          </a:solidFill>
-          <a:ln w="6350">
-            <a:solidFill>
-              <a:srgbClr val="0078D4"/>
-            </a:solidFill>
-          </a:ln>
-          <a:effectLst/>
-        </p:spPr>
-        <p:style>
-          <a:lnRef idx="1">
-            <a:schemeClr val="accent1"/>
-          </a:lnRef>
-          <a:fillRef idx="3">
-            <a:schemeClr val="accent1"/>
-          </a:fillRef>
-          <a:effectRef idx="2">
-            <a:schemeClr val="accent1"/>
-          </a:effectRef>
-          <a:fontRef idx="minor">
-            <a:schemeClr val="lt1"/>
-          </a:fontRef>
-        </p:style>
-        <p:txBody>
-          <a:bodyPr rtlCol="0" anchor="ctr"/>
-          <a:lstStyle/>
-          <a:p>
-            <a:pPr algn="ctr"/>
-          </a:p>
-        </p:txBody>
-      </p:sp>
-      <p:sp>
-        <p:nvSpPr>
-          <p:cNvPr id="28" name="TextBox 27"/>
-          <p:cNvSpPr txBox="1"/>
-          <p:nvPr/>
-        </p:nvSpPr>
-        <p:spPr>
-          <a:xfrm>
-            <a:off x="777240" y="896112"/>
-            <a:ext cx="1280160" cy="384048"/>
-          </a:xfrm>
-          <a:prstGeom prst="rect">
-            <a:avLst/>
-          </a:prstGeom>
-          <a:noFill/>
-        </p:spPr>
-        <p:txBody>
-          <a:bodyPr wrap="square" lIns="10000" rIns="10000" tIns="8000" bIns="8000" anchor="ctr">
-            <a:spAutoFit/>
-          </a:bodyPr>
-          <a:lstStyle/>
-          <a:p>
-            <a:pPr algn="ctr"/>
-            <a:r>
-              <a:rPr sz="1200" b="1">
-                <a:solidFill>
-                  <a:srgbClr val="0A2540"/>
-                </a:solidFill>
-              </a:rPr>
-              <a:t>2</a:t>
-            </a:r>
-          </a:p>
-          <a:p>
-            <a:pPr algn="ctr"/>
-            <a:r>
-              <a:rPr sz="600" b="1">
-                <a:solidFill>
-                  <a:srgbClr val="0A2540"/>
-                </a:solidFill>
-              </a:rPr>
-              <a:t>React SPA + Token Broker</a:t>
-            </a:r>
-          </a:p>
-        </p:txBody>
-      </p:sp>
-      <p:sp>
-        <p:nvSpPr>
-          <p:cNvPr id="29" name="Rounded Rectangle 28"/>
-          <p:cNvSpPr/>
-          <p:nvPr/>
-        </p:nvSpPr>
-        <p:spPr>
-          <a:xfrm>
-            <a:off x="2331720" y="896112"/>
-            <a:ext cx="1188720" cy="384048"/>
-          </a:xfrm>
-          <a:prstGeom prst="roundRect">
-            <a:avLst/>
-          </a:prstGeom>
-          <a:solidFill>
-            <a:srgbClr val="DBEAFE"/>
-          </a:solidFill>
-          <a:ln w="6350">
-            <a:solidFill>
-              <a:srgbClr val="0078D4"/>
-            </a:solidFill>
-          </a:ln>
-          <a:effectLst/>
-        </p:spPr>
-        <p:style>
-          <a:lnRef idx="1">
-            <a:schemeClr val="accent1"/>
-          </a:lnRef>
-          <a:fillRef idx="3">
-            <a:schemeClr val="accent1"/>
-          </a:fillRef>
-          <a:effectRef idx="2">
-            <a:schemeClr val="accent1"/>
-          </a:effectRef>
-          <a:fontRef idx="minor">
-            <a:schemeClr val="lt1"/>
-          </a:fontRef>
-        </p:style>
-        <p:txBody>
-          <a:bodyPr rtlCol="0" anchor="ctr"/>
-          <a:lstStyle/>
-          <a:p>
-            <a:pPr algn="ctr"/>
-          </a:p>
-        </p:txBody>
-      </p:sp>
-      <p:sp>
-        <p:nvSpPr>
-          <p:cNvPr id="30" name="TextBox 29"/>
-          <p:cNvSpPr txBox="1"/>
-          <p:nvPr/>
-        </p:nvSpPr>
-        <p:spPr>
-          <a:xfrm>
-            <a:off x="2331720" y="896112"/>
-            <a:ext cx="1188720" cy="384048"/>
-          </a:xfrm>
-          <a:prstGeom prst="rect">
-            <a:avLst/>
-          </a:prstGeom>
-          <a:noFill/>
-        </p:spPr>
-        <p:txBody>
-          <a:bodyPr wrap="square" lIns="10000" rIns="10000" tIns="8000" bIns="8000" anchor="ctr">
-            <a:spAutoFit/>
-          </a:bodyPr>
-          <a:lstStyle/>
-          <a:p>
-            <a:pPr algn="ctr"/>
-            <a:r>
-              <a:rPr sz="1200" b="1">
-                <a:solidFill>
-                  <a:srgbClr val="0A2540"/>
-                </a:solidFill>
-              </a:rPr>
-              <a:t>3</a:t>
-            </a:r>
-          </a:p>
-          <a:p>
-            <a:pPr algn="ctr"/>
-            <a:r>
-              <a:rPr sz="600" b="1">
-                <a:solidFill>
-                  <a:srgbClr val="0A2540"/>
-                </a:solidFill>
-              </a:rPr>
-              <a:t>Direct Line / Bot</a:t>
-            </a:r>
-          </a:p>
-        </p:txBody>
-      </p:sp>
-      <p:sp>
-        <p:nvSpPr>
-          <p:cNvPr id="31" name="Rounded Rectangle 30"/>
-          <p:cNvSpPr/>
-          <p:nvPr/>
-        </p:nvSpPr>
-        <p:spPr>
-          <a:xfrm>
-            <a:off x="2331720" y="1417320"/>
-            <a:ext cx="1188720" cy="438912"/>
-          </a:xfrm>
-          <a:prstGeom prst="roundRect">
-            <a:avLst/>
-          </a:prstGeom>
-          <a:solidFill>
-            <a:srgbClr val="EDE4F5"/>
-          </a:solidFill>
-          <a:ln w="9525">
-            <a:solidFill>
-              <a:srgbClr val="742774"/>
-            </a:solidFill>
-          </a:ln>
-          <a:effectLst/>
-        </p:spPr>
-        <p:style>
-          <a:lnRef idx="1">
-            <a:schemeClr val="accent1"/>
-          </a:lnRef>
-          <a:fillRef idx="3">
-            <a:schemeClr val="accent1"/>
-          </a:fillRef>
-          <a:effectRef idx="2">
-            <a:schemeClr val="accent1"/>
-          </a:effectRef>
-          <a:fontRef idx="minor">
-            <a:schemeClr val="lt1"/>
-          </a:fontRef>
-        </p:style>
-        <p:txBody>
-          <a:bodyPr rtlCol="0" anchor="ctr"/>
-          <a:lstStyle/>
-          <a:p>
-            <a:pPr algn="ctr"/>
-          </a:p>
-        </p:txBody>
-      </p:sp>
-      <p:sp>
-        <p:nvSpPr>
-          <p:cNvPr id="32" name="TextBox 31"/>
-          <p:cNvSpPr txBox="1"/>
-          <p:nvPr/>
-        </p:nvSpPr>
-        <p:spPr>
-          <a:xfrm>
-            <a:off x="2331720" y="1417320"/>
-            <a:ext cx="1188720" cy="438912"/>
-          </a:xfrm>
-          <a:prstGeom prst="rect">
-            <a:avLst/>
-          </a:prstGeom>
-          <a:noFill/>
-        </p:spPr>
-        <p:txBody>
-          <a:bodyPr wrap="square" lIns="10000" rIns="10000" tIns="8000" bIns="8000" anchor="ctr">
-            <a:spAutoFit/>
-          </a:bodyPr>
-          <a:lstStyle/>
-          <a:p>
-            <a:pPr algn="ctr"/>
-            <a:r>
-              <a:rPr sz="1200" b="1">
-                <a:solidFill>
-                  <a:srgbClr val="3D2C70"/>
-                </a:solidFill>
-              </a:rPr>
-              <a:t>4</a:t>
-            </a:r>
-          </a:p>
-          <a:p>
-            <a:pPr algn="ctr"/>
-            <a:r>
-              <a:rPr sz="600" b="1">
-                <a:solidFill>
-                  <a:srgbClr val="3D2C70"/>
-                </a:solidFill>
-              </a:rPr>
-              <a:t>Intake Agent (AI)</a:t>
-            </a:r>
-          </a:p>
-        </p:txBody>
-      </p:sp>
-      <p:sp>
-        <p:nvSpPr>
-          <p:cNvPr id="33" name="Rounded Rectangle 32"/>
-          <p:cNvSpPr/>
-          <p:nvPr/>
-        </p:nvSpPr>
-        <p:spPr>
-          <a:xfrm>
-            <a:off x="5669280" y="1417320"/>
-            <a:ext cx="1417320" cy="438912"/>
-          </a:xfrm>
-          <a:prstGeom prst="roundRect">
-            <a:avLst/>
-          </a:prstGeom>
-          <a:solidFill>
-            <a:srgbClr val="EDE4F5"/>
-          </a:solidFill>
-          <a:ln w="9525">
-            <a:solidFill>
-              <a:srgbClr val="742774"/>
-            </a:solidFill>
-          </a:ln>
-          <a:effectLst/>
-        </p:spPr>
-        <p:style>
-          <a:lnRef idx="1">
-            <a:schemeClr val="accent1"/>
-          </a:lnRef>
-          <a:fillRef idx="3">
-            <a:schemeClr val="accent1"/>
-          </a:fillRef>
-          <a:effectRef idx="2">
-            <a:schemeClr val="accent1"/>
-          </a:effectRef>
-          <a:fontRef idx="minor">
-            <a:schemeClr val="lt1"/>
-          </a:fontRef>
-        </p:style>
-        <p:txBody>
-          <a:bodyPr rtlCol="0" anchor="ctr"/>
-          <a:lstStyle/>
-          <a:p>
-            <a:pPr algn="ctr"/>
-          </a:p>
-        </p:txBody>
-      </p:sp>
-      <p:sp>
-        <p:nvSpPr>
-          <p:cNvPr id="34" name="TextBox 33"/>
-          <p:cNvSpPr txBox="1"/>
-          <p:nvPr/>
-        </p:nvSpPr>
-        <p:spPr>
-          <a:xfrm>
-            <a:off x="5669280" y="1417320"/>
-            <a:ext cx="1417320" cy="438912"/>
-          </a:xfrm>
-          <a:prstGeom prst="rect">
-            <a:avLst/>
-          </a:prstGeom>
-          <a:noFill/>
-        </p:spPr>
-        <p:txBody>
-          <a:bodyPr wrap="square" lIns="10000" rIns="10000" tIns="8000" bIns="8000" anchor="ctr">
-            <a:spAutoFit/>
-          </a:bodyPr>
-          <a:lstStyle/>
-          <a:p>
-            <a:pPr algn="ctr"/>
-            <a:r>
-              <a:rPr sz="1200" b="1">
-                <a:solidFill>
-                  <a:srgbClr val="3D2C70"/>
-                </a:solidFill>
-              </a:rPr>
-              <a:t>12</a:t>
-            </a:r>
-          </a:p>
-          <a:p>
-            <a:pPr algn="ctr"/>
-            <a:r>
-              <a:rPr sz="600" b="1">
-                <a:solidFill>
-                  <a:srgbClr val="3D2C70"/>
-                </a:solidFill>
-              </a:rPr>
-              <a:t>Explanation Agent (AI — NOT CSR)</a:t>
-            </a:r>
-          </a:p>
-        </p:txBody>
-      </p:sp>
-      <p:sp>
-        <p:nvSpPr>
-          <p:cNvPr id="35" name="Rounded Rectangle 34"/>
-          <p:cNvSpPr/>
-          <p:nvPr/>
-        </p:nvSpPr>
-        <p:spPr>
-          <a:xfrm>
-            <a:off x="2331720" y="2011680"/>
-            <a:ext cx="960120" cy="438912"/>
-          </a:xfrm>
-          <a:prstGeom prst="roundRect">
-            <a:avLst/>
-          </a:prstGeom>
-          <a:solidFill>
-            <a:srgbClr val="EDE4F5"/>
-          </a:solidFill>
-          <a:ln w="6350">
-            <a:solidFill>
-              <a:srgbClr val="742774"/>
-            </a:solidFill>
-          </a:ln>
-          <a:effectLst/>
-        </p:spPr>
-        <p:style>
-          <a:lnRef idx="1">
-            <a:schemeClr val="accent1"/>
-          </a:lnRef>
-          <a:fillRef idx="3">
-            <a:schemeClr val="accent1"/>
-          </a:fillRef>
-          <a:effectRef idx="2">
-            <a:schemeClr val="accent1"/>
-          </a:effectRef>
-          <a:fontRef idx="minor">
-            <a:schemeClr val="lt1"/>
-          </a:fontRef>
-        </p:style>
-        <p:txBody>
-          <a:bodyPr rtlCol="0" anchor="ctr"/>
-          <a:lstStyle/>
-          <a:p>
-            <a:pPr algn="ctr"/>
-          </a:p>
-        </p:txBody>
-      </p:sp>
-      <p:sp>
-        <p:nvSpPr>
-          <p:cNvPr id="36" name="TextBox 35"/>
-          <p:cNvSpPr txBox="1"/>
-          <p:nvPr/>
-        </p:nvSpPr>
-        <p:spPr>
-          <a:xfrm>
-            <a:off x="2331720" y="2011680"/>
-            <a:ext cx="960120" cy="438912"/>
-          </a:xfrm>
-          <a:prstGeom prst="rect">
-            <a:avLst/>
-          </a:prstGeom>
-          <a:noFill/>
-        </p:spPr>
-        <p:txBody>
-          <a:bodyPr wrap="square" lIns="10000" rIns="10000" tIns="8000" bIns="8000" anchor="ctr">
-            <a:spAutoFit/>
-          </a:bodyPr>
-          <a:lstStyle/>
-          <a:p>
-            <a:pPr algn="ctr"/>
-            <a:r>
-              <a:rPr sz="1200" b="1">
-                <a:solidFill>
-                  <a:srgbClr val="3D2C70"/>
-                </a:solidFill>
-              </a:rPr>
-              <a:t>5</a:t>
-            </a:r>
-          </a:p>
-          <a:p>
-            <a:pPr algn="ctr"/>
-            <a:r>
-              <a:rPr sz="600" b="1">
-                <a:solidFill>
-                  <a:srgbClr val="3D2C70"/>
-                </a:solidFill>
-              </a:rPr>
-              <a:t>Create_Claim</a:t>
-            </a:r>
-          </a:p>
-        </p:txBody>
-      </p:sp>
-      <p:sp>
-        <p:nvSpPr>
-          <p:cNvPr id="37" name="Rounded Rectangle 36"/>
-          <p:cNvSpPr/>
-          <p:nvPr/>
-        </p:nvSpPr>
-        <p:spPr>
-          <a:xfrm>
-            <a:off x="3429000" y="2011680"/>
-            <a:ext cx="1143000" cy="438912"/>
-          </a:xfrm>
-          <a:prstGeom prst="roundRect">
-            <a:avLst/>
-          </a:prstGeom>
-          <a:solidFill>
-            <a:srgbClr val="EDE4F5"/>
-          </a:solidFill>
-          <a:ln w="9525">
-            <a:solidFill>
-              <a:srgbClr val="742774"/>
-            </a:solidFill>
-          </a:ln>
-          <a:effectLst/>
-        </p:spPr>
-        <p:style>
-          <a:lnRef idx="1">
-            <a:schemeClr val="accent1"/>
-          </a:lnRef>
-          <a:fillRef idx="3">
-            <a:schemeClr val="accent1"/>
-          </a:fillRef>
-          <a:effectRef idx="2">
-            <a:schemeClr val="accent1"/>
-          </a:effectRef>
-          <a:fontRef idx="minor">
-            <a:schemeClr val="lt1"/>
-          </a:fontRef>
-        </p:style>
-        <p:txBody>
-          <a:bodyPr rtlCol="0" anchor="ctr"/>
-          <a:lstStyle/>
-          <a:p>
-            <a:pPr algn="ctr"/>
-          </a:p>
-        </p:txBody>
-      </p:sp>
-      <p:sp>
-        <p:nvSpPr>
-          <p:cNvPr id="38" name="TextBox 37"/>
-          <p:cNvSpPr txBox="1"/>
-          <p:nvPr/>
-        </p:nvSpPr>
-        <p:spPr>
-          <a:xfrm>
-            <a:off x="3429000" y="2011680"/>
-            <a:ext cx="1143000" cy="438912"/>
-          </a:xfrm>
-          <a:prstGeom prst="rect">
-            <a:avLst/>
-          </a:prstGeom>
-          <a:noFill/>
-        </p:spPr>
-        <p:txBody>
-          <a:bodyPr wrap="square" lIns="10000" rIns="10000" tIns="8000" bIns="8000" anchor="ctr">
-            <a:spAutoFit/>
-          </a:bodyPr>
-          <a:lstStyle/>
-          <a:p>
-            <a:pPr algn="ctr"/>
-            <a:r>
-              <a:rPr sz="1200" b="1">
-                <a:solidFill>
-                  <a:srgbClr val="3D2C70"/>
-                </a:solidFill>
-              </a:rPr>
-              <a:t>6</a:t>
-            </a:r>
-          </a:p>
-          <a:p>
-            <a:pPr algn="ctr"/>
-            <a:r>
-              <a:rPr sz="600" b="1">
-                <a:solidFill>
-                  <a:srgbClr val="3D2C70"/>
-                </a:solidFill>
-              </a:rPr>
-              <a:t>Master Orchestration</a:t>
-            </a:r>
-          </a:p>
-        </p:txBody>
-      </p:sp>
-      <p:sp>
-        <p:nvSpPr>
-          <p:cNvPr id="39" name="Diamond 38"/>
-          <p:cNvSpPr/>
-          <p:nvPr/>
-        </p:nvSpPr>
-        <p:spPr>
-          <a:xfrm>
-            <a:off x="4709160" y="2011680"/>
-            <a:ext cx="777240" cy="438912"/>
-          </a:xfrm>
-          <a:prstGeom prst="diamond">
-            <a:avLst/>
-          </a:prstGeom>
-          <a:solidFill>
-            <a:srgbClr val="FFFFFF"/>
-          </a:solidFill>
-          <a:ln w="12700">
-            <a:solidFill>
-              <a:srgbClr val="107C10"/>
-            </a:solidFill>
-          </a:ln>
-          <a:effectLst/>
-        </p:spPr>
-        <p:style>
-          <a:lnRef idx="1">
-            <a:schemeClr val="accent1"/>
-          </a:lnRef>
-          <a:fillRef idx="3">
-            <a:schemeClr val="accent1"/>
-          </a:fillRef>
-          <a:effectRef idx="2">
-            <a:schemeClr val="accent1"/>
-          </a:effectRef>
-          <a:fontRef idx="minor">
-            <a:schemeClr val="lt1"/>
-          </a:fontRef>
-        </p:style>
-        <p:txBody>
-          <a:bodyPr rtlCol="0" anchor="ctr"/>
-          <a:lstStyle/>
-          <a:p>
-            <a:pPr algn="ctr"/>
-          </a:p>
-        </p:txBody>
-      </p:sp>
-      <p:sp>
-        <p:nvSpPr>
-          <p:cNvPr id="40" name="TextBox 39"/>
-          <p:cNvSpPr txBox="1"/>
-          <p:nvPr/>
-        </p:nvSpPr>
-        <p:spPr>
-          <a:xfrm>
-            <a:off x="4709160" y="2029968"/>
-            <a:ext cx="777240" cy="402336"/>
-          </a:xfrm>
-          <a:prstGeom prst="rect">
-            <a:avLst/>
-          </a:prstGeom>
-          <a:noFill/>
-        </p:spPr>
-        <p:txBody>
-          <a:bodyPr wrap="square" lIns="15000" rIns="15000" tIns="5000" bIns="5000" anchor="ctr">
-            <a:spAutoFit/>
-          </a:bodyPr>
-          <a:lstStyle/>
-          <a:p>
-            <a:pPr algn="ctr"/>
-            <a:r>
-              <a:rPr sz="700" b="1" i="0">
-                <a:solidFill>
-                  <a:srgbClr val="0E3A0E"/>
-                </a:solidFill>
-              </a:rPr>
-              <a:t>11</a:t>
-            </a:r>
-          </a:p>
-          <a:p>
-            <a:pPr algn="ctr"/>
-            <a:r>
-              <a:rPr sz="700" b="1" i="0">
-                <a:solidFill>
-                  <a:srgbClr val="0E3A0E"/>
-                </a:solidFill>
-              </a:rPr>
-              <a:t>Router</a:t>
-            </a:r>
-          </a:p>
-        </p:txBody>
-      </p:sp>
-      <p:sp>
-        <p:nvSpPr>
-          <p:cNvPr id="41" name="Rounded Rectangle 40"/>
-          <p:cNvSpPr/>
-          <p:nvPr/>
-        </p:nvSpPr>
-        <p:spPr>
-          <a:xfrm>
-            <a:off x="5669280" y="2011680"/>
-            <a:ext cx="1417320" cy="438912"/>
-          </a:xfrm>
-          <a:prstGeom prst="roundRect">
-            <a:avLst/>
-          </a:prstGeom>
-          <a:solidFill>
-            <a:srgbClr val="DCFCE7"/>
-          </a:solidFill>
-          <a:ln w="9525">
-            <a:solidFill>
-              <a:srgbClr val="107C10"/>
-            </a:solidFill>
-          </a:ln>
-          <a:effectLst/>
-        </p:spPr>
-        <p:style>
-          <a:lnRef idx="1">
-            <a:schemeClr val="accent1"/>
-          </a:lnRef>
-          <a:fillRef idx="3">
-            <a:schemeClr val="accent1"/>
-          </a:fillRef>
-          <a:effectRef idx="2">
-            <a:schemeClr val="accent1"/>
-          </a:effectRef>
-          <a:fontRef idx="minor">
-            <a:schemeClr val="lt1"/>
-          </a:fontRef>
-        </p:style>
-        <p:txBody>
-          <a:bodyPr rtlCol="0" anchor="ctr"/>
-          <a:lstStyle/>
-          <a:p>
-            <a:pPr algn="ctr"/>
-          </a:p>
-        </p:txBody>
-      </p:sp>
-      <p:sp>
-        <p:nvSpPr>
-          <p:cNvPr id="42" name="TextBox 41"/>
-          <p:cNvSpPr txBox="1"/>
-          <p:nvPr/>
-        </p:nvSpPr>
-        <p:spPr>
-          <a:xfrm>
-            <a:off x="5669280" y="2011680"/>
-            <a:ext cx="1417320" cy="438912"/>
-          </a:xfrm>
-          <a:prstGeom prst="rect">
-            <a:avLst/>
-          </a:prstGeom>
-          <a:noFill/>
-        </p:spPr>
-        <p:txBody>
-          <a:bodyPr wrap="square" lIns="10000" rIns="10000" tIns="8000" bIns="8000" anchor="ctr">
-            <a:spAutoFit/>
-          </a:bodyPr>
-          <a:lstStyle/>
-          <a:p>
-            <a:pPr algn="ctr"/>
-            <a:r>
-              <a:rPr sz="1200" b="1">
-                <a:solidFill>
-                  <a:srgbClr val="0E3A0E"/>
-                </a:solidFill>
-              </a:rPr>
-              <a:t>13</a:t>
-            </a:r>
-          </a:p>
-          <a:p>
-            <a:pPr algn="ctr"/>
-            <a:r>
-              <a:rPr sz="600" b="1">
-                <a:solidFill>
-                  <a:srgbClr val="0E3A0E"/>
-                </a:solidFill>
-              </a:rPr>
-              <a:t>Notify_Customer</a:t>
-            </a:r>
-          </a:p>
-        </p:txBody>
-      </p:sp>
-      <p:sp>
-        <p:nvSpPr>
-          <p:cNvPr id="43" name="Rounded Rectangle 42"/>
-          <p:cNvSpPr/>
-          <p:nvPr/>
-        </p:nvSpPr>
-        <p:spPr>
-          <a:xfrm>
-            <a:off x="2331720" y="2578608"/>
-            <a:ext cx="1600200" cy="219456"/>
-          </a:xfrm>
-          <a:prstGeom prst="roundRect">
-            <a:avLst/>
-          </a:prstGeom>
-          <a:solidFill>
-            <a:srgbClr val="DBEAFE"/>
-          </a:solidFill>
-          <a:ln w="6350">
-            <a:solidFill>
-              <a:srgbClr val="0078D4"/>
-            </a:solidFill>
-          </a:ln>
-          <a:effectLst/>
-        </p:spPr>
-        <p:style>
-          <a:lnRef idx="1">
-            <a:schemeClr val="accent1"/>
-          </a:lnRef>
-          <a:fillRef idx="3">
-            <a:schemeClr val="accent1"/>
-          </a:fillRef>
-          <a:effectRef idx="2">
-            <a:schemeClr val="accent1"/>
-          </a:effectRef>
-          <a:fontRef idx="minor">
-            <a:schemeClr val="lt1"/>
-          </a:fontRef>
-        </p:style>
-        <p:txBody>
-          <a:bodyPr rtlCol="0" anchor="ctr"/>
-          <a:lstStyle/>
-          <a:p>
-            <a:pPr algn="ctr"/>
-          </a:p>
-        </p:txBody>
-      </p:sp>
-      <p:sp>
-        <p:nvSpPr>
-          <p:cNvPr id="44" name="TextBox 43"/>
-          <p:cNvSpPr txBox="1"/>
-          <p:nvPr/>
-        </p:nvSpPr>
-        <p:spPr>
-          <a:xfrm>
-            <a:off x="2331720" y="2578608"/>
-            <a:ext cx="1600200" cy="219456"/>
-          </a:xfrm>
-          <a:prstGeom prst="rect">
-            <a:avLst/>
-          </a:prstGeom>
-          <a:noFill/>
-        </p:spPr>
-        <p:txBody>
-          <a:bodyPr wrap="square" lIns="15000" rIns="15000" tIns="5000" bIns="5000" anchor="ctr">
-            <a:spAutoFit/>
-          </a:bodyPr>
-          <a:lstStyle/>
-          <a:p>
-            <a:pPr algn="ctr"/>
-            <a:r>
-              <a:rPr sz="700" b="1" i="0">
-                <a:solidFill>
-                  <a:srgbClr val="0A2540"/>
-                </a:solidFill>
-              </a:rPr>
-              <a:t>7  Extraction</a:t>
-            </a:r>
-          </a:p>
-        </p:txBody>
-      </p:sp>
-      <p:sp>
-        <p:nvSpPr>
-          <p:cNvPr id="45" name="Rounded Rectangle 44"/>
-          <p:cNvSpPr/>
-          <p:nvPr/>
-        </p:nvSpPr>
-        <p:spPr>
-          <a:xfrm>
-            <a:off x="2331720" y="2816352"/>
-            <a:ext cx="1600200" cy="219456"/>
-          </a:xfrm>
-          <a:prstGeom prst="roundRect">
-            <a:avLst/>
-          </a:prstGeom>
-          <a:solidFill>
-            <a:srgbClr val="DBEAFE"/>
-          </a:solidFill>
-          <a:ln w="6350">
-            <a:solidFill>
-              <a:srgbClr val="0078D4"/>
-            </a:solidFill>
-          </a:ln>
-          <a:effectLst/>
-        </p:spPr>
-        <p:style>
-          <a:lnRef idx="1">
-            <a:schemeClr val="accent1"/>
-          </a:lnRef>
-          <a:fillRef idx="3">
-            <a:schemeClr val="accent1"/>
-          </a:fillRef>
-          <a:effectRef idx="2">
-            <a:schemeClr val="accent1"/>
-          </a:effectRef>
-          <a:fontRef idx="minor">
-            <a:schemeClr val="lt1"/>
-          </a:fontRef>
-        </p:style>
-        <p:txBody>
-          <a:bodyPr rtlCol="0" anchor="ctr"/>
-          <a:lstStyle/>
-          <a:p>
-            <a:pPr algn="ctr"/>
-          </a:p>
-        </p:txBody>
-      </p:sp>
-      <p:sp>
-        <p:nvSpPr>
-          <p:cNvPr id="46" name="TextBox 45"/>
-          <p:cNvSpPr txBox="1"/>
-          <p:nvPr/>
-        </p:nvSpPr>
-        <p:spPr>
-          <a:xfrm>
-            <a:off x="2331720" y="2816352"/>
-            <a:ext cx="1600200" cy="219456"/>
-          </a:xfrm>
-          <a:prstGeom prst="rect">
-            <a:avLst/>
-          </a:prstGeom>
-          <a:noFill/>
-        </p:spPr>
-        <p:txBody>
-          <a:bodyPr wrap="square" lIns="15000" rIns="15000" tIns="5000" bIns="5000" anchor="ctr">
-            <a:spAutoFit/>
-          </a:bodyPr>
-          <a:lstStyle/>
-          <a:p>
-            <a:pPr algn="ctr"/>
-            <a:r>
-              <a:rPr sz="700" b="1" i="0">
-                <a:solidFill>
-                  <a:srgbClr val="0A2540"/>
-                </a:solidFill>
-              </a:rPr>
-              <a:t>8  Policy</a:t>
-            </a:r>
-          </a:p>
-        </p:txBody>
-      </p:sp>
-      <p:sp>
-        <p:nvSpPr>
-          <p:cNvPr id="47" name="Rounded Rectangle 46"/>
-          <p:cNvSpPr/>
-          <p:nvPr/>
-        </p:nvSpPr>
-        <p:spPr>
-          <a:xfrm>
-            <a:off x="2331720" y="3054096"/>
-            <a:ext cx="1600200" cy="219456"/>
-          </a:xfrm>
-          <a:prstGeom prst="roundRect">
-            <a:avLst/>
-          </a:prstGeom>
-          <a:solidFill>
-            <a:srgbClr val="DBEAFE"/>
-          </a:solidFill>
-          <a:ln w="6350">
-            <a:solidFill>
-              <a:srgbClr val="0078D4"/>
-            </a:solidFill>
-          </a:ln>
-          <a:effectLst/>
-        </p:spPr>
-        <p:style>
-          <a:lnRef idx="1">
-            <a:schemeClr val="accent1"/>
-          </a:lnRef>
-          <a:fillRef idx="3">
-            <a:schemeClr val="accent1"/>
-          </a:fillRef>
-          <a:effectRef idx="2">
-            <a:schemeClr val="accent1"/>
-          </a:effectRef>
-          <a:fontRef idx="minor">
-            <a:schemeClr val="lt1"/>
-          </a:fontRef>
-        </p:style>
-        <p:txBody>
-          <a:bodyPr rtlCol="0" anchor="ctr"/>
-          <a:lstStyle/>
-          <a:p>
-            <a:pPr algn="ctr"/>
-          </a:p>
-        </p:txBody>
-      </p:sp>
-      <p:sp>
-        <p:nvSpPr>
-          <p:cNvPr id="48" name="TextBox 47"/>
-          <p:cNvSpPr txBox="1"/>
-          <p:nvPr/>
-        </p:nvSpPr>
-        <p:spPr>
-          <a:xfrm>
-            <a:off x="2331720" y="3054096"/>
-            <a:ext cx="1600200" cy="219456"/>
-          </a:xfrm>
-          <a:prstGeom prst="rect">
-            <a:avLst/>
-          </a:prstGeom>
-          <a:noFill/>
-        </p:spPr>
-        <p:txBody>
-          <a:bodyPr wrap="square" lIns="15000" rIns="15000" tIns="5000" bIns="5000" anchor="ctr">
-            <a:spAutoFit/>
-          </a:bodyPr>
-          <a:lstStyle/>
-          <a:p>
-            <a:pPr algn="ctr"/>
-            <a:r>
-              <a:rPr sz="600" b="1" i="0">
-                <a:solidFill>
-                  <a:srgbClr val="0A2540"/>
-                </a:solidFill>
-              </a:rPr>
-              <a:t>9  Validation · 7 ext checks</a:t>
-            </a:r>
-          </a:p>
-        </p:txBody>
-      </p:sp>
-      <p:sp>
-        <p:nvSpPr>
-          <p:cNvPr id="49" name="Rounded Rectangle 48"/>
-          <p:cNvSpPr/>
-          <p:nvPr/>
-        </p:nvSpPr>
-        <p:spPr>
-          <a:xfrm>
-            <a:off x="4114800" y="2743200"/>
-            <a:ext cx="1371600" cy="502920"/>
-          </a:xfrm>
-          <a:prstGeom prst="roundRect">
-            <a:avLst/>
-          </a:prstGeom>
-          <a:solidFill>
-            <a:srgbClr val="0A2540"/>
-          </a:solidFill>
-          <a:ln w="12700">
-            <a:solidFill>
-              <a:srgbClr val="0A2540"/>
-            </a:solidFill>
-          </a:ln>
-          <a:effectLst/>
-        </p:spPr>
-        <p:style>
-          <a:lnRef idx="1">
-            <a:schemeClr val="accent1"/>
-          </a:lnRef>
-          <a:fillRef idx="3">
-            <a:schemeClr val="accent1"/>
-          </a:fillRef>
-          <a:effectRef idx="2">
-            <a:schemeClr val="accent1"/>
-          </a:effectRef>
-          <a:fontRef idx="minor">
-            <a:schemeClr val="lt1"/>
-          </a:fontRef>
-        </p:style>
-        <p:txBody>
-          <a:bodyPr rtlCol="0" anchor="ctr"/>
-          <a:lstStyle/>
-          <a:p>
-            <a:pPr algn="ctr"/>
-          </a:p>
-        </p:txBody>
-      </p:sp>
-      <p:sp>
-        <p:nvSpPr>
-          <p:cNvPr id="50" name="TextBox 49"/>
-          <p:cNvSpPr txBox="1"/>
-          <p:nvPr/>
-        </p:nvSpPr>
-        <p:spPr>
-          <a:xfrm>
-            <a:off x="4114800" y="2743200"/>
-            <a:ext cx="1371600" cy="502920"/>
-          </a:xfrm>
-          <a:prstGeom prst="rect">
-            <a:avLst/>
-          </a:prstGeom>
-          <a:noFill/>
-        </p:spPr>
-        <p:txBody>
-          <a:bodyPr wrap="square" lIns="10000" rIns="10000" tIns="8000" bIns="8000" anchor="ctr">
-            <a:spAutoFit/>
-          </a:bodyPr>
-          <a:lstStyle/>
-          <a:p>
-            <a:pPr algn="ctr"/>
-            <a:r>
-              <a:rPr sz="1200" b="1">
-                <a:solidFill>
-                  <a:srgbClr val="FFFFFF"/>
-                </a:solidFill>
-              </a:rPr>
-              <a:t>10</a:t>
-            </a:r>
-          </a:p>
-          <a:p>
-            <a:pPr algn="ctr"/>
-            <a:r>
-              <a:rPr sz="600" b="1">
-                <a:solidFill>
-                  <a:srgbClr val="FFFFFF"/>
-                </a:solidFill>
-              </a:rPr>
-              <a:t>Adjudication · GPT-4.1</a:t>
-            </a:r>
-          </a:p>
-        </p:txBody>
-      </p:sp>
-      <p:sp>
-        <p:nvSpPr>
-          <p:cNvPr id="51" name="Rounded Rectangle 50"/>
-          <p:cNvSpPr/>
-          <p:nvPr/>
-        </p:nvSpPr>
-        <p:spPr>
-          <a:xfrm>
-            <a:off x="4114800" y="3438144"/>
-            <a:ext cx="1371600" cy="182880"/>
-          </a:xfrm>
-          <a:prstGeom prst="roundRect">
-            <a:avLst/>
-          </a:prstGeom>
-          <a:solidFill>
-            <a:srgbClr val="FEF3C7"/>
-          </a:solidFill>
-          <a:ln w="6350">
-            <a:solidFill>
-              <a:srgbClr val="D97706"/>
-            </a:solidFill>
-          </a:ln>
-          <a:effectLst/>
-        </p:spPr>
-        <p:style>
-          <a:lnRef idx="1">
-            <a:schemeClr val="accent1"/>
-          </a:lnRef>
-          <a:fillRef idx="3">
-            <a:schemeClr val="accent1"/>
-          </a:fillRef>
-          <a:effectRef idx="2">
-            <a:schemeClr val="accent1"/>
-          </a:effectRef>
-          <a:fontRef idx="minor">
-            <a:schemeClr val="lt1"/>
-          </a:fontRef>
-        </p:style>
-        <p:txBody>
-          <a:bodyPr rtlCol="0" anchor="ctr"/>
-          <a:lstStyle/>
-          <a:p>
-            <a:pPr algn="ctr"/>
-          </a:p>
-        </p:txBody>
-      </p:sp>
-      <p:sp>
-        <p:nvSpPr>
-          <p:cNvPr id="52" name="TextBox 51"/>
-          <p:cNvSpPr txBox="1"/>
-          <p:nvPr/>
-        </p:nvSpPr>
-        <p:spPr>
-          <a:xfrm>
-            <a:off x="4114800" y="3438144"/>
-            <a:ext cx="1371600" cy="182880"/>
-          </a:xfrm>
-          <a:prstGeom prst="rect">
-            <a:avLst/>
-          </a:prstGeom>
-          <a:noFill/>
-        </p:spPr>
-        <p:txBody>
-          <a:bodyPr wrap="square" lIns="15000" rIns="15000" tIns="5000" bIns="5000" anchor="ctr">
-            <a:spAutoFit/>
-          </a:bodyPr>
-          <a:lstStyle/>
-          <a:p>
-            <a:pPr algn="ctr"/>
-            <a:r>
-              <a:rPr sz="600" b="1" i="0">
-                <a:solidFill>
-                  <a:srgbClr val="92400E"/>
-                </a:solidFill>
-              </a:rPr>
-              <a:t>T2 · Adjuster Teams Card</a:t>
-            </a:r>
-          </a:p>
-        </p:txBody>
-      </p:sp>
-      <p:sp>
-        <p:nvSpPr>
-          <p:cNvPr id="53" name="Rounded Rectangle 52"/>
-          <p:cNvSpPr/>
-          <p:nvPr/>
-        </p:nvSpPr>
-        <p:spPr>
-          <a:xfrm>
-            <a:off x="5669280" y="3438144"/>
-            <a:ext cx="1417320" cy="182880"/>
-          </a:xfrm>
-          <a:prstGeom prst="roundRect">
-            <a:avLst/>
-          </a:prstGeom>
-          <a:solidFill>
-            <a:srgbClr val="FEE2E2"/>
-          </a:solidFill>
-          <a:ln w="6350">
-            <a:solidFill>
-              <a:srgbClr val="DC2626"/>
-            </a:solidFill>
-          </a:ln>
-          <a:effectLst/>
-        </p:spPr>
-        <p:style>
-          <a:lnRef idx="1">
-            <a:schemeClr val="accent1"/>
-          </a:lnRef>
-          <a:fillRef idx="3">
-            <a:schemeClr val="accent1"/>
-          </a:fillRef>
-          <a:effectRef idx="2">
-            <a:schemeClr val="accent1"/>
-          </a:effectRef>
-          <a:fontRef idx="minor">
-            <a:schemeClr val="lt1"/>
-          </a:fontRef>
-        </p:style>
-        <p:txBody>
-          <a:bodyPr rtlCol="0" anchor="ctr"/>
-          <a:lstStyle/>
-          <a:p>
-            <a:pPr algn="ctr"/>
-          </a:p>
-        </p:txBody>
-      </p:sp>
-      <p:sp>
-        <p:nvSpPr>
-          <p:cNvPr id="54" name="TextBox 53"/>
-          <p:cNvSpPr txBox="1"/>
-          <p:nvPr/>
-        </p:nvSpPr>
-        <p:spPr>
-          <a:xfrm>
-            <a:off x="5669280" y="3438144"/>
-            <a:ext cx="1417320" cy="182880"/>
-          </a:xfrm>
-          <a:prstGeom prst="rect">
-            <a:avLst/>
-          </a:prstGeom>
-          <a:noFill/>
-        </p:spPr>
-        <p:txBody>
-          <a:bodyPr wrap="square" lIns="15000" rIns="15000" tIns="5000" bIns="5000" anchor="ctr">
-            <a:spAutoFit/>
-          </a:bodyPr>
-          <a:lstStyle/>
-          <a:p>
-            <a:pPr algn="ctr"/>
-            <a:r>
-              <a:rPr sz="600" b="1" i="0">
-                <a:solidFill>
-                  <a:srgbClr val="7F1D1D"/>
-                </a:solidFill>
-              </a:rPr>
-              <a:t>T3 · Live CSR Teams Chat</a:t>
-            </a:r>
-          </a:p>
-        </p:txBody>
-      </p:sp>
-      <p:sp>
-        <p:nvSpPr>
-          <p:cNvPr id="55" name="TextBox 54"/>
-          <p:cNvSpPr txBox="1"/>
-          <p:nvPr/>
-        </p:nvSpPr>
-        <p:spPr>
-          <a:xfrm>
-            <a:off x="594360" y="3456432"/>
-            <a:ext cx="3474720" cy="146304"/>
-          </a:xfrm>
-          <a:prstGeom prst="rect">
-            <a:avLst/>
-          </a:prstGeom>
-          <a:noFill/>
-        </p:spPr>
-        <p:txBody>
-          <a:bodyPr wrap="square" lIns="15000" rIns="15000" tIns="5000" bIns="5000" anchor="ctr">
-            <a:spAutoFit/>
-          </a:bodyPr>
-          <a:lstStyle/>
-          <a:p>
-            <a:pPr algn="l"/>
-            <a:r>
-              <a:rPr sz="600" b="0" i="1">
-                <a:solidFill>
-                  <a:srgbClr val="5A6680"/>
-                </a:solidFill>
-              </a:rPr>
-              <a:t>Tier 1 = AI auto-approve, no human</a:t>
-            </a:r>
-          </a:p>
-        </p:txBody>
-      </p:sp>
-      <p:sp>
-        <p:nvSpPr>
-          <p:cNvPr id="56" name="Rounded Rectangle 55"/>
-          <p:cNvSpPr/>
-          <p:nvPr/>
-        </p:nvSpPr>
-        <p:spPr>
-          <a:xfrm>
-            <a:off x="640080" y="3950208"/>
-            <a:ext cx="594360" cy="219456"/>
-          </a:xfrm>
-          <a:prstGeom prst="roundRect">
-            <a:avLst/>
-          </a:prstGeom>
-          <a:solidFill>
-            <a:srgbClr val="742774"/>
-          </a:solidFill>
-          <a:ln w="3810">
-            <a:solidFill>
-              <a:srgbClr val="3D2C70"/>
-            </a:solidFill>
-          </a:ln>
-          <a:effectLst/>
-        </p:spPr>
-        <p:style>
-          <a:lnRef idx="1">
-            <a:schemeClr val="accent1"/>
-          </a:lnRef>
-          <a:fillRef idx="3">
-            <a:schemeClr val="accent1"/>
-          </a:fillRef>
-          <a:effectRef idx="2">
-            <a:schemeClr val="accent1"/>
-          </a:effectRef>
-          <a:fontRef idx="minor">
-            <a:schemeClr val="lt1"/>
-          </a:fontRef>
-        </p:style>
-        <p:txBody>
-          <a:bodyPr rtlCol="0" anchor="ctr"/>
-          <a:lstStyle/>
-          <a:p>
-            <a:pPr algn="ctr"/>
-          </a:p>
-        </p:txBody>
-      </p:sp>
-      <p:sp>
-        <p:nvSpPr>
-          <p:cNvPr id="57" name="TextBox 56"/>
-          <p:cNvSpPr txBox="1"/>
-          <p:nvPr/>
-        </p:nvSpPr>
-        <p:spPr>
-          <a:xfrm>
-            <a:off x="640080" y="3950208"/>
-            <a:ext cx="594360" cy="219456"/>
-          </a:xfrm>
-          <a:prstGeom prst="rect">
-            <a:avLst/>
-          </a:prstGeom>
-          <a:noFill/>
-        </p:spPr>
-        <p:txBody>
-          <a:bodyPr wrap="square" lIns="15000" rIns="15000" tIns="5000" bIns="5000" anchor="ctr">
-            <a:spAutoFit/>
-          </a:bodyPr>
-          <a:lstStyle/>
-          <a:p>
-            <a:pPr algn="ctr"/>
-            <a:r>
-              <a:rPr sz="500" b="1" i="0">
-                <a:solidFill>
-                  <a:srgbClr val="FFFFFF"/>
-                </a:solidFill>
-              </a:rPr>
-              <a:t>Policy</a:t>
-            </a:r>
-          </a:p>
-        </p:txBody>
-      </p:sp>
-      <p:sp>
-        <p:nvSpPr>
-          <p:cNvPr id="58" name="Rounded Rectangle 57"/>
-          <p:cNvSpPr/>
-          <p:nvPr/>
-        </p:nvSpPr>
-        <p:spPr>
-          <a:xfrm>
-            <a:off x="1280160" y="3950208"/>
-            <a:ext cx="594360" cy="219456"/>
-          </a:xfrm>
-          <a:prstGeom prst="roundRect">
-            <a:avLst/>
-          </a:prstGeom>
-          <a:solidFill>
-            <a:srgbClr val="742774"/>
-          </a:solidFill>
-          <a:ln w="3810">
-            <a:solidFill>
-              <a:srgbClr val="3D2C70"/>
-            </a:solidFill>
-          </a:ln>
-          <a:effectLst/>
-        </p:spPr>
-        <p:style>
-          <a:lnRef idx="1">
-            <a:schemeClr val="accent1"/>
-          </a:lnRef>
-          <a:fillRef idx="3">
-            <a:schemeClr val="accent1"/>
-          </a:fillRef>
-          <a:effectRef idx="2">
-            <a:schemeClr val="accent1"/>
-          </a:effectRef>
-          <a:fontRef idx="minor">
-            <a:schemeClr val="lt1"/>
-          </a:fontRef>
-        </p:style>
-        <p:txBody>
-          <a:bodyPr rtlCol="0" anchor="ctr"/>
-          <a:lstStyle/>
-          <a:p>
-            <a:pPr algn="ctr"/>
-          </a:p>
-        </p:txBody>
-      </p:sp>
-      <p:sp>
-        <p:nvSpPr>
-          <p:cNvPr id="59" name="TextBox 58"/>
-          <p:cNvSpPr txBox="1"/>
-          <p:nvPr/>
-        </p:nvSpPr>
-        <p:spPr>
-          <a:xfrm>
-            <a:off x="1280160" y="3950208"/>
-            <a:ext cx="594360" cy="219456"/>
-          </a:xfrm>
-          <a:prstGeom prst="rect">
-            <a:avLst/>
-          </a:prstGeom>
-          <a:noFill/>
-        </p:spPr>
-        <p:txBody>
-          <a:bodyPr wrap="square" lIns="15000" rIns="15000" tIns="5000" bIns="5000" anchor="ctr">
-            <a:spAutoFit/>
-          </a:bodyPr>
-          <a:lstStyle/>
-          <a:p>
-            <a:pPr algn="ctr"/>
-            <a:r>
-              <a:rPr sz="500" b="1" i="0">
-                <a:solidFill>
-                  <a:srgbClr val="FFFFFF"/>
-                </a:solidFill>
-              </a:rPr>
-              <a:t>Claim</a:t>
-            </a:r>
-          </a:p>
-        </p:txBody>
-      </p:sp>
-      <p:sp>
-        <p:nvSpPr>
-          <p:cNvPr id="60" name="Rounded Rectangle 59"/>
-          <p:cNvSpPr/>
-          <p:nvPr/>
-        </p:nvSpPr>
-        <p:spPr>
-          <a:xfrm>
-            <a:off x="1920240" y="3950208"/>
-            <a:ext cx="731520" cy="219456"/>
-          </a:xfrm>
-          <a:prstGeom prst="roundRect">
-            <a:avLst/>
-          </a:prstGeom>
-          <a:solidFill>
-            <a:srgbClr val="742774"/>
-          </a:solidFill>
-          <a:ln w="3810">
-            <a:solidFill>
-              <a:srgbClr val="3D2C70"/>
-            </a:solidFill>
-          </a:ln>
-          <a:effectLst/>
-        </p:spPr>
-        <p:style>
-          <a:lnRef idx="1">
-            <a:schemeClr val="accent1"/>
-          </a:lnRef>
-          <a:fillRef idx="3">
-            <a:schemeClr val="accent1"/>
-          </a:fillRef>
-          <a:effectRef idx="2">
-            <a:schemeClr val="accent1"/>
-          </a:effectRef>
-          <a:fontRef idx="minor">
-            <a:schemeClr val="lt1"/>
-          </a:fontRef>
-        </p:style>
-        <p:txBody>
-          <a:bodyPr rtlCol="0" anchor="ctr"/>
-          <a:lstStyle/>
-          <a:p>
-            <a:pPr algn="ctr"/>
-          </a:p>
-        </p:txBody>
-      </p:sp>
-      <p:sp>
-        <p:nvSpPr>
-          <p:cNvPr id="61" name="TextBox 60"/>
-          <p:cNvSpPr txBox="1"/>
-          <p:nvPr/>
-        </p:nvSpPr>
-        <p:spPr>
-          <a:xfrm>
-            <a:off x="1920240" y="3950208"/>
-            <a:ext cx="731520" cy="219456"/>
-          </a:xfrm>
-          <a:prstGeom prst="rect">
-            <a:avLst/>
-          </a:prstGeom>
-          <a:noFill/>
-        </p:spPr>
-        <p:txBody>
-          <a:bodyPr wrap="square" lIns="15000" rIns="15000" tIns="5000" bIns="5000" anchor="ctr">
-            <a:spAutoFit/>
-          </a:bodyPr>
-          <a:lstStyle/>
-          <a:p>
-            <a:pPr algn="ctr"/>
-            <a:r>
-              <a:rPr sz="500" b="1" i="0">
-                <a:solidFill>
-                  <a:srgbClr val="FFFFFF"/>
-                </a:solidFill>
-              </a:rPr>
-              <a:t>Document</a:t>
-            </a:r>
-          </a:p>
-        </p:txBody>
-      </p:sp>
-      <p:sp>
-        <p:nvSpPr>
-          <p:cNvPr id="62" name="Rounded Rectangle 61"/>
-          <p:cNvSpPr/>
-          <p:nvPr/>
-        </p:nvSpPr>
-        <p:spPr>
-          <a:xfrm>
-            <a:off x="2697480" y="3950208"/>
-            <a:ext cx="960120" cy="219456"/>
-          </a:xfrm>
-          <a:prstGeom prst="roundRect">
-            <a:avLst/>
-          </a:prstGeom>
-          <a:solidFill>
-            <a:srgbClr val="742774"/>
-          </a:solidFill>
-          <a:ln w="3810">
-            <a:solidFill>
-              <a:srgbClr val="3D2C70"/>
-            </a:solidFill>
-          </a:ln>
-          <a:effectLst/>
-        </p:spPr>
-        <p:style>
-          <a:lnRef idx="1">
-            <a:schemeClr val="accent1"/>
-          </a:lnRef>
-          <a:fillRef idx="3">
-            <a:schemeClr val="accent1"/>
-          </a:fillRef>
-          <a:effectRef idx="2">
-            <a:schemeClr val="accent1"/>
-          </a:effectRef>
-          <a:fontRef idx="minor">
-            <a:schemeClr val="lt1"/>
-          </a:fontRef>
-        </p:style>
-        <p:txBody>
-          <a:bodyPr rtlCol="0" anchor="ctr"/>
-          <a:lstStyle/>
-          <a:p>
-            <a:pPr algn="ctr"/>
-          </a:p>
-        </p:txBody>
-      </p:sp>
-      <p:sp>
-        <p:nvSpPr>
-          <p:cNvPr id="63" name="TextBox 62"/>
-          <p:cNvSpPr txBox="1"/>
-          <p:nvPr/>
-        </p:nvSpPr>
-        <p:spPr>
-          <a:xfrm>
-            <a:off x="2697480" y="3950208"/>
-            <a:ext cx="960120" cy="219456"/>
-          </a:xfrm>
-          <a:prstGeom prst="rect">
-            <a:avLst/>
-          </a:prstGeom>
-          <a:noFill/>
-        </p:spPr>
-        <p:txBody>
-          <a:bodyPr wrap="square" lIns="15000" rIns="15000" tIns="5000" bIns="5000" anchor="ctr">
-            <a:spAutoFit/>
-          </a:bodyPr>
-          <a:lstStyle/>
-          <a:p>
-            <a:pPr algn="ctr"/>
-            <a:r>
-              <a:rPr sz="500" b="1" i="0">
-                <a:solidFill>
-                  <a:srgbClr val="FFFFFF"/>
-                </a:solidFill>
-              </a:rPr>
-              <a:t>Communication</a:t>
-            </a:r>
-          </a:p>
-        </p:txBody>
-      </p:sp>
-      <p:sp>
-        <p:nvSpPr>
-          <p:cNvPr id="64" name="Rounded Rectangle 63"/>
-          <p:cNvSpPr/>
-          <p:nvPr/>
-        </p:nvSpPr>
-        <p:spPr>
-          <a:xfrm>
-            <a:off x="3703320" y="3950208"/>
-            <a:ext cx="594360" cy="219456"/>
-          </a:xfrm>
-          <a:prstGeom prst="roundRect">
-            <a:avLst/>
-          </a:prstGeom>
-          <a:solidFill>
-            <a:srgbClr val="742774"/>
-          </a:solidFill>
-          <a:ln w="3810">
-            <a:solidFill>
-              <a:srgbClr val="3D2C70"/>
-            </a:solidFill>
-          </a:ln>
-          <a:effectLst/>
-        </p:spPr>
-        <p:style>
-          <a:lnRef idx="1">
-            <a:schemeClr val="accent1"/>
-          </a:lnRef>
-          <a:fillRef idx="3">
-            <a:schemeClr val="accent1"/>
-          </a:fillRef>
-          <a:effectRef idx="2">
-            <a:schemeClr val="accent1"/>
-          </a:effectRef>
-          <a:fontRef idx="minor">
-            <a:schemeClr val="lt1"/>
-          </a:fontRef>
-        </p:style>
-        <p:txBody>
-          <a:bodyPr rtlCol="0" anchor="ctr"/>
-          <a:lstStyle/>
-          <a:p>
-            <a:pPr algn="ctr"/>
-          </a:p>
-        </p:txBody>
-      </p:sp>
-      <p:sp>
-        <p:nvSpPr>
-          <p:cNvPr id="65" name="TextBox 64"/>
-          <p:cNvSpPr txBox="1"/>
-          <p:nvPr/>
-        </p:nvSpPr>
-        <p:spPr>
-          <a:xfrm>
-            <a:off x="3703320" y="3950208"/>
-            <a:ext cx="594360" cy="219456"/>
-          </a:xfrm>
-          <a:prstGeom prst="rect">
-            <a:avLst/>
-          </a:prstGeom>
-          <a:noFill/>
-        </p:spPr>
-        <p:txBody>
-          <a:bodyPr wrap="square" lIns="15000" rIns="15000" tIns="5000" bIns="5000" anchor="ctr">
-            <a:spAutoFit/>
-          </a:bodyPr>
-          <a:lstStyle/>
-          <a:p>
-            <a:pPr algn="ctr"/>
-            <a:r>
-              <a:rPr sz="500" b="1" i="0">
-                <a:solidFill>
-                  <a:srgbClr val="FFFFFF"/>
-                </a:solidFill>
-              </a:rPr>
-              <a:t>Adjuster</a:t>
-            </a:r>
-          </a:p>
-        </p:txBody>
-      </p:sp>
-      <p:sp>
-        <p:nvSpPr>
-          <p:cNvPr id="66" name="Rounded Rectangle 65"/>
-          <p:cNvSpPr/>
-          <p:nvPr/>
-        </p:nvSpPr>
-        <p:spPr>
-          <a:xfrm>
-            <a:off x="4343400" y="3950208"/>
-            <a:ext cx="594360" cy="219456"/>
-          </a:xfrm>
-          <a:prstGeom prst="roundRect">
-            <a:avLst/>
-          </a:prstGeom>
-          <a:solidFill>
-            <a:srgbClr val="742774"/>
-          </a:solidFill>
-          <a:ln w="3810">
-            <a:solidFill>
-              <a:srgbClr val="3D2C70"/>
-            </a:solidFill>
-          </a:ln>
-          <a:effectLst/>
-        </p:spPr>
-        <p:style>
-          <a:lnRef idx="1">
-            <a:schemeClr val="accent1"/>
-          </a:lnRef>
-          <a:fillRef idx="3">
-            <a:schemeClr val="accent1"/>
-          </a:fillRef>
-          <a:effectRef idx="2">
-            <a:schemeClr val="accent1"/>
-          </a:effectRef>
-          <a:fontRef idx="minor">
-            <a:schemeClr val="lt1"/>
-          </a:fontRef>
-        </p:style>
-        <p:txBody>
-          <a:bodyPr rtlCol="0" anchor="ctr"/>
-          <a:lstStyle/>
-          <a:p>
-            <a:pPr algn="ctr"/>
-          </a:p>
-        </p:txBody>
-      </p:sp>
-      <p:sp>
-        <p:nvSpPr>
-          <p:cNvPr id="67" name="TextBox 66"/>
-          <p:cNvSpPr txBox="1"/>
-          <p:nvPr/>
-        </p:nvSpPr>
-        <p:spPr>
-          <a:xfrm>
-            <a:off x="4343400" y="3950208"/>
-            <a:ext cx="594360" cy="219456"/>
-          </a:xfrm>
-          <a:prstGeom prst="rect">
-            <a:avLst/>
-          </a:prstGeom>
-          <a:noFill/>
-        </p:spPr>
-        <p:txBody>
-          <a:bodyPr wrap="square" lIns="15000" rIns="15000" tIns="5000" bIns="5000" anchor="ctr">
-            <a:spAutoFit/>
-          </a:bodyPr>
-          <a:lstStyle/>
-          <a:p>
-            <a:pPr algn="ctr"/>
-            <a:r>
-              <a:rPr sz="500" b="1" i="0">
-                <a:solidFill>
-                  <a:srgbClr val="FFFFFF"/>
-                </a:solidFill>
-              </a:rPr>
-              <a:t>Vendor</a:t>
-            </a:r>
-          </a:p>
-        </p:txBody>
-      </p:sp>
-      <p:sp>
-        <p:nvSpPr>
-          <p:cNvPr id="68" name="Rounded Rectangle 67"/>
-          <p:cNvSpPr/>
-          <p:nvPr/>
-        </p:nvSpPr>
-        <p:spPr>
-          <a:xfrm>
-            <a:off x="4983480" y="3950208"/>
-            <a:ext cx="1280160" cy="219456"/>
-          </a:xfrm>
-          <a:prstGeom prst="roundRect">
-            <a:avLst/>
-          </a:prstGeom>
-          <a:solidFill>
-            <a:srgbClr val="742774"/>
-          </a:solidFill>
-          <a:ln w="3810">
-            <a:solidFill>
-              <a:srgbClr val="3D2C70"/>
-            </a:solidFill>
-          </a:ln>
-          <a:effectLst/>
-        </p:spPr>
-        <p:style>
-          <a:lnRef idx="1">
-            <a:schemeClr val="accent1"/>
-          </a:lnRef>
-          <a:fillRef idx="3">
-            <a:schemeClr val="accent1"/>
-          </a:fillRef>
-          <a:effectRef idx="2">
-            <a:schemeClr val="accent1"/>
-          </a:effectRef>
-          <a:fontRef idx="minor">
-            <a:schemeClr val="lt1"/>
-          </a:fontRef>
-        </p:style>
-        <p:txBody>
-          <a:bodyPr rtlCol="0" anchor="ctr"/>
-          <a:lstStyle/>
-          <a:p>
-            <a:pPr algn="ctr"/>
-          </a:p>
-        </p:txBody>
-      </p:sp>
-      <p:sp>
-        <p:nvSpPr>
-          <p:cNvPr id="69" name="TextBox 68"/>
-          <p:cNvSpPr txBox="1"/>
-          <p:nvPr/>
-        </p:nvSpPr>
-        <p:spPr>
-          <a:xfrm>
-            <a:off x="4983480" y="3950208"/>
-            <a:ext cx="1280160" cy="219456"/>
-          </a:xfrm>
-          <a:prstGeom prst="rect">
-            <a:avLst/>
-          </a:prstGeom>
-          <a:noFill/>
-        </p:spPr>
-        <p:txBody>
-          <a:bodyPr wrap="square" lIns="15000" rIns="15000" tIns="5000" bIns="5000" anchor="ctr">
-            <a:spAutoFit/>
-          </a:bodyPr>
-          <a:lstStyle/>
-          <a:p>
-            <a:pPr algn="ctr"/>
-            <a:r>
-              <a:rPr sz="500" b="1" i="0">
-                <a:solidFill>
-                  <a:srgbClr val="FFFFFF"/>
-                </a:solidFill>
-              </a:rPr>
-              <a:t>ClaimVendorAssgmt</a:t>
-            </a:r>
-          </a:p>
-        </p:txBody>
-      </p:sp>
-      <p:sp>
-        <p:nvSpPr>
-          <p:cNvPr id="70" name="Rounded Rectangle 69"/>
-          <p:cNvSpPr/>
-          <p:nvPr/>
-        </p:nvSpPr>
-        <p:spPr>
-          <a:xfrm>
-            <a:off x="594360" y="4224528"/>
-            <a:ext cx="6537960" cy="365760"/>
-          </a:xfrm>
-          <a:prstGeom prst="roundRect">
-            <a:avLst/>
-          </a:prstGeom>
-          <a:solidFill>
-            <a:srgbClr val="F5B73A"/>
-          </a:solidFill>
-          <a:ln w="19050">
-            <a:solidFill>
-              <a:srgbClr val="D99416"/>
-            </a:solidFill>
-          </a:ln>
-          <a:effectLst/>
-        </p:spPr>
-        <p:style>
-          <a:lnRef idx="1">
-            <a:schemeClr val="accent1"/>
-          </a:lnRef>
-          <a:fillRef idx="3">
-            <a:schemeClr val="accent1"/>
-          </a:fillRef>
-          <a:effectRef idx="2">
-            <a:schemeClr val="accent1"/>
-          </a:effectRef>
-          <a:fontRef idx="minor">
-            <a:schemeClr val="lt1"/>
-          </a:fontRef>
-        </p:style>
-        <p:txBody>
-          <a:bodyPr rtlCol="0" anchor="ctr"/>
-          <a:lstStyle/>
-          <a:p>
-            <a:pPr algn="ctr"/>
-          </a:p>
-        </p:txBody>
-      </p:sp>
-      <p:sp>
-        <p:nvSpPr>
-          <p:cNvPr id="71" name="TextBox 70"/>
-          <p:cNvSpPr txBox="1"/>
-          <p:nvPr/>
-        </p:nvSpPr>
-        <p:spPr>
-          <a:xfrm>
-            <a:off x="594360" y="4224528"/>
-            <a:ext cx="6537960" cy="365760"/>
-          </a:xfrm>
-          <a:prstGeom prst="rect">
-            <a:avLst/>
-          </a:prstGeom>
-          <a:noFill/>
-        </p:spPr>
-        <p:txBody>
-          <a:bodyPr wrap="square" lIns="15000" rIns="15000" tIns="5000" bIns="5000" anchor="ctr">
-            <a:spAutoFit/>
-          </a:bodyPr>
-          <a:lstStyle/>
-          <a:p>
-            <a:pPr algn="ctr"/>
-            <a:r>
-              <a:rPr sz="700" b="1" i="0">
-                <a:solidFill>
-                  <a:srgbClr val="0A2540"/>
-                </a:solidFill>
-              </a:rPr>
-              <a:t>🛡  Decision_Rationale  ·  THE GLASS BOX  ·  every AI step writes 1 row  ·  4 · 7 · 8 · 9 · 10 · 12</a:t>
-            </a:r>
-          </a:p>
-        </p:txBody>
-      </p:sp>
-      <p:cxnSp>
-        <p:nvCxnSpPr>
-          <p:cNvPr id="72" name="Connector 71"/>
-          <p:cNvCxnSpPr/>
-          <p:nvPr/>
-        </p:nvCxnSpPr>
-        <p:spPr>
-          <a:xfrm>
-            <a:off x="1417319" y="786384"/>
-            <a:ext cx="0" cy="109728"/>
-          </a:xfrm>
-          <a:prstGeom prst="line">
-            <a:avLst/>
-          </a:prstGeom>
-          <a:ln w="17780">
-            <a:solidFill>
-              <a:srgbClr val="DC2626"/>
-            </a:solidFill>
-            <a:tailEnd type="triangle" w="sm" len="sm"/>
-          </a:ln>
-        </p:spPr>
-        <p:style>
-          <a:lnRef idx="2">
-            <a:schemeClr val="accent1"/>
-          </a:lnRef>
-          <a:fillRef idx="0">
-            <a:schemeClr val="accent1"/>
-          </a:fillRef>
-          <a:effectRef idx="1">
-            <a:schemeClr val="accent1"/>
-          </a:effectRef>
-          <a:fontRef idx="minor">
-            <a:schemeClr val="tx1"/>
-          </a:fontRef>
-        </p:style>
-      </p:cxnSp>
-      <p:cxnSp>
-        <p:nvCxnSpPr>
-          <p:cNvPr id="73" name="Connector 72"/>
-          <p:cNvCxnSpPr/>
-          <p:nvPr/>
-        </p:nvCxnSpPr>
-        <p:spPr>
-          <a:xfrm>
-            <a:off x="2057400" y="1088136"/>
-            <a:ext cx="274320" cy="0"/>
-          </a:xfrm>
-          <a:prstGeom prst="line">
-            <a:avLst/>
-          </a:prstGeom>
-          <a:ln w="17780">
-            <a:solidFill>
-              <a:srgbClr val="DC2626"/>
-            </a:solidFill>
-            <a:tailEnd type="triangle" w="sm" len="sm"/>
-          </a:ln>
-        </p:spPr>
-        <p:style>
-          <a:lnRef idx="2">
-            <a:schemeClr val="accent1"/>
-          </a:lnRef>
-          <a:fillRef idx="0">
-            <a:schemeClr val="accent1"/>
-          </a:fillRef>
-          <a:effectRef idx="1">
-            <a:schemeClr val="accent1"/>
-          </a:effectRef>
-          <a:fontRef idx="minor">
-            <a:schemeClr val="tx1"/>
-          </a:fontRef>
-        </p:style>
-      </p:cxnSp>
-      <p:cxnSp>
-        <p:nvCxnSpPr>
-          <p:cNvPr id="74" name="Connector 73"/>
-          <p:cNvCxnSpPr/>
-          <p:nvPr/>
-        </p:nvCxnSpPr>
-        <p:spPr>
-          <a:xfrm>
-            <a:off x="2926079" y="1280160"/>
-            <a:ext cx="0" cy="137160"/>
-          </a:xfrm>
-          <a:prstGeom prst="line">
-            <a:avLst/>
-          </a:prstGeom>
-          <a:ln w="17780">
-            <a:solidFill>
-              <a:srgbClr val="DC2626"/>
-            </a:solidFill>
-            <a:tailEnd type="triangle" w="sm" len="sm"/>
-          </a:ln>
-        </p:spPr>
-        <p:style>
-          <a:lnRef idx="2">
-            <a:schemeClr val="accent1"/>
-          </a:lnRef>
-          <a:fillRef idx="0">
-            <a:schemeClr val="accent1"/>
-          </a:fillRef>
-          <a:effectRef idx="1">
-            <a:schemeClr val="accent1"/>
-          </a:effectRef>
-          <a:fontRef idx="minor">
-            <a:schemeClr val="tx1"/>
-          </a:fontRef>
-        </p:style>
-      </p:cxnSp>
-      <p:cxnSp>
-        <p:nvCxnSpPr>
-          <p:cNvPr id="75" name="Connector 74"/>
-          <p:cNvCxnSpPr/>
-          <p:nvPr/>
-        </p:nvCxnSpPr>
-        <p:spPr>
-          <a:xfrm>
-            <a:off x="2926079" y="1856232"/>
-            <a:ext cx="0" cy="155448"/>
-          </a:xfrm>
-          <a:prstGeom prst="line">
-            <a:avLst/>
-          </a:prstGeom>
-          <a:ln w="17780">
-            <a:solidFill>
-              <a:srgbClr val="DC2626"/>
-            </a:solidFill>
-          </a:ln>
-        </p:spPr>
-        <p:style>
-          <a:lnRef idx="2">
-            <a:schemeClr val="accent1"/>
-          </a:lnRef>
-          <a:fillRef idx="0">
-            <a:schemeClr val="accent1"/>
-          </a:fillRef>
-          <a:effectRef idx="1">
-            <a:schemeClr val="accent1"/>
-          </a:effectRef>
-          <a:fontRef idx="minor">
-            <a:schemeClr val="tx1"/>
-          </a:fontRef>
-        </p:style>
-      </p:cxnSp>
-      <p:cxnSp>
-        <p:nvCxnSpPr>
-          <p:cNvPr id="76" name="Connector 75"/>
-          <p:cNvCxnSpPr/>
-          <p:nvPr/>
-        </p:nvCxnSpPr>
-        <p:spPr>
-          <a:xfrm flipH="1">
-            <a:off x="2811779" y="2011680"/>
-            <a:ext cx="114300" cy="0"/>
-          </a:xfrm>
-          <a:prstGeom prst="line">
-            <a:avLst/>
-          </a:prstGeom>
-          <a:ln w="17780">
-            <a:solidFill>
-              <a:srgbClr val="DC2626"/>
-            </a:solidFill>
-            <a:tailEnd type="triangle" w="sm" len="sm"/>
-          </a:ln>
-        </p:spPr>
-        <p:style>
-          <a:lnRef idx="2">
-            <a:schemeClr val="accent1"/>
-          </a:lnRef>
-          <a:fillRef idx="0">
-            <a:schemeClr val="accent1"/>
-          </a:fillRef>
-          <a:effectRef idx="1">
-            <a:schemeClr val="accent1"/>
-          </a:effectRef>
-          <a:fontRef idx="minor">
-            <a:schemeClr val="tx1"/>
-          </a:fontRef>
-        </p:style>
-      </p:cxnSp>
-      <p:cxnSp>
-        <p:nvCxnSpPr>
-          <p:cNvPr id="77" name="Connector 76"/>
-          <p:cNvCxnSpPr/>
-          <p:nvPr/>
-        </p:nvCxnSpPr>
-        <p:spPr>
-          <a:xfrm>
-            <a:off x="3291839" y="2231136"/>
-            <a:ext cx="137161" cy="0"/>
-          </a:xfrm>
-          <a:prstGeom prst="line">
-            <a:avLst/>
-          </a:prstGeom>
-          <a:ln w="17780">
-            <a:solidFill>
-              <a:srgbClr val="DC2626"/>
-            </a:solidFill>
-            <a:tailEnd type="triangle" w="sm" len="sm"/>
-          </a:ln>
-        </p:spPr>
-        <p:style>
-          <a:lnRef idx="2">
-            <a:schemeClr val="accent1"/>
-          </a:lnRef>
-          <a:fillRef idx="0">
-            <a:schemeClr val="accent1"/>
-          </a:fillRef>
-          <a:effectRef idx="1">
-            <a:schemeClr val="accent1"/>
-          </a:effectRef>
-          <a:fontRef idx="minor">
-            <a:schemeClr val="tx1"/>
-          </a:fontRef>
-        </p:style>
-      </p:cxnSp>
-      <p:cxnSp>
-        <p:nvCxnSpPr>
-          <p:cNvPr id="78" name="Connector 77"/>
-          <p:cNvCxnSpPr/>
-          <p:nvPr/>
-        </p:nvCxnSpPr>
-        <p:spPr>
-          <a:xfrm>
-            <a:off x="4000500" y="2450592"/>
-            <a:ext cx="0" cy="237744"/>
-          </a:xfrm>
-          <a:prstGeom prst="line">
-            <a:avLst/>
-          </a:prstGeom>
-          <a:ln w="12700">
-            <a:solidFill>
-              <a:srgbClr val="DC2626"/>
-            </a:solidFill>
-          </a:ln>
-        </p:spPr>
-        <p:style>
-          <a:lnRef idx="2">
-            <a:schemeClr val="accent1"/>
-          </a:lnRef>
-          <a:fillRef idx="0">
-            <a:schemeClr val="accent1"/>
-          </a:fillRef>
-          <a:effectRef idx="1">
-            <a:schemeClr val="accent1"/>
-          </a:effectRef>
-          <a:fontRef idx="minor">
-            <a:schemeClr val="tx1"/>
-          </a:fontRef>
-        </p:style>
-      </p:cxnSp>
-      <p:cxnSp>
-        <p:nvCxnSpPr>
-          <p:cNvPr id="79" name="Connector 78"/>
-          <p:cNvCxnSpPr/>
-          <p:nvPr/>
-        </p:nvCxnSpPr>
-        <p:spPr>
-          <a:xfrm flipH="1">
-            <a:off x="2331720" y="2688336"/>
-            <a:ext cx="1668780" cy="0"/>
-          </a:xfrm>
-          <a:prstGeom prst="line">
-            <a:avLst/>
-          </a:prstGeom>
-          <a:ln w="12700">
-            <a:solidFill>
-              <a:srgbClr val="DC2626"/>
-            </a:solidFill>
-            <a:tailEnd type="triangle" w="sm" len="sm"/>
-          </a:ln>
-        </p:spPr>
-        <p:style>
-          <a:lnRef idx="2">
-            <a:schemeClr val="accent1"/>
-          </a:lnRef>
-          <a:fillRef idx="0">
-            <a:schemeClr val="accent1"/>
-          </a:fillRef>
-          <a:effectRef idx="1">
-            <a:schemeClr val="accent1"/>
-          </a:effectRef>
-          <a:fontRef idx="minor">
-            <a:schemeClr val="tx1"/>
-          </a:fontRef>
-        </p:style>
-      </p:cxnSp>
-      <p:cxnSp>
-        <p:nvCxnSpPr>
-          <p:cNvPr id="80" name="Connector 79"/>
-          <p:cNvCxnSpPr/>
-          <p:nvPr/>
-        </p:nvCxnSpPr>
-        <p:spPr>
-          <a:xfrm>
-            <a:off x="3817620" y="2450592"/>
-            <a:ext cx="0" cy="475488"/>
-          </a:xfrm>
-          <a:prstGeom prst="line">
-            <a:avLst/>
-          </a:prstGeom>
-          <a:ln w="12700">
-            <a:solidFill>
-              <a:srgbClr val="DC2626"/>
-            </a:solidFill>
-          </a:ln>
-        </p:spPr>
-        <p:style>
-          <a:lnRef idx="2">
-            <a:schemeClr val="accent1"/>
-          </a:lnRef>
-          <a:fillRef idx="0">
-            <a:schemeClr val="accent1"/>
-          </a:fillRef>
-          <a:effectRef idx="1">
-            <a:schemeClr val="accent1"/>
-          </a:effectRef>
-          <a:fontRef idx="minor">
-            <a:schemeClr val="tx1"/>
-          </a:fontRef>
-        </p:style>
-      </p:cxnSp>
-      <p:cxnSp>
-        <p:nvCxnSpPr>
-          <p:cNvPr id="81" name="Connector 80"/>
-          <p:cNvCxnSpPr/>
-          <p:nvPr/>
-        </p:nvCxnSpPr>
-        <p:spPr>
-          <a:xfrm flipH="1">
-            <a:off x="2331720" y="2926080"/>
-            <a:ext cx="1485900" cy="0"/>
-          </a:xfrm>
-          <a:prstGeom prst="line">
-            <a:avLst/>
-          </a:prstGeom>
-          <a:ln w="12700">
-            <a:solidFill>
-              <a:srgbClr val="DC2626"/>
-            </a:solidFill>
-            <a:tailEnd type="triangle" w="sm" len="sm"/>
-          </a:ln>
-        </p:spPr>
-        <p:style>
-          <a:lnRef idx="2">
-            <a:schemeClr val="accent1"/>
-          </a:lnRef>
-          <a:fillRef idx="0">
-            <a:schemeClr val="accent1"/>
-          </a:fillRef>
-          <a:effectRef idx="1">
-            <a:schemeClr val="accent1"/>
-          </a:effectRef>
-          <a:fontRef idx="minor">
-            <a:schemeClr val="tx1"/>
-          </a:fontRef>
-        </p:style>
-      </p:cxnSp>
-      <p:cxnSp>
-        <p:nvCxnSpPr>
-          <p:cNvPr id="82" name="Connector 81"/>
-          <p:cNvCxnSpPr/>
-          <p:nvPr/>
-        </p:nvCxnSpPr>
-        <p:spPr>
-          <a:xfrm>
-            <a:off x="3634740" y="2450592"/>
-            <a:ext cx="0" cy="713232"/>
-          </a:xfrm>
-          <a:prstGeom prst="line">
-            <a:avLst/>
-          </a:prstGeom>
-          <a:ln w="12700">
-            <a:solidFill>
-              <a:srgbClr val="DC2626"/>
-            </a:solidFill>
-          </a:ln>
-        </p:spPr>
-        <p:style>
-          <a:lnRef idx="2">
-            <a:schemeClr val="accent1"/>
-          </a:lnRef>
-          <a:fillRef idx="0">
-            <a:schemeClr val="accent1"/>
-          </a:fillRef>
-          <a:effectRef idx="1">
-            <a:schemeClr val="accent1"/>
-          </a:effectRef>
-          <a:fontRef idx="minor">
-            <a:schemeClr val="tx1"/>
-          </a:fontRef>
-        </p:style>
-      </p:cxnSp>
-      <p:cxnSp>
-        <p:nvCxnSpPr>
-          <p:cNvPr id="83" name="Connector 82"/>
-          <p:cNvCxnSpPr/>
-          <p:nvPr/>
-        </p:nvCxnSpPr>
-        <p:spPr>
-          <a:xfrm flipH="1">
-            <a:off x="2331720" y="3163824"/>
-            <a:ext cx="1303020" cy="0"/>
-          </a:xfrm>
-          <a:prstGeom prst="line">
-            <a:avLst/>
-          </a:prstGeom>
-          <a:ln w="12700">
-            <a:solidFill>
-              <a:srgbClr val="DC2626"/>
-            </a:solidFill>
-            <a:tailEnd type="triangle" w="sm" len="sm"/>
-          </a:ln>
-        </p:spPr>
-        <p:style>
-          <a:lnRef idx="2">
-            <a:schemeClr val="accent1"/>
-          </a:lnRef>
-          <a:fillRef idx="0">
-            <a:schemeClr val="accent1"/>
-          </a:fillRef>
-          <a:effectRef idx="1">
-            <a:schemeClr val="accent1"/>
-          </a:effectRef>
-          <a:fontRef idx="minor">
-            <a:schemeClr val="tx1"/>
-          </a:fontRef>
-        </p:style>
-      </p:cxnSp>
-      <p:cxnSp>
-        <p:nvCxnSpPr>
-          <p:cNvPr id="84" name="Connector 83"/>
-          <p:cNvCxnSpPr/>
-          <p:nvPr/>
-        </p:nvCxnSpPr>
-        <p:spPr>
-          <a:xfrm>
-            <a:off x="3931920" y="2688336"/>
-            <a:ext cx="182880" cy="0"/>
-          </a:xfrm>
-          <a:prstGeom prst="line">
-            <a:avLst/>
-          </a:prstGeom>
-          <a:ln w="12700">
-            <a:solidFill>
-              <a:srgbClr val="DC2626"/>
-            </a:solidFill>
-          </a:ln>
-        </p:spPr>
-        <p:style>
-          <a:lnRef idx="2">
-            <a:schemeClr val="accent1"/>
-          </a:lnRef>
-          <a:fillRef idx="0">
-            <a:schemeClr val="accent1"/>
-          </a:fillRef>
-          <a:effectRef idx="1">
-            <a:schemeClr val="accent1"/>
-          </a:effectRef>
-          <a:fontRef idx="minor">
-            <a:schemeClr val="tx1"/>
-          </a:fontRef>
-        </p:style>
-      </p:cxnSp>
-      <p:cxnSp>
-        <p:nvCxnSpPr>
-          <p:cNvPr id="85" name="Connector 84"/>
-          <p:cNvCxnSpPr/>
-          <p:nvPr/>
-        </p:nvCxnSpPr>
-        <p:spPr>
-          <a:xfrm>
-            <a:off x="4114800" y="2688336"/>
-            <a:ext cx="0" cy="169164"/>
-          </a:xfrm>
-          <a:prstGeom prst="line">
-            <a:avLst/>
-          </a:prstGeom>
-          <a:ln w="12700">
-            <a:solidFill>
-              <a:srgbClr val="DC2626"/>
-            </a:solidFill>
-            <a:tailEnd type="triangle" w="sm" len="sm"/>
-          </a:ln>
-        </p:spPr>
-        <p:style>
-          <a:lnRef idx="2">
-            <a:schemeClr val="accent1"/>
-          </a:lnRef>
-          <a:fillRef idx="0">
-            <a:schemeClr val="accent1"/>
-          </a:fillRef>
-          <a:effectRef idx="1">
-            <a:schemeClr val="accent1"/>
-          </a:effectRef>
-          <a:fontRef idx="minor">
-            <a:schemeClr val="tx1"/>
-          </a:fontRef>
-        </p:style>
-      </p:cxnSp>
-      <p:cxnSp>
-        <p:nvCxnSpPr>
-          <p:cNvPr id="86" name="Connector 85"/>
-          <p:cNvCxnSpPr/>
-          <p:nvPr/>
-        </p:nvCxnSpPr>
-        <p:spPr>
-          <a:xfrm>
-            <a:off x="3931920" y="2926080"/>
-            <a:ext cx="182880" cy="0"/>
-          </a:xfrm>
-          <a:prstGeom prst="line">
-            <a:avLst/>
-          </a:prstGeom>
-          <a:ln w="12700">
-            <a:solidFill>
-              <a:srgbClr val="DC2626"/>
-            </a:solidFill>
-          </a:ln>
-        </p:spPr>
-        <p:style>
-          <a:lnRef idx="2">
-            <a:schemeClr val="accent1"/>
-          </a:lnRef>
-          <a:fillRef idx="0">
-            <a:schemeClr val="accent1"/>
-          </a:fillRef>
-          <a:effectRef idx="1">
-            <a:schemeClr val="accent1"/>
-          </a:effectRef>
-          <a:fontRef idx="minor">
-            <a:schemeClr val="tx1"/>
-          </a:fontRef>
-        </p:style>
-      </p:cxnSp>
-      <p:cxnSp>
-        <p:nvCxnSpPr>
-          <p:cNvPr id="87" name="Connector 86"/>
-          <p:cNvCxnSpPr/>
-          <p:nvPr/>
-        </p:nvCxnSpPr>
-        <p:spPr>
-          <a:xfrm>
-            <a:off x="4114800" y="2926080"/>
-            <a:ext cx="0" cy="68580"/>
-          </a:xfrm>
-          <a:prstGeom prst="line">
-            <a:avLst/>
-          </a:prstGeom>
-          <a:ln w="12700">
-            <a:solidFill>
-              <a:srgbClr val="DC2626"/>
-            </a:solidFill>
-            <a:tailEnd type="triangle" w="sm" len="sm"/>
-          </a:ln>
-        </p:spPr>
-        <p:style>
-          <a:lnRef idx="2">
-            <a:schemeClr val="accent1"/>
-          </a:lnRef>
-          <a:fillRef idx="0">
-            <a:schemeClr val="accent1"/>
-          </a:fillRef>
-          <a:effectRef idx="1">
-            <a:schemeClr val="accent1"/>
-          </a:effectRef>
-          <a:fontRef idx="minor">
-            <a:schemeClr val="tx1"/>
-          </a:fontRef>
-        </p:style>
-      </p:cxnSp>
-      <p:cxnSp>
-        <p:nvCxnSpPr>
-          <p:cNvPr id="88" name="Connector 87"/>
-          <p:cNvCxnSpPr/>
-          <p:nvPr/>
-        </p:nvCxnSpPr>
-        <p:spPr>
-          <a:xfrm>
-            <a:off x="3931920" y="3163824"/>
-            <a:ext cx="182880" cy="0"/>
-          </a:xfrm>
-          <a:prstGeom prst="line">
-            <a:avLst/>
-          </a:prstGeom>
-          <a:ln w="12700">
-            <a:solidFill>
-              <a:srgbClr val="DC2626"/>
-            </a:solidFill>
-          </a:ln>
-        </p:spPr>
-        <p:style>
-          <a:lnRef idx="2">
-            <a:schemeClr val="accent1"/>
-          </a:lnRef>
-          <a:fillRef idx="0">
-            <a:schemeClr val="accent1"/>
-          </a:fillRef>
-          <a:effectRef idx="1">
-            <a:schemeClr val="accent1"/>
-          </a:effectRef>
-          <a:fontRef idx="minor">
-            <a:schemeClr val="tx1"/>
-          </a:fontRef>
-        </p:style>
-      </p:cxnSp>
-      <p:cxnSp>
-        <p:nvCxnSpPr>
-          <p:cNvPr id="89" name="Connector 88"/>
-          <p:cNvCxnSpPr/>
-          <p:nvPr/>
-        </p:nvCxnSpPr>
-        <p:spPr>
-          <a:xfrm flipV="1">
-            <a:off x="4114800" y="3131820"/>
-            <a:ext cx="0" cy="32004"/>
-          </a:xfrm>
-          <a:prstGeom prst="line">
-            <a:avLst/>
-          </a:prstGeom>
-          <a:ln w="12700">
-            <a:solidFill>
-              <a:srgbClr val="DC2626"/>
-            </a:solidFill>
-            <a:tailEnd type="triangle" w="sm" len="sm"/>
-          </a:ln>
-        </p:spPr>
-        <p:style>
-          <a:lnRef idx="2">
-            <a:schemeClr val="accent1"/>
-          </a:lnRef>
-          <a:fillRef idx="0">
-            <a:schemeClr val="accent1"/>
-          </a:fillRef>
-          <a:effectRef idx="1">
-            <a:schemeClr val="accent1"/>
-          </a:effectRef>
-          <a:fontRef idx="minor">
-            <a:schemeClr val="tx1"/>
-          </a:fontRef>
-        </p:style>
-      </p:cxnSp>
-      <p:cxnSp>
-        <p:nvCxnSpPr>
-          <p:cNvPr id="90" name="Connector 89"/>
-          <p:cNvCxnSpPr/>
-          <p:nvPr/>
-        </p:nvCxnSpPr>
-        <p:spPr>
-          <a:xfrm flipV="1">
-            <a:off x="4800600" y="2450592"/>
-            <a:ext cx="0" cy="292608"/>
-          </a:xfrm>
-          <a:prstGeom prst="line">
-            <a:avLst/>
-          </a:prstGeom>
-          <a:ln w="17780">
-            <a:solidFill>
-              <a:srgbClr val="DC2626"/>
-            </a:solidFill>
-          </a:ln>
-        </p:spPr>
-        <p:style>
-          <a:lnRef idx="2">
-            <a:schemeClr val="accent1"/>
-          </a:lnRef>
-          <a:fillRef idx="0">
-            <a:schemeClr val="accent1"/>
-          </a:fillRef>
-          <a:effectRef idx="1">
-            <a:schemeClr val="accent1"/>
-          </a:effectRef>
-          <a:fontRef idx="minor">
-            <a:schemeClr val="tx1"/>
-          </a:fontRef>
-        </p:style>
-      </p:cxnSp>
-      <p:cxnSp>
-        <p:nvCxnSpPr>
-          <p:cNvPr id="91" name="Connector 90"/>
-          <p:cNvCxnSpPr/>
-          <p:nvPr/>
-        </p:nvCxnSpPr>
-        <p:spPr>
-          <a:xfrm>
-            <a:off x="4800600" y="2450592"/>
-            <a:ext cx="297180" cy="0"/>
-          </a:xfrm>
-          <a:prstGeom prst="line">
-            <a:avLst/>
-          </a:prstGeom>
-          <a:ln w="17780">
-            <a:solidFill>
-              <a:srgbClr val="DC2626"/>
-            </a:solidFill>
-            <a:tailEnd type="triangle" w="sm" len="sm"/>
-          </a:ln>
-        </p:spPr>
-        <p:style>
-          <a:lnRef idx="2">
-            <a:schemeClr val="accent1"/>
-          </a:lnRef>
-          <a:fillRef idx="0">
-            <a:schemeClr val="accent1"/>
-          </a:fillRef>
-          <a:effectRef idx="1">
-            <a:schemeClr val="accent1"/>
-          </a:effectRef>
-          <a:fontRef idx="minor">
-            <a:schemeClr val="tx1"/>
-          </a:fontRef>
-        </p:style>
-      </p:cxnSp>
-      <p:cxnSp>
-        <p:nvCxnSpPr>
-          <p:cNvPr id="92" name="Connector 91"/>
-          <p:cNvCxnSpPr/>
-          <p:nvPr/>
-        </p:nvCxnSpPr>
-        <p:spPr>
-          <a:xfrm>
-            <a:off x="5097780" y="2450592"/>
-            <a:ext cx="0" cy="987552"/>
-          </a:xfrm>
-          <a:prstGeom prst="line">
-            <a:avLst/>
-          </a:prstGeom>
-          <a:ln w="12700">
-            <a:solidFill>
-              <a:srgbClr val="0F172A"/>
-            </a:solidFill>
-          </a:ln>
-        </p:spPr>
-        <p:style>
-          <a:lnRef idx="2">
-            <a:schemeClr val="accent1"/>
-          </a:lnRef>
-          <a:fillRef idx="0">
-            <a:schemeClr val="accent1"/>
-          </a:fillRef>
-          <a:effectRef idx="1">
-            <a:schemeClr val="accent1"/>
-          </a:effectRef>
-          <a:fontRef idx="minor">
-            <a:schemeClr val="tx1"/>
-          </a:fontRef>
-        </p:style>
-      </p:cxnSp>
-      <p:cxnSp>
-        <p:nvCxnSpPr>
-          <p:cNvPr id="93" name="Connector 92"/>
-          <p:cNvCxnSpPr/>
-          <p:nvPr/>
-        </p:nvCxnSpPr>
-        <p:spPr>
-          <a:xfrm flipH="1">
-            <a:off x="4800600" y="3438144"/>
-            <a:ext cx="297180" cy="0"/>
-          </a:xfrm>
-          <a:prstGeom prst="line">
-            <a:avLst/>
-          </a:prstGeom>
-          <a:ln w="12700">
-            <a:solidFill>
-              <a:srgbClr val="0F172A"/>
-            </a:solidFill>
-            <a:tailEnd type="triangle" w="sm" len="sm"/>
-          </a:ln>
-        </p:spPr>
-        <p:style>
-          <a:lnRef idx="2">
-            <a:schemeClr val="accent1"/>
-          </a:lnRef>
-          <a:fillRef idx="0">
-            <a:schemeClr val="accent1"/>
-          </a:fillRef>
-          <a:effectRef idx="1">
-            <a:schemeClr val="accent1"/>
-          </a:effectRef>
-          <a:fontRef idx="minor">
-            <a:schemeClr val="tx1"/>
-          </a:fontRef>
-        </p:style>
-      </p:cxnSp>
-      <p:cxnSp>
-        <p:nvCxnSpPr>
-          <p:cNvPr id="94" name="Connector 93"/>
-          <p:cNvCxnSpPr/>
-          <p:nvPr/>
-        </p:nvCxnSpPr>
-        <p:spPr>
-          <a:xfrm>
-            <a:off x="5486400" y="2231136"/>
-            <a:ext cx="0" cy="1207008"/>
-          </a:xfrm>
-          <a:prstGeom prst="line">
-            <a:avLst/>
-          </a:prstGeom>
-          <a:ln w="12700">
-            <a:solidFill>
-              <a:srgbClr val="0F172A"/>
-            </a:solidFill>
-          </a:ln>
-        </p:spPr>
-        <p:style>
-          <a:lnRef idx="2">
-            <a:schemeClr val="accent1"/>
-          </a:lnRef>
-          <a:fillRef idx="0">
-            <a:schemeClr val="accent1"/>
-          </a:fillRef>
-          <a:effectRef idx="1">
-            <a:schemeClr val="accent1"/>
-          </a:effectRef>
-          <a:fontRef idx="minor">
-            <a:schemeClr val="tx1"/>
-          </a:fontRef>
-        </p:style>
-      </p:cxnSp>
-      <p:cxnSp>
-        <p:nvCxnSpPr>
-          <p:cNvPr id="95" name="Connector 94"/>
-          <p:cNvCxnSpPr/>
-          <p:nvPr/>
-        </p:nvCxnSpPr>
-        <p:spPr>
-          <a:xfrm>
-            <a:off x="5486400" y="3438144"/>
-            <a:ext cx="891540" cy="0"/>
-          </a:xfrm>
-          <a:prstGeom prst="line">
-            <a:avLst/>
-          </a:prstGeom>
-          <a:ln w="12700">
-            <a:solidFill>
-              <a:srgbClr val="0F172A"/>
-            </a:solidFill>
-            <a:tailEnd type="triangle" w="sm" len="sm"/>
-          </a:ln>
-        </p:spPr>
-        <p:style>
-          <a:lnRef idx="2">
-            <a:schemeClr val="accent1"/>
-          </a:lnRef>
-          <a:fillRef idx="0">
-            <a:schemeClr val="accent1"/>
-          </a:fillRef>
-          <a:effectRef idx="1">
-            <a:schemeClr val="accent1"/>
-          </a:effectRef>
-          <a:fontRef idx="minor">
-            <a:schemeClr val="tx1"/>
-          </a:fontRef>
-        </p:style>
-      </p:cxnSp>
-      <p:cxnSp>
-        <p:nvCxnSpPr>
-          <p:cNvPr id="96" name="Connector 95"/>
-          <p:cNvCxnSpPr/>
-          <p:nvPr/>
-        </p:nvCxnSpPr>
-        <p:spPr>
-          <a:xfrm flipV="1">
-            <a:off x="5097780" y="1856232"/>
-            <a:ext cx="0" cy="155448"/>
-          </a:xfrm>
-          <a:prstGeom prst="line">
-            <a:avLst/>
-          </a:prstGeom>
-          <a:ln w="17780">
-            <a:solidFill>
-              <a:srgbClr val="DC2626"/>
-            </a:solidFill>
-          </a:ln>
-        </p:spPr>
-        <p:style>
-          <a:lnRef idx="2">
-            <a:schemeClr val="accent1"/>
-          </a:lnRef>
-          <a:fillRef idx="0">
-            <a:schemeClr val="accent1"/>
-          </a:fillRef>
-          <a:effectRef idx="1">
-            <a:schemeClr val="accent1"/>
-          </a:effectRef>
-          <a:fontRef idx="minor">
-            <a:schemeClr val="tx1"/>
-          </a:fontRef>
-        </p:style>
-      </p:cxnSp>
-      <p:cxnSp>
-        <p:nvCxnSpPr>
-          <p:cNvPr id="97" name="Connector 96"/>
-          <p:cNvCxnSpPr/>
-          <p:nvPr/>
-        </p:nvCxnSpPr>
-        <p:spPr>
-          <a:xfrm>
-            <a:off x="5097780" y="1856232"/>
-            <a:ext cx="1280160" cy="0"/>
-          </a:xfrm>
-          <a:prstGeom prst="line">
-            <a:avLst/>
-          </a:prstGeom>
-          <a:ln w="17780">
-            <a:solidFill>
-              <a:srgbClr val="DC2626"/>
-            </a:solidFill>
-            <a:tailEnd type="triangle" w="sm" len="sm"/>
-          </a:ln>
-        </p:spPr>
-        <p:style>
-          <a:lnRef idx="2">
-            <a:schemeClr val="accent1"/>
-          </a:lnRef>
-          <a:fillRef idx="0">
-            <a:schemeClr val="accent1"/>
-          </a:fillRef>
-          <a:effectRef idx="1">
-            <a:schemeClr val="accent1"/>
-          </a:effectRef>
-          <a:fontRef idx="minor">
-            <a:schemeClr val="tx1"/>
-          </a:fontRef>
-        </p:style>
-      </p:cxnSp>
-      <p:cxnSp>
-        <p:nvCxnSpPr>
-          <p:cNvPr id="98" name="Connector 97"/>
-          <p:cNvCxnSpPr/>
-          <p:nvPr/>
-        </p:nvCxnSpPr>
-        <p:spPr>
-          <a:xfrm>
-            <a:off x="6377940" y="1856232"/>
-            <a:ext cx="0" cy="155448"/>
-          </a:xfrm>
-          <a:prstGeom prst="line">
-            <a:avLst/>
-          </a:prstGeom>
-          <a:ln w="17780">
-            <a:solidFill>
-              <a:srgbClr val="DC2626"/>
-            </a:solidFill>
-            <a:tailEnd type="triangle" w="sm" len="sm"/>
-          </a:ln>
-        </p:spPr>
-        <p:style>
-          <a:lnRef idx="2">
-            <a:schemeClr val="accent1"/>
-          </a:lnRef>
-          <a:fillRef idx="0">
-            <a:schemeClr val="accent1"/>
-          </a:fillRef>
-          <a:effectRef idx="1">
-            <a:schemeClr val="accent1"/>
-          </a:effectRef>
-          <a:fontRef idx="minor">
-            <a:schemeClr val="tx1"/>
-          </a:fontRef>
-        </p:style>
-      </p:cxnSp>
-      <p:cxnSp>
-        <p:nvCxnSpPr>
-          <p:cNvPr id="99" name="Connector 98"/>
-          <p:cNvCxnSpPr/>
-          <p:nvPr/>
-        </p:nvCxnSpPr>
-        <p:spPr>
-          <a:xfrm>
-            <a:off x="7086600" y="2231136"/>
-            <a:ext cx="182880" cy="0"/>
-          </a:xfrm>
-          <a:prstGeom prst="line">
-            <a:avLst/>
-          </a:prstGeom>
-          <a:ln w="12700">
-            <a:solidFill>
-              <a:srgbClr val="DC2626"/>
-            </a:solidFill>
-            <a:prstDash val="dash"/>
-            <a:tailEnd type="triangle" w="sm" len="sm"/>
-          </a:ln>
-        </p:spPr>
-        <p:style>
-          <a:lnRef idx="2">
-            <a:schemeClr val="accent1"/>
-          </a:lnRef>
-          <a:fillRef idx="0">
-            <a:schemeClr val="accent1"/>
-          </a:fillRef>
-          <a:effectRef idx="1">
-            <a:schemeClr val="accent1"/>
-          </a:effectRef>
-          <a:fontRef idx="minor">
-            <a:schemeClr val="tx1"/>
-          </a:fontRef>
-        </p:style>
-      </p:cxnSp>
-      <p:cxnSp>
-        <p:nvCxnSpPr>
-          <p:cNvPr id="100" name="Connector 99"/>
-          <p:cNvCxnSpPr/>
-          <p:nvPr/>
-        </p:nvCxnSpPr>
-        <p:spPr>
-          <a:xfrm flipV="1">
-            <a:off x="7269480" y="182880"/>
-            <a:ext cx="0" cy="2048256"/>
-          </a:xfrm>
-          <a:prstGeom prst="line">
-            <a:avLst/>
-          </a:prstGeom>
-          <a:ln w="12700">
-            <a:solidFill>
-              <a:srgbClr val="DC2626"/>
-            </a:solidFill>
-            <a:prstDash val="dash"/>
-            <a:tailEnd type="triangle" w="sm" len="sm"/>
-          </a:ln>
-        </p:spPr>
-        <p:style>
-          <a:lnRef idx="2">
-            <a:schemeClr val="accent1"/>
-          </a:lnRef>
-          <a:fillRef idx="0">
-            <a:schemeClr val="accent1"/>
-          </a:fillRef>
-          <a:effectRef idx="1">
-            <a:schemeClr val="accent1"/>
-          </a:effectRef>
-          <a:fontRef idx="minor">
-            <a:schemeClr val="tx1"/>
-          </a:fontRef>
-        </p:style>
-      </p:cxnSp>
-      <p:cxnSp>
-        <p:nvCxnSpPr>
-          <p:cNvPr id="101" name="Connector 100"/>
-          <p:cNvCxnSpPr/>
-          <p:nvPr/>
-        </p:nvCxnSpPr>
-        <p:spPr>
-          <a:xfrm flipH="1">
-            <a:off x="1417319" y="182880"/>
-            <a:ext cx="5852161" cy="0"/>
-          </a:xfrm>
-          <a:prstGeom prst="line">
-            <a:avLst/>
-          </a:prstGeom>
-          <a:ln w="12700">
-            <a:solidFill>
-              <a:srgbClr val="DC2626"/>
-            </a:solidFill>
-            <a:prstDash val="dash"/>
-            <a:tailEnd type="triangle" w="sm" len="sm"/>
-          </a:ln>
-        </p:spPr>
-        <p:style>
-          <a:lnRef idx="2">
-            <a:schemeClr val="accent1"/>
-          </a:lnRef>
-          <a:fillRef idx="0">
-            <a:schemeClr val="accent1"/>
-          </a:fillRef>
-          <a:effectRef idx="1">
-            <a:schemeClr val="accent1"/>
-          </a:effectRef>
-          <a:fontRef idx="minor">
-            <a:schemeClr val="tx1"/>
-          </a:fontRef>
-        </p:style>
-      </p:cxnSp>
-      <p:cxnSp>
-        <p:nvCxnSpPr>
-          <p:cNvPr id="102" name="Connector 101"/>
-          <p:cNvCxnSpPr/>
-          <p:nvPr/>
-        </p:nvCxnSpPr>
-        <p:spPr>
-          <a:xfrm>
-            <a:off x="1417319" y="182880"/>
-            <a:ext cx="0" cy="219456"/>
-          </a:xfrm>
-          <a:prstGeom prst="line">
-            <a:avLst/>
-          </a:prstGeom>
-          <a:ln w="12700">
-            <a:solidFill>
-              <a:srgbClr val="DC2626"/>
-            </a:solidFill>
-            <a:prstDash val="dash"/>
-            <a:tailEnd type="triangle" w="sm" len="sm"/>
-          </a:ln>
-        </p:spPr>
-        <p:style>
-          <a:lnRef idx="2">
-            <a:schemeClr val="accent1"/>
-          </a:lnRef>
-          <a:fillRef idx="0">
-            <a:schemeClr val="accent1"/>
-          </a:fillRef>
-          <a:effectRef idx="1">
-            <a:schemeClr val="accent1"/>
-          </a:effectRef>
-          <a:fontRef idx="minor">
-            <a:schemeClr val="tx1"/>
-          </a:fontRef>
-        </p:style>
-      </p:cxnSp>
-      <p:cxnSp>
-        <p:nvCxnSpPr>
-          <p:cNvPr id="103" name="Connector 102"/>
-          <p:cNvCxnSpPr/>
-          <p:nvPr/>
-        </p:nvCxnSpPr>
-        <p:spPr>
-          <a:xfrm flipH="1">
-            <a:off x="2148839" y="1636776"/>
-            <a:ext cx="182881" cy="0"/>
-          </a:xfrm>
-          <a:prstGeom prst="line">
-            <a:avLst/>
-          </a:prstGeom>
-          <a:ln w="9525">
-            <a:solidFill>
-              <a:srgbClr val="D99416"/>
-            </a:solidFill>
-            <a:prstDash val="dash"/>
-            <a:tailEnd type="triangle" w="sm" len="sm"/>
-          </a:ln>
-        </p:spPr>
-        <p:style>
-          <a:lnRef idx="2">
-            <a:schemeClr val="accent1"/>
-          </a:lnRef>
-          <a:fillRef idx="0">
-            <a:schemeClr val="accent1"/>
-          </a:fillRef>
-          <a:effectRef idx="1">
-            <a:schemeClr val="accent1"/>
-          </a:effectRef>
-          <a:fontRef idx="minor">
-            <a:schemeClr val="tx1"/>
-          </a:fontRef>
-        </p:style>
-      </p:cxnSp>
-      <p:cxnSp>
-        <p:nvCxnSpPr>
-          <p:cNvPr id="104" name="Connector 103"/>
-          <p:cNvCxnSpPr/>
-          <p:nvPr/>
-        </p:nvCxnSpPr>
-        <p:spPr>
-          <a:xfrm>
-            <a:off x="2148839" y="1636776"/>
-            <a:ext cx="0" cy="2587752"/>
-          </a:xfrm>
-          <a:prstGeom prst="line">
-            <a:avLst/>
-          </a:prstGeom>
-          <a:ln w="9525">
-            <a:solidFill>
-              <a:srgbClr val="D99416"/>
-            </a:solidFill>
-            <a:prstDash val="dash"/>
-            <a:tailEnd type="triangle" w="sm" len="sm"/>
-          </a:ln>
-        </p:spPr>
-        <p:style>
-          <a:lnRef idx="2">
-            <a:schemeClr val="accent1"/>
-          </a:lnRef>
-          <a:fillRef idx="0">
-            <a:schemeClr val="accent1"/>
-          </a:fillRef>
-          <a:effectRef idx="1">
-            <a:schemeClr val="accent1"/>
-          </a:effectRef>
-          <a:fontRef idx="minor">
-            <a:schemeClr val="tx1"/>
-          </a:fontRef>
-        </p:style>
-      </p:cxnSp>
-      <p:cxnSp>
-        <p:nvCxnSpPr>
-          <p:cNvPr id="105" name="Connector 104"/>
-          <p:cNvCxnSpPr/>
-          <p:nvPr/>
-        </p:nvCxnSpPr>
-        <p:spPr>
-          <a:xfrm>
-            <a:off x="4800600" y="3246120"/>
-            <a:ext cx="0" cy="978408"/>
-          </a:xfrm>
-          <a:prstGeom prst="line">
-            <a:avLst/>
-          </a:prstGeom>
-          <a:ln w="9525">
-            <a:solidFill>
-              <a:srgbClr val="D99416"/>
-            </a:solidFill>
-            <a:prstDash val="dash"/>
-            <a:tailEnd type="triangle" w="sm" len="sm"/>
-          </a:ln>
-        </p:spPr>
-        <p:style>
-          <a:lnRef idx="2">
-            <a:schemeClr val="accent1"/>
-          </a:lnRef>
-          <a:fillRef idx="0">
-            <a:schemeClr val="accent1"/>
-          </a:fillRef>
-          <a:effectRef idx="1">
-            <a:schemeClr val="accent1"/>
-          </a:effectRef>
-          <a:fontRef idx="minor">
-            <a:schemeClr val="tx1"/>
-          </a:fontRef>
-        </p:style>
-      </p:cxnSp>
-      <p:cxnSp>
-        <p:nvCxnSpPr>
-          <p:cNvPr id="106" name="Connector 105"/>
-          <p:cNvCxnSpPr/>
-          <p:nvPr/>
-        </p:nvCxnSpPr>
-        <p:spPr>
-          <a:xfrm>
-            <a:off x="6377940" y="1856232"/>
-            <a:ext cx="0" cy="1892807"/>
-          </a:xfrm>
-          <a:prstGeom prst="line">
-            <a:avLst/>
-          </a:prstGeom>
-          <a:ln w="9525">
-            <a:solidFill>
-              <a:srgbClr val="D99416"/>
-            </a:solidFill>
-            <a:prstDash val="dash"/>
-            <a:tailEnd type="triangle" w="sm" len="sm"/>
-          </a:ln>
-        </p:spPr>
-        <p:style>
-          <a:lnRef idx="2">
-            <a:schemeClr val="accent1"/>
-          </a:lnRef>
-          <a:fillRef idx="0">
-            <a:schemeClr val="accent1"/>
-          </a:fillRef>
-          <a:effectRef idx="1">
-            <a:schemeClr val="accent1"/>
-          </a:effectRef>
-          <a:fontRef idx="minor">
-            <a:schemeClr val="tx1"/>
-          </a:fontRef>
-        </p:style>
-      </p:cxnSp>
-      <p:cxnSp>
-        <p:nvCxnSpPr>
-          <p:cNvPr id="107" name="Connector 106"/>
-          <p:cNvCxnSpPr/>
-          <p:nvPr/>
-        </p:nvCxnSpPr>
-        <p:spPr>
-          <a:xfrm>
-            <a:off x="6377940" y="3749039"/>
-            <a:ext cx="388620" cy="0"/>
-          </a:xfrm>
-          <a:prstGeom prst="line">
-            <a:avLst/>
-          </a:prstGeom>
-          <a:ln w="9525">
-            <a:solidFill>
-              <a:srgbClr val="D99416"/>
-            </a:solidFill>
-            <a:prstDash val="dash"/>
-            <a:tailEnd type="triangle" w="sm" len="sm"/>
-          </a:ln>
-        </p:spPr>
-        <p:style>
-          <a:lnRef idx="2">
-            <a:schemeClr val="accent1"/>
-          </a:lnRef>
-          <a:fillRef idx="0">
-            <a:schemeClr val="accent1"/>
-          </a:fillRef>
-          <a:effectRef idx="1">
-            <a:schemeClr val="accent1"/>
-          </a:effectRef>
-          <a:fontRef idx="minor">
-            <a:schemeClr val="tx1"/>
-          </a:fontRef>
-        </p:style>
-      </p:cxnSp>
-      <p:cxnSp>
-        <p:nvCxnSpPr>
-          <p:cNvPr id="108" name="Connector 107"/>
-          <p:cNvCxnSpPr/>
-          <p:nvPr/>
-        </p:nvCxnSpPr>
-        <p:spPr>
-          <a:xfrm>
-            <a:off x="6766560" y="3749039"/>
-            <a:ext cx="0" cy="475489"/>
-          </a:xfrm>
-          <a:prstGeom prst="line">
-            <a:avLst/>
-          </a:prstGeom>
-          <a:ln w="9525">
-            <a:solidFill>
-              <a:srgbClr val="D99416"/>
-            </a:solidFill>
-            <a:prstDash val="dash"/>
-            <a:tailEnd type="triangle" w="sm" len="sm"/>
-          </a:ln>
-        </p:spPr>
-        <p:style>
-          <a:lnRef idx="2">
-            <a:schemeClr val="accent1"/>
-          </a:lnRef>
-          <a:fillRef idx="0">
-            <a:schemeClr val="accent1"/>
-          </a:fillRef>
-          <a:effectRef idx="1">
-            <a:schemeClr val="accent1"/>
-          </a:effectRef>
-          <a:fontRef idx="minor">
-            <a:schemeClr val="tx1"/>
-          </a:fontRef>
-        </p:style>
-      </p:cxnSp>
-      <p:sp>
-        <p:nvSpPr>
-          <p:cNvPr id="109" name="Rounded Rectangle 108"/>
-          <p:cNvSpPr/>
-          <p:nvPr/>
-        </p:nvSpPr>
-        <p:spPr>
-          <a:xfrm>
-            <a:off x="7315200" y="365760"/>
-            <a:ext cx="1783080" cy="4572000"/>
-          </a:xfrm>
-          <a:prstGeom prst="roundRect">
-            <a:avLst/>
-          </a:prstGeom>
-          <a:solidFill>
-            <a:srgbClr val="FFFFFF"/>
-          </a:solidFill>
-          <a:ln w="12700">
-            <a:solidFill>
-              <a:srgbClr val="0A2540"/>
-            </a:solidFill>
-          </a:ln>
-          <a:effectLst/>
-        </p:spPr>
-        <p:style>
-          <a:lnRef idx="1">
-            <a:schemeClr val="accent1"/>
-          </a:lnRef>
-          <a:fillRef idx="3">
-            <a:schemeClr val="accent1"/>
-          </a:fillRef>
-          <a:effectRef idx="2">
-            <a:schemeClr val="accent1"/>
-          </a:effectRef>
-          <a:fontRef idx="minor">
-            <a:schemeClr val="lt1"/>
-          </a:fontRef>
-        </p:style>
-        <p:txBody>
-          <a:bodyPr rtlCol="0" anchor="ctr"/>
-          <a:lstStyle/>
-          <a:p>
-            <a:pPr algn="ctr"/>
-          </a:p>
-        </p:txBody>
-      </p:sp>
-      <p:sp>
-        <p:nvSpPr>
-          <p:cNvPr id="110" name="Rounded Rectangle 109"/>
-          <p:cNvSpPr/>
-          <p:nvPr/>
-        </p:nvSpPr>
-        <p:spPr>
-          <a:xfrm>
-            <a:off x="7315200" y="365760"/>
-            <a:ext cx="1783080" cy="219456"/>
-          </a:xfrm>
-          <a:prstGeom prst="roundRect">
-            <a:avLst/>
-          </a:prstGeom>
-          <a:solidFill>
-            <a:srgbClr val="0A2540"/>
-          </a:solidFill>
-          <a:ln w="6350">
-            <a:solidFill>
-              <a:srgbClr val="0A2540"/>
-            </a:solidFill>
-          </a:ln>
-          <a:effectLst/>
-        </p:spPr>
-        <p:style>
-          <a:lnRef idx="1">
-            <a:schemeClr val="accent1"/>
-          </a:lnRef>
-          <a:fillRef idx="3">
-            <a:schemeClr val="accent1"/>
-          </a:fillRef>
-          <a:effectRef idx="2">
-            <a:schemeClr val="accent1"/>
-          </a:effectRef>
-          <a:fontRef idx="minor">
-            <a:schemeClr val="lt1"/>
-          </a:fontRef>
-        </p:style>
-        <p:txBody>
-          <a:bodyPr rtlCol="0" anchor="ctr"/>
-          <a:lstStyle/>
-          <a:p>
-            <a:pPr algn="ctr"/>
-          </a:p>
-        </p:txBody>
-      </p:sp>
-      <p:sp>
-        <p:nvSpPr>
-          <p:cNvPr id="111" name="TextBox 110"/>
-          <p:cNvSpPr txBox="1"/>
-          <p:nvPr/>
-        </p:nvSpPr>
-        <p:spPr>
-          <a:xfrm>
-            <a:off x="7315200" y="365760"/>
-            <a:ext cx="1783080" cy="219456"/>
-          </a:xfrm>
-          <a:prstGeom prst="rect">
-            <a:avLst/>
-          </a:prstGeom>
-          <a:noFill/>
-        </p:spPr>
-        <p:txBody>
-          <a:bodyPr wrap="square" lIns="15000" rIns="15000" tIns="5000" bIns="5000" anchor="ctr">
-            <a:spAutoFit/>
-          </a:bodyPr>
-          <a:lstStyle/>
-          <a:p>
-            <a:pPr algn="ctr"/>
-            <a:r>
-              <a:rPr sz="800" b="1" i="0">
-                <a:solidFill>
-                  <a:srgbClr val="FFFFFF"/>
-                </a:solidFill>
-              </a:rPr>
-              <a:t>FLOW LEGEND</a:t>
-            </a:r>
-          </a:p>
-        </p:txBody>
-      </p:sp>
-      <p:sp>
-        <p:nvSpPr>
-          <p:cNvPr id="112" name="Rounded Rectangle 111"/>
-          <p:cNvSpPr/>
-          <p:nvPr/>
-        </p:nvSpPr>
-        <p:spPr>
-          <a:xfrm>
-            <a:off x="7360920" y="612648"/>
-            <a:ext cx="1691639" cy="274320"/>
-          </a:xfrm>
-          <a:prstGeom prst="roundRect">
-            <a:avLst/>
-          </a:prstGeom>
-          <a:solidFill>
-            <a:srgbClr val="FFF7ED"/>
-          </a:solidFill>
-          <a:ln w="3810">
-            <a:solidFill>
-              <a:srgbClr val="9A3412"/>
-            </a:solidFill>
-          </a:ln>
-          <a:effectLst/>
-        </p:spPr>
-        <p:style>
-          <a:lnRef idx="1">
-            <a:schemeClr val="accent1"/>
-          </a:lnRef>
-          <a:fillRef idx="3">
-            <a:schemeClr val="accent1"/>
-          </a:fillRef>
-          <a:effectRef idx="2">
-            <a:schemeClr val="accent1"/>
-          </a:effectRef>
-          <a:fontRef idx="minor">
-            <a:schemeClr val="lt1"/>
-          </a:fontRef>
-        </p:style>
-        <p:txBody>
-          <a:bodyPr rtlCol="0" anchor="ctr"/>
-          <a:lstStyle/>
-          <a:p>
-            <a:pPr algn="ctr"/>
-          </a:p>
-        </p:txBody>
-      </p:sp>
-      <p:sp>
-        <p:nvSpPr>
-          <p:cNvPr id="113" name="TextBox 112"/>
-          <p:cNvSpPr txBox="1"/>
-          <p:nvPr/>
-        </p:nvSpPr>
-        <p:spPr>
-          <a:xfrm>
-            <a:off x="7379208" y="612648"/>
-            <a:ext cx="1655064" cy="274320"/>
-          </a:xfrm>
-          <a:prstGeom prst="rect">
-            <a:avLst/>
-          </a:prstGeom>
-          <a:noFill/>
-        </p:spPr>
-        <p:txBody>
-          <a:bodyPr wrap="square" lIns="10000" rIns="10000" tIns="8000" bIns="8000" anchor="ctr">
-            <a:spAutoFit/>
-          </a:bodyPr>
-          <a:lstStyle/>
-          <a:p>
-            <a:pPr algn="l"/>
-            <a:r>
-              <a:rPr sz="800" b="1">
-                <a:solidFill>
-                  <a:srgbClr val="9A3412"/>
-                </a:solidFill>
-              </a:rPr>
-              <a:t>1  </a:t>
-            </a:r>
-            <a:r>
-              <a:rPr sz="500" b="1">
-                <a:solidFill>
-                  <a:srgbClr val="0F172A"/>
-                </a:solidFill>
-              </a:rPr>
-              <a:t>CUSTOMER FNOL</a:t>
-            </a:r>
-          </a:p>
-          <a:p>
-            <a:pPr algn="l"/>
-            <a:r>
-              <a:rPr sz="500">
-                <a:solidFill>
-                  <a:srgbClr val="0F172A"/>
-                </a:solidFill>
-              </a:rPr>
-              <a:t>Mobile · Web · Teams · SMS · Email</a:t>
-            </a:r>
-          </a:p>
-        </p:txBody>
-      </p:sp>
-      <p:sp>
-        <p:nvSpPr>
-          <p:cNvPr id="114" name="Rounded Rectangle 113"/>
-          <p:cNvSpPr/>
-          <p:nvPr/>
-        </p:nvSpPr>
-        <p:spPr>
-          <a:xfrm>
-            <a:off x="7360920" y="905256"/>
-            <a:ext cx="1691639" cy="274320"/>
-          </a:xfrm>
-          <a:prstGeom prst="roundRect">
-            <a:avLst/>
-          </a:prstGeom>
-          <a:solidFill>
-            <a:srgbClr val="EFF6FF"/>
-          </a:solidFill>
-          <a:ln w="3810">
-            <a:solidFill>
-              <a:srgbClr val="0078D4"/>
-            </a:solidFill>
-          </a:ln>
-          <a:effectLst/>
-        </p:spPr>
-        <p:style>
-          <a:lnRef idx="1">
-            <a:schemeClr val="accent1"/>
-          </a:lnRef>
-          <a:fillRef idx="3">
-            <a:schemeClr val="accent1"/>
-          </a:fillRef>
-          <a:effectRef idx="2">
-            <a:schemeClr val="accent1"/>
-          </a:effectRef>
-          <a:fontRef idx="minor">
-            <a:schemeClr val="lt1"/>
-          </a:fontRef>
-        </p:style>
-        <p:txBody>
-          <a:bodyPr rtlCol="0" anchor="ctr"/>
-          <a:lstStyle/>
-          <a:p>
-            <a:pPr algn="ctr"/>
-          </a:p>
-        </p:txBody>
-      </p:sp>
-      <p:sp>
-        <p:nvSpPr>
-          <p:cNvPr id="115" name="TextBox 114"/>
-          <p:cNvSpPr txBox="1"/>
-          <p:nvPr/>
-        </p:nvSpPr>
-        <p:spPr>
-          <a:xfrm>
-            <a:off x="7379208" y="905256"/>
-            <a:ext cx="1655064" cy="274320"/>
-          </a:xfrm>
-          <a:prstGeom prst="rect">
-            <a:avLst/>
-          </a:prstGeom>
-          <a:noFill/>
-        </p:spPr>
-        <p:txBody>
-          <a:bodyPr wrap="square" lIns="10000" rIns="10000" tIns="8000" bIns="8000" anchor="ctr">
-            <a:spAutoFit/>
-          </a:bodyPr>
-          <a:lstStyle/>
-          <a:p>
-            <a:pPr algn="l"/>
-            <a:r>
-              <a:rPr sz="800" b="1">
-                <a:solidFill>
-                  <a:srgbClr val="0078D4"/>
-                </a:solidFill>
-              </a:rPr>
-              <a:t>2  </a:t>
-            </a:r>
-            <a:r>
-              <a:rPr sz="500" b="1">
-                <a:solidFill>
-                  <a:srgbClr val="0F172A"/>
-                </a:solidFill>
-              </a:rPr>
-              <a:t>REACT SPA + TOKEN BROKER</a:t>
-            </a:r>
-          </a:p>
-          <a:p>
-            <a:pPr algn="l"/>
-            <a:r>
-              <a:rPr sz="500">
-                <a:solidFill>
-                  <a:srgbClr val="0F172A"/>
-                </a:solidFill>
-              </a:rPr>
-              <a:t>Static Web Apps · token mint</a:t>
-            </a:r>
-          </a:p>
-        </p:txBody>
-      </p:sp>
-      <p:sp>
-        <p:nvSpPr>
-          <p:cNvPr id="116" name="Rounded Rectangle 115"/>
-          <p:cNvSpPr/>
-          <p:nvPr/>
-        </p:nvSpPr>
-        <p:spPr>
-          <a:xfrm>
-            <a:off x="7360920" y="1197864"/>
-            <a:ext cx="1691639" cy="274320"/>
-          </a:xfrm>
-          <a:prstGeom prst="roundRect">
-            <a:avLst/>
-          </a:prstGeom>
-          <a:solidFill>
-            <a:srgbClr val="EFF6FF"/>
-          </a:solidFill>
-          <a:ln w="3810">
-            <a:solidFill>
-              <a:srgbClr val="0078D4"/>
-            </a:solidFill>
-          </a:ln>
-          <a:effectLst/>
-        </p:spPr>
-        <p:style>
-          <a:lnRef idx="1">
-            <a:schemeClr val="accent1"/>
-          </a:lnRef>
-          <a:fillRef idx="3">
-            <a:schemeClr val="accent1"/>
-          </a:fillRef>
-          <a:effectRef idx="2">
-            <a:schemeClr val="accent1"/>
-          </a:effectRef>
-          <a:fontRef idx="minor">
-            <a:schemeClr val="lt1"/>
-          </a:fontRef>
-        </p:style>
-        <p:txBody>
-          <a:bodyPr rtlCol="0" anchor="ctr"/>
-          <a:lstStyle/>
-          <a:p>
-            <a:pPr algn="ctr"/>
-          </a:p>
-        </p:txBody>
-      </p:sp>
-      <p:sp>
-        <p:nvSpPr>
-          <p:cNvPr id="117" name="TextBox 116"/>
-          <p:cNvSpPr txBox="1"/>
-          <p:nvPr/>
-        </p:nvSpPr>
-        <p:spPr>
-          <a:xfrm>
-            <a:off x="7379208" y="1197864"/>
-            <a:ext cx="1655064" cy="274320"/>
-          </a:xfrm>
-          <a:prstGeom prst="rect">
-            <a:avLst/>
-          </a:prstGeom>
-          <a:noFill/>
-        </p:spPr>
-        <p:txBody>
-          <a:bodyPr wrap="square" lIns="10000" rIns="10000" tIns="8000" bIns="8000" anchor="ctr">
-            <a:spAutoFit/>
-          </a:bodyPr>
-          <a:lstStyle/>
-          <a:p>
-            <a:pPr algn="l"/>
-            <a:r>
-              <a:rPr sz="800" b="1">
-                <a:solidFill>
-                  <a:srgbClr val="0078D4"/>
-                </a:solidFill>
-              </a:rPr>
-              <a:t>3  </a:t>
-            </a:r>
-            <a:r>
-              <a:rPr sz="500" b="1">
-                <a:solidFill>
-                  <a:srgbClr val="0F172A"/>
-                </a:solidFill>
-              </a:rPr>
-              <a:t>DIRECT LINE BRIDGE</a:t>
-            </a:r>
-          </a:p>
-          <a:p>
-            <a:pPr algn="l"/>
-            <a:r>
-              <a:rPr sz="500">
-                <a:solidFill>
-                  <a:srgbClr val="0F172A"/>
-                </a:solidFill>
-              </a:rPr>
-              <a:t>Bot Service ↔ Copilot Studio</a:t>
-            </a:r>
-          </a:p>
-        </p:txBody>
-      </p:sp>
-      <p:sp>
-        <p:nvSpPr>
-          <p:cNvPr id="118" name="Rounded Rectangle 117"/>
-          <p:cNvSpPr/>
-          <p:nvPr/>
-        </p:nvSpPr>
-        <p:spPr>
-          <a:xfrm>
-            <a:off x="7360920" y="1490472"/>
-            <a:ext cx="1691639" cy="274320"/>
-          </a:xfrm>
-          <a:prstGeom prst="roundRect">
-            <a:avLst/>
-          </a:prstGeom>
-          <a:solidFill>
-            <a:srgbClr val="FAF5FF"/>
-          </a:solidFill>
-          <a:ln w="3810">
-            <a:solidFill>
-              <a:srgbClr val="742774"/>
-            </a:solidFill>
-          </a:ln>
-          <a:effectLst/>
-        </p:spPr>
-        <p:style>
-          <a:lnRef idx="1">
-            <a:schemeClr val="accent1"/>
-          </a:lnRef>
-          <a:fillRef idx="3">
-            <a:schemeClr val="accent1"/>
-          </a:fillRef>
-          <a:effectRef idx="2">
-            <a:schemeClr val="accent1"/>
-          </a:effectRef>
-          <a:fontRef idx="minor">
-            <a:schemeClr val="lt1"/>
-          </a:fontRef>
-        </p:style>
-        <p:txBody>
-          <a:bodyPr rtlCol="0" anchor="ctr"/>
-          <a:lstStyle/>
-          <a:p>
-            <a:pPr algn="ctr"/>
-          </a:p>
-        </p:txBody>
-      </p:sp>
-      <p:sp>
-        <p:nvSpPr>
-          <p:cNvPr id="119" name="TextBox 118"/>
-          <p:cNvSpPr txBox="1"/>
-          <p:nvPr/>
-        </p:nvSpPr>
-        <p:spPr>
-          <a:xfrm>
-            <a:off x="7379208" y="1490472"/>
-            <a:ext cx="1655064" cy="274320"/>
-          </a:xfrm>
-          <a:prstGeom prst="rect">
-            <a:avLst/>
-          </a:prstGeom>
-          <a:noFill/>
-        </p:spPr>
-        <p:txBody>
-          <a:bodyPr wrap="square" lIns="10000" rIns="10000" tIns="8000" bIns="8000" anchor="ctr">
-            <a:spAutoFit/>
-          </a:bodyPr>
-          <a:lstStyle/>
-          <a:p>
-            <a:pPr algn="l"/>
-            <a:r>
-              <a:rPr sz="800" b="1">
-                <a:solidFill>
-                  <a:srgbClr val="742774"/>
-                </a:solidFill>
-              </a:rPr>
-              <a:t>4  </a:t>
-            </a:r>
-            <a:r>
-              <a:rPr sz="500" b="1">
-                <a:solidFill>
-                  <a:srgbClr val="0F172A"/>
-                </a:solidFill>
-              </a:rPr>
-              <a:t>INTAKE AGENT (AI)</a:t>
-            </a:r>
-          </a:p>
-          <a:p>
-            <a:pPr algn="l"/>
-            <a:r>
-              <a:rPr sz="500">
-                <a:solidFill>
-                  <a:srgbClr val="0F172A"/>
-                </a:solidFill>
-              </a:rPr>
-              <a:t>11 loss topics · sub-flows</a:t>
-            </a:r>
-          </a:p>
-        </p:txBody>
-      </p:sp>
-      <p:sp>
-        <p:nvSpPr>
-          <p:cNvPr id="120" name="Rounded Rectangle 119"/>
-          <p:cNvSpPr/>
-          <p:nvPr/>
-        </p:nvSpPr>
-        <p:spPr>
-          <a:xfrm>
-            <a:off x="7360920" y="1783080"/>
-            <a:ext cx="1691639" cy="274320"/>
-          </a:xfrm>
-          <a:prstGeom prst="roundRect">
-            <a:avLst/>
-          </a:prstGeom>
-          <a:solidFill>
-            <a:srgbClr val="FAF5FF"/>
-          </a:solidFill>
-          <a:ln w="3810">
-            <a:solidFill>
-              <a:srgbClr val="742774"/>
-            </a:solidFill>
-          </a:ln>
-          <a:effectLst/>
-        </p:spPr>
-        <p:style>
-          <a:lnRef idx="1">
-            <a:schemeClr val="accent1"/>
-          </a:lnRef>
-          <a:fillRef idx="3">
-            <a:schemeClr val="accent1"/>
-          </a:fillRef>
-          <a:effectRef idx="2">
-            <a:schemeClr val="accent1"/>
-          </a:effectRef>
-          <a:fontRef idx="minor">
-            <a:schemeClr val="lt1"/>
-          </a:fontRef>
-        </p:style>
-        <p:txBody>
-          <a:bodyPr rtlCol="0" anchor="ctr"/>
-          <a:lstStyle/>
-          <a:p>
-            <a:pPr algn="ctr"/>
-          </a:p>
-        </p:txBody>
-      </p:sp>
-      <p:sp>
-        <p:nvSpPr>
-          <p:cNvPr id="121" name="TextBox 120"/>
-          <p:cNvSpPr txBox="1"/>
-          <p:nvPr/>
-        </p:nvSpPr>
-        <p:spPr>
-          <a:xfrm>
-            <a:off x="7379208" y="1783080"/>
-            <a:ext cx="1655064" cy="274320"/>
-          </a:xfrm>
-          <a:prstGeom prst="rect">
-            <a:avLst/>
-          </a:prstGeom>
-          <a:noFill/>
-        </p:spPr>
-        <p:txBody>
-          <a:bodyPr wrap="square" lIns="10000" rIns="10000" tIns="8000" bIns="8000" anchor="ctr">
-            <a:spAutoFit/>
-          </a:bodyPr>
-          <a:lstStyle/>
-          <a:p>
-            <a:pPr algn="l"/>
-            <a:r>
-              <a:rPr sz="800" b="1">
-                <a:solidFill>
-                  <a:srgbClr val="742774"/>
-                </a:solidFill>
-              </a:rPr>
-              <a:t>5  </a:t>
-            </a:r>
-            <a:r>
-              <a:rPr sz="500" b="1">
-                <a:solidFill>
-                  <a:srgbClr val="0F172A"/>
-                </a:solidFill>
-              </a:rPr>
-              <a:t>CREATE_CLAIM</a:t>
-            </a:r>
-          </a:p>
-          <a:p>
-            <a:pPr algn="l"/>
-            <a:r>
-              <a:rPr sz="500">
-                <a:solidFill>
-                  <a:srgbClr val="0F172A"/>
-                </a:solidFill>
-              </a:rPr>
-              <a:t>Inserts Claim + Document</a:t>
-            </a:r>
-          </a:p>
-        </p:txBody>
-      </p:sp>
-      <p:sp>
-        <p:nvSpPr>
-          <p:cNvPr id="122" name="Rounded Rectangle 121"/>
-          <p:cNvSpPr/>
-          <p:nvPr/>
-        </p:nvSpPr>
-        <p:spPr>
-          <a:xfrm>
-            <a:off x="7360920" y="2075688"/>
-            <a:ext cx="1691639" cy="274320"/>
-          </a:xfrm>
-          <a:prstGeom prst="roundRect">
-            <a:avLst/>
-          </a:prstGeom>
-          <a:solidFill>
-            <a:srgbClr val="FAF5FF"/>
-          </a:solidFill>
-          <a:ln w="3810">
-            <a:solidFill>
-              <a:srgbClr val="742774"/>
-            </a:solidFill>
-          </a:ln>
-          <a:effectLst/>
-        </p:spPr>
-        <p:style>
-          <a:lnRef idx="1">
-            <a:schemeClr val="accent1"/>
-          </a:lnRef>
-          <a:fillRef idx="3">
-            <a:schemeClr val="accent1"/>
-          </a:fillRef>
-          <a:effectRef idx="2">
-            <a:schemeClr val="accent1"/>
-          </a:effectRef>
-          <a:fontRef idx="minor">
-            <a:schemeClr val="lt1"/>
-          </a:fontRef>
-        </p:style>
-        <p:txBody>
-          <a:bodyPr rtlCol="0" anchor="ctr"/>
-          <a:lstStyle/>
-          <a:p>
-            <a:pPr algn="ctr"/>
-          </a:p>
-        </p:txBody>
-      </p:sp>
-      <p:sp>
-        <p:nvSpPr>
-          <p:cNvPr id="123" name="TextBox 122"/>
-          <p:cNvSpPr txBox="1"/>
-          <p:nvPr/>
-        </p:nvSpPr>
-        <p:spPr>
-          <a:xfrm>
-            <a:off x="7379208" y="2075688"/>
-            <a:ext cx="1655064" cy="274320"/>
-          </a:xfrm>
-          <a:prstGeom prst="rect">
-            <a:avLst/>
-          </a:prstGeom>
-          <a:noFill/>
-        </p:spPr>
-        <p:txBody>
-          <a:bodyPr wrap="square" lIns="10000" rIns="10000" tIns="8000" bIns="8000" anchor="ctr">
-            <a:spAutoFit/>
-          </a:bodyPr>
-          <a:lstStyle/>
-          <a:p>
-            <a:pPr algn="l"/>
-            <a:r>
-              <a:rPr sz="800" b="1">
-                <a:solidFill>
-                  <a:srgbClr val="742774"/>
-                </a:solidFill>
-              </a:rPr>
-              <a:t>6  </a:t>
-            </a:r>
-            <a:r>
-              <a:rPr sz="500" b="1">
-                <a:solidFill>
-                  <a:srgbClr val="0F172A"/>
-                </a:solidFill>
-              </a:rPr>
-              <a:t>MASTER ORCHESTRATION</a:t>
-            </a:r>
-          </a:p>
-          <a:p>
-            <a:pPr algn="l"/>
-            <a:r>
-              <a:rPr sz="500">
-                <a:solidFill>
-                  <a:srgbClr val="0F172A"/>
-                </a:solidFill>
-              </a:rPr>
-              <a:t>Trigger on Claim · fan-out</a:t>
-            </a:r>
-          </a:p>
-        </p:txBody>
-      </p:sp>
-      <p:sp>
-        <p:nvSpPr>
-          <p:cNvPr id="124" name="Rounded Rectangle 123"/>
-          <p:cNvSpPr/>
-          <p:nvPr/>
-        </p:nvSpPr>
-        <p:spPr>
-          <a:xfrm>
-            <a:off x="7360920" y="2368296"/>
-            <a:ext cx="1691639" cy="274320"/>
-          </a:xfrm>
-          <a:prstGeom prst="roundRect">
-            <a:avLst/>
-          </a:prstGeom>
-          <a:solidFill>
-            <a:srgbClr val="EFF6FF"/>
-          </a:solidFill>
-          <a:ln w="3810">
-            <a:solidFill>
-              <a:srgbClr val="0078D4"/>
-            </a:solidFill>
-          </a:ln>
-          <a:effectLst/>
-        </p:spPr>
-        <p:style>
-          <a:lnRef idx="1">
-            <a:schemeClr val="accent1"/>
-          </a:lnRef>
-          <a:fillRef idx="3">
-            <a:schemeClr val="accent1"/>
-          </a:fillRef>
-          <a:effectRef idx="2">
-            <a:schemeClr val="accent1"/>
-          </a:effectRef>
-          <a:fontRef idx="minor">
-            <a:schemeClr val="lt1"/>
-          </a:fontRef>
-        </p:style>
-        <p:txBody>
-          <a:bodyPr rtlCol="0" anchor="ctr"/>
-          <a:lstStyle/>
-          <a:p>
-            <a:pPr algn="ctr"/>
-          </a:p>
-        </p:txBody>
-      </p:sp>
-      <p:sp>
-        <p:nvSpPr>
-          <p:cNvPr id="125" name="TextBox 124"/>
-          <p:cNvSpPr txBox="1"/>
-          <p:nvPr/>
-        </p:nvSpPr>
-        <p:spPr>
-          <a:xfrm>
-            <a:off x="7379208" y="2368296"/>
-            <a:ext cx="1655064" cy="274320"/>
-          </a:xfrm>
-          <a:prstGeom prst="rect">
-            <a:avLst/>
-          </a:prstGeom>
-          <a:noFill/>
-        </p:spPr>
-        <p:txBody>
-          <a:bodyPr wrap="square" lIns="10000" rIns="10000" tIns="8000" bIns="8000" anchor="ctr">
-            <a:spAutoFit/>
-          </a:bodyPr>
-          <a:lstStyle/>
-          <a:p>
-            <a:pPr algn="l"/>
-            <a:r>
-              <a:rPr sz="800" b="1">
-                <a:solidFill>
-                  <a:srgbClr val="0078D4"/>
-                </a:solidFill>
-              </a:rPr>
-              <a:t>7  </a:t>
-            </a:r>
-            <a:r>
-              <a:rPr sz="500" b="1">
-                <a:solidFill>
-                  <a:srgbClr val="0F172A"/>
-                </a:solidFill>
-              </a:rPr>
-              <a:t>EXTRACTION AGENT</a:t>
-            </a:r>
-          </a:p>
-          <a:p>
-            <a:pPr algn="l"/>
-            <a:r>
-              <a:rPr sz="500">
-                <a:solidFill>
-                  <a:srgbClr val="0F172A"/>
-                </a:solidFill>
-              </a:rPr>
-              <a:t>Doc Intel + GPT-4o Vision</a:t>
-            </a:r>
-          </a:p>
-        </p:txBody>
-      </p:sp>
-      <p:sp>
-        <p:nvSpPr>
-          <p:cNvPr id="126" name="Rounded Rectangle 125"/>
-          <p:cNvSpPr/>
-          <p:nvPr/>
-        </p:nvSpPr>
-        <p:spPr>
-          <a:xfrm>
-            <a:off x="7360920" y="2660903"/>
-            <a:ext cx="1691639" cy="274320"/>
-          </a:xfrm>
-          <a:prstGeom prst="roundRect">
-            <a:avLst/>
-          </a:prstGeom>
-          <a:solidFill>
-            <a:srgbClr val="EFF6FF"/>
-          </a:solidFill>
-          <a:ln w="3810">
-            <a:solidFill>
-              <a:srgbClr val="0078D4"/>
-            </a:solidFill>
-          </a:ln>
-          <a:effectLst/>
-        </p:spPr>
-        <p:style>
-          <a:lnRef idx="1">
-            <a:schemeClr val="accent1"/>
-          </a:lnRef>
-          <a:fillRef idx="3">
-            <a:schemeClr val="accent1"/>
-          </a:fillRef>
-          <a:effectRef idx="2">
-            <a:schemeClr val="accent1"/>
-          </a:effectRef>
-          <a:fontRef idx="minor">
-            <a:schemeClr val="lt1"/>
-          </a:fontRef>
-        </p:style>
-        <p:txBody>
-          <a:bodyPr rtlCol="0" anchor="ctr"/>
-          <a:lstStyle/>
-          <a:p>
-            <a:pPr algn="ctr"/>
-          </a:p>
-        </p:txBody>
-      </p:sp>
-      <p:sp>
-        <p:nvSpPr>
-          <p:cNvPr id="127" name="TextBox 126"/>
-          <p:cNvSpPr txBox="1"/>
-          <p:nvPr/>
-        </p:nvSpPr>
-        <p:spPr>
-          <a:xfrm>
-            <a:off x="7379208" y="2660903"/>
-            <a:ext cx="1655064" cy="274320"/>
-          </a:xfrm>
-          <a:prstGeom prst="rect">
-            <a:avLst/>
-          </a:prstGeom>
-          <a:noFill/>
-        </p:spPr>
-        <p:txBody>
-          <a:bodyPr wrap="square" lIns="10000" rIns="10000" tIns="8000" bIns="8000" anchor="ctr">
-            <a:spAutoFit/>
-          </a:bodyPr>
-          <a:lstStyle/>
-          <a:p>
-            <a:pPr algn="l"/>
-            <a:r>
-              <a:rPr sz="800" b="1">
-                <a:solidFill>
-                  <a:srgbClr val="0078D4"/>
-                </a:solidFill>
-              </a:rPr>
-              <a:t>8  </a:t>
-            </a:r>
-            <a:r>
-              <a:rPr sz="500" b="1">
-                <a:solidFill>
-                  <a:srgbClr val="0F172A"/>
-                </a:solidFill>
-              </a:rPr>
-              <a:t>POLICY AGENT</a:t>
-            </a:r>
-          </a:p>
-          <a:p>
-            <a:pPr algn="l"/>
-            <a:r>
-              <a:rPr sz="500">
-                <a:solidFill>
-                  <a:srgbClr val="0F172A"/>
-                </a:solidFill>
-              </a:rPr>
-              <a:t>AI Search vector RAG</a:t>
-            </a:r>
-          </a:p>
-        </p:txBody>
-      </p:sp>
-      <p:sp>
-        <p:nvSpPr>
-          <p:cNvPr id="128" name="Rounded Rectangle 127"/>
-          <p:cNvSpPr/>
-          <p:nvPr/>
-        </p:nvSpPr>
-        <p:spPr>
-          <a:xfrm>
-            <a:off x="7360920" y="2953511"/>
-            <a:ext cx="1691639" cy="274320"/>
-          </a:xfrm>
-          <a:prstGeom prst="roundRect">
-            <a:avLst/>
-          </a:prstGeom>
-          <a:solidFill>
-            <a:srgbClr val="EFF6FF"/>
-          </a:solidFill>
-          <a:ln w="3810">
-            <a:solidFill>
-              <a:srgbClr val="0078D4"/>
-            </a:solidFill>
-          </a:ln>
-          <a:effectLst/>
-        </p:spPr>
-        <p:style>
-          <a:lnRef idx="1">
-            <a:schemeClr val="accent1"/>
-          </a:lnRef>
-          <a:fillRef idx="3">
-            <a:schemeClr val="accent1"/>
-          </a:fillRef>
-          <a:effectRef idx="2">
-            <a:schemeClr val="accent1"/>
-          </a:effectRef>
-          <a:fontRef idx="minor">
-            <a:schemeClr val="lt1"/>
-          </a:fontRef>
-        </p:style>
-        <p:txBody>
-          <a:bodyPr rtlCol="0" anchor="ctr"/>
-          <a:lstStyle/>
-          <a:p>
-            <a:pPr algn="ctr"/>
-          </a:p>
-        </p:txBody>
-      </p:sp>
-      <p:sp>
-        <p:nvSpPr>
-          <p:cNvPr id="129" name="TextBox 128"/>
-          <p:cNvSpPr txBox="1"/>
-          <p:nvPr/>
-        </p:nvSpPr>
-        <p:spPr>
-          <a:xfrm>
-            <a:off x="7379208" y="2953511"/>
-            <a:ext cx="1655064" cy="274320"/>
-          </a:xfrm>
-          <a:prstGeom prst="rect">
-            <a:avLst/>
-          </a:prstGeom>
-          <a:noFill/>
-        </p:spPr>
-        <p:txBody>
-          <a:bodyPr wrap="square" lIns="10000" rIns="10000" tIns="8000" bIns="8000" anchor="ctr">
-            <a:spAutoFit/>
-          </a:bodyPr>
-          <a:lstStyle/>
-          <a:p>
-            <a:pPr algn="l"/>
-            <a:r>
-              <a:rPr sz="800" b="1">
-                <a:solidFill>
-                  <a:srgbClr val="0078D4"/>
-                </a:solidFill>
-              </a:rPr>
-              <a:t>9  </a:t>
-            </a:r>
-            <a:r>
-              <a:rPr sz="500" b="1">
-                <a:solidFill>
-                  <a:srgbClr val="0F172A"/>
-                </a:solidFill>
-              </a:rPr>
-              <a:t>VALIDATION AGENT</a:t>
-            </a:r>
-          </a:p>
-          <a:p>
-            <a:pPr algn="l"/>
-            <a:r>
-              <a:rPr sz="500">
-                <a:solidFill>
-                  <a:srgbClr val="0F172A"/>
-                </a:solidFill>
-              </a:rPr>
-              <a:t>7 ext checks parallel</a:t>
-            </a:r>
-          </a:p>
-        </p:txBody>
-      </p:sp>
-      <p:sp>
-        <p:nvSpPr>
-          <p:cNvPr id="130" name="Rounded Rectangle 129"/>
-          <p:cNvSpPr/>
-          <p:nvPr/>
-        </p:nvSpPr>
-        <p:spPr>
-          <a:xfrm>
-            <a:off x="7360920" y="3246119"/>
-            <a:ext cx="1691639" cy="274320"/>
-          </a:xfrm>
-          <a:prstGeom prst="roundRect">
-            <a:avLst/>
-          </a:prstGeom>
-          <a:solidFill>
-            <a:srgbClr val="EFF6FF"/>
-          </a:solidFill>
-          <a:ln w="3810">
-            <a:solidFill>
-              <a:srgbClr val="0078D4"/>
-            </a:solidFill>
-          </a:ln>
-          <a:effectLst/>
-        </p:spPr>
-        <p:style>
-          <a:lnRef idx="1">
-            <a:schemeClr val="accent1"/>
-          </a:lnRef>
-          <a:fillRef idx="3">
-            <a:schemeClr val="accent1"/>
-          </a:fillRef>
-          <a:effectRef idx="2">
-            <a:schemeClr val="accent1"/>
-          </a:effectRef>
-          <a:fontRef idx="minor">
-            <a:schemeClr val="lt1"/>
-          </a:fontRef>
-        </p:style>
-        <p:txBody>
-          <a:bodyPr rtlCol="0" anchor="ctr"/>
-          <a:lstStyle/>
-          <a:p>
-            <a:pPr algn="ctr"/>
-          </a:p>
-        </p:txBody>
-      </p:sp>
-      <p:sp>
-        <p:nvSpPr>
-          <p:cNvPr id="131" name="TextBox 130"/>
-          <p:cNvSpPr txBox="1"/>
-          <p:nvPr/>
-        </p:nvSpPr>
-        <p:spPr>
-          <a:xfrm>
-            <a:off x="7379208" y="3246119"/>
-            <a:ext cx="1655064" cy="274320"/>
-          </a:xfrm>
-          <a:prstGeom prst="rect">
-            <a:avLst/>
-          </a:prstGeom>
-          <a:noFill/>
-        </p:spPr>
-        <p:txBody>
-          <a:bodyPr wrap="square" lIns="10000" rIns="10000" tIns="8000" bIns="8000" anchor="ctr">
-            <a:spAutoFit/>
-          </a:bodyPr>
-          <a:lstStyle/>
-          <a:p>
-            <a:pPr algn="l"/>
-            <a:r>
-              <a:rPr sz="800" b="1">
-                <a:solidFill>
-                  <a:srgbClr val="0078D4"/>
-                </a:solidFill>
-              </a:rPr>
-              <a:t>10  </a:t>
-            </a:r>
-            <a:r>
-              <a:rPr sz="500" b="1">
-                <a:solidFill>
-                  <a:srgbClr val="0F172A"/>
-                </a:solidFill>
-              </a:rPr>
-              <a:t>ADJUDICATION (GPT-4.1)</a:t>
-            </a:r>
-          </a:p>
-          <a:p>
-            <a:pPr algn="l"/>
-            <a:r>
-              <a:rPr sz="500">
-                <a:solidFill>
-                  <a:srgbClr val="0F172A"/>
-                </a:solidFill>
-              </a:rPr>
-              <a:t>Decides + assigns tier</a:t>
-            </a:r>
-          </a:p>
-        </p:txBody>
-      </p:sp>
-      <p:sp>
-        <p:nvSpPr>
-          <p:cNvPr id="132" name="Rounded Rectangle 131"/>
-          <p:cNvSpPr/>
-          <p:nvPr/>
-        </p:nvSpPr>
-        <p:spPr>
-          <a:xfrm>
-            <a:off x="7360920" y="3538727"/>
-            <a:ext cx="1691639" cy="274320"/>
-          </a:xfrm>
-          <a:prstGeom prst="roundRect">
-            <a:avLst/>
-          </a:prstGeom>
-          <a:solidFill>
-            <a:srgbClr val="F0FDF4"/>
-          </a:solidFill>
-          <a:ln w="3810">
-            <a:solidFill>
-              <a:srgbClr val="107C10"/>
-            </a:solidFill>
-          </a:ln>
-          <a:effectLst/>
-        </p:spPr>
-        <p:style>
-          <a:lnRef idx="1">
-            <a:schemeClr val="accent1"/>
-          </a:lnRef>
-          <a:fillRef idx="3">
-            <a:schemeClr val="accent1"/>
-          </a:fillRef>
-          <a:effectRef idx="2">
-            <a:schemeClr val="accent1"/>
-          </a:effectRef>
-          <a:fontRef idx="minor">
-            <a:schemeClr val="lt1"/>
-          </a:fontRef>
-        </p:style>
-        <p:txBody>
-          <a:bodyPr rtlCol="0" anchor="ctr"/>
-          <a:lstStyle/>
-          <a:p>
-            <a:pPr algn="ctr"/>
-          </a:p>
-        </p:txBody>
-      </p:sp>
-      <p:sp>
-        <p:nvSpPr>
-          <p:cNvPr id="133" name="TextBox 132"/>
-          <p:cNvSpPr txBox="1"/>
-          <p:nvPr/>
-        </p:nvSpPr>
-        <p:spPr>
-          <a:xfrm>
-            <a:off x="7379208" y="3538727"/>
-            <a:ext cx="1655064" cy="274320"/>
-          </a:xfrm>
-          <a:prstGeom prst="rect">
-            <a:avLst/>
-          </a:prstGeom>
-          <a:noFill/>
-        </p:spPr>
-        <p:txBody>
-          <a:bodyPr wrap="square" lIns="10000" rIns="10000" tIns="8000" bIns="8000" anchor="ctr">
-            <a:spAutoFit/>
-          </a:bodyPr>
-          <a:lstStyle/>
-          <a:p>
-            <a:pPr algn="l"/>
-            <a:r>
-              <a:rPr sz="800" b="1">
-                <a:solidFill>
-                  <a:srgbClr val="107C10"/>
-                </a:solidFill>
-              </a:rPr>
-              <a:t>11  </a:t>
-            </a:r>
-            <a:r>
-              <a:rPr sz="500" b="1">
-                <a:solidFill>
-                  <a:srgbClr val="0F172A"/>
-                </a:solidFill>
-              </a:rPr>
-              <a:t>TIER ROUTER</a:t>
-            </a:r>
-          </a:p>
-          <a:p>
-            <a:pPr algn="l"/>
-            <a:r>
-              <a:rPr sz="500">
-                <a:solidFill>
-                  <a:srgbClr val="0F172A"/>
-                </a:solidFill>
-              </a:rPr>
-              <a:t>T1 auto · T2 adj · T3 CSR</a:t>
-            </a:r>
-          </a:p>
-        </p:txBody>
-      </p:sp>
-      <p:sp>
-        <p:nvSpPr>
-          <p:cNvPr id="134" name="Rounded Rectangle 133"/>
-          <p:cNvSpPr/>
-          <p:nvPr/>
-        </p:nvSpPr>
-        <p:spPr>
-          <a:xfrm>
-            <a:off x="7360920" y="3831335"/>
-            <a:ext cx="1691639" cy="274320"/>
-          </a:xfrm>
-          <a:prstGeom prst="roundRect">
-            <a:avLst/>
-          </a:prstGeom>
-          <a:solidFill>
-            <a:srgbClr val="FAF5FF"/>
-          </a:solidFill>
-          <a:ln w="3810">
-            <a:solidFill>
-              <a:srgbClr val="742774"/>
-            </a:solidFill>
-          </a:ln>
-          <a:effectLst/>
-        </p:spPr>
-        <p:style>
-          <a:lnRef idx="1">
-            <a:schemeClr val="accent1"/>
-          </a:lnRef>
-          <a:fillRef idx="3">
-            <a:schemeClr val="accent1"/>
-          </a:fillRef>
-          <a:effectRef idx="2">
-            <a:schemeClr val="accent1"/>
-          </a:effectRef>
-          <a:fontRef idx="minor">
-            <a:schemeClr val="lt1"/>
-          </a:fontRef>
-        </p:style>
-        <p:txBody>
-          <a:bodyPr rtlCol="0" anchor="ctr"/>
-          <a:lstStyle/>
-          <a:p>
-            <a:pPr algn="ctr"/>
-          </a:p>
-        </p:txBody>
-      </p:sp>
-      <p:sp>
-        <p:nvSpPr>
-          <p:cNvPr id="135" name="TextBox 134"/>
-          <p:cNvSpPr txBox="1"/>
-          <p:nvPr/>
-        </p:nvSpPr>
-        <p:spPr>
-          <a:xfrm>
-            <a:off x="7379208" y="3831335"/>
-            <a:ext cx="1655064" cy="274320"/>
-          </a:xfrm>
-          <a:prstGeom prst="rect">
-            <a:avLst/>
-          </a:prstGeom>
-          <a:noFill/>
-        </p:spPr>
-        <p:txBody>
-          <a:bodyPr wrap="square" lIns="10000" rIns="10000" tIns="8000" bIns="8000" anchor="ctr">
-            <a:spAutoFit/>
-          </a:bodyPr>
-          <a:lstStyle/>
-          <a:p>
-            <a:pPr algn="l"/>
-            <a:r>
-              <a:rPr sz="800" b="1">
-                <a:solidFill>
-                  <a:srgbClr val="742774"/>
-                </a:solidFill>
-              </a:rPr>
-              <a:t>12  </a:t>
-            </a:r>
-            <a:r>
-              <a:rPr sz="500" b="1">
-                <a:solidFill>
-                  <a:srgbClr val="0F172A"/>
-                </a:solidFill>
-              </a:rPr>
-              <a:t>EXPLANATION (AI)</a:t>
-            </a:r>
-          </a:p>
-          <a:p>
-            <a:pPr algn="l"/>
-            <a:r>
-              <a:rPr sz="500">
-                <a:solidFill>
-                  <a:srgbClr val="0F172A"/>
-                </a:solidFill>
-              </a:rPr>
-              <a:t>Plain-English rationale</a:t>
-            </a:r>
-          </a:p>
-        </p:txBody>
-      </p:sp>
-      <p:sp>
-        <p:nvSpPr>
-          <p:cNvPr id="136" name="Rounded Rectangle 135"/>
-          <p:cNvSpPr/>
-          <p:nvPr/>
-        </p:nvSpPr>
-        <p:spPr>
-          <a:xfrm>
-            <a:off x="7360920" y="4123944"/>
-            <a:ext cx="1691639" cy="274320"/>
-          </a:xfrm>
-          <a:prstGeom prst="roundRect">
-            <a:avLst/>
-          </a:prstGeom>
-          <a:solidFill>
-            <a:srgbClr val="F0FDF4"/>
-          </a:solidFill>
-          <a:ln w="3810">
-            <a:solidFill>
-              <a:srgbClr val="107C10"/>
-            </a:solidFill>
-          </a:ln>
-          <a:effectLst/>
-        </p:spPr>
-        <p:style>
-          <a:lnRef idx="1">
-            <a:schemeClr val="accent1"/>
-          </a:lnRef>
-          <a:fillRef idx="3">
-            <a:schemeClr val="accent1"/>
-          </a:fillRef>
-          <a:effectRef idx="2">
-            <a:schemeClr val="accent1"/>
-          </a:effectRef>
-          <a:fontRef idx="minor">
-            <a:schemeClr val="lt1"/>
-          </a:fontRef>
-        </p:style>
-        <p:txBody>
-          <a:bodyPr rtlCol="0" anchor="ctr"/>
-          <a:lstStyle/>
-          <a:p>
-            <a:pPr algn="ctr"/>
-          </a:p>
-        </p:txBody>
-      </p:sp>
-      <p:sp>
-        <p:nvSpPr>
-          <p:cNvPr id="137" name="TextBox 136"/>
-          <p:cNvSpPr txBox="1"/>
-          <p:nvPr/>
-        </p:nvSpPr>
-        <p:spPr>
-          <a:xfrm>
-            <a:off x="7379208" y="4123944"/>
-            <a:ext cx="1655064" cy="274320"/>
-          </a:xfrm>
-          <a:prstGeom prst="rect">
-            <a:avLst/>
-          </a:prstGeom>
-          <a:noFill/>
-        </p:spPr>
-        <p:txBody>
-          <a:bodyPr wrap="square" lIns="10000" rIns="10000" tIns="8000" bIns="8000" anchor="ctr">
-            <a:spAutoFit/>
-          </a:bodyPr>
-          <a:lstStyle/>
-          <a:p>
-            <a:pPr algn="l"/>
-            <a:r>
-              <a:rPr sz="800" b="1">
-                <a:solidFill>
-                  <a:srgbClr val="107C10"/>
-                </a:solidFill>
-              </a:rPr>
-              <a:t>13  </a:t>
-            </a:r>
-            <a:r>
-              <a:rPr sz="500" b="1">
-                <a:solidFill>
-                  <a:srgbClr val="0F172A"/>
-                </a:solidFill>
-              </a:rPr>
-              <a:t>NOTIFY_CUSTOMER</a:t>
-            </a:r>
-          </a:p>
-          <a:p>
-            <a:pPr algn="l"/>
-            <a:r>
-              <a:rPr sz="500">
-                <a:solidFill>
-                  <a:srgbClr val="0F172A"/>
-                </a:solidFill>
-              </a:rPr>
-              <a:t>Reply on original channel</a:t>
-            </a:r>
-          </a:p>
-        </p:txBody>
-      </p:sp>
-      <p:sp>
-        <p:nvSpPr>
-          <p:cNvPr id="138" name="Rounded Rectangle 137"/>
-          <p:cNvSpPr/>
-          <p:nvPr/>
-        </p:nvSpPr>
-        <p:spPr>
-          <a:xfrm>
-            <a:off x="7360920" y="4453128"/>
-            <a:ext cx="1691639" cy="365760"/>
-          </a:xfrm>
-          <a:prstGeom prst="roundRect">
-            <a:avLst/>
-          </a:prstGeom>
-          <a:solidFill>
-            <a:srgbClr val="FEF3C7"/>
-          </a:solidFill>
-          <a:ln w="12700">
-            <a:solidFill>
-              <a:srgbClr val="D99416"/>
-            </a:solidFill>
-          </a:ln>
-          <a:effectLst/>
-        </p:spPr>
-        <p:style>
-          <a:lnRef idx="1">
-            <a:schemeClr val="accent1"/>
-          </a:lnRef>
-          <a:fillRef idx="3">
-            <a:schemeClr val="accent1"/>
-          </a:fillRef>
-          <a:effectRef idx="2">
-            <a:schemeClr val="accent1"/>
-          </a:effectRef>
-          <a:fontRef idx="minor">
-            <a:schemeClr val="lt1"/>
-          </a:fontRef>
-        </p:style>
-        <p:txBody>
-          <a:bodyPr rtlCol="0" anchor="ctr"/>
-          <a:lstStyle/>
-          <a:p>
-            <a:pPr algn="ctr"/>
-          </a:p>
-        </p:txBody>
-      </p:sp>
-      <p:sp>
-        <p:nvSpPr>
-          <p:cNvPr id="139" name="TextBox 138"/>
-          <p:cNvSpPr txBox="1"/>
-          <p:nvPr/>
-        </p:nvSpPr>
-        <p:spPr>
-          <a:xfrm>
-            <a:off x="7379208" y="4453128"/>
-            <a:ext cx="1655064" cy="365760"/>
-          </a:xfrm>
-          <a:prstGeom prst="rect">
-            <a:avLst/>
-          </a:prstGeom>
-          <a:noFill/>
-        </p:spPr>
-        <p:txBody>
-          <a:bodyPr wrap="square" lIns="10000" rIns="10000" tIns="8000" bIns="8000">
-            <a:spAutoFit/>
-          </a:bodyPr>
-          <a:lstStyle/>
-          <a:p>
-            <a:pPr algn="l"/>
-            <a:r>
-              <a:rPr sz="700" b="1">
-                <a:solidFill>
-                  <a:srgbClr val="92400E"/>
-                </a:solidFill>
-              </a:rPr>
-              <a:t>🛡 GLASS BOX</a:t>
-            </a:r>
-          </a:p>
-          <a:p>
-            <a:pPr algn="l"/>
-            <a:r>
-              <a:rPr sz="500">
-                <a:solidFill>
-                  <a:srgbClr val="92400E"/>
-                </a:solidFill>
-              </a:rPr>
-              <a:t>Every AI step → 1 row in Decision_Rationale</a:t>
-            </a:r>
-          </a:p>
-        </p:txBody>
-      </p:sp>
-      <p:sp>
-        <p:nvSpPr>
-          <p:cNvPr id="140" name="TextBox 139"/>
-          <p:cNvSpPr txBox="1"/>
-          <p:nvPr/>
-        </p:nvSpPr>
-        <p:spPr>
-          <a:xfrm>
-            <a:off x="73152" y="4983480"/>
-            <a:ext cx="9006840" cy="137160"/>
-          </a:xfrm>
-          <a:prstGeom prst="rect">
-            <a:avLst/>
-          </a:prstGeom>
-          <a:noFill/>
-        </p:spPr>
-        <p:txBody>
-          <a:bodyPr wrap="square" lIns="15000" rIns="15000" tIns="5000" bIns="5000" anchor="ctr">
-            <a:spAutoFit/>
-          </a:bodyPr>
-          <a:lstStyle/>
-          <a:p>
-            <a:pPr algn="l"/>
-            <a:r>
-              <a:rPr sz="600" b="0" i="1">
-                <a:solidFill>
-                  <a:srgbClr val="5A6680"/>
-                </a:solidFill>
-              </a:rPr>
-              <a:t>ARROWS:  red = runtime flow  ·  red dashed = loop back  ·  black = Tier-2/3 human branches  ·  gold dashed = audit write</a:t>
-            </a:r>
-          </a:p>
-        </p:txBody>
-      </p:sp>
+        </p:spPr>
+      </p:pic>
     </p:spTree>
   </p:cSld>
   <p:clrMapOvr>
@@ -15767,34 +9944,32 @@
       </p:grpSpPr>
       <p:sp>
         <p:nvSpPr>
-          <p:cNvPr id="2" name="Text 0"/>
-          <p:cNvSpPr/>
+          <p:cNvPr id="2" name="TextBox 1"/>
+          <p:cNvSpPr txBox="1"/>
           <p:nvPr/>
         </p:nvSpPr>
         <p:spPr>
           <a:xfrm>
             <a:off x="365760" y="164592"/>
-            <a:ext cx="8412480" cy="530352"/>
+            <a:ext cx="8412480" cy="411480"/>
           </a:xfrm>
           <a:prstGeom prst="rect">
             <a:avLst/>
           </a:prstGeom>
           <a:noFill/>
-          <a:ln/>
         </p:spPr>
         <p:txBody>
-          <a:bodyPr wrap="square" lIns="0" tIns="0" rIns="0" bIns="0" rtlCol="0" anchor="ctr"/>
+          <a:bodyPr wrap="none" tIns="0" bIns="0">
+            <a:spAutoFit/>
+          </a:bodyPr>
           <a:lstStyle/>
           <a:p>
-            <a:pPr marL="0" indent="0">
-              <a:buNone/>
-            </a:pPr>
-            <a:r>
-              <a:rPr lang="en-US" sz="2400" b="1" dirty="0">
+            <a:pPr algn="l"/>
+            <a:r>
+              <a:rPr sz="2200" b="1" i="0">
                 <a:solidFill>
-                  <a:srgbClr val="1A1A1A"/>
+                  <a:srgbClr val="0A2540"/>
                 </a:solidFill>
-                <a:latin typeface="Calibri"/>
               </a:rPr>
               <a:t>References &amp; Supporting Material</a:t>
             </a:r>
@@ -15803,44 +9978,48 @@
       </p:sp>
       <p:sp>
         <p:nvSpPr>
-          <p:cNvPr id="3" name="Shape 1"/>
-          <p:cNvSpPr/>
-          <p:nvPr/>
-        </p:nvSpPr>
-        <p:spPr>
-          <a:xfrm>
-            <a:off x="365760" y="758952"/>
-            <a:ext cx="8412480" cy="0"/>
-          </a:xfrm>
-          <a:prstGeom prst="line">
+          <p:cNvPr id="3" name="TextBox 2"/>
+          <p:cNvSpPr txBox="1"/>
+          <p:nvPr/>
+        </p:nvSpPr>
+        <p:spPr>
+          <a:xfrm>
+            <a:off x="365760" y="621792"/>
+            <a:ext cx="8412480" cy="228600"/>
+          </a:xfrm>
+          <a:prstGeom prst="rect">
             <a:avLst/>
           </a:prstGeom>
           <a:noFill/>
-          <a:ln w="31750">
-            <a:solidFill>
-              <a:srgbClr val="B85042"/>
-            </a:solidFill>
-            <a:prstDash val="solid"/>
-          </a:ln>
         </p:spPr>
         <p:txBody>
-          <a:bodyPr/>
+          <a:bodyPr wrap="none" tIns="0" bIns="0">
+            <a:spAutoFit/>
+          </a:bodyPr>
           <a:lstStyle/>
           <a:p>
-            <a:endParaRPr dirty="0"/>
+            <a:pPr algn="l"/>
+            <a:r>
+              <a:rPr sz="1000" b="0" i="1">
+                <a:solidFill>
+                  <a:srgbClr val="5A6680"/>
+                </a:solidFill>
+              </a:rPr>
+              <a:t>All artifacts live in two places — public GitHub repo (read-only) and Confluence (PM space, access on request).</a:t>
+            </a:r>
           </a:p>
         </p:txBody>
       </p:sp>
       <p:sp>
         <p:nvSpPr>
-          <p:cNvPr id="200" name="LeftCol"/>
+          <p:cNvPr id="4" name="TextBox 3"/>
           <p:cNvSpPr txBox="1"/>
           <p:nvPr/>
         </p:nvSpPr>
         <p:spPr>
           <a:xfrm>
-            <a:off x="381000" y="914400"/>
-            <a:ext cx="4064000" cy="5842000"/>
+            <a:off x="365760" y="1005840"/>
+            <a:ext cx="4160520" cy="256032"/>
           </a:xfrm>
           <a:prstGeom prst="rect">
             <a:avLst/>
@@ -15848,297 +10027,394 @@
           <a:noFill/>
         </p:spPr>
         <p:txBody>
-          <a:bodyPr wrap="square" lIns="36000" tIns="18000" rIns="36000" bIns="18000" anchor="t"/>
+          <a:bodyPr wrap="none" tIns="0">
+            <a:spAutoFit/>
+          </a:bodyPr>
           <a:lstStyle/>
           <a:p>
-            <a:pPr marL="0" indent="0">
-              <a:spcBef>
-                <a:spcPts val="400"/>
-              </a:spcBef>
-              <a:spcAft>
-                <a:spcPts val="150"/>
-              </a:spcAft>
-              <a:buNone/>
-            </a:pPr>
-            <a:r>
-              <a:rPr lang="en-US" sz="1100" b="1" dirty="0">
+            <a:pPr algn="l"/>
+            <a:r>
+              <a:rPr sz="1200" b="1" i="0">
                 <a:solidFill>
-                  <a:srgbClr val="0078D4"/>
+                  <a:srgbClr val="0A2540"/>
                 </a:solidFill>
-                <a:latin typeface="Calibri"/>
-              </a:rPr>
-              <a:t>Repository</a:t>
-            </a:r>
-          </a:p>
-          <a:p>
-            <a:pPr marL="0" indent="0">
-              <a:lnSpc>
-                <a:spcPct val="110000"/>
-              </a:lnSpc>
-              <a:buNone/>
-            </a:pPr>
-            <a:r>
-              <a:rPr lang="en-US" sz="1000" dirty="0">
+              </a:rPr>
+              <a:t>📁  GitHub Repository  (public, no access needed)</a:t>
+            </a:r>
+          </a:p>
+        </p:txBody>
+      </p:sp>
+      <p:sp>
+        <p:nvSpPr>
+          <p:cNvPr id="5" name="TextBox 4"/>
+          <p:cNvSpPr txBox="1"/>
+          <p:nvPr/>
+        </p:nvSpPr>
+        <p:spPr>
+          <a:xfrm>
+            <a:off x="365760" y="1280160"/>
+            <a:ext cx="4160520" cy="228600"/>
+          </a:xfrm>
+          <a:prstGeom prst="rect">
+            <a:avLst/>
+          </a:prstGeom>
+          <a:noFill/>
+        </p:spPr>
+        <p:txBody>
+          <a:bodyPr wrap="none" tIns="0">
+            <a:spAutoFit/>
+          </a:bodyPr>
+          <a:lstStyle/>
+          <a:p>
+            <a:pPr algn="l"/>
+            <a:r>
+              <a:rPr sz="1100" b="1" u="sng">
                 <a:solidFill>
-                  <a:srgbClr val="333333"/>
+                  <a:srgbClr val="0563C1"/>
                 </a:solidFill>
-                <a:latin typeface="Calibri"/>
+                <a:hlinkClick r:id="rId3"/>
               </a:rPr>
               <a:t>github.com/Sameet1308/Hack2future</a:t>
             </a:r>
           </a:p>
-          <a:p>
-            <a:pPr marL="0" indent="0">
-              <a:spcBef>
-                <a:spcPts val="400"/>
-              </a:spcBef>
-              <a:spcAft>
-                <a:spcPts val="150"/>
-              </a:spcAft>
-              <a:buNone/>
-            </a:pPr>
-            <a:r>
-              <a:rPr lang="en-US" sz="1100" b="1" dirty="0">
+        </p:txBody>
+      </p:sp>
+      <p:sp>
+        <p:nvSpPr>
+          <p:cNvPr id="6" name="TextBox 5"/>
+          <p:cNvSpPr txBox="1"/>
+          <p:nvPr/>
+        </p:nvSpPr>
+        <p:spPr>
+          <a:xfrm>
+            <a:off x="365760" y="1600200"/>
+            <a:ext cx="4160520" cy="228600"/>
+          </a:xfrm>
+          <a:prstGeom prst="rect">
+            <a:avLst/>
+          </a:prstGeom>
+          <a:noFill/>
+        </p:spPr>
+        <p:txBody>
+          <a:bodyPr wrap="none" tIns="0">
+            <a:spAutoFit/>
+          </a:bodyPr>
+          <a:lstStyle/>
+          <a:p>
+            <a:pPr algn="l"/>
+            <a:r>
+              <a:rPr sz="1000" b="1" i="0">
                 <a:solidFill>
-                  <a:srgbClr val="0078D4"/>
+                  <a:srgbClr val="0A2540"/>
                 </a:solidFill>
-                <a:latin typeface="Calibri"/>
-              </a:rPr>
-              <a:t>Confluence — Product Management space</a:t>
-            </a:r>
-          </a:p>
-          <a:p>
-            <a:pPr marL="114300" indent="-114300">
-              <a:lnSpc>
-                <a:spcPct val="110000"/>
-              </a:lnSpc>
-              <a:buFont typeface="Arial"/>
-              <a:buChar char="•"/>
-            </a:pPr>
-            <a:r>
-              <a:rPr lang="en-US" sz="1000" dirty="0">
+              </a:rPr>
+              <a:t>Diagrams  (open in app.diagrams.net):</a:t>
+            </a:r>
+          </a:p>
+        </p:txBody>
+      </p:sp>
+      <p:sp>
+        <p:nvSpPr>
+          <p:cNvPr id="7" name="TextBox 6"/>
+          <p:cNvSpPr txBox="1"/>
+          <p:nvPr/>
+        </p:nvSpPr>
+        <p:spPr>
+          <a:xfrm>
+            <a:off x="502920" y="1828800"/>
+            <a:ext cx="4023359" cy="182880"/>
+          </a:xfrm>
+          <a:prstGeom prst="rect">
+            <a:avLst/>
+          </a:prstGeom>
+          <a:noFill/>
+        </p:spPr>
+        <p:txBody>
+          <a:bodyPr wrap="none" tIns="0" bIns="0">
+            <a:spAutoFit/>
+          </a:bodyPr>
+          <a:lstStyle/>
+          <a:p>
+            <a:pPr algn="l"/>
+            <a:r>
+              <a:rPr sz="900" b="0" i="0">
                 <a:solidFill>
-                  <a:srgbClr val="333333"/>
+                  <a:srgbClr val="5A6680"/>
                 </a:solidFill>
-                <a:latin typeface="Calibri"/>
-              </a:rPr>
-              <a:t>Product Requirements (R1–R25) · PM/1802274</a:t>
-            </a:r>
-          </a:p>
-          <a:p>
-            <a:pPr marL="114300" indent="-114300">
-              <a:lnSpc>
-                <a:spcPct val="110000"/>
-              </a:lnSpc>
-              <a:buFont typeface="Arial"/>
-              <a:buChar char="•"/>
-            </a:pPr>
-            <a:r>
-              <a:rPr lang="en-US" sz="1000" dirty="0">
+              </a:rPr>
+              <a:t>• </a:t>
+            </a:r>
+            <a:r>
+              <a:rPr sz="900" b="0" u="sng">
                 <a:solidFill>
-                  <a:srgbClr val="333333"/>
+                  <a:srgbClr val="0563C1"/>
                 </a:solidFill>
-                <a:latin typeface="Calibri"/>
-              </a:rPr>
-              <a:t>Dataverse Schema (8 tables) · PM/1802251</a:t>
-            </a:r>
-          </a:p>
-          <a:p>
-            <a:pPr marL="114300" indent="-114300">
-              <a:lnSpc>
-                <a:spcPct val="110000"/>
-              </a:lnSpc>
-              <a:buFont typeface="Arial"/>
-              <a:buChar char="•"/>
-            </a:pPr>
-            <a:r>
-              <a:rPr lang="en-US" sz="1000" dirty="0">
+                <a:hlinkClick r:id="rId4"/>
+              </a:rPr>
+              <a:t>02_logical_architecture.drawio  ·  C4 Level 2 swimlanes</a:t>
+            </a:r>
+          </a:p>
+        </p:txBody>
+      </p:sp>
+      <p:sp>
+        <p:nvSpPr>
+          <p:cNvPr id="8" name="TextBox 7"/>
+          <p:cNvSpPr txBox="1"/>
+          <p:nvPr/>
+        </p:nvSpPr>
+        <p:spPr>
+          <a:xfrm>
+            <a:off x="502920" y="2029968"/>
+            <a:ext cx="4023359" cy="182880"/>
+          </a:xfrm>
+          <a:prstGeom prst="rect">
+            <a:avLst/>
+          </a:prstGeom>
+          <a:noFill/>
+        </p:spPr>
+        <p:txBody>
+          <a:bodyPr wrap="none" tIns="0" bIns="0">
+            <a:spAutoFit/>
+          </a:bodyPr>
+          <a:lstStyle/>
+          <a:p>
+            <a:pPr algn="l"/>
+            <a:r>
+              <a:rPr sz="900" b="0" i="0">
                 <a:solidFill>
-                  <a:srgbClr val="333333"/>
+                  <a:srgbClr val="5A6680"/>
                 </a:solidFill>
-                <a:latin typeface="Calibri"/>
-              </a:rPr>
-              <a:t>Architecture (4 layers) · PM/1769476</a:t>
-            </a:r>
-          </a:p>
-          <a:p>
-            <a:pPr marL="114300" indent="-114300">
-              <a:lnSpc>
-                <a:spcPct val="110000"/>
-              </a:lnSpc>
-              <a:buFont typeface="Arial"/>
-              <a:buChar char="•"/>
-            </a:pPr>
-            <a:r>
-              <a:rPr lang="en-US" sz="1000" dirty="0">
+              </a:rPr>
+              <a:t>• </a:t>
+            </a:r>
+            <a:r>
+              <a:rPr sz="900" b="0" u="sng">
                 <a:solidFill>
-                  <a:srgbClr val="333333"/>
+                  <a:srgbClr val="0563C1"/>
                 </a:solidFill>
-                <a:latin typeface="Calibri"/>
-              </a:rPr>
-              <a:t>Architectural Decisions Log (17+ ADRs) · PM/2097154</a:t>
-            </a:r>
-          </a:p>
-          <a:p>
-            <a:pPr marL="114300" indent="-114300">
-              <a:lnSpc>
-                <a:spcPct val="110000"/>
-              </a:lnSpc>
-              <a:buFont typeface="Arial"/>
-              <a:buChar char="•"/>
-            </a:pPr>
-            <a:r>
-              <a:rPr lang="en-US" sz="1000" dirty="0">
+                <a:hlinkClick r:id="rId5"/>
+              </a:rPr>
+              <a:t>03_er_diagram.drawio  ·  8 entities + relationships</a:t>
+            </a:r>
+          </a:p>
+        </p:txBody>
+      </p:sp>
+      <p:sp>
+        <p:nvSpPr>
+          <p:cNvPr id="9" name="TextBox 8"/>
+          <p:cNvSpPr txBox="1"/>
+          <p:nvPr/>
+        </p:nvSpPr>
+        <p:spPr>
+          <a:xfrm>
+            <a:off x="502920" y="2231136"/>
+            <a:ext cx="4023359" cy="182880"/>
+          </a:xfrm>
+          <a:prstGeom prst="rect">
+            <a:avLst/>
+          </a:prstGeom>
+          <a:noFill/>
+        </p:spPr>
+        <p:txBody>
+          <a:bodyPr wrap="none" tIns="0" bIns="0">
+            <a:spAutoFit/>
+          </a:bodyPr>
+          <a:lstStyle/>
+          <a:p>
+            <a:pPr algn="l"/>
+            <a:r>
+              <a:rPr sz="900" b="0" i="0">
                 <a:solidFill>
-                  <a:srgbClr val="333333"/>
+                  <a:srgbClr val="5A6680"/>
                 </a:solidFill>
-                <a:latin typeface="Calibri"/>
-              </a:rPr>
-              <a:t>Intake Agent FNOL Spec · PM/1638411</a:t>
-            </a:r>
-          </a:p>
-          <a:p>
-            <a:pPr marL="0" indent="0">
-              <a:spcBef>
-                <a:spcPts val="400"/>
-              </a:spcBef>
-              <a:spcAft>
-                <a:spcPts val="150"/>
-              </a:spcAft>
-              <a:buNone/>
-            </a:pPr>
-            <a:r>
-              <a:rPr lang="en-US" sz="1100" b="1" dirty="0">
+              </a:rPr>
+              <a:t>• </a:t>
+            </a:r>
+            <a:r>
+              <a:rPr sz="900" b="0" u="sng">
                 <a:solidFill>
-                  <a:srgbClr val="0078D4"/>
+                  <a:srgbClr val="0563C1"/>
                 </a:solidFill>
-                <a:latin typeface="Calibri"/>
-              </a:rPr>
-              <a:t>Diagrams (editable in app.diagrams.net)</a:t>
-            </a:r>
-          </a:p>
-          <a:p>
-            <a:pPr marL="114300" indent="-114300">
-              <a:lnSpc>
-                <a:spcPct val="110000"/>
-              </a:lnSpc>
-              <a:buFont typeface="Arial"/>
-              <a:buChar char="•"/>
-            </a:pPr>
-            <a:r>
-              <a:rPr lang="en-US" sz="1000" dirty="0">
+                <a:hlinkClick r:id="rId6"/>
+              </a:rPr>
+              <a:t>04_assignment_flows.drawio  ·  Handler + Vendor engines</a:t>
+            </a:r>
+          </a:p>
+        </p:txBody>
+      </p:sp>
+      <p:sp>
+        <p:nvSpPr>
+          <p:cNvPr id="10" name="TextBox 9"/>
+          <p:cNvSpPr txBox="1"/>
+          <p:nvPr/>
+        </p:nvSpPr>
+        <p:spPr>
+          <a:xfrm>
+            <a:off x="502920" y="2432304"/>
+            <a:ext cx="4023359" cy="182880"/>
+          </a:xfrm>
+          <a:prstGeom prst="rect">
+            <a:avLst/>
+          </a:prstGeom>
+          <a:noFill/>
+        </p:spPr>
+        <p:txBody>
+          <a:bodyPr wrap="none" tIns="0" bIns="0">
+            <a:spAutoFit/>
+          </a:bodyPr>
+          <a:lstStyle/>
+          <a:p>
+            <a:pPr algn="l"/>
+            <a:r>
+              <a:rPr sz="900" b="0" i="0">
                 <a:solidFill>
-                  <a:srgbClr val="333333"/>
+                  <a:srgbClr val="5A6680"/>
                 </a:solidFill>
-                <a:latin typeface="Calibri"/>
-              </a:rPr>
-              <a:t>02_logical_architecture.drawio — C4 Level 2</a:t>
-            </a:r>
-          </a:p>
-          <a:p>
-            <a:pPr marL="114300" indent="-114300">
-              <a:lnSpc>
-                <a:spcPct val="110000"/>
-              </a:lnSpc>
-              <a:buFont typeface="Arial"/>
-              <a:buChar char="•"/>
-            </a:pPr>
-            <a:r>
-              <a:rPr lang="en-US" sz="1000" dirty="0">
+              </a:rPr>
+              <a:t>• </a:t>
+            </a:r>
+            <a:r>
+              <a:rPr sz="900" b="0" u="sng">
                 <a:solidFill>
-                  <a:srgbClr val="333333"/>
+                  <a:srgbClr val="0563C1"/>
                 </a:solidFill>
-                <a:latin typeface="Calibri"/>
-              </a:rPr>
-              <a:t>03_er_diagram.drawio — 8 entities</a:t>
-            </a:r>
-          </a:p>
-          <a:p>
-            <a:pPr marL="114300" indent="-114300">
-              <a:lnSpc>
-                <a:spcPct val="110000"/>
-              </a:lnSpc>
-              <a:buFont typeface="Arial"/>
-              <a:buChar char="•"/>
-            </a:pPr>
-            <a:r>
-              <a:rPr lang="en-US" sz="1000" dirty="0">
+                <a:hlinkClick r:id="rId7"/>
+              </a:rPr>
+              <a:t>05_blueprint_flow.drawio  ·  half-slide solution flow</a:t>
+            </a:r>
+          </a:p>
+        </p:txBody>
+      </p:sp>
+      <p:sp>
+        <p:nvSpPr>
+          <p:cNvPr id="11" name="TextBox 10"/>
+          <p:cNvSpPr txBox="1"/>
+          <p:nvPr/>
+        </p:nvSpPr>
+        <p:spPr>
+          <a:xfrm>
+            <a:off x="502920" y="2633472"/>
+            <a:ext cx="4023359" cy="182880"/>
+          </a:xfrm>
+          <a:prstGeom prst="rect">
+            <a:avLst/>
+          </a:prstGeom>
+          <a:noFill/>
+        </p:spPr>
+        <p:txBody>
+          <a:bodyPr wrap="none" tIns="0" bIns="0">
+            <a:spAutoFit/>
+          </a:bodyPr>
+          <a:lstStyle/>
+          <a:p>
+            <a:pPr algn="l"/>
+            <a:r>
+              <a:rPr sz="900" b="0" i="0">
                 <a:solidFill>
-                  <a:srgbClr val="333333"/>
+                  <a:srgbClr val="5A6680"/>
                 </a:solidFill>
-                <a:latin typeface="Calibri"/>
-              </a:rPr>
-              <a:t>04_assignment_flows.drawio — Handler + Vendor engines</a:t>
-            </a:r>
-          </a:p>
-          <a:p>
-            <a:pPr marL="0" indent="0">
-              <a:spcBef>
-                <a:spcPts val="400"/>
-              </a:spcBef>
-              <a:spcAft>
-                <a:spcPts val="150"/>
-              </a:spcAft>
-              <a:buNone/>
-            </a:pPr>
-            <a:r>
-              <a:rPr lang="en-US" sz="1100" b="1" dirty="0">
+              </a:rPr>
+              <a:t>• </a:t>
+            </a:r>
+            <a:r>
+              <a:rPr sz="900" b="0" u="sng">
                 <a:solidFill>
-                  <a:srgbClr val="0078D4"/>
+                  <a:srgbClr val="0563C1"/>
                 </a:solidFill>
-                <a:latin typeface="Calibri"/>
-              </a:rPr>
-              <a:t>Schema</a:t>
-            </a:r>
-          </a:p>
-          <a:p>
-            <a:pPr marL="114300" indent="-114300">
-              <a:lnSpc>
-                <a:spcPct val="110000"/>
-              </a:lnSpc>
-              <a:buFont typeface="Arial"/>
-              <a:buChar char="•"/>
-            </a:pPr>
-            <a:r>
-              <a:rPr lang="en-US" sz="1000" dirty="0">
+                <a:hlinkClick r:id="rId8"/>
+              </a:rPr>
+              <a:t>06_agent_architecture.drawio  ·  6 agents, parallel pattern</a:t>
+            </a:r>
+          </a:p>
+        </p:txBody>
+      </p:sp>
+      <p:sp>
+        <p:nvSpPr>
+          <p:cNvPr id="12" name="TextBox 11"/>
+          <p:cNvSpPr txBox="1"/>
+          <p:nvPr/>
+        </p:nvSpPr>
+        <p:spPr>
+          <a:xfrm>
+            <a:off x="365760" y="2907792"/>
+            <a:ext cx="4160520" cy="228600"/>
+          </a:xfrm>
+          <a:prstGeom prst="rect">
+            <a:avLst/>
+          </a:prstGeom>
+          <a:noFill/>
+        </p:spPr>
+        <p:txBody>
+          <a:bodyPr wrap="none" tIns="0">
+            <a:spAutoFit/>
+          </a:bodyPr>
+          <a:lstStyle/>
+          <a:p>
+            <a:pPr algn="l"/>
+            <a:r>
+              <a:rPr sz="1000" b="1" i="0">
                 <a:solidFill>
-                  <a:srgbClr val="333333"/>
+                  <a:srgbClr val="0A2540"/>
                 </a:solidFill>
-                <a:latin typeface="Calibri"/>
-              </a:rPr>
-              <a:t>glassbox_schema.csv — logical + physical names</a:t>
-            </a:r>
-          </a:p>
-          <a:p>
-            <a:pPr marL="114300" indent="-114300">
-              <a:lnSpc>
-                <a:spcPct val="110000"/>
-              </a:lnSpc>
-              <a:buFont typeface="Arial"/>
-              <a:buChar char="•"/>
-            </a:pPr>
-            <a:r>
-              <a:rPr lang="en-US" sz="1000" dirty="0">
+              </a:rPr>
+              <a:t>Schema files:</a:t>
+            </a:r>
+          </a:p>
+        </p:txBody>
+      </p:sp>
+      <p:sp>
+        <p:nvSpPr>
+          <p:cNvPr id="13" name="TextBox 12"/>
+          <p:cNvSpPr txBox="1"/>
+          <p:nvPr/>
+        </p:nvSpPr>
+        <p:spPr>
+          <a:xfrm>
+            <a:off x="502920" y="3136392"/>
+            <a:ext cx="4023359" cy="182880"/>
+          </a:xfrm>
+          <a:prstGeom prst="rect">
+            <a:avLst/>
+          </a:prstGeom>
+          <a:noFill/>
+        </p:spPr>
+        <p:txBody>
+          <a:bodyPr wrap="none" tIns="0" bIns="0">
+            <a:spAutoFit/>
+          </a:bodyPr>
+          <a:lstStyle/>
+          <a:p>
+            <a:pPr algn="l"/>
+            <a:r>
+              <a:rPr sz="900" b="0" i="0">
                 <a:solidFill>
-                  <a:srgbClr val="333333"/>
+                  <a:srgbClr val="5A6680"/>
                 </a:solidFill>
-                <a:latin typeface="Calibri"/>
-              </a:rPr>
-              <a:t>glassbox_schema.xlsx — 10-sheet workbook</a:t>
+              </a:rPr>
+              <a:t>• </a:t>
+            </a:r>
+            <a:r>
+              <a:rPr sz="900" b="0" u="sng">
+                <a:solidFill>
+                  <a:srgbClr val="0563C1"/>
+                </a:solidFill>
+                <a:hlinkClick r:id="rId9"/>
+              </a:rPr>
+              <a:t>glassbox_schema.csv  ·  logical + physical column names</a:t>
             </a:r>
           </a:p>
         </p:txBody>
       </p:sp>
       <p:sp>
         <p:nvSpPr>
-          <p:cNvPr id="201" name="RightCol"/>
+          <p:cNvPr id="14" name="TextBox 13"/>
           <p:cNvSpPr txBox="1"/>
           <p:nvPr/>
         </p:nvSpPr>
         <p:spPr>
           <a:xfrm>
-            <a:off x="4699000" y="914400"/>
-            <a:ext cx="4064000" cy="5842000"/>
+            <a:off x="502920" y="3337560"/>
+            <a:ext cx="4023359" cy="182880"/>
           </a:xfrm>
           <a:prstGeom prst="rect">
             <a:avLst/>
@@ -16146,264 +10422,420 @@
           <a:noFill/>
         </p:spPr>
         <p:txBody>
-          <a:bodyPr wrap="square" lIns="36000" tIns="18000" rIns="36000" bIns="18000" anchor="t"/>
+          <a:bodyPr wrap="none" tIns="0" bIns="0">
+            <a:spAutoFit/>
+          </a:bodyPr>
           <a:lstStyle/>
           <a:p>
-            <a:pPr marL="0" indent="0">
-              <a:spcBef>
-                <a:spcPts val="400"/>
-              </a:spcBef>
-              <a:spcAft>
-                <a:spcPts val="150"/>
-              </a:spcAft>
-              <a:buNone/>
-            </a:pPr>
-            <a:r>
-              <a:rPr lang="en-US" sz="1100" b="1" dirty="0">
+            <a:pPr algn="l"/>
+            <a:r>
+              <a:rPr sz="900" b="0" i="0">
                 <a:solidFill>
-                  <a:srgbClr val="0078D4"/>
+                  <a:srgbClr val="5A6680"/>
                 </a:solidFill>
-                <a:latin typeface="Calibri"/>
-              </a:rPr>
-              <a:t>Demo assets</a:t>
-            </a:r>
-          </a:p>
-          <a:p>
-            <a:pPr marL="114300" indent="-114300">
-              <a:lnSpc>
-                <a:spcPct val="110000"/>
-              </a:lnSpc>
-              <a:buFont typeface="Arial"/>
-              <a:buChar char="•"/>
-            </a:pPr>
-            <a:r>
-              <a:rPr lang="en-US" sz="1000" dirty="0">
+              </a:rPr>
+              <a:t>• </a:t>
+            </a:r>
+            <a:r>
+              <a:rPr sz="900" b="0" u="sng">
                 <a:solidFill>
-                  <a:srgbClr val="333333"/>
+                  <a:srgbClr val="0563C1"/>
                 </a:solidFill>
-                <a:latin typeface="Calibri"/>
-              </a:rPr>
-              <a:t>Live React app — Vite + Tailwind (frontend/)</a:t>
-            </a:r>
-          </a:p>
-          <a:p>
-            <a:pPr marL="114300" indent="-114300">
-              <a:lnSpc>
-                <a:spcPct val="110000"/>
-              </a:lnSpc>
-              <a:buFont typeface="Arial"/>
-              <a:buChar char="•"/>
-            </a:pPr>
-            <a:r>
-              <a:rPr lang="en-US" sz="1000" dirty="0">
+                <a:hlinkClick r:id="rId10"/>
+              </a:rPr>
+              <a:t>glassbox_schema.xlsx  ·  10-sheet color-coded workbook</a:t>
+            </a:r>
+          </a:p>
+        </p:txBody>
+      </p:sp>
+      <p:sp>
+        <p:nvSpPr>
+          <p:cNvPr id="15" name="TextBox 14"/>
+          <p:cNvSpPr txBox="1"/>
+          <p:nvPr/>
+        </p:nvSpPr>
+        <p:spPr>
+          <a:xfrm>
+            <a:off x="4663440" y="1005840"/>
+            <a:ext cx="4160520" cy="256032"/>
+          </a:xfrm>
+          <a:prstGeom prst="rect">
+            <a:avLst/>
+          </a:prstGeom>
+          <a:noFill/>
+        </p:spPr>
+        <p:txBody>
+          <a:bodyPr wrap="none" tIns="0">
+            <a:spAutoFit/>
+          </a:bodyPr>
+          <a:lstStyle/>
+          <a:p>
+            <a:pPr algn="l"/>
+            <a:r>
+              <a:rPr sz="1200" b="1" i="0">
                 <a:solidFill>
-                  <a:srgbClr val="333333"/>
+                  <a:srgbClr val="0A2540"/>
                 </a:solidFill>
-                <a:latin typeface="Calibri"/>
-              </a:rPr>
-              <a:t>Theater Mode — /handler/theater/CLM-2026-4520</a:t>
-            </a:r>
-          </a:p>
-          <a:p>
-            <a:pPr marL="0" indent="0">
-              <a:spcBef>
-                <a:spcPts val="400"/>
-              </a:spcBef>
-              <a:spcAft>
-                <a:spcPts val="150"/>
-              </a:spcAft>
-              <a:buNone/>
-            </a:pPr>
-            <a:r>
-              <a:rPr lang="en-US" sz="1100" b="1" dirty="0">
+              </a:rPr>
+              <a:t>📚  Confluence  (PM space  ·  access on request)</a:t>
+            </a:r>
+          </a:p>
+        </p:txBody>
+      </p:sp>
+      <p:sp>
+        <p:nvSpPr>
+          <p:cNvPr id="16" name="TextBox 15"/>
+          <p:cNvSpPr txBox="1"/>
+          <p:nvPr/>
+        </p:nvSpPr>
+        <p:spPr>
+          <a:xfrm>
+            <a:off x="4663440" y="1280160"/>
+            <a:ext cx="4160520" cy="228600"/>
+          </a:xfrm>
+          <a:prstGeom prst="rect">
+            <a:avLst/>
+          </a:prstGeom>
+          <a:noFill/>
+        </p:spPr>
+        <p:txBody>
+          <a:bodyPr wrap="none" tIns="0">
+            <a:spAutoFit/>
+          </a:bodyPr>
+          <a:lstStyle/>
+          <a:p>
+            <a:pPr algn="l"/>
+            <a:r>
+              <a:rPr sz="1100" b="1" u="sng">
                 <a:solidFill>
-                  <a:srgbClr val="0078D4"/>
+                  <a:srgbClr val="0563C1"/>
                 </a:solidFill>
-                <a:latin typeface="Calibri"/>
-              </a:rPr>
-              <a:t>Delivery timeline</a:t>
-            </a:r>
-          </a:p>
-          <a:p>
-            <a:pPr marL="114300" indent="-114300">
-              <a:lnSpc>
-                <a:spcPct val="110000"/>
-              </a:lnSpc>
-              <a:buFont typeface="Arial"/>
-              <a:buChar char="•"/>
-            </a:pPr>
-            <a:r>
-              <a:rPr lang="en-US" sz="1000" dirty="0">
+                <a:hlinkClick r:id="rId11"/>
+              </a:rPr>
+              <a:t>aieliteltm.atlassian.net/wiki/spaces/PM</a:t>
+            </a:r>
+          </a:p>
+        </p:txBody>
+      </p:sp>
+      <p:sp>
+        <p:nvSpPr>
+          <p:cNvPr id="17" name="TextBox 16"/>
+          <p:cNvSpPr txBox="1"/>
+          <p:nvPr/>
+        </p:nvSpPr>
+        <p:spPr>
+          <a:xfrm>
+            <a:off x="4663440" y="1600200"/>
+            <a:ext cx="4160520" cy="384048"/>
+          </a:xfrm>
+          <a:prstGeom prst="rect">
+            <a:avLst/>
+          </a:prstGeom>
+          <a:noFill/>
+        </p:spPr>
+        <p:txBody>
+          <a:bodyPr wrap="square" tIns="0" bIns="0">
+            <a:spAutoFit/>
+          </a:bodyPr>
+          <a:lstStyle/>
+          <a:p>
+            <a:pPr algn="l"/>
+            <a:r>
+              <a:rPr sz="1000" b="1" u="sng">
                 <a:solidFill>
-                  <a:srgbClr val="333333"/>
+                  <a:srgbClr val="0563C1"/>
                 </a:solidFill>
-                <a:latin typeface="Calibri"/>
-              </a:rPr>
-              <a:t>Blueprint submission — 2026-05-18</a:t>
-            </a:r>
-          </a:p>
-          <a:p>
-            <a:pPr marL="114300" indent="-114300">
-              <a:lnSpc>
-                <a:spcPct val="110000"/>
-              </a:lnSpc>
-              <a:buFont typeface="Arial"/>
-              <a:buChar char="•"/>
-            </a:pPr>
-            <a:r>
-              <a:rPr lang="en-US" sz="1000" dirty="0">
+                <a:hlinkClick r:id="rId12"/>
+              </a:rPr>
+              <a:t>Product Requirements (PRD)  ·  R1–R25</a:t>
+            </a:r>
+          </a:p>
+        </p:txBody>
+      </p:sp>
+      <p:sp>
+        <p:nvSpPr>
+          <p:cNvPr id="18" name="TextBox 17"/>
+          <p:cNvSpPr txBox="1"/>
+          <p:nvPr/>
+        </p:nvSpPr>
+        <p:spPr>
+          <a:xfrm>
+            <a:off x="4663440" y="2002536"/>
+            <a:ext cx="4160520" cy="384048"/>
+          </a:xfrm>
+          <a:prstGeom prst="rect">
+            <a:avLst/>
+          </a:prstGeom>
+          <a:noFill/>
+        </p:spPr>
+        <p:txBody>
+          <a:bodyPr wrap="square" tIns="0" bIns="0">
+            <a:spAutoFit/>
+          </a:bodyPr>
+          <a:lstStyle/>
+          <a:p>
+            <a:pPr algn="l"/>
+            <a:r>
+              <a:rPr sz="1000" b="1" u="sng">
                 <a:solidFill>
-                  <a:srgbClr val="333333"/>
+                  <a:srgbClr val="0563C1"/>
                 </a:solidFill>
-                <a:latin typeface="Calibri"/>
-              </a:rPr>
-              <a:t>Blueprint evaluation — 2026-05-25 → 05-29</a:t>
-            </a:r>
-          </a:p>
-          <a:p>
-            <a:pPr marL="114300" indent="-114300">
-              <a:lnSpc>
-                <a:spcPct val="110000"/>
-              </a:lnSpc>
-              <a:buFont typeface="Arial"/>
-              <a:buChar char="•"/>
-            </a:pPr>
-            <a:r>
-              <a:rPr lang="en-US" sz="1000" dirty="0">
+                <a:hlinkClick r:id="rId13"/>
+              </a:rPr>
+              <a:t>Dataverse Schema  ·  8 tables, slim + JSON pattern</a:t>
+            </a:r>
+          </a:p>
+        </p:txBody>
+      </p:sp>
+      <p:sp>
+        <p:nvSpPr>
+          <p:cNvPr id="19" name="TextBox 18"/>
+          <p:cNvSpPr txBox="1"/>
+          <p:nvPr/>
+        </p:nvSpPr>
+        <p:spPr>
+          <a:xfrm>
+            <a:off x="4663440" y="2404872"/>
+            <a:ext cx="4160520" cy="384048"/>
+          </a:xfrm>
+          <a:prstGeom prst="rect">
+            <a:avLst/>
+          </a:prstGeom>
+          <a:noFill/>
+        </p:spPr>
+        <p:txBody>
+          <a:bodyPr wrap="square" tIns="0" bIns="0">
+            <a:spAutoFit/>
+          </a:bodyPr>
+          <a:lstStyle/>
+          <a:p>
+            <a:pPr algn="l"/>
+            <a:r>
+              <a:rPr sz="1000" b="1" u="sng">
                 <a:solidFill>
-                  <a:srgbClr val="333333"/>
+                  <a:srgbClr val="0563C1"/>
                 </a:solidFill>
-                <a:latin typeface="Calibri"/>
-              </a:rPr>
-              <a:t>Solution build — 2026-06-01 → 06-12 (12 days)</a:t>
-            </a:r>
-          </a:p>
-          <a:p>
-            <a:pPr marL="114300" indent="-114300">
-              <a:lnSpc>
-                <a:spcPct val="110000"/>
-              </a:lnSpc>
-              <a:buFont typeface="Arial"/>
-              <a:buChar char="•"/>
-            </a:pPr>
-            <a:r>
-              <a:rPr lang="en-US" sz="1000" dirty="0">
+                <a:hlinkClick r:id="rId14"/>
+              </a:rPr>
+              <a:t>Architecture  ·  4 layers, channels → orchestration → agents → data</a:t>
+            </a:r>
+          </a:p>
+        </p:txBody>
+      </p:sp>
+      <p:sp>
+        <p:nvSpPr>
+          <p:cNvPr id="20" name="TextBox 19"/>
+          <p:cNvSpPr txBox="1"/>
+          <p:nvPr/>
+        </p:nvSpPr>
+        <p:spPr>
+          <a:xfrm>
+            <a:off x="4663440" y="2807208"/>
+            <a:ext cx="4160520" cy="384048"/>
+          </a:xfrm>
+          <a:prstGeom prst="rect">
+            <a:avLst/>
+          </a:prstGeom>
+          <a:noFill/>
+        </p:spPr>
+        <p:txBody>
+          <a:bodyPr wrap="square" tIns="0" bIns="0">
+            <a:spAutoFit/>
+          </a:bodyPr>
+          <a:lstStyle/>
+          <a:p>
+            <a:pPr algn="l"/>
+            <a:r>
+              <a:rPr sz="1000" b="1" u="sng">
                 <a:solidFill>
-                  <a:srgbClr val="333333"/>
+                  <a:srgbClr val="0563C1"/>
                 </a:solidFill>
-                <a:latin typeface="Calibri"/>
-              </a:rPr>
-              <a:t>Solution judging — 2026-06-16 → 06-24</a:t>
-            </a:r>
-          </a:p>
-          <a:p>
-            <a:pPr marL="114300" indent="-114300">
-              <a:lnSpc>
-                <a:spcPct val="110000"/>
-              </a:lnSpc>
-              <a:buFont typeface="Arial"/>
-              <a:buChar char="•"/>
-            </a:pPr>
-            <a:r>
-              <a:rPr lang="en-US" sz="1000" dirty="0">
+                <a:hlinkClick r:id="rId15"/>
+              </a:rPr>
+              <a:t>Architectural Decisions Log  ·  17+ ADRs</a:t>
+            </a:r>
+          </a:p>
+        </p:txBody>
+      </p:sp>
+      <p:sp>
+        <p:nvSpPr>
+          <p:cNvPr id="21" name="TextBox 20"/>
+          <p:cNvSpPr txBox="1"/>
+          <p:nvPr/>
+        </p:nvSpPr>
+        <p:spPr>
+          <a:xfrm>
+            <a:off x="4663440" y="3209544"/>
+            <a:ext cx="4160520" cy="384048"/>
+          </a:xfrm>
+          <a:prstGeom prst="rect">
+            <a:avLst/>
+          </a:prstGeom>
+          <a:noFill/>
+        </p:spPr>
+        <p:txBody>
+          <a:bodyPr wrap="square" tIns="0" bIns="0">
+            <a:spAutoFit/>
+          </a:bodyPr>
+          <a:lstStyle/>
+          <a:p>
+            <a:pPr algn="l"/>
+            <a:r>
+              <a:rPr sz="1000" b="1" u="sng">
                 <a:solidFill>
-                  <a:srgbClr val="333333"/>
+                  <a:srgbClr val="0563C1"/>
                 </a:solidFill>
-                <a:latin typeface="Calibri"/>
-              </a:rPr>
-              <a:t>Closure + winners — 2026-06-30 → 07-07</a:t>
-            </a:r>
-          </a:p>
-          <a:p>
-            <a:pPr marL="0" indent="0">
-              <a:spcBef>
-                <a:spcPts val="400"/>
-              </a:spcBef>
-              <a:spcAft>
-                <a:spcPts val="150"/>
-              </a:spcAft>
-              <a:buNone/>
-            </a:pPr>
-            <a:r>
-              <a:rPr lang="en-US" sz="1100" b="1" dirty="0">
+                <a:hlinkClick r:id="rId16"/>
+              </a:rPr>
+              <a:t>Intake Agent FNOL Spec  ·  11 loss types, sub-flows, escalation</a:t>
+            </a:r>
+          </a:p>
+        </p:txBody>
+      </p:sp>
+      <p:sp>
+        <p:nvSpPr>
+          <p:cNvPr id="22" name="TextBox 21"/>
+          <p:cNvSpPr txBox="1"/>
+          <p:nvPr/>
+        </p:nvSpPr>
+        <p:spPr>
+          <a:xfrm>
+            <a:off x="365760" y="4846320"/>
+            <a:ext cx="8412480" cy="256032"/>
+          </a:xfrm>
+          <a:prstGeom prst="rect">
+            <a:avLst/>
+          </a:prstGeom>
+          <a:noFill/>
+        </p:spPr>
+        <p:txBody>
+          <a:bodyPr wrap="none" tIns="0">
+            <a:spAutoFit/>
+          </a:bodyPr>
+          <a:lstStyle/>
+          <a:p>
+            <a:pPr algn="l"/>
+            <a:r>
+              <a:rPr sz="1200" b="1" i="0">
                 <a:solidFill>
-                  <a:srgbClr val="0078D4"/>
+                  <a:srgbClr val="92400E"/>
                 </a:solidFill>
-                <a:latin typeface="Calibri"/>
-              </a:rPr>
-              <a:t>Regulatory references</a:t>
-            </a:r>
-          </a:p>
-          <a:p>
-            <a:pPr marL="114300" indent="-114300">
-              <a:lnSpc>
-                <a:spcPct val="110000"/>
-              </a:lnSpc>
-              <a:buFont typeface="Arial"/>
-              <a:buChar char="•"/>
-            </a:pPr>
-            <a:r>
-              <a:rPr lang="en-US" sz="1000" dirty="0">
+              </a:rPr>
+              <a:t>🔑  How to request Confluence access</a:t>
+            </a:r>
+          </a:p>
+        </p:txBody>
+      </p:sp>
+      <p:sp>
+        <p:nvSpPr>
+          <p:cNvPr id="23" name="TextBox 22"/>
+          <p:cNvSpPr txBox="1"/>
+          <p:nvPr/>
+        </p:nvSpPr>
+        <p:spPr>
+          <a:xfrm>
+            <a:off x="365760" y="5120640"/>
+            <a:ext cx="8412480" cy="777240"/>
+          </a:xfrm>
+          <a:prstGeom prst="rect">
+            <a:avLst/>
+          </a:prstGeom>
+          <a:noFill/>
+        </p:spPr>
+        <p:txBody>
+          <a:bodyPr wrap="square" tIns="0">
+            <a:spAutoFit/>
+          </a:bodyPr>
+          <a:lstStyle/>
+          <a:p>
+            <a:pPr algn="l"/>
+            <a:r>
+              <a:rPr sz="1000" b="1" i="0">
                 <a:solidFill>
-                  <a:srgbClr val="333333"/>
+                  <a:srgbClr val="92400E"/>
                 </a:solidFill>
-                <a:latin typeface="Calibri"/>
-              </a:rPr>
-              <a:t>Colorado SB21-169 — AI/ML non-discrimination &amp; governance</a:t>
-            </a:r>
-          </a:p>
-          <a:p>
-            <a:pPr marL="114300" indent="-114300">
-              <a:lnSpc>
-                <a:spcPct val="110000"/>
-              </a:lnSpc>
-              <a:buFont typeface="Arial"/>
-              <a:buChar char="•"/>
-            </a:pPr>
-            <a:r>
-              <a:rPr lang="en-US" sz="1000" dirty="0">
+              </a:rPr>
+              <a:t>1.  </a:t>
+            </a:r>
+            <a:r>
+              <a:rPr sz="1000" b="0" i="0">
                 <a:solidFill>
-                  <a:srgbClr val="333333"/>
+                  <a:srgbClr val="0A2540"/>
                 </a:solidFill>
-                <a:latin typeface="Calibri"/>
-              </a:rPr>
-              <a:t>NAIC AI Model Bulletin (Dec 2023) — adopted by 20+ states</a:t>
-            </a:r>
-          </a:p>
-          <a:p>
-            <a:pPr marL="114300" indent="-114300">
-              <a:lnSpc>
-                <a:spcPct val="110000"/>
-              </a:lnSpc>
-              <a:buFont typeface="Arial"/>
-              <a:buChar char="•"/>
-            </a:pPr>
-            <a:r>
-              <a:rPr lang="en-US" sz="1000" dirty="0">
+              </a:rPr>
+              <a:t>Open </a:t>
+            </a:r>
+            <a:r>
+              <a:rPr sz="1000" b="0" u="sng">
                 <a:solidFill>
-                  <a:srgbClr val="333333"/>
+                  <a:srgbClr val="0563C1"/>
                 </a:solidFill>
-                <a:latin typeface="Calibri"/>
-              </a:rPr>
-              <a:t>NY DFS Circular Letter No. 7 (2024) — AI documentation</a:t>
-            </a:r>
-          </a:p>
-          <a:p>
-            <a:pPr marL="114300" indent="-114300">
-              <a:lnSpc>
-                <a:spcPct val="110000"/>
-              </a:lnSpc>
-              <a:buFont typeface="Arial"/>
-              <a:buChar char="•"/>
-            </a:pPr>
-            <a:r>
-              <a:rPr lang="en-US" sz="1000" dirty="0">
+                <a:hlinkClick r:id="rId11"/>
+              </a:rPr>
+              <a:t>aieliteltm.atlassian.net/wiki/spaces/PM</a:t>
+            </a:r>
+            <a:r>
+              <a:rPr sz="1000" b="0" i="0">
                 <a:solidFill>
-                  <a:srgbClr val="333333"/>
+                  <a:srgbClr val="0A2540"/>
                 </a:solidFill>
-                <a:latin typeface="Calibri"/>
-              </a:rPr>
-              <a:t>CA AB 2930 (pending) — algorithmic transparency</a:t>
+              </a:rPr>
+              <a:t>  →  Atlassian will prompt you to sign in with a Microsoft / Google / Atlassian account.</a:t>
+            </a:r>
+          </a:p>
+          <a:p>
+            <a:pPr algn="l"/>
+            <a:r>
+              <a:rPr sz="1000" b="1" i="0">
+                <a:solidFill>
+                  <a:srgbClr val="92400E"/>
+                </a:solidFill>
+              </a:rPr>
+              <a:t>2.  </a:t>
+            </a:r>
+            <a:r>
+              <a:rPr sz="1000" b="0" i="0">
+                <a:solidFill>
+                  <a:srgbClr val="0A2540"/>
+                </a:solidFill>
+              </a:rPr>
+              <a:t>Click any restricted page  →  use the "Request access" link.  Approval lands in the space admin's inbox.</a:t>
+            </a:r>
+          </a:p>
+          <a:p>
+            <a:pPr algn="l"/>
+            <a:r>
+              <a:rPr sz="1000" b="1" i="0">
+                <a:solidFill>
+                  <a:srgbClr val="92400E"/>
+                </a:solidFill>
+              </a:rPr>
+              <a:t>3.  </a:t>
+            </a:r>
+            <a:r>
+              <a:rPr sz="1000" b="0" i="0">
+                <a:solidFill>
+                  <a:srgbClr val="0A2540"/>
+                </a:solidFill>
+              </a:rPr>
+              <a:t>Faster path  —  email the team lead with your Atlassian-account email:  </a:t>
+            </a:r>
+            <a:r>
+              <a:rPr sz="1000" b="1" u="sng">
+                <a:solidFill>
+                  <a:srgbClr val="0563C1"/>
+                </a:solidFill>
+                <a:hlinkClick r:id="rId17"/>
+              </a:rPr>
+              <a:t>sameetdandawate@gmail.com</a:t>
+            </a:r>
+            <a:r>
+              <a:rPr sz="1000" b="0" i="0">
+                <a:solidFill>
+                  <a:srgbClr val="0A2540"/>
+                </a:solidFill>
+              </a:rPr>
+              <a:t>  (typical turnaround under 1 business day).</a:t>
             </a:r>
           </a:p>
         </p:txBody>
